--- a/Last/LEC/03-1_ExpSmooth.pptx
+++ b/Last/LEC/03-1_ExpSmooth.pptx
@@ -5,38 +5,39 @@
     <p:sldMasterId id="2147483648" r:id="rId1"/>
   </p:sldMasterIdLst>
   <p:notesMasterIdLst>
-    <p:notesMasterId r:id="rId31"/>
+    <p:notesMasterId r:id="rId32"/>
   </p:notesMasterIdLst>
   <p:sldIdLst>
     <p:sldId id="256" r:id="rId2"/>
     <p:sldId id="462" r:id="rId3"/>
     <p:sldId id="463" r:id="rId4"/>
-    <p:sldId id="417" r:id="rId5"/>
-    <p:sldId id="453" r:id="rId6"/>
-    <p:sldId id="414" r:id="rId7"/>
-    <p:sldId id="431" r:id="rId8"/>
-    <p:sldId id="415" r:id="rId9"/>
-    <p:sldId id="418" r:id="rId10"/>
-    <p:sldId id="426" r:id="rId11"/>
-    <p:sldId id="416" r:id="rId12"/>
-    <p:sldId id="419" r:id="rId13"/>
-    <p:sldId id="421" r:id="rId14"/>
-    <p:sldId id="434" r:id="rId15"/>
-    <p:sldId id="422" r:id="rId16"/>
-    <p:sldId id="423" r:id="rId17"/>
-    <p:sldId id="425" r:id="rId18"/>
-    <p:sldId id="427" r:id="rId19"/>
-    <p:sldId id="424" r:id="rId20"/>
-    <p:sldId id="428" r:id="rId21"/>
-    <p:sldId id="429" r:id="rId22"/>
-    <p:sldId id="430" r:id="rId23"/>
-    <p:sldId id="456" r:id="rId24"/>
-    <p:sldId id="459" r:id="rId25"/>
-    <p:sldId id="442" r:id="rId26"/>
-    <p:sldId id="443" r:id="rId27"/>
-    <p:sldId id="444" r:id="rId28"/>
-    <p:sldId id="460" r:id="rId29"/>
-    <p:sldId id="461" r:id="rId30"/>
+    <p:sldId id="464" r:id="rId5"/>
+    <p:sldId id="417" r:id="rId6"/>
+    <p:sldId id="453" r:id="rId7"/>
+    <p:sldId id="414" r:id="rId8"/>
+    <p:sldId id="431" r:id="rId9"/>
+    <p:sldId id="415" r:id="rId10"/>
+    <p:sldId id="418" r:id="rId11"/>
+    <p:sldId id="426" r:id="rId12"/>
+    <p:sldId id="416" r:id="rId13"/>
+    <p:sldId id="419" r:id="rId14"/>
+    <p:sldId id="421" r:id="rId15"/>
+    <p:sldId id="434" r:id="rId16"/>
+    <p:sldId id="422" r:id="rId17"/>
+    <p:sldId id="423" r:id="rId18"/>
+    <p:sldId id="425" r:id="rId19"/>
+    <p:sldId id="427" r:id="rId20"/>
+    <p:sldId id="424" r:id="rId21"/>
+    <p:sldId id="428" r:id="rId22"/>
+    <p:sldId id="429" r:id="rId23"/>
+    <p:sldId id="430" r:id="rId24"/>
+    <p:sldId id="456" r:id="rId25"/>
+    <p:sldId id="459" r:id="rId26"/>
+    <p:sldId id="442" r:id="rId27"/>
+    <p:sldId id="443" r:id="rId28"/>
+    <p:sldId id="444" r:id="rId29"/>
+    <p:sldId id="460" r:id="rId30"/>
+    <p:sldId id="461" r:id="rId31"/>
   </p:sldIdLst>
   <p:sldSz cx="12192000" cy="6858000"/>
   <p:notesSz cx="6858000" cy="9144000"/>
@@ -143,6 +144,7 @@
             <p14:sldId id="256"/>
             <p14:sldId id="462"/>
             <p14:sldId id="463"/>
+            <p14:sldId id="464"/>
             <p14:sldId id="417"/>
             <p14:sldId id="453"/>
             <p14:sldId id="414"/>
@@ -262,7 +264,7 @@
           <a:p>
             <a:fld id="{C730246F-5962-E14A-AAF2-985CCFDAC345}" type="datetimeFigureOut">
               <a:rPr lang="ru-RU" smtClean="0"/>
-              <a:t>12.03.2026</a:t>
+              <a:t>28.04.2026</a:t>
             </a:fld>
             <a:endParaRPr lang="ru-RU"/>
           </a:p>
@@ -594,7 +596,7 @@
           <a:p>
             <a:fld id="{1EA4F326-5F8D-6A4F-9B75-A3402553DF5F}" type="slidenum">
               <a:rPr lang="ru-RU" smtClean="0"/>
-              <a:t>4</a:t>
+              <a:t>5</a:t>
             </a:fld>
             <a:endParaRPr lang="ru-RU"/>
           </a:p>
@@ -682,7 +684,7 @@
           <a:p>
             <a:fld id="{1EA4F326-5F8D-6A4F-9B75-A3402553DF5F}" type="slidenum">
               <a:rPr lang="ru-RU" smtClean="0"/>
-              <a:t>25</a:t>
+              <a:t>26</a:t>
             </a:fld>
             <a:endParaRPr lang="ru-RU"/>
           </a:p>
@@ -766,7 +768,7 @@
           <a:p>
             <a:fld id="{1EA4F326-5F8D-6A4F-9B75-A3402553DF5F}" type="slidenum">
               <a:rPr lang="ru-RU" smtClean="0"/>
-              <a:t>5</a:t>
+              <a:t>6</a:t>
             </a:fld>
             <a:endParaRPr lang="ru-RU"/>
           </a:p>
@@ -850,7 +852,7 @@
           <a:p>
             <a:fld id="{1EA4F326-5F8D-6A4F-9B75-A3402553DF5F}" type="slidenum">
               <a:rPr lang="ru-RU" smtClean="0"/>
-              <a:t>6</a:t>
+              <a:t>7</a:t>
             </a:fld>
             <a:endParaRPr lang="ru-RU"/>
           </a:p>
@@ -934,7 +936,7 @@
           <a:p>
             <a:fld id="{1EA4F326-5F8D-6A4F-9B75-A3402553DF5F}" type="slidenum">
               <a:rPr lang="ru-RU" smtClean="0"/>
-              <a:t>7</a:t>
+              <a:t>8</a:t>
             </a:fld>
             <a:endParaRPr lang="ru-RU"/>
           </a:p>
@@ -1018,7 +1020,7 @@
           <a:p>
             <a:fld id="{1EA4F326-5F8D-6A4F-9B75-A3402553DF5F}" type="slidenum">
               <a:rPr lang="ru-RU" smtClean="0"/>
-              <a:t>8</a:t>
+              <a:t>9</a:t>
             </a:fld>
             <a:endParaRPr lang="ru-RU"/>
           </a:p>
@@ -1102,7 +1104,7 @@
           <a:p>
             <a:fld id="{1EA4F326-5F8D-6A4F-9B75-A3402553DF5F}" type="slidenum">
               <a:rPr lang="ru-RU" smtClean="0"/>
-              <a:t>9</a:t>
+              <a:t>10</a:t>
             </a:fld>
             <a:endParaRPr lang="ru-RU"/>
           </a:p>
@@ -1186,7 +1188,7 @@
           <a:p>
             <a:fld id="{1EA4F326-5F8D-6A4F-9B75-A3402553DF5F}" type="slidenum">
               <a:rPr lang="ru-RU" smtClean="0"/>
-              <a:t>10</a:t>
+              <a:t>11</a:t>
             </a:fld>
             <a:endParaRPr lang="ru-RU"/>
           </a:p>
@@ -1270,7 +1272,7 @@
           <a:p>
             <a:fld id="{1EA4F326-5F8D-6A4F-9B75-A3402553DF5F}" type="slidenum">
               <a:rPr lang="ru-RU" smtClean="0"/>
-              <a:t>11</a:t>
+              <a:t>12</a:t>
             </a:fld>
             <a:endParaRPr lang="ru-RU"/>
           </a:p>
@@ -1354,7 +1356,7 @@
           <a:p>
             <a:fld id="{1EA4F326-5F8D-6A4F-9B75-A3402553DF5F}" type="slidenum">
               <a:rPr lang="ru-RU" smtClean="0"/>
-              <a:t>12</a:t>
+              <a:t>13</a:t>
             </a:fld>
             <a:endParaRPr lang="ru-RU"/>
           </a:p>
@@ -1522,7 +1524,7 @@
           <a:p>
             <a:fld id="{44343DC6-30E4-4569-999A-C703F926F2AF}" type="datetimeFigureOut">
               <a:rPr lang="en-US" smtClean="0"/>
-              <a:t>3/12/2026</a:t>
+              <a:t>4/28/2026</a:t>
             </a:fld>
             <a:endParaRPr lang="en-US"/>
           </a:p>
@@ -1722,7 +1724,7 @@
           <a:p>
             <a:fld id="{44343DC6-30E4-4569-999A-C703F926F2AF}" type="datetimeFigureOut">
               <a:rPr lang="en-US" smtClean="0"/>
-              <a:t>3/12/2026</a:t>
+              <a:t>4/28/2026</a:t>
             </a:fld>
             <a:endParaRPr lang="en-US"/>
           </a:p>
@@ -1932,7 +1934,7 @@
           <a:p>
             <a:fld id="{44343DC6-30E4-4569-999A-C703F926F2AF}" type="datetimeFigureOut">
               <a:rPr lang="en-US" smtClean="0"/>
-              <a:t>3/12/2026</a:t>
+              <a:t>4/28/2026</a:t>
             </a:fld>
             <a:endParaRPr lang="en-US"/>
           </a:p>
@@ -2132,7 +2134,7 @@
           <a:p>
             <a:fld id="{44343DC6-30E4-4569-999A-C703F926F2AF}" type="datetimeFigureOut">
               <a:rPr lang="en-US" smtClean="0"/>
-              <a:t>3/12/2026</a:t>
+              <a:t>4/28/2026</a:t>
             </a:fld>
             <a:endParaRPr lang="en-US"/>
           </a:p>
@@ -2408,7 +2410,7 @@
           <a:p>
             <a:fld id="{44343DC6-30E4-4569-999A-C703F926F2AF}" type="datetimeFigureOut">
               <a:rPr lang="en-US" smtClean="0"/>
-              <a:t>3/12/2026</a:t>
+              <a:t>4/28/2026</a:t>
             </a:fld>
             <a:endParaRPr lang="en-US"/>
           </a:p>
@@ -2676,7 +2678,7 @@
           <a:p>
             <a:fld id="{44343DC6-30E4-4569-999A-C703F926F2AF}" type="datetimeFigureOut">
               <a:rPr lang="en-US" smtClean="0"/>
-              <a:t>3/12/2026</a:t>
+              <a:t>4/28/2026</a:t>
             </a:fld>
             <a:endParaRPr lang="en-US"/>
           </a:p>
@@ -3091,7 +3093,7 @@
           <a:p>
             <a:fld id="{44343DC6-30E4-4569-999A-C703F926F2AF}" type="datetimeFigureOut">
               <a:rPr lang="en-US" smtClean="0"/>
-              <a:t>3/12/2026</a:t>
+              <a:t>4/28/2026</a:t>
             </a:fld>
             <a:endParaRPr lang="en-US"/>
           </a:p>
@@ -3233,7 +3235,7 @@
           <a:p>
             <a:fld id="{44343DC6-30E4-4569-999A-C703F926F2AF}" type="datetimeFigureOut">
               <a:rPr lang="en-US" smtClean="0"/>
-              <a:t>3/12/2026</a:t>
+              <a:t>4/28/2026</a:t>
             </a:fld>
             <a:endParaRPr lang="en-US"/>
           </a:p>
@@ -3346,7 +3348,7 @@
           <a:p>
             <a:fld id="{44343DC6-30E4-4569-999A-C703F926F2AF}" type="datetimeFigureOut">
               <a:rPr lang="en-US" smtClean="0"/>
-              <a:t>3/12/2026</a:t>
+              <a:t>4/28/2026</a:t>
             </a:fld>
             <a:endParaRPr lang="en-US"/>
           </a:p>
@@ -3659,7 +3661,7 @@
           <a:p>
             <a:fld id="{44343DC6-30E4-4569-999A-C703F926F2AF}" type="datetimeFigureOut">
               <a:rPr lang="en-US" smtClean="0"/>
-              <a:t>3/12/2026</a:t>
+              <a:t>4/28/2026</a:t>
             </a:fld>
             <a:endParaRPr lang="en-US"/>
           </a:p>
@@ -3948,7 +3950,7 @@
           <a:p>
             <a:fld id="{44343DC6-30E4-4569-999A-C703F926F2AF}" type="datetimeFigureOut">
               <a:rPr lang="en-US" smtClean="0"/>
-              <a:t>3/12/2026</a:t>
+              <a:t>4/28/2026</a:t>
             </a:fld>
             <a:endParaRPr lang="en-US"/>
           </a:p>
@@ -4191,7 +4193,7 @@
           <a:p>
             <a:fld id="{44343DC6-30E4-4569-999A-C703F926F2AF}" type="datetimeFigureOut">
               <a:rPr lang="en-US" smtClean="0"/>
-              <a:t>3/12/2026</a:t>
+              <a:t>4/28/2026</a:t>
             </a:fld>
             <a:endParaRPr lang="en-US"/>
           </a:p>
@@ -4707,6 +4709,1331 @@
         </p:nvSpPr>
         <p:spPr>
           <a:xfrm>
+            <a:off x="226957" y="93605"/>
+            <a:ext cx="11802295" cy="933115"/>
+          </a:xfrm>
+        </p:spPr>
+        <p:txBody>
+          <a:bodyPr>
+            <a:normAutofit/>
+          </a:bodyPr>
+          <a:lstStyle/>
+          <a:p>
+            <a:pPr algn="ctr"/>
+            <a:r>
+              <a:rPr lang="ru-RU" sz="3200" b="1" dirty="0"/>
+              <a:t>Модель </a:t>
+            </a:r>
+            <a:r>
+              <a:rPr lang="en-US" sz="3200" b="1" dirty="0"/>
+              <a:t>Holt</a:t>
+            </a:r>
+            <a:r>
+              <a:rPr lang="ru-RU" sz="3200" b="1" dirty="0"/>
+              <a:t>-</a:t>
+            </a:r>
+            <a:r>
+              <a:rPr lang="en-US" sz="3200" b="1" dirty="0"/>
+              <a:t>Winters </a:t>
+            </a:r>
+            <a:r>
+              <a:rPr lang="ru-RU" sz="3200" b="1" dirty="0"/>
+              <a:t> - тройное экспоненциальное сглаживание</a:t>
+            </a:r>
+            <a:endParaRPr lang="ru-RU" sz="3600" b="1" dirty="0"/>
+          </a:p>
+        </p:txBody>
+      </p:sp>
+      <mc:AlternateContent xmlns:mc="http://schemas.openxmlformats.org/markup-compatibility/2006" xmlns:a14="http://schemas.microsoft.com/office/drawing/2010/main">
+        <mc:Choice Requires="a14">
+          <p:sp>
+            <p:nvSpPr>
+              <p:cNvPr id="3" name="Объект 2">
+                <a:extLst>
+                  <a:ext uri="{FF2B5EF4-FFF2-40B4-BE49-F238E27FC236}">
+                    <a16:creationId xmlns:a16="http://schemas.microsoft.com/office/drawing/2014/main" id="{9CFDC76D-90F0-4FD7-8BA6-954D6D2E6FFD}"/>
+                  </a:ext>
+                </a:extLst>
+              </p:cNvPr>
+              <p:cNvSpPr>
+                <a:spLocks noGrp="1"/>
+              </p:cNvSpPr>
+              <p:nvPr>
+                <p:ph idx="1"/>
+              </p:nvPr>
+            </p:nvSpPr>
+            <p:spPr>
+              <a:xfrm>
+                <a:off x="226957" y="817117"/>
+                <a:ext cx="11791949" cy="5502274"/>
+              </a:xfrm>
+            </p:spPr>
+            <p:txBody>
+              <a:bodyPr>
+                <a:normAutofit/>
+              </a:bodyPr>
+              <a:lstStyle/>
+              <a:p>
+                <a:pPr marL="0" indent="0">
+                  <a:buNone/>
+                </a:pPr>
+                <a:r>
+                  <a:rPr lang="ru-RU" sz="2200" dirty="0"/>
+                  <a:t>Пусть существуют быстрые изменения с известным периодом </a:t>
+                </a:r>
+                <a14:m>
+                  <m:oMath xmlns:m="http://schemas.openxmlformats.org/officeDocument/2006/math">
+                    <m:r>
+                      <a:rPr lang="en-US" sz="2200" b="0" i="1" dirty="0" smtClean="0">
+                        <a:latin typeface="Cambria Math" panose="02040503050406030204" pitchFamily="18" charset="0"/>
+                      </a:rPr>
+                      <m:t>𝑚</m:t>
+                    </m:r>
+                  </m:oMath>
+                </a14:m>
+                <a:r>
+                  <a:rPr lang="en-US" sz="2200" dirty="0"/>
+                  <a:t> </a:t>
+                </a:r>
+                <a:r>
+                  <a:rPr lang="ru-RU" sz="2200" dirty="0"/>
+                  <a:t>(сезонность). Тогда для точек одной фазы (удаленных на </a:t>
+                </a:r>
+                <a14:m>
+                  <m:oMath xmlns:m="http://schemas.openxmlformats.org/officeDocument/2006/math">
+                    <m:r>
+                      <a:rPr lang="en-US" sz="2200" b="0" i="1" dirty="0" smtClean="0">
+                        <a:latin typeface="Cambria Math" panose="02040503050406030204" pitchFamily="18" charset="0"/>
+                      </a:rPr>
+                      <m:t>𝑚</m:t>
+                    </m:r>
+                  </m:oMath>
+                </a14:m>
+                <a:r>
+                  <a:rPr lang="en-US" sz="2200" dirty="0"/>
+                  <a:t>) </a:t>
+                </a:r>
+                <a:r>
+                  <a:rPr lang="ru-RU" sz="2200" dirty="0"/>
+                  <a:t>введем компоненты сглаживания.</a:t>
+                </a:r>
+                <a:endParaRPr lang="en-US" sz="2200" dirty="0"/>
+              </a:p>
+              <a:p>
+                <a:pPr marL="0" indent="0">
+                  <a:buNone/>
+                </a:pPr>
+                <a14:m>
+                  <m:oMathPara xmlns:m="http://schemas.openxmlformats.org/officeDocument/2006/math">
+                    <m:oMathParaPr>
+                      <m:jc m:val="centerGroup"/>
+                    </m:oMathParaPr>
+                    <m:oMath xmlns:m="http://schemas.openxmlformats.org/officeDocument/2006/math">
+                      <m:d>
+                        <m:dPr>
+                          <m:begChr m:val="{"/>
+                          <m:endChr m:val=""/>
+                          <m:ctrlPr>
+                            <a:rPr lang="en-US" sz="2200" i="1" smtClean="0">
+                              <a:latin typeface="Cambria Math" panose="02040503050406030204" pitchFamily="18" charset="0"/>
+                            </a:rPr>
+                          </m:ctrlPr>
+                        </m:dPr>
+                        <m:e>
+                          <m:eqArr>
+                            <m:eqArrPr>
+                              <m:ctrlPr>
+                                <a:rPr lang="en-US" sz="2200" i="1" smtClean="0">
+                                  <a:latin typeface="Cambria Math" panose="02040503050406030204" pitchFamily="18" charset="0"/>
+                                </a:rPr>
+                              </m:ctrlPr>
+                            </m:eqArrPr>
+                            <m:e>
+                              <m:sSub>
+                                <m:sSubPr>
+                                  <m:ctrlPr>
+                                    <a:rPr lang="en-US" sz="2200" i="1">
+                                      <a:latin typeface="Cambria Math" panose="02040503050406030204" pitchFamily="18" charset="0"/>
+                                    </a:rPr>
+                                  </m:ctrlPr>
+                                </m:sSubPr>
+                                <m:e>
+                                  <m:acc>
+                                    <m:accPr>
+                                      <m:chr m:val="̂"/>
+                                      <m:ctrlPr>
+                                        <a:rPr lang="en-US" sz="2200" i="1">
+                                          <a:latin typeface="Cambria Math" panose="02040503050406030204" pitchFamily="18" charset="0"/>
+                                        </a:rPr>
+                                      </m:ctrlPr>
+                                    </m:accPr>
+                                    <m:e>
+                                      <m:r>
+                                        <a:rPr lang="en-US" sz="2200" i="1">
+                                          <a:latin typeface="Cambria Math" panose="02040503050406030204" pitchFamily="18" charset="0"/>
+                                        </a:rPr>
+                                        <m:t>𝑦</m:t>
+                                      </m:r>
+                                    </m:e>
+                                  </m:acc>
+                                </m:e>
+                                <m:sub>
+                                  <m:r>
+                                    <a:rPr lang="en-US" sz="2200" i="1">
+                                      <a:latin typeface="Cambria Math" panose="02040503050406030204" pitchFamily="18" charset="0"/>
+                                    </a:rPr>
+                                    <m:t>𝑛</m:t>
+                                  </m:r>
+                                  <m:r>
+                                    <a:rPr lang="en-US" sz="2200" i="1">
+                                      <a:latin typeface="Cambria Math" panose="02040503050406030204" pitchFamily="18" charset="0"/>
+                                    </a:rPr>
+                                    <m:t>+</m:t>
+                                  </m:r>
+                                  <m:r>
+                                    <a:rPr lang="en-US" sz="2200" b="0" i="1" smtClean="0">
+                                      <a:latin typeface="Cambria Math" panose="02040503050406030204" pitchFamily="18" charset="0"/>
+                                    </a:rPr>
+                                    <m:t>h</m:t>
+                                  </m:r>
+                                </m:sub>
+                              </m:sSub>
+                              <m:r>
+                                <a:rPr lang="en-US" sz="2200" i="1">
+                                  <a:latin typeface="Cambria Math" panose="02040503050406030204" pitchFamily="18" charset="0"/>
+                                </a:rPr>
+                                <m:t>=</m:t>
+                              </m:r>
+                              <m:sSub>
+                                <m:sSubPr>
+                                  <m:ctrlPr>
+                                    <a:rPr lang="en-US" sz="2200" i="1">
+                                      <a:latin typeface="Cambria Math" panose="02040503050406030204" pitchFamily="18" charset="0"/>
+                                    </a:rPr>
+                                  </m:ctrlPr>
+                                </m:sSubPr>
+                                <m:e>
+                                  <m:r>
+                                    <a:rPr lang="en-US" sz="2200" i="1">
+                                      <a:latin typeface="Cambria Math" panose="02040503050406030204" pitchFamily="18" charset="0"/>
+                                    </a:rPr>
+                                    <m:t>𝑙</m:t>
+                                  </m:r>
+                                </m:e>
+                                <m:sub>
+                                  <m:r>
+                                    <a:rPr lang="en-US" sz="2200" i="1">
+                                      <a:latin typeface="Cambria Math" panose="02040503050406030204" pitchFamily="18" charset="0"/>
+                                    </a:rPr>
+                                    <m:t>𝑛</m:t>
+                                  </m:r>
+                                </m:sub>
+                              </m:sSub>
+                              <m:r>
+                                <a:rPr lang="en-US" sz="2200" i="1">
+                                  <a:latin typeface="Cambria Math" panose="02040503050406030204" pitchFamily="18" charset="0"/>
+                                </a:rPr>
+                                <m:t>+</m:t>
+                              </m:r>
+                              <m:r>
+                                <a:rPr lang="en-US" sz="2200" b="0" i="1" smtClean="0">
+                                  <a:latin typeface="Cambria Math" panose="02040503050406030204" pitchFamily="18" charset="0"/>
+                                </a:rPr>
+                                <m:t>h</m:t>
+                              </m:r>
+                              <m:r>
+                                <a:rPr lang="en-US" sz="2200" b="0" i="1" smtClean="0">
+                                  <a:latin typeface="Cambria Math" panose="02040503050406030204" pitchFamily="18" charset="0"/>
+                                </a:rPr>
+                                <m:t>⋅</m:t>
+                              </m:r>
+                              <m:sSub>
+                                <m:sSubPr>
+                                  <m:ctrlPr>
+                                    <a:rPr lang="en-US" sz="2200" i="1">
+                                      <a:latin typeface="Cambria Math" panose="02040503050406030204" pitchFamily="18" charset="0"/>
+                                    </a:rPr>
+                                  </m:ctrlPr>
+                                </m:sSubPr>
+                                <m:e>
+                                  <m:r>
+                                    <a:rPr lang="en-US" sz="2200" i="1">
+                                      <a:latin typeface="Cambria Math" panose="02040503050406030204" pitchFamily="18" charset="0"/>
+                                    </a:rPr>
+                                    <m:t>𝑏</m:t>
+                                  </m:r>
+                                </m:e>
+                                <m:sub>
+                                  <m:r>
+                                    <a:rPr lang="en-US" sz="2200" i="1">
+                                      <a:latin typeface="Cambria Math" panose="02040503050406030204" pitchFamily="18" charset="0"/>
+                                    </a:rPr>
+                                    <m:t>𝑛</m:t>
+                                  </m:r>
+                                </m:sub>
+                              </m:sSub>
+                              <m:r>
+                                <a:rPr lang="ru-RU" sz="2200" b="0" i="1" smtClean="0">
+                                  <a:latin typeface="Cambria Math" panose="02040503050406030204" pitchFamily="18" charset="0"/>
+                                </a:rPr>
+                                <m:t>+</m:t>
+                              </m:r>
+                              <m:sSub>
+                                <m:sSubPr>
+                                  <m:ctrlPr>
+                                    <a:rPr lang="en-US" sz="2200" i="1">
+                                      <a:latin typeface="Cambria Math" panose="02040503050406030204" pitchFamily="18" charset="0"/>
+                                    </a:rPr>
+                                  </m:ctrlPr>
+                                </m:sSubPr>
+                                <m:e>
+                                  <m:r>
+                                    <a:rPr lang="en-US" sz="2200" i="1">
+                                      <a:latin typeface="Cambria Math" panose="02040503050406030204" pitchFamily="18" charset="0"/>
+                                    </a:rPr>
+                                    <m:t>𝑠</m:t>
+                                  </m:r>
+                                </m:e>
+                                <m:sub>
+                                  <m:r>
+                                    <a:rPr lang="en-US" sz="2200" i="1">
+                                      <a:latin typeface="Cambria Math" panose="02040503050406030204" pitchFamily="18" charset="0"/>
+                                    </a:rPr>
+                                    <m:t>𝑛</m:t>
+                                  </m:r>
+                                  <m:r>
+                                    <a:rPr lang="en-US" sz="2200" i="1">
+                                      <a:latin typeface="Cambria Math" panose="02040503050406030204" pitchFamily="18" charset="0"/>
+                                    </a:rPr>
+                                    <m:t>−</m:t>
+                                  </m:r>
+                                  <m:r>
+                                    <a:rPr lang="en-US" sz="2200" b="0" i="1" smtClean="0">
+                                      <a:latin typeface="Cambria Math" panose="02040503050406030204" pitchFamily="18" charset="0"/>
+                                    </a:rPr>
+                                    <m:t>𝑚</m:t>
+                                  </m:r>
+                                  <m:r>
+                                    <a:rPr lang="en-US" sz="2200" i="1">
+                                      <a:latin typeface="Cambria Math" panose="02040503050406030204" pitchFamily="18" charset="0"/>
+                                    </a:rPr>
+                                    <m:t>+</m:t>
+                                  </m:r>
+                                  <m:r>
+                                    <a:rPr lang="en-US" sz="2200" b="0" i="1" smtClean="0">
+                                      <a:latin typeface="Cambria Math" panose="02040503050406030204" pitchFamily="18" charset="0"/>
+                                    </a:rPr>
+                                    <m:t>∆</m:t>
+                                  </m:r>
+                                </m:sub>
+                              </m:sSub>
+                              <m:r>
+                                <a:rPr lang="en-US" sz="2200" i="1">
+                                  <a:latin typeface="Cambria Math" panose="02040503050406030204" pitchFamily="18" charset="0"/>
+                                </a:rPr>
+                                <m:t>;</m:t>
+                              </m:r>
+                              <m:r>
+                                <m:rPr>
+                                  <m:nor/>
+                                </m:rPr>
+                                <a:rPr lang="en-US" sz="2200" dirty="0"/>
+                                <m:t> </m:t>
+                              </m:r>
+                            </m:e>
+                            <m:e>
+                              <m:sSub>
+                                <m:sSubPr>
+                                  <m:ctrlPr>
+                                    <a:rPr lang="en-US" sz="2200" i="1">
+                                      <a:latin typeface="Cambria Math" panose="02040503050406030204" pitchFamily="18" charset="0"/>
+                                    </a:rPr>
+                                  </m:ctrlPr>
+                                </m:sSubPr>
+                                <m:e>
+                                  <m:r>
+                                    <a:rPr lang="en-US" sz="2200" i="1">
+                                      <a:latin typeface="Cambria Math" panose="02040503050406030204" pitchFamily="18" charset="0"/>
+                                    </a:rPr>
+                                    <m:t>𝑙</m:t>
+                                  </m:r>
+                                </m:e>
+                                <m:sub>
+                                  <m:r>
+                                    <a:rPr lang="en-US" sz="2200" i="1">
+                                      <a:latin typeface="Cambria Math" panose="02040503050406030204" pitchFamily="18" charset="0"/>
+                                    </a:rPr>
+                                    <m:t>𝑛</m:t>
+                                  </m:r>
+                                </m:sub>
+                              </m:sSub>
+                              <m:r>
+                                <a:rPr lang="en-US" sz="2200" i="1">
+                                  <a:latin typeface="Cambria Math" panose="02040503050406030204" pitchFamily="18" charset="0"/>
+                                </a:rPr>
+                                <m:t>=</m:t>
+                              </m:r>
+                              <m:r>
+                                <a:rPr lang="en-US" sz="2200" i="1">
+                                  <a:latin typeface="Cambria Math" panose="02040503050406030204" pitchFamily="18" charset="0"/>
+                                </a:rPr>
+                                <m:t>𝛼</m:t>
+                              </m:r>
+                              <m:sSub>
+                                <m:sSubPr>
+                                  <m:ctrlPr>
+                                    <a:rPr lang="en-US" sz="2200" i="1">
+                                      <a:latin typeface="Cambria Math" panose="02040503050406030204" pitchFamily="18" charset="0"/>
+                                    </a:rPr>
+                                  </m:ctrlPr>
+                                </m:sSubPr>
+                                <m:e>
+                                  <m:r>
+                                    <a:rPr lang="en-US" sz="2200" i="1">
+                                      <a:latin typeface="Cambria Math" panose="02040503050406030204" pitchFamily="18" charset="0"/>
+                                    </a:rPr>
+                                    <m:t>𝑦</m:t>
+                                  </m:r>
+                                </m:e>
+                                <m:sub>
+                                  <m:r>
+                                    <a:rPr lang="en-US" sz="2200" i="1">
+                                      <a:latin typeface="Cambria Math" panose="02040503050406030204" pitchFamily="18" charset="0"/>
+                                    </a:rPr>
+                                    <m:t>𝑛</m:t>
+                                  </m:r>
+                                </m:sub>
+                              </m:sSub>
+                              <m:r>
+                                <a:rPr lang="en-US" sz="2200" i="1">
+                                  <a:latin typeface="Cambria Math" panose="02040503050406030204" pitchFamily="18" charset="0"/>
+                                </a:rPr>
+                                <m:t>+</m:t>
+                              </m:r>
+                              <m:d>
+                                <m:dPr>
+                                  <m:ctrlPr>
+                                    <a:rPr lang="en-US" sz="2200" i="1">
+                                      <a:latin typeface="Cambria Math" panose="02040503050406030204" pitchFamily="18" charset="0"/>
+                                    </a:rPr>
+                                  </m:ctrlPr>
+                                </m:dPr>
+                                <m:e>
+                                  <m:r>
+                                    <a:rPr lang="en-US" sz="2200" i="1">
+                                      <a:latin typeface="Cambria Math" panose="02040503050406030204" pitchFamily="18" charset="0"/>
+                                    </a:rPr>
+                                    <m:t>1−</m:t>
+                                  </m:r>
+                                  <m:r>
+                                    <a:rPr lang="en-US" sz="2200" i="1">
+                                      <a:latin typeface="Cambria Math" panose="02040503050406030204" pitchFamily="18" charset="0"/>
+                                    </a:rPr>
+                                    <m:t>𝛼</m:t>
+                                  </m:r>
+                                </m:e>
+                              </m:d>
+                              <m:d>
+                                <m:dPr>
+                                  <m:ctrlPr>
+                                    <a:rPr lang="en-US" sz="2200" i="1">
+                                      <a:latin typeface="Cambria Math" panose="02040503050406030204" pitchFamily="18" charset="0"/>
+                                    </a:rPr>
+                                  </m:ctrlPr>
+                                </m:dPr>
+                                <m:e>
+                                  <m:sSub>
+                                    <m:sSubPr>
+                                      <m:ctrlPr>
+                                        <a:rPr lang="en-US" sz="2200" i="1">
+                                          <a:latin typeface="Cambria Math" panose="02040503050406030204" pitchFamily="18" charset="0"/>
+                                        </a:rPr>
+                                      </m:ctrlPr>
+                                    </m:sSubPr>
+                                    <m:e>
+                                      <m:r>
+                                        <a:rPr lang="en-US" sz="2200" i="1">
+                                          <a:latin typeface="Cambria Math" panose="02040503050406030204" pitchFamily="18" charset="0"/>
+                                        </a:rPr>
+                                        <m:t>𝑙</m:t>
+                                      </m:r>
+                                    </m:e>
+                                    <m:sub>
+                                      <m:r>
+                                        <a:rPr lang="en-US" sz="2200" i="1">
+                                          <a:latin typeface="Cambria Math" panose="02040503050406030204" pitchFamily="18" charset="0"/>
+                                        </a:rPr>
+                                        <m:t>𝑛</m:t>
+                                      </m:r>
+                                      <m:r>
+                                        <a:rPr lang="en-US" sz="2200" i="1">
+                                          <a:latin typeface="Cambria Math" panose="02040503050406030204" pitchFamily="18" charset="0"/>
+                                        </a:rPr>
+                                        <m:t>−1</m:t>
+                                      </m:r>
+                                    </m:sub>
+                                  </m:sSub>
+                                  <m:r>
+                                    <a:rPr lang="en-US" sz="2200" i="1">
+                                      <a:latin typeface="Cambria Math" panose="02040503050406030204" pitchFamily="18" charset="0"/>
+                                    </a:rPr>
+                                    <m:t>+</m:t>
+                                  </m:r>
+                                  <m:sSub>
+                                    <m:sSubPr>
+                                      <m:ctrlPr>
+                                        <a:rPr lang="en-US" sz="2200" i="1">
+                                          <a:latin typeface="Cambria Math" panose="02040503050406030204" pitchFamily="18" charset="0"/>
+                                        </a:rPr>
+                                      </m:ctrlPr>
+                                    </m:sSubPr>
+                                    <m:e>
+                                      <m:r>
+                                        <a:rPr lang="en-US" sz="2200" i="1">
+                                          <a:latin typeface="Cambria Math" panose="02040503050406030204" pitchFamily="18" charset="0"/>
+                                        </a:rPr>
+                                        <m:t>𝑏</m:t>
+                                      </m:r>
+                                    </m:e>
+                                    <m:sub>
+                                      <m:r>
+                                        <a:rPr lang="en-US" sz="2200" i="1">
+                                          <a:latin typeface="Cambria Math" panose="02040503050406030204" pitchFamily="18" charset="0"/>
+                                        </a:rPr>
+                                        <m:t>𝑛</m:t>
+                                      </m:r>
+                                      <m:r>
+                                        <a:rPr lang="en-US" sz="2200" i="1">
+                                          <a:latin typeface="Cambria Math" panose="02040503050406030204" pitchFamily="18" charset="0"/>
+                                        </a:rPr>
+                                        <m:t>−1</m:t>
+                                      </m:r>
+                                    </m:sub>
+                                  </m:sSub>
+                                </m:e>
+                              </m:d>
+                              <m:r>
+                                <a:rPr lang="ru-RU" sz="2200" b="0" i="1" smtClean="0">
+                                  <a:latin typeface="Cambria Math" panose="02040503050406030204" pitchFamily="18" charset="0"/>
+                                </a:rPr>
+                                <m:t>   (</m:t>
+                              </m:r>
+                              <m:r>
+                                <a:rPr lang="en-US" sz="2200" i="1">
+                                  <a:latin typeface="Cambria Math" panose="02040503050406030204" pitchFamily="18" charset="0"/>
+                                </a:rPr>
+                                <m:t>𝑙𝑒𝑣𝑒𝑙</m:t>
+                              </m:r>
+                              <m:r>
+                                <a:rPr lang="ru-RU" sz="2200" b="0" i="1" smtClean="0">
+                                  <a:latin typeface="Cambria Math" panose="02040503050406030204" pitchFamily="18" charset="0"/>
+                                </a:rPr>
+                                <m:t>)</m:t>
+                              </m:r>
+                            </m:e>
+                            <m:e>
+                              <m:sSub>
+                                <m:sSubPr>
+                                  <m:ctrlPr>
+                                    <a:rPr lang="en-US" sz="2200" i="1">
+                                      <a:latin typeface="Cambria Math" panose="02040503050406030204" pitchFamily="18" charset="0"/>
+                                    </a:rPr>
+                                  </m:ctrlPr>
+                                </m:sSubPr>
+                                <m:e>
+                                  <m:r>
+                                    <a:rPr lang="en-US" sz="2200" i="1">
+                                      <a:latin typeface="Cambria Math" panose="02040503050406030204" pitchFamily="18" charset="0"/>
+                                    </a:rPr>
+                                    <m:t>𝑏</m:t>
+                                  </m:r>
+                                </m:e>
+                                <m:sub>
+                                  <m:r>
+                                    <a:rPr lang="en-US" sz="2200" i="1">
+                                      <a:latin typeface="Cambria Math" panose="02040503050406030204" pitchFamily="18" charset="0"/>
+                                    </a:rPr>
+                                    <m:t>𝑛</m:t>
+                                  </m:r>
+                                </m:sub>
+                              </m:sSub>
+                              <m:r>
+                                <a:rPr lang="en-US" sz="2200" i="1">
+                                  <a:latin typeface="Cambria Math" panose="02040503050406030204" pitchFamily="18" charset="0"/>
+                                </a:rPr>
+                                <m:t>=</m:t>
+                              </m:r>
+                              <m:r>
+                                <a:rPr lang="en-US" sz="2200" i="1">
+                                  <a:latin typeface="Cambria Math" panose="02040503050406030204" pitchFamily="18" charset="0"/>
+                                </a:rPr>
+                                <m:t>𝛽</m:t>
+                              </m:r>
+                              <m:d>
+                                <m:dPr>
+                                  <m:ctrlPr>
+                                    <a:rPr lang="en-US" sz="2200" i="1">
+                                      <a:latin typeface="Cambria Math" panose="02040503050406030204" pitchFamily="18" charset="0"/>
+                                    </a:rPr>
+                                  </m:ctrlPr>
+                                </m:dPr>
+                                <m:e>
+                                  <m:sSub>
+                                    <m:sSubPr>
+                                      <m:ctrlPr>
+                                        <a:rPr lang="en-US" sz="2200" i="1">
+                                          <a:latin typeface="Cambria Math" panose="02040503050406030204" pitchFamily="18" charset="0"/>
+                                        </a:rPr>
+                                      </m:ctrlPr>
+                                    </m:sSubPr>
+                                    <m:e>
+                                      <m:r>
+                                        <a:rPr lang="en-US" sz="2200" i="1">
+                                          <a:latin typeface="Cambria Math" panose="02040503050406030204" pitchFamily="18" charset="0"/>
+                                        </a:rPr>
+                                        <m:t>𝑙</m:t>
+                                      </m:r>
+                                    </m:e>
+                                    <m:sub>
+                                      <m:r>
+                                        <a:rPr lang="en-US" sz="2200" i="1">
+                                          <a:latin typeface="Cambria Math" panose="02040503050406030204" pitchFamily="18" charset="0"/>
+                                        </a:rPr>
+                                        <m:t>𝑛</m:t>
+                                      </m:r>
+                                    </m:sub>
+                                  </m:sSub>
+                                  <m:r>
+                                    <a:rPr lang="en-US" sz="2200" i="1">
+                                      <a:latin typeface="Cambria Math" panose="02040503050406030204" pitchFamily="18" charset="0"/>
+                                    </a:rPr>
+                                    <m:t>−</m:t>
+                                  </m:r>
+                                  <m:sSub>
+                                    <m:sSubPr>
+                                      <m:ctrlPr>
+                                        <a:rPr lang="en-US" sz="2200" i="1">
+                                          <a:latin typeface="Cambria Math" panose="02040503050406030204" pitchFamily="18" charset="0"/>
+                                        </a:rPr>
+                                      </m:ctrlPr>
+                                    </m:sSubPr>
+                                    <m:e>
+                                      <m:r>
+                                        <a:rPr lang="en-US" sz="2200" i="1">
+                                          <a:latin typeface="Cambria Math" panose="02040503050406030204" pitchFamily="18" charset="0"/>
+                                        </a:rPr>
+                                        <m:t>𝑙</m:t>
+                                      </m:r>
+                                    </m:e>
+                                    <m:sub>
+                                      <m:r>
+                                        <a:rPr lang="en-US" sz="2200" i="1">
+                                          <a:latin typeface="Cambria Math" panose="02040503050406030204" pitchFamily="18" charset="0"/>
+                                        </a:rPr>
+                                        <m:t>𝑛</m:t>
+                                      </m:r>
+                                      <m:r>
+                                        <a:rPr lang="en-US" sz="2200" i="1">
+                                          <a:latin typeface="Cambria Math" panose="02040503050406030204" pitchFamily="18" charset="0"/>
+                                        </a:rPr>
+                                        <m:t>−1</m:t>
+                                      </m:r>
+                                    </m:sub>
+                                  </m:sSub>
+                                </m:e>
+                              </m:d>
+                              <m:r>
+                                <a:rPr lang="en-US" sz="2200" i="1">
+                                  <a:latin typeface="Cambria Math" panose="02040503050406030204" pitchFamily="18" charset="0"/>
+                                </a:rPr>
+                                <m:t>+</m:t>
+                              </m:r>
+                              <m:d>
+                                <m:dPr>
+                                  <m:ctrlPr>
+                                    <a:rPr lang="en-US" sz="2200" i="1">
+                                      <a:latin typeface="Cambria Math" panose="02040503050406030204" pitchFamily="18" charset="0"/>
+                                    </a:rPr>
+                                  </m:ctrlPr>
+                                </m:dPr>
+                                <m:e>
+                                  <m:r>
+                                    <a:rPr lang="en-US" sz="2200" i="1">
+                                      <a:latin typeface="Cambria Math" panose="02040503050406030204" pitchFamily="18" charset="0"/>
+                                    </a:rPr>
+                                    <m:t>1−</m:t>
+                                  </m:r>
+                                  <m:r>
+                                    <a:rPr lang="en-US" sz="2200" i="1">
+                                      <a:latin typeface="Cambria Math" panose="02040503050406030204" pitchFamily="18" charset="0"/>
+                                    </a:rPr>
+                                    <m:t>𝛽</m:t>
+                                  </m:r>
+                                </m:e>
+                              </m:d>
+                              <m:sSub>
+                                <m:sSubPr>
+                                  <m:ctrlPr>
+                                    <a:rPr lang="en-US" sz="2200" i="1">
+                                      <a:latin typeface="Cambria Math" panose="02040503050406030204" pitchFamily="18" charset="0"/>
+                                    </a:rPr>
+                                  </m:ctrlPr>
+                                </m:sSubPr>
+                                <m:e>
+                                  <m:r>
+                                    <a:rPr lang="en-US" sz="2200" i="1">
+                                      <a:latin typeface="Cambria Math" panose="02040503050406030204" pitchFamily="18" charset="0"/>
+                                    </a:rPr>
+                                    <m:t>𝑏</m:t>
+                                  </m:r>
+                                </m:e>
+                                <m:sub>
+                                  <m:r>
+                                    <a:rPr lang="en-US" sz="2200" i="1">
+                                      <a:latin typeface="Cambria Math" panose="02040503050406030204" pitchFamily="18" charset="0"/>
+                                    </a:rPr>
+                                    <m:t>𝑛</m:t>
+                                  </m:r>
+                                  <m:r>
+                                    <a:rPr lang="en-US" sz="2200" i="1">
+                                      <a:latin typeface="Cambria Math" panose="02040503050406030204" pitchFamily="18" charset="0"/>
+                                    </a:rPr>
+                                    <m:t>−1</m:t>
+                                  </m:r>
+                                </m:sub>
+                              </m:sSub>
+                              <m:r>
+                                <a:rPr lang="ru-RU" sz="2200" b="0" i="1" smtClean="0">
+                                  <a:latin typeface="Cambria Math" panose="02040503050406030204" pitchFamily="18" charset="0"/>
+                                </a:rPr>
+                                <m:t>  (</m:t>
+                              </m:r>
+                              <m:r>
+                                <a:rPr lang="en-US" sz="2200" i="1">
+                                  <a:latin typeface="Cambria Math" panose="02040503050406030204" pitchFamily="18" charset="0"/>
+                                </a:rPr>
+                                <m:t>𝑡𝑟𝑒𝑛𝑑</m:t>
+                              </m:r>
+                              <m:r>
+                                <a:rPr lang="ru-RU" sz="2200" b="0" i="1" smtClean="0">
+                                  <a:latin typeface="Cambria Math" panose="02040503050406030204" pitchFamily="18" charset="0"/>
+                                </a:rPr>
+                                <m:t>)</m:t>
+                              </m:r>
+                            </m:e>
+                            <m:e>
+                              <m:sSub>
+                                <m:sSubPr>
+                                  <m:ctrlPr>
+                                    <a:rPr lang="en-US" sz="2200" b="0" i="1" smtClean="0">
+                                      <a:latin typeface="Cambria Math" panose="02040503050406030204" pitchFamily="18" charset="0"/>
+                                    </a:rPr>
+                                  </m:ctrlPr>
+                                </m:sSubPr>
+                                <m:e>
+                                  <m:r>
+                                    <a:rPr lang="en-US" sz="2200" b="0" i="1" smtClean="0">
+                                      <a:latin typeface="Cambria Math" panose="02040503050406030204" pitchFamily="18" charset="0"/>
+                                    </a:rPr>
+                                    <m:t>𝑠</m:t>
+                                  </m:r>
+                                </m:e>
+                                <m:sub>
+                                  <m:r>
+                                    <a:rPr lang="en-US" sz="2200" b="0" i="1" smtClean="0">
+                                      <a:latin typeface="Cambria Math" panose="02040503050406030204" pitchFamily="18" charset="0"/>
+                                    </a:rPr>
+                                    <m:t>𝑛</m:t>
+                                  </m:r>
+                                </m:sub>
+                              </m:sSub>
+                              <m:r>
+                                <a:rPr lang="en-US" sz="2200" b="0" i="1" smtClean="0">
+                                  <a:latin typeface="Cambria Math" panose="02040503050406030204" pitchFamily="18" charset="0"/>
+                                </a:rPr>
+                                <m:t>=</m:t>
+                              </m:r>
+                              <m:r>
+                                <a:rPr lang="en-US" sz="2200" b="0" i="1" smtClean="0">
+                                  <a:latin typeface="Cambria Math" panose="02040503050406030204" pitchFamily="18" charset="0"/>
+                                </a:rPr>
+                                <m:t>𝛾</m:t>
+                              </m:r>
+                              <m:d>
+                                <m:dPr>
+                                  <m:ctrlPr>
+                                    <a:rPr lang="en-US" sz="2200" b="0" i="1" smtClean="0">
+                                      <a:latin typeface="Cambria Math" panose="02040503050406030204" pitchFamily="18" charset="0"/>
+                                    </a:rPr>
+                                  </m:ctrlPr>
+                                </m:dPr>
+                                <m:e>
+                                  <m:sSub>
+                                    <m:sSubPr>
+                                      <m:ctrlPr>
+                                        <a:rPr lang="en-US" sz="2200" b="0" i="1" smtClean="0">
+                                          <a:latin typeface="Cambria Math" panose="02040503050406030204" pitchFamily="18" charset="0"/>
+                                        </a:rPr>
+                                      </m:ctrlPr>
+                                    </m:sSubPr>
+                                    <m:e>
+                                      <m:r>
+                                        <a:rPr lang="en-US" sz="2200" b="0" i="1" smtClean="0">
+                                          <a:latin typeface="Cambria Math" panose="02040503050406030204" pitchFamily="18" charset="0"/>
+                                        </a:rPr>
+                                        <m:t>𝑦</m:t>
+                                      </m:r>
+                                    </m:e>
+                                    <m:sub>
+                                      <m:r>
+                                        <a:rPr lang="en-US" sz="2200" b="0" i="1" smtClean="0">
+                                          <a:latin typeface="Cambria Math" panose="02040503050406030204" pitchFamily="18" charset="0"/>
+                                        </a:rPr>
+                                        <m:t>𝑛</m:t>
+                                      </m:r>
+                                    </m:sub>
+                                  </m:sSub>
+                                  <m:r>
+                                    <a:rPr lang="en-US" sz="2200" b="0" i="1" smtClean="0">
+                                      <a:latin typeface="Cambria Math" panose="02040503050406030204" pitchFamily="18" charset="0"/>
+                                    </a:rPr>
+                                    <m:t>−</m:t>
+                                  </m:r>
+                                  <m:sSub>
+                                    <m:sSubPr>
+                                      <m:ctrlPr>
+                                        <a:rPr lang="en-US" sz="2200" b="0" i="1" smtClean="0">
+                                          <a:latin typeface="Cambria Math" panose="02040503050406030204" pitchFamily="18" charset="0"/>
+                                        </a:rPr>
+                                      </m:ctrlPr>
+                                    </m:sSubPr>
+                                    <m:e>
+                                      <m:r>
+                                        <a:rPr lang="en-US" sz="2200" b="0" i="1" smtClean="0">
+                                          <a:latin typeface="Cambria Math" panose="02040503050406030204" pitchFamily="18" charset="0"/>
+                                        </a:rPr>
+                                        <m:t>𝑙</m:t>
+                                      </m:r>
+                                    </m:e>
+                                    <m:sub>
+                                      <m:r>
+                                        <a:rPr lang="en-US" sz="2200" b="0" i="1" smtClean="0">
+                                          <a:latin typeface="Cambria Math" panose="02040503050406030204" pitchFamily="18" charset="0"/>
+                                        </a:rPr>
+                                        <m:t>𝑛</m:t>
+                                      </m:r>
+                                    </m:sub>
+                                  </m:sSub>
+                                </m:e>
+                              </m:d>
+                              <m:r>
+                                <a:rPr lang="en-US" sz="2200" b="0" i="1" smtClean="0">
+                                  <a:latin typeface="Cambria Math" panose="02040503050406030204" pitchFamily="18" charset="0"/>
+                                </a:rPr>
+                                <m:t>+</m:t>
+                              </m:r>
+                              <m:d>
+                                <m:dPr>
+                                  <m:ctrlPr>
+                                    <a:rPr lang="en-US" sz="2200" b="0" i="1" smtClean="0">
+                                      <a:latin typeface="Cambria Math" panose="02040503050406030204" pitchFamily="18" charset="0"/>
+                                    </a:rPr>
+                                  </m:ctrlPr>
+                                </m:dPr>
+                                <m:e>
+                                  <m:r>
+                                    <a:rPr lang="en-US" sz="2200" b="0" i="1" smtClean="0">
+                                      <a:latin typeface="Cambria Math" panose="02040503050406030204" pitchFamily="18" charset="0"/>
+                                    </a:rPr>
+                                    <m:t>1−</m:t>
+                                  </m:r>
+                                  <m:r>
+                                    <a:rPr lang="en-US" sz="2200" b="0" i="1" smtClean="0">
+                                      <a:latin typeface="Cambria Math" panose="02040503050406030204" pitchFamily="18" charset="0"/>
+                                    </a:rPr>
+                                    <m:t>𝛾</m:t>
+                                  </m:r>
+                                </m:e>
+                              </m:d>
+                              <m:sSub>
+                                <m:sSubPr>
+                                  <m:ctrlPr>
+                                    <a:rPr lang="en-US" sz="2200" b="0" i="1" smtClean="0">
+                                      <a:latin typeface="Cambria Math" panose="02040503050406030204" pitchFamily="18" charset="0"/>
+                                    </a:rPr>
+                                  </m:ctrlPr>
+                                </m:sSubPr>
+                                <m:e>
+                                  <m:r>
+                                    <a:rPr lang="en-US" sz="2200" b="0" i="1" smtClean="0">
+                                      <a:latin typeface="Cambria Math" panose="02040503050406030204" pitchFamily="18" charset="0"/>
+                                    </a:rPr>
+                                    <m:t>𝑠</m:t>
+                                  </m:r>
+                                </m:e>
+                                <m:sub>
+                                  <m:r>
+                                    <a:rPr lang="en-US" sz="2200" b="0" i="1" smtClean="0">
+                                      <a:latin typeface="Cambria Math" panose="02040503050406030204" pitchFamily="18" charset="0"/>
+                                    </a:rPr>
+                                    <m:t>𝑛</m:t>
+                                  </m:r>
+                                  <m:r>
+                                    <a:rPr lang="en-US" sz="2200" b="0" i="1" smtClean="0">
+                                      <a:latin typeface="Cambria Math" panose="02040503050406030204" pitchFamily="18" charset="0"/>
+                                    </a:rPr>
+                                    <m:t>−</m:t>
+                                  </m:r>
+                                  <m:r>
+                                    <a:rPr lang="en-US" sz="2200" b="0" i="1" smtClean="0">
+                                      <a:latin typeface="Cambria Math" panose="02040503050406030204" pitchFamily="18" charset="0"/>
+                                    </a:rPr>
+                                    <m:t>𝑚</m:t>
+                                  </m:r>
+                                </m:sub>
+                              </m:sSub>
+                            </m:e>
+                          </m:eqArr>
+                        </m:e>
+                      </m:d>
+                    </m:oMath>
+                  </m:oMathPara>
+                </a14:m>
+                <a:endParaRPr lang="en-US" sz="2200" dirty="0"/>
+              </a:p>
+              <a:p>
+                <a:pPr marL="0" indent="0">
+                  <a:buNone/>
+                </a:pPr>
+                <a:r>
+                  <a:rPr lang="ru-RU" sz="2000" dirty="0"/>
+                  <a:t>где </a:t>
+                </a:r>
+                <a14:m>
+                  <m:oMath xmlns:m="http://schemas.openxmlformats.org/officeDocument/2006/math">
+                    <m:r>
+                      <a:rPr lang="en-US" sz="2000" i="1">
+                        <a:latin typeface="Cambria Math" panose="02040503050406030204" pitchFamily="18" charset="0"/>
+                      </a:rPr>
+                      <m:t>𝛾</m:t>
+                    </m:r>
+                  </m:oMath>
+                </a14:m>
+                <a:r>
+                  <a:rPr lang="ru-RU" sz="2000" dirty="0"/>
+                  <a:t> – коэффициент сезонного сглаживания,</a:t>
+                </a:r>
+                <a:r>
+                  <a:rPr lang="en-US" sz="2000" dirty="0"/>
+                  <a:t> </a:t>
+                </a:r>
+                <a14:m>
+                  <m:oMath xmlns:m="http://schemas.openxmlformats.org/officeDocument/2006/math">
+                    <m:r>
+                      <a:rPr lang="en-US" sz="2000" i="1">
+                        <a:latin typeface="Cambria Math" panose="02040503050406030204" pitchFamily="18" charset="0"/>
+                      </a:rPr>
+                      <m:t>𝑚</m:t>
+                    </m:r>
+                  </m:oMath>
+                </a14:m>
+                <a:r>
+                  <a:rPr lang="en-US" sz="2000" dirty="0"/>
+                  <a:t> – </a:t>
+                </a:r>
+                <a:r>
+                  <a:rPr lang="ru-RU" sz="2000" dirty="0"/>
+                  <a:t>период сезонность,</a:t>
+                </a:r>
+                <a14:m>
+                  <m:oMath xmlns:m="http://schemas.openxmlformats.org/officeDocument/2006/math">
+                    <m:r>
+                      <a:rPr lang="en-US" sz="2000" i="1">
+                        <a:latin typeface="Cambria Math" panose="02040503050406030204" pitchFamily="18" charset="0"/>
+                      </a:rPr>
+                      <m:t>∆</m:t>
+                    </m:r>
+                    <m:r>
+                      <a:rPr lang="en-US" sz="2000" b="0" i="1" smtClean="0">
+                        <a:latin typeface="Cambria Math" panose="02040503050406030204" pitchFamily="18" charset="0"/>
+                      </a:rPr>
+                      <m:t>=</m:t>
+                    </m:r>
+                    <m:r>
+                      <a:rPr lang="en-US" sz="2000" i="1">
+                        <a:latin typeface="Cambria Math" panose="02040503050406030204" pitchFamily="18" charset="0"/>
+                      </a:rPr>
+                      <m:t>𝑑</m:t>
+                    </m:r>
+                    <m:r>
+                      <a:rPr lang="en-US" sz="2000" i="1">
+                        <a:latin typeface="Cambria Math" panose="02040503050406030204" pitchFamily="18" charset="0"/>
+                      </a:rPr>
+                      <m:t> </m:t>
+                    </m:r>
+                    <m:r>
+                      <a:rPr lang="en-US" sz="2000" i="1">
+                        <a:latin typeface="Cambria Math" panose="02040503050406030204" pitchFamily="18" charset="0"/>
+                      </a:rPr>
+                      <m:t>𝑚𝑜𝑑</m:t>
+                    </m:r>
+                    <m:r>
+                      <a:rPr lang="en-US" sz="2000" i="1">
+                        <a:latin typeface="Cambria Math" panose="02040503050406030204" pitchFamily="18" charset="0"/>
+                      </a:rPr>
+                      <m:t> </m:t>
+                    </m:r>
+                    <m:r>
+                      <a:rPr lang="en-US" sz="2000" i="1">
+                        <a:latin typeface="Cambria Math" panose="02040503050406030204" pitchFamily="18" charset="0"/>
+                      </a:rPr>
+                      <m:t>𝑚</m:t>
+                    </m:r>
+                  </m:oMath>
+                </a14:m>
+                <a:r>
+                  <a:rPr lang="ru-RU" sz="2000" dirty="0"/>
+                  <a:t> – смещение относительного последнего полного сезона в данных</a:t>
+                </a:r>
+                <a:endParaRPr lang="en-US" sz="2000" dirty="0"/>
+              </a:p>
+              <a:p>
+                <a:pPr marL="0" indent="0">
+                  <a:buNone/>
+                </a:pPr>
+                <a:endParaRPr lang="en-US" sz="2000" i="1" dirty="0">
+                  <a:latin typeface="Cambria Math" panose="02040503050406030204" pitchFamily="18" charset="0"/>
+                </a:endParaRPr>
+              </a:p>
+              <a:p>
+                <a:pPr marL="0" indent="0">
+                  <a:buNone/>
+                </a:pPr>
+                <a:endParaRPr lang="ru-RU" sz="2000" dirty="0"/>
+              </a:p>
+            </p:txBody>
+          </p:sp>
+        </mc:Choice>
+        <mc:Fallback xmlns="">
+          <p:sp>
+            <p:nvSpPr>
+              <p:cNvPr id="3" name="Объект 2">
+                <a:extLst>
+                  <a:ext uri="{FF2B5EF4-FFF2-40B4-BE49-F238E27FC236}">
+                    <a16:creationId xmlns:a16="http://schemas.microsoft.com/office/drawing/2014/main" id="{9CFDC76D-90F0-4FD7-8BA6-954D6D2E6FFD}"/>
+                  </a:ext>
+                </a:extLst>
+              </p:cNvPr>
+              <p:cNvSpPr>
+                <a:spLocks noGrp="1" noRot="1" noChangeAspect="1" noMove="1" noResize="1" noEditPoints="1" noAdjustHandles="1" noChangeArrowheads="1" noChangeShapeType="1" noTextEdit="1"/>
+              </p:cNvSpPr>
+              <p:nvPr>
+                <p:ph idx="1"/>
+              </p:nvPr>
+            </p:nvSpPr>
+            <p:spPr>
+              <a:xfrm>
+                <a:off x="226957" y="817117"/>
+                <a:ext cx="11791949" cy="5502274"/>
+              </a:xfrm>
+              <a:blipFill>
+                <a:blip r:embed="rId3"/>
+                <a:stretch>
+                  <a:fillRect l="-672" t="-1329"/>
+                </a:stretch>
+              </a:blipFill>
+            </p:spPr>
+            <p:txBody>
+              <a:bodyPr/>
+              <a:lstStyle/>
+              <a:p>
+                <a:r>
+                  <a:rPr lang="ru-RU">
+                    <a:noFill/>
+                  </a:rPr>
+                  <a:t> </a:t>
+                </a:r>
+              </a:p>
+            </p:txBody>
+          </p:sp>
+        </mc:Fallback>
+      </mc:AlternateContent>
+      <p:sp>
+        <p:nvSpPr>
+          <p:cNvPr id="5" name="Прямоугольник 4"/>
+          <p:cNvSpPr/>
+          <p:nvPr/>
+        </p:nvSpPr>
+        <p:spPr>
+          <a:xfrm>
+            <a:off x="504825" y="6488668"/>
+            <a:ext cx="9077325" cy="338554"/>
+          </a:xfrm>
+          <a:prstGeom prst="rect">
+            <a:avLst/>
+          </a:prstGeom>
+        </p:spPr>
+        <p:txBody>
+          <a:bodyPr wrap="square">
+            <a:spAutoFit/>
+          </a:bodyPr>
+          <a:lstStyle/>
+          <a:p>
+            <a:r>
+              <a:rPr lang="ru-RU" sz="1600" dirty="0"/>
+              <a:t>https://education.yandex.ru/handbook/ml/article/analitika-vremennyh-ryadov</a:t>
+            </a:r>
+          </a:p>
+        </p:txBody>
+      </p:sp>
+      <p:sp>
+        <p:nvSpPr>
+          <p:cNvPr id="6" name="Прямоугольник 5"/>
+          <p:cNvSpPr/>
+          <p:nvPr/>
+        </p:nvSpPr>
+        <p:spPr>
+          <a:xfrm>
+            <a:off x="7331127" y="6488668"/>
+            <a:ext cx="3727624" cy="338554"/>
+          </a:xfrm>
+          <a:prstGeom prst="rect">
+            <a:avLst/>
+          </a:prstGeom>
+        </p:spPr>
+        <p:txBody>
+          <a:bodyPr wrap="none">
+            <a:spAutoFit/>
+          </a:bodyPr>
+          <a:lstStyle/>
+          <a:p>
+            <a:r>
+              <a:rPr lang="ru-RU" sz="1600" dirty="0"/>
+              <a:t>https://otexts.com/fpp2/holt-winters.html</a:t>
+            </a:r>
+          </a:p>
+        </p:txBody>
+      </p:sp>
+      <p:sp>
+        <p:nvSpPr>
+          <p:cNvPr id="10" name="Прямоугольник 9"/>
+          <p:cNvSpPr/>
+          <p:nvPr/>
+        </p:nvSpPr>
+        <p:spPr>
+          <a:xfrm>
+            <a:off x="346840" y="3826401"/>
+            <a:ext cx="5666554" cy="2800767"/>
+          </a:xfrm>
+          <a:prstGeom prst="rect">
+            <a:avLst/>
+          </a:prstGeom>
+        </p:spPr>
+        <p:txBody>
+          <a:bodyPr wrap="square">
+            <a:spAutoFit/>
+          </a:bodyPr>
+          <a:lstStyle/>
+          <a:p>
+            <a:pPr algn="just"/>
+            <a:r>
+              <a:rPr lang="ru-RU" sz="2000" dirty="0"/>
+              <a:t>В модели Сезонная компонента – это текущее значение без уровня и предыдущая сезонная компонента</a:t>
+            </a:r>
+          </a:p>
+          <a:p>
+            <a:pPr marL="285750" indent="-285750" algn="just">
+              <a:buFont typeface="Arial" panose="020B0604020202020204" pitchFamily="34" charset="0"/>
+              <a:buChar char="•"/>
+            </a:pPr>
+            <a:r>
+              <a:rPr lang="ru-RU" sz="2000" dirty="0"/>
+              <a:t>Сезон – сравнительно быстрые изменения с одинаковым периодом!</a:t>
+            </a:r>
+            <a:endParaRPr lang="en-US" sz="2000" dirty="0"/>
+          </a:p>
+          <a:p>
+            <a:pPr marL="342900" indent="-342900" algn="just">
+              <a:buFont typeface="Arial" panose="020B0604020202020204" pitchFamily="34" charset="0"/>
+              <a:buChar char="•"/>
+            </a:pPr>
+            <a:r>
+              <a:rPr lang="ru-RU" sz="2000" dirty="0"/>
+              <a:t>Могут быть также мультипликативная и затухающая модели тренда и сезонности.</a:t>
+            </a:r>
+          </a:p>
+          <a:p>
+            <a:pPr algn="just"/>
+            <a:r>
+              <a:rPr lang="ru-RU" sz="2000" dirty="0"/>
+              <a:t>	напр. спрос на </a:t>
+            </a:r>
+            <a:r>
+              <a:rPr lang="ru-RU" sz="2000" dirty="0" err="1"/>
+              <a:t>электроэенерги</a:t>
+            </a:r>
+            <a:r>
+              <a:rPr lang="ru-RU" sz="2000" dirty="0"/>
+              <a:t>.</a:t>
+            </a:r>
+          </a:p>
+          <a:p>
+            <a:pPr algn="just"/>
+            <a:endParaRPr lang="ru-RU" sz="1600" b="0" i="1" dirty="0">
+              <a:solidFill>
+                <a:schemeClr val="tx1"/>
+              </a:solidFill>
+              <a:effectLst/>
+              <a:latin typeface="__YSText_8fb396"/>
+            </a:endParaRPr>
+          </a:p>
+        </p:txBody>
+      </p:sp>
+      <p:pic>
+        <p:nvPicPr>
+          <p:cNvPr id="14" name="Picture 2" descr="image.png">
+            <a:extLst>
+              <a:ext uri="{FF2B5EF4-FFF2-40B4-BE49-F238E27FC236}">
+                <a16:creationId xmlns:a16="http://schemas.microsoft.com/office/drawing/2014/main" id="{02A694C1-DCCF-4974-B57F-8BFBFBCC1DE6}"/>
+              </a:ext>
+            </a:extLst>
+          </p:cNvPr>
+          <p:cNvPicPr>
+            <a:picLocks noChangeAspect="1" noChangeArrowheads="1"/>
+          </p:cNvPicPr>
+          <p:nvPr/>
+        </p:nvPicPr>
+        <p:blipFill rotWithShape="1">
+          <a:blip r:embed="rId4">
+            <a:extLst>
+              <a:ext uri="{28A0092B-C50C-407E-A947-70E740481C1C}">
+                <a14:useLocalDpi xmlns:a14="http://schemas.microsoft.com/office/drawing/2010/main" val="0"/>
+              </a:ext>
+            </a:extLst>
+          </a:blip>
+          <a:srcRect l="8887" t="8532" r="8717" b="6336"/>
+          <a:stretch/>
+        </p:blipFill>
+        <p:spPr bwMode="auto">
+          <a:xfrm>
+            <a:off x="6133277" y="3416074"/>
+            <a:ext cx="5734050" cy="2962275"/>
+          </a:xfrm>
+          <a:prstGeom prst="rect">
+            <a:avLst/>
+          </a:prstGeom>
+          <a:noFill/>
+          <a:extLst>
+            <a:ext uri="{909E8E84-426E-40DD-AFC4-6F175D3DCCD1}">
+              <a14:hiddenFill xmlns:a14="http://schemas.microsoft.com/office/drawing/2010/main">
+                <a:solidFill>
+                  <a:srgbClr val="FFFFFF"/>
+                </a:solidFill>
+              </a14:hiddenFill>
+            </a:ext>
+          </a:extLst>
+        </p:spPr>
+      </p:pic>
+      <p:pic>
+        <p:nvPicPr>
+          <p:cNvPr id="8" name="Picture 2" descr="image.png">
+            <a:extLst>
+              <a:ext uri="{FF2B5EF4-FFF2-40B4-BE49-F238E27FC236}">
+                <a16:creationId xmlns:a16="http://schemas.microsoft.com/office/drawing/2014/main" id="{02A694C1-DCCF-4974-B57F-8BFBFBCC1DE6}"/>
+              </a:ext>
+            </a:extLst>
+          </p:cNvPr>
+          <p:cNvPicPr>
+            <a:picLocks noChangeAspect="1" noChangeArrowheads="1"/>
+          </p:cNvPicPr>
+          <p:nvPr/>
+        </p:nvPicPr>
+        <p:blipFill rotWithShape="1">
+          <a:blip r:embed="rId4">
+            <a:extLst>
+              <a:ext uri="{28A0092B-C50C-407E-A947-70E740481C1C}">
+                <a14:useLocalDpi xmlns:a14="http://schemas.microsoft.com/office/drawing/2010/main" val="0"/>
+              </a:ext>
+            </a:extLst>
+          </a:blip>
+          <a:srcRect l="78976" t="11915" r="10074" b="77683"/>
+          <a:stretch/>
+        </p:blipFill>
+        <p:spPr bwMode="auto">
+          <a:xfrm>
+            <a:off x="9284584" y="3416073"/>
+            <a:ext cx="2734322" cy="1298801"/>
+          </a:xfrm>
+          <a:prstGeom prst="rect">
+            <a:avLst/>
+          </a:prstGeom>
+          <a:noFill/>
+          <a:extLst>
+            <a:ext uri="{909E8E84-426E-40DD-AFC4-6F175D3DCCD1}">
+              <a14:hiddenFill xmlns:a14="http://schemas.microsoft.com/office/drawing/2010/main">
+                <a:solidFill>
+                  <a:srgbClr val="FFFFFF"/>
+                </a:solidFill>
+              </a14:hiddenFill>
+            </a:ext>
+          </a:extLst>
+        </p:spPr>
+      </p:pic>
+    </p:spTree>
+    <p:extLst>
+      <p:ext uri="{BB962C8B-B14F-4D97-AF65-F5344CB8AC3E}">
+        <p14:creationId xmlns:p14="http://schemas.microsoft.com/office/powerpoint/2010/main" val="1301338103"/>
+      </p:ext>
+    </p:extLst>
+  </p:cSld>
+  <p:clrMapOvr>
+    <a:masterClrMapping/>
+  </p:clrMapOvr>
+  <p:timing>
+    <p:tnLst>
+      <p:par>
+        <p:cTn id="1" dur="indefinite" restart="never" nodeType="tmRoot"/>
+      </p:par>
+    </p:tnLst>
+  </p:timing>
+</p:sld>
+</file>
+
+<file path=ppt/slides/slide11.xml><?xml version="1.0" encoding="utf-8"?>
+<p:sld xmlns:a="http://schemas.openxmlformats.org/drawingml/2006/main" xmlns:r="http://schemas.openxmlformats.org/officeDocument/2006/relationships" xmlns:p="http://schemas.openxmlformats.org/presentationml/2006/main">
+  <p:cSld>
+    <p:spTree>
+      <p:nvGrpSpPr>
+        <p:cNvPr id="1" name=""/>
+        <p:cNvGrpSpPr/>
+        <p:nvPr/>
+      </p:nvGrpSpPr>
+      <p:grpSpPr>
+        <a:xfrm>
+          <a:off x="0" y="0"/>
+          <a:ext cx="0" cy="0"/>
+          <a:chOff x="0" y="0"/>
+          <a:chExt cx="0" cy="0"/>
+        </a:xfrm>
+      </p:grpSpPr>
+      <p:sp>
+        <p:nvSpPr>
+          <p:cNvPr id="2" name="Заголовок 1">
+            <a:extLst>
+              <a:ext uri="{FF2B5EF4-FFF2-40B4-BE49-F238E27FC236}">
+                <a16:creationId xmlns:a16="http://schemas.microsoft.com/office/drawing/2014/main" id="{3FB6B433-AB20-4BD4-8E77-84B856A5D608}"/>
+              </a:ext>
+            </a:extLst>
+          </p:cNvPr>
+          <p:cNvSpPr>
+            <a:spLocks noGrp="1"/>
+          </p:cNvSpPr>
+          <p:nvPr>
+            <p:ph type="title"/>
+          </p:nvPr>
+        </p:nvSpPr>
+        <p:spPr>
+          <a:xfrm>
             <a:off x="226957" y="93606"/>
             <a:ext cx="11802295" cy="757854"/>
           </a:xfrm>
@@ -4948,7 +6275,7 @@
 </p:sld>
 </file>
 
-<file path=ppt/slides/slide11.xml><?xml version="1.0" encoding="utf-8"?>
+<file path=ppt/slides/slide12.xml><?xml version="1.0" encoding="utf-8"?>
 <p:sld xmlns:a="http://schemas.openxmlformats.org/drawingml/2006/main" xmlns:r="http://schemas.openxmlformats.org/officeDocument/2006/relationships" xmlns:p="http://schemas.openxmlformats.org/presentationml/2006/main">
   <p:cSld>
     <p:spTree>
@@ -6284,7 +7611,7 @@
 </p:sld>
 </file>
 
-<file path=ppt/slides/slide12.xml><?xml version="1.0" encoding="utf-8"?>
+<file path=ppt/slides/slide13.xml><?xml version="1.0" encoding="utf-8"?>
 <p:sld xmlns:a="http://schemas.openxmlformats.org/drawingml/2006/main" xmlns:r="http://schemas.openxmlformats.org/officeDocument/2006/relationships" xmlns:p="http://schemas.openxmlformats.org/presentationml/2006/main">
   <p:cSld>
     <p:spTree>
@@ -6600,7 +7927,7 @@
 </p:sld>
 </file>
 
-<file path=ppt/slides/slide13.xml><?xml version="1.0" encoding="utf-8"?>
+<file path=ppt/slides/slide14.xml><?xml version="1.0" encoding="utf-8"?>
 <p:sld xmlns:a="http://schemas.openxmlformats.org/drawingml/2006/main" xmlns:r="http://schemas.openxmlformats.org/officeDocument/2006/relationships" xmlns:p="http://schemas.openxmlformats.org/presentationml/2006/main">
   <p:cSld>
     <p:spTree>
@@ -7256,7 +8583,7 @@
 </p:sld>
 </file>
 
-<file path=ppt/slides/slide14.xml><?xml version="1.0" encoding="utf-8"?>
+<file path=ppt/slides/slide15.xml><?xml version="1.0" encoding="utf-8"?>
 <p:sld xmlns:a="http://schemas.openxmlformats.org/drawingml/2006/main" xmlns:r="http://schemas.openxmlformats.org/officeDocument/2006/relationships" xmlns:p="http://schemas.openxmlformats.org/presentationml/2006/main">
   <p:cSld>
     <p:spTree>
@@ -7671,7 +8998,7 @@
 </p:sld>
 </file>
 
-<file path=ppt/slides/slide15.xml><?xml version="1.0" encoding="utf-8"?>
+<file path=ppt/slides/slide16.xml><?xml version="1.0" encoding="utf-8"?>
 <p:sld xmlns:a="http://schemas.openxmlformats.org/drawingml/2006/main" xmlns:r="http://schemas.openxmlformats.org/officeDocument/2006/relationships" xmlns:p="http://schemas.openxmlformats.org/presentationml/2006/main">
   <p:cSld>
     <p:spTree>
@@ -8873,7 +10200,7 @@
 </p:sld>
 </file>
 
-<file path=ppt/slides/slide16.xml><?xml version="1.0" encoding="utf-8"?>
+<file path=ppt/slides/slide17.xml><?xml version="1.0" encoding="utf-8"?>
 <p:sld xmlns:a="http://schemas.openxmlformats.org/drawingml/2006/main" xmlns:r="http://schemas.openxmlformats.org/officeDocument/2006/relationships" xmlns:p="http://schemas.openxmlformats.org/presentationml/2006/main">
   <p:cSld>
     <p:spTree>
@@ -9098,7 +10425,7 @@
 </p:sld>
 </file>
 
-<file path=ppt/slides/slide17.xml><?xml version="1.0" encoding="utf-8"?>
+<file path=ppt/slides/slide18.xml><?xml version="1.0" encoding="utf-8"?>
 <p:sld xmlns:a="http://schemas.openxmlformats.org/drawingml/2006/main" xmlns:r="http://schemas.openxmlformats.org/officeDocument/2006/relationships" xmlns:p="http://schemas.openxmlformats.org/presentationml/2006/main">
   <p:cSld>
     <p:spTree>
@@ -10571,7 +11898,7 @@
 </p:sld>
 </file>
 
-<file path=ppt/slides/slide18.xml><?xml version="1.0" encoding="utf-8"?>
+<file path=ppt/slides/slide19.xml><?xml version="1.0" encoding="utf-8"?>
 <p:sld xmlns:a="http://schemas.openxmlformats.org/drawingml/2006/main" xmlns:r="http://schemas.openxmlformats.org/officeDocument/2006/relationships" xmlns:p="http://schemas.openxmlformats.org/presentationml/2006/main">
   <p:cSld>
     <p:spTree>
@@ -11434,7 +12761,84 @@
 </p:sld>
 </file>
 
-<file path=ppt/slides/slide19.xml><?xml version="1.0" encoding="utf-8"?>
+<file path=ppt/slides/slide2.xml><?xml version="1.0" encoding="utf-8"?>
+<p:sld xmlns:a="http://schemas.openxmlformats.org/drawingml/2006/main" xmlns:r="http://schemas.openxmlformats.org/officeDocument/2006/relationships" xmlns:p="http://schemas.openxmlformats.org/presentationml/2006/main">
+  <p:cSld>
+    <p:spTree>
+      <p:nvGrpSpPr>
+        <p:cNvPr id="1" name=""/>
+        <p:cNvGrpSpPr/>
+        <p:nvPr/>
+      </p:nvGrpSpPr>
+      <p:grpSpPr>
+        <a:xfrm>
+          <a:off x="0" y="0"/>
+          <a:ext cx="0" cy="0"/>
+          <a:chOff x="0" y="0"/>
+          <a:chExt cx="0" cy="0"/>
+        </a:xfrm>
+      </p:grpSpPr>
+      <p:sp>
+        <p:nvSpPr>
+          <p:cNvPr id="2" name="Заголовок 1">
+            <a:extLst>
+              <a:ext uri="{FF2B5EF4-FFF2-40B4-BE49-F238E27FC236}">
+                <a16:creationId xmlns:a16="http://schemas.microsoft.com/office/drawing/2014/main" id="{9AE3A209-E86B-43CF-A4CE-1917FCF9C1BD}"/>
+              </a:ext>
+            </a:extLst>
+          </p:cNvPr>
+          <p:cNvSpPr>
+            <a:spLocks noGrp="1"/>
+          </p:cNvSpPr>
+          <p:nvPr>
+            <p:ph type="ctrTitle"/>
+          </p:nvPr>
+        </p:nvSpPr>
+        <p:spPr>
+          <a:xfrm>
+            <a:off x="385343" y="728616"/>
+            <a:ext cx="10932920" cy="863964"/>
+          </a:xfrm>
+        </p:spPr>
+        <p:txBody>
+          <a:bodyPr>
+            <a:normAutofit fontScale="90000"/>
+          </a:bodyPr>
+          <a:lstStyle/>
+          <a:p>
+            <a:r>
+              <a:rPr lang="en-US" sz="8000" b="1" dirty="0" smtClean="0"/>
+              <a:t>TS </a:t>
+            </a:r>
+            <a:r>
+              <a:rPr lang="ru-RU" sz="8000" b="1" dirty="0" smtClean="0"/>
+              <a:t>модель</a:t>
+            </a:r>
+            <a:endParaRPr lang="en-US" sz="8000" b="1" dirty="0"/>
+          </a:p>
+        </p:txBody>
+      </p:sp>
+    </p:spTree>
+    <p:extLst>
+      <p:ext uri="{BB962C8B-B14F-4D97-AF65-F5344CB8AC3E}">
+        <p14:creationId xmlns:p14="http://schemas.microsoft.com/office/powerpoint/2010/main" val="2895557766"/>
+      </p:ext>
+    </p:extLst>
+  </p:cSld>
+  <p:clrMapOvr>
+    <a:masterClrMapping/>
+  </p:clrMapOvr>
+  <p:timing>
+    <p:tnLst>
+      <p:par>
+        <p:cTn id="1" dur="indefinite" restart="never" nodeType="tmRoot"/>
+      </p:par>
+    </p:tnLst>
+  </p:timing>
+</p:sld>
+</file>
+
+<file path=ppt/slides/slide20.xml><?xml version="1.0" encoding="utf-8"?>
 <p:sld xmlns:a="http://schemas.openxmlformats.org/drawingml/2006/main" xmlns:r="http://schemas.openxmlformats.org/officeDocument/2006/relationships" xmlns:p="http://schemas.openxmlformats.org/presentationml/2006/main">
   <p:cSld>
     <p:spTree>
@@ -11660,84 +13064,7 @@
 </p:sld>
 </file>
 
-<file path=ppt/slides/slide2.xml><?xml version="1.0" encoding="utf-8"?>
-<p:sld xmlns:a="http://schemas.openxmlformats.org/drawingml/2006/main" xmlns:r="http://schemas.openxmlformats.org/officeDocument/2006/relationships" xmlns:p="http://schemas.openxmlformats.org/presentationml/2006/main">
-  <p:cSld>
-    <p:spTree>
-      <p:nvGrpSpPr>
-        <p:cNvPr id="1" name=""/>
-        <p:cNvGrpSpPr/>
-        <p:nvPr/>
-      </p:nvGrpSpPr>
-      <p:grpSpPr>
-        <a:xfrm>
-          <a:off x="0" y="0"/>
-          <a:ext cx="0" cy="0"/>
-          <a:chOff x="0" y="0"/>
-          <a:chExt cx="0" cy="0"/>
-        </a:xfrm>
-      </p:grpSpPr>
-      <p:sp>
-        <p:nvSpPr>
-          <p:cNvPr id="2" name="Заголовок 1">
-            <a:extLst>
-              <a:ext uri="{FF2B5EF4-FFF2-40B4-BE49-F238E27FC236}">
-                <a16:creationId xmlns:a16="http://schemas.microsoft.com/office/drawing/2014/main" id="{9AE3A209-E86B-43CF-A4CE-1917FCF9C1BD}"/>
-              </a:ext>
-            </a:extLst>
-          </p:cNvPr>
-          <p:cNvSpPr>
-            <a:spLocks noGrp="1"/>
-          </p:cNvSpPr>
-          <p:nvPr>
-            <p:ph type="ctrTitle"/>
-          </p:nvPr>
-        </p:nvSpPr>
-        <p:spPr>
-          <a:xfrm>
-            <a:off x="385343" y="728616"/>
-            <a:ext cx="10932920" cy="863964"/>
-          </a:xfrm>
-        </p:spPr>
-        <p:txBody>
-          <a:bodyPr>
-            <a:normAutofit fontScale="90000"/>
-          </a:bodyPr>
-          <a:lstStyle/>
-          <a:p>
-            <a:r>
-              <a:rPr lang="en-US" sz="8000" b="1" dirty="0" smtClean="0"/>
-              <a:t>TS </a:t>
-            </a:r>
-            <a:r>
-              <a:rPr lang="ru-RU" sz="8000" b="1" dirty="0" smtClean="0"/>
-              <a:t>модель</a:t>
-            </a:r>
-            <a:endParaRPr lang="en-US" sz="8000" b="1" dirty="0"/>
-          </a:p>
-        </p:txBody>
-      </p:sp>
-    </p:spTree>
-    <p:extLst>
-      <p:ext uri="{BB962C8B-B14F-4D97-AF65-F5344CB8AC3E}">
-        <p14:creationId xmlns:p14="http://schemas.microsoft.com/office/powerpoint/2010/main" val="2895557766"/>
-      </p:ext>
-    </p:extLst>
-  </p:cSld>
-  <p:clrMapOvr>
-    <a:masterClrMapping/>
-  </p:clrMapOvr>
-  <p:timing>
-    <p:tnLst>
-      <p:par>
-        <p:cTn id="1" dur="indefinite" restart="never" nodeType="tmRoot"/>
-      </p:par>
-    </p:tnLst>
-  </p:timing>
-</p:sld>
-</file>
-
-<file path=ppt/slides/slide20.xml><?xml version="1.0" encoding="utf-8"?>
+<file path=ppt/slides/slide21.xml><?xml version="1.0" encoding="utf-8"?>
 <p:sld xmlns:a="http://schemas.openxmlformats.org/drawingml/2006/main" xmlns:r="http://schemas.openxmlformats.org/officeDocument/2006/relationships" xmlns:p="http://schemas.openxmlformats.org/presentationml/2006/main">
   <p:cSld>
     <p:spTree>
@@ -13244,7 +14571,7 @@
 </p:sld>
 </file>
 
-<file path=ppt/slides/slide21.xml><?xml version="1.0" encoding="utf-8"?>
+<file path=ppt/slides/slide22.xml><?xml version="1.0" encoding="utf-8"?>
 <p:sld xmlns:a="http://schemas.openxmlformats.org/drawingml/2006/main" xmlns:r="http://schemas.openxmlformats.org/officeDocument/2006/relationships" xmlns:p="http://schemas.openxmlformats.org/presentationml/2006/main">
   <p:cSld>
     <p:spTree>
@@ -14436,7 +15763,7 @@
 </p:sld>
 </file>
 
-<file path=ppt/slides/slide22.xml><?xml version="1.0" encoding="utf-8"?>
+<file path=ppt/slides/slide23.xml><?xml version="1.0" encoding="utf-8"?>
 <p:sld xmlns:a="http://schemas.openxmlformats.org/drawingml/2006/main" xmlns:r="http://schemas.openxmlformats.org/officeDocument/2006/relationships" xmlns:p="http://schemas.openxmlformats.org/presentationml/2006/main">
   <p:cSld>
     <p:spTree>
@@ -14674,7 +16001,7 @@
 </p:sld>
 </file>
 
-<file path=ppt/slides/slide23.xml><?xml version="1.0" encoding="utf-8"?>
+<file path=ppt/slides/slide24.xml><?xml version="1.0" encoding="utf-8"?>
 <p:sld xmlns:a="http://schemas.openxmlformats.org/drawingml/2006/main" xmlns:r="http://schemas.openxmlformats.org/officeDocument/2006/relationships" xmlns:p="http://schemas.openxmlformats.org/presentationml/2006/main">
   <p:cSld>
     <p:spTree>
@@ -14847,7 +16174,7 @@
 </p:sld>
 </file>
 
-<file path=ppt/slides/slide24.xml><?xml version="1.0" encoding="utf-8"?>
+<file path=ppt/slides/slide25.xml><?xml version="1.0" encoding="utf-8"?>
 <p:sld xmlns:a="http://schemas.openxmlformats.org/drawingml/2006/main" xmlns:r="http://schemas.openxmlformats.org/officeDocument/2006/relationships" xmlns:p="http://schemas.openxmlformats.org/presentationml/2006/main">
   <p:cSld>
     <p:spTree>
@@ -15249,7 +16576,7 @@
 </p:sld>
 </file>
 
-<file path=ppt/slides/slide25.xml><?xml version="1.0" encoding="utf-8"?>
+<file path=ppt/slides/slide26.xml><?xml version="1.0" encoding="utf-8"?>
 <p:sld xmlns:a="http://schemas.openxmlformats.org/drawingml/2006/main" xmlns:r="http://schemas.openxmlformats.org/officeDocument/2006/relationships" xmlns:p="http://schemas.openxmlformats.org/presentationml/2006/main">
   <p:cSld>
     <p:spTree>
@@ -16354,7 +17681,7 @@
 </p:sld>
 </file>
 
-<file path=ppt/slides/slide26.xml><?xml version="1.0" encoding="utf-8"?>
+<file path=ppt/slides/slide27.xml><?xml version="1.0" encoding="utf-8"?>
 <p:sld xmlns:a="http://schemas.openxmlformats.org/drawingml/2006/main" xmlns:r="http://schemas.openxmlformats.org/officeDocument/2006/relationships" xmlns:p="http://schemas.openxmlformats.org/presentationml/2006/main">
   <p:cSld>
     <p:spTree>
@@ -17555,7 +18882,7 @@
 </p:sld>
 </file>
 
-<file path=ppt/slides/slide27.xml><?xml version="1.0" encoding="utf-8"?>
+<file path=ppt/slides/slide28.xml><?xml version="1.0" encoding="utf-8"?>
 <p:sld xmlns:a="http://schemas.openxmlformats.org/drawingml/2006/main" xmlns:r="http://schemas.openxmlformats.org/officeDocument/2006/relationships" xmlns:p="http://schemas.openxmlformats.org/presentationml/2006/main">
   <p:cSld>
     <p:spTree>
@@ -17765,7 +19092,7 @@
 </p:sld>
 </file>
 
-<file path=ppt/slides/slide28.xml><?xml version="1.0" encoding="utf-8"?>
+<file path=ppt/slides/slide29.xml><?xml version="1.0" encoding="utf-8"?>
 <p:sld xmlns:a="http://schemas.openxmlformats.org/drawingml/2006/main" xmlns:r="http://schemas.openxmlformats.org/officeDocument/2006/relationships" xmlns:p="http://schemas.openxmlformats.org/presentationml/2006/main">
   <p:cSld>
     <p:spTree>
@@ -18279,198 +19606,6 @@
 </p:sld>
 </file>
 
-<file path=ppt/slides/slide29.xml><?xml version="1.0" encoding="utf-8"?>
-<p:sld xmlns:a="http://schemas.openxmlformats.org/drawingml/2006/main" xmlns:r="http://schemas.openxmlformats.org/officeDocument/2006/relationships" xmlns:p="http://schemas.openxmlformats.org/presentationml/2006/main">
-  <p:cSld>
-    <p:spTree>
-      <p:nvGrpSpPr>
-        <p:cNvPr id="1" name=""/>
-        <p:cNvGrpSpPr/>
-        <p:nvPr/>
-      </p:nvGrpSpPr>
-      <p:grpSpPr>
-        <a:xfrm>
-          <a:off x="0" y="0"/>
-          <a:ext cx="0" cy="0"/>
-          <a:chOff x="0" y="0"/>
-          <a:chExt cx="0" cy="0"/>
-        </a:xfrm>
-      </p:grpSpPr>
-      <p:sp>
-        <p:nvSpPr>
-          <p:cNvPr id="2" name="Заголовок 1"/>
-          <p:cNvSpPr>
-            <a:spLocks noGrp="1"/>
-          </p:cNvSpPr>
-          <p:nvPr>
-            <p:ph type="title"/>
-          </p:nvPr>
-        </p:nvSpPr>
-        <p:spPr>
-          <a:xfrm>
-            <a:off x="299103" y="365125"/>
-            <a:ext cx="11054697" cy="549275"/>
-          </a:xfrm>
-        </p:spPr>
-        <p:txBody>
-          <a:bodyPr>
-            <a:normAutofit fontScale="90000"/>
-          </a:bodyPr>
-          <a:lstStyle/>
-          <a:p>
-            <a:r>
-              <a:rPr lang="ru-RU" dirty="0" smtClean="0"/>
-              <a:t>Вопросы для самоконтроля</a:t>
-            </a:r>
-            <a:endParaRPr lang="ru-RU" dirty="0"/>
-          </a:p>
-        </p:txBody>
-      </p:sp>
-      <p:sp>
-        <p:nvSpPr>
-          <p:cNvPr id="3" name="Объект 2"/>
-          <p:cNvSpPr>
-            <a:spLocks noGrp="1"/>
-          </p:cNvSpPr>
-          <p:nvPr>
-            <p:ph idx="1"/>
-          </p:nvPr>
-        </p:nvSpPr>
-        <p:spPr>
-          <a:xfrm>
-            <a:off x="299103" y="1042586"/>
-            <a:ext cx="11690647" cy="5614587"/>
-          </a:xfrm>
-        </p:spPr>
-        <p:txBody>
-          <a:bodyPr/>
-          <a:lstStyle/>
-          <a:p>
-            <a:pPr lvl="0"/>
-            <a:r>
-              <a:rPr lang="ru-RU" dirty="0"/>
-              <a:t>Объясните основные подходы к экспоненциальному сглаживанию. Какая интуиция сопутствует таким подходам. Где подходы применимы. В каких задачах подходов будет недостаточно и как решить эту проблему?  </a:t>
-            </a:r>
-          </a:p>
-          <a:p>
-            <a:r>
-              <a:rPr lang="ru-RU" dirty="0" smtClean="0"/>
-              <a:t>Объясните почему </a:t>
-            </a:r>
-            <a:r>
-              <a:rPr lang="en-US" dirty="0" smtClean="0"/>
-              <a:t>SES-based </a:t>
-            </a:r>
-            <a:r>
-              <a:rPr lang="ru-RU" dirty="0" smtClean="0"/>
-              <a:t>подходы имеют особое место среди других подходов на основе скользящего среднего. Почему </a:t>
-            </a:r>
-            <a:r>
-              <a:rPr lang="en-US" dirty="0" smtClean="0"/>
-              <a:t>SES – </a:t>
-            </a:r>
-            <a:r>
-              <a:rPr lang="ru-RU" dirty="0" smtClean="0"/>
-              <a:t>итерационный подход? Какая интуиция соответствует переходу от </a:t>
-            </a:r>
-            <a:r>
-              <a:rPr lang="en-US" dirty="0" smtClean="0"/>
-              <a:t>SES </a:t>
-            </a:r>
-            <a:r>
-              <a:rPr lang="ru-RU" dirty="0" smtClean="0"/>
-              <a:t>к </a:t>
-            </a:r>
-            <a:r>
-              <a:rPr lang="en-US" dirty="0" smtClean="0"/>
-              <a:t>DES </a:t>
-            </a:r>
-            <a:r>
-              <a:rPr lang="ru-RU" dirty="0" smtClean="0"/>
-              <a:t>и к </a:t>
-            </a:r>
-            <a:r>
-              <a:rPr lang="en-US" dirty="0" smtClean="0"/>
-              <a:t>TES. </a:t>
-            </a:r>
-            <a:endParaRPr lang="ru-RU" dirty="0" smtClean="0"/>
-          </a:p>
-          <a:p>
-            <a:r>
-              <a:rPr lang="ru-RU" dirty="0" smtClean="0"/>
-              <a:t>Объясните подход </a:t>
-            </a:r>
-            <a:r>
-              <a:rPr lang="en-US" dirty="0" smtClean="0"/>
-              <a:t>TBATS, </a:t>
-            </a:r>
-            <a:r>
-              <a:rPr lang="ru-RU" dirty="0" smtClean="0"/>
-              <a:t>где он используется? Приведите примеры задач где недостаточно </a:t>
-            </a:r>
-            <a:r>
-              <a:rPr lang="en-US" dirty="0" smtClean="0"/>
-              <a:t>ETS </a:t>
-            </a:r>
-            <a:r>
-              <a:rPr lang="ru-RU" dirty="0" smtClean="0"/>
-              <a:t>и нужно использовать </a:t>
-            </a:r>
-            <a:r>
-              <a:rPr lang="en-US" dirty="0" smtClean="0"/>
-              <a:t>TBATS. </a:t>
-            </a:r>
-            <a:r>
-              <a:rPr lang="ru-RU" dirty="0" smtClean="0"/>
-              <a:t>Предложите пути решения таких задач без </a:t>
-            </a:r>
-            <a:r>
-              <a:rPr lang="en-US" dirty="0" smtClean="0"/>
-              <a:t>TBATS</a:t>
-            </a:r>
-            <a:r>
-              <a:rPr lang="ru-RU" dirty="0" smtClean="0"/>
-              <a:t>, в чем их особенность.</a:t>
-            </a:r>
-            <a:endParaRPr lang="en-US" dirty="0" smtClean="0"/>
-          </a:p>
-          <a:p>
-            <a:r>
-              <a:rPr lang="ru-RU" dirty="0" smtClean="0"/>
-              <a:t>Объясните цель использования подходов на основе адаптивной обобщенной регрессии. Какие у подходов достоинства и недостатки. Приведите примеры задач, где такие подходы использовать нельзя (почему такие подходы – не </a:t>
-            </a:r>
-            <a:r>
-              <a:rPr lang="ru-RU" dirty="0" err="1" smtClean="0"/>
-              <a:t>бейзлайн</a:t>
-            </a:r>
-            <a:r>
-              <a:rPr lang="ru-RU" smtClean="0"/>
-              <a:t>?). </a:t>
-            </a:r>
-            <a:endParaRPr lang="ru-RU" dirty="0"/>
-          </a:p>
-        </p:txBody>
-      </p:sp>
-    </p:spTree>
-    <p:extLst>
-      <p:ext uri="{BB962C8B-B14F-4D97-AF65-F5344CB8AC3E}">
-        <p14:creationId xmlns:p14="http://schemas.microsoft.com/office/powerpoint/2010/main" val="3868368480"/>
-      </p:ext>
-    </p:extLst>
-  </p:cSld>
-  <p:clrMapOvr>
-    <a:masterClrMapping/>
-  </p:clrMapOvr>
-  <p:timing>
-    <p:tnLst>
-      <p:par>
-        <p:cTn id="1" dur="indefinite" restart="never" nodeType="tmRoot"/>
-      </p:par>
-    </p:tnLst>
-  </p:timing>
-</p:sld>
-</file>
-
 <file path=ppt/slides/slide3.xml><?xml version="1.0" encoding="utf-8"?>
 <p:sld xmlns:a="http://schemas.openxmlformats.org/drawingml/2006/main" xmlns:r="http://schemas.openxmlformats.org/officeDocument/2006/relationships" xmlns:p="http://schemas.openxmlformats.org/presentationml/2006/main">
   <p:cSld>
@@ -18532,8 +19667,8 @@
           </a:p>
         </p:txBody>
       </p:sp>
-      <mc:AlternateContent xmlns:mc="http://schemas.openxmlformats.org/markup-compatibility/2006">
-        <mc:Choice xmlns:a14="http://schemas.microsoft.com/office/drawing/2010/main" Requires="a14">
+      <mc:AlternateContent xmlns:mc="http://schemas.openxmlformats.org/markup-compatibility/2006" xmlns:a14="http://schemas.microsoft.com/office/drawing/2010/main">
+        <mc:Choice Requires="a14">
           <p:sp>
             <p:nvSpPr>
               <p:cNvPr id="3" name="Объект 2">
@@ -19023,7 +20158,7 @@
             </p:txBody>
           </p:sp>
         </mc:Choice>
-        <mc:Fallback>
+        <mc:Fallback xmlns="">
           <p:sp>
             <p:nvSpPr>
               <p:cNvPr id="3" name="Объект 2">
@@ -19361,7 +20496,804 @@
 </p:sld>
 </file>
 
+<file path=ppt/slides/slide30.xml><?xml version="1.0" encoding="utf-8"?>
+<p:sld xmlns:a="http://schemas.openxmlformats.org/drawingml/2006/main" xmlns:r="http://schemas.openxmlformats.org/officeDocument/2006/relationships" xmlns:p="http://schemas.openxmlformats.org/presentationml/2006/main">
+  <p:cSld>
+    <p:spTree>
+      <p:nvGrpSpPr>
+        <p:cNvPr id="1" name=""/>
+        <p:cNvGrpSpPr/>
+        <p:nvPr/>
+      </p:nvGrpSpPr>
+      <p:grpSpPr>
+        <a:xfrm>
+          <a:off x="0" y="0"/>
+          <a:ext cx="0" cy="0"/>
+          <a:chOff x="0" y="0"/>
+          <a:chExt cx="0" cy="0"/>
+        </a:xfrm>
+      </p:grpSpPr>
+      <p:sp>
+        <p:nvSpPr>
+          <p:cNvPr id="2" name="Заголовок 1"/>
+          <p:cNvSpPr>
+            <a:spLocks noGrp="1"/>
+          </p:cNvSpPr>
+          <p:nvPr>
+            <p:ph type="title"/>
+          </p:nvPr>
+        </p:nvSpPr>
+        <p:spPr>
+          <a:xfrm>
+            <a:off x="299103" y="365125"/>
+            <a:ext cx="11054697" cy="549275"/>
+          </a:xfrm>
+        </p:spPr>
+        <p:txBody>
+          <a:bodyPr>
+            <a:normAutofit fontScale="90000"/>
+          </a:bodyPr>
+          <a:lstStyle/>
+          <a:p>
+            <a:r>
+              <a:rPr lang="ru-RU" dirty="0" smtClean="0"/>
+              <a:t>Вопросы для самоконтроля</a:t>
+            </a:r>
+            <a:endParaRPr lang="ru-RU" dirty="0"/>
+          </a:p>
+        </p:txBody>
+      </p:sp>
+      <p:sp>
+        <p:nvSpPr>
+          <p:cNvPr id="3" name="Объект 2"/>
+          <p:cNvSpPr>
+            <a:spLocks noGrp="1"/>
+          </p:cNvSpPr>
+          <p:nvPr>
+            <p:ph idx="1"/>
+          </p:nvPr>
+        </p:nvSpPr>
+        <p:spPr>
+          <a:xfrm>
+            <a:off x="299103" y="1042586"/>
+            <a:ext cx="11690647" cy="5614587"/>
+          </a:xfrm>
+        </p:spPr>
+        <p:txBody>
+          <a:bodyPr/>
+          <a:lstStyle/>
+          <a:p>
+            <a:pPr lvl="0"/>
+            <a:r>
+              <a:rPr lang="ru-RU" dirty="0"/>
+              <a:t>Объясните основные подходы к экспоненциальному сглаживанию. Какая интуиция сопутствует таким подходам. Где подходы применимы. В каких задачах подходов будет недостаточно и как решить эту проблему?  </a:t>
+            </a:r>
+          </a:p>
+          <a:p>
+            <a:r>
+              <a:rPr lang="ru-RU" dirty="0" smtClean="0"/>
+              <a:t>Объясните почему </a:t>
+            </a:r>
+            <a:r>
+              <a:rPr lang="en-US" dirty="0" smtClean="0"/>
+              <a:t>SES-based </a:t>
+            </a:r>
+            <a:r>
+              <a:rPr lang="ru-RU" dirty="0" smtClean="0"/>
+              <a:t>подходы имеют особое место среди других подходов на основе скользящего среднего. Почему </a:t>
+            </a:r>
+            <a:r>
+              <a:rPr lang="en-US" dirty="0" smtClean="0"/>
+              <a:t>SES – </a:t>
+            </a:r>
+            <a:r>
+              <a:rPr lang="ru-RU" dirty="0" smtClean="0"/>
+              <a:t>итерационный подход? Какая интуиция соответствует переходу от </a:t>
+            </a:r>
+            <a:r>
+              <a:rPr lang="en-US" dirty="0" smtClean="0"/>
+              <a:t>SES </a:t>
+            </a:r>
+            <a:r>
+              <a:rPr lang="ru-RU" dirty="0" smtClean="0"/>
+              <a:t>к </a:t>
+            </a:r>
+            <a:r>
+              <a:rPr lang="en-US" dirty="0" smtClean="0"/>
+              <a:t>DES </a:t>
+            </a:r>
+            <a:r>
+              <a:rPr lang="ru-RU" dirty="0" smtClean="0"/>
+              <a:t>и к </a:t>
+            </a:r>
+            <a:r>
+              <a:rPr lang="en-US" dirty="0" smtClean="0"/>
+              <a:t>TES. </a:t>
+            </a:r>
+            <a:endParaRPr lang="ru-RU" dirty="0" smtClean="0"/>
+          </a:p>
+          <a:p>
+            <a:r>
+              <a:rPr lang="ru-RU" dirty="0" smtClean="0"/>
+              <a:t>Объясните подход </a:t>
+            </a:r>
+            <a:r>
+              <a:rPr lang="en-US" dirty="0" smtClean="0"/>
+              <a:t>TBATS, </a:t>
+            </a:r>
+            <a:r>
+              <a:rPr lang="ru-RU" dirty="0" smtClean="0"/>
+              <a:t>где он используется? Приведите примеры задач где недостаточно </a:t>
+            </a:r>
+            <a:r>
+              <a:rPr lang="en-US" dirty="0" smtClean="0"/>
+              <a:t>ETS </a:t>
+            </a:r>
+            <a:r>
+              <a:rPr lang="ru-RU" dirty="0" smtClean="0"/>
+              <a:t>и нужно использовать </a:t>
+            </a:r>
+            <a:r>
+              <a:rPr lang="en-US" dirty="0" smtClean="0"/>
+              <a:t>TBATS. </a:t>
+            </a:r>
+            <a:r>
+              <a:rPr lang="ru-RU" dirty="0" smtClean="0"/>
+              <a:t>Предложите пути решения таких задач без </a:t>
+            </a:r>
+            <a:r>
+              <a:rPr lang="en-US" dirty="0" smtClean="0"/>
+              <a:t>TBATS</a:t>
+            </a:r>
+            <a:r>
+              <a:rPr lang="ru-RU" dirty="0" smtClean="0"/>
+              <a:t>, в чем их особенность.</a:t>
+            </a:r>
+            <a:endParaRPr lang="en-US" dirty="0" smtClean="0"/>
+          </a:p>
+          <a:p>
+            <a:r>
+              <a:rPr lang="ru-RU" dirty="0" smtClean="0"/>
+              <a:t>Объясните цель использования подходов на основе адаптивной обобщенной регрессии. Какие у подходов достоинства и недостатки. Приведите примеры задач, где такие подходы использовать нельзя (почему такие подходы – не </a:t>
+            </a:r>
+            <a:r>
+              <a:rPr lang="ru-RU" dirty="0" err="1" smtClean="0"/>
+              <a:t>бейзлайн</a:t>
+            </a:r>
+            <a:r>
+              <a:rPr lang="ru-RU" smtClean="0"/>
+              <a:t>?). </a:t>
+            </a:r>
+            <a:endParaRPr lang="ru-RU" dirty="0"/>
+          </a:p>
+        </p:txBody>
+      </p:sp>
+    </p:spTree>
+    <p:extLst>
+      <p:ext uri="{BB962C8B-B14F-4D97-AF65-F5344CB8AC3E}">
+        <p14:creationId xmlns:p14="http://schemas.microsoft.com/office/powerpoint/2010/main" val="3868368480"/>
+      </p:ext>
+    </p:extLst>
+  </p:cSld>
+  <p:clrMapOvr>
+    <a:masterClrMapping/>
+  </p:clrMapOvr>
+  <p:timing>
+    <p:tnLst>
+      <p:par>
+        <p:cTn id="1" dur="indefinite" restart="never" nodeType="tmRoot"/>
+      </p:par>
+    </p:tnLst>
+  </p:timing>
+</p:sld>
+</file>
+
 <file path=ppt/slides/slide4.xml><?xml version="1.0" encoding="utf-8"?>
+<p:sld xmlns:a="http://schemas.openxmlformats.org/drawingml/2006/main" xmlns:r="http://schemas.openxmlformats.org/officeDocument/2006/relationships" xmlns:p="http://schemas.openxmlformats.org/presentationml/2006/main">
+  <p:cSld>
+    <p:spTree>
+      <p:nvGrpSpPr>
+        <p:cNvPr id="1" name=""/>
+        <p:cNvGrpSpPr/>
+        <p:nvPr/>
+      </p:nvGrpSpPr>
+      <p:grpSpPr>
+        <a:xfrm>
+          <a:off x="0" y="0"/>
+          <a:ext cx="0" cy="0"/>
+          <a:chOff x="0" y="0"/>
+          <a:chExt cx="0" cy="0"/>
+        </a:xfrm>
+      </p:grpSpPr>
+      <p:sp>
+        <p:nvSpPr>
+          <p:cNvPr id="2" name="Заголовок 1">
+            <a:extLst>
+              <a:ext uri="{FF2B5EF4-FFF2-40B4-BE49-F238E27FC236}">
+                <a16:creationId xmlns:a16="http://schemas.microsoft.com/office/drawing/2014/main" id="{79B0BEDB-9774-4E17-9A6B-DBCF6A1F528F}"/>
+              </a:ext>
+            </a:extLst>
+          </p:cNvPr>
+          <p:cNvSpPr>
+            <a:spLocks noGrp="1"/>
+          </p:cNvSpPr>
+          <p:nvPr>
+            <p:ph type="title"/>
+          </p:nvPr>
+        </p:nvSpPr>
+        <p:spPr>
+          <a:xfrm>
+            <a:off x="1576070" y="197786"/>
+            <a:ext cx="9849485" cy="1325563"/>
+          </a:xfrm>
+        </p:spPr>
+        <p:txBody>
+          <a:bodyPr>
+            <a:normAutofit/>
+          </a:bodyPr>
+          <a:lstStyle/>
+          <a:p>
+            <a:r>
+              <a:rPr lang="en-US" b="1" dirty="0" smtClean="0"/>
+              <a:t>TS-</a:t>
+            </a:r>
+            <a:r>
+              <a:rPr lang="ru-RU" b="1" dirty="0" smtClean="0"/>
+              <a:t>Модели </a:t>
+            </a:r>
+            <a:r>
+              <a:rPr lang="ru-RU" b="1" dirty="0"/>
+              <a:t>временных </a:t>
+            </a:r>
+            <a:r>
+              <a:rPr lang="ru-RU" b="1" dirty="0" smtClean="0"/>
+              <a:t>рядов </a:t>
+            </a:r>
+            <a:r>
+              <a:rPr lang="en-US" b="1" dirty="0" smtClean="0"/>
+              <a:t>Mixing</a:t>
+            </a:r>
+            <a:endParaRPr lang="en-US" b="1" dirty="0"/>
+          </a:p>
+        </p:txBody>
+      </p:sp>
+      <p:sp>
+        <p:nvSpPr>
+          <p:cNvPr id="3" name="Объект 2">
+            <a:extLst>
+              <a:ext uri="{FF2B5EF4-FFF2-40B4-BE49-F238E27FC236}">
+                <a16:creationId xmlns:a16="http://schemas.microsoft.com/office/drawing/2014/main" id="{4CDB8E57-5CA8-497C-990E-C304F4FBE710}"/>
+              </a:ext>
+            </a:extLst>
+          </p:cNvPr>
+          <p:cNvSpPr>
+            <a:spLocks noGrp="1"/>
+          </p:cNvSpPr>
+          <p:nvPr>
+            <p:ph idx="1"/>
+          </p:nvPr>
+        </p:nvSpPr>
+        <p:spPr>
+          <a:xfrm>
+            <a:off x="209550" y="1114427"/>
+            <a:ext cx="11525249" cy="5545789"/>
+          </a:xfrm>
+        </p:spPr>
+        <p:txBody>
+          <a:bodyPr>
+            <a:normAutofit/>
+          </a:bodyPr>
+          <a:lstStyle/>
+          <a:p>
+            <a:pPr marL="0" indent="0" eaLnBrk="0" fontAlgn="base" hangingPunct="0">
+              <a:lnSpc>
+                <a:spcPct val="100000"/>
+              </a:lnSpc>
+              <a:spcBef>
+                <a:spcPct val="0"/>
+              </a:spcBef>
+              <a:spcAft>
+                <a:spcPct val="0"/>
+              </a:spcAft>
+              <a:buNone/>
+            </a:pPr>
+            <a:r>
+              <a:rPr lang="ru-RU" sz="2400" dirty="0" smtClean="0"/>
+              <a:t>ВР - </a:t>
+            </a:r>
+            <a:r>
+              <a:rPr lang="ru-RU" sz="2400" dirty="0"/>
+              <a:t>наблюдения не независимы (не </a:t>
+            </a:r>
+            <a:r>
+              <a:rPr lang="ru-RU" sz="2400" dirty="0" err="1"/>
+              <a:t>i.i.d</a:t>
+            </a:r>
+            <a:r>
+              <a:rPr lang="ru-RU" sz="2400" dirty="0"/>
+              <a:t>.). </a:t>
+            </a:r>
+            <a:endParaRPr lang="ru-RU" sz="2400" dirty="0" smtClean="0"/>
+          </a:p>
+          <a:p>
+            <a:pPr marL="0" indent="0" eaLnBrk="0" fontAlgn="base" hangingPunct="0">
+              <a:lnSpc>
+                <a:spcPct val="100000"/>
+              </a:lnSpc>
+              <a:spcBef>
+                <a:spcPct val="0"/>
+              </a:spcBef>
+              <a:spcAft>
+                <a:spcPct val="0"/>
+              </a:spcAft>
+              <a:buNone/>
+            </a:pPr>
+            <a:r>
+              <a:rPr lang="ru-RU" sz="2400" dirty="0"/>
+              <a:t>	</a:t>
+            </a:r>
+            <a:r>
+              <a:rPr lang="ru-RU" sz="2400" dirty="0" smtClean="0"/>
+              <a:t>Между </a:t>
+            </a:r>
+            <a:r>
+              <a:rPr lang="ru-RU" sz="2400" dirty="0"/>
+              <a:t>близкими по времени точками существует сильная зависимость. </a:t>
+            </a:r>
+            <a:endParaRPr lang="ru-RU" sz="2400" dirty="0" smtClean="0"/>
+          </a:p>
+          <a:p>
+            <a:pPr marL="0" indent="0" eaLnBrk="0" fontAlgn="base" hangingPunct="0">
+              <a:lnSpc>
+                <a:spcPct val="100000"/>
+              </a:lnSpc>
+              <a:spcBef>
+                <a:spcPct val="0"/>
+              </a:spcBef>
+              <a:spcAft>
+                <a:spcPct val="0"/>
+              </a:spcAft>
+              <a:buNone/>
+            </a:pPr>
+            <a:r>
+              <a:rPr lang="ru-RU" sz="2400" dirty="0" smtClean="0"/>
+              <a:t>Классическая </a:t>
+            </a:r>
+            <a:r>
+              <a:rPr lang="ru-RU" sz="2400" dirty="0"/>
+              <a:t>статистическая теория обучения </a:t>
+            </a:r>
+            <a:r>
+              <a:rPr lang="ru-RU" sz="2400" dirty="0" smtClean="0"/>
+              <a:t>для </a:t>
+            </a:r>
+            <a:r>
+              <a:rPr lang="en-US" sz="2400" dirty="0" smtClean="0"/>
+              <a:t>TS </a:t>
+            </a:r>
+            <a:r>
+              <a:rPr lang="ru-RU" sz="2400" dirty="0" smtClean="0"/>
+              <a:t>моделей часто </a:t>
+            </a:r>
+            <a:r>
+              <a:rPr lang="ru-RU" sz="2400" dirty="0"/>
+              <a:t>требует независимости, поэтому для зависимых данных вводят условия перемешивания (</a:t>
+            </a:r>
+            <a:r>
+              <a:rPr lang="ru-RU" sz="2400" dirty="0" err="1"/>
+              <a:t>mixing</a:t>
+            </a:r>
+            <a:r>
+              <a:rPr lang="ru-RU" sz="2400" dirty="0"/>
+              <a:t> </a:t>
+            </a:r>
+            <a:r>
+              <a:rPr lang="ru-RU" sz="2400" dirty="0" err="1"/>
+              <a:t>conditions</a:t>
+            </a:r>
+            <a:r>
+              <a:rPr lang="ru-RU" sz="2400" dirty="0"/>
+              <a:t>). </a:t>
+            </a:r>
+            <a:endParaRPr lang="ru-RU" sz="2400" dirty="0" smtClean="0"/>
+          </a:p>
+          <a:p>
+            <a:pPr marL="0" indent="0" eaLnBrk="0" fontAlgn="base" hangingPunct="0">
+              <a:lnSpc>
+                <a:spcPct val="100000"/>
+              </a:lnSpc>
+              <a:spcBef>
+                <a:spcPct val="0"/>
+              </a:spcBef>
+              <a:spcAft>
+                <a:spcPct val="0"/>
+              </a:spcAft>
+              <a:buNone/>
+            </a:pPr>
+            <a:r>
+              <a:rPr lang="ru-RU" sz="2400" dirty="0" smtClean="0"/>
+              <a:t>Они </a:t>
+            </a:r>
+            <a:r>
+              <a:rPr lang="ru-RU" sz="2400" dirty="0"/>
+              <a:t>измеряют, насколько быстро зависимость между прошлым и будущим ослабевает со временем.</a:t>
+            </a:r>
+          </a:p>
+          <a:p>
+            <a:pPr marL="0" indent="0" eaLnBrk="0" fontAlgn="base" hangingPunct="0">
+              <a:lnSpc>
+                <a:spcPct val="100000"/>
+              </a:lnSpc>
+              <a:spcBef>
+                <a:spcPct val="0"/>
+              </a:spcBef>
+              <a:spcAft>
+                <a:spcPct val="0"/>
+              </a:spcAft>
+              <a:buNone/>
+            </a:pPr>
+            <a:r>
+              <a:rPr lang="el-GR" sz="2400" b="1" dirty="0"/>
+              <a:t>α-</a:t>
+            </a:r>
+            <a:r>
+              <a:rPr lang="en-US" sz="2400" b="1" dirty="0" smtClean="0"/>
+              <a:t>mixing</a:t>
+            </a:r>
+            <a:r>
+              <a:rPr lang="ru-RU" sz="2400" b="1" dirty="0" smtClean="0"/>
+              <a:t> – быстрое затухание по экспоненциальном или полиномиальному закону (большинство наших процессов, полином на очень </a:t>
+            </a:r>
+            <a:r>
+              <a:rPr lang="ru-RU" sz="2400" b="1" smtClean="0"/>
+              <a:t>длинном горизонте)</a:t>
+            </a:r>
+            <a:r>
+              <a:rPr lang="ru-RU" sz="2400" dirty="0" smtClean="0"/>
+              <a:t/>
+            </a:r>
+            <a:br>
+              <a:rPr lang="ru-RU" sz="2400" dirty="0" smtClean="0"/>
+            </a:br>
+            <a:r>
+              <a:rPr lang="el-GR" sz="2400" dirty="0"/>
+              <a:t>β-</a:t>
+            </a:r>
+            <a:r>
+              <a:rPr lang="en-US" sz="2400" dirty="0" smtClean="0"/>
+              <a:t>mixing</a:t>
+            </a:r>
+            <a:r>
+              <a:rPr lang="ru-RU" sz="2400" dirty="0" smtClean="0"/>
+              <a:t> – текстовые данные (Марковские цепи, линейное затухание)</a:t>
+            </a:r>
+          </a:p>
+          <a:p>
+            <a:pPr marL="0" indent="0" eaLnBrk="0" fontAlgn="base" hangingPunct="0">
+              <a:lnSpc>
+                <a:spcPct val="100000"/>
+              </a:lnSpc>
+              <a:spcBef>
+                <a:spcPct val="0"/>
+              </a:spcBef>
+              <a:spcAft>
+                <a:spcPct val="0"/>
+              </a:spcAft>
+              <a:buNone/>
+            </a:pPr>
+            <a:r>
+              <a:rPr lang="el-GR" sz="2400" dirty="0"/>
+              <a:t>φ-</a:t>
+            </a:r>
+            <a:r>
+              <a:rPr lang="en-US" sz="2400" dirty="0" smtClean="0"/>
+              <a:t>mixing</a:t>
+            </a:r>
+            <a:r>
+              <a:rPr lang="ru-RU" sz="2400" dirty="0" smtClean="0"/>
+              <a:t> – без </a:t>
+            </a:r>
+            <a:r>
+              <a:rPr lang="en-US" sz="2400" dirty="0" smtClean="0"/>
+              <a:t> </a:t>
+            </a:r>
+            <a:r>
+              <a:rPr lang="ru-RU" sz="2400" dirty="0" smtClean="0"/>
+              <a:t>затухания (таблицы, изображения)</a:t>
+            </a:r>
+            <a:endParaRPr lang="en-US" sz="2400" dirty="0"/>
+          </a:p>
+          <a:p>
+            <a:pPr marL="0" indent="0" eaLnBrk="0" fontAlgn="base" hangingPunct="0">
+              <a:lnSpc>
+                <a:spcPct val="100000"/>
+              </a:lnSpc>
+              <a:spcBef>
+                <a:spcPct val="0"/>
+              </a:spcBef>
+              <a:spcAft>
+                <a:spcPct val="0"/>
+              </a:spcAft>
+              <a:buNone/>
+            </a:pPr>
+            <a:r>
+              <a:rPr lang="ru-RU" sz="2400" dirty="0" smtClean="0"/>
+              <a:t/>
+            </a:r>
+            <a:br>
+              <a:rPr lang="ru-RU" sz="2400" dirty="0" smtClean="0"/>
+            </a:br>
+            <a:endParaRPr lang="ru-RU" altLang="en-US" sz="2200" i="1" dirty="0" smtClean="0"/>
+          </a:p>
+        </p:txBody>
+      </p:sp>
+      <p:sp>
+        <p:nvSpPr>
+          <p:cNvPr id="7" name="Номер слайда 6">
+            <a:extLst>
+              <a:ext uri="{FF2B5EF4-FFF2-40B4-BE49-F238E27FC236}">
+                <a16:creationId xmlns:a16="http://schemas.microsoft.com/office/drawing/2014/main" id="{A07EF2B8-3D80-AB22-FA4B-F0655B9EAE6F}"/>
+              </a:ext>
+            </a:extLst>
+          </p:cNvPr>
+          <p:cNvSpPr>
+            <a:spLocks noGrp="1"/>
+          </p:cNvSpPr>
+          <p:nvPr>
+            <p:ph type="sldNum" sz="quarter" idx="12"/>
+          </p:nvPr>
+        </p:nvSpPr>
+        <p:spPr/>
+        <p:txBody>
+          <a:bodyPr/>
+          <a:lstStyle/>
+          <a:p>
+            <a:fld id="{45C3B737-A709-4ABC-AFE0-A6B067850C48}" type="slidenum">
+              <a:rPr lang="en-US" smtClean="0"/>
+              <a:t>4</a:t>
+            </a:fld>
+            <a:endParaRPr lang="en-US"/>
+          </a:p>
+        </p:txBody>
+      </p:sp>
+      <p:sp>
+        <p:nvSpPr>
+          <p:cNvPr id="5" name="Rectangle 231">
+            <a:extLst>
+              <a:ext uri="{FF2B5EF4-FFF2-40B4-BE49-F238E27FC236}">
+                <a16:creationId xmlns:a16="http://schemas.microsoft.com/office/drawing/2014/main" id="{57F50B8E-A23A-4154-9A0C-994DE115ACE6}"/>
+              </a:ext>
+            </a:extLst>
+          </p:cNvPr>
+          <p:cNvSpPr>
+            <a:spLocks noChangeArrowheads="1"/>
+          </p:cNvSpPr>
+          <p:nvPr/>
+        </p:nvSpPr>
+        <p:spPr bwMode="auto">
+          <a:xfrm>
+            <a:off x="6167756" y="4477386"/>
+            <a:ext cx="52071" cy="10795"/>
+          </a:xfrm>
+          <a:prstGeom prst="rect">
+            <a:avLst/>
+          </a:prstGeom>
+          <a:solidFill>
+            <a:srgbClr val="000000"/>
+          </a:solidFill>
+          <a:ln>
+            <a:noFill/>
+          </a:ln>
+          <a:extLst>
+            <a:ext uri="{91240B29-F687-4F45-9708-019B960494DF}">
+              <a14:hiddenLine xmlns:a14="http://schemas.microsoft.com/office/drawing/2010/main" w="9525">
+                <a:solidFill>
+                  <a:srgbClr val="000000"/>
+                </a:solidFill>
+                <a:miter lim="800000"/>
+                <a:headEnd/>
+                <a:tailEnd/>
+              </a14:hiddenLine>
+            </a:ext>
+          </a:extLst>
+        </p:spPr>
+        <p:txBody>
+          <a:bodyPr rot="0" vert="horz" wrap="square" lIns="91440" tIns="45720" rIns="91440" bIns="45720" anchor="t" anchorCtr="0" upright="1">
+            <a:noAutofit/>
+          </a:bodyPr>
+          <a:lstStyle/>
+          <a:p>
+            <a:endParaRPr lang="en-US" sz="1351"/>
+          </a:p>
+        </p:txBody>
+      </p:sp>
+      <p:sp>
+        <p:nvSpPr>
+          <p:cNvPr id="6" name="Rectangle 3">
+            <a:extLst>
+              <a:ext uri="{FF2B5EF4-FFF2-40B4-BE49-F238E27FC236}">
+                <a16:creationId xmlns:a16="http://schemas.microsoft.com/office/drawing/2014/main" id="{66C52228-8C94-4CF2-AD63-BA9617333BA2}"/>
+              </a:ext>
+            </a:extLst>
+          </p:cNvPr>
+          <p:cNvSpPr>
+            <a:spLocks noChangeArrowheads="1"/>
+          </p:cNvSpPr>
+          <p:nvPr/>
+        </p:nvSpPr>
+        <p:spPr bwMode="auto">
+          <a:xfrm>
+            <a:off x="-1523999" y="124999"/>
+            <a:ext cx="184731" cy="677108"/>
+          </a:xfrm>
+          <a:prstGeom prst="rect">
+            <a:avLst/>
+          </a:prstGeom>
+          <a:noFill/>
+          <a:ln>
+            <a:noFill/>
+          </a:ln>
+          <a:effectLst/>
+          <a:extLst>
+            <a:ext uri="{909E8E84-426E-40DD-AFC4-6F175D3DCCD1}">
+              <a14:hiddenFill xmlns:a14="http://schemas.microsoft.com/office/drawing/2010/main">
+                <a:solidFill>
+                  <a:schemeClr val="accent1"/>
+                </a:solidFill>
+              </a14:hiddenFill>
+            </a:ext>
+            <a:ext uri="{91240B29-F687-4F45-9708-019B960494DF}">
+              <a14:hiddenLine xmlns:a14="http://schemas.microsoft.com/office/drawing/2010/main" w="9525">
+                <a:solidFill>
+                  <a:schemeClr val="tx1"/>
+                </a:solidFill>
+                <a:miter lim="800000"/>
+                <a:headEnd/>
+                <a:tailEnd/>
+              </a14:hiddenLine>
+            </a:ext>
+            <a:ext uri="{AF507438-7753-43E0-B8FC-AC1667EBCBE1}">
+              <a14:hiddenEffects xmlns:a14="http://schemas.microsoft.com/office/drawing/2010/main">
+                <a:effectLst>
+                  <a:outerShdw dist="35921" dir="2700000" algn="ctr" rotWithShape="0">
+                    <a:schemeClr val="bg2"/>
+                  </a:outerShdw>
+                </a:effectLst>
+              </a14:hiddenEffects>
+            </a:ext>
+          </a:extLst>
+        </p:spPr>
+        <p:txBody>
+          <a:bodyPr vert="horz" wrap="none" lIns="91440" tIns="45720" rIns="91440" bIns="45720" numCol="1" anchor="ctr" anchorCtr="0" compatLnSpc="1">
+            <a:prstTxWarp prst="textNoShape">
+              <a:avLst/>
+            </a:prstTxWarp>
+            <a:spAutoFit/>
+          </a:bodyPr>
+          <a:lstStyle/>
+          <a:p>
+            <a:pPr eaLnBrk="0" fontAlgn="base" hangingPunct="0">
+              <a:spcBef>
+                <a:spcPct val="0"/>
+              </a:spcBef>
+              <a:spcAft>
+                <a:spcPct val="0"/>
+              </a:spcAft>
+            </a:pPr>
+            <a:r>
+              <a:rPr lang="en-US" altLang="en-US" sz="1400">
+                <a:latin typeface="Arial" panose="020B0604020202020204" pitchFamily="34" charset="0"/>
+                <a:ea typeface="Times New Roman" panose="02020603050405020304" pitchFamily="18" charset="0"/>
+              </a:rPr>
+              <a:t/>
+            </a:r>
+            <a:br>
+              <a:rPr lang="en-US" altLang="en-US" sz="1400">
+                <a:latin typeface="Arial" panose="020B0604020202020204" pitchFamily="34" charset="0"/>
+                <a:ea typeface="Times New Roman" panose="02020603050405020304" pitchFamily="18" charset="0"/>
+              </a:rPr>
+            </a:br>
+            <a:endParaRPr lang="en-US" altLang="en-US" sz="2400">
+              <a:latin typeface="Arial" panose="020B0604020202020204" pitchFamily="34" charset="0"/>
+            </a:endParaRPr>
+          </a:p>
+        </p:txBody>
+      </p:sp>
+      <p:sp>
+        <p:nvSpPr>
+          <p:cNvPr id="4" name="Rectangle 1">
+            <a:extLst>
+              <a:ext uri="{FF2B5EF4-FFF2-40B4-BE49-F238E27FC236}">
+                <a16:creationId xmlns:a16="http://schemas.microsoft.com/office/drawing/2014/main" id="{4ECA1DAD-475E-4D0B-A20A-17535DDD41A8}"/>
+              </a:ext>
+            </a:extLst>
+          </p:cNvPr>
+          <p:cNvSpPr>
+            <a:spLocks noChangeArrowheads="1"/>
+          </p:cNvSpPr>
+          <p:nvPr/>
+        </p:nvSpPr>
+        <p:spPr bwMode="auto">
+          <a:xfrm>
+            <a:off x="-1523999" y="43935"/>
+            <a:ext cx="65" cy="369332"/>
+          </a:xfrm>
+          <a:prstGeom prst="rect">
+            <a:avLst/>
+          </a:prstGeom>
+          <a:solidFill>
+            <a:srgbClr val="FFFFFF"/>
+          </a:solidFill>
+          <a:ln>
+            <a:noFill/>
+          </a:ln>
+          <a:effectLst/>
+          <a:extLst>
+            <a:ext uri="{91240B29-F687-4F45-9708-019B960494DF}">
+              <a14:hiddenLine xmlns:a14="http://schemas.microsoft.com/office/drawing/2010/main" w="9525">
+                <a:solidFill>
+                  <a:schemeClr val="tx1"/>
+                </a:solidFill>
+                <a:miter lim="800000"/>
+                <a:headEnd/>
+                <a:tailEnd/>
+              </a14:hiddenLine>
+            </a:ext>
+            <a:ext uri="{AF507438-7753-43E0-B8FC-AC1667EBCBE1}">
+              <a14:hiddenEffects xmlns:a14="http://schemas.microsoft.com/office/drawing/2010/main">
+                <a:effectLst>
+                  <a:outerShdw dist="35921" dir="2700000" algn="ctr" rotWithShape="0">
+                    <a:schemeClr val="bg2"/>
+                  </a:outerShdw>
+                </a:effectLst>
+              </a14:hiddenEffects>
+            </a:ext>
+          </a:extLst>
+        </p:spPr>
+        <p:txBody>
+          <a:bodyPr vert="horz" wrap="none" lIns="0" tIns="0" rIns="0" bIns="0" numCol="1" anchor="ctr" anchorCtr="0" compatLnSpc="1">
+            <a:prstTxWarp prst="textNoShape">
+              <a:avLst/>
+            </a:prstTxWarp>
+            <a:spAutoFit/>
+          </a:bodyPr>
+          <a:lstStyle/>
+          <a:p>
+            <a:pPr eaLnBrk="0" fontAlgn="base" hangingPunct="0">
+              <a:spcBef>
+                <a:spcPct val="0"/>
+              </a:spcBef>
+              <a:spcAft>
+                <a:spcPct val="0"/>
+              </a:spcAft>
+            </a:pPr>
+            <a:endParaRPr lang="en-US" altLang="en-US" sz="2400" dirty="0">
+              <a:latin typeface="Arial" panose="020B0604020202020204" pitchFamily="34" charset="0"/>
+            </a:endParaRPr>
+          </a:p>
+        </p:txBody>
+      </p:sp>
+    </p:spTree>
+    <p:extLst>
+      <p:ext uri="{BB962C8B-B14F-4D97-AF65-F5344CB8AC3E}">
+        <p14:creationId xmlns:p14="http://schemas.microsoft.com/office/powerpoint/2010/main" val="1070249655"/>
+      </p:ext>
+    </p:extLst>
+  </p:cSld>
+  <p:clrMapOvr>
+    <a:masterClrMapping/>
+  </p:clrMapOvr>
+  <p:timing>
+    <p:tnLst>
+      <p:par>
+        <p:cTn id="1" dur="indefinite" restart="never" nodeType="tmRoot"/>
+      </p:par>
+    </p:tnLst>
+  </p:timing>
+</p:sld>
+</file>
+
+<file path=ppt/slides/slide5.xml><?xml version="1.0" encoding="utf-8"?>
 <p:sld xmlns:a="http://schemas.openxmlformats.org/drawingml/2006/main" xmlns:r="http://schemas.openxmlformats.org/officeDocument/2006/relationships" xmlns:p="http://schemas.openxmlformats.org/presentationml/2006/main">
   <p:cSld>
     <p:spTree>
@@ -20513,7 +22445,7 @@
 </p:sld>
 </file>
 
-<file path=ppt/slides/slide5.xml><?xml version="1.0" encoding="utf-8"?>
+<file path=ppt/slides/slide6.xml><?xml version="1.0" encoding="utf-8"?>
 <p:sld xmlns:a="http://schemas.openxmlformats.org/drawingml/2006/main" xmlns:r="http://schemas.openxmlformats.org/officeDocument/2006/relationships" xmlns:p="http://schemas.openxmlformats.org/presentationml/2006/main">
   <p:cSld>
     <p:spTree>
@@ -21364,7 +23296,7 @@
 </p:sld>
 </file>
 
-<file path=ppt/slides/slide6.xml><?xml version="1.0" encoding="utf-8"?>
+<file path=ppt/slides/slide7.xml><?xml version="1.0" encoding="utf-8"?>
 <p:sld xmlns:a="http://schemas.openxmlformats.org/drawingml/2006/main" xmlns:r="http://schemas.openxmlformats.org/officeDocument/2006/relationships" xmlns:p="http://schemas.openxmlformats.org/presentationml/2006/main">
   <p:cSld>
     <p:spTree>
@@ -22079,7 +24011,7 @@
 </p:sld>
 </file>
 
-<file path=ppt/slides/slide7.xml><?xml version="1.0" encoding="utf-8"?>
+<file path=ppt/slides/slide8.xml><?xml version="1.0" encoding="utf-8"?>
 <p:sld xmlns:a="http://schemas.openxmlformats.org/drawingml/2006/main" xmlns:r="http://schemas.openxmlformats.org/officeDocument/2006/relationships" xmlns:p="http://schemas.openxmlformats.org/presentationml/2006/main">
   <p:cSld>
     <p:spTree>
@@ -23426,7 +25358,7 @@
 </p:sld>
 </file>
 
-<file path=ppt/slides/slide8.xml><?xml version="1.0" encoding="utf-8"?>
+<file path=ppt/slides/slide9.xml><?xml version="1.0" encoding="utf-8"?>
 <p:sld xmlns:a="http://schemas.openxmlformats.org/drawingml/2006/main" xmlns:r="http://schemas.openxmlformats.org/officeDocument/2006/relationships" xmlns:p="http://schemas.openxmlformats.org/presentationml/2006/main">
   <p:cSld>
     <p:spTree>
@@ -24300,1331 +26232,6 @@
     <p:extLst>
       <p:ext uri="{BB962C8B-B14F-4D97-AF65-F5344CB8AC3E}">
         <p14:creationId xmlns:p14="http://schemas.microsoft.com/office/powerpoint/2010/main" val="1411614552"/>
-      </p:ext>
-    </p:extLst>
-  </p:cSld>
-  <p:clrMapOvr>
-    <a:masterClrMapping/>
-  </p:clrMapOvr>
-  <p:timing>
-    <p:tnLst>
-      <p:par>
-        <p:cTn id="1" dur="indefinite" restart="never" nodeType="tmRoot"/>
-      </p:par>
-    </p:tnLst>
-  </p:timing>
-</p:sld>
-</file>
-
-<file path=ppt/slides/slide9.xml><?xml version="1.0" encoding="utf-8"?>
-<p:sld xmlns:a="http://schemas.openxmlformats.org/drawingml/2006/main" xmlns:r="http://schemas.openxmlformats.org/officeDocument/2006/relationships" xmlns:p="http://schemas.openxmlformats.org/presentationml/2006/main">
-  <p:cSld>
-    <p:spTree>
-      <p:nvGrpSpPr>
-        <p:cNvPr id="1" name=""/>
-        <p:cNvGrpSpPr/>
-        <p:nvPr/>
-      </p:nvGrpSpPr>
-      <p:grpSpPr>
-        <a:xfrm>
-          <a:off x="0" y="0"/>
-          <a:ext cx="0" cy="0"/>
-          <a:chOff x="0" y="0"/>
-          <a:chExt cx="0" cy="0"/>
-        </a:xfrm>
-      </p:grpSpPr>
-      <p:sp>
-        <p:nvSpPr>
-          <p:cNvPr id="2" name="Заголовок 1">
-            <a:extLst>
-              <a:ext uri="{FF2B5EF4-FFF2-40B4-BE49-F238E27FC236}">
-                <a16:creationId xmlns:a16="http://schemas.microsoft.com/office/drawing/2014/main" id="{3FB6B433-AB20-4BD4-8E77-84B856A5D608}"/>
-              </a:ext>
-            </a:extLst>
-          </p:cNvPr>
-          <p:cNvSpPr>
-            <a:spLocks noGrp="1"/>
-          </p:cNvSpPr>
-          <p:nvPr>
-            <p:ph type="title"/>
-          </p:nvPr>
-        </p:nvSpPr>
-        <p:spPr>
-          <a:xfrm>
-            <a:off x="226957" y="93605"/>
-            <a:ext cx="11802295" cy="933115"/>
-          </a:xfrm>
-        </p:spPr>
-        <p:txBody>
-          <a:bodyPr>
-            <a:normAutofit/>
-          </a:bodyPr>
-          <a:lstStyle/>
-          <a:p>
-            <a:pPr algn="ctr"/>
-            <a:r>
-              <a:rPr lang="ru-RU" sz="3200" b="1" dirty="0"/>
-              <a:t>Модель </a:t>
-            </a:r>
-            <a:r>
-              <a:rPr lang="en-US" sz="3200" b="1" dirty="0"/>
-              <a:t>Holt</a:t>
-            </a:r>
-            <a:r>
-              <a:rPr lang="ru-RU" sz="3200" b="1" dirty="0"/>
-              <a:t>-</a:t>
-            </a:r>
-            <a:r>
-              <a:rPr lang="en-US" sz="3200" b="1" dirty="0"/>
-              <a:t>Winters </a:t>
-            </a:r>
-            <a:r>
-              <a:rPr lang="ru-RU" sz="3200" b="1" dirty="0"/>
-              <a:t> - тройное экспоненциальное сглаживание</a:t>
-            </a:r>
-            <a:endParaRPr lang="ru-RU" sz="3600" b="1" dirty="0"/>
-          </a:p>
-        </p:txBody>
-      </p:sp>
-      <mc:AlternateContent xmlns:mc="http://schemas.openxmlformats.org/markup-compatibility/2006" xmlns:a14="http://schemas.microsoft.com/office/drawing/2010/main">
-        <mc:Choice Requires="a14">
-          <p:sp>
-            <p:nvSpPr>
-              <p:cNvPr id="3" name="Объект 2">
-                <a:extLst>
-                  <a:ext uri="{FF2B5EF4-FFF2-40B4-BE49-F238E27FC236}">
-                    <a16:creationId xmlns:a16="http://schemas.microsoft.com/office/drawing/2014/main" id="{9CFDC76D-90F0-4FD7-8BA6-954D6D2E6FFD}"/>
-                  </a:ext>
-                </a:extLst>
-              </p:cNvPr>
-              <p:cNvSpPr>
-                <a:spLocks noGrp="1"/>
-              </p:cNvSpPr>
-              <p:nvPr>
-                <p:ph idx="1"/>
-              </p:nvPr>
-            </p:nvSpPr>
-            <p:spPr>
-              <a:xfrm>
-                <a:off x="226957" y="817117"/>
-                <a:ext cx="11791949" cy="5502274"/>
-              </a:xfrm>
-            </p:spPr>
-            <p:txBody>
-              <a:bodyPr>
-                <a:normAutofit/>
-              </a:bodyPr>
-              <a:lstStyle/>
-              <a:p>
-                <a:pPr marL="0" indent="0">
-                  <a:buNone/>
-                </a:pPr>
-                <a:r>
-                  <a:rPr lang="ru-RU" sz="2200" dirty="0"/>
-                  <a:t>Пусть существуют быстрые изменения с известным периодом </a:t>
-                </a:r>
-                <a14:m>
-                  <m:oMath xmlns:m="http://schemas.openxmlformats.org/officeDocument/2006/math">
-                    <m:r>
-                      <a:rPr lang="en-US" sz="2200" b="0" i="1" dirty="0" smtClean="0">
-                        <a:latin typeface="Cambria Math" panose="02040503050406030204" pitchFamily="18" charset="0"/>
-                      </a:rPr>
-                      <m:t>𝑚</m:t>
-                    </m:r>
-                  </m:oMath>
-                </a14:m>
-                <a:r>
-                  <a:rPr lang="en-US" sz="2200" dirty="0"/>
-                  <a:t> </a:t>
-                </a:r>
-                <a:r>
-                  <a:rPr lang="ru-RU" sz="2200" dirty="0"/>
-                  <a:t>(сезонность). Тогда для точек одной фазы (удаленных на </a:t>
-                </a:r>
-                <a14:m>
-                  <m:oMath xmlns:m="http://schemas.openxmlformats.org/officeDocument/2006/math">
-                    <m:r>
-                      <a:rPr lang="en-US" sz="2200" b="0" i="1" dirty="0" smtClean="0">
-                        <a:latin typeface="Cambria Math" panose="02040503050406030204" pitchFamily="18" charset="0"/>
-                      </a:rPr>
-                      <m:t>𝑚</m:t>
-                    </m:r>
-                  </m:oMath>
-                </a14:m>
-                <a:r>
-                  <a:rPr lang="en-US" sz="2200" dirty="0"/>
-                  <a:t>) </a:t>
-                </a:r>
-                <a:r>
-                  <a:rPr lang="ru-RU" sz="2200" dirty="0"/>
-                  <a:t>введем компоненты сглаживания.</a:t>
-                </a:r>
-                <a:endParaRPr lang="en-US" sz="2200" dirty="0"/>
-              </a:p>
-              <a:p>
-                <a:pPr marL="0" indent="0">
-                  <a:buNone/>
-                </a:pPr>
-                <a14:m>
-                  <m:oMathPara xmlns:m="http://schemas.openxmlformats.org/officeDocument/2006/math">
-                    <m:oMathParaPr>
-                      <m:jc m:val="centerGroup"/>
-                    </m:oMathParaPr>
-                    <m:oMath xmlns:m="http://schemas.openxmlformats.org/officeDocument/2006/math">
-                      <m:d>
-                        <m:dPr>
-                          <m:begChr m:val="{"/>
-                          <m:endChr m:val=""/>
-                          <m:ctrlPr>
-                            <a:rPr lang="en-US" sz="2200" i="1" smtClean="0">
-                              <a:latin typeface="Cambria Math" panose="02040503050406030204" pitchFamily="18" charset="0"/>
-                            </a:rPr>
-                          </m:ctrlPr>
-                        </m:dPr>
-                        <m:e>
-                          <m:eqArr>
-                            <m:eqArrPr>
-                              <m:ctrlPr>
-                                <a:rPr lang="en-US" sz="2200" i="1" smtClean="0">
-                                  <a:latin typeface="Cambria Math" panose="02040503050406030204" pitchFamily="18" charset="0"/>
-                                </a:rPr>
-                              </m:ctrlPr>
-                            </m:eqArrPr>
-                            <m:e>
-                              <m:sSub>
-                                <m:sSubPr>
-                                  <m:ctrlPr>
-                                    <a:rPr lang="en-US" sz="2200" i="1">
-                                      <a:latin typeface="Cambria Math" panose="02040503050406030204" pitchFamily="18" charset="0"/>
-                                    </a:rPr>
-                                  </m:ctrlPr>
-                                </m:sSubPr>
-                                <m:e>
-                                  <m:acc>
-                                    <m:accPr>
-                                      <m:chr m:val="̂"/>
-                                      <m:ctrlPr>
-                                        <a:rPr lang="en-US" sz="2200" i="1">
-                                          <a:latin typeface="Cambria Math" panose="02040503050406030204" pitchFamily="18" charset="0"/>
-                                        </a:rPr>
-                                      </m:ctrlPr>
-                                    </m:accPr>
-                                    <m:e>
-                                      <m:r>
-                                        <a:rPr lang="en-US" sz="2200" i="1">
-                                          <a:latin typeface="Cambria Math" panose="02040503050406030204" pitchFamily="18" charset="0"/>
-                                        </a:rPr>
-                                        <m:t>𝑦</m:t>
-                                      </m:r>
-                                    </m:e>
-                                  </m:acc>
-                                </m:e>
-                                <m:sub>
-                                  <m:r>
-                                    <a:rPr lang="en-US" sz="2200" i="1">
-                                      <a:latin typeface="Cambria Math" panose="02040503050406030204" pitchFamily="18" charset="0"/>
-                                    </a:rPr>
-                                    <m:t>𝑛</m:t>
-                                  </m:r>
-                                  <m:r>
-                                    <a:rPr lang="en-US" sz="2200" i="1">
-                                      <a:latin typeface="Cambria Math" panose="02040503050406030204" pitchFamily="18" charset="0"/>
-                                    </a:rPr>
-                                    <m:t>+</m:t>
-                                  </m:r>
-                                  <m:r>
-                                    <a:rPr lang="en-US" sz="2200" b="0" i="1" smtClean="0">
-                                      <a:latin typeface="Cambria Math" panose="02040503050406030204" pitchFamily="18" charset="0"/>
-                                    </a:rPr>
-                                    <m:t>h</m:t>
-                                  </m:r>
-                                </m:sub>
-                              </m:sSub>
-                              <m:r>
-                                <a:rPr lang="en-US" sz="2200" i="1">
-                                  <a:latin typeface="Cambria Math" panose="02040503050406030204" pitchFamily="18" charset="0"/>
-                                </a:rPr>
-                                <m:t>=</m:t>
-                              </m:r>
-                              <m:sSub>
-                                <m:sSubPr>
-                                  <m:ctrlPr>
-                                    <a:rPr lang="en-US" sz="2200" i="1">
-                                      <a:latin typeface="Cambria Math" panose="02040503050406030204" pitchFamily="18" charset="0"/>
-                                    </a:rPr>
-                                  </m:ctrlPr>
-                                </m:sSubPr>
-                                <m:e>
-                                  <m:r>
-                                    <a:rPr lang="en-US" sz="2200" i="1">
-                                      <a:latin typeface="Cambria Math" panose="02040503050406030204" pitchFamily="18" charset="0"/>
-                                    </a:rPr>
-                                    <m:t>𝑙</m:t>
-                                  </m:r>
-                                </m:e>
-                                <m:sub>
-                                  <m:r>
-                                    <a:rPr lang="en-US" sz="2200" i="1">
-                                      <a:latin typeface="Cambria Math" panose="02040503050406030204" pitchFamily="18" charset="0"/>
-                                    </a:rPr>
-                                    <m:t>𝑛</m:t>
-                                  </m:r>
-                                </m:sub>
-                              </m:sSub>
-                              <m:r>
-                                <a:rPr lang="en-US" sz="2200" i="1">
-                                  <a:latin typeface="Cambria Math" panose="02040503050406030204" pitchFamily="18" charset="0"/>
-                                </a:rPr>
-                                <m:t>+</m:t>
-                              </m:r>
-                              <m:r>
-                                <a:rPr lang="en-US" sz="2200" b="0" i="1" smtClean="0">
-                                  <a:latin typeface="Cambria Math" panose="02040503050406030204" pitchFamily="18" charset="0"/>
-                                </a:rPr>
-                                <m:t>h</m:t>
-                              </m:r>
-                              <m:r>
-                                <a:rPr lang="en-US" sz="2200" b="0" i="1" smtClean="0">
-                                  <a:latin typeface="Cambria Math" panose="02040503050406030204" pitchFamily="18" charset="0"/>
-                                </a:rPr>
-                                <m:t>⋅</m:t>
-                              </m:r>
-                              <m:sSub>
-                                <m:sSubPr>
-                                  <m:ctrlPr>
-                                    <a:rPr lang="en-US" sz="2200" i="1">
-                                      <a:latin typeface="Cambria Math" panose="02040503050406030204" pitchFamily="18" charset="0"/>
-                                    </a:rPr>
-                                  </m:ctrlPr>
-                                </m:sSubPr>
-                                <m:e>
-                                  <m:r>
-                                    <a:rPr lang="en-US" sz="2200" i="1">
-                                      <a:latin typeface="Cambria Math" panose="02040503050406030204" pitchFamily="18" charset="0"/>
-                                    </a:rPr>
-                                    <m:t>𝑏</m:t>
-                                  </m:r>
-                                </m:e>
-                                <m:sub>
-                                  <m:r>
-                                    <a:rPr lang="en-US" sz="2200" i="1">
-                                      <a:latin typeface="Cambria Math" panose="02040503050406030204" pitchFamily="18" charset="0"/>
-                                    </a:rPr>
-                                    <m:t>𝑛</m:t>
-                                  </m:r>
-                                </m:sub>
-                              </m:sSub>
-                              <m:r>
-                                <a:rPr lang="ru-RU" sz="2200" b="0" i="1" smtClean="0">
-                                  <a:latin typeface="Cambria Math" panose="02040503050406030204" pitchFamily="18" charset="0"/>
-                                </a:rPr>
-                                <m:t>+</m:t>
-                              </m:r>
-                              <m:sSub>
-                                <m:sSubPr>
-                                  <m:ctrlPr>
-                                    <a:rPr lang="en-US" sz="2200" i="1">
-                                      <a:latin typeface="Cambria Math" panose="02040503050406030204" pitchFamily="18" charset="0"/>
-                                    </a:rPr>
-                                  </m:ctrlPr>
-                                </m:sSubPr>
-                                <m:e>
-                                  <m:r>
-                                    <a:rPr lang="en-US" sz="2200" i="1">
-                                      <a:latin typeface="Cambria Math" panose="02040503050406030204" pitchFamily="18" charset="0"/>
-                                    </a:rPr>
-                                    <m:t>𝑠</m:t>
-                                  </m:r>
-                                </m:e>
-                                <m:sub>
-                                  <m:r>
-                                    <a:rPr lang="en-US" sz="2200" i="1">
-                                      <a:latin typeface="Cambria Math" panose="02040503050406030204" pitchFamily="18" charset="0"/>
-                                    </a:rPr>
-                                    <m:t>𝑛</m:t>
-                                  </m:r>
-                                  <m:r>
-                                    <a:rPr lang="en-US" sz="2200" i="1">
-                                      <a:latin typeface="Cambria Math" panose="02040503050406030204" pitchFamily="18" charset="0"/>
-                                    </a:rPr>
-                                    <m:t>−</m:t>
-                                  </m:r>
-                                  <m:r>
-                                    <a:rPr lang="en-US" sz="2200" b="0" i="1" smtClean="0">
-                                      <a:latin typeface="Cambria Math" panose="02040503050406030204" pitchFamily="18" charset="0"/>
-                                    </a:rPr>
-                                    <m:t>𝑚</m:t>
-                                  </m:r>
-                                  <m:r>
-                                    <a:rPr lang="en-US" sz="2200" i="1">
-                                      <a:latin typeface="Cambria Math" panose="02040503050406030204" pitchFamily="18" charset="0"/>
-                                    </a:rPr>
-                                    <m:t>+</m:t>
-                                  </m:r>
-                                  <m:r>
-                                    <a:rPr lang="en-US" sz="2200" b="0" i="1" smtClean="0">
-                                      <a:latin typeface="Cambria Math" panose="02040503050406030204" pitchFamily="18" charset="0"/>
-                                    </a:rPr>
-                                    <m:t>∆</m:t>
-                                  </m:r>
-                                </m:sub>
-                              </m:sSub>
-                              <m:r>
-                                <a:rPr lang="en-US" sz="2200" i="1">
-                                  <a:latin typeface="Cambria Math" panose="02040503050406030204" pitchFamily="18" charset="0"/>
-                                </a:rPr>
-                                <m:t>;</m:t>
-                              </m:r>
-                              <m:r>
-                                <m:rPr>
-                                  <m:nor/>
-                                </m:rPr>
-                                <a:rPr lang="en-US" sz="2200" dirty="0"/>
-                                <m:t> </m:t>
-                              </m:r>
-                            </m:e>
-                            <m:e>
-                              <m:sSub>
-                                <m:sSubPr>
-                                  <m:ctrlPr>
-                                    <a:rPr lang="en-US" sz="2200" i="1">
-                                      <a:latin typeface="Cambria Math" panose="02040503050406030204" pitchFamily="18" charset="0"/>
-                                    </a:rPr>
-                                  </m:ctrlPr>
-                                </m:sSubPr>
-                                <m:e>
-                                  <m:r>
-                                    <a:rPr lang="en-US" sz="2200" i="1">
-                                      <a:latin typeface="Cambria Math" panose="02040503050406030204" pitchFamily="18" charset="0"/>
-                                    </a:rPr>
-                                    <m:t>𝑙</m:t>
-                                  </m:r>
-                                </m:e>
-                                <m:sub>
-                                  <m:r>
-                                    <a:rPr lang="en-US" sz="2200" i="1">
-                                      <a:latin typeface="Cambria Math" panose="02040503050406030204" pitchFamily="18" charset="0"/>
-                                    </a:rPr>
-                                    <m:t>𝑛</m:t>
-                                  </m:r>
-                                </m:sub>
-                              </m:sSub>
-                              <m:r>
-                                <a:rPr lang="en-US" sz="2200" i="1">
-                                  <a:latin typeface="Cambria Math" panose="02040503050406030204" pitchFamily="18" charset="0"/>
-                                </a:rPr>
-                                <m:t>=</m:t>
-                              </m:r>
-                              <m:r>
-                                <a:rPr lang="en-US" sz="2200" i="1">
-                                  <a:latin typeface="Cambria Math" panose="02040503050406030204" pitchFamily="18" charset="0"/>
-                                </a:rPr>
-                                <m:t>𝛼</m:t>
-                              </m:r>
-                              <m:sSub>
-                                <m:sSubPr>
-                                  <m:ctrlPr>
-                                    <a:rPr lang="en-US" sz="2200" i="1">
-                                      <a:latin typeface="Cambria Math" panose="02040503050406030204" pitchFamily="18" charset="0"/>
-                                    </a:rPr>
-                                  </m:ctrlPr>
-                                </m:sSubPr>
-                                <m:e>
-                                  <m:r>
-                                    <a:rPr lang="en-US" sz="2200" i="1">
-                                      <a:latin typeface="Cambria Math" panose="02040503050406030204" pitchFamily="18" charset="0"/>
-                                    </a:rPr>
-                                    <m:t>𝑦</m:t>
-                                  </m:r>
-                                </m:e>
-                                <m:sub>
-                                  <m:r>
-                                    <a:rPr lang="en-US" sz="2200" i="1">
-                                      <a:latin typeface="Cambria Math" panose="02040503050406030204" pitchFamily="18" charset="0"/>
-                                    </a:rPr>
-                                    <m:t>𝑛</m:t>
-                                  </m:r>
-                                </m:sub>
-                              </m:sSub>
-                              <m:r>
-                                <a:rPr lang="en-US" sz="2200" i="1">
-                                  <a:latin typeface="Cambria Math" panose="02040503050406030204" pitchFamily="18" charset="0"/>
-                                </a:rPr>
-                                <m:t>+</m:t>
-                              </m:r>
-                              <m:d>
-                                <m:dPr>
-                                  <m:ctrlPr>
-                                    <a:rPr lang="en-US" sz="2200" i="1">
-                                      <a:latin typeface="Cambria Math" panose="02040503050406030204" pitchFamily="18" charset="0"/>
-                                    </a:rPr>
-                                  </m:ctrlPr>
-                                </m:dPr>
-                                <m:e>
-                                  <m:r>
-                                    <a:rPr lang="en-US" sz="2200" i="1">
-                                      <a:latin typeface="Cambria Math" panose="02040503050406030204" pitchFamily="18" charset="0"/>
-                                    </a:rPr>
-                                    <m:t>1−</m:t>
-                                  </m:r>
-                                  <m:r>
-                                    <a:rPr lang="en-US" sz="2200" i="1">
-                                      <a:latin typeface="Cambria Math" panose="02040503050406030204" pitchFamily="18" charset="0"/>
-                                    </a:rPr>
-                                    <m:t>𝛼</m:t>
-                                  </m:r>
-                                </m:e>
-                              </m:d>
-                              <m:d>
-                                <m:dPr>
-                                  <m:ctrlPr>
-                                    <a:rPr lang="en-US" sz="2200" i="1">
-                                      <a:latin typeface="Cambria Math" panose="02040503050406030204" pitchFamily="18" charset="0"/>
-                                    </a:rPr>
-                                  </m:ctrlPr>
-                                </m:dPr>
-                                <m:e>
-                                  <m:sSub>
-                                    <m:sSubPr>
-                                      <m:ctrlPr>
-                                        <a:rPr lang="en-US" sz="2200" i="1">
-                                          <a:latin typeface="Cambria Math" panose="02040503050406030204" pitchFamily="18" charset="0"/>
-                                        </a:rPr>
-                                      </m:ctrlPr>
-                                    </m:sSubPr>
-                                    <m:e>
-                                      <m:r>
-                                        <a:rPr lang="en-US" sz="2200" i="1">
-                                          <a:latin typeface="Cambria Math" panose="02040503050406030204" pitchFamily="18" charset="0"/>
-                                        </a:rPr>
-                                        <m:t>𝑙</m:t>
-                                      </m:r>
-                                    </m:e>
-                                    <m:sub>
-                                      <m:r>
-                                        <a:rPr lang="en-US" sz="2200" i="1">
-                                          <a:latin typeface="Cambria Math" panose="02040503050406030204" pitchFamily="18" charset="0"/>
-                                        </a:rPr>
-                                        <m:t>𝑛</m:t>
-                                      </m:r>
-                                      <m:r>
-                                        <a:rPr lang="en-US" sz="2200" i="1">
-                                          <a:latin typeface="Cambria Math" panose="02040503050406030204" pitchFamily="18" charset="0"/>
-                                        </a:rPr>
-                                        <m:t>−1</m:t>
-                                      </m:r>
-                                    </m:sub>
-                                  </m:sSub>
-                                  <m:r>
-                                    <a:rPr lang="en-US" sz="2200" i="1">
-                                      <a:latin typeface="Cambria Math" panose="02040503050406030204" pitchFamily="18" charset="0"/>
-                                    </a:rPr>
-                                    <m:t>+</m:t>
-                                  </m:r>
-                                  <m:sSub>
-                                    <m:sSubPr>
-                                      <m:ctrlPr>
-                                        <a:rPr lang="en-US" sz="2200" i="1">
-                                          <a:latin typeface="Cambria Math" panose="02040503050406030204" pitchFamily="18" charset="0"/>
-                                        </a:rPr>
-                                      </m:ctrlPr>
-                                    </m:sSubPr>
-                                    <m:e>
-                                      <m:r>
-                                        <a:rPr lang="en-US" sz="2200" i="1">
-                                          <a:latin typeface="Cambria Math" panose="02040503050406030204" pitchFamily="18" charset="0"/>
-                                        </a:rPr>
-                                        <m:t>𝑏</m:t>
-                                      </m:r>
-                                    </m:e>
-                                    <m:sub>
-                                      <m:r>
-                                        <a:rPr lang="en-US" sz="2200" i="1">
-                                          <a:latin typeface="Cambria Math" panose="02040503050406030204" pitchFamily="18" charset="0"/>
-                                        </a:rPr>
-                                        <m:t>𝑛</m:t>
-                                      </m:r>
-                                      <m:r>
-                                        <a:rPr lang="en-US" sz="2200" i="1">
-                                          <a:latin typeface="Cambria Math" panose="02040503050406030204" pitchFamily="18" charset="0"/>
-                                        </a:rPr>
-                                        <m:t>−1</m:t>
-                                      </m:r>
-                                    </m:sub>
-                                  </m:sSub>
-                                </m:e>
-                              </m:d>
-                              <m:r>
-                                <a:rPr lang="ru-RU" sz="2200" b="0" i="1" smtClean="0">
-                                  <a:latin typeface="Cambria Math" panose="02040503050406030204" pitchFamily="18" charset="0"/>
-                                </a:rPr>
-                                <m:t>   (</m:t>
-                              </m:r>
-                              <m:r>
-                                <a:rPr lang="en-US" sz="2200" i="1">
-                                  <a:latin typeface="Cambria Math" panose="02040503050406030204" pitchFamily="18" charset="0"/>
-                                </a:rPr>
-                                <m:t>𝑙𝑒𝑣𝑒𝑙</m:t>
-                              </m:r>
-                              <m:r>
-                                <a:rPr lang="ru-RU" sz="2200" b="0" i="1" smtClean="0">
-                                  <a:latin typeface="Cambria Math" panose="02040503050406030204" pitchFamily="18" charset="0"/>
-                                </a:rPr>
-                                <m:t>)</m:t>
-                              </m:r>
-                            </m:e>
-                            <m:e>
-                              <m:sSub>
-                                <m:sSubPr>
-                                  <m:ctrlPr>
-                                    <a:rPr lang="en-US" sz="2200" i="1">
-                                      <a:latin typeface="Cambria Math" panose="02040503050406030204" pitchFamily="18" charset="0"/>
-                                    </a:rPr>
-                                  </m:ctrlPr>
-                                </m:sSubPr>
-                                <m:e>
-                                  <m:r>
-                                    <a:rPr lang="en-US" sz="2200" i="1">
-                                      <a:latin typeface="Cambria Math" panose="02040503050406030204" pitchFamily="18" charset="0"/>
-                                    </a:rPr>
-                                    <m:t>𝑏</m:t>
-                                  </m:r>
-                                </m:e>
-                                <m:sub>
-                                  <m:r>
-                                    <a:rPr lang="en-US" sz="2200" i="1">
-                                      <a:latin typeface="Cambria Math" panose="02040503050406030204" pitchFamily="18" charset="0"/>
-                                    </a:rPr>
-                                    <m:t>𝑛</m:t>
-                                  </m:r>
-                                </m:sub>
-                              </m:sSub>
-                              <m:r>
-                                <a:rPr lang="en-US" sz="2200" i="1">
-                                  <a:latin typeface="Cambria Math" panose="02040503050406030204" pitchFamily="18" charset="0"/>
-                                </a:rPr>
-                                <m:t>=</m:t>
-                              </m:r>
-                              <m:r>
-                                <a:rPr lang="en-US" sz="2200" i="1">
-                                  <a:latin typeface="Cambria Math" panose="02040503050406030204" pitchFamily="18" charset="0"/>
-                                </a:rPr>
-                                <m:t>𝛽</m:t>
-                              </m:r>
-                              <m:d>
-                                <m:dPr>
-                                  <m:ctrlPr>
-                                    <a:rPr lang="en-US" sz="2200" i="1">
-                                      <a:latin typeface="Cambria Math" panose="02040503050406030204" pitchFamily="18" charset="0"/>
-                                    </a:rPr>
-                                  </m:ctrlPr>
-                                </m:dPr>
-                                <m:e>
-                                  <m:sSub>
-                                    <m:sSubPr>
-                                      <m:ctrlPr>
-                                        <a:rPr lang="en-US" sz="2200" i="1">
-                                          <a:latin typeface="Cambria Math" panose="02040503050406030204" pitchFamily="18" charset="0"/>
-                                        </a:rPr>
-                                      </m:ctrlPr>
-                                    </m:sSubPr>
-                                    <m:e>
-                                      <m:r>
-                                        <a:rPr lang="en-US" sz="2200" i="1">
-                                          <a:latin typeface="Cambria Math" panose="02040503050406030204" pitchFamily="18" charset="0"/>
-                                        </a:rPr>
-                                        <m:t>𝑙</m:t>
-                                      </m:r>
-                                    </m:e>
-                                    <m:sub>
-                                      <m:r>
-                                        <a:rPr lang="en-US" sz="2200" i="1">
-                                          <a:latin typeface="Cambria Math" panose="02040503050406030204" pitchFamily="18" charset="0"/>
-                                        </a:rPr>
-                                        <m:t>𝑛</m:t>
-                                      </m:r>
-                                    </m:sub>
-                                  </m:sSub>
-                                  <m:r>
-                                    <a:rPr lang="en-US" sz="2200" i="1">
-                                      <a:latin typeface="Cambria Math" panose="02040503050406030204" pitchFamily="18" charset="0"/>
-                                    </a:rPr>
-                                    <m:t>−</m:t>
-                                  </m:r>
-                                  <m:sSub>
-                                    <m:sSubPr>
-                                      <m:ctrlPr>
-                                        <a:rPr lang="en-US" sz="2200" i="1">
-                                          <a:latin typeface="Cambria Math" panose="02040503050406030204" pitchFamily="18" charset="0"/>
-                                        </a:rPr>
-                                      </m:ctrlPr>
-                                    </m:sSubPr>
-                                    <m:e>
-                                      <m:r>
-                                        <a:rPr lang="en-US" sz="2200" i="1">
-                                          <a:latin typeface="Cambria Math" panose="02040503050406030204" pitchFamily="18" charset="0"/>
-                                        </a:rPr>
-                                        <m:t>𝑙</m:t>
-                                      </m:r>
-                                    </m:e>
-                                    <m:sub>
-                                      <m:r>
-                                        <a:rPr lang="en-US" sz="2200" i="1">
-                                          <a:latin typeface="Cambria Math" panose="02040503050406030204" pitchFamily="18" charset="0"/>
-                                        </a:rPr>
-                                        <m:t>𝑛</m:t>
-                                      </m:r>
-                                      <m:r>
-                                        <a:rPr lang="en-US" sz="2200" i="1">
-                                          <a:latin typeface="Cambria Math" panose="02040503050406030204" pitchFamily="18" charset="0"/>
-                                        </a:rPr>
-                                        <m:t>−1</m:t>
-                                      </m:r>
-                                    </m:sub>
-                                  </m:sSub>
-                                </m:e>
-                              </m:d>
-                              <m:r>
-                                <a:rPr lang="en-US" sz="2200" i="1">
-                                  <a:latin typeface="Cambria Math" panose="02040503050406030204" pitchFamily="18" charset="0"/>
-                                </a:rPr>
-                                <m:t>+</m:t>
-                              </m:r>
-                              <m:d>
-                                <m:dPr>
-                                  <m:ctrlPr>
-                                    <a:rPr lang="en-US" sz="2200" i="1">
-                                      <a:latin typeface="Cambria Math" panose="02040503050406030204" pitchFamily="18" charset="0"/>
-                                    </a:rPr>
-                                  </m:ctrlPr>
-                                </m:dPr>
-                                <m:e>
-                                  <m:r>
-                                    <a:rPr lang="en-US" sz="2200" i="1">
-                                      <a:latin typeface="Cambria Math" panose="02040503050406030204" pitchFamily="18" charset="0"/>
-                                    </a:rPr>
-                                    <m:t>1−</m:t>
-                                  </m:r>
-                                  <m:r>
-                                    <a:rPr lang="en-US" sz="2200" i="1">
-                                      <a:latin typeface="Cambria Math" panose="02040503050406030204" pitchFamily="18" charset="0"/>
-                                    </a:rPr>
-                                    <m:t>𝛽</m:t>
-                                  </m:r>
-                                </m:e>
-                              </m:d>
-                              <m:sSub>
-                                <m:sSubPr>
-                                  <m:ctrlPr>
-                                    <a:rPr lang="en-US" sz="2200" i="1">
-                                      <a:latin typeface="Cambria Math" panose="02040503050406030204" pitchFamily="18" charset="0"/>
-                                    </a:rPr>
-                                  </m:ctrlPr>
-                                </m:sSubPr>
-                                <m:e>
-                                  <m:r>
-                                    <a:rPr lang="en-US" sz="2200" i="1">
-                                      <a:latin typeface="Cambria Math" panose="02040503050406030204" pitchFamily="18" charset="0"/>
-                                    </a:rPr>
-                                    <m:t>𝑏</m:t>
-                                  </m:r>
-                                </m:e>
-                                <m:sub>
-                                  <m:r>
-                                    <a:rPr lang="en-US" sz="2200" i="1">
-                                      <a:latin typeface="Cambria Math" panose="02040503050406030204" pitchFamily="18" charset="0"/>
-                                    </a:rPr>
-                                    <m:t>𝑛</m:t>
-                                  </m:r>
-                                  <m:r>
-                                    <a:rPr lang="en-US" sz="2200" i="1">
-                                      <a:latin typeface="Cambria Math" panose="02040503050406030204" pitchFamily="18" charset="0"/>
-                                    </a:rPr>
-                                    <m:t>−1</m:t>
-                                  </m:r>
-                                </m:sub>
-                              </m:sSub>
-                              <m:r>
-                                <a:rPr lang="ru-RU" sz="2200" b="0" i="1" smtClean="0">
-                                  <a:latin typeface="Cambria Math" panose="02040503050406030204" pitchFamily="18" charset="0"/>
-                                </a:rPr>
-                                <m:t>  (</m:t>
-                              </m:r>
-                              <m:r>
-                                <a:rPr lang="en-US" sz="2200" i="1">
-                                  <a:latin typeface="Cambria Math" panose="02040503050406030204" pitchFamily="18" charset="0"/>
-                                </a:rPr>
-                                <m:t>𝑡𝑟𝑒𝑛𝑑</m:t>
-                              </m:r>
-                              <m:r>
-                                <a:rPr lang="ru-RU" sz="2200" b="0" i="1" smtClean="0">
-                                  <a:latin typeface="Cambria Math" panose="02040503050406030204" pitchFamily="18" charset="0"/>
-                                </a:rPr>
-                                <m:t>)</m:t>
-                              </m:r>
-                            </m:e>
-                            <m:e>
-                              <m:sSub>
-                                <m:sSubPr>
-                                  <m:ctrlPr>
-                                    <a:rPr lang="en-US" sz="2200" b="0" i="1" smtClean="0">
-                                      <a:latin typeface="Cambria Math" panose="02040503050406030204" pitchFamily="18" charset="0"/>
-                                    </a:rPr>
-                                  </m:ctrlPr>
-                                </m:sSubPr>
-                                <m:e>
-                                  <m:r>
-                                    <a:rPr lang="en-US" sz="2200" b="0" i="1" smtClean="0">
-                                      <a:latin typeface="Cambria Math" panose="02040503050406030204" pitchFamily="18" charset="0"/>
-                                    </a:rPr>
-                                    <m:t>𝑠</m:t>
-                                  </m:r>
-                                </m:e>
-                                <m:sub>
-                                  <m:r>
-                                    <a:rPr lang="en-US" sz="2200" b="0" i="1" smtClean="0">
-                                      <a:latin typeface="Cambria Math" panose="02040503050406030204" pitchFamily="18" charset="0"/>
-                                    </a:rPr>
-                                    <m:t>𝑛</m:t>
-                                  </m:r>
-                                </m:sub>
-                              </m:sSub>
-                              <m:r>
-                                <a:rPr lang="en-US" sz="2200" b="0" i="1" smtClean="0">
-                                  <a:latin typeface="Cambria Math" panose="02040503050406030204" pitchFamily="18" charset="0"/>
-                                </a:rPr>
-                                <m:t>=</m:t>
-                              </m:r>
-                              <m:r>
-                                <a:rPr lang="en-US" sz="2200" b="0" i="1" smtClean="0">
-                                  <a:latin typeface="Cambria Math" panose="02040503050406030204" pitchFamily="18" charset="0"/>
-                                </a:rPr>
-                                <m:t>𝛾</m:t>
-                              </m:r>
-                              <m:d>
-                                <m:dPr>
-                                  <m:ctrlPr>
-                                    <a:rPr lang="en-US" sz="2200" b="0" i="1" smtClean="0">
-                                      <a:latin typeface="Cambria Math" panose="02040503050406030204" pitchFamily="18" charset="0"/>
-                                    </a:rPr>
-                                  </m:ctrlPr>
-                                </m:dPr>
-                                <m:e>
-                                  <m:sSub>
-                                    <m:sSubPr>
-                                      <m:ctrlPr>
-                                        <a:rPr lang="en-US" sz="2200" b="0" i="1" smtClean="0">
-                                          <a:latin typeface="Cambria Math" panose="02040503050406030204" pitchFamily="18" charset="0"/>
-                                        </a:rPr>
-                                      </m:ctrlPr>
-                                    </m:sSubPr>
-                                    <m:e>
-                                      <m:r>
-                                        <a:rPr lang="en-US" sz="2200" b="0" i="1" smtClean="0">
-                                          <a:latin typeface="Cambria Math" panose="02040503050406030204" pitchFamily="18" charset="0"/>
-                                        </a:rPr>
-                                        <m:t>𝑦</m:t>
-                                      </m:r>
-                                    </m:e>
-                                    <m:sub>
-                                      <m:r>
-                                        <a:rPr lang="en-US" sz="2200" b="0" i="1" smtClean="0">
-                                          <a:latin typeface="Cambria Math" panose="02040503050406030204" pitchFamily="18" charset="0"/>
-                                        </a:rPr>
-                                        <m:t>𝑛</m:t>
-                                      </m:r>
-                                    </m:sub>
-                                  </m:sSub>
-                                  <m:r>
-                                    <a:rPr lang="en-US" sz="2200" b="0" i="1" smtClean="0">
-                                      <a:latin typeface="Cambria Math" panose="02040503050406030204" pitchFamily="18" charset="0"/>
-                                    </a:rPr>
-                                    <m:t>−</m:t>
-                                  </m:r>
-                                  <m:sSub>
-                                    <m:sSubPr>
-                                      <m:ctrlPr>
-                                        <a:rPr lang="en-US" sz="2200" b="0" i="1" smtClean="0">
-                                          <a:latin typeface="Cambria Math" panose="02040503050406030204" pitchFamily="18" charset="0"/>
-                                        </a:rPr>
-                                      </m:ctrlPr>
-                                    </m:sSubPr>
-                                    <m:e>
-                                      <m:r>
-                                        <a:rPr lang="en-US" sz="2200" b="0" i="1" smtClean="0">
-                                          <a:latin typeface="Cambria Math" panose="02040503050406030204" pitchFamily="18" charset="0"/>
-                                        </a:rPr>
-                                        <m:t>𝑙</m:t>
-                                      </m:r>
-                                    </m:e>
-                                    <m:sub>
-                                      <m:r>
-                                        <a:rPr lang="en-US" sz="2200" b="0" i="1" smtClean="0">
-                                          <a:latin typeface="Cambria Math" panose="02040503050406030204" pitchFamily="18" charset="0"/>
-                                        </a:rPr>
-                                        <m:t>𝑛</m:t>
-                                      </m:r>
-                                    </m:sub>
-                                  </m:sSub>
-                                </m:e>
-                              </m:d>
-                              <m:r>
-                                <a:rPr lang="en-US" sz="2200" b="0" i="1" smtClean="0">
-                                  <a:latin typeface="Cambria Math" panose="02040503050406030204" pitchFamily="18" charset="0"/>
-                                </a:rPr>
-                                <m:t>+</m:t>
-                              </m:r>
-                              <m:d>
-                                <m:dPr>
-                                  <m:ctrlPr>
-                                    <a:rPr lang="en-US" sz="2200" b="0" i="1" smtClean="0">
-                                      <a:latin typeface="Cambria Math" panose="02040503050406030204" pitchFamily="18" charset="0"/>
-                                    </a:rPr>
-                                  </m:ctrlPr>
-                                </m:dPr>
-                                <m:e>
-                                  <m:r>
-                                    <a:rPr lang="en-US" sz="2200" b="0" i="1" smtClean="0">
-                                      <a:latin typeface="Cambria Math" panose="02040503050406030204" pitchFamily="18" charset="0"/>
-                                    </a:rPr>
-                                    <m:t>1−</m:t>
-                                  </m:r>
-                                  <m:r>
-                                    <a:rPr lang="en-US" sz="2200" b="0" i="1" smtClean="0">
-                                      <a:latin typeface="Cambria Math" panose="02040503050406030204" pitchFamily="18" charset="0"/>
-                                    </a:rPr>
-                                    <m:t>𝛾</m:t>
-                                  </m:r>
-                                </m:e>
-                              </m:d>
-                              <m:sSub>
-                                <m:sSubPr>
-                                  <m:ctrlPr>
-                                    <a:rPr lang="en-US" sz="2200" b="0" i="1" smtClean="0">
-                                      <a:latin typeface="Cambria Math" panose="02040503050406030204" pitchFamily="18" charset="0"/>
-                                    </a:rPr>
-                                  </m:ctrlPr>
-                                </m:sSubPr>
-                                <m:e>
-                                  <m:r>
-                                    <a:rPr lang="en-US" sz="2200" b="0" i="1" smtClean="0">
-                                      <a:latin typeface="Cambria Math" panose="02040503050406030204" pitchFamily="18" charset="0"/>
-                                    </a:rPr>
-                                    <m:t>𝑠</m:t>
-                                  </m:r>
-                                </m:e>
-                                <m:sub>
-                                  <m:r>
-                                    <a:rPr lang="en-US" sz="2200" b="0" i="1" smtClean="0">
-                                      <a:latin typeface="Cambria Math" panose="02040503050406030204" pitchFamily="18" charset="0"/>
-                                    </a:rPr>
-                                    <m:t>𝑛</m:t>
-                                  </m:r>
-                                  <m:r>
-                                    <a:rPr lang="en-US" sz="2200" b="0" i="1" smtClean="0">
-                                      <a:latin typeface="Cambria Math" panose="02040503050406030204" pitchFamily="18" charset="0"/>
-                                    </a:rPr>
-                                    <m:t>−</m:t>
-                                  </m:r>
-                                  <m:r>
-                                    <a:rPr lang="en-US" sz="2200" b="0" i="1" smtClean="0">
-                                      <a:latin typeface="Cambria Math" panose="02040503050406030204" pitchFamily="18" charset="0"/>
-                                    </a:rPr>
-                                    <m:t>𝑚</m:t>
-                                  </m:r>
-                                </m:sub>
-                              </m:sSub>
-                            </m:e>
-                          </m:eqArr>
-                        </m:e>
-                      </m:d>
-                    </m:oMath>
-                  </m:oMathPara>
-                </a14:m>
-                <a:endParaRPr lang="en-US" sz="2200" dirty="0"/>
-              </a:p>
-              <a:p>
-                <a:pPr marL="0" indent="0">
-                  <a:buNone/>
-                </a:pPr>
-                <a:r>
-                  <a:rPr lang="ru-RU" sz="2000" dirty="0"/>
-                  <a:t>где </a:t>
-                </a:r>
-                <a14:m>
-                  <m:oMath xmlns:m="http://schemas.openxmlformats.org/officeDocument/2006/math">
-                    <m:r>
-                      <a:rPr lang="en-US" sz="2000" i="1">
-                        <a:latin typeface="Cambria Math" panose="02040503050406030204" pitchFamily="18" charset="0"/>
-                      </a:rPr>
-                      <m:t>𝛾</m:t>
-                    </m:r>
-                  </m:oMath>
-                </a14:m>
-                <a:r>
-                  <a:rPr lang="ru-RU" sz="2000" dirty="0"/>
-                  <a:t> – коэффициент сезонного сглаживания,</a:t>
-                </a:r>
-                <a:r>
-                  <a:rPr lang="en-US" sz="2000" dirty="0"/>
-                  <a:t> </a:t>
-                </a:r>
-                <a14:m>
-                  <m:oMath xmlns:m="http://schemas.openxmlformats.org/officeDocument/2006/math">
-                    <m:r>
-                      <a:rPr lang="en-US" sz="2000" i="1">
-                        <a:latin typeface="Cambria Math" panose="02040503050406030204" pitchFamily="18" charset="0"/>
-                      </a:rPr>
-                      <m:t>𝑚</m:t>
-                    </m:r>
-                  </m:oMath>
-                </a14:m>
-                <a:r>
-                  <a:rPr lang="en-US" sz="2000" dirty="0"/>
-                  <a:t> – </a:t>
-                </a:r>
-                <a:r>
-                  <a:rPr lang="ru-RU" sz="2000" dirty="0"/>
-                  <a:t>период сезонность,</a:t>
-                </a:r>
-                <a14:m>
-                  <m:oMath xmlns:m="http://schemas.openxmlformats.org/officeDocument/2006/math">
-                    <m:r>
-                      <a:rPr lang="en-US" sz="2000" i="1">
-                        <a:latin typeface="Cambria Math" panose="02040503050406030204" pitchFamily="18" charset="0"/>
-                      </a:rPr>
-                      <m:t>∆</m:t>
-                    </m:r>
-                    <m:r>
-                      <a:rPr lang="en-US" sz="2000" b="0" i="1" smtClean="0">
-                        <a:latin typeface="Cambria Math" panose="02040503050406030204" pitchFamily="18" charset="0"/>
-                      </a:rPr>
-                      <m:t>=</m:t>
-                    </m:r>
-                    <m:r>
-                      <a:rPr lang="en-US" sz="2000" i="1">
-                        <a:latin typeface="Cambria Math" panose="02040503050406030204" pitchFamily="18" charset="0"/>
-                      </a:rPr>
-                      <m:t>𝑑</m:t>
-                    </m:r>
-                    <m:r>
-                      <a:rPr lang="en-US" sz="2000" i="1">
-                        <a:latin typeface="Cambria Math" panose="02040503050406030204" pitchFamily="18" charset="0"/>
-                      </a:rPr>
-                      <m:t> </m:t>
-                    </m:r>
-                    <m:r>
-                      <a:rPr lang="en-US" sz="2000" i="1">
-                        <a:latin typeface="Cambria Math" panose="02040503050406030204" pitchFamily="18" charset="0"/>
-                      </a:rPr>
-                      <m:t>𝑚𝑜𝑑</m:t>
-                    </m:r>
-                    <m:r>
-                      <a:rPr lang="en-US" sz="2000" i="1">
-                        <a:latin typeface="Cambria Math" panose="02040503050406030204" pitchFamily="18" charset="0"/>
-                      </a:rPr>
-                      <m:t> </m:t>
-                    </m:r>
-                    <m:r>
-                      <a:rPr lang="en-US" sz="2000" i="1">
-                        <a:latin typeface="Cambria Math" panose="02040503050406030204" pitchFamily="18" charset="0"/>
-                      </a:rPr>
-                      <m:t>𝑚</m:t>
-                    </m:r>
-                  </m:oMath>
-                </a14:m>
-                <a:r>
-                  <a:rPr lang="ru-RU" sz="2000" dirty="0"/>
-                  <a:t> – смещение относительного последнего полного сезона в данных</a:t>
-                </a:r>
-                <a:endParaRPr lang="en-US" sz="2000" dirty="0"/>
-              </a:p>
-              <a:p>
-                <a:pPr marL="0" indent="0">
-                  <a:buNone/>
-                </a:pPr>
-                <a:endParaRPr lang="en-US" sz="2000" i="1" dirty="0">
-                  <a:latin typeface="Cambria Math" panose="02040503050406030204" pitchFamily="18" charset="0"/>
-                </a:endParaRPr>
-              </a:p>
-              <a:p>
-                <a:pPr marL="0" indent="0">
-                  <a:buNone/>
-                </a:pPr>
-                <a:endParaRPr lang="ru-RU" sz="2000" dirty="0"/>
-              </a:p>
-            </p:txBody>
-          </p:sp>
-        </mc:Choice>
-        <mc:Fallback xmlns="">
-          <p:sp>
-            <p:nvSpPr>
-              <p:cNvPr id="3" name="Объект 2">
-                <a:extLst>
-                  <a:ext uri="{FF2B5EF4-FFF2-40B4-BE49-F238E27FC236}">
-                    <a16:creationId xmlns:a16="http://schemas.microsoft.com/office/drawing/2014/main" id="{9CFDC76D-90F0-4FD7-8BA6-954D6D2E6FFD}"/>
-                  </a:ext>
-                </a:extLst>
-              </p:cNvPr>
-              <p:cNvSpPr>
-                <a:spLocks noGrp="1" noRot="1" noChangeAspect="1" noMove="1" noResize="1" noEditPoints="1" noAdjustHandles="1" noChangeArrowheads="1" noChangeShapeType="1" noTextEdit="1"/>
-              </p:cNvSpPr>
-              <p:nvPr>
-                <p:ph idx="1"/>
-              </p:nvPr>
-            </p:nvSpPr>
-            <p:spPr>
-              <a:xfrm>
-                <a:off x="226957" y="817117"/>
-                <a:ext cx="11791949" cy="5502274"/>
-              </a:xfrm>
-              <a:blipFill>
-                <a:blip r:embed="rId3"/>
-                <a:stretch>
-                  <a:fillRect l="-672" t="-1329"/>
-                </a:stretch>
-              </a:blipFill>
-            </p:spPr>
-            <p:txBody>
-              <a:bodyPr/>
-              <a:lstStyle/>
-              <a:p>
-                <a:r>
-                  <a:rPr lang="ru-RU">
-                    <a:noFill/>
-                  </a:rPr>
-                  <a:t> </a:t>
-                </a:r>
-              </a:p>
-            </p:txBody>
-          </p:sp>
-        </mc:Fallback>
-      </mc:AlternateContent>
-      <p:sp>
-        <p:nvSpPr>
-          <p:cNvPr id="5" name="Прямоугольник 4"/>
-          <p:cNvSpPr/>
-          <p:nvPr/>
-        </p:nvSpPr>
-        <p:spPr>
-          <a:xfrm>
-            <a:off x="504825" y="6488668"/>
-            <a:ext cx="9077325" cy="338554"/>
-          </a:xfrm>
-          <a:prstGeom prst="rect">
-            <a:avLst/>
-          </a:prstGeom>
-        </p:spPr>
-        <p:txBody>
-          <a:bodyPr wrap="square">
-            <a:spAutoFit/>
-          </a:bodyPr>
-          <a:lstStyle/>
-          <a:p>
-            <a:r>
-              <a:rPr lang="ru-RU" sz="1600" dirty="0"/>
-              <a:t>https://education.yandex.ru/handbook/ml/article/analitika-vremennyh-ryadov</a:t>
-            </a:r>
-          </a:p>
-        </p:txBody>
-      </p:sp>
-      <p:sp>
-        <p:nvSpPr>
-          <p:cNvPr id="6" name="Прямоугольник 5"/>
-          <p:cNvSpPr/>
-          <p:nvPr/>
-        </p:nvSpPr>
-        <p:spPr>
-          <a:xfrm>
-            <a:off x="7331127" y="6488668"/>
-            <a:ext cx="3727624" cy="338554"/>
-          </a:xfrm>
-          <a:prstGeom prst="rect">
-            <a:avLst/>
-          </a:prstGeom>
-        </p:spPr>
-        <p:txBody>
-          <a:bodyPr wrap="none">
-            <a:spAutoFit/>
-          </a:bodyPr>
-          <a:lstStyle/>
-          <a:p>
-            <a:r>
-              <a:rPr lang="ru-RU" sz="1600" dirty="0"/>
-              <a:t>https://otexts.com/fpp2/holt-winters.html</a:t>
-            </a:r>
-          </a:p>
-        </p:txBody>
-      </p:sp>
-      <p:sp>
-        <p:nvSpPr>
-          <p:cNvPr id="10" name="Прямоугольник 9"/>
-          <p:cNvSpPr/>
-          <p:nvPr/>
-        </p:nvSpPr>
-        <p:spPr>
-          <a:xfrm>
-            <a:off x="346840" y="3826401"/>
-            <a:ext cx="5666554" cy="2800767"/>
-          </a:xfrm>
-          <a:prstGeom prst="rect">
-            <a:avLst/>
-          </a:prstGeom>
-        </p:spPr>
-        <p:txBody>
-          <a:bodyPr wrap="square">
-            <a:spAutoFit/>
-          </a:bodyPr>
-          <a:lstStyle/>
-          <a:p>
-            <a:pPr algn="just"/>
-            <a:r>
-              <a:rPr lang="ru-RU" sz="2000" dirty="0"/>
-              <a:t>В модели Сезонная компонента – это текущее значение без уровня и предыдущая сезонная компонента</a:t>
-            </a:r>
-          </a:p>
-          <a:p>
-            <a:pPr marL="285750" indent="-285750" algn="just">
-              <a:buFont typeface="Arial" panose="020B0604020202020204" pitchFamily="34" charset="0"/>
-              <a:buChar char="•"/>
-            </a:pPr>
-            <a:r>
-              <a:rPr lang="ru-RU" sz="2000" dirty="0"/>
-              <a:t>Сезон – сравнительно быстрые изменения с одинаковым периодом!</a:t>
-            </a:r>
-            <a:endParaRPr lang="en-US" sz="2000" dirty="0"/>
-          </a:p>
-          <a:p>
-            <a:pPr marL="342900" indent="-342900" algn="just">
-              <a:buFont typeface="Arial" panose="020B0604020202020204" pitchFamily="34" charset="0"/>
-              <a:buChar char="•"/>
-            </a:pPr>
-            <a:r>
-              <a:rPr lang="ru-RU" sz="2000" dirty="0"/>
-              <a:t>Могут быть также мультипликативная и затухающая модели тренда и сезонности.</a:t>
-            </a:r>
-          </a:p>
-          <a:p>
-            <a:pPr algn="just"/>
-            <a:r>
-              <a:rPr lang="ru-RU" sz="2000" dirty="0"/>
-              <a:t>	напр. спрос на </a:t>
-            </a:r>
-            <a:r>
-              <a:rPr lang="ru-RU" sz="2000" dirty="0" err="1"/>
-              <a:t>электроэенерги</a:t>
-            </a:r>
-            <a:r>
-              <a:rPr lang="ru-RU" sz="2000" dirty="0"/>
-              <a:t>.</a:t>
-            </a:r>
-          </a:p>
-          <a:p>
-            <a:pPr algn="just"/>
-            <a:endParaRPr lang="ru-RU" sz="1600" b="0" i="1" dirty="0">
-              <a:solidFill>
-                <a:schemeClr val="tx1"/>
-              </a:solidFill>
-              <a:effectLst/>
-              <a:latin typeface="__YSText_8fb396"/>
-            </a:endParaRPr>
-          </a:p>
-        </p:txBody>
-      </p:sp>
-      <p:pic>
-        <p:nvPicPr>
-          <p:cNvPr id="14" name="Picture 2" descr="image.png">
-            <a:extLst>
-              <a:ext uri="{FF2B5EF4-FFF2-40B4-BE49-F238E27FC236}">
-                <a16:creationId xmlns:a16="http://schemas.microsoft.com/office/drawing/2014/main" id="{02A694C1-DCCF-4974-B57F-8BFBFBCC1DE6}"/>
-              </a:ext>
-            </a:extLst>
-          </p:cNvPr>
-          <p:cNvPicPr>
-            <a:picLocks noChangeAspect="1" noChangeArrowheads="1"/>
-          </p:cNvPicPr>
-          <p:nvPr/>
-        </p:nvPicPr>
-        <p:blipFill rotWithShape="1">
-          <a:blip r:embed="rId4">
-            <a:extLst>
-              <a:ext uri="{28A0092B-C50C-407E-A947-70E740481C1C}">
-                <a14:useLocalDpi xmlns:a14="http://schemas.microsoft.com/office/drawing/2010/main" val="0"/>
-              </a:ext>
-            </a:extLst>
-          </a:blip>
-          <a:srcRect l="8887" t="8532" r="8717" b="6336"/>
-          <a:stretch/>
-        </p:blipFill>
-        <p:spPr bwMode="auto">
-          <a:xfrm>
-            <a:off x="6133277" y="3416074"/>
-            <a:ext cx="5734050" cy="2962275"/>
-          </a:xfrm>
-          <a:prstGeom prst="rect">
-            <a:avLst/>
-          </a:prstGeom>
-          <a:noFill/>
-          <a:extLst>
-            <a:ext uri="{909E8E84-426E-40DD-AFC4-6F175D3DCCD1}">
-              <a14:hiddenFill xmlns:a14="http://schemas.microsoft.com/office/drawing/2010/main">
-                <a:solidFill>
-                  <a:srgbClr val="FFFFFF"/>
-                </a:solidFill>
-              </a14:hiddenFill>
-            </a:ext>
-          </a:extLst>
-        </p:spPr>
-      </p:pic>
-      <p:pic>
-        <p:nvPicPr>
-          <p:cNvPr id="8" name="Picture 2" descr="image.png">
-            <a:extLst>
-              <a:ext uri="{FF2B5EF4-FFF2-40B4-BE49-F238E27FC236}">
-                <a16:creationId xmlns:a16="http://schemas.microsoft.com/office/drawing/2014/main" id="{02A694C1-DCCF-4974-B57F-8BFBFBCC1DE6}"/>
-              </a:ext>
-            </a:extLst>
-          </p:cNvPr>
-          <p:cNvPicPr>
-            <a:picLocks noChangeAspect="1" noChangeArrowheads="1"/>
-          </p:cNvPicPr>
-          <p:nvPr/>
-        </p:nvPicPr>
-        <p:blipFill rotWithShape="1">
-          <a:blip r:embed="rId4">
-            <a:extLst>
-              <a:ext uri="{28A0092B-C50C-407E-A947-70E740481C1C}">
-                <a14:useLocalDpi xmlns:a14="http://schemas.microsoft.com/office/drawing/2010/main" val="0"/>
-              </a:ext>
-            </a:extLst>
-          </a:blip>
-          <a:srcRect l="78976" t="11915" r="10074" b="77683"/>
-          <a:stretch/>
-        </p:blipFill>
-        <p:spPr bwMode="auto">
-          <a:xfrm>
-            <a:off x="9284584" y="3416073"/>
-            <a:ext cx="2734322" cy="1298801"/>
-          </a:xfrm>
-          <a:prstGeom prst="rect">
-            <a:avLst/>
-          </a:prstGeom>
-          <a:noFill/>
-          <a:extLst>
-            <a:ext uri="{909E8E84-426E-40DD-AFC4-6F175D3DCCD1}">
-              <a14:hiddenFill xmlns:a14="http://schemas.microsoft.com/office/drawing/2010/main">
-                <a:solidFill>
-                  <a:srgbClr val="FFFFFF"/>
-                </a:solidFill>
-              </a14:hiddenFill>
-            </a:ext>
-          </a:extLst>
-        </p:spPr>
-      </p:pic>
-    </p:spTree>
-    <p:extLst>
-      <p:ext uri="{BB962C8B-B14F-4D97-AF65-F5344CB8AC3E}">
-        <p14:creationId xmlns:p14="http://schemas.microsoft.com/office/powerpoint/2010/main" val="1301338103"/>
       </p:ext>
     </p:extLst>
   </p:cSld>

--- a/Last/LEC/03-1_ExpSmooth.pptx
+++ b/Last/LEC/03-1_ExpSmooth.pptx
@@ -5,39 +5,34 @@
     <p:sldMasterId id="2147483648" r:id="rId1"/>
   </p:sldMasterIdLst>
   <p:notesMasterIdLst>
-    <p:notesMasterId r:id="rId32"/>
+    <p:notesMasterId r:id="rId27"/>
   </p:notesMasterIdLst>
   <p:sldIdLst>
     <p:sldId id="256" r:id="rId2"/>
-    <p:sldId id="462" r:id="rId3"/>
-    <p:sldId id="463" r:id="rId4"/>
-    <p:sldId id="464" r:id="rId5"/>
-    <p:sldId id="417" r:id="rId6"/>
-    <p:sldId id="453" r:id="rId7"/>
-    <p:sldId id="414" r:id="rId8"/>
-    <p:sldId id="431" r:id="rId9"/>
-    <p:sldId id="415" r:id="rId10"/>
-    <p:sldId id="418" r:id="rId11"/>
-    <p:sldId id="426" r:id="rId12"/>
-    <p:sldId id="416" r:id="rId13"/>
-    <p:sldId id="419" r:id="rId14"/>
-    <p:sldId id="421" r:id="rId15"/>
-    <p:sldId id="434" r:id="rId16"/>
-    <p:sldId id="422" r:id="rId17"/>
-    <p:sldId id="423" r:id="rId18"/>
-    <p:sldId id="425" r:id="rId19"/>
-    <p:sldId id="427" r:id="rId20"/>
-    <p:sldId id="424" r:id="rId21"/>
-    <p:sldId id="428" r:id="rId22"/>
-    <p:sldId id="429" r:id="rId23"/>
-    <p:sldId id="430" r:id="rId24"/>
-    <p:sldId id="456" r:id="rId25"/>
-    <p:sldId id="459" r:id="rId26"/>
-    <p:sldId id="442" r:id="rId27"/>
-    <p:sldId id="443" r:id="rId28"/>
-    <p:sldId id="444" r:id="rId29"/>
-    <p:sldId id="460" r:id="rId30"/>
-    <p:sldId id="461" r:id="rId31"/>
+    <p:sldId id="463" r:id="rId3"/>
+    <p:sldId id="464" r:id="rId4"/>
+    <p:sldId id="417" r:id="rId5"/>
+    <p:sldId id="453" r:id="rId6"/>
+    <p:sldId id="414" r:id="rId7"/>
+    <p:sldId id="431" r:id="rId8"/>
+    <p:sldId id="415" r:id="rId9"/>
+    <p:sldId id="418" r:id="rId10"/>
+    <p:sldId id="426" r:id="rId11"/>
+    <p:sldId id="416" r:id="rId12"/>
+    <p:sldId id="419" r:id="rId13"/>
+    <p:sldId id="421" r:id="rId14"/>
+    <p:sldId id="434" r:id="rId15"/>
+    <p:sldId id="422" r:id="rId16"/>
+    <p:sldId id="423" r:id="rId17"/>
+    <p:sldId id="425" r:id="rId18"/>
+    <p:sldId id="427" r:id="rId19"/>
+    <p:sldId id="424" r:id="rId20"/>
+    <p:sldId id="428" r:id="rId21"/>
+    <p:sldId id="429" r:id="rId22"/>
+    <p:sldId id="430" r:id="rId23"/>
+    <p:sldId id="456" r:id="rId24"/>
+    <p:sldId id="459" r:id="rId25"/>
+    <p:sldId id="461" r:id="rId26"/>
   </p:sldIdLst>
   <p:sldSz cx="12192000" cy="6858000"/>
   <p:notesSz cx="6858000" cy="9144000"/>
@@ -142,7 +137,6 @@
         <p14:section name="Раздел по умолчанию" id="{201EE05C-F9E4-4BBB-A5C1-9C9F75E33B4A}">
           <p14:sldIdLst>
             <p14:sldId id="256"/>
-            <p14:sldId id="462"/>
             <p14:sldId id="463"/>
             <p14:sldId id="464"/>
             <p14:sldId id="417"/>
@@ -166,10 +160,6 @@
             <p14:sldId id="430"/>
             <p14:sldId id="456"/>
             <p14:sldId id="459"/>
-            <p14:sldId id="442"/>
-            <p14:sldId id="443"/>
-            <p14:sldId id="444"/>
-            <p14:sldId id="460"/>
             <p14:sldId id="461"/>
           </p14:sldIdLst>
         </p14:section>
@@ -264,7 +254,7 @@
           <a:p>
             <a:fld id="{C730246F-5962-E14A-AAF2-985CCFDAC345}" type="datetimeFigureOut">
               <a:rPr lang="ru-RU" smtClean="0"/>
-              <a:t>28.04.2026</a:t>
+              <a:t>04.05.2026</a:t>
             </a:fld>
             <a:endParaRPr lang="ru-RU"/>
           </a:p>
@@ -596,7 +586,7 @@
           <a:p>
             <a:fld id="{1EA4F326-5F8D-6A4F-9B75-A3402553DF5F}" type="slidenum">
               <a:rPr lang="ru-RU" smtClean="0"/>
-              <a:t>5</a:t>
+              <a:t>4</a:t>
             </a:fld>
             <a:endParaRPr lang="ru-RU"/>
           </a:p>
@@ -606,94 +596,6 @@
     <p:extLst>
       <p:ext uri="{BB962C8B-B14F-4D97-AF65-F5344CB8AC3E}">
         <p14:creationId xmlns:p14="http://schemas.microsoft.com/office/powerpoint/2010/main" val="3817053040"/>
-      </p:ext>
-    </p:extLst>
-  </p:cSld>
-  <p:clrMapOvr>
-    <a:masterClrMapping/>
-  </p:clrMapOvr>
-</p:notes>
-</file>
-
-<file path=ppt/notesSlides/notesSlide10.xml><?xml version="1.0" encoding="utf-8"?>
-<p:notes xmlns:a="http://schemas.openxmlformats.org/drawingml/2006/main" xmlns:r="http://schemas.openxmlformats.org/officeDocument/2006/relationships" xmlns:p="http://schemas.openxmlformats.org/presentationml/2006/main">
-  <p:cSld>
-    <p:spTree>
-      <p:nvGrpSpPr>
-        <p:cNvPr id="1" name=""/>
-        <p:cNvGrpSpPr/>
-        <p:nvPr/>
-      </p:nvGrpSpPr>
-      <p:grpSpPr>
-        <a:xfrm>
-          <a:off x="0" y="0"/>
-          <a:ext cx="0" cy="0"/>
-          <a:chOff x="0" y="0"/>
-          <a:chExt cx="0" cy="0"/>
-        </a:xfrm>
-      </p:grpSpPr>
-      <p:sp>
-        <p:nvSpPr>
-          <p:cNvPr id="2" name="Образ слайда 1"/>
-          <p:cNvSpPr>
-            <a:spLocks noGrp="1" noRot="1" noChangeAspect="1"/>
-          </p:cNvSpPr>
-          <p:nvPr>
-            <p:ph type="sldImg"/>
-          </p:nvPr>
-        </p:nvSpPr>
-        <p:spPr/>
-      </p:sp>
-      <p:sp>
-        <p:nvSpPr>
-          <p:cNvPr id="3" name="Заметки 2"/>
-          <p:cNvSpPr>
-            <a:spLocks noGrp="1"/>
-          </p:cNvSpPr>
-          <p:nvPr>
-            <p:ph type="body" idx="1"/>
-          </p:nvPr>
-        </p:nvSpPr>
-        <p:spPr/>
-        <p:txBody>
-          <a:bodyPr/>
-          <a:lstStyle/>
-          <a:p>
-            <a:r>
-              <a:rPr lang="en-US" dirty="0" smtClean="0"/>
-              <a:t>https://www.ritchievink.com/blog/2018/10/09/build-facebooks-prophet-in-pymc3-bayesian-time-series-analyis-with-generalized-additive-models/</a:t>
-            </a:r>
-            <a:endParaRPr lang="ru-RU" dirty="0"/>
-          </a:p>
-        </p:txBody>
-      </p:sp>
-      <p:sp>
-        <p:nvSpPr>
-          <p:cNvPr id="4" name="Номер слайда 3"/>
-          <p:cNvSpPr>
-            <a:spLocks noGrp="1"/>
-          </p:cNvSpPr>
-          <p:nvPr>
-            <p:ph type="sldNum" sz="quarter" idx="10"/>
-          </p:nvPr>
-        </p:nvSpPr>
-        <p:spPr/>
-        <p:txBody>
-          <a:bodyPr/>
-          <a:lstStyle/>
-          <a:p>
-            <a:fld id="{1EA4F326-5F8D-6A4F-9B75-A3402553DF5F}" type="slidenum">
-              <a:rPr lang="ru-RU" smtClean="0"/>
-              <a:t>26</a:t>
-            </a:fld>
-            <a:endParaRPr lang="ru-RU"/>
-          </a:p>
-        </p:txBody>
-      </p:sp>
-    </p:spTree>
-    <p:extLst>
-      <p:ext uri="{BB962C8B-B14F-4D97-AF65-F5344CB8AC3E}">
-        <p14:creationId xmlns:p14="http://schemas.microsoft.com/office/powerpoint/2010/main" val="3230719507"/>
       </p:ext>
     </p:extLst>
   </p:cSld>
@@ -768,7 +670,7 @@
           <a:p>
             <a:fld id="{1EA4F326-5F8D-6A4F-9B75-A3402553DF5F}" type="slidenum">
               <a:rPr lang="ru-RU" smtClean="0"/>
-              <a:t>6</a:t>
+              <a:t>5</a:t>
             </a:fld>
             <a:endParaRPr lang="ru-RU"/>
           </a:p>
@@ -852,7 +754,7 @@
           <a:p>
             <a:fld id="{1EA4F326-5F8D-6A4F-9B75-A3402553DF5F}" type="slidenum">
               <a:rPr lang="ru-RU" smtClean="0"/>
-              <a:t>7</a:t>
+              <a:t>6</a:t>
             </a:fld>
             <a:endParaRPr lang="ru-RU"/>
           </a:p>
@@ -936,7 +838,7 @@
           <a:p>
             <a:fld id="{1EA4F326-5F8D-6A4F-9B75-A3402553DF5F}" type="slidenum">
               <a:rPr lang="ru-RU" smtClean="0"/>
-              <a:t>8</a:t>
+              <a:t>7</a:t>
             </a:fld>
             <a:endParaRPr lang="ru-RU"/>
           </a:p>
@@ -1020,7 +922,7 @@
           <a:p>
             <a:fld id="{1EA4F326-5F8D-6A4F-9B75-A3402553DF5F}" type="slidenum">
               <a:rPr lang="ru-RU" smtClean="0"/>
-              <a:t>9</a:t>
+              <a:t>8</a:t>
             </a:fld>
             <a:endParaRPr lang="ru-RU"/>
           </a:p>
@@ -1104,7 +1006,7 @@
           <a:p>
             <a:fld id="{1EA4F326-5F8D-6A4F-9B75-A3402553DF5F}" type="slidenum">
               <a:rPr lang="ru-RU" smtClean="0"/>
-              <a:t>10</a:t>
+              <a:t>9</a:t>
             </a:fld>
             <a:endParaRPr lang="ru-RU"/>
           </a:p>
@@ -1188,7 +1090,7 @@
           <a:p>
             <a:fld id="{1EA4F326-5F8D-6A4F-9B75-A3402553DF5F}" type="slidenum">
               <a:rPr lang="ru-RU" smtClean="0"/>
-              <a:t>11</a:t>
+              <a:t>10</a:t>
             </a:fld>
             <a:endParaRPr lang="ru-RU"/>
           </a:p>
@@ -1272,7 +1174,7 @@
           <a:p>
             <a:fld id="{1EA4F326-5F8D-6A4F-9B75-A3402553DF5F}" type="slidenum">
               <a:rPr lang="ru-RU" smtClean="0"/>
-              <a:t>12</a:t>
+              <a:t>11</a:t>
             </a:fld>
             <a:endParaRPr lang="ru-RU"/>
           </a:p>
@@ -1356,7 +1258,7 @@
           <a:p>
             <a:fld id="{1EA4F326-5F8D-6A4F-9B75-A3402553DF5F}" type="slidenum">
               <a:rPr lang="ru-RU" smtClean="0"/>
-              <a:t>13</a:t>
+              <a:t>12</a:t>
             </a:fld>
             <a:endParaRPr lang="ru-RU"/>
           </a:p>
@@ -1524,7 +1426,7 @@
           <a:p>
             <a:fld id="{44343DC6-30E4-4569-999A-C703F926F2AF}" type="datetimeFigureOut">
               <a:rPr lang="en-US" smtClean="0"/>
-              <a:t>4/28/2026</a:t>
+              <a:t>5/4/2026</a:t>
             </a:fld>
             <a:endParaRPr lang="en-US"/>
           </a:p>
@@ -1724,7 +1626,7 @@
           <a:p>
             <a:fld id="{44343DC6-30E4-4569-999A-C703F926F2AF}" type="datetimeFigureOut">
               <a:rPr lang="en-US" smtClean="0"/>
-              <a:t>4/28/2026</a:t>
+              <a:t>5/4/2026</a:t>
             </a:fld>
             <a:endParaRPr lang="en-US"/>
           </a:p>
@@ -1934,7 +1836,7 @@
           <a:p>
             <a:fld id="{44343DC6-30E4-4569-999A-C703F926F2AF}" type="datetimeFigureOut">
               <a:rPr lang="en-US" smtClean="0"/>
-              <a:t>4/28/2026</a:t>
+              <a:t>5/4/2026</a:t>
             </a:fld>
             <a:endParaRPr lang="en-US"/>
           </a:p>
@@ -2134,7 +2036,7 @@
           <a:p>
             <a:fld id="{44343DC6-30E4-4569-999A-C703F926F2AF}" type="datetimeFigureOut">
               <a:rPr lang="en-US" smtClean="0"/>
-              <a:t>4/28/2026</a:t>
+              <a:t>5/4/2026</a:t>
             </a:fld>
             <a:endParaRPr lang="en-US"/>
           </a:p>
@@ -2410,7 +2312,7 @@
           <a:p>
             <a:fld id="{44343DC6-30E4-4569-999A-C703F926F2AF}" type="datetimeFigureOut">
               <a:rPr lang="en-US" smtClean="0"/>
-              <a:t>4/28/2026</a:t>
+              <a:t>5/4/2026</a:t>
             </a:fld>
             <a:endParaRPr lang="en-US"/>
           </a:p>
@@ -2678,7 +2580,7 @@
           <a:p>
             <a:fld id="{44343DC6-30E4-4569-999A-C703F926F2AF}" type="datetimeFigureOut">
               <a:rPr lang="en-US" smtClean="0"/>
-              <a:t>4/28/2026</a:t>
+              <a:t>5/4/2026</a:t>
             </a:fld>
             <a:endParaRPr lang="en-US"/>
           </a:p>
@@ -3093,7 +2995,7 @@
           <a:p>
             <a:fld id="{44343DC6-30E4-4569-999A-C703F926F2AF}" type="datetimeFigureOut">
               <a:rPr lang="en-US" smtClean="0"/>
-              <a:t>4/28/2026</a:t>
+              <a:t>5/4/2026</a:t>
             </a:fld>
             <a:endParaRPr lang="en-US"/>
           </a:p>
@@ -3235,7 +3137,7 @@
           <a:p>
             <a:fld id="{44343DC6-30E4-4569-999A-C703F926F2AF}" type="datetimeFigureOut">
               <a:rPr lang="en-US" smtClean="0"/>
-              <a:t>4/28/2026</a:t>
+              <a:t>5/4/2026</a:t>
             </a:fld>
             <a:endParaRPr lang="en-US"/>
           </a:p>
@@ -3348,7 +3250,7 @@
           <a:p>
             <a:fld id="{44343DC6-30E4-4569-999A-C703F926F2AF}" type="datetimeFigureOut">
               <a:rPr lang="en-US" smtClean="0"/>
-              <a:t>4/28/2026</a:t>
+              <a:t>5/4/2026</a:t>
             </a:fld>
             <a:endParaRPr lang="en-US"/>
           </a:p>
@@ -3661,7 +3563,7 @@
           <a:p>
             <a:fld id="{44343DC6-30E4-4569-999A-C703F926F2AF}" type="datetimeFigureOut">
               <a:rPr lang="en-US" smtClean="0"/>
-              <a:t>4/28/2026</a:t>
+              <a:t>5/4/2026</a:t>
             </a:fld>
             <a:endParaRPr lang="en-US"/>
           </a:p>
@@ -3950,7 +3852,7 @@
           <a:p>
             <a:fld id="{44343DC6-30E4-4569-999A-C703F926F2AF}" type="datetimeFigureOut">
               <a:rPr lang="en-US" smtClean="0"/>
-              <a:t>4/28/2026</a:t>
+              <a:t>5/4/2026</a:t>
             </a:fld>
             <a:endParaRPr lang="en-US"/>
           </a:p>
@@ -4193,7 +4095,7 @@
           <a:p>
             <a:fld id="{44343DC6-30E4-4569-999A-C703F926F2AF}" type="datetimeFigureOut">
               <a:rPr lang="en-US" smtClean="0"/>
-              <a:t>4/28/2026</a:t>
+              <a:t>5/4/2026</a:t>
             </a:fld>
             <a:endParaRPr lang="en-US"/>
           </a:p>
@@ -4709,1331 +4611,6 @@
         </p:nvSpPr>
         <p:spPr>
           <a:xfrm>
-            <a:off x="226957" y="93605"/>
-            <a:ext cx="11802295" cy="933115"/>
-          </a:xfrm>
-        </p:spPr>
-        <p:txBody>
-          <a:bodyPr>
-            <a:normAutofit/>
-          </a:bodyPr>
-          <a:lstStyle/>
-          <a:p>
-            <a:pPr algn="ctr"/>
-            <a:r>
-              <a:rPr lang="ru-RU" sz="3200" b="1" dirty="0"/>
-              <a:t>Модель </a:t>
-            </a:r>
-            <a:r>
-              <a:rPr lang="en-US" sz="3200" b="1" dirty="0"/>
-              <a:t>Holt</a:t>
-            </a:r>
-            <a:r>
-              <a:rPr lang="ru-RU" sz="3200" b="1" dirty="0"/>
-              <a:t>-</a:t>
-            </a:r>
-            <a:r>
-              <a:rPr lang="en-US" sz="3200" b="1" dirty="0"/>
-              <a:t>Winters </a:t>
-            </a:r>
-            <a:r>
-              <a:rPr lang="ru-RU" sz="3200" b="1" dirty="0"/>
-              <a:t> - тройное экспоненциальное сглаживание</a:t>
-            </a:r>
-            <a:endParaRPr lang="ru-RU" sz="3600" b="1" dirty="0"/>
-          </a:p>
-        </p:txBody>
-      </p:sp>
-      <mc:AlternateContent xmlns:mc="http://schemas.openxmlformats.org/markup-compatibility/2006" xmlns:a14="http://schemas.microsoft.com/office/drawing/2010/main">
-        <mc:Choice Requires="a14">
-          <p:sp>
-            <p:nvSpPr>
-              <p:cNvPr id="3" name="Объект 2">
-                <a:extLst>
-                  <a:ext uri="{FF2B5EF4-FFF2-40B4-BE49-F238E27FC236}">
-                    <a16:creationId xmlns:a16="http://schemas.microsoft.com/office/drawing/2014/main" id="{9CFDC76D-90F0-4FD7-8BA6-954D6D2E6FFD}"/>
-                  </a:ext>
-                </a:extLst>
-              </p:cNvPr>
-              <p:cNvSpPr>
-                <a:spLocks noGrp="1"/>
-              </p:cNvSpPr>
-              <p:nvPr>
-                <p:ph idx="1"/>
-              </p:nvPr>
-            </p:nvSpPr>
-            <p:spPr>
-              <a:xfrm>
-                <a:off x="226957" y="817117"/>
-                <a:ext cx="11791949" cy="5502274"/>
-              </a:xfrm>
-            </p:spPr>
-            <p:txBody>
-              <a:bodyPr>
-                <a:normAutofit/>
-              </a:bodyPr>
-              <a:lstStyle/>
-              <a:p>
-                <a:pPr marL="0" indent="0">
-                  <a:buNone/>
-                </a:pPr>
-                <a:r>
-                  <a:rPr lang="ru-RU" sz="2200" dirty="0"/>
-                  <a:t>Пусть существуют быстрые изменения с известным периодом </a:t>
-                </a:r>
-                <a14:m>
-                  <m:oMath xmlns:m="http://schemas.openxmlformats.org/officeDocument/2006/math">
-                    <m:r>
-                      <a:rPr lang="en-US" sz="2200" b="0" i="1" dirty="0" smtClean="0">
-                        <a:latin typeface="Cambria Math" panose="02040503050406030204" pitchFamily="18" charset="0"/>
-                      </a:rPr>
-                      <m:t>𝑚</m:t>
-                    </m:r>
-                  </m:oMath>
-                </a14:m>
-                <a:r>
-                  <a:rPr lang="en-US" sz="2200" dirty="0"/>
-                  <a:t> </a:t>
-                </a:r>
-                <a:r>
-                  <a:rPr lang="ru-RU" sz="2200" dirty="0"/>
-                  <a:t>(сезонность). Тогда для точек одной фазы (удаленных на </a:t>
-                </a:r>
-                <a14:m>
-                  <m:oMath xmlns:m="http://schemas.openxmlformats.org/officeDocument/2006/math">
-                    <m:r>
-                      <a:rPr lang="en-US" sz="2200" b="0" i="1" dirty="0" smtClean="0">
-                        <a:latin typeface="Cambria Math" panose="02040503050406030204" pitchFamily="18" charset="0"/>
-                      </a:rPr>
-                      <m:t>𝑚</m:t>
-                    </m:r>
-                  </m:oMath>
-                </a14:m>
-                <a:r>
-                  <a:rPr lang="en-US" sz="2200" dirty="0"/>
-                  <a:t>) </a:t>
-                </a:r>
-                <a:r>
-                  <a:rPr lang="ru-RU" sz="2200" dirty="0"/>
-                  <a:t>введем компоненты сглаживания.</a:t>
-                </a:r>
-                <a:endParaRPr lang="en-US" sz="2200" dirty="0"/>
-              </a:p>
-              <a:p>
-                <a:pPr marL="0" indent="0">
-                  <a:buNone/>
-                </a:pPr>
-                <a14:m>
-                  <m:oMathPara xmlns:m="http://schemas.openxmlformats.org/officeDocument/2006/math">
-                    <m:oMathParaPr>
-                      <m:jc m:val="centerGroup"/>
-                    </m:oMathParaPr>
-                    <m:oMath xmlns:m="http://schemas.openxmlformats.org/officeDocument/2006/math">
-                      <m:d>
-                        <m:dPr>
-                          <m:begChr m:val="{"/>
-                          <m:endChr m:val=""/>
-                          <m:ctrlPr>
-                            <a:rPr lang="en-US" sz="2200" i="1" smtClean="0">
-                              <a:latin typeface="Cambria Math" panose="02040503050406030204" pitchFamily="18" charset="0"/>
-                            </a:rPr>
-                          </m:ctrlPr>
-                        </m:dPr>
-                        <m:e>
-                          <m:eqArr>
-                            <m:eqArrPr>
-                              <m:ctrlPr>
-                                <a:rPr lang="en-US" sz="2200" i="1" smtClean="0">
-                                  <a:latin typeface="Cambria Math" panose="02040503050406030204" pitchFamily="18" charset="0"/>
-                                </a:rPr>
-                              </m:ctrlPr>
-                            </m:eqArrPr>
-                            <m:e>
-                              <m:sSub>
-                                <m:sSubPr>
-                                  <m:ctrlPr>
-                                    <a:rPr lang="en-US" sz="2200" i="1">
-                                      <a:latin typeface="Cambria Math" panose="02040503050406030204" pitchFamily="18" charset="0"/>
-                                    </a:rPr>
-                                  </m:ctrlPr>
-                                </m:sSubPr>
-                                <m:e>
-                                  <m:acc>
-                                    <m:accPr>
-                                      <m:chr m:val="̂"/>
-                                      <m:ctrlPr>
-                                        <a:rPr lang="en-US" sz="2200" i="1">
-                                          <a:latin typeface="Cambria Math" panose="02040503050406030204" pitchFamily="18" charset="0"/>
-                                        </a:rPr>
-                                      </m:ctrlPr>
-                                    </m:accPr>
-                                    <m:e>
-                                      <m:r>
-                                        <a:rPr lang="en-US" sz="2200" i="1">
-                                          <a:latin typeface="Cambria Math" panose="02040503050406030204" pitchFamily="18" charset="0"/>
-                                        </a:rPr>
-                                        <m:t>𝑦</m:t>
-                                      </m:r>
-                                    </m:e>
-                                  </m:acc>
-                                </m:e>
-                                <m:sub>
-                                  <m:r>
-                                    <a:rPr lang="en-US" sz="2200" i="1">
-                                      <a:latin typeface="Cambria Math" panose="02040503050406030204" pitchFamily="18" charset="0"/>
-                                    </a:rPr>
-                                    <m:t>𝑛</m:t>
-                                  </m:r>
-                                  <m:r>
-                                    <a:rPr lang="en-US" sz="2200" i="1">
-                                      <a:latin typeface="Cambria Math" panose="02040503050406030204" pitchFamily="18" charset="0"/>
-                                    </a:rPr>
-                                    <m:t>+</m:t>
-                                  </m:r>
-                                  <m:r>
-                                    <a:rPr lang="en-US" sz="2200" b="0" i="1" smtClean="0">
-                                      <a:latin typeface="Cambria Math" panose="02040503050406030204" pitchFamily="18" charset="0"/>
-                                    </a:rPr>
-                                    <m:t>h</m:t>
-                                  </m:r>
-                                </m:sub>
-                              </m:sSub>
-                              <m:r>
-                                <a:rPr lang="en-US" sz="2200" i="1">
-                                  <a:latin typeface="Cambria Math" panose="02040503050406030204" pitchFamily="18" charset="0"/>
-                                </a:rPr>
-                                <m:t>=</m:t>
-                              </m:r>
-                              <m:sSub>
-                                <m:sSubPr>
-                                  <m:ctrlPr>
-                                    <a:rPr lang="en-US" sz="2200" i="1">
-                                      <a:latin typeface="Cambria Math" panose="02040503050406030204" pitchFamily="18" charset="0"/>
-                                    </a:rPr>
-                                  </m:ctrlPr>
-                                </m:sSubPr>
-                                <m:e>
-                                  <m:r>
-                                    <a:rPr lang="en-US" sz="2200" i="1">
-                                      <a:latin typeface="Cambria Math" panose="02040503050406030204" pitchFamily="18" charset="0"/>
-                                    </a:rPr>
-                                    <m:t>𝑙</m:t>
-                                  </m:r>
-                                </m:e>
-                                <m:sub>
-                                  <m:r>
-                                    <a:rPr lang="en-US" sz="2200" i="1">
-                                      <a:latin typeface="Cambria Math" panose="02040503050406030204" pitchFamily="18" charset="0"/>
-                                    </a:rPr>
-                                    <m:t>𝑛</m:t>
-                                  </m:r>
-                                </m:sub>
-                              </m:sSub>
-                              <m:r>
-                                <a:rPr lang="en-US" sz="2200" i="1">
-                                  <a:latin typeface="Cambria Math" panose="02040503050406030204" pitchFamily="18" charset="0"/>
-                                </a:rPr>
-                                <m:t>+</m:t>
-                              </m:r>
-                              <m:r>
-                                <a:rPr lang="en-US" sz="2200" b="0" i="1" smtClean="0">
-                                  <a:latin typeface="Cambria Math" panose="02040503050406030204" pitchFamily="18" charset="0"/>
-                                </a:rPr>
-                                <m:t>h</m:t>
-                              </m:r>
-                              <m:r>
-                                <a:rPr lang="en-US" sz="2200" b="0" i="1" smtClean="0">
-                                  <a:latin typeface="Cambria Math" panose="02040503050406030204" pitchFamily="18" charset="0"/>
-                                </a:rPr>
-                                <m:t>⋅</m:t>
-                              </m:r>
-                              <m:sSub>
-                                <m:sSubPr>
-                                  <m:ctrlPr>
-                                    <a:rPr lang="en-US" sz="2200" i="1">
-                                      <a:latin typeface="Cambria Math" panose="02040503050406030204" pitchFamily="18" charset="0"/>
-                                    </a:rPr>
-                                  </m:ctrlPr>
-                                </m:sSubPr>
-                                <m:e>
-                                  <m:r>
-                                    <a:rPr lang="en-US" sz="2200" i="1">
-                                      <a:latin typeface="Cambria Math" panose="02040503050406030204" pitchFamily="18" charset="0"/>
-                                    </a:rPr>
-                                    <m:t>𝑏</m:t>
-                                  </m:r>
-                                </m:e>
-                                <m:sub>
-                                  <m:r>
-                                    <a:rPr lang="en-US" sz="2200" i="1">
-                                      <a:latin typeface="Cambria Math" panose="02040503050406030204" pitchFamily="18" charset="0"/>
-                                    </a:rPr>
-                                    <m:t>𝑛</m:t>
-                                  </m:r>
-                                </m:sub>
-                              </m:sSub>
-                              <m:r>
-                                <a:rPr lang="ru-RU" sz="2200" b="0" i="1" smtClean="0">
-                                  <a:latin typeface="Cambria Math" panose="02040503050406030204" pitchFamily="18" charset="0"/>
-                                </a:rPr>
-                                <m:t>+</m:t>
-                              </m:r>
-                              <m:sSub>
-                                <m:sSubPr>
-                                  <m:ctrlPr>
-                                    <a:rPr lang="en-US" sz="2200" i="1">
-                                      <a:latin typeface="Cambria Math" panose="02040503050406030204" pitchFamily="18" charset="0"/>
-                                    </a:rPr>
-                                  </m:ctrlPr>
-                                </m:sSubPr>
-                                <m:e>
-                                  <m:r>
-                                    <a:rPr lang="en-US" sz="2200" i="1">
-                                      <a:latin typeface="Cambria Math" panose="02040503050406030204" pitchFamily="18" charset="0"/>
-                                    </a:rPr>
-                                    <m:t>𝑠</m:t>
-                                  </m:r>
-                                </m:e>
-                                <m:sub>
-                                  <m:r>
-                                    <a:rPr lang="en-US" sz="2200" i="1">
-                                      <a:latin typeface="Cambria Math" panose="02040503050406030204" pitchFamily="18" charset="0"/>
-                                    </a:rPr>
-                                    <m:t>𝑛</m:t>
-                                  </m:r>
-                                  <m:r>
-                                    <a:rPr lang="en-US" sz="2200" i="1">
-                                      <a:latin typeface="Cambria Math" panose="02040503050406030204" pitchFamily="18" charset="0"/>
-                                    </a:rPr>
-                                    <m:t>−</m:t>
-                                  </m:r>
-                                  <m:r>
-                                    <a:rPr lang="en-US" sz="2200" b="0" i="1" smtClean="0">
-                                      <a:latin typeface="Cambria Math" panose="02040503050406030204" pitchFamily="18" charset="0"/>
-                                    </a:rPr>
-                                    <m:t>𝑚</m:t>
-                                  </m:r>
-                                  <m:r>
-                                    <a:rPr lang="en-US" sz="2200" i="1">
-                                      <a:latin typeface="Cambria Math" panose="02040503050406030204" pitchFamily="18" charset="0"/>
-                                    </a:rPr>
-                                    <m:t>+</m:t>
-                                  </m:r>
-                                  <m:r>
-                                    <a:rPr lang="en-US" sz="2200" b="0" i="1" smtClean="0">
-                                      <a:latin typeface="Cambria Math" panose="02040503050406030204" pitchFamily="18" charset="0"/>
-                                    </a:rPr>
-                                    <m:t>∆</m:t>
-                                  </m:r>
-                                </m:sub>
-                              </m:sSub>
-                              <m:r>
-                                <a:rPr lang="en-US" sz="2200" i="1">
-                                  <a:latin typeface="Cambria Math" panose="02040503050406030204" pitchFamily="18" charset="0"/>
-                                </a:rPr>
-                                <m:t>;</m:t>
-                              </m:r>
-                              <m:r>
-                                <m:rPr>
-                                  <m:nor/>
-                                </m:rPr>
-                                <a:rPr lang="en-US" sz="2200" dirty="0"/>
-                                <m:t> </m:t>
-                              </m:r>
-                            </m:e>
-                            <m:e>
-                              <m:sSub>
-                                <m:sSubPr>
-                                  <m:ctrlPr>
-                                    <a:rPr lang="en-US" sz="2200" i="1">
-                                      <a:latin typeface="Cambria Math" panose="02040503050406030204" pitchFamily="18" charset="0"/>
-                                    </a:rPr>
-                                  </m:ctrlPr>
-                                </m:sSubPr>
-                                <m:e>
-                                  <m:r>
-                                    <a:rPr lang="en-US" sz="2200" i="1">
-                                      <a:latin typeface="Cambria Math" panose="02040503050406030204" pitchFamily="18" charset="0"/>
-                                    </a:rPr>
-                                    <m:t>𝑙</m:t>
-                                  </m:r>
-                                </m:e>
-                                <m:sub>
-                                  <m:r>
-                                    <a:rPr lang="en-US" sz="2200" i="1">
-                                      <a:latin typeface="Cambria Math" panose="02040503050406030204" pitchFamily="18" charset="0"/>
-                                    </a:rPr>
-                                    <m:t>𝑛</m:t>
-                                  </m:r>
-                                </m:sub>
-                              </m:sSub>
-                              <m:r>
-                                <a:rPr lang="en-US" sz="2200" i="1">
-                                  <a:latin typeface="Cambria Math" panose="02040503050406030204" pitchFamily="18" charset="0"/>
-                                </a:rPr>
-                                <m:t>=</m:t>
-                              </m:r>
-                              <m:r>
-                                <a:rPr lang="en-US" sz="2200" i="1">
-                                  <a:latin typeface="Cambria Math" panose="02040503050406030204" pitchFamily="18" charset="0"/>
-                                </a:rPr>
-                                <m:t>𝛼</m:t>
-                              </m:r>
-                              <m:sSub>
-                                <m:sSubPr>
-                                  <m:ctrlPr>
-                                    <a:rPr lang="en-US" sz="2200" i="1">
-                                      <a:latin typeface="Cambria Math" panose="02040503050406030204" pitchFamily="18" charset="0"/>
-                                    </a:rPr>
-                                  </m:ctrlPr>
-                                </m:sSubPr>
-                                <m:e>
-                                  <m:r>
-                                    <a:rPr lang="en-US" sz="2200" i="1">
-                                      <a:latin typeface="Cambria Math" panose="02040503050406030204" pitchFamily="18" charset="0"/>
-                                    </a:rPr>
-                                    <m:t>𝑦</m:t>
-                                  </m:r>
-                                </m:e>
-                                <m:sub>
-                                  <m:r>
-                                    <a:rPr lang="en-US" sz="2200" i="1">
-                                      <a:latin typeface="Cambria Math" panose="02040503050406030204" pitchFamily="18" charset="0"/>
-                                    </a:rPr>
-                                    <m:t>𝑛</m:t>
-                                  </m:r>
-                                </m:sub>
-                              </m:sSub>
-                              <m:r>
-                                <a:rPr lang="en-US" sz="2200" i="1">
-                                  <a:latin typeface="Cambria Math" panose="02040503050406030204" pitchFamily="18" charset="0"/>
-                                </a:rPr>
-                                <m:t>+</m:t>
-                              </m:r>
-                              <m:d>
-                                <m:dPr>
-                                  <m:ctrlPr>
-                                    <a:rPr lang="en-US" sz="2200" i="1">
-                                      <a:latin typeface="Cambria Math" panose="02040503050406030204" pitchFamily="18" charset="0"/>
-                                    </a:rPr>
-                                  </m:ctrlPr>
-                                </m:dPr>
-                                <m:e>
-                                  <m:r>
-                                    <a:rPr lang="en-US" sz="2200" i="1">
-                                      <a:latin typeface="Cambria Math" panose="02040503050406030204" pitchFamily="18" charset="0"/>
-                                    </a:rPr>
-                                    <m:t>1−</m:t>
-                                  </m:r>
-                                  <m:r>
-                                    <a:rPr lang="en-US" sz="2200" i="1">
-                                      <a:latin typeface="Cambria Math" panose="02040503050406030204" pitchFamily="18" charset="0"/>
-                                    </a:rPr>
-                                    <m:t>𝛼</m:t>
-                                  </m:r>
-                                </m:e>
-                              </m:d>
-                              <m:d>
-                                <m:dPr>
-                                  <m:ctrlPr>
-                                    <a:rPr lang="en-US" sz="2200" i="1">
-                                      <a:latin typeface="Cambria Math" panose="02040503050406030204" pitchFamily="18" charset="0"/>
-                                    </a:rPr>
-                                  </m:ctrlPr>
-                                </m:dPr>
-                                <m:e>
-                                  <m:sSub>
-                                    <m:sSubPr>
-                                      <m:ctrlPr>
-                                        <a:rPr lang="en-US" sz="2200" i="1">
-                                          <a:latin typeface="Cambria Math" panose="02040503050406030204" pitchFamily="18" charset="0"/>
-                                        </a:rPr>
-                                      </m:ctrlPr>
-                                    </m:sSubPr>
-                                    <m:e>
-                                      <m:r>
-                                        <a:rPr lang="en-US" sz="2200" i="1">
-                                          <a:latin typeface="Cambria Math" panose="02040503050406030204" pitchFamily="18" charset="0"/>
-                                        </a:rPr>
-                                        <m:t>𝑙</m:t>
-                                      </m:r>
-                                    </m:e>
-                                    <m:sub>
-                                      <m:r>
-                                        <a:rPr lang="en-US" sz="2200" i="1">
-                                          <a:latin typeface="Cambria Math" panose="02040503050406030204" pitchFamily="18" charset="0"/>
-                                        </a:rPr>
-                                        <m:t>𝑛</m:t>
-                                      </m:r>
-                                      <m:r>
-                                        <a:rPr lang="en-US" sz="2200" i="1">
-                                          <a:latin typeface="Cambria Math" panose="02040503050406030204" pitchFamily="18" charset="0"/>
-                                        </a:rPr>
-                                        <m:t>−1</m:t>
-                                      </m:r>
-                                    </m:sub>
-                                  </m:sSub>
-                                  <m:r>
-                                    <a:rPr lang="en-US" sz="2200" i="1">
-                                      <a:latin typeface="Cambria Math" panose="02040503050406030204" pitchFamily="18" charset="0"/>
-                                    </a:rPr>
-                                    <m:t>+</m:t>
-                                  </m:r>
-                                  <m:sSub>
-                                    <m:sSubPr>
-                                      <m:ctrlPr>
-                                        <a:rPr lang="en-US" sz="2200" i="1">
-                                          <a:latin typeface="Cambria Math" panose="02040503050406030204" pitchFamily="18" charset="0"/>
-                                        </a:rPr>
-                                      </m:ctrlPr>
-                                    </m:sSubPr>
-                                    <m:e>
-                                      <m:r>
-                                        <a:rPr lang="en-US" sz="2200" i="1">
-                                          <a:latin typeface="Cambria Math" panose="02040503050406030204" pitchFamily="18" charset="0"/>
-                                        </a:rPr>
-                                        <m:t>𝑏</m:t>
-                                      </m:r>
-                                    </m:e>
-                                    <m:sub>
-                                      <m:r>
-                                        <a:rPr lang="en-US" sz="2200" i="1">
-                                          <a:latin typeface="Cambria Math" panose="02040503050406030204" pitchFamily="18" charset="0"/>
-                                        </a:rPr>
-                                        <m:t>𝑛</m:t>
-                                      </m:r>
-                                      <m:r>
-                                        <a:rPr lang="en-US" sz="2200" i="1">
-                                          <a:latin typeface="Cambria Math" panose="02040503050406030204" pitchFamily="18" charset="0"/>
-                                        </a:rPr>
-                                        <m:t>−1</m:t>
-                                      </m:r>
-                                    </m:sub>
-                                  </m:sSub>
-                                </m:e>
-                              </m:d>
-                              <m:r>
-                                <a:rPr lang="ru-RU" sz="2200" b="0" i="1" smtClean="0">
-                                  <a:latin typeface="Cambria Math" panose="02040503050406030204" pitchFamily="18" charset="0"/>
-                                </a:rPr>
-                                <m:t>   (</m:t>
-                              </m:r>
-                              <m:r>
-                                <a:rPr lang="en-US" sz="2200" i="1">
-                                  <a:latin typeface="Cambria Math" panose="02040503050406030204" pitchFamily="18" charset="0"/>
-                                </a:rPr>
-                                <m:t>𝑙𝑒𝑣𝑒𝑙</m:t>
-                              </m:r>
-                              <m:r>
-                                <a:rPr lang="ru-RU" sz="2200" b="0" i="1" smtClean="0">
-                                  <a:latin typeface="Cambria Math" panose="02040503050406030204" pitchFamily="18" charset="0"/>
-                                </a:rPr>
-                                <m:t>)</m:t>
-                              </m:r>
-                            </m:e>
-                            <m:e>
-                              <m:sSub>
-                                <m:sSubPr>
-                                  <m:ctrlPr>
-                                    <a:rPr lang="en-US" sz="2200" i="1">
-                                      <a:latin typeface="Cambria Math" panose="02040503050406030204" pitchFamily="18" charset="0"/>
-                                    </a:rPr>
-                                  </m:ctrlPr>
-                                </m:sSubPr>
-                                <m:e>
-                                  <m:r>
-                                    <a:rPr lang="en-US" sz="2200" i="1">
-                                      <a:latin typeface="Cambria Math" panose="02040503050406030204" pitchFamily="18" charset="0"/>
-                                    </a:rPr>
-                                    <m:t>𝑏</m:t>
-                                  </m:r>
-                                </m:e>
-                                <m:sub>
-                                  <m:r>
-                                    <a:rPr lang="en-US" sz="2200" i="1">
-                                      <a:latin typeface="Cambria Math" panose="02040503050406030204" pitchFamily="18" charset="0"/>
-                                    </a:rPr>
-                                    <m:t>𝑛</m:t>
-                                  </m:r>
-                                </m:sub>
-                              </m:sSub>
-                              <m:r>
-                                <a:rPr lang="en-US" sz="2200" i="1">
-                                  <a:latin typeface="Cambria Math" panose="02040503050406030204" pitchFamily="18" charset="0"/>
-                                </a:rPr>
-                                <m:t>=</m:t>
-                              </m:r>
-                              <m:r>
-                                <a:rPr lang="en-US" sz="2200" i="1">
-                                  <a:latin typeface="Cambria Math" panose="02040503050406030204" pitchFamily="18" charset="0"/>
-                                </a:rPr>
-                                <m:t>𝛽</m:t>
-                              </m:r>
-                              <m:d>
-                                <m:dPr>
-                                  <m:ctrlPr>
-                                    <a:rPr lang="en-US" sz="2200" i="1">
-                                      <a:latin typeface="Cambria Math" panose="02040503050406030204" pitchFamily="18" charset="0"/>
-                                    </a:rPr>
-                                  </m:ctrlPr>
-                                </m:dPr>
-                                <m:e>
-                                  <m:sSub>
-                                    <m:sSubPr>
-                                      <m:ctrlPr>
-                                        <a:rPr lang="en-US" sz="2200" i="1">
-                                          <a:latin typeface="Cambria Math" panose="02040503050406030204" pitchFamily="18" charset="0"/>
-                                        </a:rPr>
-                                      </m:ctrlPr>
-                                    </m:sSubPr>
-                                    <m:e>
-                                      <m:r>
-                                        <a:rPr lang="en-US" sz="2200" i="1">
-                                          <a:latin typeface="Cambria Math" panose="02040503050406030204" pitchFamily="18" charset="0"/>
-                                        </a:rPr>
-                                        <m:t>𝑙</m:t>
-                                      </m:r>
-                                    </m:e>
-                                    <m:sub>
-                                      <m:r>
-                                        <a:rPr lang="en-US" sz="2200" i="1">
-                                          <a:latin typeface="Cambria Math" panose="02040503050406030204" pitchFamily="18" charset="0"/>
-                                        </a:rPr>
-                                        <m:t>𝑛</m:t>
-                                      </m:r>
-                                    </m:sub>
-                                  </m:sSub>
-                                  <m:r>
-                                    <a:rPr lang="en-US" sz="2200" i="1">
-                                      <a:latin typeface="Cambria Math" panose="02040503050406030204" pitchFamily="18" charset="0"/>
-                                    </a:rPr>
-                                    <m:t>−</m:t>
-                                  </m:r>
-                                  <m:sSub>
-                                    <m:sSubPr>
-                                      <m:ctrlPr>
-                                        <a:rPr lang="en-US" sz="2200" i="1">
-                                          <a:latin typeface="Cambria Math" panose="02040503050406030204" pitchFamily="18" charset="0"/>
-                                        </a:rPr>
-                                      </m:ctrlPr>
-                                    </m:sSubPr>
-                                    <m:e>
-                                      <m:r>
-                                        <a:rPr lang="en-US" sz="2200" i="1">
-                                          <a:latin typeface="Cambria Math" panose="02040503050406030204" pitchFamily="18" charset="0"/>
-                                        </a:rPr>
-                                        <m:t>𝑙</m:t>
-                                      </m:r>
-                                    </m:e>
-                                    <m:sub>
-                                      <m:r>
-                                        <a:rPr lang="en-US" sz="2200" i="1">
-                                          <a:latin typeface="Cambria Math" panose="02040503050406030204" pitchFamily="18" charset="0"/>
-                                        </a:rPr>
-                                        <m:t>𝑛</m:t>
-                                      </m:r>
-                                      <m:r>
-                                        <a:rPr lang="en-US" sz="2200" i="1">
-                                          <a:latin typeface="Cambria Math" panose="02040503050406030204" pitchFamily="18" charset="0"/>
-                                        </a:rPr>
-                                        <m:t>−1</m:t>
-                                      </m:r>
-                                    </m:sub>
-                                  </m:sSub>
-                                </m:e>
-                              </m:d>
-                              <m:r>
-                                <a:rPr lang="en-US" sz="2200" i="1">
-                                  <a:latin typeface="Cambria Math" panose="02040503050406030204" pitchFamily="18" charset="0"/>
-                                </a:rPr>
-                                <m:t>+</m:t>
-                              </m:r>
-                              <m:d>
-                                <m:dPr>
-                                  <m:ctrlPr>
-                                    <a:rPr lang="en-US" sz="2200" i="1">
-                                      <a:latin typeface="Cambria Math" panose="02040503050406030204" pitchFamily="18" charset="0"/>
-                                    </a:rPr>
-                                  </m:ctrlPr>
-                                </m:dPr>
-                                <m:e>
-                                  <m:r>
-                                    <a:rPr lang="en-US" sz="2200" i="1">
-                                      <a:latin typeface="Cambria Math" panose="02040503050406030204" pitchFamily="18" charset="0"/>
-                                    </a:rPr>
-                                    <m:t>1−</m:t>
-                                  </m:r>
-                                  <m:r>
-                                    <a:rPr lang="en-US" sz="2200" i="1">
-                                      <a:latin typeface="Cambria Math" panose="02040503050406030204" pitchFamily="18" charset="0"/>
-                                    </a:rPr>
-                                    <m:t>𝛽</m:t>
-                                  </m:r>
-                                </m:e>
-                              </m:d>
-                              <m:sSub>
-                                <m:sSubPr>
-                                  <m:ctrlPr>
-                                    <a:rPr lang="en-US" sz="2200" i="1">
-                                      <a:latin typeface="Cambria Math" panose="02040503050406030204" pitchFamily="18" charset="0"/>
-                                    </a:rPr>
-                                  </m:ctrlPr>
-                                </m:sSubPr>
-                                <m:e>
-                                  <m:r>
-                                    <a:rPr lang="en-US" sz="2200" i="1">
-                                      <a:latin typeface="Cambria Math" panose="02040503050406030204" pitchFamily="18" charset="0"/>
-                                    </a:rPr>
-                                    <m:t>𝑏</m:t>
-                                  </m:r>
-                                </m:e>
-                                <m:sub>
-                                  <m:r>
-                                    <a:rPr lang="en-US" sz="2200" i="1">
-                                      <a:latin typeface="Cambria Math" panose="02040503050406030204" pitchFamily="18" charset="0"/>
-                                    </a:rPr>
-                                    <m:t>𝑛</m:t>
-                                  </m:r>
-                                  <m:r>
-                                    <a:rPr lang="en-US" sz="2200" i="1">
-                                      <a:latin typeface="Cambria Math" panose="02040503050406030204" pitchFamily="18" charset="0"/>
-                                    </a:rPr>
-                                    <m:t>−1</m:t>
-                                  </m:r>
-                                </m:sub>
-                              </m:sSub>
-                              <m:r>
-                                <a:rPr lang="ru-RU" sz="2200" b="0" i="1" smtClean="0">
-                                  <a:latin typeface="Cambria Math" panose="02040503050406030204" pitchFamily="18" charset="0"/>
-                                </a:rPr>
-                                <m:t>  (</m:t>
-                              </m:r>
-                              <m:r>
-                                <a:rPr lang="en-US" sz="2200" i="1">
-                                  <a:latin typeface="Cambria Math" panose="02040503050406030204" pitchFamily="18" charset="0"/>
-                                </a:rPr>
-                                <m:t>𝑡𝑟𝑒𝑛𝑑</m:t>
-                              </m:r>
-                              <m:r>
-                                <a:rPr lang="ru-RU" sz="2200" b="0" i="1" smtClean="0">
-                                  <a:latin typeface="Cambria Math" panose="02040503050406030204" pitchFamily="18" charset="0"/>
-                                </a:rPr>
-                                <m:t>)</m:t>
-                              </m:r>
-                            </m:e>
-                            <m:e>
-                              <m:sSub>
-                                <m:sSubPr>
-                                  <m:ctrlPr>
-                                    <a:rPr lang="en-US" sz="2200" b="0" i="1" smtClean="0">
-                                      <a:latin typeface="Cambria Math" panose="02040503050406030204" pitchFamily="18" charset="0"/>
-                                    </a:rPr>
-                                  </m:ctrlPr>
-                                </m:sSubPr>
-                                <m:e>
-                                  <m:r>
-                                    <a:rPr lang="en-US" sz="2200" b="0" i="1" smtClean="0">
-                                      <a:latin typeface="Cambria Math" panose="02040503050406030204" pitchFamily="18" charset="0"/>
-                                    </a:rPr>
-                                    <m:t>𝑠</m:t>
-                                  </m:r>
-                                </m:e>
-                                <m:sub>
-                                  <m:r>
-                                    <a:rPr lang="en-US" sz="2200" b="0" i="1" smtClean="0">
-                                      <a:latin typeface="Cambria Math" panose="02040503050406030204" pitchFamily="18" charset="0"/>
-                                    </a:rPr>
-                                    <m:t>𝑛</m:t>
-                                  </m:r>
-                                </m:sub>
-                              </m:sSub>
-                              <m:r>
-                                <a:rPr lang="en-US" sz="2200" b="0" i="1" smtClean="0">
-                                  <a:latin typeface="Cambria Math" panose="02040503050406030204" pitchFamily="18" charset="0"/>
-                                </a:rPr>
-                                <m:t>=</m:t>
-                              </m:r>
-                              <m:r>
-                                <a:rPr lang="en-US" sz="2200" b="0" i="1" smtClean="0">
-                                  <a:latin typeface="Cambria Math" panose="02040503050406030204" pitchFamily="18" charset="0"/>
-                                </a:rPr>
-                                <m:t>𝛾</m:t>
-                              </m:r>
-                              <m:d>
-                                <m:dPr>
-                                  <m:ctrlPr>
-                                    <a:rPr lang="en-US" sz="2200" b="0" i="1" smtClean="0">
-                                      <a:latin typeface="Cambria Math" panose="02040503050406030204" pitchFamily="18" charset="0"/>
-                                    </a:rPr>
-                                  </m:ctrlPr>
-                                </m:dPr>
-                                <m:e>
-                                  <m:sSub>
-                                    <m:sSubPr>
-                                      <m:ctrlPr>
-                                        <a:rPr lang="en-US" sz="2200" b="0" i="1" smtClean="0">
-                                          <a:latin typeface="Cambria Math" panose="02040503050406030204" pitchFamily="18" charset="0"/>
-                                        </a:rPr>
-                                      </m:ctrlPr>
-                                    </m:sSubPr>
-                                    <m:e>
-                                      <m:r>
-                                        <a:rPr lang="en-US" sz="2200" b="0" i="1" smtClean="0">
-                                          <a:latin typeface="Cambria Math" panose="02040503050406030204" pitchFamily="18" charset="0"/>
-                                        </a:rPr>
-                                        <m:t>𝑦</m:t>
-                                      </m:r>
-                                    </m:e>
-                                    <m:sub>
-                                      <m:r>
-                                        <a:rPr lang="en-US" sz="2200" b="0" i="1" smtClean="0">
-                                          <a:latin typeface="Cambria Math" panose="02040503050406030204" pitchFamily="18" charset="0"/>
-                                        </a:rPr>
-                                        <m:t>𝑛</m:t>
-                                      </m:r>
-                                    </m:sub>
-                                  </m:sSub>
-                                  <m:r>
-                                    <a:rPr lang="en-US" sz="2200" b="0" i="1" smtClean="0">
-                                      <a:latin typeface="Cambria Math" panose="02040503050406030204" pitchFamily="18" charset="0"/>
-                                    </a:rPr>
-                                    <m:t>−</m:t>
-                                  </m:r>
-                                  <m:sSub>
-                                    <m:sSubPr>
-                                      <m:ctrlPr>
-                                        <a:rPr lang="en-US" sz="2200" b="0" i="1" smtClean="0">
-                                          <a:latin typeface="Cambria Math" panose="02040503050406030204" pitchFamily="18" charset="0"/>
-                                        </a:rPr>
-                                      </m:ctrlPr>
-                                    </m:sSubPr>
-                                    <m:e>
-                                      <m:r>
-                                        <a:rPr lang="en-US" sz="2200" b="0" i="1" smtClean="0">
-                                          <a:latin typeface="Cambria Math" panose="02040503050406030204" pitchFamily="18" charset="0"/>
-                                        </a:rPr>
-                                        <m:t>𝑙</m:t>
-                                      </m:r>
-                                    </m:e>
-                                    <m:sub>
-                                      <m:r>
-                                        <a:rPr lang="en-US" sz="2200" b="0" i="1" smtClean="0">
-                                          <a:latin typeface="Cambria Math" panose="02040503050406030204" pitchFamily="18" charset="0"/>
-                                        </a:rPr>
-                                        <m:t>𝑛</m:t>
-                                      </m:r>
-                                    </m:sub>
-                                  </m:sSub>
-                                </m:e>
-                              </m:d>
-                              <m:r>
-                                <a:rPr lang="en-US" sz="2200" b="0" i="1" smtClean="0">
-                                  <a:latin typeface="Cambria Math" panose="02040503050406030204" pitchFamily="18" charset="0"/>
-                                </a:rPr>
-                                <m:t>+</m:t>
-                              </m:r>
-                              <m:d>
-                                <m:dPr>
-                                  <m:ctrlPr>
-                                    <a:rPr lang="en-US" sz="2200" b="0" i="1" smtClean="0">
-                                      <a:latin typeface="Cambria Math" panose="02040503050406030204" pitchFamily="18" charset="0"/>
-                                    </a:rPr>
-                                  </m:ctrlPr>
-                                </m:dPr>
-                                <m:e>
-                                  <m:r>
-                                    <a:rPr lang="en-US" sz="2200" b="0" i="1" smtClean="0">
-                                      <a:latin typeface="Cambria Math" panose="02040503050406030204" pitchFamily="18" charset="0"/>
-                                    </a:rPr>
-                                    <m:t>1−</m:t>
-                                  </m:r>
-                                  <m:r>
-                                    <a:rPr lang="en-US" sz="2200" b="0" i="1" smtClean="0">
-                                      <a:latin typeface="Cambria Math" panose="02040503050406030204" pitchFamily="18" charset="0"/>
-                                    </a:rPr>
-                                    <m:t>𝛾</m:t>
-                                  </m:r>
-                                </m:e>
-                              </m:d>
-                              <m:sSub>
-                                <m:sSubPr>
-                                  <m:ctrlPr>
-                                    <a:rPr lang="en-US" sz="2200" b="0" i="1" smtClean="0">
-                                      <a:latin typeface="Cambria Math" panose="02040503050406030204" pitchFamily="18" charset="0"/>
-                                    </a:rPr>
-                                  </m:ctrlPr>
-                                </m:sSubPr>
-                                <m:e>
-                                  <m:r>
-                                    <a:rPr lang="en-US" sz="2200" b="0" i="1" smtClean="0">
-                                      <a:latin typeface="Cambria Math" panose="02040503050406030204" pitchFamily="18" charset="0"/>
-                                    </a:rPr>
-                                    <m:t>𝑠</m:t>
-                                  </m:r>
-                                </m:e>
-                                <m:sub>
-                                  <m:r>
-                                    <a:rPr lang="en-US" sz="2200" b="0" i="1" smtClean="0">
-                                      <a:latin typeface="Cambria Math" panose="02040503050406030204" pitchFamily="18" charset="0"/>
-                                    </a:rPr>
-                                    <m:t>𝑛</m:t>
-                                  </m:r>
-                                  <m:r>
-                                    <a:rPr lang="en-US" sz="2200" b="0" i="1" smtClean="0">
-                                      <a:latin typeface="Cambria Math" panose="02040503050406030204" pitchFamily="18" charset="0"/>
-                                    </a:rPr>
-                                    <m:t>−</m:t>
-                                  </m:r>
-                                  <m:r>
-                                    <a:rPr lang="en-US" sz="2200" b="0" i="1" smtClean="0">
-                                      <a:latin typeface="Cambria Math" panose="02040503050406030204" pitchFamily="18" charset="0"/>
-                                    </a:rPr>
-                                    <m:t>𝑚</m:t>
-                                  </m:r>
-                                </m:sub>
-                              </m:sSub>
-                            </m:e>
-                          </m:eqArr>
-                        </m:e>
-                      </m:d>
-                    </m:oMath>
-                  </m:oMathPara>
-                </a14:m>
-                <a:endParaRPr lang="en-US" sz="2200" dirty="0"/>
-              </a:p>
-              <a:p>
-                <a:pPr marL="0" indent="0">
-                  <a:buNone/>
-                </a:pPr>
-                <a:r>
-                  <a:rPr lang="ru-RU" sz="2000" dirty="0"/>
-                  <a:t>где </a:t>
-                </a:r>
-                <a14:m>
-                  <m:oMath xmlns:m="http://schemas.openxmlformats.org/officeDocument/2006/math">
-                    <m:r>
-                      <a:rPr lang="en-US" sz="2000" i="1">
-                        <a:latin typeface="Cambria Math" panose="02040503050406030204" pitchFamily="18" charset="0"/>
-                      </a:rPr>
-                      <m:t>𝛾</m:t>
-                    </m:r>
-                  </m:oMath>
-                </a14:m>
-                <a:r>
-                  <a:rPr lang="ru-RU" sz="2000" dirty="0"/>
-                  <a:t> – коэффициент сезонного сглаживания,</a:t>
-                </a:r>
-                <a:r>
-                  <a:rPr lang="en-US" sz="2000" dirty="0"/>
-                  <a:t> </a:t>
-                </a:r>
-                <a14:m>
-                  <m:oMath xmlns:m="http://schemas.openxmlformats.org/officeDocument/2006/math">
-                    <m:r>
-                      <a:rPr lang="en-US" sz="2000" i="1">
-                        <a:latin typeface="Cambria Math" panose="02040503050406030204" pitchFamily="18" charset="0"/>
-                      </a:rPr>
-                      <m:t>𝑚</m:t>
-                    </m:r>
-                  </m:oMath>
-                </a14:m>
-                <a:r>
-                  <a:rPr lang="en-US" sz="2000" dirty="0"/>
-                  <a:t> – </a:t>
-                </a:r>
-                <a:r>
-                  <a:rPr lang="ru-RU" sz="2000" dirty="0"/>
-                  <a:t>период сезонность,</a:t>
-                </a:r>
-                <a14:m>
-                  <m:oMath xmlns:m="http://schemas.openxmlformats.org/officeDocument/2006/math">
-                    <m:r>
-                      <a:rPr lang="en-US" sz="2000" i="1">
-                        <a:latin typeface="Cambria Math" panose="02040503050406030204" pitchFamily="18" charset="0"/>
-                      </a:rPr>
-                      <m:t>∆</m:t>
-                    </m:r>
-                    <m:r>
-                      <a:rPr lang="en-US" sz="2000" b="0" i="1" smtClean="0">
-                        <a:latin typeface="Cambria Math" panose="02040503050406030204" pitchFamily="18" charset="0"/>
-                      </a:rPr>
-                      <m:t>=</m:t>
-                    </m:r>
-                    <m:r>
-                      <a:rPr lang="en-US" sz="2000" i="1">
-                        <a:latin typeface="Cambria Math" panose="02040503050406030204" pitchFamily="18" charset="0"/>
-                      </a:rPr>
-                      <m:t>𝑑</m:t>
-                    </m:r>
-                    <m:r>
-                      <a:rPr lang="en-US" sz="2000" i="1">
-                        <a:latin typeface="Cambria Math" panose="02040503050406030204" pitchFamily="18" charset="0"/>
-                      </a:rPr>
-                      <m:t> </m:t>
-                    </m:r>
-                    <m:r>
-                      <a:rPr lang="en-US" sz="2000" i="1">
-                        <a:latin typeface="Cambria Math" panose="02040503050406030204" pitchFamily="18" charset="0"/>
-                      </a:rPr>
-                      <m:t>𝑚𝑜𝑑</m:t>
-                    </m:r>
-                    <m:r>
-                      <a:rPr lang="en-US" sz="2000" i="1">
-                        <a:latin typeface="Cambria Math" panose="02040503050406030204" pitchFamily="18" charset="0"/>
-                      </a:rPr>
-                      <m:t> </m:t>
-                    </m:r>
-                    <m:r>
-                      <a:rPr lang="en-US" sz="2000" i="1">
-                        <a:latin typeface="Cambria Math" panose="02040503050406030204" pitchFamily="18" charset="0"/>
-                      </a:rPr>
-                      <m:t>𝑚</m:t>
-                    </m:r>
-                  </m:oMath>
-                </a14:m>
-                <a:r>
-                  <a:rPr lang="ru-RU" sz="2000" dirty="0"/>
-                  <a:t> – смещение относительного последнего полного сезона в данных</a:t>
-                </a:r>
-                <a:endParaRPr lang="en-US" sz="2000" dirty="0"/>
-              </a:p>
-              <a:p>
-                <a:pPr marL="0" indent="0">
-                  <a:buNone/>
-                </a:pPr>
-                <a:endParaRPr lang="en-US" sz="2000" i="1" dirty="0">
-                  <a:latin typeface="Cambria Math" panose="02040503050406030204" pitchFamily="18" charset="0"/>
-                </a:endParaRPr>
-              </a:p>
-              <a:p>
-                <a:pPr marL="0" indent="0">
-                  <a:buNone/>
-                </a:pPr>
-                <a:endParaRPr lang="ru-RU" sz="2000" dirty="0"/>
-              </a:p>
-            </p:txBody>
-          </p:sp>
-        </mc:Choice>
-        <mc:Fallback xmlns="">
-          <p:sp>
-            <p:nvSpPr>
-              <p:cNvPr id="3" name="Объект 2">
-                <a:extLst>
-                  <a:ext uri="{FF2B5EF4-FFF2-40B4-BE49-F238E27FC236}">
-                    <a16:creationId xmlns:a16="http://schemas.microsoft.com/office/drawing/2014/main" id="{9CFDC76D-90F0-4FD7-8BA6-954D6D2E6FFD}"/>
-                  </a:ext>
-                </a:extLst>
-              </p:cNvPr>
-              <p:cNvSpPr>
-                <a:spLocks noGrp="1" noRot="1" noChangeAspect="1" noMove="1" noResize="1" noEditPoints="1" noAdjustHandles="1" noChangeArrowheads="1" noChangeShapeType="1" noTextEdit="1"/>
-              </p:cNvSpPr>
-              <p:nvPr>
-                <p:ph idx="1"/>
-              </p:nvPr>
-            </p:nvSpPr>
-            <p:spPr>
-              <a:xfrm>
-                <a:off x="226957" y="817117"/>
-                <a:ext cx="11791949" cy="5502274"/>
-              </a:xfrm>
-              <a:blipFill>
-                <a:blip r:embed="rId3"/>
-                <a:stretch>
-                  <a:fillRect l="-672" t="-1329"/>
-                </a:stretch>
-              </a:blipFill>
-            </p:spPr>
-            <p:txBody>
-              <a:bodyPr/>
-              <a:lstStyle/>
-              <a:p>
-                <a:r>
-                  <a:rPr lang="ru-RU">
-                    <a:noFill/>
-                  </a:rPr>
-                  <a:t> </a:t>
-                </a:r>
-              </a:p>
-            </p:txBody>
-          </p:sp>
-        </mc:Fallback>
-      </mc:AlternateContent>
-      <p:sp>
-        <p:nvSpPr>
-          <p:cNvPr id="5" name="Прямоугольник 4"/>
-          <p:cNvSpPr/>
-          <p:nvPr/>
-        </p:nvSpPr>
-        <p:spPr>
-          <a:xfrm>
-            <a:off x="504825" y="6488668"/>
-            <a:ext cx="9077325" cy="338554"/>
-          </a:xfrm>
-          <a:prstGeom prst="rect">
-            <a:avLst/>
-          </a:prstGeom>
-        </p:spPr>
-        <p:txBody>
-          <a:bodyPr wrap="square">
-            <a:spAutoFit/>
-          </a:bodyPr>
-          <a:lstStyle/>
-          <a:p>
-            <a:r>
-              <a:rPr lang="ru-RU" sz="1600" dirty="0"/>
-              <a:t>https://education.yandex.ru/handbook/ml/article/analitika-vremennyh-ryadov</a:t>
-            </a:r>
-          </a:p>
-        </p:txBody>
-      </p:sp>
-      <p:sp>
-        <p:nvSpPr>
-          <p:cNvPr id="6" name="Прямоугольник 5"/>
-          <p:cNvSpPr/>
-          <p:nvPr/>
-        </p:nvSpPr>
-        <p:spPr>
-          <a:xfrm>
-            <a:off x="7331127" y="6488668"/>
-            <a:ext cx="3727624" cy="338554"/>
-          </a:xfrm>
-          <a:prstGeom prst="rect">
-            <a:avLst/>
-          </a:prstGeom>
-        </p:spPr>
-        <p:txBody>
-          <a:bodyPr wrap="none">
-            <a:spAutoFit/>
-          </a:bodyPr>
-          <a:lstStyle/>
-          <a:p>
-            <a:r>
-              <a:rPr lang="ru-RU" sz="1600" dirty="0"/>
-              <a:t>https://otexts.com/fpp2/holt-winters.html</a:t>
-            </a:r>
-          </a:p>
-        </p:txBody>
-      </p:sp>
-      <p:sp>
-        <p:nvSpPr>
-          <p:cNvPr id="10" name="Прямоугольник 9"/>
-          <p:cNvSpPr/>
-          <p:nvPr/>
-        </p:nvSpPr>
-        <p:spPr>
-          <a:xfrm>
-            <a:off x="346840" y="3826401"/>
-            <a:ext cx="5666554" cy="2800767"/>
-          </a:xfrm>
-          <a:prstGeom prst="rect">
-            <a:avLst/>
-          </a:prstGeom>
-        </p:spPr>
-        <p:txBody>
-          <a:bodyPr wrap="square">
-            <a:spAutoFit/>
-          </a:bodyPr>
-          <a:lstStyle/>
-          <a:p>
-            <a:pPr algn="just"/>
-            <a:r>
-              <a:rPr lang="ru-RU" sz="2000" dirty="0"/>
-              <a:t>В модели Сезонная компонента – это текущее значение без уровня и предыдущая сезонная компонента</a:t>
-            </a:r>
-          </a:p>
-          <a:p>
-            <a:pPr marL="285750" indent="-285750" algn="just">
-              <a:buFont typeface="Arial" panose="020B0604020202020204" pitchFamily="34" charset="0"/>
-              <a:buChar char="•"/>
-            </a:pPr>
-            <a:r>
-              <a:rPr lang="ru-RU" sz="2000" dirty="0"/>
-              <a:t>Сезон – сравнительно быстрые изменения с одинаковым периодом!</a:t>
-            </a:r>
-            <a:endParaRPr lang="en-US" sz="2000" dirty="0"/>
-          </a:p>
-          <a:p>
-            <a:pPr marL="342900" indent="-342900" algn="just">
-              <a:buFont typeface="Arial" panose="020B0604020202020204" pitchFamily="34" charset="0"/>
-              <a:buChar char="•"/>
-            </a:pPr>
-            <a:r>
-              <a:rPr lang="ru-RU" sz="2000" dirty="0"/>
-              <a:t>Могут быть также мультипликативная и затухающая модели тренда и сезонности.</a:t>
-            </a:r>
-          </a:p>
-          <a:p>
-            <a:pPr algn="just"/>
-            <a:r>
-              <a:rPr lang="ru-RU" sz="2000" dirty="0"/>
-              <a:t>	напр. спрос на </a:t>
-            </a:r>
-            <a:r>
-              <a:rPr lang="ru-RU" sz="2000" dirty="0" err="1"/>
-              <a:t>электроэенерги</a:t>
-            </a:r>
-            <a:r>
-              <a:rPr lang="ru-RU" sz="2000" dirty="0"/>
-              <a:t>.</a:t>
-            </a:r>
-          </a:p>
-          <a:p>
-            <a:pPr algn="just"/>
-            <a:endParaRPr lang="ru-RU" sz="1600" b="0" i="1" dirty="0">
-              <a:solidFill>
-                <a:schemeClr val="tx1"/>
-              </a:solidFill>
-              <a:effectLst/>
-              <a:latin typeface="__YSText_8fb396"/>
-            </a:endParaRPr>
-          </a:p>
-        </p:txBody>
-      </p:sp>
-      <p:pic>
-        <p:nvPicPr>
-          <p:cNvPr id="14" name="Picture 2" descr="image.png">
-            <a:extLst>
-              <a:ext uri="{FF2B5EF4-FFF2-40B4-BE49-F238E27FC236}">
-                <a16:creationId xmlns:a16="http://schemas.microsoft.com/office/drawing/2014/main" id="{02A694C1-DCCF-4974-B57F-8BFBFBCC1DE6}"/>
-              </a:ext>
-            </a:extLst>
-          </p:cNvPr>
-          <p:cNvPicPr>
-            <a:picLocks noChangeAspect="1" noChangeArrowheads="1"/>
-          </p:cNvPicPr>
-          <p:nvPr/>
-        </p:nvPicPr>
-        <p:blipFill rotWithShape="1">
-          <a:blip r:embed="rId4">
-            <a:extLst>
-              <a:ext uri="{28A0092B-C50C-407E-A947-70E740481C1C}">
-                <a14:useLocalDpi xmlns:a14="http://schemas.microsoft.com/office/drawing/2010/main" val="0"/>
-              </a:ext>
-            </a:extLst>
-          </a:blip>
-          <a:srcRect l="8887" t="8532" r="8717" b="6336"/>
-          <a:stretch/>
-        </p:blipFill>
-        <p:spPr bwMode="auto">
-          <a:xfrm>
-            <a:off x="6133277" y="3416074"/>
-            <a:ext cx="5734050" cy="2962275"/>
-          </a:xfrm>
-          <a:prstGeom prst="rect">
-            <a:avLst/>
-          </a:prstGeom>
-          <a:noFill/>
-          <a:extLst>
-            <a:ext uri="{909E8E84-426E-40DD-AFC4-6F175D3DCCD1}">
-              <a14:hiddenFill xmlns:a14="http://schemas.microsoft.com/office/drawing/2010/main">
-                <a:solidFill>
-                  <a:srgbClr val="FFFFFF"/>
-                </a:solidFill>
-              </a14:hiddenFill>
-            </a:ext>
-          </a:extLst>
-        </p:spPr>
-      </p:pic>
-      <p:pic>
-        <p:nvPicPr>
-          <p:cNvPr id="8" name="Picture 2" descr="image.png">
-            <a:extLst>
-              <a:ext uri="{FF2B5EF4-FFF2-40B4-BE49-F238E27FC236}">
-                <a16:creationId xmlns:a16="http://schemas.microsoft.com/office/drawing/2014/main" id="{02A694C1-DCCF-4974-B57F-8BFBFBCC1DE6}"/>
-              </a:ext>
-            </a:extLst>
-          </p:cNvPr>
-          <p:cNvPicPr>
-            <a:picLocks noChangeAspect="1" noChangeArrowheads="1"/>
-          </p:cNvPicPr>
-          <p:nvPr/>
-        </p:nvPicPr>
-        <p:blipFill rotWithShape="1">
-          <a:blip r:embed="rId4">
-            <a:extLst>
-              <a:ext uri="{28A0092B-C50C-407E-A947-70E740481C1C}">
-                <a14:useLocalDpi xmlns:a14="http://schemas.microsoft.com/office/drawing/2010/main" val="0"/>
-              </a:ext>
-            </a:extLst>
-          </a:blip>
-          <a:srcRect l="78976" t="11915" r="10074" b="77683"/>
-          <a:stretch/>
-        </p:blipFill>
-        <p:spPr bwMode="auto">
-          <a:xfrm>
-            <a:off x="9284584" y="3416073"/>
-            <a:ext cx="2734322" cy="1298801"/>
-          </a:xfrm>
-          <a:prstGeom prst="rect">
-            <a:avLst/>
-          </a:prstGeom>
-          <a:noFill/>
-          <a:extLst>
-            <a:ext uri="{909E8E84-426E-40DD-AFC4-6F175D3DCCD1}">
-              <a14:hiddenFill xmlns:a14="http://schemas.microsoft.com/office/drawing/2010/main">
-                <a:solidFill>
-                  <a:srgbClr val="FFFFFF"/>
-                </a:solidFill>
-              </a14:hiddenFill>
-            </a:ext>
-          </a:extLst>
-        </p:spPr>
-      </p:pic>
-    </p:spTree>
-    <p:extLst>
-      <p:ext uri="{BB962C8B-B14F-4D97-AF65-F5344CB8AC3E}">
-        <p14:creationId xmlns:p14="http://schemas.microsoft.com/office/powerpoint/2010/main" val="1301338103"/>
-      </p:ext>
-    </p:extLst>
-  </p:cSld>
-  <p:clrMapOvr>
-    <a:masterClrMapping/>
-  </p:clrMapOvr>
-  <p:timing>
-    <p:tnLst>
-      <p:par>
-        <p:cTn id="1" dur="indefinite" restart="never" nodeType="tmRoot"/>
-      </p:par>
-    </p:tnLst>
-  </p:timing>
-</p:sld>
-</file>
-
-<file path=ppt/slides/slide11.xml><?xml version="1.0" encoding="utf-8"?>
-<p:sld xmlns:a="http://schemas.openxmlformats.org/drawingml/2006/main" xmlns:r="http://schemas.openxmlformats.org/officeDocument/2006/relationships" xmlns:p="http://schemas.openxmlformats.org/presentationml/2006/main">
-  <p:cSld>
-    <p:spTree>
-      <p:nvGrpSpPr>
-        <p:cNvPr id="1" name=""/>
-        <p:cNvGrpSpPr/>
-        <p:nvPr/>
-      </p:nvGrpSpPr>
-      <p:grpSpPr>
-        <a:xfrm>
-          <a:off x="0" y="0"/>
-          <a:ext cx="0" cy="0"/>
-          <a:chOff x="0" y="0"/>
-          <a:chExt cx="0" cy="0"/>
-        </a:xfrm>
-      </p:grpSpPr>
-      <p:sp>
-        <p:nvSpPr>
-          <p:cNvPr id="2" name="Заголовок 1">
-            <a:extLst>
-              <a:ext uri="{FF2B5EF4-FFF2-40B4-BE49-F238E27FC236}">
-                <a16:creationId xmlns:a16="http://schemas.microsoft.com/office/drawing/2014/main" id="{3FB6B433-AB20-4BD4-8E77-84B856A5D608}"/>
-              </a:ext>
-            </a:extLst>
-          </p:cNvPr>
-          <p:cNvSpPr>
-            <a:spLocks noGrp="1"/>
-          </p:cNvSpPr>
-          <p:nvPr>
-            <p:ph type="title"/>
-          </p:nvPr>
-        </p:nvSpPr>
-        <p:spPr>
-          <a:xfrm>
             <a:off x="226957" y="93606"/>
             <a:ext cx="11802295" cy="757854"/>
           </a:xfrm>
@@ -6275,7 +4852,7 @@
 </p:sld>
 </file>
 
-<file path=ppt/slides/slide12.xml><?xml version="1.0" encoding="utf-8"?>
+<file path=ppt/slides/slide11.xml><?xml version="1.0" encoding="utf-8"?>
 <p:sld xmlns:a="http://schemas.openxmlformats.org/drawingml/2006/main" xmlns:r="http://schemas.openxmlformats.org/officeDocument/2006/relationships" xmlns:p="http://schemas.openxmlformats.org/presentationml/2006/main">
   <p:cSld>
     <p:spTree>
@@ -7611,7 +6188,7 @@
 </p:sld>
 </file>
 
-<file path=ppt/slides/slide13.xml><?xml version="1.0" encoding="utf-8"?>
+<file path=ppt/slides/slide12.xml><?xml version="1.0" encoding="utf-8"?>
 <p:sld xmlns:a="http://schemas.openxmlformats.org/drawingml/2006/main" xmlns:r="http://schemas.openxmlformats.org/officeDocument/2006/relationships" xmlns:p="http://schemas.openxmlformats.org/presentationml/2006/main">
   <p:cSld>
     <p:spTree>
@@ -7927,7 +6504,7 @@
 </p:sld>
 </file>
 
-<file path=ppt/slides/slide14.xml><?xml version="1.0" encoding="utf-8"?>
+<file path=ppt/slides/slide13.xml><?xml version="1.0" encoding="utf-8"?>
 <p:sld xmlns:a="http://schemas.openxmlformats.org/drawingml/2006/main" xmlns:r="http://schemas.openxmlformats.org/officeDocument/2006/relationships" xmlns:p="http://schemas.openxmlformats.org/presentationml/2006/main">
   <p:cSld>
     <p:spTree>
@@ -8583,7 +7160,7 @@
 </p:sld>
 </file>
 
-<file path=ppt/slides/slide15.xml><?xml version="1.0" encoding="utf-8"?>
+<file path=ppt/slides/slide14.xml><?xml version="1.0" encoding="utf-8"?>
 <p:sld xmlns:a="http://schemas.openxmlformats.org/drawingml/2006/main" xmlns:r="http://schemas.openxmlformats.org/officeDocument/2006/relationships" xmlns:p="http://schemas.openxmlformats.org/presentationml/2006/main">
   <p:cSld>
     <p:spTree>
@@ -8998,7 +7575,7 @@
 </p:sld>
 </file>
 
-<file path=ppt/slides/slide16.xml><?xml version="1.0" encoding="utf-8"?>
+<file path=ppt/slides/slide15.xml><?xml version="1.0" encoding="utf-8"?>
 <p:sld xmlns:a="http://schemas.openxmlformats.org/drawingml/2006/main" xmlns:r="http://schemas.openxmlformats.org/officeDocument/2006/relationships" xmlns:p="http://schemas.openxmlformats.org/presentationml/2006/main">
   <p:cSld>
     <p:spTree>
@@ -10200,7 +8777,7 @@
 </p:sld>
 </file>
 
-<file path=ppt/slides/slide17.xml><?xml version="1.0" encoding="utf-8"?>
+<file path=ppt/slides/slide16.xml><?xml version="1.0" encoding="utf-8"?>
 <p:sld xmlns:a="http://schemas.openxmlformats.org/drawingml/2006/main" xmlns:r="http://schemas.openxmlformats.org/officeDocument/2006/relationships" xmlns:p="http://schemas.openxmlformats.org/presentationml/2006/main">
   <p:cSld>
     <p:spTree>
@@ -10425,7 +9002,7 @@
 </p:sld>
 </file>
 
-<file path=ppt/slides/slide18.xml><?xml version="1.0" encoding="utf-8"?>
+<file path=ppt/slides/slide17.xml><?xml version="1.0" encoding="utf-8"?>
 <p:sld xmlns:a="http://schemas.openxmlformats.org/drawingml/2006/main" xmlns:r="http://schemas.openxmlformats.org/officeDocument/2006/relationships" xmlns:p="http://schemas.openxmlformats.org/presentationml/2006/main">
   <p:cSld>
     <p:spTree>
@@ -11898,7 +10475,7 @@
 </p:sld>
 </file>
 
-<file path=ppt/slides/slide19.xml><?xml version="1.0" encoding="utf-8"?>
+<file path=ppt/slides/slide18.xml><?xml version="1.0" encoding="utf-8"?>
 <p:sld xmlns:a="http://schemas.openxmlformats.org/drawingml/2006/main" xmlns:r="http://schemas.openxmlformats.org/officeDocument/2006/relationships" xmlns:p="http://schemas.openxmlformats.org/presentationml/2006/main">
   <p:cSld>
     <p:spTree>
@@ -12761,84 +11338,7 @@
 </p:sld>
 </file>
 
-<file path=ppt/slides/slide2.xml><?xml version="1.0" encoding="utf-8"?>
-<p:sld xmlns:a="http://schemas.openxmlformats.org/drawingml/2006/main" xmlns:r="http://schemas.openxmlformats.org/officeDocument/2006/relationships" xmlns:p="http://schemas.openxmlformats.org/presentationml/2006/main">
-  <p:cSld>
-    <p:spTree>
-      <p:nvGrpSpPr>
-        <p:cNvPr id="1" name=""/>
-        <p:cNvGrpSpPr/>
-        <p:nvPr/>
-      </p:nvGrpSpPr>
-      <p:grpSpPr>
-        <a:xfrm>
-          <a:off x="0" y="0"/>
-          <a:ext cx="0" cy="0"/>
-          <a:chOff x="0" y="0"/>
-          <a:chExt cx="0" cy="0"/>
-        </a:xfrm>
-      </p:grpSpPr>
-      <p:sp>
-        <p:nvSpPr>
-          <p:cNvPr id="2" name="Заголовок 1">
-            <a:extLst>
-              <a:ext uri="{FF2B5EF4-FFF2-40B4-BE49-F238E27FC236}">
-                <a16:creationId xmlns:a16="http://schemas.microsoft.com/office/drawing/2014/main" id="{9AE3A209-E86B-43CF-A4CE-1917FCF9C1BD}"/>
-              </a:ext>
-            </a:extLst>
-          </p:cNvPr>
-          <p:cNvSpPr>
-            <a:spLocks noGrp="1"/>
-          </p:cNvSpPr>
-          <p:nvPr>
-            <p:ph type="ctrTitle"/>
-          </p:nvPr>
-        </p:nvSpPr>
-        <p:spPr>
-          <a:xfrm>
-            <a:off x="385343" y="728616"/>
-            <a:ext cx="10932920" cy="863964"/>
-          </a:xfrm>
-        </p:spPr>
-        <p:txBody>
-          <a:bodyPr>
-            <a:normAutofit fontScale="90000"/>
-          </a:bodyPr>
-          <a:lstStyle/>
-          <a:p>
-            <a:r>
-              <a:rPr lang="en-US" sz="8000" b="1" dirty="0" smtClean="0"/>
-              <a:t>TS </a:t>
-            </a:r>
-            <a:r>
-              <a:rPr lang="ru-RU" sz="8000" b="1" dirty="0" smtClean="0"/>
-              <a:t>модель</a:t>
-            </a:r>
-            <a:endParaRPr lang="en-US" sz="8000" b="1" dirty="0"/>
-          </a:p>
-        </p:txBody>
-      </p:sp>
-    </p:spTree>
-    <p:extLst>
-      <p:ext uri="{BB962C8B-B14F-4D97-AF65-F5344CB8AC3E}">
-        <p14:creationId xmlns:p14="http://schemas.microsoft.com/office/powerpoint/2010/main" val="2895557766"/>
-      </p:ext>
-    </p:extLst>
-  </p:cSld>
-  <p:clrMapOvr>
-    <a:masterClrMapping/>
-  </p:clrMapOvr>
-  <p:timing>
-    <p:tnLst>
-      <p:par>
-        <p:cTn id="1" dur="indefinite" restart="never" nodeType="tmRoot"/>
-      </p:par>
-    </p:tnLst>
-  </p:timing>
-</p:sld>
-</file>
-
-<file path=ppt/slides/slide20.xml><?xml version="1.0" encoding="utf-8"?>
+<file path=ppt/slides/slide19.xml><?xml version="1.0" encoding="utf-8"?>
 <p:sld xmlns:a="http://schemas.openxmlformats.org/drawingml/2006/main" xmlns:r="http://schemas.openxmlformats.org/officeDocument/2006/relationships" xmlns:p="http://schemas.openxmlformats.org/presentationml/2006/main">
   <p:cSld>
     <p:spTree>
@@ -13064,7 +11564,897 @@
 </p:sld>
 </file>
 
-<file path=ppt/slides/slide21.xml><?xml version="1.0" encoding="utf-8"?>
+<file path=ppt/slides/slide2.xml><?xml version="1.0" encoding="utf-8"?>
+<p:sld xmlns:a="http://schemas.openxmlformats.org/drawingml/2006/main" xmlns:r="http://schemas.openxmlformats.org/officeDocument/2006/relationships" xmlns:p="http://schemas.openxmlformats.org/presentationml/2006/main">
+  <p:cSld>
+    <p:spTree>
+      <p:nvGrpSpPr>
+        <p:cNvPr id="1" name=""/>
+        <p:cNvGrpSpPr/>
+        <p:nvPr/>
+      </p:nvGrpSpPr>
+      <p:grpSpPr>
+        <a:xfrm>
+          <a:off x="0" y="0"/>
+          <a:ext cx="0" cy="0"/>
+          <a:chOff x="0" y="0"/>
+          <a:chExt cx="0" cy="0"/>
+        </a:xfrm>
+      </p:grpSpPr>
+      <p:sp>
+        <p:nvSpPr>
+          <p:cNvPr id="2" name="Заголовок 1">
+            <a:extLst>
+              <a:ext uri="{FF2B5EF4-FFF2-40B4-BE49-F238E27FC236}">
+                <a16:creationId xmlns:a16="http://schemas.microsoft.com/office/drawing/2014/main" id="{79B0BEDB-9774-4E17-9A6B-DBCF6A1F528F}"/>
+              </a:ext>
+            </a:extLst>
+          </p:cNvPr>
+          <p:cNvSpPr>
+            <a:spLocks noGrp="1"/>
+          </p:cNvSpPr>
+          <p:nvPr>
+            <p:ph type="title"/>
+          </p:nvPr>
+        </p:nvSpPr>
+        <p:spPr>
+          <a:xfrm>
+            <a:off x="1576070" y="197786"/>
+            <a:ext cx="9849485" cy="1325563"/>
+          </a:xfrm>
+        </p:spPr>
+        <p:txBody>
+          <a:bodyPr>
+            <a:normAutofit/>
+          </a:bodyPr>
+          <a:lstStyle/>
+          <a:p>
+            <a:r>
+              <a:rPr lang="en-US" b="1" dirty="0" smtClean="0"/>
+              <a:t>TS-</a:t>
+            </a:r>
+            <a:r>
+              <a:rPr lang="ru-RU" b="1" dirty="0" smtClean="0"/>
+              <a:t>Модели </a:t>
+            </a:r>
+            <a:r>
+              <a:rPr lang="ru-RU" b="1" dirty="0"/>
+              <a:t>временных рядов</a:t>
+            </a:r>
+            <a:endParaRPr lang="en-US" b="1" dirty="0"/>
+          </a:p>
+        </p:txBody>
+      </p:sp>
+      <mc:AlternateContent xmlns:mc="http://schemas.openxmlformats.org/markup-compatibility/2006" xmlns:a14="http://schemas.microsoft.com/office/drawing/2010/main">
+        <mc:Choice Requires="a14">
+          <p:sp>
+            <p:nvSpPr>
+              <p:cNvPr id="3" name="Объект 2">
+                <a:extLst>
+                  <a:ext uri="{FF2B5EF4-FFF2-40B4-BE49-F238E27FC236}">
+                    <a16:creationId xmlns:a16="http://schemas.microsoft.com/office/drawing/2014/main" id="{4CDB8E57-5CA8-497C-990E-C304F4FBE710}"/>
+                  </a:ext>
+                </a:extLst>
+              </p:cNvPr>
+              <p:cNvSpPr>
+                <a:spLocks noGrp="1"/>
+              </p:cNvSpPr>
+              <p:nvPr>
+                <p:ph idx="1"/>
+              </p:nvPr>
+            </p:nvSpPr>
+            <p:spPr>
+              <a:xfrm>
+                <a:off x="209550" y="1114427"/>
+                <a:ext cx="11525249" cy="5545789"/>
+              </a:xfrm>
+            </p:spPr>
+            <p:txBody>
+              <a:bodyPr>
+                <a:normAutofit/>
+              </a:bodyPr>
+              <a:lstStyle/>
+              <a:p>
+                <a:pPr marL="0" indent="0" eaLnBrk="0" fontAlgn="base" hangingPunct="0">
+                  <a:lnSpc>
+                    <a:spcPct val="100000"/>
+                  </a:lnSpc>
+                  <a:spcBef>
+                    <a:spcPct val="0"/>
+                  </a:spcBef>
+                  <a:spcAft>
+                    <a:spcPct val="0"/>
+                  </a:spcAft>
+                  <a:buNone/>
+                </a:pPr>
+                <a:endParaRPr lang="ru-RU" altLang="en-US" sz="2200" i="1" dirty="0" smtClean="0"/>
+              </a:p>
+              <a:p>
+                <a:pPr marL="0" indent="0" eaLnBrk="0" fontAlgn="base" hangingPunct="0">
+                  <a:lnSpc>
+                    <a:spcPct val="100000"/>
+                  </a:lnSpc>
+                  <a:spcBef>
+                    <a:spcPct val="0"/>
+                  </a:spcBef>
+                  <a:spcAft>
+                    <a:spcPct val="0"/>
+                  </a:spcAft>
+                  <a:buNone/>
+                </a:pPr>
+                <a:r>
+                  <a:rPr lang="ru-RU" altLang="en-US" sz="2200" i="1" dirty="0"/>
+                  <a:t>Модель </a:t>
+                </a:r>
+                <a:r>
+                  <a:rPr lang="ru-RU" altLang="en-US" sz="2200" i="1" dirty="0" smtClean="0"/>
+                  <a:t>для которых явно можно выделить тренд, но также и другие составляющие</a:t>
+                </a:r>
+                <a:endParaRPr lang="ru-RU" altLang="en-US" sz="2200" i="1" dirty="0"/>
+              </a:p>
+              <a:p>
+                <a:pPr marL="0" indent="0" algn="ctr" eaLnBrk="0" fontAlgn="base" hangingPunct="0">
+                  <a:lnSpc>
+                    <a:spcPct val="100000"/>
+                  </a:lnSpc>
+                  <a:spcBef>
+                    <a:spcPct val="0"/>
+                  </a:spcBef>
+                  <a:spcAft>
+                    <a:spcPct val="0"/>
+                  </a:spcAft>
+                  <a:buNone/>
+                </a:pPr>
+                <a14:m>
+                  <m:oMathPara xmlns:m="http://schemas.openxmlformats.org/officeDocument/2006/math">
+                    <m:oMathParaPr>
+                      <m:jc m:val="centerGroup"/>
+                    </m:oMathParaPr>
+                    <m:oMath xmlns:m="http://schemas.openxmlformats.org/officeDocument/2006/math">
+                      <m:sSub>
+                        <m:sSubPr>
+                          <m:ctrlPr>
+                            <a:rPr lang="ru-RU" altLang="en-US" sz="2400" b="0" i="1" dirty="0" smtClean="0">
+                              <a:latin typeface="Cambria Math" panose="02040503050406030204" pitchFamily="18" charset="0"/>
+                            </a:rPr>
+                          </m:ctrlPr>
+                        </m:sSubPr>
+                        <m:e>
+                          <m:r>
+                            <m:rPr>
+                              <m:sty m:val="p"/>
+                            </m:rPr>
+                            <a:rPr lang="en-US" altLang="en-US" sz="2400" i="1" dirty="0">
+                              <a:latin typeface="Cambria Math" panose="02040503050406030204" pitchFamily="18" charset="0"/>
+                            </a:rPr>
+                            <m:t>y</m:t>
+                          </m:r>
+                        </m:e>
+                        <m:sub>
+                          <m:r>
+                            <a:rPr lang="en-US" altLang="en-US" sz="2400" b="0" i="1" dirty="0" smtClean="0">
+                              <a:latin typeface="Cambria Math" panose="02040503050406030204" pitchFamily="18" charset="0"/>
+                            </a:rPr>
+                            <m:t>𝑇𝑆</m:t>
+                          </m:r>
+                        </m:sub>
+                      </m:sSub>
+                      <m:r>
+                        <a:rPr lang="en-US" altLang="en-US" sz="2400" i="1" dirty="0">
+                          <a:latin typeface="Cambria Math" panose="02040503050406030204" pitchFamily="18" charset="0"/>
+                        </a:rPr>
+                        <m:t>(</m:t>
+                      </m:r>
+                      <m:r>
+                        <a:rPr lang="en-US" altLang="en-US" sz="2400" i="1" dirty="0">
+                          <a:latin typeface="Cambria Math" panose="02040503050406030204" pitchFamily="18" charset="0"/>
+                        </a:rPr>
+                        <m:t>𝑡</m:t>
+                      </m:r>
+                      <m:r>
+                        <a:rPr lang="en-US" altLang="en-US" sz="2400" i="1" dirty="0">
+                          <a:latin typeface="Cambria Math" panose="02040503050406030204" pitchFamily="18" charset="0"/>
+                        </a:rPr>
+                        <m:t>) = </m:t>
+                      </m:r>
+                      <m:r>
+                        <a:rPr lang="en-US" altLang="en-US" sz="2400" i="1" dirty="0">
+                          <a:latin typeface="Cambria Math" panose="02040503050406030204" pitchFamily="18" charset="0"/>
+                        </a:rPr>
+                        <m:t>𝑡𝑟𝑒𝑛𝑑</m:t>
+                      </m:r>
+                      <m:r>
+                        <a:rPr lang="en-US" altLang="en-US" sz="2400" i="1" dirty="0">
+                          <a:latin typeface="Cambria Math" panose="02040503050406030204" pitchFamily="18" charset="0"/>
+                        </a:rPr>
+                        <m:t>(</m:t>
+                      </m:r>
+                      <m:r>
+                        <a:rPr lang="en-US" altLang="en-US" sz="2400" i="1" dirty="0">
+                          <a:latin typeface="Cambria Math" panose="02040503050406030204" pitchFamily="18" charset="0"/>
+                        </a:rPr>
+                        <m:t>𝑡</m:t>
+                      </m:r>
+                      <m:r>
+                        <a:rPr lang="en-US" altLang="en-US" sz="2400" i="1" dirty="0">
+                          <a:latin typeface="Cambria Math" panose="02040503050406030204" pitchFamily="18" charset="0"/>
+                        </a:rPr>
+                        <m:t>)+</m:t>
+                      </m:r>
+                      <m:nary>
+                        <m:naryPr>
+                          <m:chr m:val="∑"/>
+                          <m:ctrlPr>
+                            <a:rPr lang="en-US" altLang="en-US" sz="2400" i="1" dirty="0">
+                              <a:latin typeface="Cambria Math" panose="02040503050406030204" pitchFamily="18" charset="0"/>
+                            </a:rPr>
+                          </m:ctrlPr>
+                        </m:naryPr>
+                        <m:sub>
+                          <m:r>
+                            <a:rPr lang="en-US" altLang="en-US" sz="2400" i="1" dirty="0" err="1">
+                              <a:latin typeface="Cambria Math" panose="02040503050406030204" pitchFamily="18" charset="0"/>
+                            </a:rPr>
+                            <m:t>𝑖</m:t>
+                          </m:r>
+                          <m:r>
+                            <a:rPr lang="en-US" altLang="en-US" sz="2400" i="1" dirty="0">
+                              <a:latin typeface="Cambria Math" panose="02040503050406030204" pitchFamily="18" charset="0"/>
+                            </a:rPr>
+                            <m:t>=0</m:t>
+                          </m:r>
+                        </m:sub>
+                        <m:sup>
+                          <m:r>
+                            <a:rPr lang="en-US" altLang="en-US" sz="2400" i="1" dirty="0">
+                              <a:latin typeface="Cambria Math" panose="02040503050406030204" pitchFamily="18" charset="0"/>
+                            </a:rPr>
+                            <m:t>𝑀</m:t>
+                          </m:r>
+                        </m:sup>
+                        <m:e>
+                          <m:r>
+                            <a:rPr lang="en-US" altLang="en-US" sz="2400" i="1" dirty="0">
+                              <a:latin typeface="Cambria Math" panose="02040503050406030204" pitchFamily="18" charset="0"/>
+                            </a:rPr>
+                            <m:t>𝑠𝑒𝑎𝑠𝑜𝑛𝑎𝑙</m:t>
+                          </m:r>
+                          <m:r>
+                            <a:rPr lang="en-US" altLang="en-US" sz="2400" i="1" dirty="0">
+                              <a:latin typeface="Cambria Math" panose="02040503050406030204" pitchFamily="18" charset="0"/>
+                            </a:rPr>
+                            <m:t>(</m:t>
+                          </m:r>
+                          <m:r>
+                            <a:rPr lang="en-US" altLang="en-US" sz="2400" i="1" dirty="0">
+                              <a:latin typeface="Cambria Math" panose="02040503050406030204" pitchFamily="18" charset="0"/>
+                            </a:rPr>
+                            <m:t>𝑡</m:t>
+                          </m:r>
+                          <m:r>
+                            <a:rPr lang="en-US" altLang="en-US" sz="2400" i="1" dirty="0">
+                              <a:latin typeface="Cambria Math" panose="02040503050406030204" pitchFamily="18" charset="0"/>
+                            </a:rPr>
+                            <m:t>)</m:t>
+                          </m:r>
+                        </m:e>
+                      </m:nary>
+                      <m:r>
+                        <a:rPr lang="en-US" altLang="en-US" sz="2400" i="1" dirty="0">
+                          <a:latin typeface="Cambria Math" panose="02040503050406030204" pitchFamily="18" charset="0"/>
+                        </a:rPr>
+                        <m:t> +</m:t>
+                      </m:r>
+                      <m:r>
+                        <a:rPr lang="en-US" altLang="en-US" sz="2400" b="0" i="1" dirty="0" smtClean="0">
+                          <a:latin typeface="Cambria Math" panose="02040503050406030204" pitchFamily="18" charset="0"/>
+                        </a:rPr>
+                        <m:t>𝑟𝑒𝑠𝑖𝑑𝑢𝑎𝑙</m:t>
+                      </m:r>
+                      <m:r>
+                        <a:rPr lang="en-US" altLang="en-US" sz="2400" i="1" dirty="0">
+                          <a:latin typeface="Cambria Math" panose="02040503050406030204" pitchFamily="18" charset="0"/>
+                        </a:rPr>
+                        <m:t>(</m:t>
+                      </m:r>
+                      <m:r>
+                        <a:rPr lang="en-US" altLang="en-US" sz="2400" i="1" dirty="0">
+                          <a:latin typeface="Cambria Math" panose="02040503050406030204" pitchFamily="18" charset="0"/>
+                        </a:rPr>
+                        <m:t>𝑡</m:t>
+                      </m:r>
+                      <m:r>
+                        <a:rPr lang="en-US" altLang="en-US" sz="2400" i="1" dirty="0">
+                          <a:latin typeface="Cambria Math" panose="02040503050406030204" pitchFamily="18" charset="0"/>
+                        </a:rPr>
+                        <m:t>)</m:t>
+                      </m:r>
+                    </m:oMath>
+                  </m:oMathPara>
+                </a14:m>
+                <a:endParaRPr lang="ru-RU" altLang="en-US" sz="2000" dirty="0">
+                  <a:latin typeface="Open Sans"/>
+                </a:endParaRPr>
+              </a:p>
+              <a:p>
+                <a:pPr marL="0" indent="0" eaLnBrk="0" fontAlgn="base" hangingPunct="0">
+                  <a:lnSpc>
+                    <a:spcPct val="100000"/>
+                  </a:lnSpc>
+                  <a:spcBef>
+                    <a:spcPct val="0"/>
+                  </a:spcBef>
+                  <a:spcAft>
+                    <a:spcPct val="0"/>
+                  </a:spcAft>
+                  <a:buNone/>
+                </a:pPr>
+                <a:r>
+                  <a:rPr lang="ru-RU" altLang="en-US" sz="2000" dirty="0">
+                    <a:latin typeface="Open Sans"/>
+                  </a:rPr>
+                  <a:t>Или </a:t>
+                </a:r>
+                <a:r>
+                  <a:rPr lang="ru-RU" altLang="en-US" sz="2000" dirty="0" smtClean="0">
+                    <a:latin typeface="Open Sans"/>
+                  </a:rPr>
+                  <a:t>мультипликативная модель</a:t>
+                </a:r>
+                <a:endParaRPr lang="ru-RU" altLang="en-US" sz="2000" dirty="0">
+                  <a:latin typeface="Open Sans"/>
+                </a:endParaRPr>
+              </a:p>
+              <a:p>
+                <a:pPr marL="0" indent="0" algn="ctr" eaLnBrk="0" fontAlgn="base" hangingPunct="0">
+                  <a:lnSpc>
+                    <a:spcPct val="100000"/>
+                  </a:lnSpc>
+                  <a:spcBef>
+                    <a:spcPct val="0"/>
+                  </a:spcBef>
+                  <a:spcAft>
+                    <a:spcPct val="0"/>
+                  </a:spcAft>
+                  <a:buNone/>
+                </a:pPr>
+                <a14:m>
+                  <m:oMath xmlns:m="http://schemas.openxmlformats.org/officeDocument/2006/math">
+                    <m:r>
+                      <a:rPr lang="en-US" altLang="en-US" sz="2000" i="1" dirty="0">
+                        <a:latin typeface="Cambria Math" panose="02040503050406030204" pitchFamily="18" charset="0"/>
+                      </a:rPr>
+                      <m:t>𝑦</m:t>
+                    </m:r>
+                    <m:d>
+                      <m:dPr>
+                        <m:ctrlPr>
+                          <a:rPr lang="en-US" altLang="en-US" sz="2000" i="1" dirty="0">
+                            <a:latin typeface="Cambria Math" panose="02040503050406030204" pitchFamily="18" charset="0"/>
+                          </a:rPr>
+                        </m:ctrlPr>
+                      </m:dPr>
+                      <m:e>
+                        <m:r>
+                          <a:rPr lang="en-US" altLang="en-US" sz="2000" i="1" dirty="0">
+                            <a:latin typeface="Cambria Math" panose="02040503050406030204" pitchFamily="18" charset="0"/>
+                          </a:rPr>
+                          <m:t>𝑡</m:t>
+                        </m:r>
+                      </m:e>
+                    </m:d>
+                    <m:r>
+                      <a:rPr lang="en-US" altLang="en-US" sz="2000" i="1" dirty="0">
+                        <a:latin typeface="Cambria Math" panose="02040503050406030204" pitchFamily="18" charset="0"/>
+                      </a:rPr>
+                      <m:t>= </m:t>
+                    </m:r>
+                    <m:r>
+                      <a:rPr lang="en-US" altLang="en-US" sz="2000" i="1" dirty="0">
+                        <a:latin typeface="Cambria Math" panose="02040503050406030204" pitchFamily="18" charset="0"/>
+                      </a:rPr>
+                      <m:t>𝑡𝑟𝑒𝑛𝑑</m:t>
+                    </m:r>
+                    <m:d>
+                      <m:dPr>
+                        <m:ctrlPr>
+                          <a:rPr lang="en-US" altLang="en-US" sz="2000" i="1" dirty="0">
+                            <a:latin typeface="Cambria Math" panose="02040503050406030204" pitchFamily="18" charset="0"/>
+                          </a:rPr>
+                        </m:ctrlPr>
+                      </m:dPr>
+                      <m:e>
+                        <m:r>
+                          <a:rPr lang="en-US" altLang="en-US" sz="2000" i="1" dirty="0">
+                            <a:latin typeface="Cambria Math" panose="02040503050406030204" pitchFamily="18" charset="0"/>
+                          </a:rPr>
+                          <m:t>𝑡</m:t>
+                        </m:r>
+                      </m:e>
+                    </m:d>
+                    <m:r>
+                      <a:rPr lang="en-US" altLang="en-US" sz="2000" i="1" dirty="0">
+                        <a:latin typeface="Cambria Math" panose="02040503050406030204" pitchFamily="18" charset="0"/>
+                      </a:rPr>
+                      <m:t>⋅</m:t>
+                    </m:r>
+                    <m:d>
+                      <m:dPr>
+                        <m:ctrlPr>
+                          <a:rPr lang="ru-RU" altLang="en-US" sz="2000" b="0" i="1" dirty="0" smtClean="0">
+                            <a:latin typeface="Cambria Math" panose="02040503050406030204" pitchFamily="18" charset="0"/>
+                          </a:rPr>
+                        </m:ctrlPr>
+                      </m:dPr>
+                      <m:e>
+                        <m:nary>
+                          <m:naryPr>
+                            <m:chr m:val="∑"/>
+                            <m:ctrlPr>
+                              <a:rPr lang="en-US" altLang="en-US" sz="2000" i="1" dirty="0">
+                                <a:latin typeface="Cambria Math" panose="02040503050406030204" pitchFamily="18" charset="0"/>
+                              </a:rPr>
+                            </m:ctrlPr>
+                          </m:naryPr>
+                          <m:sub>
+                            <m:r>
+                              <a:rPr lang="en-US" altLang="en-US" sz="2000" i="1" dirty="0" err="1">
+                                <a:latin typeface="Cambria Math" panose="02040503050406030204" pitchFamily="18" charset="0"/>
+                              </a:rPr>
+                              <m:t>𝑖</m:t>
+                            </m:r>
+                            <m:r>
+                              <a:rPr lang="en-US" altLang="en-US" sz="2000" i="1" dirty="0">
+                                <a:latin typeface="Cambria Math" panose="02040503050406030204" pitchFamily="18" charset="0"/>
+                              </a:rPr>
+                              <m:t>=0</m:t>
+                            </m:r>
+                          </m:sub>
+                          <m:sup>
+                            <m:r>
+                              <a:rPr lang="en-US" altLang="en-US" sz="2000" i="1" dirty="0">
+                                <a:latin typeface="Cambria Math" panose="02040503050406030204" pitchFamily="18" charset="0"/>
+                              </a:rPr>
+                              <m:t>𝑀</m:t>
+                            </m:r>
+                          </m:sup>
+                          <m:e>
+                            <m:r>
+                              <a:rPr lang="en-US" altLang="en-US" sz="2000" i="1" dirty="0">
+                                <a:latin typeface="Cambria Math" panose="02040503050406030204" pitchFamily="18" charset="0"/>
+                              </a:rPr>
+                              <m:t>𝑠𝑒𝑎𝑠𝑜𝑛𝑎𝑙</m:t>
+                            </m:r>
+                            <m:d>
+                              <m:dPr>
+                                <m:ctrlPr>
+                                  <a:rPr lang="en-US" altLang="en-US" sz="2000" i="1" dirty="0">
+                                    <a:latin typeface="Cambria Math" panose="02040503050406030204" pitchFamily="18" charset="0"/>
+                                  </a:rPr>
+                                </m:ctrlPr>
+                              </m:dPr>
+                              <m:e>
+                                <m:r>
+                                  <a:rPr lang="en-US" altLang="en-US" sz="2000" i="1" dirty="0">
+                                    <a:latin typeface="Cambria Math" panose="02040503050406030204" pitchFamily="18" charset="0"/>
+                                  </a:rPr>
+                                  <m:t>𝑡</m:t>
+                                </m:r>
+                              </m:e>
+                            </m:d>
+                          </m:e>
+                        </m:nary>
+                      </m:e>
+                    </m:d>
+                    <m:r>
+                      <a:rPr lang="en-US" altLang="en-US" sz="2000" b="0" i="1" dirty="0" smtClean="0">
+                        <a:latin typeface="Cambria Math" panose="02040503050406030204" pitchFamily="18" charset="0"/>
+                      </a:rPr>
+                      <m:t>⋅</m:t>
+                    </m:r>
+                    <m:r>
+                      <a:rPr lang="en-US" altLang="en-US" sz="2000" b="0" i="1" dirty="0" smtClean="0">
+                        <a:latin typeface="Cambria Math" panose="02040503050406030204" pitchFamily="18" charset="0"/>
+                      </a:rPr>
+                      <m:t>𝑟𝑒𝑠𝑖𝑑𝑢𝑎𝑙</m:t>
+                    </m:r>
+                    <m:r>
+                      <a:rPr lang="en-US" altLang="en-US" sz="2000" i="1" dirty="0">
+                        <a:latin typeface="Cambria Math" panose="02040503050406030204" pitchFamily="18" charset="0"/>
+                      </a:rPr>
+                      <m:t>(</m:t>
+                    </m:r>
+                    <m:r>
+                      <a:rPr lang="en-US" altLang="en-US" sz="2000" i="1" dirty="0">
+                        <a:latin typeface="Cambria Math" panose="02040503050406030204" pitchFamily="18" charset="0"/>
+                      </a:rPr>
+                      <m:t>𝑡</m:t>
+                    </m:r>
+                  </m:oMath>
+                </a14:m>
+                <a:r>
+                  <a:rPr lang="en-US" altLang="en-US" sz="2000" i="1" dirty="0"/>
+                  <a:t>). </a:t>
+                </a:r>
+                <a:endParaRPr lang="en-US" altLang="en-US" sz="2000" i="1" dirty="0" smtClean="0"/>
+              </a:p>
+              <a:p>
+                <a:pPr marL="0" indent="0" algn="ctr" eaLnBrk="0" fontAlgn="base" hangingPunct="0">
+                  <a:lnSpc>
+                    <a:spcPct val="100000"/>
+                  </a:lnSpc>
+                  <a:spcBef>
+                    <a:spcPct val="0"/>
+                  </a:spcBef>
+                  <a:spcAft>
+                    <a:spcPct val="0"/>
+                  </a:spcAft>
+                  <a:buNone/>
+                </a:pPr>
+                <a:r>
+                  <a:rPr lang="ru-RU" altLang="en-US" sz="2000" i="1" dirty="0" smtClean="0"/>
+                  <a:t>Могут быть и более сложные модели</a:t>
+                </a:r>
+                <a:endParaRPr lang="en-US" altLang="en-US" sz="2000" i="1" dirty="0"/>
+              </a:p>
+              <a:p>
+                <a:pPr eaLnBrk="0" fontAlgn="base" hangingPunct="0">
+                  <a:lnSpc>
+                    <a:spcPct val="100000"/>
+                  </a:lnSpc>
+                  <a:spcBef>
+                    <a:spcPct val="0"/>
+                  </a:spcBef>
+                  <a:spcAft>
+                    <a:spcPct val="0"/>
+                  </a:spcAft>
+                </a:pPr>
+                <a:endParaRPr lang="en-US" altLang="en-US" sz="2000" dirty="0">
+                  <a:latin typeface="Open Sans"/>
+                </a:endParaRPr>
+              </a:p>
+            </p:txBody>
+          </p:sp>
+        </mc:Choice>
+        <mc:Fallback xmlns="">
+          <p:sp>
+            <p:nvSpPr>
+              <p:cNvPr id="3" name="Объект 2">
+                <a:extLst>
+                  <a:ext uri="{FF2B5EF4-FFF2-40B4-BE49-F238E27FC236}">
+                    <a16:creationId xmlns:a16="http://schemas.microsoft.com/office/drawing/2014/main" id="{4CDB8E57-5CA8-497C-990E-C304F4FBE710}"/>
+                  </a:ext>
+                </a:extLst>
+              </p:cNvPr>
+              <p:cNvSpPr>
+                <a:spLocks noGrp="1" noRot="1" noChangeAspect="1" noMove="1" noResize="1" noEditPoints="1" noAdjustHandles="1" noChangeArrowheads="1" noChangeShapeType="1" noTextEdit="1"/>
+              </p:cNvSpPr>
+              <p:nvPr>
+                <p:ph idx="1"/>
+              </p:nvPr>
+            </p:nvSpPr>
+            <p:spPr>
+              <a:xfrm>
+                <a:off x="209550" y="1114427"/>
+                <a:ext cx="11525249" cy="5545789"/>
+              </a:xfrm>
+              <a:blipFill>
+                <a:blip r:embed="rId2"/>
+                <a:stretch>
+                  <a:fillRect l="-687"/>
+                </a:stretch>
+              </a:blipFill>
+            </p:spPr>
+            <p:txBody>
+              <a:bodyPr/>
+              <a:lstStyle/>
+              <a:p>
+                <a:r>
+                  <a:rPr lang="ru-RU">
+                    <a:noFill/>
+                  </a:rPr>
+                  <a:t> </a:t>
+                </a:r>
+              </a:p>
+            </p:txBody>
+          </p:sp>
+        </mc:Fallback>
+      </mc:AlternateContent>
+      <p:sp>
+        <p:nvSpPr>
+          <p:cNvPr id="7" name="Номер слайда 6">
+            <a:extLst>
+              <a:ext uri="{FF2B5EF4-FFF2-40B4-BE49-F238E27FC236}">
+                <a16:creationId xmlns:a16="http://schemas.microsoft.com/office/drawing/2014/main" id="{A07EF2B8-3D80-AB22-FA4B-F0655B9EAE6F}"/>
+              </a:ext>
+            </a:extLst>
+          </p:cNvPr>
+          <p:cNvSpPr>
+            <a:spLocks noGrp="1"/>
+          </p:cNvSpPr>
+          <p:nvPr>
+            <p:ph type="sldNum" sz="quarter" idx="12"/>
+          </p:nvPr>
+        </p:nvSpPr>
+        <p:spPr/>
+        <p:txBody>
+          <a:bodyPr/>
+          <a:lstStyle/>
+          <a:p>
+            <a:fld id="{45C3B737-A709-4ABC-AFE0-A6B067850C48}" type="slidenum">
+              <a:rPr lang="en-US" smtClean="0"/>
+              <a:t>2</a:t>
+            </a:fld>
+            <a:endParaRPr lang="en-US"/>
+          </a:p>
+        </p:txBody>
+      </p:sp>
+      <p:sp>
+        <p:nvSpPr>
+          <p:cNvPr id="5" name="Rectangle 231">
+            <a:extLst>
+              <a:ext uri="{FF2B5EF4-FFF2-40B4-BE49-F238E27FC236}">
+                <a16:creationId xmlns:a16="http://schemas.microsoft.com/office/drawing/2014/main" id="{57F50B8E-A23A-4154-9A0C-994DE115ACE6}"/>
+              </a:ext>
+            </a:extLst>
+          </p:cNvPr>
+          <p:cNvSpPr>
+            <a:spLocks noChangeArrowheads="1"/>
+          </p:cNvSpPr>
+          <p:nvPr/>
+        </p:nvSpPr>
+        <p:spPr bwMode="auto">
+          <a:xfrm>
+            <a:off x="6167756" y="4477386"/>
+            <a:ext cx="52071" cy="10795"/>
+          </a:xfrm>
+          <a:prstGeom prst="rect">
+            <a:avLst/>
+          </a:prstGeom>
+          <a:solidFill>
+            <a:srgbClr val="000000"/>
+          </a:solidFill>
+          <a:ln>
+            <a:noFill/>
+          </a:ln>
+          <a:extLst>
+            <a:ext uri="{91240B29-F687-4F45-9708-019B960494DF}">
+              <a14:hiddenLine xmlns:a14="http://schemas.microsoft.com/office/drawing/2010/main" w="9525">
+                <a:solidFill>
+                  <a:srgbClr val="000000"/>
+                </a:solidFill>
+                <a:miter lim="800000"/>
+                <a:headEnd/>
+                <a:tailEnd/>
+              </a14:hiddenLine>
+            </a:ext>
+          </a:extLst>
+        </p:spPr>
+        <p:txBody>
+          <a:bodyPr rot="0" vert="horz" wrap="square" lIns="91440" tIns="45720" rIns="91440" bIns="45720" anchor="t" anchorCtr="0" upright="1">
+            <a:noAutofit/>
+          </a:bodyPr>
+          <a:lstStyle/>
+          <a:p>
+            <a:endParaRPr lang="en-US" sz="1351"/>
+          </a:p>
+        </p:txBody>
+      </p:sp>
+      <p:sp>
+        <p:nvSpPr>
+          <p:cNvPr id="6" name="Rectangle 3">
+            <a:extLst>
+              <a:ext uri="{FF2B5EF4-FFF2-40B4-BE49-F238E27FC236}">
+                <a16:creationId xmlns:a16="http://schemas.microsoft.com/office/drawing/2014/main" id="{66C52228-8C94-4CF2-AD63-BA9617333BA2}"/>
+              </a:ext>
+            </a:extLst>
+          </p:cNvPr>
+          <p:cNvSpPr>
+            <a:spLocks noChangeArrowheads="1"/>
+          </p:cNvSpPr>
+          <p:nvPr/>
+        </p:nvSpPr>
+        <p:spPr bwMode="auto">
+          <a:xfrm>
+            <a:off x="-1523999" y="124999"/>
+            <a:ext cx="184731" cy="677108"/>
+          </a:xfrm>
+          <a:prstGeom prst="rect">
+            <a:avLst/>
+          </a:prstGeom>
+          <a:noFill/>
+          <a:ln>
+            <a:noFill/>
+          </a:ln>
+          <a:effectLst/>
+          <a:extLst>
+            <a:ext uri="{909E8E84-426E-40DD-AFC4-6F175D3DCCD1}">
+              <a14:hiddenFill xmlns:a14="http://schemas.microsoft.com/office/drawing/2010/main">
+                <a:solidFill>
+                  <a:schemeClr val="accent1"/>
+                </a:solidFill>
+              </a14:hiddenFill>
+            </a:ext>
+            <a:ext uri="{91240B29-F687-4F45-9708-019B960494DF}">
+              <a14:hiddenLine xmlns:a14="http://schemas.microsoft.com/office/drawing/2010/main" w="9525">
+                <a:solidFill>
+                  <a:schemeClr val="tx1"/>
+                </a:solidFill>
+                <a:miter lim="800000"/>
+                <a:headEnd/>
+                <a:tailEnd/>
+              </a14:hiddenLine>
+            </a:ext>
+            <a:ext uri="{AF507438-7753-43E0-B8FC-AC1667EBCBE1}">
+              <a14:hiddenEffects xmlns:a14="http://schemas.microsoft.com/office/drawing/2010/main">
+                <a:effectLst>
+                  <a:outerShdw dist="35921" dir="2700000" algn="ctr" rotWithShape="0">
+                    <a:schemeClr val="bg2"/>
+                  </a:outerShdw>
+                </a:effectLst>
+              </a14:hiddenEffects>
+            </a:ext>
+          </a:extLst>
+        </p:spPr>
+        <p:txBody>
+          <a:bodyPr vert="horz" wrap="none" lIns="91440" tIns="45720" rIns="91440" bIns="45720" numCol="1" anchor="ctr" anchorCtr="0" compatLnSpc="1">
+            <a:prstTxWarp prst="textNoShape">
+              <a:avLst/>
+            </a:prstTxWarp>
+            <a:spAutoFit/>
+          </a:bodyPr>
+          <a:lstStyle/>
+          <a:p>
+            <a:pPr eaLnBrk="0" fontAlgn="base" hangingPunct="0">
+              <a:spcBef>
+                <a:spcPct val="0"/>
+              </a:spcBef>
+              <a:spcAft>
+                <a:spcPct val="0"/>
+              </a:spcAft>
+            </a:pPr>
+            <a:r>
+              <a:rPr lang="en-US" altLang="en-US" sz="1400">
+                <a:latin typeface="Arial" panose="020B0604020202020204" pitchFamily="34" charset="0"/>
+                <a:ea typeface="Times New Roman" panose="02020603050405020304" pitchFamily="18" charset="0"/>
+              </a:rPr>
+              <a:t/>
+            </a:r>
+            <a:br>
+              <a:rPr lang="en-US" altLang="en-US" sz="1400">
+                <a:latin typeface="Arial" panose="020B0604020202020204" pitchFamily="34" charset="0"/>
+                <a:ea typeface="Times New Roman" panose="02020603050405020304" pitchFamily="18" charset="0"/>
+              </a:rPr>
+            </a:br>
+            <a:endParaRPr lang="en-US" altLang="en-US" sz="2400">
+              <a:latin typeface="Arial" panose="020B0604020202020204" pitchFamily="34" charset="0"/>
+            </a:endParaRPr>
+          </a:p>
+        </p:txBody>
+      </p:sp>
+      <p:sp>
+        <p:nvSpPr>
+          <p:cNvPr id="4" name="Rectangle 1">
+            <a:extLst>
+              <a:ext uri="{FF2B5EF4-FFF2-40B4-BE49-F238E27FC236}">
+                <a16:creationId xmlns:a16="http://schemas.microsoft.com/office/drawing/2014/main" id="{4ECA1DAD-475E-4D0B-A20A-17535DDD41A8}"/>
+              </a:ext>
+            </a:extLst>
+          </p:cNvPr>
+          <p:cNvSpPr>
+            <a:spLocks noChangeArrowheads="1"/>
+          </p:cNvSpPr>
+          <p:nvPr/>
+        </p:nvSpPr>
+        <p:spPr bwMode="auto">
+          <a:xfrm>
+            <a:off x="-1523999" y="43935"/>
+            <a:ext cx="65" cy="369332"/>
+          </a:xfrm>
+          <a:prstGeom prst="rect">
+            <a:avLst/>
+          </a:prstGeom>
+          <a:solidFill>
+            <a:srgbClr val="FFFFFF"/>
+          </a:solidFill>
+          <a:ln>
+            <a:noFill/>
+          </a:ln>
+          <a:effectLst/>
+          <a:extLst>
+            <a:ext uri="{91240B29-F687-4F45-9708-019B960494DF}">
+              <a14:hiddenLine xmlns:a14="http://schemas.microsoft.com/office/drawing/2010/main" w="9525">
+                <a:solidFill>
+                  <a:schemeClr val="tx1"/>
+                </a:solidFill>
+                <a:miter lim="800000"/>
+                <a:headEnd/>
+                <a:tailEnd/>
+              </a14:hiddenLine>
+            </a:ext>
+            <a:ext uri="{AF507438-7753-43E0-B8FC-AC1667EBCBE1}">
+              <a14:hiddenEffects xmlns:a14="http://schemas.microsoft.com/office/drawing/2010/main">
+                <a:effectLst>
+                  <a:outerShdw dist="35921" dir="2700000" algn="ctr" rotWithShape="0">
+                    <a:schemeClr val="bg2"/>
+                  </a:outerShdw>
+                </a:effectLst>
+              </a14:hiddenEffects>
+            </a:ext>
+          </a:extLst>
+        </p:spPr>
+        <p:txBody>
+          <a:bodyPr vert="horz" wrap="none" lIns="0" tIns="0" rIns="0" bIns="0" numCol="1" anchor="ctr" anchorCtr="0" compatLnSpc="1">
+            <a:prstTxWarp prst="textNoShape">
+              <a:avLst/>
+            </a:prstTxWarp>
+            <a:spAutoFit/>
+          </a:bodyPr>
+          <a:lstStyle/>
+          <a:p>
+            <a:pPr eaLnBrk="0" fontAlgn="base" hangingPunct="0">
+              <a:spcBef>
+                <a:spcPct val="0"/>
+              </a:spcBef>
+              <a:spcAft>
+                <a:spcPct val="0"/>
+              </a:spcAft>
+            </a:pPr>
+            <a:endParaRPr lang="en-US" altLang="en-US" sz="2400" dirty="0">
+              <a:latin typeface="Arial" panose="020B0604020202020204" pitchFamily="34" charset="0"/>
+            </a:endParaRPr>
+          </a:p>
+        </p:txBody>
+      </p:sp>
+      <p:sp>
+        <p:nvSpPr>
+          <p:cNvPr id="9" name="Прямоугольник 8"/>
+          <p:cNvSpPr/>
+          <p:nvPr/>
+        </p:nvSpPr>
+        <p:spPr>
+          <a:xfrm>
+            <a:off x="209550" y="6290884"/>
+            <a:ext cx="5065489" cy="369332"/>
+          </a:xfrm>
+          <a:prstGeom prst="rect">
+            <a:avLst/>
+          </a:prstGeom>
+        </p:spPr>
+        <p:txBody>
+          <a:bodyPr wrap="none">
+            <a:spAutoFit/>
+          </a:bodyPr>
+          <a:lstStyle/>
+          <a:p>
+            <a:r>
+              <a:rPr lang="ru-RU" dirty="0"/>
+              <a:t>https://openforecast.org/adam/tsComponents.html</a:t>
+            </a:r>
+          </a:p>
+        </p:txBody>
+      </p:sp>
+    </p:spTree>
+    <p:extLst>
+      <p:ext uri="{BB962C8B-B14F-4D97-AF65-F5344CB8AC3E}">
+        <p14:creationId xmlns:p14="http://schemas.microsoft.com/office/powerpoint/2010/main" val="2605955941"/>
+      </p:ext>
+    </p:extLst>
+  </p:cSld>
+  <p:clrMapOvr>
+    <a:masterClrMapping/>
+  </p:clrMapOvr>
+  <p:timing>
+    <p:tnLst>
+      <p:par>
+        <p:cTn id="1" dur="indefinite" restart="never" nodeType="tmRoot"/>
+      </p:par>
+    </p:tnLst>
+  </p:timing>
+</p:sld>
+</file>
+
+<file path=ppt/slides/slide20.xml><?xml version="1.0" encoding="utf-8"?>
 <p:sld xmlns:a="http://schemas.openxmlformats.org/drawingml/2006/main" xmlns:r="http://schemas.openxmlformats.org/officeDocument/2006/relationships" xmlns:p="http://schemas.openxmlformats.org/presentationml/2006/main">
   <p:cSld>
     <p:spTree>
@@ -14571,7 +13961,7 @@
 </p:sld>
 </file>
 
-<file path=ppt/slides/slide22.xml><?xml version="1.0" encoding="utf-8"?>
+<file path=ppt/slides/slide21.xml><?xml version="1.0" encoding="utf-8"?>
 <p:sld xmlns:a="http://schemas.openxmlformats.org/drawingml/2006/main" xmlns:r="http://schemas.openxmlformats.org/officeDocument/2006/relationships" xmlns:p="http://schemas.openxmlformats.org/presentationml/2006/main">
   <p:cSld>
     <p:spTree>
@@ -15763,7 +15153,7 @@
 </p:sld>
 </file>
 
-<file path=ppt/slides/slide23.xml><?xml version="1.0" encoding="utf-8"?>
+<file path=ppt/slides/slide22.xml><?xml version="1.0" encoding="utf-8"?>
 <p:sld xmlns:a="http://schemas.openxmlformats.org/drawingml/2006/main" xmlns:r="http://schemas.openxmlformats.org/officeDocument/2006/relationships" xmlns:p="http://schemas.openxmlformats.org/presentationml/2006/main">
   <p:cSld>
     <p:spTree>
@@ -16001,7 +15391,7 @@
 </p:sld>
 </file>
 
-<file path=ppt/slides/slide24.xml><?xml version="1.0" encoding="utf-8"?>
+<file path=ppt/slides/slide23.xml><?xml version="1.0" encoding="utf-8"?>
 <p:sld xmlns:a="http://schemas.openxmlformats.org/drawingml/2006/main" xmlns:r="http://schemas.openxmlformats.org/officeDocument/2006/relationships" xmlns:p="http://schemas.openxmlformats.org/presentationml/2006/main">
   <p:cSld>
     <p:spTree>
@@ -16174,7 +15564,7 @@
 </p:sld>
 </file>
 
-<file path=ppt/slides/slide25.xml><?xml version="1.0" encoding="utf-8"?>
+<file path=ppt/slides/slide24.xml><?xml version="1.0" encoding="utf-8"?>
 <p:sld xmlns:a="http://schemas.openxmlformats.org/drawingml/2006/main" xmlns:r="http://schemas.openxmlformats.org/officeDocument/2006/relationships" xmlns:p="http://schemas.openxmlformats.org/presentationml/2006/main">
   <p:cSld>
     <p:spTree>
@@ -16576,7 +15966,7 @@
 </p:sld>
 </file>
 
-<file path=ppt/slides/slide26.xml><?xml version="1.0" encoding="utf-8"?>
+<file path=ppt/slides/slide25.xml><?xml version="1.0" encoding="utf-8"?>
 <p:sld xmlns:a="http://schemas.openxmlformats.org/drawingml/2006/main" xmlns:r="http://schemas.openxmlformats.org/officeDocument/2006/relationships" xmlns:p="http://schemas.openxmlformats.org/presentationml/2006/main">
   <p:cSld>
     <p:spTree>
@@ -16605,2339 +15995,21 @@
         </p:nvSpPr>
         <p:spPr>
           <a:xfrm>
-            <a:off x="256374" y="365125"/>
-            <a:ext cx="11097426" cy="566367"/>
+            <a:off x="299103" y="365125"/>
+            <a:ext cx="11054697" cy="549275"/>
           </a:xfrm>
         </p:spPr>
         <p:txBody>
           <a:bodyPr>
-            <a:noAutofit/>
+            <a:normAutofit fontScale="90000"/>
           </a:bodyPr>
           <a:lstStyle/>
           <a:p>
             <a:r>
-              <a:rPr lang="ru-RU" sz="3600" b="1" dirty="0"/>
-              <a:t>Обобщенная адаптивная модель</a:t>
-            </a:r>
-            <a:r>
-              <a:rPr lang="en-US" sz="3600" b="1" dirty="0"/>
-              <a:t> (</a:t>
-            </a:r>
-            <a:r>
-              <a:rPr lang="ru-RU" sz="3600" b="1" dirty="0"/>
-              <a:t>регрессия</a:t>
-            </a:r>
-            <a:r>
-              <a:rPr lang="en-US" sz="3600" b="1" dirty="0"/>
-              <a:t>). Prophet</a:t>
-            </a:r>
-            <a:endParaRPr lang="ru-RU" sz="3600" b="1" dirty="0"/>
-          </a:p>
-        </p:txBody>
-      </p:sp>
-      <mc:AlternateContent xmlns:mc="http://schemas.openxmlformats.org/markup-compatibility/2006" xmlns:a14="http://schemas.microsoft.com/office/drawing/2010/main">
-        <mc:Choice Requires="a14">
-          <p:sp>
-            <p:nvSpPr>
-              <p:cNvPr id="3" name="Объект 2"/>
-              <p:cNvSpPr>
-                <a:spLocks noGrp="1"/>
-              </p:cNvSpPr>
-              <p:nvPr>
-                <p:ph idx="1"/>
-              </p:nvPr>
-            </p:nvSpPr>
-            <p:spPr>
-              <a:xfrm>
-                <a:off x="256374" y="931492"/>
-                <a:ext cx="11835925" cy="5031826"/>
-              </a:xfrm>
-            </p:spPr>
-            <p:txBody>
-              <a:bodyPr>
-                <a:noAutofit/>
-              </a:bodyPr>
-              <a:lstStyle/>
-              <a:p>
-                <a:pPr>
-                  <a:lnSpc>
-                    <a:spcPct val="100000"/>
-                  </a:lnSpc>
-                </a:pPr>
-                <a:r>
-                  <a:rPr lang="ru-RU" sz="2000" dirty="0"/>
-                  <a:t>Обозначенные факторы могут быть заданы следующей моделью</a:t>
-                </a:r>
-                <a:r>
-                  <a:rPr lang="en-US" sz="2000" dirty="0"/>
-                  <a:t>:</a:t>
-                </a:r>
-              </a:p>
-              <a:p>
-                <a:pPr marL="0" indent="0">
-                  <a:lnSpc>
-                    <a:spcPct val="100000"/>
-                  </a:lnSpc>
-                  <a:buNone/>
-                </a:pPr>
-                <a14:m>
-                  <m:oMathPara xmlns:m="http://schemas.openxmlformats.org/officeDocument/2006/math">
-                    <m:oMathParaPr>
-                      <m:jc m:val="centerGroup"/>
-                    </m:oMathParaPr>
-                    <m:oMath xmlns:m="http://schemas.openxmlformats.org/officeDocument/2006/math">
-                      <m:r>
-                        <a:rPr lang="en-US" sz="2000" i="1">
-                          <a:latin typeface="Cambria Math" panose="02040503050406030204" pitchFamily="18" charset="0"/>
-                        </a:rPr>
-                        <m:t>𝑦</m:t>
-                      </m:r>
-                      <m:r>
-                        <a:rPr lang="en-US" sz="2000" i="1">
-                          <a:latin typeface="Cambria Math" panose="02040503050406030204" pitchFamily="18" charset="0"/>
-                        </a:rPr>
-                        <m:t>(</m:t>
-                      </m:r>
-                      <m:r>
-                        <a:rPr lang="en-US" sz="2000" i="1">
-                          <a:latin typeface="Cambria Math" panose="02040503050406030204" pitchFamily="18" charset="0"/>
-                        </a:rPr>
-                        <m:t>𝑥</m:t>
-                      </m:r>
-                      <m:r>
-                        <a:rPr lang="en-US" sz="2000" i="1">
-                          <a:latin typeface="Cambria Math" panose="02040503050406030204" pitchFamily="18" charset="0"/>
-                        </a:rPr>
-                        <m:t>)=</m:t>
-                      </m:r>
-                      <m:r>
-                        <a:rPr lang="en-US" sz="2000" i="1">
-                          <a:latin typeface="Cambria Math" panose="02040503050406030204" pitchFamily="18" charset="0"/>
-                        </a:rPr>
-                        <m:t>𝑡𝑟𝑒𝑛𝑑</m:t>
-                      </m:r>
-                      <m:r>
-                        <a:rPr lang="en-US" sz="2000" i="1">
-                          <a:latin typeface="Cambria Math" panose="02040503050406030204" pitchFamily="18" charset="0"/>
-                        </a:rPr>
-                        <m:t>(</m:t>
-                      </m:r>
-                      <m:r>
-                        <a:rPr lang="en-US" sz="2000" i="1">
-                          <a:latin typeface="Cambria Math" panose="02040503050406030204" pitchFamily="18" charset="0"/>
-                        </a:rPr>
-                        <m:t>𝑥</m:t>
-                      </m:r>
-                      <m:r>
-                        <a:rPr lang="en-US" sz="2000" i="1">
-                          <a:latin typeface="Cambria Math" panose="02040503050406030204" pitchFamily="18" charset="0"/>
-                        </a:rPr>
-                        <m:t>)+</m:t>
-                      </m:r>
-                      <m:r>
-                        <a:rPr lang="en-US" sz="2000" i="1">
-                          <a:latin typeface="Cambria Math" panose="02040503050406030204" pitchFamily="18" charset="0"/>
-                        </a:rPr>
-                        <m:t>𝑠𝑒𝑎𝑠𝑜𝑛𝑎𝑙</m:t>
-                      </m:r>
-                      <m:r>
-                        <a:rPr lang="en-US" sz="2000" i="1">
-                          <a:latin typeface="Cambria Math" panose="02040503050406030204" pitchFamily="18" charset="0"/>
-                        </a:rPr>
-                        <m:t>(</m:t>
-                      </m:r>
-                      <m:r>
-                        <a:rPr lang="en-US" sz="2000" i="1">
-                          <a:latin typeface="Cambria Math" panose="02040503050406030204" pitchFamily="18" charset="0"/>
-                        </a:rPr>
-                        <m:t>𝑥</m:t>
-                      </m:r>
-                      <m:r>
-                        <a:rPr lang="en-US" sz="2000" i="1">
-                          <a:latin typeface="Cambria Math" panose="02040503050406030204" pitchFamily="18" charset="0"/>
-                        </a:rPr>
-                        <m:t>)+</m:t>
-                      </m:r>
-                      <m:r>
-                        <a:rPr lang="en-US" sz="2000" i="1">
-                          <a:latin typeface="Cambria Math" panose="02040503050406030204" pitchFamily="18" charset="0"/>
-                        </a:rPr>
-                        <m:t>h𝑜𝑙𝑦𝑑𝑎𝑦𝑠</m:t>
-                      </m:r>
-                      <m:r>
-                        <a:rPr lang="en-US" sz="2000" i="1">
-                          <a:latin typeface="Cambria Math" panose="02040503050406030204" pitchFamily="18" charset="0"/>
-                        </a:rPr>
-                        <m:t>(</m:t>
-                      </m:r>
-                      <m:r>
-                        <a:rPr lang="en-US" sz="2000" i="1">
-                          <a:latin typeface="Cambria Math" panose="02040503050406030204" pitchFamily="18" charset="0"/>
-                        </a:rPr>
-                        <m:t>𝑥</m:t>
-                      </m:r>
-                      <m:r>
-                        <a:rPr lang="en-US" sz="2000" i="1">
-                          <a:latin typeface="Cambria Math" panose="02040503050406030204" pitchFamily="18" charset="0"/>
-                        </a:rPr>
-                        <m:t>)+</m:t>
-                      </m:r>
-                      <m:r>
-                        <a:rPr lang="en-US" sz="2000" i="1">
-                          <a:latin typeface="Cambria Math" panose="02040503050406030204" pitchFamily="18" charset="0"/>
-                        </a:rPr>
-                        <m:t>𝑛𝑜𝑖𝑠𝑒</m:t>
-                      </m:r>
-                      <m:r>
-                        <a:rPr lang="en-US" sz="2000" i="1">
-                          <a:latin typeface="Cambria Math" panose="02040503050406030204" pitchFamily="18" charset="0"/>
-                        </a:rPr>
-                        <m:t>(</m:t>
-                      </m:r>
-                      <m:r>
-                        <a:rPr lang="en-US" sz="2000" i="1">
-                          <a:latin typeface="Cambria Math" panose="02040503050406030204" pitchFamily="18" charset="0"/>
-                        </a:rPr>
-                        <m:t>𝑥</m:t>
-                      </m:r>
-                      <m:r>
-                        <a:rPr lang="en-US" sz="2000" i="1">
-                          <a:latin typeface="Cambria Math" panose="02040503050406030204" pitchFamily="18" charset="0"/>
-                        </a:rPr>
-                        <m:t>),</m:t>
-                      </m:r>
-                    </m:oMath>
-                  </m:oMathPara>
-                </a14:m>
-                <a:endParaRPr lang="ru-RU" sz="2000" dirty="0"/>
-              </a:p>
-              <a:p>
-                <a:pPr>
-                  <a:lnSpc>
-                    <a:spcPct val="100000"/>
-                  </a:lnSpc>
-                </a:pPr>
-                <a:r>
-                  <a:rPr lang="ru-RU" sz="2000" dirty="0"/>
-                  <a:t>где</a:t>
-                </a:r>
-                <a:r>
-                  <a:rPr lang="en-US" sz="2000" dirty="0"/>
-                  <a:t>   </a:t>
-                </a:r>
-                <a14:m>
-                  <m:oMath xmlns:m="http://schemas.openxmlformats.org/officeDocument/2006/math">
-                    <m:r>
-                      <a:rPr lang="en-US" sz="2000" i="1">
-                        <a:latin typeface="Cambria Math" panose="02040503050406030204" pitchFamily="18" charset="0"/>
-                      </a:rPr>
-                      <m:t>𝑡𝑟𝑒𝑛𝑑</m:t>
-                    </m:r>
-                    <m:r>
-                      <a:rPr lang="en-US" sz="2000" i="1">
-                        <a:latin typeface="Cambria Math" panose="02040503050406030204" pitchFamily="18" charset="0"/>
-                      </a:rPr>
-                      <m:t>(</m:t>
-                    </m:r>
-                    <m:r>
-                      <a:rPr lang="en-US" sz="2000" i="1">
-                        <a:latin typeface="Cambria Math" panose="02040503050406030204" pitchFamily="18" charset="0"/>
-                      </a:rPr>
-                      <m:t>𝑥</m:t>
-                    </m:r>
-                    <m:r>
-                      <a:rPr lang="en-US" sz="2000" i="1">
-                        <a:latin typeface="Cambria Math" panose="02040503050406030204" pitchFamily="18" charset="0"/>
-                      </a:rPr>
-                      <m:t>)</m:t>
-                    </m:r>
-                  </m:oMath>
-                </a14:m>
-                <a:r>
-                  <a:rPr lang="en-US" sz="2000" dirty="0"/>
-                  <a:t> </a:t>
-                </a:r>
-                <a:r>
-                  <a:rPr lang="ru-RU" sz="2000" dirty="0"/>
-                  <a:t>или </a:t>
-                </a:r>
-              </a:p>
-              <a:p>
-                <a:pPr lvl="1">
-                  <a:lnSpc>
-                    <a:spcPct val="100000"/>
-                  </a:lnSpc>
-                </a:pPr>
-                <a:r>
-                  <a:rPr lang="ru-RU" sz="2000" dirty="0"/>
-                  <a:t>непериодический кусочно-линейный тренд</a:t>
-                </a:r>
-              </a:p>
-              <a:p>
-                <a:pPr marL="457200" lvl="1" indent="0">
-                  <a:lnSpc>
-                    <a:spcPct val="100000"/>
-                  </a:lnSpc>
-                  <a:buNone/>
-                </a:pPr>
-                <a14:m>
-                  <m:oMathPara xmlns:m="http://schemas.openxmlformats.org/officeDocument/2006/math">
-                    <m:oMathParaPr>
-                      <m:jc m:val="centerGroup"/>
-                    </m:oMathParaPr>
-                    <m:oMath xmlns:m="http://schemas.openxmlformats.org/officeDocument/2006/math">
-                      <m:r>
-                        <a:rPr lang="en-US" sz="2000" i="1">
-                          <a:latin typeface="Cambria Math" panose="02040503050406030204" pitchFamily="18" charset="0"/>
-                        </a:rPr>
-                        <m:t>𝑡𝑟𝑒𝑛𝑑</m:t>
-                      </m:r>
-                      <m:r>
-                        <a:rPr lang="en-US" sz="2000" i="1">
-                          <a:latin typeface="Cambria Math" panose="02040503050406030204" pitchFamily="18" charset="0"/>
-                        </a:rPr>
-                        <m:t>(</m:t>
-                      </m:r>
-                      <m:r>
-                        <a:rPr lang="en-US" sz="2000" i="1">
-                          <a:latin typeface="Cambria Math" panose="02040503050406030204" pitchFamily="18" charset="0"/>
-                        </a:rPr>
-                        <m:t>𝑥</m:t>
-                      </m:r>
-                      <m:r>
-                        <a:rPr lang="en-US" sz="2000" i="1">
-                          <a:latin typeface="Cambria Math" panose="02040503050406030204" pitchFamily="18" charset="0"/>
-                        </a:rPr>
-                        <m:t>)=(</m:t>
-                      </m:r>
-                      <m:r>
-                        <a:rPr lang="en-US" sz="2000" i="1">
-                          <a:latin typeface="Cambria Math" panose="02040503050406030204" pitchFamily="18" charset="0"/>
-                        </a:rPr>
-                        <m:t>𝑘</m:t>
-                      </m:r>
-                      <m:r>
-                        <a:rPr lang="en-US" sz="2000" i="1">
-                          <a:latin typeface="Cambria Math" panose="02040503050406030204" pitchFamily="18" charset="0"/>
-                        </a:rPr>
-                        <m:t>+</m:t>
-                      </m:r>
-                      <m:r>
-                        <a:rPr lang="en-US" sz="2000" i="1">
-                          <a:latin typeface="Cambria Math" panose="02040503050406030204" pitchFamily="18" charset="0"/>
-                        </a:rPr>
-                        <m:t>𝑎</m:t>
-                      </m:r>
-                      <m:r>
-                        <a:rPr lang="en-US" sz="2000" i="1">
-                          <a:latin typeface="Cambria Math" panose="02040503050406030204" pitchFamily="18" charset="0"/>
-                        </a:rPr>
-                        <m:t>(</m:t>
-                      </m:r>
-                      <m:r>
-                        <a:rPr lang="en-US" sz="2000" i="1">
-                          <a:latin typeface="Cambria Math" panose="02040503050406030204" pitchFamily="18" charset="0"/>
-                        </a:rPr>
-                        <m:t>𝑥</m:t>
-                      </m:r>
-                      <m:r>
-                        <a:rPr lang="en-US" sz="2000" i="1">
-                          <a:latin typeface="Cambria Math" panose="02040503050406030204" pitchFamily="18" charset="0"/>
-                        </a:rPr>
-                        <m:t>)</m:t>
-                      </m:r>
-                      <m:r>
-                        <a:rPr lang="en-US" sz="2000" i="1">
-                          <a:latin typeface="Cambria Math" panose="02040503050406030204" pitchFamily="18" charset="0"/>
-                        </a:rPr>
-                        <m:t>𝛿</m:t>
-                      </m:r>
-                      <m:r>
-                        <a:rPr lang="en-US" sz="2000" i="1">
-                          <a:latin typeface="Cambria Math" panose="02040503050406030204" pitchFamily="18" charset="0"/>
-                        </a:rPr>
-                        <m:t>)</m:t>
-                      </m:r>
-                      <m:r>
-                        <a:rPr lang="en-US" sz="2000" i="1">
-                          <a:latin typeface="Cambria Math" panose="02040503050406030204" pitchFamily="18" charset="0"/>
-                        </a:rPr>
-                        <m:t>𝑥</m:t>
-                      </m:r>
-                      <m:r>
-                        <a:rPr lang="en-US" sz="2000" i="1">
-                          <a:latin typeface="Cambria Math" panose="02040503050406030204" pitchFamily="18" charset="0"/>
-                        </a:rPr>
-                        <m:t>+(</m:t>
-                      </m:r>
-                      <m:r>
-                        <a:rPr lang="en-US" sz="2000" i="1">
-                          <a:latin typeface="Cambria Math" panose="02040503050406030204" pitchFamily="18" charset="0"/>
-                        </a:rPr>
-                        <m:t>𝑚</m:t>
-                      </m:r>
-                      <m:r>
-                        <a:rPr lang="en-US" sz="2000" i="1">
-                          <a:latin typeface="Cambria Math" panose="02040503050406030204" pitchFamily="18" charset="0"/>
-                        </a:rPr>
-                        <m:t>+</m:t>
-                      </m:r>
-                      <m:r>
-                        <a:rPr lang="en-US" sz="2000" i="1">
-                          <a:latin typeface="Cambria Math" panose="02040503050406030204" pitchFamily="18" charset="0"/>
-                        </a:rPr>
-                        <m:t>𝑎</m:t>
-                      </m:r>
-                      <m:r>
-                        <a:rPr lang="en-US" sz="2000" i="1">
-                          <a:latin typeface="Cambria Math" panose="02040503050406030204" pitchFamily="18" charset="0"/>
-                        </a:rPr>
-                        <m:t>(</m:t>
-                      </m:r>
-                      <m:r>
-                        <a:rPr lang="en-US" sz="2000" i="1">
-                          <a:latin typeface="Cambria Math" panose="02040503050406030204" pitchFamily="18" charset="0"/>
-                        </a:rPr>
-                        <m:t>𝑥</m:t>
-                      </m:r>
-                      <m:r>
-                        <a:rPr lang="en-US" sz="2000" i="1">
-                          <a:latin typeface="Cambria Math" panose="02040503050406030204" pitchFamily="18" charset="0"/>
-                        </a:rPr>
-                        <m:t>)</m:t>
-                      </m:r>
-                      <m:r>
-                        <a:rPr lang="en-US" sz="2000" i="1">
-                          <a:latin typeface="Cambria Math" panose="02040503050406030204" pitchFamily="18" charset="0"/>
-                        </a:rPr>
-                        <m:t>𝛾</m:t>
-                      </m:r>
-                      <m:r>
-                        <a:rPr lang="en-US" sz="2000" i="1">
-                          <a:latin typeface="Cambria Math" panose="02040503050406030204" pitchFamily="18" charset="0"/>
-                        </a:rPr>
-                        <m:t>),</m:t>
-                      </m:r>
-                    </m:oMath>
-                  </m:oMathPara>
-                </a14:m>
-                <a:endParaRPr lang="ru-RU" sz="2000" dirty="0"/>
-              </a:p>
-              <a:p>
-                <a:pPr lvl="1">
-                  <a:lnSpc>
-                    <a:spcPct val="100000"/>
-                  </a:lnSpc>
-                </a:pPr>
-                <a:r>
-                  <a:rPr lang="ru-RU" sz="2000" dirty="0"/>
-                  <a:t>где</a:t>
-                </a:r>
-                <a:r>
-                  <a:rPr lang="en-US" sz="2000" dirty="0"/>
-                  <a:t> </a:t>
-                </a:r>
-                <a14:m>
-                  <m:oMath xmlns:m="http://schemas.openxmlformats.org/officeDocument/2006/math">
-                    <m:r>
-                      <a:rPr lang="ru-RU" sz="2000" i="1">
-                        <a:latin typeface="Cambria Math" panose="02040503050406030204" pitchFamily="18" charset="0"/>
-                      </a:rPr>
-                      <m:t>𝑘</m:t>
-                    </m:r>
-                    <m:r>
-                      <a:rPr lang="ru-RU" sz="2000" i="1">
-                        <a:latin typeface="Cambria Math" panose="02040503050406030204" pitchFamily="18" charset="0"/>
-                      </a:rPr>
-                      <m:t> − скорость роста; </m:t>
-                    </m:r>
-                    <m:r>
-                      <a:rPr lang="ru-RU" sz="2000" i="1">
-                        <a:latin typeface="Cambria Math" panose="02040503050406030204" pitchFamily="18" charset="0"/>
-                      </a:rPr>
-                      <m:t>𝛿</m:t>
-                    </m:r>
-                    <m:r>
-                      <a:rPr lang="ru-RU" sz="2000" i="1">
-                        <a:latin typeface="Cambria Math" panose="02040503050406030204" pitchFamily="18" charset="0"/>
-                      </a:rPr>
-                      <m:t> и </m:t>
-                    </m:r>
-                    <m:r>
-                      <a:rPr lang="ru-RU" sz="2000" i="1">
-                        <a:latin typeface="Cambria Math" panose="02040503050406030204" pitchFamily="18" charset="0"/>
-                      </a:rPr>
-                      <m:t>𝛾</m:t>
-                    </m:r>
-                    <m:r>
-                      <a:rPr lang="ru-RU" sz="2000" i="1">
-                        <a:latin typeface="Cambria Math" panose="02040503050406030204" pitchFamily="18" charset="0"/>
-                      </a:rPr>
-                      <m:t> настройки скорости, а </m:t>
-                    </m:r>
-                    <m:r>
-                      <a:rPr lang="ru-RU" sz="2000" i="1">
-                        <a:latin typeface="Cambria Math" panose="02040503050406030204" pitchFamily="18" charset="0"/>
-                      </a:rPr>
-                      <m:t>𝑚</m:t>
-                    </m:r>
-                    <m:r>
-                      <a:rPr lang="ru-RU" sz="2000" i="1">
-                        <a:latin typeface="Cambria Math" panose="02040503050406030204" pitchFamily="18" charset="0"/>
-                      </a:rPr>
-                      <m:t> − параметр смещения.  </m:t>
-                    </m:r>
-                  </m:oMath>
-                </a14:m>
-                <a:endParaRPr lang="ru-RU" sz="2000" i="1" dirty="0">
-                  <a:latin typeface="Cambria Math" panose="02040503050406030204" pitchFamily="18" charset="0"/>
-                </a:endParaRPr>
-              </a:p>
-              <a:p>
-                <a:pPr lvl="1">
-                  <a:lnSpc>
-                    <a:spcPct val="100000"/>
-                  </a:lnSpc>
-                </a:pPr>
-                <a14:m>
-                  <m:oMath xmlns:m="http://schemas.openxmlformats.org/officeDocument/2006/math">
-                    <m:r>
-                      <a:rPr lang="ru-RU" sz="2000" i="1">
-                        <a:latin typeface="Cambria Math" panose="02040503050406030204" pitchFamily="18" charset="0"/>
-                      </a:rPr>
-                      <m:t>логистически</m:t>
-                    </m:r>
-                    <m:r>
-                      <a:rPr lang="ru-RU" sz="2000" b="0" i="1" smtClean="0">
-                        <a:latin typeface="Cambria Math" panose="02040503050406030204" pitchFamily="18" charset="0"/>
-                      </a:rPr>
-                      <m:t>й тренд</m:t>
-                    </m:r>
-                    <m:r>
-                      <a:rPr lang="ru-RU" sz="2000" i="1">
-                        <a:latin typeface="Cambria Math" panose="02040503050406030204" pitchFamily="18" charset="0"/>
-                      </a:rPr>
-                      <m:t> </m:t>
-                    </m:r>
-                    <m:d>
-                      <m:dPr>
-                        <m:ctrlPr>
-                          <a:rPr lang="ru-RU" sz="2000" i="1">
-                            <a:latin typeface="Cambria Math" panose="02040503050406030204" pitchFamily="18" charset="0"/>
-                          </a:rPr>
-                        </m:ctrlPr>
-                      </m:dPr>
-                      <m:e>
-                        <m:r>
-                          <a:rPr lang="ru-RU" sz="2000" i="1">
-                            <a:latin typeface="Cambria Math" panose="02040503050406030204" pitchFamily="18" charset="0"/>
-                          </a:rPr>
-                          <m:t>уменьшение и увеличение</m:t>
-                        </m:r>
-                      </m:e>
-                    </m:d>
-                    <m:r>
-                      <a:rPr lang="ru-RU" sz="2000" b="0" i="1" smtClean="0">
-                        <a:latin typeface="Cambria Math" panose="02040503050406030204" pitchFamily="18" charset="0"/>
-                      </a:rPr>
-                      <m:t> </m:t>
-                    </m:r>
-                    <m:r>
-                      <a:rPr lang="ru-RU" sz="2000" i="1">
-                        <a:latin typeface="Cambria Math" panose="02040503050406030204" pitchFamily="18" charset="0"/>
-                      </a:rPr>
-                      <m:t>с насыщением</m:t>
-                    </m:r>
-                  </m:oMath>
-                </a14:m>
-                <a:endParaRPr lang="ru-RU" sz="2000" i="1" dirty="0">
-                  <a:latin typeface="Cambria Math" panose="02040503050406030204" pitchFamily="18" charset="0"/>
-                </a:endParaRPr>
-              </a:p>
-              <a:p>
-                <a:pPr marL="457200" lvl="1" indent="0">
-                  <a:lnSpc>
-                    <a:spcPct val="100000"/>
-                  </a:lnSpc>
-                  <a:buNone/>
-                </a:pPr>
-                <a14:m>
-                  <m:oMathPara xmlns:m="http://schemas.openxmlformats.org/officeDocument/2006/math">
-                    <m:oMathParaPr>
-                      <m:jc m:val="centerGroup"/>
-                    </m:oMathParaPr>
-                    <m:oMath xmlns:m="http://schemas.openxmlformats.org/officeDocument/2006/math">
-                      <m:r>
-                        <a:rPr lang="en-US" sz="2000" i="1">
-                          <a:latin typeface="Cambria Math" panose="02040503050406030204" pitchFamily="18" charset="0"/>
-                        </a:rPr>
-                        <m:t>𝑡𝑟𝑒𝑛𝑑</m:t>
-                      </m:r>
-                      <m:r>
-                        <a:rPr lang="en-US" sz="2000" i="1">
-                          <a:latin typeface="Cambria Math" panose="02040503050406030204" pitchFamily="18" charset="0"/>
-                        </a:rPr>
-                        <m:t>(</m:t>
-                      </m:r>
-                      <m:r>
-                        <a:rPr lang="en-US" sz="2000" i="1">
-                          <a:latin typeface="Cambria Math" panose="02040503050406030204" pitchFamily="18" charset="0"/>
-                        </a:rPr>
-                        <m:t>𝑥</m:t>
-                      </m:r>
-                      <m:r>
-                        <a:rPr lang="en-US" sz="2000" i="1">
-                          <a:latin typeface="Cambria Math" panose="02040503050406030204" pitchFamily="18" charset="0"/>
-                        </a:rPr>
-                        <m:t>)=</m:t>
-                      </m:r>
-                      <m:f>
-                        <m:fPr>
-                          <m:ctrlPr>
-                            <a:rPr lang="ru-RU" sz="2000" i="1">
-                              <a:latin typeface="Cambria Math" panose="02040503050406030204" pitchFamily="18" charset="0"/>
-                            </a:rPr>
-                          </m:ctrlPr>
-                        </m:fPr>
-                        <m:num>
-                          <m:r>
-                            <a:rPr lang="en-US" sz="2000" i="1">
-                              <a:latin typeface="Cambria Math" panose="02040503050406030204" pitchFamily="18" charset="0"/>
-                            </a:rPr>
-                            <m:t>𝐶</m:t>
-                          </m:r>
-                        </m:num>
-                        <m:den>
-                          <m:r>
-                            <a:rPr lang="en-US" sz="2000" i="1">
-                              <a:latin typeface="Cambria Math" panose="02040503050406030204" pitchFamily="18" charset="0"/>
-                            </a:rPr>
-                            <m:t>1+</m:t>
-                          </m:r>
-                          <m:r>
-                            <a:rPr lang="en-US" sz="2000" i="1">
-                              <a:latin typeface="Cambria Math" panose="02040503050406030204" pitchFamily="18" charset="0"/>
-                            </a:rPr>
-                            <m:t>𝑒𝑥𝑝</m:t>
-                          </m:r>
-                          <m:r>
-                            <a:rPr lang="en-US" sz="2000" i="1">
-                              <a:latin typeface="Cambria Math" panose="02040503050406030204" pitchFamily="18" charset="0"/>
-                            </a:rPr>
-                            <m:t>(−</m:t>
-                          </m:r>
-                          <m:r>
-                            <a:rPr lang="en-US" sz="2000" i="1">
-                              <a:latin typeface="Cambria Math" panose="02040503050406030204" pitchFamily="18" charset="0"/>
-                            </a:rPr>
-                            <m:t>𝑘</m:t>
-                          </m:r>
-                          <m:r>
-                            <a:rPr lang="en-US" sz="2000" i="1">
-                              <a:latin typeface="Cambria Math" panose="02040503050406030204" pitchFamily="18" charset="0"/>
-                            </a:rPr>
-                            <m:t>(</m:t>
-                          </m:r>
-                          <m:r>
-                            <a:rPr lang="en-US" sz="2000" i="1">
-                              <a:latin typeface="Cambria Math" panose="02040503050406030204" pitchFamily="18" charset="0"/>
-                            </a:rPr>
-                            <m:t>𝑥</m:t>
-                          </m:r>
-                          <m:r>
-                            <a:rPr lang="en-US" sz="2000" i="1">
-                              <a:latin typeface="Cambria Math" panose="02040503050406030204" pitchFamily="18" charset="0"/>
-                            </a:rPr>
-                            <m:t>−</m:t>
-                          </m:r>
-                          <m:r>
-                            <a:rPr lang="en-US" sz="2000" i="1">
-                              <a:latin typeface="Cambria Math" panose="02040503050406030204" pitchFamily="18" charset="0"/>
-                            </a:rPr>
-                            <m:t>𝑏</m:t>
-                          </m:r>
-                          <m:r>
-                            <a:rPr lang="en-US" sz="2000" i="1">
-                              <a:latin typeface="Cambria Math" panose="02040503050406030204" pitchFamily="18" charset="0"/>
-                            </a:rPr>
-                            <m:t>))</m:t>
-                          </m:r>
-                        </m:den>
-                      </m:f>
-                      <m:r>
-                        <a:rPr lang="en-US" sz="2000" i="1">
-                          <a:latin typeface="Cambria Math" panose="02040503050406030204" pitchFamily="18" charset="0"/>
-                        </a:rPr>
-                        <m:t>,</m:t>
-                      </m:r>
-                    </m:oMath>
-                  </m:oMathPara>
-                </a14:m>
-                <a:endParaRPr lang="ru-RU" sz="2000" dirty="0"/>
-              </a:p>
-              <a:p>
-                <a:pPr lvl="1">
-                  <a:lnSpc>
-                    <a:spcPct val="100000"/>
-                  </a:lnSpc>
-                </a:pPr>
-                <a:r>
-                  <a:rPr lang="ru-RU" sz="2000" dirty="0"/>
-                  <a:t>где 𝐶, 𝑘, 𝑏 - обучаемые параметры: </a:t>
-                </a:r>
-                <a:br>
-                  <a:rPr lang="ru-RU" sz="2000" dirty="0"/>
-                </a:br>
-                <a:r>
-                  <a:rPr lang="ru-RU" sz="2000" dirty="0"/>
-                  <a:t>𝐶 – коэффициент подъема;</a:t>
-                </a:r>
-                <a:br>
-                  <a:rPr lang="ru-RU" sz="2000" dirty="0"/>
-                </a:br>
-                <a:r>
-                  <a:rPr lang="ru-RU" sz="2000" dirty="0"/>
-                  <a:t>𝑘 - скорость роста; </a:t>
-                </a:r>
-                <a:br>
-                  <a:rPr lang="ru-RU" sz="2000" dirty="0"/>
-                </a:br>
-                <a:r>
-                  <a:rPr lang="ru-RU" sz="2000" dirty="0"/>
-                  <a:t>𝑏 - параметр смещения. </a:t>
-                </a:r>
-                <a:r>
-                  <a:rPr lang="en-US" sz="1200" dirty="0"/>
-                  <a:t/>
-                </a:r>
-                <a:br>
-                  <a:rPr lang="en-US" sz="1200" dirty="0"/>
-                </a:br>
-                <a:r>
-                  <a:rPr lang="en-US" sz="1200" dirty="0"/>
-                  <a:t> </a:t>
-                </a:r>
-                <a:br>
-                  <a:rPr lang="en-US" sz="1200" dirty="0"/>
-                </a:br>
-                <a:endParaRPr lang="en-US" sz="1200" dirty="0"/>
-              </a:p>
-            </p:txBody>
-          </p:sp>
-        </mc:Choice>
-        <mc:Fallback xmlns="">
-          <p:sp>
-            <p:nvSpPr>
-              <p:cNvPr id="3" name="Объект 2"/>
-              <p:cNvSpPr>
-                <a:spLocks noGrp="1" noRot="1" noChangeAspect="1" noMove="1" noResize="1" noEditPoints="1" noAdjustHandles="1" noChangeArrowheads="1" noChangeShapeType="1" noTextEdit="1"/>
-              </p:cNvSpPr>
-              <p:nvPr>
-                <p:ph idx="1"/>
-              </p:nvPr>
-            </p:nvSpPr>
-            <p:spPr>
-              <a:xfrm>
-                <a:off x="256374" y="931492"/>
-                <a:ext cx="11835925" cy="5031826"/>
-              </a:xfrm>
-              <a:blipFill>
-                <a:blip r:embed="rId3"/>
-                <a:stretch>
-                  <a:fillRect l="-463" t="-727"/>
-                </a:stretch>
-              </a:blipFill>
-            </p:spPr>
-            <p:txBody>
-              <a:bodyPr/>
-              <a:lstStyle/>
-              <a:p>
-                <a:r>
-                  <a:rPr lang="ru-RU">
-                    <a:noFill/>
-                  </a:rPr>
-                  <a:t> </a:t>
-                </a:r>
-              </a:p>
-            </p:txBody>
-          </p:sp>
-        </mc:Fallback>
-      </mc:AlternateContent>
-      <p:pic>
-        <p:nvPicPr>
-          <p:cNvPr id="3074" name="Picture 2" descr="Time Series Forecasting with Prophet - David Ten"/>
-          <p:cNvPicPr>
-            <a:picLocks noChangeAspect="1" noChangeArrowheads="1"/>
-          </p:cNvPicPr>
-          <p:nvPr/>
-        </p:nvPicPr>
-        <p:blipFill>
-          <a:blip r:embed="rId4">
-            <a:extLst>
-              <a:ext uri="{28A0092B-C50C-407E-A947-70E740481C1C}">
-                <a14:useLocalDpi xmlns:a14="http://schemas.microsoft.com/office/drawing/2010/main" val="0"/>
-              </a:ext>
-            </a:extLst>
-          </a:blip>
-          <a:srcRect/>
-          <a:stretch>
-            <a:fillRect/>
-          </a:stretch>
-        </p:blipFill>
-        <p:spPr bwMode="auto">
-          <a:xfrm>
-            <a:off x="7488357" y="4140200"/>
-            <a:ext cx="4363917" cy="2598738"/>
-          </a:xfrm>
-          <a:prstGeom prst="rect">
-            <a:avLst/>
-          </a:prstGeom>
-          <a:noFill/>
-          <a:extLst>
-            <a:ext uri="{909E8E84-426E-40DD-AFC4-6F175D3DCCD1}">
-              <a14:hiddenFill xmlns:a14="http://schemas.microsoft.com/office/drawing/2010/main">
-                <a:solidFill>
-                  <a:srgbClr val="FFFFFF"/>
-                </a:solidFill>
-              </a14:hiddenFill>
-            </a:ext>
-          </a:extLst>
-        </p:spPr>
-      </p:pic>
-      <p:sp>
-        <p:nvSpPr>
-          <p:cNvPr id="4" name="Прямоугольник 3"/>
-          <p:cNvSpPr/>
-          <p:nvPr/>
-        </p:nvSpPr>
-        <p:spPr>
-          <a:xfrm>
-            <a:off x="4310976" y="6375796"/>
-            <a:ext cx="2878609" cy="307777"/>
-          </a:xfrm>
-          <a:prstGeom prst="rect">
-            <a:avLst/>
-          </a:prstGeom>
-        </p:spPr>
-        <p:txBody>
-          <a:bodyPr wrap="none">
-            <a:spAutoFit/>
-          </a:bodyPr>
-          <a:lstStyle/>
-          <a:p>
-            <a:r>
-              <a:rPr lang="ru-RU" sz="1400" dirty="0"/>
-              <a:t>https://xang1234.github.io/prophet/</a:t>
-            </a:r>
-          </a:p>
-        </p:txBody>
-      </p:sp>
-      <p:sp>
-        <p:nvSpPr>
-          <p:cNvPr id="5" name="Прямоугольник 4"/>
-          <p:cNvSpPr/>
-          <p:nvPr/>
-        </p:nvSpPr>
-        <p:spPr>
-          <a:xfrm>
-            <a:off x="120080" y="6296932"/>
-            <a:ext cx="6096000" cy="276999"/>
-          </a:xfrm>
-          <a:prstGeom prst="rect">
-            <a:avLst/>
-          </a:prstGeom>
-        </p:spPr>
-        <p:txBody>
-          <a:bodyPr>
-            <a:spAutoFit/>
-          </a:bodyPr>
-          <a:lstStyle/>
-          <a:p>
-            <a:r>
-              <a:rPr lang="ru-RU" sz="1200" dirty="0"/>
-              <a:t>https://</a:t>
-            </a:r>
-            <a:r>
-              <a:rPr lang="ru-RU" sz="1200" dirty="0" smtClean="0"/>
-              <a:t>mlcourse.ai/book/topic09/</a:t>
-            </a:r>
-            <a:endParaRPr lang="ru-RU" sz="1200" dirty="0"/>
-          </a:p>
-        </p:txBody>
-      </p:sp>
-      <p:sp>
-        <p:nvSpPr>
-          <p:cNvPr id="6" name="Прямоугольник 5"/>
-          <p:cNvSpPr/>
-          <p:nvPr/>
-        </p:nvSpPr>
-        <p:spPr>
-          <a:xfrm>
-            <a:off x="120080" y="6072141"/>
-            <a:ext cx="2631041" cy="276999"/>
-          </a:xfrm>
-          <a:prstGeom prst="rect">
-            <a:avLst/>
-          </a:prstGeom>
-        </p:spPr>
-        <p:txBody>
-          <a:bodyPr wrap="none">
-            <a:spAutoFit/>
-          </a:bodyPr>
-          <a:lstStyle/>
-          <a:p>
-            <a:r>
-              <a:rPr lang="ru-RU" sz="1200" dirty="0"/>
-              <a:t>https://github.com/Anagatam/Chronos</a:t>
-            </a:r>
-          </a:p>
-        </p:txBody>
-      </p:sp>
-      <p:sp>
-        <p:nvSpPr>
-          <p:cNvPr id="7" name="Прямоугольник 6"/>
-          <p:cNvSpPr/>
-          <p:nvPr/>
-        </p:nvSpPr>
-        <p:spPr>
-          <a:xfrm>
-            <a:off x="120080" y="5876952"/>
-            <a:ext cx="3630738" cy="276999"/>
-          </a:xfrm>
-          <a:prstGeom prst="rect">
-            <a:avLst/>
-          </a:prstGeom>
-        </p:spPr>
-        <p:txBody>
-          <a:bodyPr wrap="none">
-            <a:spAutoFit/>
-          </a:bodyPr>
-          <a:lstStyle/>
-          <a:p>
-            <a:r>
-              <a:rPr lang="ru-RU" sz="1200" dirty="0"/>
-              <a:t>https://juanitorduz.github.io/short_time_series_pymc/</a:t>
-            </a:r>
-          </a:p>
-        </p:txBody>
-      </p:sp>
-      <p:sp>
-        <p:nvSpPr>
-          <p:cNvPr id="8" name="Прямоугольник 7"/>
-          <p:cNvSpPr/>
-          <p:nvPr/>
-        </p:nvSpPr>
-        <p:spPr>
-          <a:xfrm>
-            <a:off x="120080" y="6529684"/>
-            <a:ext cx="2904000" cy="276999"/>
-          </a:xfrm>
-          <a:prstGeom prst="rect">
-            <a:avLst/>
-          </a:prstGeom>
-        </p:spPr>
-        <p:txBody>
-          <a:bodyPr wrap="none">
-            <a:spAutoFit/>
-          </a:bodyPr>
-          <a:lstStyle/>
-          <a:p>
-            <a:r>
-              <a:rPr lang="ru-RU" sz="1200" dirty="0"/>
-              <a:t>https://github.com/luke14free/pm-prophet</a:t>
-            </a:r>
-          </a:p>
-        </p:txBody>
-      </p:sp>
-      <p:sp>
-        <p:nvSpPr>
-          <p:cNvPr id="9" name="Прямоугольник 8"/>
-          <p:cNvSpPr/>
-          <p:nvPr/>
-        </p:nvSpPr>
-        <p:spPr>
-          <a:xfrm>
-            <a:off x="3049893" y="6081488"/>
-            <a:ext cx="6096000" cy="430887"/>
-          </a:xfrm>
-          <a:prstGeom prst="rect">
-            <a:avLst/>
-          </a:prstGeom>
-        </p:spPr>
-        <p:txBody>
-          <a:bodyPr>
-            <a:spAutoFit/>
-          </a:bodyPr>
-          <a:lstStyle/>
-          <a:p>
-            <a:r>
-              <a:rPr lang="ru-RU" sz="1050" dirty="0"/>
-              <a:t>https://www.pymc.io/projects/examples/en/latest/time_series/Air_passengers-Prophet_with_Bayesian_workflow.html</a:t>
-            </a:r>
-          </a:p>
-        </p:txBody>
-      </p:sp>
-      <p:sp>
-        <p:nvSpPr>
-          <p:cNvPr id="10" name="Прямоугольник 9"/>
-          <p:cNvSpPr/>
-          <p:nvPr/>
-        </p:nvSpPr>
-        <p:spPr>
-          <a:xfrm>
-            <a:off x="2969597" y="6573931"/>
-            <a:ext cx="2383986" cy="261610"/>
-          </a:xfrm>
-          <a:prstGeom prst="rect">
-            <a:avLst/>
-          </a:prstGeom>
-        </p:spPr>
-        <p:txBody>
-          <a:bodyPr wrap="none">
-            <a:spAutoFit/>
-          </a:bodyPr>
-          <a:lstStyle/>
-          <a:p>
-            <a:r>
-              <a:rPr lang="ru-RU" sz="1100" dirty="0"/>
-              <a:t>https://github.com/wwrechard/pydlm</a:t>
-            </a:r>
-          </a:p>
-        </p:txBody>
-      </p:sp>
-      <p:sp>
-        <p:nvSpPr>
-          <p:cNvPr id="11" name="Прямоугольник 10"/>
-          <p:cNvSpPr/>
-          <p:nvPr/>
-        </p:nvSpPr>
-        <p:spPr>
-          <a:xfrm>
-            <a:off x="3750818" y="5876951"/>
-            <a:ext cx="2854756" cy="276999"/>
-          </a:xfrm>
-          <a:prstGeom prst="rect">
-            <a:avLst/>
-          </a:prstGeom>
-        </p:spPr>
-        <p:txBody>
-          <a:bodyPr wrap="none">
-            <a:spAutoFit/>
-          </a:bodyPr>
-          <a:lstStyle/>
-          <a:p>
-            <a:r>
-              <a:rPr lang="ru-RU" sz="1200" dirty="0"/>
-              <a:t>https://github.com/jmschrei/pomegranate</a:t>
-            </a:r>
-          </a:p>
-        </p:txBody>
-      </p:sp>
-      <p:sp>
-        <p:nvSpPr>
-          <p:cNvPr id="12" name="Прямоугольник 11"/>
-          <p:cNvSpPr/>
-          <p:nvPr/>
-        </p:nvSpPr>
-        <p:spPr>
-          <a:xfrm>
-            <a:off x="2702280" y="5666220"/>
-            <a:ext cx="6096000" cy="261610"/>
-          </a:xfrm>
-          <a:prstGeom prst="rect">
-            <a:avLst/>
-          </a:prstGeom>
-        </p:spPr>
-        <p:txBody>
-          <a:bodyPr>
-            <a:spAutoFit/>
-          </a:bodyPr>
-          <a:lstStyle/>
-          <a:p>
-            <a:r>
-              <a:rPr lang="ru-RU" sz="1100" dirty="0"/>
-              <a:t>https://neuralprophet.com/science-behind/model-overview.html</a:t>
-            </a:r>
-          </a:p>
-        </p:txBody>
-      </p:sp>
-    </p:spTree>
-    <p:extLst>
-      <p:ext uri="{BB962C8B-B14F-4D97-AF65-F5344CB8AC3E}">
-        <p14:creationId xmlns:p14="http://schemas.microsoft.com/office/powerpoint/2010/main" val="4059546895"/>
-      </p:ext>
-    </p:extLst>
-  </p:cSld>
-  <p:clrMapOvr>
-    <a:masterClrMapping/>
-  </p:clrMapOvr>
-  <p:timing>
-    <p:tnLst>
-      <p:par>
-        <p:cTn id="1" dur="indefinite" restart="never" nodeType="tmRoot"/>
-      </p:par>
-    </p:tnLst>
-  </p:timing>
-</p:sld>
-</file>
-
-<file path=ppt/slides/slide27.xml><?xml version="1.0" encoding="utf-8"?>
-<p:sld xmlns:a="http://schemas.openxmlformats.org/drawingml/2006/main" xmlns:r="http://schemas.openxmlformats.org/officeDocument/2006/relationships" xmlns:p="http://schemas.openxmlformats.org/presentationml/2006/main">
-  <p:cSld>
-    <p:spTree>
-      <p:nvGrpSpPr>
-        <p:cNvPr id="1" name=""/>
-        <p:cNvGrpSpPr/>
-        <p:nvPr/>
-      </p:nvGrpSpPr>
-      <p:grpSpPr>
-        <a:xfrm>
-          <a:off x="0" y="0"/>
-          <a:ext cx="0" cy="0"/>
-          <a:chOff x="0" y="0"/>
-          <a:chExt cx="0" cy="0"/>
-        </a:xfrm>
-      </p:grpSpPr>
-      <p:sp>
-        <p:nvSpPr>
-          <p:cNvPr id="2" name="Заголовок 1"/>
-          <p:cNvSpPr>
-            <a:spLocks noGrp="1"/>
-          </p:cNvSpPr>
-          <p:nvPr>
-            <p:ph type="title"/>
-          </p:nvPr>
-        </p:nvSpPr>
-        <p:spPr>
-          <a:xfrm>
-            <a:off x="256374" y="365125"/>
-            <a:ext cx="11097426" cy="566367"/>
-          </a:xfrm>
-        </p:spPr>
-        <p:txBody>
-          <a:bodyPr>
-            <a:noAutofit/>
-          </a:bodyPr>
-          <a:lstStyle/>
-          <a:p>
-            <a:r>
-              <a:rPr lang="ru-RU" sz="3600" b="1" dirty="0"/>
-              <a:t>Обобщенная адаптивная модель</a:t>
-            </a:r>
-            <a:r>
-              <a:rPr lang="en-US" sz="3600" b="1" dirty="0"/>
-              <a:t> (</a:t>
-            </a:r>
-            <a:r>
-              <a:rPr lang="ru-RU" sz="3600" b="1" dirty="0"/>
-              <a:t>регрессия</a:t>
-            </a:r>
-            <a:r>
-              <a:rPr lang="en-US" sz="3600" b="1" dirty="0"/>
-              <a:t>). Prophet</a:t>
-            </a:r>
-            <a:endParaRPr lang="ru-RU" sz="3600" b="1" dirty="0"/>
-          </a:p>
-        </p:txBody>
-      </p:sp>
-      <mc:AlternateContent xmlns:mc="http://schemas.openxmlformats.org/markup-compatibility/2006" xmlns:a14="http://schemas.microsoft.com/office/drawing/2010/main">
-        <mc:Choice Requires="a14">
-          <p:sp>
-            <p:nvSpPr>
-              <p:cNvPr id="3" name="Объект 2"/>
-              <p:cNvSpPr>
-                <a:spLocks noGrp="1"/>
-              </p:cNvSpPr>
-              <p:nvPr>
-                <p:ph idx="1"/>
-              </p:nvPr>
-            </p:nvSpPr>
-            <p:spPr>
-              <a:xfrm>
-                <a:off x="256373" y="846034"/>
-                <a:ext cx="11835925" cy="5245471"/>
-              </a:xfrm>
-            </p:spPr>
-            <p:txBody>
-              <a:bodyPr>
-                <a:noAutofit/>
-              </a:bodyPr>
-              <a:lstStyle/>
-              <a:p>
-                <a:r>
-                  <a:rPr lang="en-US" sz="2000" dirty="0"/>
-                  <a:t> </a:t>
-                </a:r>
-                <a14:m>
-                  <m:oMath xmlns:m="http://schemas.openxmlformats.org/officeDocument/2006/math">
-                    <m:r>
-                      <a:rPr lang="en-US" sz="2000" i="1">
-                        <a:latin typeface="Cambria Math" panose="02040503050406030204" pitchFamily="18" charset="0"/>
-                      </a:rPr>
-                      <m:t>𝑠𝑒𝑎𝑠𝑜𝑛𝑎𝑙</m:t>
-                    </m:r>
-                    <m:r>
-                      <a:rPr lang="en-US" sz="2000" i="1">
-                        <a:latin typeface="Cambria Math" panose="02040503050406030204" pitchFamily="18" charset="0"/>
-                      </a:rPr>
-                      <m:t>(</m:t>
-                    </m:r>
-                    <m:r>
-                      <a:rPr lang="en-US" sz="2000" i="1">
-                        <a:latin typeface="Cambria Math" panose="02040503050406030204" pitchFamily="18" charset="0"/>
-                      </a:rPr>
-                      <m:t>𝑥</m:t>
-                    </m:r>
-                    <m:r>
-                      <a:rPr lang="en-US" sz="2000" i="1">
-                        <a:latin typeface="Cambria Math" panose="02040503050406030204" pitchFamily="18" charset="0"/>
-                      </a:rPr>
-                      <m:t>)</m:t>
-                    </m:r>
-                  </m:oMath>
-                </a14:m>
-                <a:r>
-                  <a:rPr lang="en-US" sz="2000" dirty="0"/>
-                  <a:t> </a:t>
-                </a:r>
-                <a:r>
-                  <a:rPr lang="ru-RU" sz="2000" dirty="0"/>
-                  <a:t>регулярное периодическое изменение. 6-х дневные сезонности (понедельник, вторник, среда, четверг, пятница, суббота) моделируются как 0 и 1, воскресенье моделируются как линейная комбинация дней предыдущих размеров. неделя, месяц и годы, несколько сезонностей, смоделированных в виде ряда Фурье</a:t>
-                </a:r>
-              </a:p>
-              <a:p>
-                <a:pPr marL="0" indent="0">
-                  <a:buNone/>
-                </a:pPr>
-                <a14:m>
-                  <m:oMathPara xmlns:m="http://schemas.openxmlformats.org/officeDocument/2006/math">
-                    <m:oMathParaPr>
-                      <m:jc m:val="centerGroup"/>
-                    </m:oMathParaPr>
-                    <m:oMath xmlns:m="http://schemas.openxmlformats.org/officeDocument/2006/math">
-                      <m:r>
-                        <a:rPr lang="en-US" sz="2000" i="1">
-                          <a:latin typeface="Cambria Math" panose="02040503050406030204" pitchFamily="18" charset="0"/>
-                        </a:rPr>
-                        <m:t>𝑠𝑒𝑎𝑠𝑜𝑛𝑎𝑙</m:t>
-                      </m:r>
-                      <m:r>
-                        <a:rPr lang="en-US" sz="2000" i="1">
-                          <a:latin typeface="Cambria Math" panose="02040503050406030204" pitchFamily="18" charset="0"/>
-                        </a:rPr>
-                        <m:t>(</m:t>
-                      </m:r>
-                      <m:r>
-                        <a:rPr lang="en-US" sz="2000" i="1">
-                          <a:latin typeface="Cambria Math" panose="02040503050406030204" pitchFamily="18" charset="0"/>
-                        </a:rPr>
-                        <m:t>𝑥</m:t>
-                      </m:r>
-                      <m:r>
-                        <a:rPr lang="en-US" sz="2000" i="1">
-                          <a:latin typeface="Cambria Math" panose="02040503050406030204" pitchFamily="18" charset="0"/>
-                        </a:rPr>
-                        <m:t>)=</m:t>
-                      </m:r>
-                      <m:nary>
-                        <m:naryPr>
-                          <m:chr m:val="∑"/>
-                          <m:limLoc m:val="undOvr"/>
-                          <m:ctrlPr>
-                            <a:rPr lang="ru-RU" sz="2000" i="1">
-                              <a:latin typeface="Cambria Math" panose="02040503050406030204" pitchFamily="18" charset="0"/>
-                            </a:rPr>
-                          </m:ctrlPr>
-                        </m:naryPr>
-                        <m:sub>
-                          <m:r>
-                            <a:rPr lang="en-US" sz="2000" i="1">
-                              <a:latin typeface="Cambria Math" panose="02040503050406030204" pitchFamily="18" charset="0"/>
-                            </a:rPr>
-                            <m:t>𝑛</m:t>
-                          </m:r>
-                          <m:r>
-                            <a:rPr lang="en-US" sz="2000" i="1">
-                              <a:latin typeface="Cambria Math" panose="02040503050406030204" pitchFamily="18" charset="0"/>
-                            </a:rPr>
-                            <m:t>=1</m:t>
-                          </m:r>
-                        </m:sub>
-                        <m:sup>
-                          <m:r>
-                            <a:rPr lang="en-US" sz="2000" i="1">
-                              <a:latin typeface="Cambria Math" panose="02040503050406030204" pitchFamily="18" charset="0"/>
-                            </a:rPr>
-                            <m:t>𝑁</m:t>
-                          </m:r>
-                        </m:sup>
-                        <m:e>
-                          <m:r>
-                            <a:rPr lang="en-US" sz="2000" i="1">
-                              <a:latin typeface="Cambria Math" panose="02040503050406030204" pitchFamily="18" charset="0"/>
-                            </a:rPr>
-                            <m:t>(</m:t>
-                          </m:r>
-                        </m:e>
-                      </m:nary>
-                      <m:sSub>
-                        <m:sSubPr>
-                          <m:ctrlPr>
-                            <a:rPr lang="ru-RU" sz="2000" i="1">
-                              <a:latin typeface="Cambria Math" panose="02040503050406030204" pitchFamily="18" charset="0"/>
-                            </a:rPr>
-                          </m:ctrlPr>
-                        </m:sSubPr>
-                        <m:e>
-                          <m:r>
-                            <a:rPr lang="en-US" sz="2000" i="1">
-                              <a:latin typeface="Cambria Math" panose="02040503050406030204" pitchFamily="18" charset="0"/>
-                            </a:rPr>
-                            <m:t>𝑎</m:t>
-                          </m:r>
-                        </m:e>
-                        <m:sub>
-                          <m:r>
-                            <a:rPr lang="en-US" sz="2000" i="1">
-                              <a:latin typeface="Cambria Math" panose="02040503050406030204" pitchFamily="18" charset="0"/>
-                            </a:rPr>
-                            <m:t>𝑛</m:t>
-                          </m:r>
-                        </m:sub>
-                      </m:sSub>
-                      <m:r>
-                        <m:rPr>
-                          <m:nor/>
-                        </m:rPr>
-                        <a:rPr lang="en-US" sz="2000"/>
-                        <m:t>cos</m:t>
-                      </m:r>
-                      <m:r>
-                        <a:rPr lang="en-US" sz="2000" i="1">
-                          <a:latin typeface="Cambria Math" panose="02040503050406030204" pitchFamily="18" charset="0"/>
-                        </a:rPr>
-                        <m:t>(2</m:t>
-                      </m:r>
-                      <m:r>
-                        <a:rPr lang="en-US" sz="2000" i="1">
-                          <a:latin typeface="Cambria Math" panose="02040503050406030204" pitchFamily="18" charset="0"/>
-                        </a:rPr>
-                        <m:t>𝜋</m:t>
-                      </m:r>
-                      <m:r>
-                        <a:rPr lang="en-US" sz="2000" i="1">
-                          <a:latin typeface="Cambria Math" panose="02040503050406030204" pitchFamily="18" charset="0"/>
-                        </a:rPr>
-                        <m:t>𝑛𝑥</m:t>
-                      </m:r>
-                      <m:r>
-                        <a:rPr lang="en-US" sz="2000" i="1">
-                          <a:latin typeface="Cambria Math" panose="02040503050406030204" pitchFamily="18" charset="0"/>
-                        </a:rPr>
-                        <m:t>/</m:t>
-                      </m:r>
-                      <m:r>
-                        <a:rPr lang="en-US" sz="2000" i="1">
-                          <a:latin typeface="Cambria Math" panose="02040503050406030204" pitchFamily="18" charset="0"/>
-                        </a:rPr>
-                        <m:t>𝑃</m:t>
-                      </m:r>
-                      <m:r>
-                        <a:rPr lang="en-US" sz="2000" i="1">
-                          <a:latin typeface="Cambria Math" panose="02040503050406030204" pitchFamily="18" charset="0"/>
-                        </a:rPr>
-                        <m:t>)+</m:t>
-                      </m:r>
-                      <m:sSub>
-                        <m:sSubPr>
-                          <m:ctrlPr>
-                            <a:rPr lang="ru-RU" sz="2000" i="1">
-                              <a:latin typeface="Cambria Math" panose="02040503050406030204" pitchFamily="18" charset="0"/>
-                            </a:rPr>
-                          </m:ctrlPr>
-                        </m:sSubPr>
-                        <m:e>
-                          <m:r>
-                            <a:rPr lang="en-US" sz="2000" i="1">
-                              <a:latin typeface="Cambria Math" panose="02040503050406030204" pitchFamily="18" charset="0"/>
-                            </a:rPr>
-                            <m:t>𝑏</m:t>
-                          </m:r>
-                        </m:e>
-                        <m:sub>
-                          <m:r>
-                            <a:rPr lang="en-US" sz="2000" i="1">
-                              <a:latin typeface="Cambria Math" panose="02040503050406030204" pitchFamily="18" charset="0"/>
-                            </a:rPr>
-                            <m:t>𝑛</m:t>
-                          </m:r>
-                        </m:sub>
-                      </m:sSub>
-                      <m:r>
-                        <m:rPr>
-                          <m:nor/>
-                        </m:rPr>
-                        <a:rPr lang="en-US" sz="2000"/>
-                        <m:t>sin</m:t>
-                      </m:r>
-                      <m:r>
-                        <a:rPr lang="en-US" sz="2000" i="1">
-                          <a:latin typeface="Cambria Math" panose="02040503050406030204" pitchFamily="18" charset="0"/>
-                        </a:rPr>
-                        <m:t>(2</m:t>
-                      </m:r>
-                      <m:r>
-                        <a:rPr lang="en-US" sz="2000" i="1">
-                          <a:latin typeface="Cambria Math" panose="02040503050406030204" pitchFamily="18" charset="0"/>
-                        </a:rPr>
-                        <m:t>𝜋</m:t>
-                      </m:r>
-                      <m:r>
-                        <a:rPr lang="en-US" sz="2000" i="1">
-                          <a:latin typeface="Cambria Math" panose="02040503050406030204" pitchFamily="18" charset="0"/>
-                        </a:rPr>
-                        <m:t>𝑛𝑥</m:t>
-                      </m:r>
-                      <m:r>
-                        <a:rPr lang="en-US" sz="2000" i="1">
-                          <a:latin typeface="Cambria Math" panose="02040503050406030204" pitchFamily="18" charset="0"/>
-                        </a:rPr>
-                        <m:t>/</m:t>
-                      </m:r>
-                      <m:r>
-                        <a:rPr lang="en-US" sz="2000" i="1">
-                          <a:latin typeface="Cambria Math" panose="02040503050406030204" pitchFamily="18" charset="0"/>
-                        </a:rPr>
-                        <m:t>𝑃</m:t>
-                      </m:r>
-                      <m:r>
-                        <a:rPr lang="en-US" sz="2000" i="1">
-                          <a:latin typeface="Cambria Math" panose="02040503050406030204" pitchFamily="18" charset="0"/>
-                        </a:rPr>
-                        <m:t>)),</m:t>
-                      </m:r>
-                    </m:oMath>
-                  </m:oMathPara>
-                </a14:m>
-                <a:endParaRPr lang="ru-RU" sz="2000" dirty="0"/>
-              </a:p>
-              <a:p>
-                <a:r>
-                  <a:rPr lang="ru-RU" sz="2000" dirty="0"/>
-                  <a:t>где</a:t>
-                </a:r>
-                <a:r>
-                  <a:rPr lang="en-US" sz="2000" dirty="0"/>
-                  <a:t> </a:t>
-                </a:r>
-                <a14:m>
-                  <m:oMath xmlns:m="http://schemas.openxmlformats.org/officeDocument/2006/math">
-                    <m:r>
-                      <a:rPr lang="en-US" sz="2000" i="1">
-                        <a:latin typeface="Cambria Math" panose="02040503050406030204" pitchFamily="18" charset="0"/>
-                      </a:rPr>
-                      <m:t>𝑃</m:t>
-                    </m:r>
-                  </m:oMath>
-                </a14:m>
-                <a:r>
-                  <a:rPr lang="en-US" sz="2000" dirty="0"/>
-                  <a:t> </a:t>
-                </a:r>
-                <a:r>
-                  <a:rPr lang="ru-RU" sz="2000" dirty="0"/>
-                  <a:t>– период в днях </a:t>
-                </a:r>
-                <a:r>
-                  <a:rPr lang="en-US" sz="2000" dirty="0"/>
-                  <a:t>(365.25 </a:t>
-                </a:r>
-                <a:r>
-                  <a:rPr lang="ru-RU" sz="2000" dirty="0"/>
-                  <a:t>для года</a:t>
-                </a:r>
-                <a:r>
-                  <a:rPr lang="en-US" sz="2000" dirty="0"/>
-                  <a:t>, 7 </a:t>
-                </a:r>
-                <a:r>
-                  <a:rPr lang="ru-RU" sz="2000" dirty="0"/>
-                  <a:t>для недели</a:t>
-                </a:r>
-                <a:r>
-                  <a:rPr lang="en-US" sz="2000" dirty="0"/>
-                  <a:t>); </a:t>
-                </a:r>
-                <a14:m>
-                  <m:oMath xmlns:m="http://schemas.openxmlformats.org/officeDocument/2006/math">
-                    <m:sSub>
-                      <m:sSubPr>
-                        <m:ctrlPr>
-                          <a:rPr lang="ru-RU" sz="2000" i="1">
-                            <a:latin typeface="Cambria Math" panose="02040503050406030204" pitchFamily="18" charset="0"/>
-                          </a:rPr>
-                        </m:ctrlPr>
-                      </m:sSubPr>
-                      <m:e>
-                        <m:r>
-                          <a:rPr lang="en-US" sz="2000" i="1">
-                            <a:latin typeface="Cambria Math" panose="02040503050406030204" pitchFamily="18" charset="0"/>
-                          </a:rPr>
-                          <m:t>𝑎</m:t>
-                        </m:r>
-                      </m:e>
-                      <m:sub>
-                        <m:r>
-                          <a:rPr lang="en-US" sz="2000" i="1">
-                            <a:latin typeface="Cambria Math" panose="02040503050406030204" pitchFamily="18" charset="0"/>
-                          </a:rPr>
-                          <m:t>𝑛</m:t>
-                        </m:r>
-                      </m:sub>
-                    </m:sSub>
-                  </m:oMath>
-                </a14:m>
-                <a:r>
-                  <a:rPr lang="en-US" sz="2000" dirty="0"/>
-                  <a:t> </a:t>
-                </a:r>
-                <a:r>
-                  <a:rPr lang="ru-RU" sz="2000" dirty="0"/>
-                  <a:t>и</a:t>
-                </a:r>
-                <a:r>
-                  <a:rPr lang="en-US" sz="2000" dirty="0"/>
-                  <a:t> </a:t>
-                </a:r>
-                <a14:m>
-                  <m:oMath xmlns:m="http://schemas.openxmlformats.org/officeDocument/2006/math">
-                    <m:sSub>
-                      <m:sSubPr>
-                        <m:ctrlPr>
-                          <a:rPr lang="ru-RU" sz="2000" i="1">
-                            <a:latin typeface="Cambria Math" panose="02040503050406030204" pitchFamily="18" charset="0"/>
-                          </a:rPr>
-                        </m:ctrlPr>
-                      </m:sSubPr>
-                      <m:e>
-                        <m:r>
-                          <a:rPr lang="en-US" sz="2000" i="1">
-                            <a:latin typeface="Cambria Math" panose="02040503050406030204" pitchFamily="18" charset="0"/>
-                          </a:rPr>
-                          <m:t>𝑏</m:t>
-                        </m:r>
-                      </m:e>
-                      <m:sub>
-                        <m:r>
-                          <a:rPr lang="en-US" sz="2000" i="1">
-                            <a:latin typeface="Cambria Math" panose="02040503050406030204" pitchFamily="18" charset="0"/>
-                          </a:rPr>
-                          <m:t>𝑛</m:t>
-                        </m:r>
-                      </m:sub>
-                    </m:sSub>
-                  </m:oMath>
-                </a14:m>
-                <a:r>
-                  <a:rPr lang="en-US" sz="2000" dirty="0"/>
-                  <a:t> </a:t>
-                </a:r>
-                <a:r>
-                  <a:rPr lang="ru-RU" sz="2000" dirty="0"/>
-                  <a:t>оцениваемые параметры</a:t>
-                </a:r>
-                <a:r>
-                  <a:rPr lang="en-US" sz="2000" dirty="0"/>
-                  <a:t>. </a:t>
-                </a:r>
-              </a:p>
-              <a:p>
-                <a:pPr lvl="1"/>
-                <a:r>
-                  <a:rPr lang="ru-RU" sz="1600" dirty="0"/>
-                  <a:t>Отметим, что важно выбрать правильно число компонент иначе можно переобучить модель.</a:t>
-                </a:r>
-              </a:p>
-              <a:p>
-                <a:r>
-                  <a:rPr lang="en-US" sz="2000" dirty="0"/>
-                  <a:t> </a:t>
-                </a:r>
-                <a14:m>
-                  <m:oMath xmlns:m="http://schemas.openxmlformats.org/officeDocument/2006/math">
-                    <m:r>
-                      <a:rPr lang="en-US" sz="2000" i="1">
-                        <a:latin typeface="Cambria Math" panose="02040503050406030204" pitchFamily="18" charset="0"/>
-                      </a:rPr>
-                      <m:t>h𝑜𝑙𝑦𝑑𝑎𝑦𝑠</m:t>
-                    </m:r>
-                    <m:r>
-                      <a:rPr lang="en-US" sz="2000" i="1">
-                        <a:latin typeface="Cambria Math" panose="02040503050406030204" pitchFamily="18" charset="0"/>
-                      </a:rPr>
-                      <m:t>(</m:t>
-                    </m:r>
-                    <m:r>
-                      <a:rPr lang="en-US" sz="2000" i="1">
-                        <a:latin typeface="Cambria Math" panose="02040503050406030204" pitchFamily="18" charset="0"/>
-                      </a:rPr>
-                      <m:t>𝑥</m:t>
-                    </m:r>
-                    <m:r>
-                      <a:rPr lang="en-US" sz="2000" i="1">
-                        <a:latin typeface="Cambria Math" panose="02040503050406030204" pitchFamily="18" charset="0"/>
-                      </a:rPr>
-                      <m:t>)</m:t>
-                    </m:r>
-                  </m:oMath>
-                </a14:m>
-                <a:r>
-                  <a:rPr lang="en-US" sz="2000" dirty="0"/>
-                  <a:t> </a:t>
-                </a:r>
-                <a:r>
-                  <a:rPr lang="ru-RU" sz="2000" dirty="0"/>
-                  <a:t>редкие, но регулярные события </a:t>
-                </a:r>
-              </a:p>
-              <a:p>
-                <a:pPr marL="0" indent="0">
-                  <a:buNone/>
-                </a:pPr>
-                <a14:m>
-                  <m:oMathPara xmlns:m="http://schemas.openxmlformats.org/officeDocument/2006/math">
-                    <m:oMathParaPr>
-                      <m:jc m:val="centerGroup"/>
-                    </m:oMathParaPr>
-                    <m:oMath xmlns:m="http://schemas.openxmlformats.org/officeDocument/2006/math">
-                      <m:r>
-                        <a:rPr lang="en-US" sz="2000" i="1" dirty="0" smtClean="0">
-                          <a:latin typeface="Cambria Math" panose="02040503050406030204" pitchFamily="18" charset="0"/>
-                        </a:rPr>
-                        <m:t>h𝑜𝑙𝑦𝑑𝑎𝑦𝑠</m:t>
-                      </m:r>
-                      <m:d>
-                        <m:dPr>
-                          <m:ctrlPr>
-                            <a:rPr lang="en-US" sz="2000" i="1" dirty="0" smtClean="0">
-                              <a:latin typeface="Cambria Math" panose="02040503050406030204" pitchFamily="18" charset="0"/>
-                            </a:rPr>
-                          </m:ctrlPr>
-                        </m:dPr>
-                        <m:e>
-                          <m:r>
-                            <a:rPr lang="en-US" sz="2000" i="1" dirty="0" smtClean="0">
-                              <a:latin typeface="Cambria Math" panose="02040503050406030204" pitchFamily="18" charset="0"/>
-                            </a:rPr>
-                            <m:t>𝑥</m:t>
-                          </m:r>
-                        </m:e>
-                      </m:d>
-                      <m:r>
-                        <a:rPr lang="en-US" sz="2000" i="1" dirty="0">
-                          <a:latin typeface="Cambria Math" panose="02040503050406030204" pitchFamily="18" charset="0"/>
-                        </a:rPr>
-                        <m:t>= </m:t>
-                      </m:r>
-                      <m:r>
-                        <a:rPr lang="en-US" sz="2000" i="1" dirty="0">
-                          <a:latin typeface="Cambria Math" panose="02040503050406030204" pitchFamily="18" charset="0"/>
-                        </a:rPr>
-                        <m:t>𝑍</m:t>
-                      </m:r>
-                      <m:d>
-                        <m:dPr>
-                          <m:ctrlPr>
-                            <a:rPr lang="en-US" sz="2000" i="1" dirty="0">
-                              <a:latin typeface="Cambria Math" panose="02040503050406030204" pitchFamily="18" charset="0"/>
-                            </a:rPr>
-                          </m:ctrlPr>
-                        </m:dPr>
-                        <m:e>
-                          <m:r>
-                            <a:rPr lang="en-US" sz="2000" i="1" dirty="0">
-                              <a:latin typeface="Cambria Math" panose="02040503050406030204" pitchFamily="18" charset="0"/>
-                            </a:rPr>
-                            <m:t>𝑥</m:t>
-                          </m:r>
-                        </m:e>
-                      </m:d>
-                      <m:r>
-                        <a:rPr lang="en-US" sz="2000" i="1" dirty="0">
-                          <a:latin typeface="Cambria Math" panose="02040503050406030204" pitchFamily="18" charset="0"/>
-                        </a:rPr>
-                        <m:t>𝑘</m:t>
-                      </m:r>
-                      <m:r>
-                        <a:rPr lang="en-US" sz="2000" i="1" dirty="0">
-                          <a:latin typeface="Cambria Math" panose="02040503050406030204" pitchFamily="18" charset="0"/>
-                        </a:rPr>
-                        <m:t>,  </m:t>
-                      </m:r>
-                      <m:r>
-                        <a:rPr lang="en-US" sz="2000" i="1" dirty="0" smtClean="0">
-                          <a:latin typeface="Cambria Math" panose="02040503050406030204" pitchFamily="18" charset="0"/>
-                        </a:rPr>
-                        <m:t>𝑍</m:t>
-                      </m:r>
-                      <m:r>
-                        <a:rPr lang="en-US" sz="2000" i="1" dirty="0" smtClean="0">
-                          <a:latin typeface="Cambria Math" panose="02040503050406030204" pitchFamily="18" charset="0"/>
-                        </a:rPr>
-                        <m:t>(</m:t>
-                      </m:r>
-                      <m:r>
-                        <a:rPr lang="en-US" sz="2000" i="1" dirty="0" smtClean="0">
-                          <a:latin typeface="Cambria Math" panose="02040503050406030204" pitchFamily="18" charset="0"/>
-                        </a:rPr>
-                        <m:t>𝑥</m:t>
-                      </m:r>
-                      <m:r>
-                        <a:rPr lang="en-US" sz="2000" i="1" dirty="0">
-                          <a:latin typeface="Cambria Math" panose="02040503050406030204" pitchFamily="18" charset="0"/>
-                        </a:rPr>
-                        <m:t>) = [1(</m:t>
-                      </m:r>
-                      <m:r>
-                        <a:rPr lang="en-US" sz="2000" i="1" dirty="0">
-                          <a:latin typeface="Cambria Math" panose="02040503050406030204" pitchFamily="18" charset="0"/>
-                        </a:rPr>
-                        <m:t>𝑡</m:t>
-                      </m:r>
-                      <m:r>
-                        <a:rPr lang="en-US" sz="2000" i="1" dirty="0" smtClean="0">
-                          <a:latin typeface="Cambria Math" panose="02040503050406030204" pitchFamily="18" charset="0"/>
-                        </a:rPr>
-                        <m:t>∈</m:t>
-                      </m:r>
-                      <m:r>
-                        <a:rPr lang="en-US" sz="2000" i="1" dirty="0">
-                          <a:latin typeface="Cambria Math" panose="02040503050406030204" pitchFamily="18" charset="0"/>
-                        </a:rPr>
-                        <m:t> </m:t>
-                      </m:r>
-                      <m:sSub>
-                        <m:sSubPr>
-                          <m:ctrlPr>
-                            <a:rPr lang="en-US" sz="2000" i="1" dirty="0">
-                              <a:latin typeface="Cambria Math" panose="02040503050406030204" pitchFamily="18" charset="0"/>
-                            </a:rPr>
-                          </m:ctrlPr>
-                        </m:sSubPr>
-                        <m:e>
-                          <m:r>
-                            <a:rPr lang="en-US" sz="2000" i="1" dirty="0">
-                              <a:latin typeface="Cambria Math" panose="02040503050406030204" pitchFamily="18" charset="0"/>
-                            </a:rPr>
-                            <m:t>𝐷</m:t>
-                          </m:r>
-                        </m:e>
-                        <m:sub>
-                          <m:r>
-                            <a:rPr lang="en-US" sz="2000" i="1" dirty="0">
-                              <a:latin typeface="Cambria Math" panose="02040503050406030204" pitchFamily="18" charset="0"/>
-                            </a:rPr>
-                            <m:t>1</m:t>
-                          </m:r>
-                        </m:sub>
-                      </m:sSub>
-                      <m:r>
-                        <a:rPr lang="en-US" sz="2000" i="1" dirty="0">
-                          <a:latin typeface="Cambria Math" panose="02040503050406030204" pitchFamily="18" charset="0"/>
-                        </a:rPr>
-                        <m:t>),1(</m:t>
-                      </m:r>
-                      <m:r>
-                        <a:rPr lang="en-US" sz="2000" i="1" dirty="0">
-                          <a:latin typeface="Cambria Math" panose="02040503050406030204" pitchFamily="18" charset="0"/>
-                        </a:rPr>
-                        <m:t>𝑡</m:t>
-                      </m:r>
-                      <m:r>
-                        <a:rPr lang="en-US" sz="2000" i="1" dirty="0" smtClean="0">
-                          <a:latin typeface="Cambria Math" panose="02040503050406030204" pitchFamily="18" charset="0"/>
-                        </a:rPr>
-                        <m:t>∈</m:t>
-                      </m:r>
-                      <m:r>
-                        <a:rPr lang="en-US" sz="2000" i="1" dirty="0">
-                          <a:latin typeface="Cambria Math" panose="02040503050406030204" pitchFamily="18" charset="0"/>
-                        </a:rPr>
-                        <m:t> </m:t>
-                      </m:r>
-                      <m:sSub>
-                        <m:sSubPr>
-                          <m:ctrlPr>
-                            <a:rPr lang="en-US" sz="2000" i="1" dirty="0">
-                              <a:latin typeface="Cambria Math" panose="02040503050406030204" pitchFamily="18" charset="0"/>
-                            </a:rPr>
-                          </m:ctrlPr>
-                        </m:sSubPr>
-                        <m:e>
-                          <m:r>
-                            <a:rPr lang="en-US" sz="2000" i="1" dirty="0">
-                              <a:latin typeface="Cambria Math" panose="02040503050406030204" pitchFamily="18" charset="0"/>
-                            </a:rPr>
-                            <m:t>𝐷</m:t>
-                          </m:r>
-                        </m:e>
-                        <m:sub>
-                          <m:r>
-                            <a:rPr lang="en-US" sz="2000" i="1" dirty="0">
-                              <a:latin typeface="Cambria Math" panose="02040503050406030204" pitchFamily="18" charset="0"/>
-                            </a:rPr>
-                            <m:t>2</m:t>
-                          </m:r>
-                        </m:sub>
-                      </m:sSub>
-                      <m:r>
-                        <a:rPr lang="en-US" sz="2000" i="1" dirty="0">
-                          <a:latin typeface="Cambria Math" panose="02040503050406030204" pitchFamily="18" charset="0"/>
-                        </a:rPr>
-                        <m:t>),…) </m:t>
-                      </m:r>
-                      <m:r>
-                        <a:rPr lang="en-US" sz="2000" i="1" dirty="0" smtClean="0">
-                          <a:latin typeface="Cambria Math" panose="02040503050406030204" pitchFamily="18" charset="0"/>
-                        </a:rPr>
-                        <m:t>]</m:t>
-                      </m:r>
-                      <m:r>
-                        <a:rPr lang="en-US" sz="2000" b="0" i="1" dirty="0" smtClean="0">
-                          <a:latin typeface="Cambria Math" panose="02040503050406030204" pitchFamily="18" charset="0"/>
-                        </a:rPr>
-                        <m:t> </m:t>
-                      </m:r>
-                      <m:r>
-                        <a:rPr lang="en-US" sz="2000" i="1" dirty="0" smtClean="0">
-                          <a:latin typeface="Cambria Math" panose="02040503050406030204" pitchFamily="18" charset="0"/>
-                        </a:rPr>
-                        <m:t>,</m:t>
-                      </m:r>
-                    </m:oMath>
-                  </m:oMathPara>
-                </a14:m>
-                <a:endParaRPr lang="ru-RU" sz="2000" dirty="0"/>
-              </a:p>
-              <a:p>
-                <a:r>
-                  <a:rPr lang="ru-RU" sz="2000" dirty="0"/>
-                  <a:t>где </a:t>
-                </a:r>
-                <a14:m>
-                  <m:oMath xmlns:m="http://schemas.openxmlformats.org/officeDocument/2006/math">
-                    <m:sSub>
-                      <m:sSubPr>
-                        <m:ctrlPr>
-                          <a:rPr lang="ru-RU" sz="2000" i="1" dirty="0" smtClean="0">
-                            <a:latin typeface="Cambria Math" panose="02040503050406030204" pitchFamily="18" charset="0"/>
-                          </a:rPr>
-                        </m:ctrlPr>
-                      </m:sSubPr>
-                      <m:e>
-                        <m:r>
-                          <a:rPr lang="ru-RU" sz="2000" i="1" dirty="0" smtClean="0">
-                            <a:latin typeface="Cambria Math" panose="02040503050406030204" pitchFamily="18" charset="0"/>
-                          </a:rPr>
-                          <m:t>𝐷</m:t>
-                        </m:r>
-                      </m:e>
-                      <m:sub>
-                        <m:r>
-                          <a:rPr lang="ru-RU" sz="2000" i="1" dirty="0" smtClean="0">
-                            <a:latin typeface="Cambria Math" panose="02040503050406030204" pitchFamily="18" charset="0"/>
-                          </a:rPr>
-                          <m:t>𝑖</m:t>
-                        </m:r>
-                      </m:sub>
-                    </m:sSub>
-                    <m:r>
-                      <a:rPr lang="ru-RU" sz="2000" i="1" dirty="0" smtClean="0">
-                        <a:latin typeface="Cambria Math" panose="02040503050406030204" pitchFamily="18" charset="0"/>
-                      </a:rPr>
-                      <m:t> </m:t>
-                    </m:r>
-                  </m:oMath>
-                </a14:m>
-                <a:r>
-                  <a:rPr lang="ru-RU" sz="2000" dirty="0"/>
-                  <a:t>- продолжительность выходных; k - нормальное распределение с СКО как параметр и нулевым сдернем значением; 𝑛𝑜𝑖𝑠𝑒 (𝑥) - </a:t>
-                </a:r>
-                <a:r>
-                  <a:rPr lang="ru-RU" sz="2000" dirty="0" err="1"/>
-                  <a:t>i.i.d</a:t>
-                </a:r>
-                <a:r>
-                  <a:rPr lang="ru-RU" sz="2000" dirty="0"/>
-                  <a:t>. - </a:t>
-                </a:r>
-                <a:r>
-                  <a:rPr lang="ru-RU" sz="2000" dirty="0" err="1"/>
-                  <a:t>Гауссовсы</a:t>
-                </a:r>
-                <a:r>
-                  <a:rPr lang="ru-RU" sz="2000" dirty="0"/>
-                  <a:t> шумы.</a:t>
-                </a:r>
-              </a:p>
-              <a:p>
-                <a:r>
-                  <a:rPr lang="ru-RU" sz="2000" dirty="0"/>
-                  <a:t>Примечание. В некоторых источниках вы можете увидеть следующее обозначение</a:t>
-                </a:r>
-                <a:endParaRPr lang="ru-RU" sz="2000" i="1" dirty="0">
-                  <a:latin typeface="Cambria Math" panose="02040503050406030204" pitchFamily="18" charset="0"/>
-                </a:endParaRPr>
-              </a:p>
-              <a:p>
-                <a14:m>
-                  <m:oMath xmlns:m="http://schemas.openxmlformats.org/officeDocument/2006/math">
-                    <m:r>
-                      <a:rPr lang="en-US" sz="2000" i="1">
-                        <a:latin typeface="Cambria Math" panose="02040503050406030204" pitchFamily="18" charset="0"/>
-                      </a:rPr>
-                      <m:t>𝑦</m:t>
-                    </m:r>
-                    <m:r>
-                      <a:rPr lang="en-US" sz="2000" i="1">
-                        <a:latin typeface="Cambria Math" panose="02040503050406030204" pitchFamily="18" charset="0"/>
-                      </a:rPr>
-                      <m:t>(</m:t>
-                    </m:r>
-                    <m:r>
-                      <a:rPr lang="en-US" sz="2000" i="1">
-                        <a:latin typeface="Cambria Math" panose="02040503050406030204" pitchFamily="18" charset="0"/>
-                      </a:rPr>
-                      <m:t>𝑥</m:t>
-                    </m:r>
-                    <m:r>
-                      <a:rPr lang="en-US" sz="2000" i="1">
-                        <a:latin typeface="Cambria Math" panose="02040503050406030204" pitchFamily="18" charset="0"/>
-                      </a:rPr>
-                      <m:t>)=</m:t>
-                    </m:r>
-                    <m:r>
-                      <a:rPr lang="en-US" sz="2000" i="1">
-                        <a:latin typeface="Cambria Math" panose="02040503050406030204" pitchFamily="18" charset="0"/>
-                      </a:rPr>
-                      <m:t>𝑡𝑟𝑒𝑛𝑑</m:t>
-                    </m:r>
-                    <m:r>
-                      <a:rPr lang="en-US" sz="2000" i="1">
-                        <a:latin typeface="Cambria Math" panose="02040503050406030204" pitchFamily="18" charset="0"/>
-                      </a:rPr>
-                      <m:t>(</m:t>
-                    </m:r>
-                    <m:r>
-                      <a:rPr lang="en-US" sz="2000" i="1">
-                        <a:latin typeface="Cambria Math" panose="02040503050406030204" pitchFamily="18" charset="0"/>
-                      </a:rPr>
-                      <m:t>𝑥</m:t>
-                    </m:r>
-                    <m:r>
-                      <a:rPr lang="en-US" sz="2000" i="1">
-                        <a:latin typeface="Cambria Math" panose="02040503050406030204" pitchFamily="18" charset="0"/>
-                      </a:rPr>
-                      <m:t>)+</m:t>
-                    </m:r>
-                    <m:r>
-                      <a:rPr lang="en-US" sz="2000" i="1">
-                        <a:latin typeface="Cambria Math" panose="02040503050406030204" pitchFamily="18" charset="0"/>
-                      </a:rPr>
-                      <m:t>𝑠𝑒𝑎𝑠𝑜𝑛𝑎𝑙</m:t>
-                    </m:r>
-                    <m:r>
-                      <a:rPr lang="en-US" sz="2000" i="1">
-                        <a:latin typeface="Cambria Math" panose="02040503050406030204" pitchFamily="18" charset="0"/>
-                      </a:rPr>
-                      <m:t>(</m:t>
-                    </m:r>
-                    <m:r>
-                      <a:rPr lang="en-US" sz="2000" i="1">
-                        <a:latin typeface="Cambria Math" panose="02040503050406030204" pitchFamily="18" charset="0"/>
-                      </a:rPr>
-                      <m:t>𝑥</m:t>
-                    </m:r>
-                    <m:r>
-                      <a:rPr lang="en-US" sz="2000" i="1">
-                        <a:latin typeface="Cambria Math" panose="02040503050406030204" pitchFamily="18" charset="0"/>
-                      </a:rPr>
-                      <m:t>)+</m:t>
-                    </m:r>
-                    <m:r>
-                      <a:rPr lang="en-US" sz="2000" i="1">
-                        <a:latin typeface="Cambria Math" panose="02040503050406030204" pitchFamily="18" charset="0"/>
-                      </a:rPr>
-                      <m:t>h𝑜𝑙𝑦𝑑𝑎𝑦𝑠</m:t>
-                    </m:r>
-                    <m:r>
-                      <a:rPr lang="en-US" sz="2000" i="1">
-                        <a:latin typeface="Cambria Math" panose="02040503050406030204" pitchFamily="18" charset="0"/>
-                      </a:rPr>
-                      <m:t>(</m:t>
-                    </m:r>
-                    <m:r>
-                      <a:rPr lang="en-US" sz="2000" i="1">
-                        <a:latin typeface="Cambria Math" panose="02040503050406030204" pitchFamily="18" charset="0"/>
-                      </a:rPr>
-                      <m:t>𝑥</m:t>
-                    </m:r>
-                    <m:r>
-                      <a:rPr lang="en-US" sz="2000" i="1">
-                        <a:latin typeface="Cambria Math" panose="02040503050406030204" pitchFamily="18" charset="0"/>
-                      </a:rPr>
-                      <m:t>)+</m:t>
-                    </m:r>
-                    <m:r>
-                      <a:rPr lang="en-US" sz="2000" i="1">
-                        <a:latin typeface="Cambria Math" panose="02040503050406030204" pitchFamily="18" charset="0"/>
-                      </a:rPr>
-                      <m:t>𝑢𝑠𝑒𝑟</m:t>
-                    </m:r>
-                    <m:r>
-                      <a:rPr lang="en-US" sz="2000" i="1">
-                        <a:latin typeface="Cambria Math" panose="02040503050406030204" pitchFamily="18" charset="0"/>
-                      </a:rPr>
-                      <m:t>_</m:t>
-                    </m:r>
-                    <m:r>
-                      <a:rPr lang="en-US" sz="2000" i="1">
-                        <a:latin typeface="Cambria Math" panose="02040503050406030204" pitchFamily="18" charset="0"/>
-                      </a:rPr>
-                      <m:t>𝑟𝑒𝑔𝑟𝑒𝑠𝑠𝑜𝑟</m:t>
-                    </m:r>
-                    <m:r>
-                      <a:rPr lang="en-US" sz="2000" i="1">
-                        <a:latin typeface="Cambria Math" panose="02040503050406030204" pitchFamily="18" charset="0"/>
-                      </a:rPr>
-                      <m:t>(</m:t>
-                    </m:r>
-                    <m:r>
-                      <a:rPr lang="en-US" sz="2000" i="1">
-                        <a:latin typeface="Cambria Math" panose="02040503050406030204" pitchFamily="18" charset="0"/>
-                      </a:rPr>
-                      <m:t>𝑥</m:t>
-                    </m:r>
-                    <m:r>
-                      <a:rPr lang="en-US" sz="2000" i="1">
-                        <a:latin typeface="Cambria Math" panose="02040503050406030204" pitchFamily="18" charset="0"/>
-                      </a:rPr>
-                      <m:t>)+</m:t>
-                    </m:r>
-                    <m:r>
-                      <a:rPr lang="en-US" sz="2000" i="1">
-                        <a:latin typeface="Cambria Math" panose="02040503050406030204" pitchFamily="18" charset="0"/>
-                      </a:rPr>
-                      <m:t>𝑛𝑜𝑖𝑠𝑒</m:t>
-                    </m:r>
-                    <m:r>
-                      <a:rPr lang="en-US" sz="2000" i="1">
-                        <a:latin typeface="Cambria Math" panose="02040503050406030204" pitchFamily="18" charset="0"/>
-                      </a:rPr>
-                      <m:t>(</m:t>
-                    </m:r>
-                    <m:r>
-                      <a:rPr lang="en-US" sz="2000" i="1">
-                        <a:latin typeface="Cambria Math" panose="02040503050406030204" pitchFamily="18" charset="0"/>
-                      </a:rPr>
-                      <m:t>𝑥</m:t>
-                    </m:r>
-                    <m:r>
-                      <a:rPr lang="en-US" sz="2000" i="1">
-                        <a:latin typeface="Cambria Math" panose="02040503050406030204" pitchFamily="18" charset="0"/>
-                      </a:rPr>
-                      <m:t>),</m:t>
-                    </m:r>
-                  </m:oMath>
-                </a14:m>
-                <a:endParaRPr lang="ru-RU" sz="2000" dirty="0"/>
-              </a:p>
-              <a:p>
-                <a:r>
-                  <a:rPr lang="ru-RU" sz="2000" dirty="0"/>
-                  <a:t>где</a:t>
-                </a:r>
-                <a:r>
-                  <a:rPr lang="en-US" sz="2000" dirty="0"/>
-                  <a:t> </a:t>
-                </a:r>
-                <a14:m>
-                  <m:oMath xmlns:m="http://schemas.openxmlformats.org/officeDocument/2006/math">
-                    <m:r>
-                      <a:rPr lang="en-US" sz="2000" i="1">
-                        <a:latin typeface="Cambria Math" panose="02040503050406030204" pitchFamily="18" charset="0"/>
-                      </a:rPr>
-                      <m:t>𝑢𝑠𝑒𝑟</m:t>
-                    </m:r>
-                    <m:r>
-                      <a:rPr lang="en-US" sz="2000" i="1">
-                        <a:latin typeface="Cambria Math" panose="02040503050406030204" pitchFamily="18" charset="0"/>
-                      </a:rPr>
-                      <m:t>_</m:t>
-                    </m:r>
-                    <m:r>
-                      <a:rPr lang="en-US" sz="2000" i="1">
-                        <a:latin typeface="Cambria Math" panose="02040503050406030204" pitchFamily="18" charset="0"/>
-                      </a:rPr>
-                      <m:t>𝑟𝑒𝑔𝑟𝑒𝑠𝑠𝑜𝑟</m:t>
-                    </m:r>
-                    <m:r>
-                      <a:rPr lang="en-US" sz="2000" i="1">
-                        <a:latin typeface="Cambria Math" panose="02040503050406030204" pitchFamily="18" charset="0"/>
-                      </a:rPr>
-                      <m:t>(</m:t>
-                    </m:r>
-                    <m:r>
-                      <a:rPr lang="en-US" sz="2000" i="1">
-                        <a:latin typeface="Cambria Math" panose="02040503050406030204" pitchFamily="18" charset="0"/>
-                      </a:rPr>
-                      <m:t>𝑥</m:t>
-                    </m:r>
-                    <m:r>
-                      <a:rPr lang="en-US" sz="2000" i="1">
-                        <a:latin typeface="Cambria Math" panose="02040503050406030204" pitchFamily="18" charset="0"/>
-                      </a:rPr>
-                      <m:t>)</m:t>
-                    </m:r>
-                  </m:oMath>
-                </a14:m>
-                <a:r>
-                  <a:rPr lang="en-US" sz="2000" dirty="0"/>
-                  <a:t> </a:t>
-                </a:r>
-                <a:r>
-                  <a:rPr lang="ru-RU" sz="2000" dirty="0"/>
-                  <a:t>являются регрессорами, которые не описываются другими моделями (в уравнении в большинстве источников компонент включает неявно).</a:t>
-                </a:r>
-                <a:r>
-                  <a:rPr lang="en-US" sz="2000" dirty="0"/>
-                  <a:t> </a:t>
-                </a:r>
-              </a:p>
-              <a:p>
-                <a:pPr lvl="1"/>
-                <a:r>
-                  <a:rPr lang="ru-RU" sz="1600" dirty="0"/>
-                  <a:t>В</a:t>
-                </a:r>
-                <a14:m>
-                  <m:oMath xmlns:m="http://schemas.openxmlformats.org/officeDocument/2006/math">
-                    <m:r>
-                      <a:rPr lang="ru-RU" sz="1600" b="0" i="0" smtClean="0">
-                        <a:latin typeface="Cambria Math" panose="02040503050406030204" pitchFamily="18" charset="0"/>
-                      </a:rPr>
-                      <m:t> предыд</m:t>
-                    </m:r>
-                    <m:r>
-                      <a:rPr lang="ru-RU" sz="1600" b="0" i="1" smtClean="0">
-                        <a:latin typeface="Cambria Math" panose="02040503050406030204" pitchFamily="18" charset="0"/>
-                      </a:rPr>
-                      <m:t>ущей нотации </m:t>
-                    </m:r>
-                    <m:r>
-                      <a:rPr lang="en-US" sz="1600" i="1">
-                        <a:latin typeface="Cambria Math" panose="02040503050406030204" pitchFamily="18" charset="0"/>
-                      </a:rPr>
-                      <m:t>𝑢𝑠𝑒𝑟</m:t>
-                    </m:r>
-                    <m:r>
-                      <a:rPr lang="en-US" sz="1600" i="1">
-                        <a:latin typeface="Cambria Math" panose="02040503050406030204" pitchFamily="18" charset="0"/>
-                      </a:rPr>
-                      <m:t>_</m:t>
-                    </m:r>
-                    <m:r>
-                      <a:rPr lang="en-US" sz="1600" i="1">
-                        <a:latin typeface="Cambria Math" panose="02040503050406030204" pitchFamily="18" charset="0"/>
-                      </a:rPr>
-                      <m:t>𝑟𝑒𝑔𝑟𝑒𝑠𝑠𝑜𝑟</m:t>
-                    </m:r>
-                    <m:r>
-                      <a:rPr lang="en-US" sz="1600" i="1">
-                        <a:latin typeface="Cambria Math" panose="02040503050406030204" pitchFamily="18" charset="0"/>
-                      </a:rPr>
-                      <m:t>(</m:t>
-                    </m:r>
-                    <m:r>
-                      <a:rPr lang="en-US" sz="1600" i="1">
-                        <a:latin typeface="Cambria Math" panose="02040503050406030204" pitchFamily="18" charset="0"/>
-                      </a:rPr>
-                      <m:t>𝑥</m:t>
-                    </m:r>
-                    <m:r>
-                      <a:rPr lang="en-US" sz="1600" i="1">
-                        <a:latin typeface="Cambria Math" panose="02040503050406030204" pitchFamily="18" charset="0"/>
-                      </a:rPr>
-                      <m:t>)</m:t>
-                    </m:r>
-                  </m:oMath>
-                </a14:m>
-                <a:r>
-                  <a:rPr lang="en-US" sz="1600" dirty="0"/>
-                  <a:t> </a:t>
-                </a:r>
-                <a:r>
-                  <a:rPr lang="ru-RU" sz="1600" dirty="0"/>
-                  <a:t>часть </a:t>
-                </a:r>
-                <a:r>
-                  <a:rPr lang="en-US" sz="1600" dirty="0"/>
-                  <a:t> </a:t>
-                </a:r>
-                <a14:m>
-                  <m:oMath xmlns:m="http://schemas.openxmlformats.org/officeDocument/2006/math">
-                    <m:r>
-                      <a:rPr lang="en-US" sz="1600" i="1">
-                        <a:latin typeface="Cambria Math" panose="02040503050406030204" pitchFamily="18" charset="0"/>
-                      </a:rPr>
-                      <m:t>𝑠𝑒𝑎𝑠𝑜𝑛𝑎𝑙</m:t>
-                    </m:r>
-                    <m:r>
-                      <a:rPr lang="en-US" sz="1600" i="1">
-                        <a:latin typeface="Cambria Math" panose="02040503050406030204" pitchFamily="18" charset="0"/>
-                      </a:rPr>
-                      <m:t>(</m:t>
-                    </m:r>
-                    <m:r>
-                      <a:rPr lang="en-US" sz="1600" i="1">
-                        <a:latin typeface="Cambria Math" panose="02040503050406030204" pitchFamily="18" charset="0"/>
-                      </a:rPr>
-                      <m:t>𝑥</m:t>
-                    </m:r>
-                    <m:r>
-                      <a:rPr lang="en-US" sz="1600" i="1">
-                        <a:latin typeface="Cambria Math" panose="02040503050406030204" pitchFamily="18" charset="0"/>
-                      </a:rPr>
-                      <m:t>)</m:t>
-                    </m:r>
-                  </m:oMath>
-                </a14:m>
-                <a:r>
-                  <a:rPr lang="en-US" sz="1600" dirty="0"/>
-                  <a:t>.  </a:t>
-                </a:r>
-                <a:br>
-                  <a:rPr lang="en-US" sz="1600" dirty="0"/>
-                </a:br>
-                <a:endParaRPr lang="en-US" sz="1600" dirty="0"/>
-              </a:p>
-            </p:txBody>
-          </p:sp>
-        </mc:Choice>
-        <mc:Fallback xmlns="">
-          <p:sp>
-            <p:nvSpPr>
-              <p:cNvPr id="3" name="Объект 2"/>
-              <p:cNvSpPr>
-                <a:spLocks noGrp="1" noRot="1" noChangeAspect="1" noMove="1" noResize="1" noEditPoints="1" noAdjustHandles="1" noChangeArrowheads="1" noChangeShapeType="1" noTextEdit="1"/>
-              </p:cNvSpPr>
-              <p:nvPr>
-                <p:ph idx="1"/>
-              </p:nvPr>
-            </p:nvSpPr>
-            <p:spPr>
-              <a:xfrm>
-                <a:off x="256373" y="846034"/>
-                <a:ext cx="11835925" cy="5245471"/>
-              </a:xfrm>
-              <a:blipFill>
-                <a:blip r:embed="rId2"/>
-                <a:stretch>
-                  <a:fillRect l="-463" t="-1279" b="-11395"/>
-                </a:stretch>
-              </a:blipFill>
-            </p:spPr>
-            <p:txBody>
-              <a:bodyPr/>
-              <a:lstStyle/>
-              <a:p>
-                <a:r>
-                  <a:rPr lang="ru-RU">
-                    <a:noFill/>
-                  </a:rPr>
-                  <a:t> </a:t>
-                </a:r>
-              </a:p>
-            </p:txBody>
-          </p:sp>
-        </mc:Fallback>
-      </mc:AlternateContent>
-    </p:spTree>
-    <p:extLst>
-      <p:ext uri="{BB962C8B-B14F-4D97-AF65-F5344CB8AC3E}">
-        <p14:creationId xmlns:p14="http://schemas.microsoft.com/office/powerpoint/2010/main" val="1377079327"/>
-      </p:ext>
-    </p:extLst>
-  </p:cSld>
-  <p:clrMapOvr>
-    <a:masterClrMapping/>
-  </p:clrMapOvr>
-  <p:timing>
-    <p:tnLst>
-      <p:par>
-        <p:cTn id="1" dur="indefinite" restart="never" nodeType="tmRoot"/>
-      </p:par>
-    </p:tnLst>
-  </p:timing>
-</p:sld>
-</file>
-
-<file path=ppt/slides/slide28.xml><?xml version="1.0" encoding="utf-8"?>
-<p:sld xmlns:a="http://schemas.openxmlformats.org/drawingml/2006/main" xmlns:r="http://schemas.openxmlformats.org/officeDocument/2006/relationships" xmlns:p="http://schemas.openxmlformats.org/presentationml/2006/main">
-  <p:cSld>
-    <p:spTree>
-      <p:nvGrpSpPr>
-        <p:cNvPr id="1" name=""/>
-        <p:cNvGrpSpPr/>
-        <p:nvPr/>
-      </p:nvGrpSpPr>
-      <p:grpSpPr>
-        <a:xfrm>
-          <a:off x="0" y="0"/>
-          <a:ext cx="0" cy="0"/>
-          <a:chOff x="0" y="0"/>
-          <a:chExt cx="0" cy="0"/>
-        </a:xfrm>
-      </p:grpSpPr>
-      <p:sp>
-        <p:nvSpPr>
-          <p:cNvPr id="2" name="Заголовок 1"/>
-          <p:cNvSpPr>
-            <a:spLocks noGrp="1"/>
-          </p:cNvSpPr>
-          <p:nvPr>
-            <p:ph type="title"/>
-          </p:nvPr>
-        </p:nvSpPr>
-        <p:spPr>
-          <a:xfrm>
-            <a:off x="256374" y="365125"/>
-            <a:ext cx="11097426" cy="566367"/>
-          </a:xfrm>
-        </p:spPr>
-        <p:txBody>
-          <a:bodyPr>
-            <a:noAutofit/>
-          </a:bodyPr>
-          <a:lstStyle/>
-          <a:p>
-            <a:r>
-              <a:rPr lang="ru-RU" sz="3600" b="1" dirty="0"/>
-              <a:t>Обобщенная адаптивная модель</a:t>
-            </a:r>
-            <a:r>
-              <a:rPr lang="en-US" sz="3600" b="1" dirty="0"/>
-              <a:t> (</a:t>
-            </a:r>
-            <a:r>
-              <a:rPr lang="ru-RU" sz="3600" b="1" dirty="0"/>
-              <a:t>регрессия</a:t>
-            </a:r>
-            <a:r>
-              <a:rPr lang="en-US" sz="3600" b="1" dirty="0"/>
-              <a:t>). Prophet</a:t>
-            </a:r>
-            <a:endParaRPr lang="ru-RU" sz="3600" dirty="0"/>
+              <a:rPr lang="ru-RU" dirty="0" smtClean="0"/>
+              <a:t>Вопросы для самоконтроля</a:t>
+            </a:r>
+            <a:endParaRPr lang="ru-RU" dirty="0"/>
           </a:p>
         </p:txBody>
       </p:sp>
@@ -18953,643 +16025,132 @@
         </p:nvSpPr>
         <p:spPr>
           <a:xfrm>
-            <a:off x="256373" y="931492"/>
-            <a:ext cx="11835925" cy="5512037"/>
+            <a:off x="299103" y="1042586"/>
+            <a:ext cx="11690647" cy="5614587"/>
           </a:xfrm>
         </p:spPr>
         <p:txBody>
-          <a:bodyPr>
-            <a:noAutofit/>
-          </a:bodyPr>
+          <a:bodyPr/>
           <a:lstStyle/>
           <a:p>
-            <a:r>
-              <a:rPr lang="ru-RU" sz="2000" b="1" dirty="0"/>
-              <a:t>Преимущества пророка</a:t>
-            </a:r>
-            <a:endParaRPr lang="ru-RU" sz="2000" dirty="0"/>
-          </a:p>
-          <a:p>
-            <a:pPr lvl="1"/>
-            <a:r>
-              <a:rPr lang="en-US" sz="2000" b="1" dirty="0"/>
-              <a:t>Prophet</a:t>
-            </a:r>
-            <a:r>
-              <a:rPr lang="ru-RU" sz="2000" dirty="0"/>
-              <a:t> может учесть несколько линейных и нелинейных признаков ряда в качестве компонент.</a:t>
-            </a:r>
-          </a:p>
-          <a:p>
-            <a:pPr lvl="1"/>
-            <a:r>
-              <a:rPr lang="ru-RU" sz="2000" dirty="0"/>
-              <a:t>Возможность легко моделировать любое количество сезонностей.</a:t>
-            </a:r>
-          </a:p>
-          <a:p>
-            <a:pPr lvl="1"/>
-            <a:r>
-              <a:rPr lang="ru-RU" sz="2000" dirty="0"/>
-              <a:t>Возможность работы с пропущенными датами во временных рядах.</a:t>
-            </a:r>
-          </a:p>
-          <a:p>
-            <a:pPr lvl="1"/>
-            <a:r>
-              <a:rPr lang="ru-RU" sz="2000" dirty="0"/>
-              <a:t>Легко интегрирует праздники в модель.</a:t>
-            </a:r>
-          </a:p>
-          <a:p>
-            <a:pPr lvl="1"/>
-            <a:r>
-              <a:rPr lang="ru-RU" sz="2000" dirty="0"/>
-              <a:t>Прозрачность модели.</a:t>
-            </a:r>
-          </a:p>
-          <a:p>
-            <a:pPr lvl="1"/>
-            <a:r>
-              <a:rPr lang="ru-RU" sz="2000" dirty="0"/>
-              <a:t>Гибкость моделирования тренда.</a:t>
-            </a:r>
-          </a:p>
-          <a:p>
-            <a:r>
-              <a:rPr lang="ru-RU" sz="2000" b="1" dirty="0"/>
-              <a:t>Недостатки пророка</a:t>
-            </a:r>
-            <a:endParaRPr lang="ru-RU" sz="2000" dirty="0"/>
-          </a:p>
-          <a:p>
-            <a:pPr lvl="1"/>
-            <a:r>
-              <a:rPr lang="ru-RU" sz="2000" dirty="0" err="1"/>
-              <a:t>Prophet</a:t>
-            </a:r>
-            <a:r>
-              <a:rPr lang="ru-RU" sz="2000" dirty="0"/>
-              <a:t> не допускает </a:t>
-            </a:r>
-            <a:r>
-              <a:rPr lang="ru-RU" sz="2000" dirty="0" err="1"/>
-              <a:t>негауссовского</a:t>
-            </a:r>
-            <a:r>
-              <a:rPr lang="ru-RU" sz="2000" dirty="0"/>
-              <a:t> распределения шума</a:t>
-            </a:r>
-          </a:p>
-          <a:p>
-            <a:pPr lvl="1"/>
-            <a:r>
-              <a:rPr lang="ru-RU" sz="2000" dirty="0" err="1"/>
-              <a:t>Prophet</a:t>
-            </a:r>
-            <a:r>
-              <a:rPr lang="ru-RU" sz="2000" dirty="0"/>
-              <a:t> не принимает во внимание автокорреляцию по невязке (поэтому требуется только распределение гауссова шума).</a:t>
-            </a:r>
-          </a:p>
-          <a:p>
-            <a:pPr lvl="1"/>
-            <a:r>
-              <a:rPr lang="ru-RU" sz="2000" dirty="0" err="1"/>
-              <a:t>Prophet</a:t>
-            </a:r>
-            <a:r>
-              <a:rPr lang="ru-RU" sz="2000" dirty="0"/>
-              <a:t> не предполагает поведения стохастического тренда (случайного блуждания).</a:t>
-            </a:r>
-          </a:p>
-          <a:p>
-            <a:pPr lvl="1"/>
-            <a:r>
-              <a:rPr lang="ru-RU" sz="2000" dirty="0"/>
-              <a:t>Долгосрочное прогнозирование может быть нестабильным с автоматическим выбором точки изменения тренда.</a:t>
-            </a:r>
+            <a:pPr lvl="0"/>
+            <a:r>
+              <a:rPr lang="ru-RU" dirty="0"/>
+              <a:t>Объясните </a:t>
+            </a:r>
+            <a:r>
+              <a:rPr lang="ru-RU" b="1" dirty="0"/>
+              <a:t>основные подходы к экспоненциальному сглаживанию</a:t>
+            </a:r>
+            <a:r>
+              <a:rPr lang="ru-RU" dirty="0"/>
+              <a:t>. Какая интуиция сопутствует таким подходам. Где подходы применимы. В каких задачах подходов будет недостаточно и как решить эту проблему?  </a:t>
+            </a:r>
+          </a:p>
+          <a:p>
+            <a:r>
+              <a:rPr lang="ru-RU" dirty="0" smtClean="0"/>
+              <a:t>Объясните </a:t>
+            </a:r>
+            <a:r>
+              <a:rPr lang="ru-RU" b="1" dirty="0" smtClean="0"/>
+              <a:t>почему </a:t>
+            </a:r>
+            <a:r>
+              <a:rPr lang="en-US" b="1" dirty="0" smtClean="0"/>
+              <a:t>SES-based </a:t>
+            </a:r>
+            <a:r>
+              <a:rPr lang="ru-RU" b="1" dirty="0" smtClean="0"/>
+              <a:t>подходы имеют особое место </a:t>
+            </a:r>
+            <a:r>
+              <a:rPr lang="ru-RU" dirty="0" smtClean="0"/>
+              <a:t>среди других подходов на основе скользящего среднего. Почему </a:t>
+            </a:r>
+            <a:r>
+              <a:rPr lang="en-US" dirty="0" smtClean="0"/>
+              <a:t>SES – </a:t>
+            </a:r>
+            <a:r>
+              <a:rPr lang="ru-RU" dirty="0" smtClean="0"/>
+              <a:t>итерационный подход? Какая интуиция соответствует переходу от </a:t>
+            </a:r>
+            <a:r>
+              <a:rPr lang="en-US" dirty="0" smtClean="0"/>
+              <a:t>SES </a:t>
+            </a:r>
+            <a:r>
+              <a:rPr lang="ru-RU" dirty="0" smtClean="0"/>
+              <a:t>к </a:t>
+            </a:r>
+            <a:r>
+              <a:rPr lang="en-US" dirty="0" smtClean="0"/>
+              <a:t>DES </a:t>
+            </a:r>
+            <a:r>
+              <a:rPr lang="ru-RU" dirty="0" smtClean="0"/>
+              <a:t>и к </a:t>
+            </a:r>
+            <a:r>
+              <a:rPr lang="en-US" dirty="0" smtClean="0"/>
+              <a:t>TES. </a:t>
+            </a:r>
+            <a:endParaRPr lang="ru-RU" dirty="0" smtClean="0"/>
+          </a:p>
+          <a:p>
+            <a:r>
+              <a:rPr lang="ru-RU" b="1" dirty="0" smtClean="0"/>
+              <a:t>Объясните подход </a:t>
+            </a:r>
+            <a:r>
+              <a:rPr lang="en-US" b="1" dirty="0" smtClean="0"/>
+              <a:t>TBATS</a:t>
+            </a:r>
+            <a:r>
+              <a:rPr lang="en-US" dirty="0" smtClean="0"/>
+              <a:t>, </a:t>
+            </a:r>
+            <a:r>
+              <a:rPr lang="ru-RU" dirty="0" smtClean="0"/>
+              <a:t>где он используется? Приведите примеры задач где недостаточно </a:t>
+            </a:r>
+            <a:r>
+              <a:rPr lang="en-US" dirty="0" smtClean="0"/>
+              <a:t>ETS </a:t>
+            </a:r>
+            <a:r>
+              <a:rPr lang="ru-RU" dirty="0" smtClean="0"/>
+              <a:t>и нужно использовать </a:t>
+            </a:r>
+            <a:r>
+              <a:rPr lang="en-US" dirty="0" smtClean="0"/>
+              <a:t>TBATS. </a:t>
+            </a:r>
+            <a:r>
+              <a:rPr lang="ru-RU" dirty="0" smtClean="0"/>
+              <a:t>Предложите пути решения таких задач без </a:t>
+            </a:r>
+            <a:r>
+              <a:rPr lang="en-US" dirty="0" smtClean="0"/>
+              <a:t>TBATS</a:t>
+            </a:r>
+            <a:r>
+              <a:rPr lang="ru-RU" dirty="0" smtClean="0"/>
+              <a:t>, в чем их особенность</a:t>
+            </a:r>
+            <a:r>
+              <a:rPr lang="ru-RU" dirty="0" smtClean="0"/>
+              <a:t>.</a:t>
+            </a:r>
+            <a:endParaRPr lang="en-US" dirty="0" smtClean="0"/>
           </a:p>
         </p:txBody>
       </p:sp>
     </p:spTree>
     <p:extLst>
       <p:ext uri="{BB962C8B-B14F-4D97-AF65-F5344CB8AC3E}">
-        <p14:creationId xmlns:p14="http://schemas.microsoft.com/office/powerpoint/2010/main" val="3072495549"/>
-      </p:ext>
-    </p:extLst>
-  </p:cSld>
-  <p:clrMapOvr>
-    <a:masterClrMapping/>
-  </p:clrMapOvr>
-  <p:timing>
-    <p:tnLst>
-      <p:par>
-        <p:cTn id="1" dur="indefinite" restart="never" nodeType="tmRoot"/>
-      </p:par>
-    </p:tnLst>
-  </p:timing>
-</p:sld>
-</file>
-
-<file path=ppt/slides/slide29.xml><?xml version="1.0" encoding="utf-8"?>
-<p:sld xmlns:a="http://schemas.openxmlformats.org/drawingml/2006/main" xmlns:r="http://schemas.openxmlformats.org/officeDocument/2006/relationships" xmlns:p="http://schemas.openxmlformats.org/presentationml/2006/main">
-  <p:cSld>
-    <p:spTree>
-      <p:nvGrpSpPr>
-        <p:cNvPr id="1" name=""/>
-        <p:cNvGrpSpPr/>
-        <p:nvPr/>
-      </p:nvGrpSpPr>
-      <p:grpSpPr>
-        <a:xfrm>
-          <a:off x="0" y="0"/>
-          <a:ext cx="0" cy="0"/>
-          <a:chOff x="0" y="0"/>
-          <a:chExt cx="0" cy="0"/>
-        </a:xfrm>
-      </p:grpSpPr>
-      <p:sp>
-        <p:nvSpPr>
-          <p:cNvPr id="2" name="Заголовок 1"/>
-          <p:cNvSpPr>
-            <a:spLocks noGrp="1"/>
-          </p:cNvSpPr>
-          <p:nvPr>
-            <p:ph type="title"/>
-          </p:nvPr>
-        </p:nvSpPr>
-        <p:spPr>
-          <a:xfrm>
-            <a:off x="242193" y="365125"/>
-            <a:ext cx="11111607" cy="828675"/>
-          </a:xfrm>
-        </p:spPr>
-        <p:txBody>
-          <a:bodyPr/>
-          <a:lstStyle/>
-          <a:p>
-            <a:r>
-              <a:rPr lang="en-US" dirty="0"/>
-              <a:t>Prophet pros and cons</a:t>
-            </a:r>
-            <a:endParaRPr lang="ru-RU" dirty="0"/>
-          </a:p>
-        </p:txBody>
-      </p:sp>
-      <p:sp>
-        <p:nvSpPr>
-          <p:cNvPr id="3" name="Объект 2"/>
-          <p:cNvSpPr>
-            <a:spLocks noGrp="1"/>
-          </p:cNvSpPr>
-          <p:nvPr>
-            <p:ph idx="1"/>
-          </p:nvPr>
-        </p:nvSpPr>
-        <p:spPr>
-          <a:xfrm>
-            <a:off x="155575" y="1622809"/>
-            <a:ext cx="6715125" cy="1530350"/>
-          </a:xfrm>
-        </p:spPr>
-        <p:txBody>
-          <a:bodyPr>
-            <a:normAutofit/>
-          </a:bodyPr>
-          <a:lstStyle/>
-          <a:p>
-            <a:r>
-              <a:rPr lang="ru-RU" sz="2400" dirty="0"/>
-              <a:t>Быстрая работа на длинных горизонтах</a:t>
-            </a:r>
-          </a:p>
-          <a:p>
-            <a:r>
-              <a:rPr lang="ru-RU" sz="2400" dirty="0"/>
-              <a:t>Учет бизнес процессов с шагом до 1 дня</a:t>
-            </a:r>
-          </a:p>
-          <a:p>
-            <a:r>
-              <a:rPr lang="ru-RU" sz="2400" dirty="0"/>
-              <a:t>Устойчивость к шумам и выбросам</a:t>
-            </a:r>
-          </a:p>
-        </p:txBody>
-      </p:sp>
-      <p:pic>
-        <p:nvPicPr>
-          <p:cNvPr id="4098" name="Picture 2" descr="DataTechNotes: Forecasting Time Series Data with FbProphet in Python"/>
-          <p:cNvPicPr>
-            <a:picLocks noChangeAspect="1" noChangeArrowheads="1"/>
-          </p:cNvPicPr>
-          <p:nvPr/>
-        </p:nvPicPr>
-        <p:blipFill>
-          <a:blip r:embed="rId2">
-            <a:extLst>
-              <a:ext uri="{28A0092B-C50C-407E-A947-70E740481C1C}">
-                <a14:useLocalDpi xmlns:a14="http://schemas.microsoft.com/office/drawing/2010/main" val="0"/>
-              </a:ext>
-            </a:extLst>
-          </a:blip>
-          <a:srcRect/>
-          <a:stretch>
-            <a:fillRect/>
-          </a:stretch>
-        </p:blipFill>
-        <p:spPr bwMode="auto">
-          <a:xfrm>
-            <a:off x="5967611" y="2976114"/>
-            <a:ext cx="5779291" cy="3441601"/>
-          </a:xfrm>
-          <a:prstGeom prst="rect">
-            <a:avLst/>
-          </a:prstGeom>
-          <a:noFill/>
-          <a:extLst>
-            <a:ext uri="{909E8E84-426E-40DD-AFC4-6F175D3DCCD1}">
-              <a14:hiddenFill xmlns:a14="http://schemas.microsoft.com/office/drawing/2010/main">
-                <a:solidFill>
-                  <a:srgbClr val="FFFFFF"/>
-                </a:solidFill>
-              </a14:hiddenFill>
-            </a:ext>
-          </a:extLst>
-        </p:spPr>
-      </p:pic>
-      <p:sp>
-        <p:nvSpPr>
-          <p:cNvPr id="4" name="Прямоугольник 3"/>
-          <p:cNvSpPr/>
-          <p:nvPr/>
-        </p:nvSpPr>
-        <p:spPr>
-          <a:xfrm>
-            <a:off x="5575300" y="6548635"/>
-            <a:ext cx="6096000" cy="307777"/>
-          </a:xfrm>
-          <a:prstGeom prst="rect">
-            <a:avLst/>
-          </a:prstGeom>
-        </p:spPr>
-        <p:txBody>
-          <a:bodyPr>
-            <a:spAutoFit/>
-          </a:bodyPr>
-          <a:lstStyle/>
-          <a:p>
-            <a:r>
-              <a:rPr lang="ru-RU" sz="1400" dirty="0"/>
-              <a:t>https://www.datatechnotes.com/2022/06/forecasting-time-series-data-with.html</a:t>
-            </a:r>
-          </a:p>
-        </p:txBody>
-      </p:sp>
-      <p:sp>
-        <p:nvSpPr>
-          <p:cNvPr id="5" name="AutoShape 4" descr="data:image/png;base64,iVBORw0KGgoAAAANSUhEUgAAAsgAAAGoCAYAAABbtxOxAAAABHNCSVQICAgIfAhkiAAAAAlwSFlzAAALEgAACxIB0t1+/AAAADh0RVh0U29mdHdhcmUAbWF0cGxvdGxpYiB2ZXJzaW9uMy4xLjAsIGh0dHA6Ly9tYXRwbG90bGliLm9yZy+17YcXAAAgAElEQVR4nOzdd5Sdd33v+/dTdi8zo+mjsXqxLBfZlgvEGIwxnJCEpsQ2cW4gmCiEk5V7MHAuiQ85HEIMKT4XcvG6RkkIDsm100yJQ+xQnBgMxmAsN9myZPUZlWl7dt9PvX/s0d4zlmTL0nR9XmuxrHl2++2fxFof/fR9vl8jDMMQEREREREBwJzrBYiIiIiIzCcKyCIiIiIikyggi4iIiIhMooAsIiIiIjKJArKIiIiIyCT2XC/gbHR0dLBixYop11zXJRKJzM2C5gntQZP2okl7Uad9aNJeNGkv6rQPTdqLpsW8F/v27WN4ePiE6ws6IK9YsYKf/vSnU64NDg7S19c3RyuaH7QHTdqLJu1FnfahSXvRpL2o0z40aS+aFvNebN68+aTXVWIhIiIiIjKJArKIiIiIyCQKyCIiIiIikyggi4iIiIhMooAsIiIiIjKJArKIiIiIyCQKyCIiIiIikyggi4iIiIhMooAsIiIiIjKJArKIiIiIyCQKyCIiIiIikyggi4iIiIhMooAsIiIiIjKJArKIiIiIyCQKyCIiIiIikyggi4iIiMic8PyAQtWb62WcQAFZRERERObEsWKN7+0eYqTkzPVSplBAFhEREZE5MV7xIIQjhepcL2UKBWQRERERmRNjFZd4xJrrZZxAAVlEREREZl0QhBRrHlHLmOulnEABWURERERmXc0PCAgxUEAWEREREaHq+jAPwzEoIIuIiIjIHKh6AQbhXC/jpBSQRURERGTWVRwfy9AJsoiIiIgIUD9BtkwFZBERERERXD+g6vrzNiDbc70AERERETl3HC3U2D1cxMDAMg2CYP7VIesEWURERERmzf6xMoWqT9Xzsc35GUXn56pEREREZNFxvIDRskNAiOOFzMMZIYBKLERERERklpQcD0IDx/MxDDCM6Fwv6aR0giwiIiIiM871A44WamCE1LwAP5jrFZ2aTpBFREREZMYNlxwGxqtETJPlbQnMedoDGXSCLCIiIiKzwDIMhksOiYhFxDLnbYs3UEAWERERkVnghyEtCZuYPf/j5/xfoYiIiIgseK4XYDB/T40nU0AWERERkRnnBMG8bev2cgrIIiIiIjLjXC/EnMd1x5MpIIuIiIjIjHP8AGsed66YTAFZRERERGbUaNkhV3XndWu3ydQHWURERERmRBiGHCnU2D4wjh+EtCUjc72k0zJjJ8gHDx7kuuuuY8OGDWzcuJEvfOELAHzqU59i6dKlbNq0iU2bNvGtb32r8ZrPfvazrFmzhvXr1/PQQw/N1NJEREREZBZUXJ8Xh4q4Qch41cM2F0bxwoydINu2zZ133slll11GoVDg8ssv54YbbgDgIx/5CB/72MemPH/Hjh3cd999PPfccwwODvKWt7yFF198EcuyZmqJIiIiIjKDKm7ASNmFEM7vSs/1ck7bjMX43t5eLrvsMgAymQwbNmxgYGDglM//xje+wc0330wsFmPlypWsWbOGxx9/fKaWJyIiIiIzrFTziFkmS1vic72U12RWapD37dvHk08+yVVXXcWjjz7KF7/4Rf7mb/6GzZs3c+edd9LW1sbAwABXX3114zX9/f0nDdTbtm1j27ZtABw5coTBwcEpjw8NDc3sl1kAtAdN2osm7UWd9qFJe9GkvajTPjRpL5rOdC+CMGT7oXGilkmxduqb88qOj12NMBgUz3SJ027GA3KxWGTLli18/vOfJ5vN8tu//dt88pOfxDAMPvnJT/LRj36UL3/5y4RheMJrjZPc6bh161a2bt0KwObNm+nr6zvhOSe7dq7RHjRpL5q0F3XahybtRZP2ok770KS9aDqTvSjVPKIFm85U7BWfZ1U92jJR+nqyZ7q8aTejldKu67JlyxZuueUW3vOe9wDQ3d2NZVmYpslv/uZvNsoo+vv7OXjwYOO1hw4d0h9MERERkQXKDUIIF0Zbt5ebsYAchiG33norGzZs4LbbbmtcP3z4cOPXX/va17jwwgsBeMc73sF9991HrVZj79697Nq1iyuvvHKmliciIiIiM8j1AzBOrBBYCGasxOLRRx/lq1/9KhdddBGbNm0C4I477uDee+9l+/btGIbBihUr+NKXvgTAxo0bufHGG7nggguwbZu77rpLHSxEREREFpgwDPGDEMcLMFiYJ8gzFpCvueaak9YVv/3tbz/la26//XZuv/32mVqSiIiIiMygqutztFBj72iZznQM21RAFhEREZFz2LFCjUPjVY4VHSzTWLABeWGMMxERERGReW+s4lKoekBIqeaTiCzMclkFZBERERE5KxXXByBXccnXPFJRm7Fq/RR5IVJAFhEREZEzEoYhuYrLD/eNkqu4VDyfzlSE7nSUNe2puV7eGVMNsoiIiIickX2jZQbzNXJll3zVhRCy8QjAAu1fUacTZBERERE5I4P5GhXXp+YHlGo+nGQK8kKkgCwiIiIiZ8TxA6quj4lBwanfnLcYKCCLiIiIyBlx/ICS42Oa4HgBC7uwokk1yCIiIiLymuQqLumoRRhAVzqKaRh4QYhOkEVERETknJOvuvzsUI6SU2/tlo1HiNsmYxWXhL0w+x6/nE6QRUREROS0PH+kwFDJYajkMFp2G/fk2ZZJbyZGxFocZ6+L41uIiIiIyIzZNVSk5vmUXZ+jhRodySjHilXCSRUViyUcg06QRUREROQUDoyV2TdcglSUznSMkJCeTAzThKLjL5aubidYPFFfRERERKZVzQ0YqzgUaj5V18fxQizTIGaZjJRckpHFUXP8cgrIIiIiIjLFk4fGOZyvYphQqNbDcdHxqPkBlgGGYdDfEicZXZwBWSUWIiIiIjJFruJgWwa2YRC3TRIRi1zFxfEDMhOhOGYv3nPWxfvNREREROQ1C4KQmheSr7pU/YC4bdKZjjJUdPCDEGOxFh5PohNkERERkXNcEISEgGUaHMlX8YKAimsQMQNM08A0DNwgPGdOVs+V7ykiIiIip7B7uMjTg+NUXJ+nj+TpTEXx/ICq52NNnBhnohYFx5vjlc4OnSCLiIiInOPyNY/xqkex5gEGtmViGAY1r1lSkY1HyMYjc7vQWaKALCIiInIOGys7jFc9SjWfkZLTKC8IJqaA2Iu/5PgEKrEQEREROcc8PZinWPPwg5CfHhxnqOgQsUyGS06jO0XNC6i6Piggi4iIiMhi5ngBh/NV9oyUqLg+fhiwtiNFwjYZLTvEJ4Z/VL2AiufP8WrnhkosRERERM4hPzs0TtXzGRivsiQZJQwnbsKL22TizWjY3xLHMKCaK83VUueMTpBFREREzhF+EJKruFTdAIBjRQfrFCUUiYhF3F6ck/JejQKyiIiIyDnC9QP8MOC81gSmAcWat6gn4p0plViIiIiILGKOF3AoVyFqGySjNpZpErNNKq5JoebSmYrN9RLnHQVkERERkUVsrOKy/XAezw9Y15GG4+3bTIN8zaMnE5/jFc4/CsgiIiIii9DgeJVC1cULQ1rjNhHTJFd1Od63LR2zWR1Jze0i5ykFZBEREZFF6EihSsX1MTCI2xZRy2C47NCaaE7Ds8xzsMnxaVBAFhEREVmESjWfIAxxg4CWuI1hGKo3Pk0KyCIiIiKLTBiGVLwAywDPDzENnRS/FgrIIiIiIotIEIQMlRz8ICA0jHNyVPTZUkAWERERWUT2j5V5ejBPxDKp+QEqM37tFJBFREREFpGy65ON22RiNsWaTyJ6bk7DOxsKyCIiIiKLSM0NsE0TwzDIxBX1zoR2TURERGQRKFQ9jhaqVL1A7dvOkgKyiIiIyCLw0kiJkZKDaRgkVVZxVsy5XoCIiIiInB0/CDlWqFHzA2oT7d3kzOkEWURERGSBy1Vc/DDEC0IsI8RQ3+OzooAsIiIisoBVXJ+nBvNkYjZVNyAknOslLXgzVmJx8OBBrrvuOjZs2MDGjRv5whe+AMDHP/5xzj//fC6++GLe/e53k8vlANi3bx+JRIJNmzaxadMmPvShD83U0kRERETmvWOFGp4fnPLxIKgH4dGSg+P7JCIWbckIS5LR2VriojVjAdm2be68806ef/55HnvsMe666y527NjBDTfcwLPPPsvTTz/NunXr+OxnP9t4zerVq9m+fTvbt2/n7rvvnqmliYiIiMxrR/NVHj8wxljFBeDAWJmxstN4PFdx+fGBMUZKDoWaR9TSbWXTacZKLHp7e+nt7QUgk8mwYcMGBgYGeOtb39p4ztVXX80//dM/zdQSRERERBYMzw94+nCe87vS7DhWxDIN9o2WSUUtnh7Mk4nb9GbidKSjPH+0wJGCQ9n1SUdtBeRpNis1yPv27ePJJ5/kqquumnL9y1/+MjfddFPj571793LppZeSzWb5zGc+wxve8IYT3mvbtm1s27YNgCNHjjA4ODjl8aGhoRn4BguL9qBJe9GkvajTPjRpL5q0F3Xah6a52IvxisszB3OExQyjoxVa4zYvDTuY5RTVXJkqMDgQsK4rze7DBZYkI4wWAsZNg0zUpjZDGbmYG52ZN55QdnzsaoTBoDijn/NazHhALhaLbNmyhc9//vNks9nG9T/6oz/Ctm1uueUWoH7ifODAAdrb23niiSd417vexXPPPTflNQBbt25l69atAGzevJm+vr4TPvNk18412oMm7UWT9qJO+9CkvWjSXtRpH5pmcy8qrs9LB3O0dkSxMklSYZXWdAwv6WBnYqRJ05mKMlSsEWtJ0EOajlSUwXwVA1iSjc/o+lo7umfsva2qR1smSl9P9tWfPEtm9DzedV22bNnCLbfcwnve857G9XvuuYcHHniAv/u7v2u0IYnFYrS3twNw+eWXs3r1al588cWZXJ6IiIjIvLBnuETV9elIRslVXJjIR3HbpOh4cLwzhWGQr3pEJhod17x632OZXjMWkMMw5NZbb2XDhg3cdtttjesPPvggf/zHf8w3v/lNkslk4/rQ0BC+7wOwZ88edu3axapVq2ZqeSIiIiJzbrziEgQhBccnGbGwLRPXb7Zpi9sm41WPsHEpxPWDRs1xEIIfqq3bdJuxEotHH32Ur371q1x00UVs2rQJgDvuuIPf/d3fpVarccMNNwD1G/XuvvtuHnnkEf7gD/4A27axLIu7776bJUuWzNTyREREROZUGIY8cSjHqvYUFdcnaZvYpkHZ8QhCIAW2ZZK0LaK2OfEayNc8ejMxAJa3zmxpxblqxgLyNddcQ3iSv9G8/e1vP+nzt2zZwpYtW2ZqOSIiIiLziuMHlByfw/kqjh+QiVoARGxzSobKxJtxLWqZ5KtOo0TVVveKGaFJeiIiIiKzLAhCtg/kgXpP4yBsjofuTsdO+brWRITWRGRW1nguU0AWERERmWUV1+dooYZlGFTdANOY6xXJZDqXFxEREZllJccnYhv0ZGNk4zZuoBvt5hOdIIuIiIjMsmLNw54oqVDZxPyjE2QRERGRWeR4ASXHI2Iqhs1XOkEWERERmSXDxRq7h8tg0Bj2IfOPArKIiIjILBkqOeRrHrYBqZhi2Hyls30RERGRWVDzfA6PV3H9gJofYKt1xbylv7qIiIiIzILH9o8xVnWxDQP1rJjfdIIsIiIiMkOOT8SreT4Vx2dZawLHD/HV1m1eU0AWERERmQFlx+Ox/WOEYUjJ8cEwMA2DrnSUnuypp+XJ3FNAFhEREZlmfhDy4lCJw4UaP96fo+YFMFFYkY7ZxG1rbhcor0g1yCIiIiLTpOx4VFyfiGVyOF+lIxnhWLFGJm41BoPI/KeALCIiInIWjhVqpKIWzx4pkI5ZjJRcLuhOYxgGqahN2fXJVVwilv7hfqFQQBYRERE5C88fLdDXEme4VONIIcQ2TcYqLsd7VRgYOF5A1FZAXij0OyUiIiJyBmqez+6hIrmKS80LsEyDpdk4lmEwVnaxJ0ZJZ2M2+ZpHVCfIC4Z+p0RERETOwKFchScH8limwXjVhdDAMAwMA6pecxBI1Dbpb0lgqgZ5wVCJhYiIiMgZGMzXWNoSB6Dq+WA0exsXah6dqehcLU3Okk6QRURERF6jMAwpOz5RyyBmm+SrHjU3AMCeOFG2NEr6tOw8ViQI59fgFAVkERERkdPkByGPvDTC4HiVMARjomyiLRGhY+LEuDURYV1Hai6XuWC8cKzI73z9Wf7isQNzvZQpVGIhIiIicprKjs9w2SEVtTg++APqwz8mM1RvfFq++IO9ZGI2N23qm+ulTKETZBEREZHT4PkBzx8rEAQhFdcHZeCz8uJQkccO5Hjnxm5aE5G5Xs4UCsgiIiIip2G86rF/tMKSZISKG2gy3ln64g/2sSQZ4V0X9sz1Uk6ggCwiIiJyGoZLDkuSEdJRm6LjEbOtuV7SglVyPB4/mOMXNnTREp9fp8eggCwiIiJyWko1j4hlYJkGZcfTZLyz8OyRAl4QcvXytrleyknpJj0RERGR01Af/lEPxed3ZeZ4NQvbUNEBYGk2PscrOTn91UdERETkFRRrHodyZaqur97G02S4VA/I7fN0mIoCsoiIiMgrGCs77Bkp4wTN8dFy5h7ePczjB3OkohaJyPys41aJhYiIiMgpuH7AofEqhZpPOM+mvS1Ezx0p8PEHngdgWVtijldzajpBFhERETmF/WNlhoo1whAcXwH5bP3tzw41ft2RnJ/lFaATZBEREZGTcryAvSMVutMxbMvUCfJZ2jda5uHdI42fV7cn53A1r0wnyCIiIiInMVSs4QchtlWPSxoffXa++sQhopbJHT9/PgA3Xzq/xktPphNkERERkZOoeD5qdTw9gjDkB3tH+bmVbbx1fSc3rOuY13/h0G+7iIiIyEnUvEBt3abJsUKNkbLL5v5WYP6fxisgi4iIiEyouD6FqsezhwvUXAXk6XK873F3JjbHKzk9KrEQERERAcIw5KcHc0RMk3zVJen6jcl5cnaGJgJyxzwdDPJyCsgiIiJyTgvDEC8Iqbg+QyWHhG0SUB8tnYkpKp0NPwj52AM7+P6eUWDhBGT9tUhEREQWLT8I+eHeUXIVF4Cj+Sp7RkqNnx0vYPvAON/fM0LJ8bEMcLwQEwPHD7BUYXFWHtx5rBGOTQPaEpE5XtHp0V+LREREZNEaLTsczFVoT0XJxmyeOpzH9QNilsWb1rTz1OA4o2WXEMhXXeK2RUcqyohjY1nmvL+ZbD7LVVy2PXag8bMBC6amWyfIIiIisuhUXJ9izWNgvEp7MsLBXIWK6xOEIT2ZOF4YMlRyGC67jX/2Hyt72BMBzjKhdYGcds5X//jUIIPjVT541XkArOlIzfGKTt+MBeSDBw9y3XXXsWHDBjZu3MgXvvAFAEZHR7nhhhtYu3YtN9xwA2NjY43XfPazn2XNmjWsX7+ehx56aKaWJiIiIovcM4N5nj1cYLziko7ZuH7A4UJtynPGKy5GYzpeiOMHjYAsZ+/bu4a5dGkL77/iPLZc1MOd79g410s6bTMWkG3b5s477+T555/nscce46677mLHjh187nOf4/rrr2fXrl1cf/31fO5znwNgx44d3HfffTz33HM8+OCDfPjDH8b3/ZlanoiIiCxiBccjCEOqXj302qbByEQnBaj/c/941eN4BUUqYjNadohY+sf16RCEIfvHKlzSlyVuW/ze9WvpWSAt3mAGA3Jvby+XXXYZAJlMhg0bNjAwMMA3vvEN3ve+9wHwvve9j69//esAfOMb3+Dmm28mFouxcuVK1qxZw+OPPz5TyxMREZFFyPMDXjhaoFD1qHg+IfWhFImIxVjZJTYRgGOWSbHmEZ34ORm16MnEiGl03lk7MFbhkZdG8IOQzvTC6FrxcrNyk96+fft48sknueqqqzh69Ci9vb1APUQfO3YMgIGBAa6++urGa/r7+xkYGDjhvbZt28a2bdsAOHLkCIODg1MeHxoamqmvsWBoD5q0F03aizrtQ5P2okl7UbcY9mEgV2HXcIlUzCKXh5CQSCVCGMJ42aEjGSVXhCCAkuORidnkiie+TzE3OvuLn6dey148fbTMbd8+1Pg56ZfJDR99xdeUHR+7GmEwOMlvxByZ8YBcLBbZsmULn//858lms6d8XtioAWo62Z2jW7duZevWrQBs3ryZvr6+E55zsmvnGu1Bk/aiSXtRp31o0l40aS/qFvo+DDPO0mgL6ZjNYL5KxDJoTdX/ab/tZc9d8irv1drRPSNrXIhOZy+ePVLg49/dNeXair5uWjsyr/g6q+rRlonS13PqnDjbZvTfEVzXZcuWLdxyyy285z3vAaC7u5vDhw8DcPjwYbq6uoD6ifHBgwcbrz106NCC/z+piIiIzLyfHBjD8QIAqpPGQ/dl43SmFk7d60L3d08cIhmx+KOfX9+41rVASyxmLCCHYcitt97Khg0buO222xrX3/GOd3DPPfcAcM899/DOd76zcf2+++6jVquxd+9edu3axZVXXjlTyxMREZFFwPMDxqseRws1Do9XqHq+OlHMkjAM+dozh/nIN57jE//6PDuHSlze38JVy5pn9e3JhRmQZ6zE4tFHH+WrX/0qF110EZs2bQLgjjvu4BOf+AQ33ngjf/VXf8WyZcv4x3/8RwA2btzIjTfeyAUXXIBt29x1111YljVTyxMREZFFoOoFFGoeO44WsC0DPwhJRJQfZsr+sTIHxip0pmMMjFf5o+/unvL461a00ZqI8KHXLefnVrQtmMEgLzdjAfmaa645aV0xwHe/+92TXr/99tu5/fbbZ2pJIiIisshUXJ9ExCIbsxmtuBgGmJp+N22GSw4/OVSktxanKx3j1+/dTsmpt+Fd1Z6kJW7zv9+xkVv/4SkAutP1kpYPXrVsztY8HTRqWkRERBasmudjAFHbxA/CUx7OSV2u4vKF7++lLxvjFzZ0k4iYfOuFITb3t7CuM8X+sQoP7RyiLxvnDauW8Jv/+BQHc1VgkPWdKUqOz7sv7OFrzx5hz0iZi3szrJ00IW+h1hy/nAKyiIiILDiOF3BgrEwQ0qg57s7EqHkaMvZyf/ezAb6/Z4RMzCZqmzy0s97O7/5njrC8LcFPD40DcOMlvTyyZ5QjExMHV7QlOJirct2KDA/vK7BzqETMNvm969fwrReOUfMCejJxktFmSct5rYnZ/4IzQAFZREREFpx9Y2X2jVboTkcbAdk2Dezowo02ZcfHMCARsThSqNGVjp51uciP9o3xfz+yZ8q1K5e1cnFvhr/88UGGSg6b+rLkax7/8FS9y9j7Nvfz8Esj7BurAPAbl7RztBKy42iR3kwM0zDozcTYN1ahN1svqfj4m1bj+gEXdKfPar3zxcL9UyQiIiLnpKP5KruHS4Qh5Gvegu9a4fkBH/rnZ9g+mKc1YXPzpqXc/aP93LC2g9+7fg3ZeOQ1v+exYo3tA3l+cjBHImLylZs3cdNXfwZAf0uci3ubPYffsq6DQtXjSyMHALhqWSu5isuBsQoG0JmMsDQbrwfkbByAznSUfWMVlrbUf75p0+JqzauALCIiIgtGEIQ8e6RAS9ymUPNwvIB0dGF3rfi3F4bYPpgnGbHIVTzu/tF+AL69a5jxmsdd777wpMPTTuWRPSN84l+fx/Hr9dir2pOc19IsfejNxOmbCLpQ7xddiHnNx7Nx+iaCbzZuE7GMRhDumzgx/t1rVvLUYJ6fP7/rDL/1/KaALCIiIgtG0fFw/JDWRD1MhmGAZS7MODNedfn+nlG2D46TiJh88wNX8JYvPQbAW9Z2sKo9ybbHDrBzqMRgvsobV7W/atu0sbLD73/rBaKWiePX67F7MjGidnP0RW82Rk+2OUClLxunUGsG5O50jKUTAbpl4vT6XRf1ELVNfumC+kS9Dd0ZNnS/8oS8hWxh/okSERGRc8bxzhSGYVB1Awyj/rM30bXitZyuzhcjJYet//Q0+yfqfFe0JWiJ28Rsk5oX0JeNs26iO8Sv/X9PAvAbV5zHh1+//BW/76P7xqh6AX/7q5fyiX99nkPj1UbrtXds7ObH+8e4sDdD3Lb4xQ1dHCnUWNaaoOz6JCMWy9sSRG2Ta1e18+HXL+fnViwBSvS3JNh69fKZ3ZR5RAFZRERE5rW9I2V2j5RZ25HEMAxM6gFxaTa2IMNxGIZ85JvPNcIx1DtwGIZB1JoIyC1xeiaVQQD89U8Oko3b/B+X90+5fjBX4Ss/Och/vDRCW6J+4rtySZKWeIRD49XGafEf3LBuyus+9bbmSOiobfLwb7+O4wfUyajFB66s9zLODZem54svIArIIiIiMq8dLlSJ2wbPHyvSmYoSterlAgsxHAM8d7TIjqNFPv6m1Tyw4yjPHyvSnamH2Js39fEvO46yqS9Le7J5c97/dd1qHt49wn3bB4lNtGr7pQu6+S/rO7ntm8+xd7QetserHq2J+kn029Z3UvF8fn796dUJL9SpdzNBAVlERETmLdcPyFc9utIxyk59rHRsUj3tQhOGIXtG6ieyP7eyjUf3jgL1zhIAv/W65fzW65Y3nnvcsrYEl/Rlefxgjj95+CUAnhrM87VnjrB3tMJH37iKh3eP8LOB8UZJxa9etpRfvWzprH23xUQBWUREROYtL2jWGDu+T82HlvjCG0YRhiF//9Qgf/79vcTseteNzlSMd1/UQyJq8SsXn9gmzTAMfv78Lv79xSFWt6c4nK81Hvu9N6/h/mcO89zRAgCXLW1h93CpHpAzsRPeS14bBWQRERGZd8IwxAtCXD9oXGtLRKm482tSXhCGGIAfwuMHxtjc3zqlY8Rxf/IfL/GPE4M4HN+jLREhZptct6aD69Z0nPL9//C/rOd/vGUtMdukZ1LwXdeZ4uLeLDuH6qfRPdlYY4rdJX3Zk76XnD4FZBEREZl3hksOO48Vp7QSS0atKWON51Kx5vFf73+W548V2NCVYX1XivufOUJL3Ob33ryG81oT/P1Tg5zXkuDnVrbxz08f5tpVS/D8kB/uH6MrHT3tzzpeUjI5IC9tafYqBsjGbG6+tI/zu9Jctax1+r7oOUoBWY9dB4kAACAASURBVEREROaVMAwZr7gcLdToysSA8FVfM9vufXKgUd7w3NFC49dRy+RzD+8mYVscLtRLIv7miUMEIWy5qJcf7R/jh/vH6EidfkA+rr8lTn9LHD8IaUtEGsM+opaBYRjEbYurl7dN0zc8ty3cKncRERFZlI4WauwcKmJbBmNld17l45GSw4MvHGPHsSKrliT5yk2XNB573+Z+3nvpUnIVj8OFGrdeeR7XrFzSGMLRk41xUW/9RPxdF/a85s+2LZP737+Zf37fZgzD4IrzWnj7hi7uePuG6fly0qATZBEREZlXBsarJCIWMdskV3HnTTu3QtXjXV/5CRW3Xhf9+uVt9E7qVdybjdMab0artZ0pTMPgBxOdKrrTMVYtSXLlea20JV/7CTKAaRhE7fp+ZOMRPj2pl7FMHwVkERERmVdGyg5tiQimYZCreLTE5z6uhGHIh+9/phGOoT7cY8mkXsVLs3Eyk9a6NBunOun56Vj9sTMNxzJ7VGIhIiIi88LgeIXhYo0gDDEnTo17MjESkbm/Me+pwTzPHyvysTetIj5x09zx6XfXrW6nPRlhXWeKvmzzRrrebJwVS5IArJr4rywMc/9XMhERETmnBUFIvubx7JH6pDyYHyUVk20fzAPwixu6ufuH+4HmcI8//aULGs8Lw5DfunoZFTegJW7TEk9z95aL2NCdnv1FyxlTQBYREZE5la95PDU4Tq7ikIyYzKu78qhP8ztarJGOWqRjNh954yp2Hivy5pP0LzYMg9+8evmUa5vPU9u1hUYBWUREROZUzQs4nK/RlY5SmzQYZD74zotDfOJbLwDNMol3buyBjXO5KplpqkEWERGROVWouXQkI2RjNlXXJxOdH+d3e0fLfPZ7uxs/d76G4R6ysM2PP4EiIiJyzjk4VsY2TfIVj6htYhgGPZn4q7/wNIVhyEM7h4jbJpvPa210kTjd197+by8QhpCMWJRdn6507NVfKIuCArKIiIjMKscLCMKQZ44U6EpFKTl+Y5zydKi4PuMVl6cPF/gfD+4EoC8b4463b+DeJwf4jSvOY01H6hXfY0/O4cWhEp948xr+fecxfjaQZ1W7OlGcKxSQRUREZNqFYUjNC3D9sNEbuOrWg/Czh/M4fogXhJRcn6rnk4pOTyu3v3hsP3/9k4M4fsjSljiWafDOjd3c/8wR/uv9z1ByfL67a5j/9bZ1vG1910nf42ihxr5cfUz0pr4sXekoyegRfuWS3mlZo8x/CsgiIiIy7Z45nOdQrko8YnJJXwtPDoxT83w297cShHBovEJvJka+5hHCtEzLe+FYkS89doCIVX+vgfEqF/dmuPGSPu5/5gglx2djdwYvCPjc916iLRHhgeeP8RtXnMfKJUm2D4zzvx/Zw46jxcZ7dqdjrOlIce2q9rNenywcCsgiIiIyrUo1j4HxKu2pKKNlh/GKS80LaIlH2D1cwgtC+lviRCyT0YrL2WbjXMXlR/vH2D9WBuBfPnAlW+75KSXHpycTpyfTrB1+/Yo2WuI2f/afe/iv9z9LCHzr+WP8t2tXcu/PBjhadBrPjdsm6djcDymR2aeALCIiItPK8QMMDGzTwDAgV3WJ2yaJiMXRYg2D5tjlvuzZ3ZT3yJ4RPvOdXYyWXQBitkl7MkJPJsZLI2V6s7EpN+ctbYmTnijnCIFf2NDFc0cKfOGRvYTA/7xhHT8bGOdfdhyla2JSnpx71OZNREREpkUYhgwVa7h+2DgVNjAo1vxG2UMqYjXGSJ+tkuPxqYdexPWbg0WOj3/unQjex2/GO36D3colSXomhfJrV7VzzcoljdEkS1vijXHR2dfQ9UIWF/3Oi4iIyFnLV132j1Y4OF5hXWea49PwQkLcICBp109t0zGbs+2W5ngBjx/MUax55GseX3jnRu59coDHDuTomXjz265dxS9e0MX1E9Pu7rl5E/vHKpzflSZXcRvvtbQlznCpWVbRl43h9GYB+LXLlp7dQmXBUkAWERGRs7ZvtMyLQyWilkGu4jROidNRm1zFo2WaTmOfPZznkw/t5GCu2rjW3xpvnAp3T9QbL2tLsKwt0XhOImJxflcagJa4TWcqymjFpb8lzlCx1nheRzpGTzbOv9y8ht6ezmlZsyw8CsgiIiJy1qpuQE8mRsnxqHkhllkPyImIRSIyPTe6hWHIp7+9a0o4hnqniTesXMJPDuS48TRasRmGwTc/cAXjVY90zGblRPlFRyqKfXzd09iXWRYeBWQRERE5K2EYMl51aU1EcHyTYs0jEZm+gOkHIf+5Z4SoZbJntMxHrl3FkUKVe58cpCVuE49YvHF1O29cffqt2CKWSUeqPjq6vyXB196/mdZ4ZNrWLAubArKIiIicFS8I8YMQ0zDIxmwKNW/aTo1HSg6ffHAnjx/MNa4tbYk3Tnoj1vQE8fNaE6/+JDlnKCCLiIjIWXH9gONtKwzDIDuNJ7HbHts/JRwD9GRi9GRiWAZ84Mrzpu2zRI5TQBYREZGzUm+zFr7q887E9/eO8tZ1nbx+RRuf+vcXAehOR2lLRnnsd69Rn2KZEQrIIiIiclZcPwCmL6h6fsAfP/wSwyWHoaLDsrY4/a3N3sWtifoJtcKxzBQFZBERETkjrh/wwrECcdvCmKYT5Krn87Fv7uCxA82yiu50jDXtKdZ0JHnruk4FY5lxCsgiIiJyRgbGqzxzuEB/SwLbnJ6b5R7YcYzHDuS4pC/LU4N5ALrS9XHR9/3a5dPyGSKv5lX/NH/xi19kbGxsNtYiIiIiC0QQhLw0XGJ5W4Ky65GNT8+Z2w/2jrKiLcEfvm1949rx4R8is+VVA/KRI0e44ooruPHGG3nwwQcJw5kpwhcREZGFI1d1cfyAuG3RmYo1JuedqZ8ezPGlH+1nYLzCsrbElFCsFmwy2141IH/mM59h165d3HrrrXzlK19h7dq1/P7v/z4vvfTSK77uAx/4AF1dXVx44YWNazfddBObNm1i06ZNrFixgk2bNgGwb98+EolE47EPfehDZ/m1REREZCblqx7WNNUC/81PD/Ghf36Gv/jxAfaOVuhOx7BMg7/8lYv5tw9eSUxT7WSWnda/hxiGQU9PDz09Pdi2zdjYGL/8y7/MDTfcwJ/8yZ+c9DXvf//7+Z3f+R1+/dd/vXHt7//+7xu//uhHP0pLS0vj59WrV7N9+/Yz/R4iIiIyi0ZKDvFpmJb31GCeP//BXrIxm3zNA+o1xwCblra80ktFZsyrBuQ///M/55577qGjo4MPfvCD/Omf/imRSIQgCFi7du0pA/K1117Lvn37TvpYGIb8wz/8A9/73vfOavEiIiIyN/I1j+QppuV9d9cwdz26j650lN99w0oGx6vsHCpx06Y+OlJRdg2VeHJwnKhlsnu4RNQy+OYHruBN/++PAOjKRGfzq4ic4FUD8vDwMPfffz/Lly+fct00TR544IEz+tDvf//7dHd3s3bt2sa1vXv3cumll5LNZvnMZz7DG97whpO+dtu2bWzbtg2o10cPDg5OeXxoaOiM1rSYaA+atBdN2os67UOT9qJJe1F3uvsQhiGjx3IEiRNjRBiGfPY7e8jVfA7kKvz+A89xqOAC8LdPHOIjV3fz/zx+lIrXvKdpaSaCVxhp/Nxr18gNHz3Lb3N2irnROf38+WSm96Ls+NjVCINBcUY/57V41YD86U9/+pSPbdiw4Yw+9N577+W9731v4+fe3l4OHDhAe3s7TzzxBO9617t47rnnyGazJ7x269atbN26FYDNmzfT19d3wnNOdu1coz1o0l40aS/qtA9N2osm7UXd6eyD4wWkCxFaU82T3qrr89nv7cYLQnI1n4+9aRVPDeb59ovDAPzW1cv4y8cPcuePjuCH8N/esJLPf38vAL0tSVo7uvnjX7Dwg5DL1nbOzJd7jVo7uud6CfPGTO6FVfVoy0Tp6zkx982VWa969zyP+++/n5tuuqlxLRaL0d7eDsDll1/O6tWrefHFF2d7aSIiInIaXD+YMhYkCEP+7D/38K/PH+OhnfVT6J5MnL5sc/rduy7sYX1nCj8Ey4CbL13K0onHj3esuH5tB29dPz/CsZzbZj0gf+c73+H888+nv7+/cW1oaAjf9wHYs2cPu3btYtWqVbO9NBERETkNbhDCpIj8Hy+N8PVnj0ypSe7JxOidFJDbU9HGz13pGLZpsCRZHxmtPscy38xYQH7ve9/L6173Onbu3El/fz9/9Vd/BcB99903pbwC4JFHHuHiiy/mkksu4Zd/+Ze5++67WbJkyUwtTURERM7QYK7CsWINaLZ4e/CFY7QnI/zJLzZLL3syMfpb6oE4ETExDYO+bD0I907894plrQBcu6p9llYvcnpmbNT0vffee9LrX/nKV064tmXLFrZs2TJTSxEREZFpUPN8nhzMk4nZWJNaIO8cKnF5fyur2pONay1xm8v7W/jItatYtaR+feXEf5e31f+79erl3HrlMvU5lnlnxgKyiIiILB5+ELLzWJEgCBktO3RO3KAXhiHDRYeu1VG60jHu/KULWN+ZwjAMIpbBLZctbbzHL17QzQXdGfpb6yfLtmlgm9MzbERkOikgi4iIyKsq1DwO5Cr0ZGOMll1itonjBTx9OE/ND+hI1wPzG1efulzCNAzWdKRma8kiZ0wBWURERF5VoeoSMeu1xB0Tp8cfvv9ptg/mARonyiKLgYp+RERE5FWNll3ik2qFjxZqjXAM0JlSJwpZPBSQRURE5FVVvGBKvfC/Pj910l1fS/zlLxFZsBSQRURE5FVVXL8RkKuuz98+McDrl7cB0J6M0KNexrKIqAZZRERETikMQ/wgxPECMtH6IJCfDYyTr3m899Kl/Pc3r6Y1HpnjVYpMLwVkEREROaWfHsxRn5sXYhj1E+SfHMwRtQwu7c8St61XfgORBUglFiIiInJSh8crHBqvUqx5TJ6cd2CsyrK2xLwOx14Q4vnBXC9DFigFZBERkXPUYK7CeMXFD8ITHvP8gGeOFOhJx6h5AcGk54yUHTqS87ut24GxCgfHq4RhSK7iKizLa6KALCIico7YP1rmR/tGOZqvUnF9nhgY56eHcuwaKgIQhPUpeX4Qkq95BAFEbZN81SMVbZ4WD5cc2udR3+Oy41P1fFw/YLzqcTBXIRExidomI2WHqG0yXvXmepmygKgGWURE5Byxb6xMruyRq7hc1JvFMg1KNY/hkkOh6vHkoXG8EZMLezNYhsHxrm7Hp9+5fsD3dg8zVHJon8MT5LLjU3A8qq7P0pYERccjYpnkqy7JiEVvNk7MNjlSqBGGcGFPhp8cHKdQ9UjHrEYttcip6ARZRETkHOD5ARUnoL+13q84V3ExDeoBs+YzXnUpOz592RgHcxXGax4xe2pM+LP/eInb/20nfhCe1glyGJ5YunE28lWXMAwpOh5XL28jFbPJV11Wtad4w6olJKMWGHBJX5YLujMw8fnZeIQLulNUfZ+XRspUXX/a1jNccnhppDQt7yfzhwKyiIjIIub5AftHy5RdH4x6YDQNg3zVI2LWY0Bo1EsroraJbZk4fsBoyZkSkD0/4OvPNYeDtCdPbO1WdX3yVReAkZLD/tzxG/xeu5oXNAL2eNVlMF/F8eulH6mozZJklJhlUvMCWhMRYraFZRiEIUQtk4hlAAamCZZpkIjYuH5IRypKvnZ2AfloscaxYo1CzSdqGbTEI/hByEjJoVBzz+q9ZX5QQBYREVnEhoo1fnwgx9FCjeOdKGKWyXDJIR6ZiAGhQaHmNQaBOF5I1fOJWM2Y8J97RqfczHdZf8sJnzVWcal5IcWaRzJqsaItznjVIwjr1073RNnzA4ZKNQ6NVyk5HlUv4KLeLGs7UwwVHXqz9aEkiYiFF4SNIB+xTCKWiWkaGIZBxDKwJsopopaJG4Rk4zZx2+BwvvraNpL6iXjF9ak4PiXHJ2obvGlNB53pKEXHwzAMKm5w0pseZWFRDbKIiMgiVax5PHukQCpiMlp2GyUH6ZhFPGI2ArBtQsVtjpJOx+wpYTYMQ+764T5WLklwzcol5CoeXenYCZ/lByHZuMV4xWV9V5q1nSnytRFGyy5x22S47NCZOvXEPT8IsUyDgUKN9Z1pgjDkwGiZ9nSMFUuS5Ksu6ZhNW6J+ep2ImBgGjYC8uj015f1SMYuaW+9eEbUNIqZBJm5zSV8Lj+0fo+r5p9Wq7kCuTF82Qa7iUvMCktF6MI+YJoZh0BqPcHi8SmsyQmc6wZ7hEp3p1zZZ0A9CCjWP1oSGrswHOkEWERFZpI4WqoRhvQa36vkcP0Gun642I0BrIsJo2cWeKLloidtTgtpLI2UOjFX41UuX8n++YRX/863rTvisouOxsj1JZzpK2fPJxG0MwyARsah6Pqs7UrTEI+QmSjDyVZeRkkMwEcSLNY9jxRojJYdM1GJjT4aOVJSi69MSq5/nZeMRLurNNNZmmSYxyyI28V3Oa0twXluisaZszMaeeCxmW7QlIsSseneL9lQExwsYyFcZLTun3MOK6xOzLaquTwi0JSO0xCOEIY0T+FTMpuaHJGyL5W0JXn5+XPNevcVcyfHwgvAV1yKzRwFZRERkkTpSqJGO2cQjJiMlZ6Iu90SmYbC6PYl5ilTw4wM5AH5u5ZKTPu75AcmozcV9LWRiFiZG41Q3YZu4fkjcNrmoN4vjBVQ9n7GqhzfRo3i86jJe9ejOxKhOnNBC/WTYxCAbb/6D97K2ZCP09maiXNKXwTRP/r1Wtqe4oDvd+Pl1K5awvC0JQCpqU/UCYhM116dScnzak9GJ54Ss70xzSV+WiNX8jjHbJAhDYhGTmG2RiFi4fv171ryAA7nKCeUlnh/w4nCRkbJDvlYvTVnfmcIwDJVozAMqsRAREVmkSo5PWyKCaRiNYHgmjhSqJCImnafoXOEFIclIPdTapkk2bjf6JieOX7dM4raJgUHZ8elIRrFMg0LNxfNCLuzNkIraHMhVSEyUPcQskyWpCOnYyePKklco1zj+2cc/H+o3601+rOz4LF+SZLTkUHV9YrZJCAyOV/EqLkkvoOz6rOlIMVZxIDRoT9XXXQ/F9feK2eaUwNySiJArOxQdn7Ljk45a+EHIcNmh6tW/e9UL6E7H8AKougEY0J6Kka95jJQcTMPAMOpBXmafTpBFREQWmXzVZbRcL18wz7LnbxiGDJccOlLRk/YPdv0A1w9JTpQbtCUjXNbfQmwi5CajJrZZr/+1LRPTrAfq81oTrO1IAQYG0N+SIBmxGmUZUC9duHZVOy0zUJd7POAuSUTIxG0G8zVGyi57Rsqk4zZhCLmqS182TkcqShiCbRmNkL26PUV2IrjHbZNU1MacKGHJxCzyVY+OZJTWRIRk1CJfq/dg3tCVpjxRrpGN22TjFhgGJpCMWnSkYjh+QNHxKJ5ltw05cwrIIiIii8z2gTwvHitxvOYY6kH3sf1jPLDjKEcKNaquzzOH86/4Pv++c4ir//wHfPvF4ZOeHgdhyEC+xlCpRqJRFmFNuUGtJR4lG7cbNc/18oOQ3myMznQUg/q0vvr/6kE6MWlq3+Ra6emUilq0JiIkohYr2hK0pyLUvIC+ljgX9WQxJoLw2s5U4wQ7Pqnt3fIlSc7vzgD1mu7zWuKkJp6XjtqUHJ/uTIw3rm6nJR6h7Pgsa01wfld9CEsInNeaZE17Ct8PyMYjWKZB1DJw/JC4bXGKyhGZBTq3FxERWUTGKy4jZYclyQiT7xb75o6j/OG3dwGwrC1BazzC04fzvH1DF//9TatPKGP4951DfPKhnfgT79FxknKG8arL0mycvWOlU5YCpGP1yXbH659t0yAesYjZ9Q4QS1tijVKFiGnSnozSlZ75KX0Ry2TT0iwt8QhR22So5DBaLrG2I0VXJkbMNPDDeqcKyzRoidu0JE69rvUTYRkgHrGIR62J+m+LmG3g+AHxiIVpGrQmIgyVaixJRrBNA3viex9fl+MF9LcmGCs5eEHY6C4is0cBWUREZJHwg5CnBvO0xm0qTjDlpruvP3OEVNTiymWtPLx7hANUAPjW88ewTYO3rO3gJy8Nc9MVLcQjFn/4nRdZ2hJntFSvpe142QmyH4S4fsiKJQnGq+6U09XJDMNgw6Tw2JOJ099Co1zjwt5mP2XTNLh6edspb7qbbpNPupNRiyBk0o13FpWg3h4O4MplbVNqmF9JNmbTnY4RnXivqGXhhzSCbl82Ttlt9pmO2UbjLygRy8A2DVpiNsmIxe7hIp2p2Gl/tkwPBWQREZFFYqzsUHLqPYp3DhVZtSTJl360n58NjLNvrML1azu4aiIgA3z6bet5ePcw//nSCN+cmJL31WdGuW5NOxU34H+9dR23/9sLFB2fC3syUz4rV3FZ15miOxPjquVtp92/d2X7K98sOFvh+OVSUZuoZRCdCK3xiIlnGY1pg/ZrKPU4HvSPh9q4bWJNaq23tDVO66RJhKlY86bGiGWSjNq0JSO0JaP4QcDgeH2KYH1ioKpjZ4N2WUREZJEYKjbHQ6/vTPOvzx/jL358gCcOjVOoeXSnY/Rl443n97XE6M3Wp90B/MqGNmK22QjQy9oS3PbG1fz8+Z28ZV3HlM/yw5DebLw+KGMRDLdoidusak82O1HEIyxtiZ9xYJ984huLWERto3GCbBjGlJKWK85rbdyIaJv1tnaZicc70zEKjk8yajFe1Rjr2aITZBERkUWi7HqNE8/B8Sp3fHcXmZhNoVYPwN2ZeiA+rr8lQU+mWWbwi+taOFgKeexAjkTEJBuzedPqdt60uv2EzzIMTmsK3UJxvI/zcR3pKH19J47TPhPZuE1rPHLKWuLJ3UEMw+CK81obwTwds7EMg/ZUhIFxdbWYLTpBFhERWSQmj4t+aOcQQQh/fdMljcd7MjHakxHefWEPb1vfSXsyQk+2GZC7khH6WuKN556srRvU648jpjln5RALTSJi0dcSb5RvvJrJ+5qIWLQlI2RiEdJR+7Sm8snZ0wmyiIjIIlH1Alomps7tHinR3xJnxZIkyYhF2fU5vyuNYRjc/pa1jdesnqgJjk8MuzhegpE5xXAOqAfk42OW5fSs7Uy/+pNO4fL+FiKWSanmsX0wz5qOlDpbzDAFZBERkQXuSL7KQL6K5weNwSBDxVqjXdrf/uqlJCf6/r7c8rYkX77xkoma2TKvX9HGI3tG+e3XLz/pZw3mq/hBSH9r/KSPy/RLTrTQS8dsOlJRXD/ANhdPect8pIAsIiKygHl+wHNHCxM/GeweLvHHD+/m6cMFrl9Tv7FuWVviFd/j4r4sALnhMus603x5UlnGyz8rapmMu94p27rJzFnWliBXcRkruxwqV2lPRqaM0p4sDOvNpQ3DwA9CKq5/ypHdc6lY8wgnN+yeJ/SnW0REZAF77mgBzw+peQFeEPDBf3iKJwfy+EFI5zQO3PD8gH1jFfpb4sTs+rAPmV2GYZCKWYzXXFri9Wl9pzJSdjk4XiUIQ8YqLlUvoPwKz58L3sRI7XzNIzXP/jwpIIuIiCxQNc9ncLxKRypKoerxk4M5ipNC0MnGQ5+psuuzfEmStZ1putIxejMqsZgLCdui4gQkItbEX4rqp8OTW8CFYUgQhixtiVOq+YSEnN+VZqziUqh6eMH8OLEtuz79rQnevKaTFe2puV7OFArIIiIiC1Rhon8xwPK2BF/60X7WdTSDxpqOE0NHEIY4Z9AJwfFD/n/27jtAivJ84Ph36u7t7vUCHO3oVdohcogKIvaCYhSjUWOiRmMSY4ktRk2iRE1+GktUoqgkCipWLFjQU9FV9KiKFOntuF52b3en/v6Yu+WOOxSkHeb9/AO3Mzs7O7d788w7z/s8BZkp6KpMUUEWwXZ4u/5/ga7KSBJkB3VCPoXKqMH2+gRVDSaRxnJ+VQ0m3TNTKMgMELcdQKJjmo++uUHils3mmhg1sYNfUzlhuXQI+Uj1t7/PUvvbI0EQBEEQdkuDYaM0TspbURZhe8Tg10f2YEttjG/KIhzRLaPF+mURA9txUGSJdL+GLHm34vNCenJy3664eO2YhYPLryqEfApZAY10fxpfbq4hRVNQZAnHdamJGY2jxyloioTrukiAKstkBnTWVjaQ5tdwXBfLdvaoQ+C+4rgusiTh4u4yh/pgEwGyIAiCIByiooaNqniB7dJt3kS9ou4ZZAbyWqwXSVioioSmSBzVM4e1lVHK6hMYtkt+mo/SSIK8oK/V9pt4E77c3a7jK+w/qX6VnKAPXZEJpigokoQtuWQFNHrnBPlsQzUSXv1kTZFQZRnHdVFkr5Of5ThkpGjkhXQWbKqhR2YA/QBOuKyLm1TFLPIb62y313KB7XOvBEEQBEHYJdf18k6bd86riCbwKXKLUm6O61IRNUjYLpVRk5BPJeRTG9sWW/TIDjAkPx1F8kYfm57T3La6OBtr4uCCJgLkdmFUtwxCPhVJksgKaDQYNv3yQmSkaMiShCzLjakYEqk+NVkzWZUlDNsloHuNS7plpBA1LDbWNBywfY9bDn1zglQ0GCgS7faiq33ulSAIgiAIu1RaF2fBxmoaGjvnxS2b8ohBTlBv0f2uLm6hKxI9slJIWA4h3TvtB3UV03HJCugoskSKplAXt9hc4wXDkYRF1LDYHkmQoisoMqiK3FgrWTjYmv+Oc4I+1MbRYUnyfpfZgR0JAqn+lgGyIksENIWArtIlI4X6hO2V7oubrKqItLpA2h/73js3mPzc7apb48EmUiwEQRAE4RCztrKhMfiVqYgmuODZxQAMbaxn3MSwHQ7vmoGqeBO7Qj5vdFmVJTL8Gqk+L/8zRZOpjBp0zfCTmxtkbUUUn6YwLD+dnKDOB99WkNJOb4X/r8sKaKT61eTo/ogu6fiapUyk+hQiCe/33JRmEWzMJferMg2mTX56kITlkBf0EU3YRA27RQvyfcVxXSTJe11dkdttegWIAFkQBEEQDinLt9dRHTdJWA6G7fLA/PXJZTk7IdwWlQAAIABJREFUlXWTkAj5VFwgza8RagyMQj6VPrmBZIe2FE3BtF06pPkZ2DGVrbVxXCDkU9BVmaCukL0PS8YJ+06qT6VDyJccJd65GUiX9BQ6pHrBrto4OTMz4F0oaYpMSFfokxskK6Dz5aZqttTECflUooZFUN+3YaJpu4R0b9TYr8rtdoIeiBQLQRAEQThkxEybDVUxOoR85AR01lZGWLCxJrm8Vd1jyZtYl6IpHNEtg5yQFyilaAq9ckLJ1fyqgixL6Ip3m96nylj2jkl5RQVZ9M9L3f9vUNhjkiQxqFPaLlMVZFnCp3qBqKrIDOgQSl4YqbJEdlAn3e8FzD5FxnAcsoM6NTGLFWURAMoiib1KvXBclxVlEQzLIdT42n5NJkX9HwyQL7nkEvLy8hg8eHDysdtvv53OnTszbNgwhg0bxptvvplcNnXqVHr37k2/fv14++2399duCYIgCMIhq8GwkQBZkkj1q0xfsJmCzBQGd/SC13G9sgGvakVNzCSlMfAFSG82eW9nKZpCiiajK17AEtC8vOOmAFnkHv945IZ2pE6k+lSG5Kclf78+VUGWZDqleU1gQj7Fq5ntwuryKHHrh3XiazBsr/OfaZPWWPM4oCmktOOygfstQL744ouZO3duq8d///vfs3jxYhYvXszJJ58MwPLly5k1axZff/01c+fO5corr8S221c7REEQBEE42MzGpg8AW2vjrCiLcMbgjtx+fF+uH9eLwi7pje17bSqiBkHf7gUg2UGNMQVZaI0l4xRZIqiryeBa+HGSZYk0/44LJ78q41dlsgMa2UGdFE2lLmGR1piWUdfYmCZm7jpGi1s2UcNq8VjMskn1q95E0cYUkKyAnsyFbo/2W4B89NFHk5WVtVvrvvrqq0yZMgWfz0ePHj3o3bs3CxYs2F+7JgiCIAiHnLhpY1gOTTHrmsooAMPz0yjICnDusHxcoKLBpCDLq20b1HYvh9SnKi3Kww3oEGJ098x9/RaEds4BgrqCqsgc0S2DFE0mYTn4NZmg7pWVi5k22+sTmLaD3UbL6vKIQU3MSra7Lo8kMCyXNJ8KkpfOA9Axzd8iOG9vDngO8kMPPcSQIUO45JJLqK6uBmDLli107do1uU6XLl3YsmXLgd41QRAEQWiXKqMG4fVV1CXM5O3wiqgBkMwrBu9WdsdUr6VwUFfJCf2wiXUBXT2gzSOE9sErEed9ZlRFxqfI2K5LbshHj6wAuF5zmrxUH+VRg4oGA8t2qImZWLbXvtyvynRO91GXsGgwvJHjwZ1SyUjRSFHlQ6YaygGtYnHFFVdw6623IkkSt956K9deey3Tp09v7NDT0q6SzadNm8a0adMAKC0tZevWrS2Wl5eX7/sdP8SIY7CDOBY7iGPhEcdhB3EsdmjPxyJm2qzYHqE6ZtIQ0HBsh2dW1bJgqzeCrMaqqUl458yamEladoDy7Q3I0XpiNQZb63Y/TaI9H4cD7X/1WGQDW7d6k/NiNRHMiIFt2yhBnURtNQnboWNuKmmay7flUda7kOZX2ZAwSfdpJCybVH8qq7bVYDguh3VMxZ9IsL0+gRY3KNt+aKTQHtAAuUOHDsn/X3rppZx66qmAN2K8adOm5LLNmzeTn5/f5jYuu+wyLrvsMgBGjhzZ5nq7eu7/EnEMdhDHYgdxLDziOOwgjsUO7fFYuK7L/HVVENTJSZPwKRKvf7OdJ5dUAl4N3Jy8jsn1zYhBQdcMMgM6P/TttMfjcLD8rx+LbXY1BG06BAzy8/PpZKZQHk0wsFceluOyzakAV2JC3xxWlkXYUB0jN0Wjb48s9PQcNlQ30K1DKjkhH50aB0Pba2OQnR3Qce5t27Yl///yyy8nK1ycfvrpzJo1i0Qiwbp161i9ejWjRo06kLsmCIIgCO1O3HKIJCyvaYPrsqIsytNfbE4ub1732HVdaMete4VDT6pPo0uGP/lzpzQfIZ/XlMSnyLguyLJXTzkzRSNu2snKFAVZAYq6ZyXrZ0uSdMgEx7AfR5DPO+88iouLqaiooEuXLtxxxx0UFxezePFiJEmioKCAxx57DIBBgwZxzjnnMHDgQFRV5eGHH0ZR2u/MRkEQBEE4EAzLoSmkyAnqPPzJehpMmzHdM/l0Q3UyQN4eSRA1bFJ1JdlRTRD2Vt88r1b21q11AHTJSEkGvF7dbK9DI4Cuyliui7/Z5+9QzmPfbwHyzJkzWz32i1/8Ypfr33LLLdxyyy37a3cEQRAE4ZCSsGyvrFtjBGI7Lh+sqeS4PrlM7JvDpxuqubCwC0BjUw9vhK6pVJsg7GuSJCWbjICXexwzvcl5qiwhI7Xr2sZ7QrSaFgRBEIR2JpqwKNlcS15IB7zcze0Rg6hhM7xzGkXdMym+ooiQT6UyapAV1KmPm+iqfEjdxhYObZ3TU5LVVDRFRleldt0+ek8cumPfgiAIgvAjZDsun2+sprQ+QW3cQpEkXNeltD4OQF7IhyRJhHwqtuNiuy79c4NoitfkQRAOlPx0P0Py0wBvBDkjRUt2yjvU/TjehSAIgiD8SFQ3GCQsh4zGzmNx0+G0mV9QWp8AWk7Mi5k2HUI+ckI+AppC14yUg7Xbwv84nyrTIyvwoxlBFgGyIAiCILQjqyqihHQV03Eojxo8t2hLMjgGyG3W/CNuOfTI8n4e2TVD5B8LB40kSXTLDBzs3dhnxL0YQRAEQWgnHMelLmYS0BVSfSrfbK/jhaXbWqyT5tsxtuVCclKUyD8WhH1HBMiCIAiC0E4YtgONhd1kSeKtFeV0COk8dObg5DqSJBEzbdZVNYDrirrHgrAfiBQLQRAEQTjIYqbN5xuq6Z0ThGaDwMu21XN83xwO65TKmO6ZXHlkAQC1cZPUxkl6h3KtWUFor0SALAiCIAgHke24rKtsYFtdgjS/lnw8btrUJyw6pvoJ6ioPNI4iV0QNumSkYFgOZRFDjCALwn4gAmRBEARBOIhqYibfVkTomKrTYFg4jsvNb67g0/VVQMtJeY7rIgGDO6axviqKaTsossg7FoR9TQTIgiAIgnAQVTUYBDSFgKawtT7BZ+ureWdVeXJ58wC5wbDJTfWhyBI9s4P0ygkdjF0WhB89cV9GEARBEA6iygaTFE1BVWQSps0/PlzTYnleyJf8v2k7pPq8qhWiYoUg7D8iQBYEQRCEgyiSsNAa84jfWlEOksR/zhuWXN4x1YfrupRHEliuS1AXN38FYX8T3zJBEARBOAiWl9YBEpbtJvOIl5XWcVjHVPrnhRiWn8ZxfXKQgKoGE9t1sR3QRM6xIOx3IkAWBEEQhAOswbBYW9lAeoqG2yzeLYsYHNYxFUmSePycoQCsrWxAVSRygzrb6xPJ0WZBEPYf8S0TBEEQhANsS20cicbGIC5MX7CRM578gi218RaT8gBSNJlOqX7yUn2osiTaSQvCASBGkAVBEAThAHIcl821cbKDOtsjCUrrEvzr0w3J5bnBlpPyQj6VI7pnsLkmTmZAJ0VTDsZuC8L/FBEgC4IgCMIBtLU2Tsy0SfOpuC7c9vaqFsvzmo0gm7ZLyKcgSRL56X7yUnVRvUIQDgCRYiEIgiAIB1B1zCCgeqPAayqibI8k+L/TByaXd88MAF4DkYRlE9S8sSxFlvCpYvRYEA4EMYIsCIIgCAdQzHRQG/OIv9hcS0BTGFOQxaTBHVEk6JMbJJKwiFs2MdOhb64IigXhQBMBsiAIgiAcADHTpi5mEjNtfKp3A7c8kqBDqo4qS/zxuD4A1MVNFFmmW2aAZdvq8IucY0E44ESAfAhYWxGla2YKiiQRMSwCjR2XBEEQhEPHsm11RBMWhuNi2g5PfrGZlWVROqf7W6yXsBxGdk3DBdZUKOiq+HsvCAeaCJDbubhps7I8AhJURA0qoga40CM7QN/cEKbtiNEFQRCEdu6Bhx/h6WefZ+zxp3DiOT/jmjnLWb49AsDQzmkt1nWBVL9KzHTIDflI84lTtSAcaOJb1465rsvq8giG7bCyLEJAU+gQ8lqOrq1soDZmYToOR/XMPti7KgiCIOzCtGnT+N1VVwKw8NNi1hgBlse7JpfnBXdUrXBcF7VxMp6uyBzeNQNZdM4ThANOBMjtUF3cpKbBJGbZbK6N0znN36KsjyQ1dlSKJHAcl+oGg8yATjgcpri4mEGDBnH66afv1T44jovtuqJjkyAIwl56/oXZLX5+tyaNnvkB1lY1ANAx1at7bNoOluMS0L27gpIkoasiOBaEg0EEyO3Q4i11NBgWiiyRmaK1WfNSkSXy0/zETJvFW+vQt69i4sTjMAwDTdN4//33KSoq+sH7sLG6gc21ccaK0WlBEIS9cuJpk5j33rveDx37YPjTuXBkFz5cW8kH31ZyfL9cr6Sb7RA3bXpkBw/uDguCIALk9qYubhI1LPJCvu9fGUjRFOojCd5/730Mw8C2bQCKi4t/UIC8vjJKVYNJvWFRVm/wydpKDstPI82v7fG2BEEQBMjq2puxE0+iuryMLqdfydsRGNUtgwl9cogf6/3Ntl3okRVgydY6gmJeiSAcdCJA3ktNaQ3jxo3bqxFb8NIalm2tI7CHfxwDmkLBkMPRdT05gjxu3Lg92obtuKyramBlWT2pPhXHcemZHSBqWHy6roqh+WnkhnyieoYgCMIe+OCjj/nVlNOwTBNV0+lxUUfkqE12QEeRJVI0hfKIwdDOaYR0lZVlEUI+ESALwsEmAuS9EA6HmTBhAoZhoOs68+bN2+MgOW7a2I5LzLRZXx2jLrH7o8dNQj6V/P7DeHHOW5R89glDDhu8x/vx6rvFvPLWuxx99DF0PPyI5ONBXUWTZb7cXEu3zBSG5qfv0Xa/z768wBAEQWhPwuEwv//9NZiGAYCZ2ZVFqzeSnd0DpdnEOxcI6gp+TSYv5CMnuGfnAEEQ9j0RIO+F4uLiZFqDYRg/KK3hi001NBg2pu0Q0tVdBseu6/LMoi0ENIXj++YS2qnsz5plJSz87FOOHT+OkYUD29zGrnz48Xx+OulkTMPk+cfu55GZrzCkcFRyua7K5Kf52VITp1tGCpkB/Tu2tvv2xQWGIAhCe9T09y0Wi3kPdD0MfnInW4ABwZZ/QyUJfKqMpsgc0T2zRfAsCMLBIe6X74Vx48ah6zqyLCNJEtnZ3z+hLWbabKmJsa02xpIttdTGTPyqTKc0P6n+1tcr66saeGbhFq58aRn3f7SOu+Z9y/nPLOLbimhynaUlC7juorN5+p9/45fnnMYXX3652+8hHA5z859uwzAMHMfGSMR5Y/asNtcNaAprKxt2e9vfp60LDEEQhB+Dp59+mng8vuOBop8m/5sT8gJk13VxXBdw0WTvdCyCY0FoH0SAvBeKioq4//77URQFx3G4+uqrCYfDu1zftB2+3lbHl5tqWby1jpqYSW7I12o0uMnUeas5e0YJ9320li21cX5V1J0/TexD1LS44NlF3PTGN6yvaqAkPB/T9AJc0zR56/2Pdmv/P/nkU46dMIHwh8W4jgN4f7Bfee6/LC1Z0Gr9kE9heyRBdYOxW9v/PuPGjUNVVSRJQlXVPc6bFgRBaI/C4TDTp0/HdV0A5J4jocug5PKmsm6bauNsrImhy7KodSwI7YxIsdhLlZWVOI6D4zhtplmYtkMkYdFg2Kwsj2LZDl0y/N+xRS9IfXFZKS8uK2VIp1T+ML43fXODyI3l3o7qkcX/fbSWt1aUs6mskoFbNqMoKhKgajoFg4ZjO+53jkSEw2Fu/OOtJBIJXNdpscy2TGY88gCDho2gsGhsMt1CkiTSfSolm2sZU5BJQN/7j0/TCaTpX0EQhEPdPffcg2mayZ/TJv6CYLqfUV0zePmrUs4Y1BHTdghoChHDFt1QBaEdEgHyXsrOzkaWZRzHSaZZxEyb2phJg+FNvIublhdc+jV8baRRNFfVYHD726v4dEM1R3TL4J5TBxDcKRDNDOj85cT+5FrVzPjWYuXaOCouRx13Itm5eTgurC6P0r9DqM3X2Dk3TpIkkKTkKDKhLIoDIyie+yXqA//HtJkvJYNkv6Zg2A4LN9dyeLcMfOoP/8NeXFyMbdu4rott2z+4NJ0gCEJ7EQ6HmTNnzo4HfEFqA504s28uFx/ehdMHdaB/XoiySIK+uSGWb68nRRcBsiC0NyJA3gvhcJirr74ay7KSQd7vfnc1kdTO9B82ElWWSPOppPu/e8S4yRebavjjWyuIJGz+ML4XZw/plBw1bkvq+jB8a+MOPw1ryZvMn/c2juvy+gsz2bptGyG7gTNOmtgq6CwuLm6RG+e6LrIk4+b1hP7j4LCJ4AtCz8Oxeo7kn3f/lSeefy25fppfoyZmsGRLHYd3y2izkcnuaMrhbpqkJ1IsBEE41BUXF7e4IyYNPg5Xkjm2dzZBXeWwTmlEEhYZKRo9sgKsrWwgTZR1E4R2RwTIe6FpklnzNIF4PMbd11zGL393PWedf/Fub6syanDHO6uIWw73TxrE4V0zvvc5hUVj0Z75LWaPkXD0z7HfeQDXcTBcl8f+ehOO4/LPe//G++/vqA7x8fxPWL12XattOf2OgolXgarDio/gi5eg50g48gKW6Clc+esrOW7MKGqrq5JpF9vrE5TWxemUnrLH5dqa1r///vuprKwUZd4EQfhR8OZWaBhGAknVyBh/IV07pDKgQ2pynQbTZmDHVGRZYmCHEHmpoqybILQ3IkD+AcLhMDNmzKC0tBRVVbEdB5qNGJSVbuWum37PWy+/wG9uuq1FyTTwqk6UhOdTWDSWvkMKmbN8O9MXbKIuYfHQmYMZ3rl1reHmz2na3pDCUTz20AM8PH8dJQOPRV23AGf1Z7guydQFwzR4/vW36T+0kPeKP+Znk0/FSBi0yPjt1A9OugbK16G+eQ9ubRm2ZUL5WqgtheN/xwKpPwseuhVp2zfouo9HZr7CgGEjWbS1jvBnn3HBmafsdrk2Ud5NEIQfK8t2cHGRJAm550iqHY3rh3VusY4kSfhUb45854yUg7GbgiB8DxEg76FwOMy4ceMwGgu/K4ri5SA3tnhubtGCT/nl2Sdz41//nhxNXlqygMvP9boqyX2KsE+9EYAu6X6enDSUvrmt84aXlizgivMmYZoGmqYn6xQvLVnAG7Nn0VWS2dp9EttPuQFp1h9wtq6Cxj/QiqLQ47DD+WxDNXPemecFx42T8mRZpv+QEVQdfwNxGX7SsYqix6cD8ODUO1i04FNvNLliI0y5GyZcjjvrRkwjTkl4PkMKR5Ed0Hlk7nskEo1l4najHvS+qB8tCILQ3kybNo2/3X0Plml6aXfDTieEwbG9W5YAlQBNdCUVhHZNBMh7aMaMGcngGLyR2u/KwXVsm3tuvZ7e/QcypHAUr8+ehZmWD92GYo8+B8W1uPPUwYzrlYO6U9WJplHj0q2bvTJuto2JQUl4PgCXn3taskOTmvE68sX/whpxBmy9B2iqDCGR6tcoXbmETd8shZZjx+QedyHLLR93ntSPE/odlXz837Pf4KVnnuLV5/7DimVLsOdMhcl/hsIzcMIzqa+rY+pN14AEDZEobuN2JUkimJbB5xuqObxrRrJ0keO4yf83lXdzHEeUdxME4Udh2rRpXH755Tse6F0EXQYxqZeK2hgMl0cT2A4oMmiirJsgtGsiQN4D4XCYxx9/vMVjiqIgKyqObSErCj1692PV8mUt1nEch5LwfNxO/Xmpw5lw4Znegk3LSF8ym7q8C1H7XNziOc1HjRVFQVFUXNcbFVaDaY21j3eUEbJry+jbsJaVfcdCt7mwcan32rbFG7Nn8doLzySDaQBJklE69eULuYCR+ekc3ze31fs96/yLOev8i5l68zW8+N8n4dswFE6Cb4qZ8eg/2zxGlmVx3TVXc8wHYS75+YUccUQRDaZNRdRgSH4aGX4NEOXdBEH4cXniiSda/Ow/4kwCPvjNKaOBpqYgNP4dl5NBsyAI7ZP4hu6BprJkzU2aciGPPfcav7r2Zh57bg7Pzv2I6S+/zbjjT0FWVDj8LNyTr+MNaRCXvbDEe1J4Jsy6AV64hapVi7jrpt/zwF23t9husvmHbWPbNqOOPhZZknBsm3/deQvbK6ta5D0rqso1JxxGuga5p1yJpvuQZRkXWLjg0xbBNEDhuImkX3QPQZ/OzRP6fOcoeL9BQ1AUBd7/NzgWnHwtyLuedW0aBu+9+B9+NukkHvzXI5RFEuDC5xuq+XBtJXPmvoe1U3k3QRCEQ1U4HGbhwoU7Hug6hHiH/kwp7J6sR18bt8gO6OiqIkaPBeEQIEaQ98C4cePQNC2ZYqHpPk45ewpDCkclJ85FEhZ614GcetM/qSz8nGWJVFxgfXUVfeQtrJ55N9SWtdr2f6c9SJfuBckqEYVFY9E0jYTj4DoOa75alAzOTcPgq0/eb1F/+YxzLqDw8CM4fuunvLAun6MuvY1PH70V27ZZt3pli9dSNY3o+KuorHH51+R+dMvc9SSRpSUL+McdN+O4LnKsmpyvXqZs5IVwwf3w7HVgJXb5XNuyeOgvNxHQ1eT76ju0kKicgiRJSLKMqun0GjqKl97+gBUlYcaPHy/ykQVBOKQUFxc3toz25E28iIRf5fwRXYDGCkeWw4guQb4qrSdtF91TBUFoP/bbt/SSSy7h9ddfJy8vj6+++gqA66+/njlz5qDrOr169eLJJ58kIyOD9evXM2DAAPr16wfA6NGjefTRR/fXrv1gRUVFFBcX84+H/43pOEw656ctKlRUNRj87NlFbI80TuAjCIvfgA+fQMGl84QTWd1GcAxeju49t16P47pomsZd02dzxgW/5PnHH8IFSktLW6y/YsU3yQmCqq5zytlTWFqygFf/cA5Muo2Ps3pAhz6wdUWr13I79OGbGpcrx3TfZTk513VpMG0++fgjTNPAdRxkRWGgP0bZB/+G8ZfC4WchffYcRxw1jgXzi3EcF0mWvLSJxpOF3ZiD7b0vnWtvu4tH7roF2/JSUq64+c+sqWzgT788G9s00TSNue++x/ijj2pzvwRBENqbo48+Bk3TsADFl0JDTh+OKshKVqqIWw65QZ3MgM6IzunJxwVBaL/2W4B88cUXc9VVV3HhhRcmH5s4cSJTp05FVVVuuOEGpk6dyt133w1Ar169WLx48f7anX2mqKiIm7sMIGJYBHWVLbVx3lpRxtel9XyxqYa45XDm4I6M7p5JoHIN1/1rBhYuqqaTnZeHJMtesCnLDB05miVfemXZZEXGbhwtTtg27z37GFZi16Oz4AWfqqpy7W1TKRg0nBcffxDLiMNb98HP/gnnTIVZf4DS1TuelJqDffL1BDGYPKRTq2025cnVxEwURaJ/4Wg0TcfC2PEe3nsat1NfKDqPo/vl848//zFZUeOV5/7rlYhrIklYlg24WBjMfOLRZC60Y9tsWrmcjSuXYzU+ZhgG9z78OF0GDKdPGxU9BEEQ2puCQcO5a/ps1i7+HKNXEf9eaXFCvx3zOqKGTZc8705dUIweC8IhYb99U48++mjWr1/f4rHjjz8++f/Ro0cze/bs/fXyB0TMtPnNK1+xsTqGX5WZ0CeHC0d2oVd20FuhTw7X3nYXrz73H3I7dKLfoCHoug/L9ILN39x0GwBvzJ5FZUUZH703N1lj4q3X5zBs2LAWrydJUqtJba7roptRYpbDiNFHomk6Zn0ZyvM3IP3071jn3EnHTx9j6+aNMOIM6DUKHJsbRgRJb5ww16TBsKlLmPhUBU2VKeqeSaZ/LFOnv8C3iz9nZNFYAK8Sx7xHcLoO4Zv8Y9hWF2dI4ShKwvNxbKvlPkOywoULrF+7mp1X2DkbL0WTWVUeIaQrdEzzUx4xyAnqySoYgiAI7YVlO6wsj1I0uoijjxzDBc8uokeWxpiCTGDHoENeSD/IeyoIwp44aJey06dP59xzz03+vG7dOoYPH05aWhp//etfOeqotm+xT5s2jWnTpgFe2sHWrVtbLC8vL99/O92osqyOjzbW89SSSjbXm/x6ZC6n983wJmO4EWoqIgAsX7KIe/90A6bpjY5+PO9tRo89hszsHI4/dRLdundn+ZJFvD57pjchz2kZ/C5evBhVVenRowe9evVi/Pjx3HrrrckcaFmW0TSNEUMPI2jUkt2pC/c+Mp0Fn3xIbodOPPTv63DOvJ2tR/8OHNubWLfla6b0VBkzcDg1FduTr2U5LtGETZ/cINlBHdd1qSrfTo7kMuqwvnTu1h2fKhHSVe59ZDqLSxaQMcDPtE0yp03/guN6pHJq/4GoqpZ8v7Ki4NhO8jV2rhUtKwrHTPAuml57/hks00TVNMYddwJqrIb5X1XgV2UihkXvnCD5af49bmt9ID4PhwpxLDziOOwgjsUOP+RYGJbD+uoo1VETN0VjcWkDK8uj/P6IPOoqvXS6BsMmoCvUVFjU7Oud3g/EZ2IHcSx2+F88FgclQL7zzjtRVZXzzz8fgE6dOrFx40ays7MpKSlh0qRJfP3116SlpbV67mWXXcZll10GwMiRI8nPz2+1TluP7StvLN/Oje+X8lVpPR1COo9OPoyRu8jjXfnNcqxm6Qa2ZfHph++j+/ycdcElZOR0oGTJMkzTxHGcNrfhui4///nPuemmmwA46qijKC4uJjs7u0WL5mjC4pN1VQwZexwDhw7n5VnPYFduhGevRep7JN1HTWB0KMLxUwpbdfZzXZeySIIxfTLomOZvtQ/dukBFJMEXm2rICPkYM+FExkw4EYDCsgi/feUr3ltXz9rsXO546lXee+cdFGwK+/Xg3j9dj40MVvMScxKyonDDX+5Nbuex5+ZQEp5PemYWK79ZTigjiyGFo0hYDlm4lMcssn0heuYE9+C35dmfn4dDjTgWHnEcdhDHYoc9ORb1cYtvttcT1TS6dtZxgRnzlpCZojH58N74Va/SjxFJMKxbJtnBQ2cEWXwmdhDHYof/tWNxwAPkp59+mtdff5158+YlRwN9Ph8+n9eLvrCwkF69erF0HB4TAAAgAElEQVRq1SpGjhx5oHfve31dWk9ZJMEvR3XlwpFdCei7LndWWDQWVdNa1B92XRfLNPgyPJ/OA4YxeuzRPPfYfSTi8RbpE7IsI0kSuq63aKRRVFTUZpWHoE9leJd0vtxUg9742pqmYzVUo379Dn/645WtAuMmFQ0GPbKDbQbHTbKDOlkBjfq4Rap/x8emX16IuZcewatfb+eeD77l5hIXsscDML9WpuM1z7IloUD1NvjiRVj5EcPHn8Svf30VQ0cekdxO075dfu7pmEYCWVFadCDUgjIryiNkBjQyA4fOiaZJOBymuLg4eUEjCMKhqy5u8sm6KlRZpmOqd+6au6KMpdvq+fMJ/ZLBcX3cItWnkpmifdfmBEFohw5ogDx37lzuvvtuPvzwQwKBQPLx8vJysrKyUBSFtWvXsnr1anr27Hkgd223XT++F8f1ySFiWN8ZHIMX9D323BxmPPIAG9Z9y6b1a3EdB1XT6DnsCPLT/Pjyglx80UWUlpby1ltvYVkWuq5z//33txgh3h3ZAZ0UTSFSZzOkcBSPzHyFkvB8CovG7jI4ro9bpPu1NltcNydJEgM6pPLJuiqCroLcLNVBkiQmDe7IqK4ZzF9fxeryKKk+lZhls2xbPZRFIL0DnPR7OOG3LJQV/luaSsf6BB0aTy4Ab7w4C9PwJiY6ts3Um68BvIYliiyR7lNZsLGGkE9lTEHmHqdbHCzhcJgJEyZgGAa6rjNv3jwRJAvCISqSsFi6tY6AphBqnHAXSVhM+2wj3TJTOLH/jsl5MdthbNcsMX9CEA5B+y1APu+88yguLqaiooIuXbpwxx13MHXqVBKJBBMnTgR2lHP76KOP+NOf/oSqqiiKwqOPPkpWVtb+2rW98kOCsvBH7yc74k2cfD6nnj2FKadMYOWSEk464fhk4PTAAw/scVDcnCxLDOuczntlXkm45vWZ21ITM0lYNkM7ZyWL2X+XNL9Gr5wgayqj5AV9rZbnp/s5Z2jbt2Be+O9TvLhgJaGBY1lHFh98W8k32yOcMiCPqu1byd28gMryliXwXNfl7j9el2zT7dcULMelPJKgJmYeMiPJxcXFGIaBbdvE43FmzJghAmRBOMRUNRisrWxge30CRYbcoI+lJQsoCc+npnsRG2ssHpl8WHLwIGpYpOlKiztugiAcOvbbN3fmzJmtHvvFL37R5rqTJ09m8uTJ+2tXDjjbcYmZ3sSMjz76ENMwcBxvglr/3j244uwTkSSpReBkGAaVlZXJXOMfKt2v4lfl5MSQXTFtB9N26ZYZIGMPbv/1zg5S3WBQEzN3+3lLSxZw/59vxjQNtLlP88jMV6DTIP7+4RqeWLDJWynSA2XFy16lDkn2JhXilbKbdt/fuOz3NzKkcFRyxGZFWYTR3dv3KHKD4VX0GDduHIqiYDd2D3zyySe58MILRZAsCO2YZTtsqI6RG9IpjyRYWRbFp8pkBzQ0RWZpyQIvJcw0kM77O5179m1RVz5q2IzunnkQ34EgCHtDVCvfx2rjJpvr4kQMi9L6BMdPGI/Pp6MoCj5d5yennpAM6saNG4eue8t2zjX+oSRJom9uiIhhYdptT/wDiJsOndN9DO6UtkdBpixLDMlPR1NkqmPG9z+Blm2zLdOgJDyfIflpzDhvOOcpy5DeewhwsSf/Fem3s+Hyp2Hgscnnfz7/Q644bxJLSxYAEPKp1DSY1MTMXbziwVPbOCq/eEsNxWsq+fdL7/DEk0+1mNxgGAa333474XD4IO6pIAg7S1g2juNSWhfn8w3VLN5Sy0drKvm2ooGcoE5GihccQ7OUsL5jcTv2oa74v7z0zFOAVxVIV+Q9GnwQBKF9Efd+9pG4ZVMbs0j3q/TPDRLQFNJTNDIHHUfBvHltTtAqKipi3i6W7Y2QT2V4djoLt9SS7lPxa61HkmOWTUZKoI1nf78UTWF090w+21D9vSPV0GzCYGOzkcLGesoAE8eM5KUH/4q5ZgHS4IkUnHgha+o1OPFq0oeNp/azV3GrtmDVl3mBdWPKSNCnsHRrHaMLMvGp3/36B8rm6hhfldYT9ClEDYvtK5dw/UVntpikCV7qyLvvvsvHH38s8pEFYR9zHDeZ8xtJWFRFDTICGmmNdd8dx8VxXdTGQNewHGpiJl9tq8esUUjzq9TFTdL9Gp3T/bgu6I2d75pSKgqLxnopYVoKHHMJbP+W+k9e4K75zwEw7syf0jUj0K7vcAmC8N1EgLwP1MRMYqbNyK4Z5IV8rSZk7KryxPct2xsd0/wMc+GTdVVkpKhkBbzaxnHLoT5hkZGikZfaOo94d+mqzIAOIb7cVLNbkxV3NWGwrWW24/LQJ+uYuRCYNBTiEeTXp7YIrIO6Sk3MYMmWOkZ2zTjok2AiCYsl2+oI6QqG5ZAb9PF6eD6W2fYot+u6GIZBcXGxCJAFYR+pjZl8XVqPYTv4GlPN6hMWKZpCr5wAdTGLiGGjKRIZfo2a+I47UY5tkxfSiZsOHUK+VsHtS888xT23Xo/d2AnVQYazbodQNsz5G7jeHbt5b77G2DPOo3tWygF+94Ig7EsiQN4LluMSN21sFwZ1TP3OMmkHQ05Qp1tmCmWRBOWRBJbjosoyfXODFGQFd2ti3nfJCuhkBXTKIonvvZ34XRMGd16myBK/O6onF4zowr/e/pI5GwNI59xJVu/DWjwvI8V77bJI4qAde9d12VAdY2WZ1/kv1KyNbFtl/prIsrzLtBpREk74sXNdF9N2sV2XlDbucP0QhuWwbFsdVQ0mAV1Gc6VkpYmEZbO+sgFdlXFdiJkOMdPGp8jkBnUkSaIm7lXnaeuCf2nJAu6+9Xpsy5tXYCPDqddCl8HwzoOwbWVy3SMmnEzP7OA+e1+CIBwcIkD+AWzXZXvEIDtFw68pDOoYJCf0w0dj9xddlRnVLYPSei+A9akytuOSvo/y4hRZYlS3DGrjFqvKImyujdEx5EveumzSdDJsuk25u7KDOreeNYZf1MY575mF/PaVr5l29hBymhXcT/OprK6I0iG19YjP7mowLGKmQzRhUR41qGow6ZUd+N6mJHHTZltdnK+3R8gN6qg7XXA0lflraiUOEMjIZswRI5Fi9YwfP75FABwOh5kxYwZPPvkkpmkiyzIPP/xwsjFO0zoieBYOZaV1cTZWx6hLWFi2y4AOIXKCOkHfDz8dra2MsqU2TsKy6Zze+mJZ1VX2tE/H0pIFye9u+fbSZHAMQP+joXcRLJgNX73LSZPOobqqnPEnnsYxZ55P90wxeiwIhzoRIP8AiiQxtFMafXKD7T7HTJIkOu3H0VVJkshI0RiSn0ZalcraqgZkycvzkySJFFXBsB2ipo2uSF4Kyh4es/x0P/+cNIjfvPwVFzy7iFuP68ORPbwygH5NoSySYNm2Oobkp+/Rdm3H5dP1VTQYFq7rvRe/KpPqU1hRFqE6ZqApCkPyW3d0dF2Xks211MXNNoNj2JGveMrZU5Ij5JbjUhk16Jjqo2f2jhzwplrJ8WYNYxzH4YorrmDNmjVkZGSQnZ3N1VdfLeopC4ck13VZXRFlVXmEFFXBp8ik+mRWlNVjO9Ax1Zs0vCcX0o7j8k1ZhBVlETL8Cpkp+6b0o1eh4rQ27/5QMAIm/Aq2r4H5M5AkiZ59+/Hzqx6jqsGgICvQ5rwPQRAOLSJA/gFG7KK19P8yv6bQv0MqBVkBFFmiPmGRsBxK6+KURQz65YaQJFhX1YBflQlqSquR5u8yLD+dBycN5rcvL+WmVxfxjzEhDh/ldeLLC/nYXBOnS0YKWXtQG7kublIbN8kJ6MmZ6U1yQzql9V7TEl2R6ZPrjSZXNRhoikxZJEFd3CSvjTsHTSNPr73wLLZtoWk6j8x8hSGFo1BliQ6pPiobDOoSFmN7ZKEqcrLkX/NuiuAFyffcc4/XnluWcV0Xx3FE/rLQ7jXd7cjOzmZbWTldBx9Ox35D2b5yCYs++yQ55yAn6MOyHcqjBiWbaxjZNaPV97EtruuyoizC+qoGuqS1vnO1N7wKFc2CY0WDEad51XWyu0HZGuTX/gqyjKb7kvMjLNdt0fxIEIRDlwiQhX2qaeSkKVDtlObHtJ3kCa9zut+7HVoTR5IlfN+Tu9x81rgMmM//CfPM2/n1E3N5XJGSI7PpfpXFW+oY2yNrt0ag6uImy7bVE9SUNk/GsiTRMdVP1LBYWxllQ3UUTZaJmjaaLGO7zi6D4yvOm0QivTOkdYKK9VgYLSpwNB2fygaDJVvrKOyawTHHHIOqqjiO49WCdt0WwbLruti2nWxB7rouNTU13/s+BeFAC4fD3HPPPcyZMwfHcZKfY1lRuODSq3juqWleTfTmF46KTE5Qp6rB5MM1lXRO99MvN7TLybfeyHE9G6tjdAjpP/hOXvO/L926d08+9trzz0Agw+sAmtEJDj8bcrpBQy0seIHTC/xMmvFsi8nFNTGDzBSN1L1IFREEof0Q32Rhv2segKb5NYZ1zqBXtoUkwaqyCKX1cWRZItWn4m9Wsq0p2Gw6mZ569hTsTctg4Ryc4afywacLkkGnX1NoMA2Wb6+nX15olxNk6uImy7fXUxU1CfmUZOmnXQnqKkFdxXVdrMb87ahhkaJprVJFLMdl7qcLMYadDmPO9x7cuARp7v+1qMDR9N5KwvMpGHoEKROOYk1FFKcxKN55FLk5x/Fmyruuyz333EOvXr1a5CgLwsEUDocZN24cRhupCY5tM+PRfyZ/bvvCUSNu2ayrakCWJPrlhVptZ1ttnI01DVTFzOQEu93VPCAGWvx9ueOh6eQPPZIZr76D2fkwOO5KSG1sGx2pRH71L0jrF6JqOpOufaXF5GLbcTEdl2H56e0+7U4QhN0jAmThoGhqvzqiawY1MZOoYbFkSx1yikRdwpsM06LBCAaVZWXIkoS7aA7ukBP5Jm94ixPekMJRlEUSVDeYHNE9g4CuUp+wqIwapGgy5REvgE5RFbavWsKb4fmkZ2ZRW12VfP7O22siSRKa4p34gnrrr81XpfX89b1VfGsPgjGDYPu3UL0V+h6Jdd4/eHOTRV7fBB1TfS3yG2VFYettd1NTXYVt2S22KcsyQ4ePYMmihcnAeGcvvviiCJCFdqMpVWh3yIra6sIRwK8qqAGZzTUxOqb6UGWJoE8lkrCImzYLt9QQ0JQ2290357guc5ZvJ166nvrlYTIzM7n3/gewytYhKwr9xp5EomAUWAaJ3AL++JWGtXwxZB0DZx4Dtom0dC4ju2fzsxOOJHTSX9v82wBQHTPplR0UuceC8CMiAmThoMtI0chI0ZBcWFEeJagruEDvYUegaTqmm8AF5n/wDrbjIEUrKahawpfaKH557S0460rQNI3HnpvDkMJR1Ma9Wqg9sgKs2F6P0qDjUxUM2yYn6GP5oi+8NIhEHFxvMqHu83PtbXfxjztubnX79/skLIdb3lrBlto4yhcvYH81D6m2FFwXd+FrcPxvmb3eZtWb3/DY2UN4Y/aO/EbHtnngjhs4/9KrkGUJ1/XSJyRZRtN1fnbt7fSc9xYvPvFwm689bNiwffibEIS907yt+vc5/Sc/3eX3S5UlLMclvL4KF0hP0aiNmciSRFBXSPW1vvPjui6PfbaBBRtrUWSoi1usqWzwFtZ3h9IoXPBPMBM40Sq+yejU4vnW2i9IrdtEfVU5VG+BLd9w1rk/5abbrkmu09b+xi0bXZEpyPphjZcEQWifRKtpod3Iz0jh6J5ZHN4tg8Iu6Rx/7FFcduOfkWQZx3GwTBPXcXBsm3Wz/gZVm3Em/hayu2MaBm/MngVAul+jImrw5eZaZEkiK6DjV2U6pvpRZYmS8HwMIwGNqQyu62Ik4rw39w0M02zREvv7xE2ba1/7mi21cU6VV+J++qw3ctwYeMtl36LPvpEzuyss3VbPX95bDTvdgbVtm2cff9hrQKAoXPir33HldbfwyMxXOXrskXTMzkKSva+qJEn07D8IqTEX+cEHHxQtq4V2o6ioiH/9618oigKShKbrXPir3yHLzU81ErKqg0SyfXxbcoI6uSGf1+TIcckJ6uQE9TaDY8d1efrLzTz++SaWbqujssGbQDtc2gbzZ0DlZrBN77tZugoSDfDxU/DaXfDWffDMNfDKX6h//ylY/AZsWIwqOZxy9pTvfL+O61ITMxnUMbRbEwsFQTh0iBFkoV1RFTn5oRzYIY1sJeHl5O6cl2tb8Po9cO5UGHMevDa1ReDZNIGuJqbg22nSXmHRWGRZxm5KWwhm4eb3Y+mIy6HX2UifPY+6Ntzm7d/mPt9YzZ3vrWZbXYJbJ/ahR9zHuw95I96O4+ACiqJw3a1/4awzx5D68TpmlGzm18f8BGXWf7Etr4OXJElYlg24IEmkpqXx86t2jFoVFo1FVVXMxioX61evALzAPh6P88T0p0Q1C2G/aKrN7bou551/AUcdeSSS5OXcWo7bKqXAdV1yuvfh+MnngwRn/OQ8Ro4azbgTTuaN2bMor6ygpOdZRP3ZvFhTyiv3PcvEMywuHj+U3ruoO67KEqq869SF4m8rmPb5RlaVRzmmZzZ3nzogWXbxgbtms2jBbK9e8R7qN+iw772DVB0z6ZkdJC+1fTWJEgRh74lLXqFdO37Csfh0HVmWkRWFYaOK0PTGpiAV62HJW9BzFEqXgZwy+btHe5oMKRzFDX+5F6nLYPjZA3D5U3DaTcQlH1JGPu6JV1Nw0/M8W5rK16X1bW5j9pKt/Pqlr7Acl3tPG8gZgzoCcOrkKQwYMtwb8W0M7GurqwC4bHQ3hnRKZdoqm6Numoase80EvEl5TTP9W+dlDikcxennnL9j8o/rJicIuq7LjBlP8W7xx3twVAXh+zVNuHv00Ud57LHHOHb8OAYNH8l1d91HyeZaPlxTyba6OLUxE9txefuDj5hy0S+YcvqJvD37Gd5/9QX0xlHVIYWjuOJPd2Oe9Aei/mwoXwdGA/aISczdYnPlS8tYuLl2j/fx7g++5brXv6GqweTWiX34+2k7guOlJQt45vG2U5PAuzAdNGwE4044hXEnnIKstAzCzzj3Z9/52pGEhabI9BCpFYLwoyRGkIV2raioiPvvv59fX3UVjm3zzdJFTL7oUmY/+SiWbSOVvIw69ATSJl33ndUfmjRNwus/8kj85/6FmKvAwlfRNi7m4XvvZPDww3l20Rae+WI9K1dX8N7qCq46soDJh3Xik/VVBHSFVeVRnv5yE71zAjx85mFkB/XGiXenY5kGsqKiqhqObaFqejLg9WsK958xiMtnL6O4IhuOuQTe3XEClyRpl3mZp0yewuuzZ2GZBqqmU3TMsXz4zpvJ8m8zX5vLqCNG77MuiYIwY8aMFhPuHNtmxdKFrFi6ENdxmXz+xSzZWgtIrFryJddfPBkzkUh+D5vSlIYUjuLtlWX8vXgt9XET5YNHsRe9CYCUksqUG++l2OnBTW9+w7SfDKF75u4FnF9squGFJds4siCTu07u32rybEl4fotcaEVROOq4E/nkg/eS381rb5ua/L59Om8uL838L+VlpZxx7gWcdf7Fu3xtw3JoMG3G9sgWE/ME4UdKBMhCu1dZWenlHjfmIa9e/hWO443OSoko9ifPUHnsr7js3qf49x+kXd4WXVqygF9ddB5mryLcml7IoSxuHaZRpeaTfsJgnn3sQTas+5aMrGzqFy9CCmbBhCt46BN46JP1LbY1piCTWyb0Ibuxf63XWMBrLGJbJkedcAqDho5oNeM9za/xn/OG8ZuZYb447ASI1cH8/yA3NhzYVc7jkMJRPDLzlRYlqsIfvp8MmEcWjaVkcw3je+eIMlPCXguHw0yfPn2Xy9956VmMSG3y8z1tzgsY8QRNd0IkSUpeHL6wZCv3Fq+hZ3aACcYSXlr6dnI7bqye5/78a0ac8lNW9P8JF81czMkD8ri8qDvp31GC8eO1ldz4xgp6ZKXwlxP7tVlZpr6urkVq1vmXXsVvb759l5VqBg4dzpgJJ+7yNV3XpT5hETVtFEmisEt6shqPIAg/PuLbLbR72dnZyS5yuq5z/pSfsKzkM2wTkCTspW9D/gDsop8ydf5WHh1ktnly/c8nKzB++k8IpEPFeianb+OMcb9iaarMpT85BduyWj4hsQVevI0xF11Pr+POQVMkCjID5Kf7kLet5M2nH95xkt1p8DorJ4/Tfv5rstvo7KcqMg+fP4bfzfyU8KifkDl6ErJjMjw/lYJBw3d5HJrXXQVaBMxDCkdRFjVoMGyColGBsJc++OADrO+oRLFi2VK+XrwQWVEYdeQxfPbR+y2WH3P8yVz4q9/Sc/AIfvPEAgbkpfLAmYPY8LXNnAd1DKdZS3Xb5svX/oP6aTEdf/Uvnl+yjbWVDfztlAGtmgitKIvwWHgDH6+rYkBeiAfPHNxmLfOd0yukxtx+aP092h0x06Y2bpEb0inICpDqU8lpo1GQIAg/HuJMKrRr4XCYq6++OtlF7je/+Q3x+lqu+dNdVFVWkZOT7ZVme+8h8IdYXVDIb2d9zuj6Eo4cU0SkpooVy5dT2mU0Hzg9kGIbkT6YhrqxhJOefRnwRn9bBcdNHJsvnrmPX54+PnlS3bmBySMzX+GUs6fw2gvPYJkmqqYx9pTJqIrM9voEeam+Vk1FZEni/84tYvbSbUxfsInKmMl7W23Wz15Kj6wA1Q0m54/oTG7Ix7urytlYHeOUgR0Y1ys7uY2dT/QKsLk23mZzBUHYE6PGHIWqadjgXYQ2+350LejJpvVrAS+43Tk4Bhg0dASDRxzOdXOWEzdtbjy2F+l+LXkn5I3Zs3h51gycZkG4XbmZ0xMLCI2fwj+K13DtnOX8YlRXyqMGw/LTqE/YyXKKFxZ24dLR3dpsCLS0ZAHT7vtbq/SK75t0uzPLdiiLGsgShHSVooLMPWplLwjCoU0EyEK71tR4oKlRxn333YfjOGi6zp1PvMAxY4+kd/+BjSOpY3h3i8XMbw2+LkvliUffhC6DwT8QNtgM9tXTx1pIdUEa2YefCzRrK7sTr50zgItjW8mSbyXh+ZRu3ZxsYGK6Cabd9zcu+/2NPPbcHMLzP6J/YRFHHTmGPrkhtvx/e/cdH1WZNXD8d++dmXRCGi10qYGEaugSBBRFQQQEy4JlxbWsa111XVfXhnV39bXvuqirgFKUpliAIEgohhJ6ByEJIb1Pvc/7x5DJhIQixYRwvp+Pfzi5c+feJzyTM8+c55zCcvbnldMo1FYtSLYaOjf2iGV8t2boGny/K5tp6w7x/a4cAH4+btPSsr25xDcJIzLYxqUtw5nYPZa01LUsmj2T3JyjREbH0P/qcTQZcwWhARaME7Tpra9SUlJITk4mKSlJqnqcBY+paBHXnZf+O5u9G9dwJOMwc6d/jDJNdF2nQcOGJ32+1RZA18QBvLhkDz/uy+ORpLZ0bhzm+3nFB7uOXRN4+a+P+AJZi9VG7/4DSejWjFCbhZeW7uH+r7ZWOXewBa4zdpAUHECQtU2116748FpRxlHTNHTD4M/PvXrKVWOlvBvvAJweE7ep6BATSqBFJzY8EIuUcRPioiIBsqjTkpKSsNlsOJ1ONE3D4/F4g2Wnk90bVtOzd58qK6mLZj8EP++FyyZDk/bek2TuhH3r2J76JVtND8o00XSdhbNnettX+600RURG0+3SPvRPGsbrf/+LL8c3PCLSt2psGAaGYfHlRa9ZkUzq6p8Yet1Exk28icsGDqBtVAiGrhEeZMVq6GzPKkbXNRqHVl9N3rZhnS9VYuYtiRTb3VgMjS1Hiil1uAkPstI+OoTZaZl8tzOb5ftyWb4vl/U7D7Diyet9TUcAFsyajq7NZVjSIOKbNjj/v6A6IiUlhSFDhuB0OrHZbCxbtkyC5DNQ5nSTeriQEqebAf37c9nAAaSlrq2yQbRX30Fs27Shxk2xPRL7c8tDf+O9A4FsyjjCjd2bMaFbsxpf6/qbb6Vdpzg+efdN38a4inl8dedGXNY2ksU7jmJ3m9jdJiVH0/ni8ZuZV1rIgn/q3Pz7ewlr0KBKN8zUlJXecojH5niPfpdx872P0Ll7bwrKXQRZDYodbgxNIyzAwNA1sktduDwmLruLVtHeP4nNgizEhgcSXENusxDi4iCzX9Rp/fr1Y8mSJSQnJxMVFcUDDzzgC4LGjbwCu9tDkEf3re7k5hyFnT96/wtvAqV54Hai6zomoI6tRCvTxO1yggKr1YYb7x//1z/8zPdHunJlemCVttcakNCrDxvWrvKeSylcTieLv/iEZfM+Z9myZbSPqQzO2kWHYDV0Sp1ufsm30yi08mvamtI1Kl7/0hZVV+puvbQFt17aArvbw8tL97JgWxb0Hg+rplORBO12udj2cwoJvRJxxpjYLBfHqtcrr7yCw+HdJOlwOPjkk08kQD4DW48U43SbVdo4+28QDY+I5PW//6VKyr1uGHSO787oCbdw3U2Tuf/LLWzKKODxIZcw7gTBsb+UH5fidDrYsWUT4A2ca9pIN+2t2bhKC1Gmicc0+eS9N3znqOiGed9fn8ewWFAuE6vFyhNPPkXSoAEYusbhQjuZRQ4ahwWga5Bb5sLpNgm26XRuFE55gYdWLU6+Oi6EuHhIgCzqvH79+vmCnfj4+Cpfox/OL+fzxUvZv3EN4RGR/LTs+8onFh4BQNN1rhw1jqWLF+B0eDcHaZqOxWpj5LiJjBw3kdSUlcQn9ieyXTylTjchNkuVlek9O7ahaxpK01DAxnU1d6+rKTjTNI3WkcGYpqLI7qbI7vJtLPIPvN1UlsU6mUCLwZPD2pOfm83KvhOgcxL88A4c3IBhsdB/0GV4lGLdoQL6toqod6kWFakUUVFR5ObmEhUVxYIFC2r7si54uaVOskscND6u6UWJw80L2wyO6H1pkF2AY/AUaNUd9q6lB4e54w/3csDWnBKPYsqsNDZmFPHAoDYnDI49piKv3EmI1eLralkR9L7y1KMcPnjA11nSZgvwfWis1g0cx78AACAASURBVODHT0U3zK1pG9F84bsitmGQbzNdRLCNLo0Vut98UEqhFOi6RkZx/ZonQoizIwGyuKD4B8sAv2zfwJO3j8fldKLpmi9XWdM02nfqyu6dW0Epli5ewIRbpzD9P2/j9njQDZ2Hn36RhF6JuD0mrbr0wO42iQ6xkV/mQsPD7rSf+TllJRGRUbz69OO4j21UUifZ3X8yuq6R0LQBqw7kU+7yEGT1bhzyX8E+3Y1EFl3jnxP78/vn32ZTeDcYNBl+2cToGyq/ps4udbAvt5T2MfVj015FV7dp06bhcrkwTdObY3qsFXkFwzCYNGlSLV7phcftMdmSWVStIkRWsYO/fLODvblltI4IokwPgw4DwBoI3a5iI3D/aiem8m7aC7EZ/HVYe0Z3aXzC1yq0uwi0GJS7TVp3S6wS9Lrd7iorwy6ng0WzZ3rbyGtwxTXXs3jerBrTO5RS7N24Drfb7asPnpycXOX9Qj/uw6KmaUhVRCFETSRAFhe05cuX43Y5MU0POjqGrqOObczZs2ubL6XC5XSwa1saZkXbaqXIz8tjX14ZITaD2AaBtI4MJjzISmG5i4/mfc+fbxuL2+kCjSq77Y9nGAa6ruN2u7FarScNzkICLCS2bMiqA3lYdK1afeNfU35K0zT+dHUiU55+Hfew+zAuHVOljnJkkI09OaU0Cg244BuIpKSkMHToUOx2e5XgqCIQqigDaBgG77zzzkWZXlHu8pBZZKdJWADBNgsrVv7E9M8+BWDSpEknHZOD+WWUuz3E+KVWzNiQznspB1EKXryqE1d0jAEqm+3ExPdnt9aI/HIXHWNC6d6sAa0iggg9QZlBu8tDkcNNaICF7s3CsVk0ElteSUjRW9z/x/u8ZeVqCHy/+ryyLfup7N7lbcOuaRo2m42kpKTTep4QQhxPAmRxQfPfxGdYrTzw1IuUFub7dt776xCXwIa1q32rte179KFNZBAdY8KqFPwPD7JSuGcDbpcL0zxxYNymXQeuGDqEyZMnA5x2BYXwICs9YsPZmFGIoelnVJe1QkKvRN5/5iGeWHKIon4TcJneAKMiiOnSuz+m6kH/1hFndP66oqKayYm6JVasJhvH2gVPnTq13lezUEqxL9f7Ac/QNT7/einrVq2kZ98BtIgI4oZrrvCVZ/v3v//NnXfeWS1QVkpR4nCzK7u0Ss3ul75axewDHjo00Jg6pmeV7nZnWke41Omhd4uGRAXbfCu5ARaDu/9wF927JfDoX/7KT8lVS8a1uqQ9B/bsqnY+Xdfp1f8yWnbswryP3/d9u+N/X3/84x/r9e9fCHF+SYAsLmgVm/iWLVtG1979CWoVR4BFZ+/m9SycPROHww5KoZTi848+4OGnXyTjaDZxvfoxcEB/ujZpUGOr2OFDL+eF557FWdPK8bHVqU8+msbAAf2rXMvpatIgkMFBVtb9ks/REgfBVuOEK2+nomka+d+8j+u6v3HPGzN57Krt3trQxzb+3fOX5/i2rIikxJ5cP2b0Gb1GbUtKSvJ+FX+SlXylFC6Xi/vuuw/TNLHZbCxZsqTeBkmFdjcbM4qwGRq7NqXyxG1jcTkdfPqWQVyPS6vULvZ4PLz33nv8+9//5p133mHKlCmAt/GGVmYj0KL7ctVXpqxh9l4HpG/lwOLXKOz2BZzhBzjwpm+UONz0btHwpM01unZsz5qfVuB2eVeLLVYrN97+B159+rEqlVo0Xcdis3HXQ48zengSwy9N4N5776n2b2Pjxo1nfM1CCCEBsrjg+ecl55U5WXMw35e68PbLz7J+bQrKNHG5nBzOOsqU+x+mQ0wo0SG2E7Zl7tevH7fffjvvvfce4A1Chw8fztixY8nNzT0nq5NBVoPElhHklTk5XGjnaIm3CoNF1wi2GpQ4PZgKGgZasFl0nO6aq1KkpqzEc3ADbF2Kp+doFiTPqFKn+c1nH0eZig+sVpYuXUL//v2rneNCYNawOasaTcPt8Zbys9vt9bKahetYvnBWsZOoICthgRY+/maOr9W56fGw5efVNT7X4/Fwzz330KlzFzp170XK2nXs37mdJo1i2LklDTRYH9oNglrD0vfxlJec1sbRk8m3u7zz7QTBcUX6jNPpLaE4evRojNBIkq4dR2iAhVHjbyY35yhRMY1oHxdPVnYuE0ddyRVJgwDIy8ut8bxjx44942sWQggJkEW90jDQSliglbwyFwm9Ehl/x91s2ZiK61iHuxtGXkH/1pEnDIz99ehR2fZZKcXYsWN9K2/nSqDVoFl4EM3CgyhxuHG4TXJKneSUOmgfHUKQVSctsxiPXeExFSE2o1ob7YqNfq4V0zBb92Brh3GY69eh5Rw81gXNAyhcLpi/+IcLMkBOTk6ukl6hGwaDhl7JyqXf+/JTdcPg5jvvZeZ/3/PWwlWKadOmnTL/9kKTV+Yis8hBo9DKD3i52UdP+/kej4fHn3mB6++4h+f+dCcul9OXq0/L7jBuDNr6eZCfjv4rNo7WpMThrQjTMiLohMdUpM9UrAD36dOH+x58lOkLf+APN47G7XRhsVl56b+z6dCtN20ig4hrUlnj+/ha6T179uSOO+4453NVCHFxkQBZ1Ctr1qwmeekyGnXuhSeuB53iuzP1v7PZ+nMK1189nKuHDj7tc+Xm5voqJOi6Tm5uzStV50pogIXQAIgKsdGRysoTDQKtlDo9uE3FpoxC8sqcmMpbMSDIalRp3zt33nOY41+Efjeh5r8Apk5FjWRN02jSuZevgsaFwmMquvTuh8Vmw+X01rR+7LlXffVyKyocjBw7kYReiZSVFDP3s4+8pb+cznqziqyUYnd2KYcL7YQGGL7gOC11bdXyhsdp064jv+zfUyUFIWXpN9isGm7/4DiyOYz4E+Qdhp8qukvWnPN9OhxukzKXyYA2ESftQucf4FZsrNuyYR1z//1P3Me6aLocJqu/mcONI4cSc9xKtH+t9Pqedy6E+O1IgCzqDf+vam02G998+x2dW7dhcMIVhE24+lfXA05KSiIgIKDKH+7aEBJgIeRYfnJ4oIX0QjuaBkdLHOSUOokOsZHQK5HUlJWoI3tgzSwY+DuIvwK1+TvfeZQyMQyNlfvy6Nc64oxzns8ldawdcAX/dtE5JQ5W/LicFvGJtIvvyf99+hVpa3+qUu2jpg1jI8dO5KuZ/8NzrNxXfVlFPpRfzq6cEiKDbAT4pdosmjPTl7frT9d1rLYAnnr1TQAev/s2jh7J8P18+6aNGBYLuN2YmgEjHgTdAgtfQbkceNuse351ioWpFPnlLnRNo3eL8Gql4453fIALMHToUBwOhy+tRinFvC+m88Ddd9Kkht/j8eUfhRDibNX+X0ghzhH/r2qdTierVq6g/SVtaXiGJc7q4spUSICFDo28q8tto0L4+VA++eVOX01lw2LBs3Y2tOwGl90G+3+GkjwATFOxfP5sNq5ZxaGBg5g0avhJV/bOJ7vLw46jxRTavW1/g6wG+zanMmnstThdTnRNwzy2udJmC+Dhp1/0tRM+nWDNPx3D5XJVq4d7oTBNRbnLw+FCO3tySokJCcCiV64cL5o9k68+/9R3v4bFynUTb6Fjl4Rq4/X7Pz3Ki0886Dt3RbDcI7E/eX1v46ClMXz9GkZBOrrNhulxV6nNXe7y4PYoQgMMXB6FyzQJOa4Vc5nTQ7HTTZvIYNpGBRNgOb1vKvwD3KlTp+I8tnLs70L+PQohLjwSIIt6o6avas9WXV6ZMnSN7rHhpBzIJ6fUSdeel/LvWYv45N03SU9PZl+LLniG3QNfPe893mIwf9Z0PB43n77zOtHzv2HU8KTzeo0lDjfZJU5shoaha2QW2Sl2uHGb4DFNAiw6Lo+J26P4+oelOI51VfMPjRz2cl556lFMpaq1465JasrKKgGypusMuuz0U2vqku1ZxRzML0fTNBqF2tD90iruvvE6X5UWAKJacPVVV/HEiy/XeK7rb74VgP+88WqVleQNuR6wNGZMK4NmowbTq9+TAL7a3G279iSrxEGIzaBhsJXMIjsepbAZBmUuJxreVWOn2yTAYtC/deQZfyiFynl8fM1rwzCkrrEQ4jcjAbKoN2pa8c3IyDj1Ey9gARaDQW2j2J5VTFaxnYReibz2H29ziP+lHuYNzaD9Xa8TX7oFZ3kZX381+1hba/j6uyWMHDr4vLWizitzknIgD00DHQ00CDB0dE3DZmgEBdqqHN+sUUxlPuxxKurcupSjxq/81x0qoFVEEI1CA+jVbyA2WwBOhx00jUEjRvP1dz9g6Fqd/bBTk4JyF4cKy4nxC4wrVLRoJiQCYtpCo0ug30QW6Aaub3Zw34DWBFoNwgMtVVJYrr/5VnZuTWPOp9O8D1iD4PIpBJXl8Nio0ViMyg2cCb0SKSh3YugaA1pHEhZgQdc1OjcOpcjuJthqUOby5jUbuka504PNop9VcAyV89i/a6Ku67z11lsX1O9PCHFhkwBZ1Ct1ecX3fDF0jbZRwRwuKMdjKl/Ae2OPWFIO5rP2l/bcPGYkkZkb+H7RfF+jlI49+7LlSBGtI4LPWac9h9vDwfxygiw6W44U0zDISuBpfs2+c2vaKY8xTZPwiEj25JTy475c8stcZBQ5WL7Pu4HytktbcE//S3n46Rd55alHcXs8JC+cw/Kvv+Rfr77EkiVLaNWq1Vnd4/lkd3lIL7SzP7cMp8ckxGZUCY4r0ir27dmJGvEgdKpcGbe6y+nRqinf7sxm8c5sAMZ0bcJDg9tW2ZQ5cuxEvpzxCaYlEEY8AGExjG94GIuh+xrM9Oo3kNjO3bHqGr1bNKxSKzzAYhAT6v3/EP889speImetYh5PmjSpTqU4CSEuHhIgC1EPBNsstI8JYU9OGdEh3pVZi67x9piuTJ65kVeW7eVfV8RVa2udXmgnvdDOZW2jznrTnt3lYe0vBRSUe3OIo4JtNdZtrsnczz7iqxmf1Pgz3TBQpolSCl3XOZxXwtuz0yi0e1eVY8MD6duyIS5TMW3dITKK7DTPK6xsKw4o08ThcJCcnOzrfHim8sucZJU4CLIYtIo8d1GhUoptR4o5VFhOdIiNCEvVDy1pqWu5a8K13qYZl471BseZO2H9fDi0mVFjxvDEI/8gvdDO19uz+Gx9Ol9uOcKhgnKeGt4Bl8ekVUQQCb0SeeQ/C/nnhiJcliAGBOdx/603+tI2KhrMvPrRbO4eN6LW8tTh4vzAK4SoGyRAFqKeaNEwmH25ZbhN5dvIpWkar10bx++mb+CFlZl89rveVdITGocGkF/uZEdWMT2aNzyjdAuXx8TlMdlwuBCXxyQ2/MQ1b2uSlrqWl5961FeGTNM0Bg+/mqiYRqBBxy4JvPbC33E1j4dWPfhcdcPj9PD8iI4M7xDju2ZTeQPk91MOYqqeWDoORG3/0ZfHapomYeENf/X9+atoRGMq7wcQQ4cjRQ4CrQZxjcN8LZR/DaUUeWUudmaXUFjuIrZBYI11ulNTVuJq3BEG/A6adYKdK+Gbf4DpxmqzMXLcRMD7geHOvq34fZ+WzN18hFeT9zJ62joA2kYF07lRKD8dUBiBITwzqAlXdhtUef6KBjM4ydz2Mxbj6rMYLSGEuHBJgCxEPWGz6LSNCmbLkRIig6wE27xfgzcKDeDvV3bkvi+38MaP+3ns8nZVnhcRZONoiYPcUieNwk7cCrgmdpeH9YcLKbK7sRrQMMh26icdJzVlZZWKBYZhMOnu+32BfG6pky+d7dheqFBA39ZRPDi4Dc2PC8R1TeOOxJYktmjIfV9uIeS6h2nZOIjU5G99q8/70rN+9fVVKCh3seZgPg0CLQRaDIrsLrYeKcFqaBwtcdIw0ErzkzTEOJFDBeVsziwiLMBCo5O0Yk5v1hfGXwr2Ylj2AWxY6K1acdNtvhrQ/jRNY2xCUwa2iWTWpgx+3J9HYbmLb3dm06t5OA9e1pZoSnzHVzSccSoHmqbROrbJr74XIYSoLyRAFqIeadEwmPRCB3llToJtlcFa31YRjOscway0TDZt3syfBzSje+8+vp+HBVj4+XABUcE22kQG0Sgs8JSvVZFSUe7yEH6sHfapVOS4hkdEUpifR3hEJEfSD2OxWPG4XWi6zp+fexVbizgeX7Sd/Xll7M0tA2Bk50Y8MvgSwgJP/rYV37QB/xrdhT/M2UzCyD9iS1mO2+XNu26VkIjH/HXNLzymosjuYnNmMWEBFl9OtX993wCLh315ZTRpEPCrUhLsLg87skqI9ivfVpOf9uex8JAH7cgu1JfPoTmKGXzlSCb94f5Tlr1rHBbAfQPbcN/ANt7mKR7lq6NckFMZICf0SuTeJ5/jjb8/jjJNHnjgAeLj4yXFQQhxUZIAWYh6xGbR6d86giV7cih1uqvUqe2nH2buvq3sapvIH557kw/+9idfcBVkNQi06JS7TNanF5J0ibXKxix/pqnILLKzLasYXdd8Oc+nsmbNGh6cPA6XvcybGtzjGnDZ4chu9Na9sVz+e6IbhLAyrBlvz91Mod1Np0ah3DegNX1bRdCpUegpX6NCj9hwrugQw/K9ubz08ZfsSfU2GInt1J1fCgpp0fy0T8XRYjurDhYQHmgh4gSbGQMtBrml3vSL7rHhVTevnUB+mZMN6UUYhnbC4PhIkZ33Ug7y9Y6jRKgy8hZMhfJCdMOgS7eev6qBB3hXlQMsNb+W21Tk5+WDUpimidPplLrDQoiLlgTIQtQzFkMnsUVD1v1SgM0wsR5b0dy6YS1q4Vtw/bO4L/s9S1atqxJgaZpGsM3A7jbZmV1C3p40Vvz4I8OHXu4LkgrLXWxIL6Tc5SEiyOo7d01ySp3szS3F0DQK7W6eTinF+YfpUJDpPaBhU9+xJuAEMgryKNfz6N0qmjv7tKRddMgZj8Pv+7Tgu13ZLC+N4a/3PQR48333HfKmk0SdRmBvmoq9uWU0CbWd8ANDhagQG8V2NykH8xnQJvKE7bw9piIto5DMYgfhARYCrTW/DX+/K5snvt4BeFfPr4ko4IF3ynAbRpUGHudKfrmTq4YPYeZ7/6j17pFCCFHbJEAWoh6KCLbRpUkYaZlFvrzW7r0SsVksuL55FfPW91gf1q3Khj7fc4MsLF2+kiduH4fL6WLqCy+w4JtvSRo0gG1ZxWhw0lxZgCPFDqbM2kRGkcPvUSvaoTSUpkN5MaR9C3mHITQSSvPh8BYMt52bHv4Lt4186KzHoFVEMBO6NWPGhnTGJTSlU6NQNE0jzGawPauYAW0ia9wM5y+r2E6Rw03jU9xvhbBAC7mlTvblltEhJqTaBwjTVBzIKyOjyFGl8cfxNmcW8cqyvUQFW3n7+njfB4Xjq5D4U0phd5snDMxPpsTh/bZh2BVDaF7HukcKIURtOG8B8u23387ChQtp1KgRW7ZsASAvL48JEyZw4MABWrduzRdffEFERATgbS/64YcfYhgGb775JldeeeX5ujQhLgrNwgPJLHZQUO6iYZCVuG49eHfGVyyaPZMD5VtJLejFo5+vIirtSwzN9G300jSNvRvX4HK5ME0PTpeT6fO/xdYijnKX54QpFcV2N/O2HmHF/jw2ZRThNhXjE5oS1ziM1pFBOA9vZ8b7KWQfPYLL6WTXts1Vnq9pGpaAwHO6Mnpnn5Z8vSOLhxds47ObetAwyIrNolPscJNV7KBJg5pzrYvtbuxuD9uySogI/HU1osMDLezMLibUVrUMnMtjsj+3jF3ZpcSEWGsMjjdnFvH5xgy+351Dk9AA/jk6jrZRlavoCb0SawyMtWOr9CUON6EBll/VrMPpNil3exjYJgqLoUtpNSGEAM5bgctbb72VxYsXV3nspZdeYujQoezevZuhQ4fy0ksvAbBt2zZmzpzJ1q1bWbx4Mffcc4+v5JMQ4sxomkZc41Bcponbb2Pawjkz2TDtefQN81mRZfKV2Yk5n37EXRNGkZa6FqisaKDrOpqmEREZiQYnDI5zS53c+vlG/rViP3tyShkT34QFt1/KY5e349oujVEZO7jvxlEkf7eIrRtT2b1ja5Xn67rO9Tffeso20v6UUuzLK8XtMSl3eTha4uBoiaPKMWGBFl69Jo6sYgeLth/1PR4eaGXdoQKyjzu+4rwb0wtYuS8XhTevOy11LdPe+gcbfl7D19uPMndzJkeK7DVel8XQaRoayNasYvbmlLAxvYDMIjvJe3PZn1dGo1BbjRv5kvfkcNvnm/huVzZXdozhfzd1Z+PiWdx3y/XM/eyjGl+r2O5mf145WcUOHG7TF5BnlTjILnWcckOiUpBX7qRHs/CzroMthBD1yXl7R7zssss4cOBAlcfmzZtHcnIyAJMnTyYpKYmXX36ZefPmMXHiRAICAmjTpg3t2rVj7dq1soohxFkKtlmIaxzG5sxibGbVWrck/xdcTkgcB/0m4l4909fGOaFXoq8bncc0efuFv9K1a9cag9eCchf3frmZrGIHz43oyPD20dUCwNSUlbhdLt//K9PEMAw8Hg+6YfD4869x/c23nvZ9mUqRUWSncWggeeUugqwGiS0j2JtT6lsxr9AjNpwujcP4fGM6YxO8pcsCLDphNgu/5HubcvinWhTZ3ZQ4PbSM8AabvgYdLhf60LsxE0YAYNGgc0MdV8FR/ti3GX36VFYFsVl0ooJt7MkpxelRpBfaT9pV8OdDBTz3w24igqz8e3wCrSODefPFZ/jkvTcAWP3jMg4fPMD9f3nG95ycUm9DlmbhATQNCyQi2EpEsI1yl4cSh5tCu5vtWcWE2Sw1Vv4ocbgpKHfRs2UYjU+wki6EEBer33TJICsri6ZNvRtzmjZtytGj3hWd9PR0+vbt6zuuefPmpKen13iODz74gA8++ACAI0eOkJGRUeXn2dnZ5+PSLygyBpVkLLyTPIZydh49SsfOcRi6tzOdruuolOmYYdHQdwL64TQ6do6jICeLbZs28O282Xg8JkqZuFxOVi5ZTEu/Ns0eUzF3Rz4fbsxBQ+P5Ic0ISl/PB/PX0r1XInHdeviO7dg5DovFisvlBMBqs3Hfo09SWFjgO7Yg5+Q1it2mwuU2sRg6RQ4XseFBNLW4sQXq6JoHR2EO0XjILihhX7aHAIvmq+IxqWsDHluSzpc/72VQ9LFvpxTsPerCXpCNw2Pi8kCzBgFkFNlxujwU2L3P/fCNV7zd63qM8gbH25Nhyw942vVlc+ckCIzm3umr+OOGtbRv356NqZX3b6HyTdbugOPXnEucHv6xOosVv5TQItzGc0nNyNjwIx8t/IpFc7+ocuz/Pvg/evfpS6f4HpS53QRaDNpGh6BrGgFOB+VOKC+oPD4Y6BTiZltWHrkeE4+CBgEWrIYGCvLLXTSzOQh0FpKRUXjqf0j1nLxXeMk4VJKxqHQxjkWd+E6totOVvxNtnpkyZQpTpkwBoHfv3jRr1qzaMTU9drGRMagkYwFNmyoKy90UFheDpqGUwlSmNw922QfQvCuMf4E1ZTaSX3+ZBbOm43a7UMobSFutNgYOHUHD6Ma+c7790wGmrc+hY0wIjw1pB5k7uPvu232tiv3TJfoPHcH7Xyxg0eyZoFFjY4uTcZuKI0V2LEEapqYxsF0DmjWsuSlHbKyH7VklHC4op0FYALqmcXmUouX6PL47UMaIS5r47iNcKXLLnNg1hW6BX1wQGh5K9LF0g7TUtaSsSIZe18Flt8LuVfDNPwGFOpTmHbueoyDp9/xf8kwsrz6HaZrV7r8m+/PKuGPeJoocbq6Pb8L9A9uwb8t6Hr37dhwOu69NdgVlKj784D1uvOdheiX2PWmlDH+tmpt4lKLY7iItsxiHx0QD2jUOoJFWJvPDj4yFl4xDJRmLShfbWPymAXLjxo3JzMykadOmZGZm0qhRI8C7Ynzo0CHfcYcPH77ofhFCnE+aptE2Opjpn/7kS3VQpokHwFMCnz1I+M3P89neVpBugNObm6vrOokDBzPlwcd9wZ5SijlpmXySepj+rSP4x6guWHSNaXMr0zfcOH3pGv6axDavsQJDTTymoqDchalA06BDTCjBNoNGYQEnDQwDLAbdY8MJshocyCvzpVAMjnTxv73lzF6ZzZ1jmvjGJTrkxBUq1q1aiTnyMWjXF/ashsXe4LiK9fOhcTvocwPu3EOwcwVO086i2TNPeJ8lDjcPL9iGrsM713clsaV3s3JFCszxwbGXIm3NCnZtXMvib78nqMOAk45fhYoGLkFWg8uCbHiUwmbo6BpkZpad1jmEEOJic9426dVk1KhRfPzxxwB8/PHHjB492vf4zJkzcTgc7N+/n927d5OY+OsK4AshTi7IanDtiGHoNdUuLisk/78PQNo33hXRgZPQNA2rLcAXHNvdHt5ZdYBrPlzLS8v20rdlQ168qpOvTFzFxj7juDq9aalrmfrEQ9w1YRTvvv4id994nW8zoMdU2N3elAeH27vZLrvU2wkwq8RBRLCVpHZRXNExhs5NwmgVGXzaZczaRgVjKoVSirTUtXz+6A2Qn8EH64+y8ec1p3UOT7t+3uA4bTHa168y6Y4/oBs1vP73b0H6dhj5KAy9G6Vg/qzpvvv0V+Jw85evd5BeaOeVkXG+4BiguKgI5dd2W9M0DIuFTgk90XQddayBx08rfzyt6z+ezaITZDUwdO2UJe6EEOJidt5WkG+88UaSk5PJycmhefPm/P3vf+fxxx/nhhtu4MMPP6Rly5bMmjULgC5dunDDDTcQFxeHxWLh7bffxqjpj5AQ4qxcf+UQ3njz//jT/X/0BmKahukxAYWmFPqKj/BYgyBxHOFx/Wgc25wlpdFk7jzKsj25/LA7h8ahNh4Z3Jbx3Zph+NVQrtjYt/Sb+Vx+1SgSeiWyYd0a7rt5TJWUATdO1q5aQYvO3XF6FG5TEREEhQ4XwVaDdlHevFoTRbvo0++edzyroRMdYqPA7vJuEnSUw8pPUNc+zr9+OsS0YyXtTuRgfhmf7XVDzgFY+j4Wi0HSlVeTunolWzemVj3Y0jubnAAAFA9JREFU7YR5z8O1T0C3q6AgE/f6edVWkdf8ks8z3+4iu9TJI0lt6dk83Pcz/0154F29v2bCJAZdM5aIQCv33DgKl8uFYRjSwEMIIc6z8xYgz5gxo8bHlyxZUuPjTz75JE8++eT5uhwhxDH33v0HunbtyowF3xIaHsFbz/8Vl9OBputccdW1fPf123jyMyjoPpKCQsXO9d4Ns4YGPbRMRgSWUfTTT2w1q6ZKpKWu5fW//wWXy0nq6p9YlfwDGRkZ1fJpdcOg66X9aRERTGx4IIcKyim2u+kWGU6LiJrzis9UfNMGbMks4pLufbBabbj2rYEdy9nSaTCbMoroHhte4/N2Z5fy50Xb8LhdaAteQpkeTI83BWL0hFuOC5A1dEOnVcvm7J/zNxj9JAy+HZW1h/mzptOxawKF+Xk07z6Ap9a70DT41+guDGwT6Ru3RbNnMnf6R1WuwTRNIho347bRV7ArLdUXzMvKrxBCnH91YpOeEOK3NXjQQHol9mXFvlwA3njmMTymyXcL52KaJqyeib7+K0beMImwpq1wh0Tz1T+fZGNxHhtME9Cw2mw8+veXKMzPo1e/gVVKyJkeD8nfLqr2upqmcfttt3Hv+Kt8j3VuHHbe7jPQatCzeUPWWHSuun4Chq7Rd0hvXthn4bkfdvPZTT2qtZBe+0s+jy3ytnge3/AoM4qPYuq6L22k4kPB0m/m0yEugbAGDXzpJHdNuBbXwpdh0ltw3VO4Ni5i6uc/oEKjoKQzASGhzLk1kSZh3rxnbwm5Ubic1esxWyxWrr1yKFEhNpKTk3G73SilcLvdJCcnSxlMIYQ4jyRAFuIiFRpgoWuTBnyRk4tpKpRpYh7ryqbpOgYmi7/4GI/HjaZpmKbplx+rcDkdvPzXR1CA1Wrj4adfxDAMb43lGui6TkBAAJMnT/7N7hFgzZrVPDJpLE6nE6vNxuChV3DHJRqvbynn+XlreG5sP9+qbF6Zk4cXbMNm6Py5i8azdzyE51hJvIefftEXHF930+Qa6zaPuuFm5nw6DT5/HK59DBLHVW7pO7yVwSUZNAkbRFrqWlJTVrIqeUn14FjT6Na7L88+/yKjrkgCICkpCZvNhtPpxGazSYqFEEKcZxIgi3ojJSWF5ORkkpKSZHXtNLWICOK6EcOZ/t4/cDuVNwgGDMNgwJDh/PjDYl/Aq+v68fUb8BzLX3bjZNPGDVzSqSs70tZXex1N0xg2bBjPPPPMb/67SU5O9q5smx7cLiffLfyK7xfNh6QpLGYoyW+tJKFZQy6JDmbpnlycHsWTCRrTX/krDrsd8JbRKMzPQynF0RIn3nhaIyzAqLJpcOTYiSycPRNnWT7qiyehbW/wuCDvMBQeJeyWW0lLXcvdN16H0+mosiEPoEN8D/7xj38wclhSlcf79evHkiVL5N+3EEL8RiRAFvVCSkoKQ4cO9a2wLVmyRIKI03TN8MH885Mv+ej/XuHnn5Z7gzaliIpuVGVF2Kyh9Jhh6L6g+tu5M3zHalrVKgkBAQG1EhxD5eqrw+nEYrWSn5uD02GHxW+g5R3GPnAyaw8VsPZQAW0jg+lZtpanbnm+Sn123bDQq99AcsqctGgYSKfGYeSVudidXUJ6oZ1Ai05UiI2EXom8O+MrFs2eyVeff4pnz2rfOSxWKyPHTmTRnJk4HfZq9d81Xef1GoLjCv369ZN/00II8RuRAFnUC8nJyTidTjweD06nU3I0fwVD17jhqiGUudykrVuN2+XEYrUxctxE0GDOpx8BqlptXl3X8RwLiNWxvOOKxytWizdv3sycOXMYO3Zsrf0+KlZf3/33f9nzSzqrk7/zBaf6+vm89/iddOrWm2KHm+VfzeDld56rdo5R42+ieefuhAdaiWvSAEPXaBwWQEyIjSKHm7SMQnJKHUSHBPhadaPB3M8+Qh1LWxl9wy3s2bGNr2Z8UmNzpCuvGsk1JwiOhRBC/LYkQBb1guRonp3o0ABGDh2M/t9Z7Nu4xrcZbc+Obfg3xjAMC6bpQdP1GnONNU3zrRYDPPDAAzidTlasWEF8fHytfmiZPfMzysuPpUwcY3rcrPjuGxbP+Rw02LElrdrzrLYA+o8cS3igle6x4VVK2+m6RsMgKwPaRLH2l3yK7W7CAr1vqxXpFhUfODp2TeDlpx71fajwPl9HKYXNZuNvTz5x/m5eCCHEryIBsqgXJEfz7HWICaVkQH/ievTGqnubiRTm5/kaVHjr8t5CUGQTXOXFzPnw7SrPNwyDO++8k0mTJtGvXz+mTp1aZ1b1K75hOL4LnlKqSu1hTa/aRKVHYn9+98BfuHZ4EpdEBZ+wxJqhayQ0bcCKfbnoTgi2Gr50i9SUlYRHRDJv5qd43O7K51gsPPDMy4SrcoYNvVz+zQohRB0iAbKoNyRH8+wYukZCswbszi7lSLEDh9skIXEANluAbxV04NVj6de/P4s+ehtN0ypTFXSdd955hylTpvjOV5dW9X15yA6Ht4zdCSjTpGlsSyJjYhg94RauuuF3uDyKVhFBp6w/HHKsKsi2oyW4PG4aBll9VS/umnAtLqezyvHjb7ubZx+9n2CbvA0LIURdI+/MQgifAItB16YNCA0oY9uRYuJ69Oal/85i47pVJFzan0ED+tOreUP0EcP416tTcTgc6LrO22+/XSU4hrq1qu9/LYZhMP+HZFKWfldjmkhm+iHycrNp26EzRQ43/VpFYK2pPXcNmkcEERpoYdX+PEyl0DXN28XP5ap2bMcWjSU4FkKIOkrenYUQ1bRsGERseCBWQ6df66spG3Mlho4voDvd4LcurepXXEtGRga33fMn/rfgB1YsnM38z/93XKCscLmcLFu+nGcGDSAi2ParXqdhkJX2MSHszimhcWgg3fsMwGK1VllBDggI4Mphl5+jOxNCCHGuSYAshKhG1zV0vCkFhq75Np75q0vB768VExrAuCuHENejN6PG38ii2TPJzTnKT8t+wONxY7Va6T9wELENz6z19SVRIZS5PBwusBPdPoEXp81l6bwvKMrLpmPrFvz+9lsv2LETQoiLgQTIQoiLUpMGgezNLaNNl5480SsRh9tkzeoUNq79iTEjhnPl5ZdVaQLya+i6RnyTBgRbDXRNY0CbYdw7fgSBFv2UucxCCCFqnwTIQoiLks2i06dVQ1IPF5JV4mD7hp/J2ZHKTaNGMHzwIHT97AJZXddoHxN6jq5WCCHEb+n0dp4IIUQ9FGyz0LdVBMaRnTz1+/G8+uKzjBk5gjVrVp/6yUIIIeotCZCFEBc1q6GzfvVP1Wo2CyGEuHhJgCyEuOhV1Ek2DKPWazYLIYSofZKDLIS46NWlms1CCCFqnwTIQgjBhV22TgghxLklKRZCCCGEEEL4kQBZCCGEEEIIPxIgCyGEEEII4UcCZCGEEEIIIfxIgCyEEEIIIYQfCZCFEEIIIYTwIwGyEEIIIYQQfiRAFkIIIYQQwo8EyEIIIYQQQviRAFkIIYQQQgg/EiALIYQQQgjhRwJkIYQQQggh/EiALIQQQgghhB9NKaVq+yLOVHR0NK1bt67yWHZ2NjExMbVzQXWEjEElGYtKMhZeMg6VZCwqyVh4yThUkrGoVJ/H4sCBA+Tk5FR7/IIOkGvSu3dvfv7559q+jFolY1BJxqKSjIWXjEMlGYtKMhZeMg6VZCwqXYxjISkWQgghhBBC+JEAWQghhBBCCD/GM88880xtX8S51qtXr9q+hFonY1BJxqKSjIWXjEMlGYtKMhZeMg6VZCwqXWxjUe9ykIUQQgghhDgbkmIhhBBCCCGEHwmQhRBCCCGE8FOrAfKhQ4cYMmQInTt3pkuXLrzxxhsA5OXlMXz4cNq3b8/w4cPJz88HIDc3lyFDhhAaGsp9991X5VxJSUl07NiR7t270717d44ePVrja6amphIfH0+7du24//77qcgw+fHHH+nZsycWi4XZs2efx7uuri6Nw0cffURMTIzv+f/5z3/O451XV5fG4uDBgwwdOpSEhASSkpI4fPjwebzz6s7lWDidTqZMmUKHDh3o1KkTc+bMqfE16/v8ONtxqE/z42zHor7Mj+LiYt/vs3v37kRHR/PAAw/U+Jp1bX7UpTGo7bkBdWs8anN+nMv3iRkzZhAfH09CQgIjRoyosV4w1L25cU6oWpSRkaFSU1OVUkoVFRWp9u3bq61bt6pHH31UTZ06VSml1NSpU9Wf//xnpZRSJSUlasWKFerdd99V9957b5VzDR48WK1bt+6Ur3nppZeqVatWKdM01YgRI9TXX3+tlFJq//79atOmTep3v/udmjVr1rm8zVOqS+Mwbdq0auf8LdWlsRg3bpz66KOPlFJKLVmyRN1yyy3n7D5Px7kci7/97W/qySefVEop5fF4VHZ2do2vWd/nx9mOQ32aH2c7FvVpfvjr2bOnWr58eY0/q2vzoy6NQW3PDaXq1njU5vw4V+PgcrlUTEyM773h0UcfVU8//XSNr1nX5sa5UKsB8vFGjRqlvvvuO9WhQweVkZGhlPL+ojt06FDluJom4ukEQxkZGapjx46+/58+fbqaMmVKlWMmT55c67/E2hyHuvAm5682xyIuLk4dOnRIKaWUaZoqLCzsrO/nbJzNWDRv3lyVlJSc9PwXw/w423GoT/PjbMeiPs2PCrt27VLNmzdXpmlW+9mFMD9qcwzq2txQqnbHoy7NjzMdB6fTqaKjo9WBAweUaZrqrrvuUu+//361818Ic+NM1Jkc5AMHDrBhwwb69OlDVlYWTZs2BaBp06Yn/Gr8eLfddhvdu3fnueee8y3v+0tPT6d58+a+/2/evDnp6enn5gbOkbowDnPmzCEhIYFx48Zx6NChs7yjM1fbY9GtWzff185ffvklxcXF5Obmnu1tnZGzGYuCggIAnnrqKXr27Mn48ePJysqqdlx9nx/nahzqw/w4F2NRX+aHvxkzZjBhwgQ0Tav2s7o+P+rCGNSVuQG1Px51ZX6czThYrVbeffdd4uPjadasGdu2beOOO+6odlxdnxtnqk4EyCUlJYwdO5Z//etfNGjQ4IzO8dlnn7F582ZWrFjBihUr+N///lftmJoCpJr+0deWujAO1157LQcOHCAtLY1hw4YxefLkM7qOs1UXxuK1115j+fLl9OjRg+XLlxMbG4vFYjmjazkbZzsWbrebw4cPM2DAANavX0+/fv145JFHqh1X3+fHuRiH+jI/zsVY1Jf54W/mzJnceOONNf6sLs+PujAGdWVuQN0Yj7owP852HFwuF++++y4bNmwgIyODhIQEpk6dWu24ujw3zkatB8gul4uxY8dy8803c/311wPQuHFjMjMzAcjMzKRRo0anPE9sbCwAYWFh3HTTTaxduxaPx+NLsv/b3/5G8+bNqyTKHz58mGbNmp2Hu/r16so4REVFERAQAMCdd95JamrqOb3P01FXxqJZs2bMnTuXDRs28MILLwAQHh5+Tu/1VM7FWERFRREcHMyYMWMAGD9+POvXr7/o5se5GIf6Mj/OxVjUl/lRYdOmTbjdbl8zhAtlftSVMagLcwPqznjU9vw4F+OwceNGAC655BI0TeOGG25g1apVF8zcOFu1GiArpbjjjjvo3LkzDz30kO/xUaNG8fHHHwPw8ccfM3r06JOex+12+3ZWulwuFi5cSNeuXTEMg40bN7Jx40aeffZZmjZtSlhYGKtXr0YpxSeffHLKc/8W6tI4VEwegPnz59O5c+dzfbsnVZfGIicnB9M0AZg6dSq33377+bjlEzpXY6FpGtdeey3JyckALFmyhLi4uItufpyLcagv8+NcjEV9mR8VZsyYUWWl8EKYH3VpDGp7bkDdGo/anB/nahxiY2PZtm0b2dnZAHz//fd07tz5gpgb58R5z3I+iRUrVihAxcfHq27duqlu3bqpRYsWqZycHHX55Zerdu3aqcsvv1zl5ub6ntOqVSsVERGhQkJCVGxsrNq6dasqKSlRPXv2VPHx8SouLk7df//9yu121/ia69atU126dFFt27ZV9957ry/xfu3atSo2NlYFBweryMhIFRcX95uMgVJ1axwef/xxFRcXpxISElRSUpLavn37bzIGFerSWMyaNUu1a9dOtW/fXt1xxx3Kbrf/JmNQ4VyNhVJKHThwQA0aNEjFx8eryy+/XB08eLDG16zP80Opsx+H+jI/lDr7sahP80Mppdq0aXPK32ddmx91aQxqe24oVbfGozbnx7kch3fffVd16tRJxcfHq2uuuUbl5OTU+Jp1bW6cC9JqWgghhBBCCD+1noMshBBCCCFEXSIBshBCCCGEEH4kQBZCCCGEEMKPBMhCCCGEEEL4kQBZCCGEEEIIPxIgCyFEPfTMM8/w2muv1fZlCCHEBUkCZCGEEEIIIfxIgCyEEPXECy+8QMeOHRk2bBg7d+4E4M033yQuLo6EhAQmTpxYy1cohBAXBkttX4AQQoizl5qaysyZM9mwYQNut5uePXvSq1cvXnrpJfbv309AQAAFBQW1fZlCCHFBkBVkIYSoB1asWMGYMWMIDg6mQYMGjBo1CoCEhARuvvlmPv30UywWWRMRQojTIQGyEELUE5qmVXts0aJF3HvvvaSmptKrVy/cbnctXJkQQlxYJEAWQoh64LLLLuPLL7+kvLyc4uJiFixYgGmaHDp0iCFDhvDKK69QUFBASUlJbV+qEELUefJ9mxBC1AM9e/ZkwoQJdO/enVatWjFo0CA0TeOWW26hsLAQpRQPPvggDRs2rO1LFUKIOk9TSqnavgghhBBCCCHqCkmxEEIIIYQQwo8EyEIIIYQQQviRAFkIIYQQQgg/EiALIYQQQgjhRwJkIYQQQggh/EiALIQQQgghhB8JkIUQQgghhPDz/3VzLG5Hrj2tAAAAAElFTkSuQmCC"/>
-          <p:cNvSpPr>
-            <a:spLocks noChangeAspect="1" noChangeArrowheads="1"/>
-          </p:cNvSpPr>
-          <p:nvPr/>
-        </p:nvSpPr>
-        <p:spPr bwMode="auto">
-          <a:xfrm>
-            <a:off x="155575" y="-144463"/>
-            <a:ext cx="304800" cy="304801"/>
-          </a:xfrm>
-          <a:prstGeom prst="rect">
-            <a:avLst/>
-          </a:prstGeom>
-          <a:noFill/>
-          <a:extLst>
-            <a:ext uri="{909E8E84-426E-40DD-AFC4-6F175D3DCCD1}">
-              <a14:hiddenFill xmlns:a14="http://schemas.microsoft.com/office/drawing/2010/main">
-                <a:solidFill>
-                  <a:srgbClr val="FFFFFF"/>
-                </a:solidFill>
-              </a14:hiddenFill>
-            </a:ext>
-          </a:extLst>
-        </p:spPr>
-        <p:txBody>
-          <a:bodyPr vert="horz" wrap="square" lIns="91440" tIns="45720" rIns="91440" bIns="45720" numCol="1" anchor="t" anchorCtr="0" compatLnSpc="1">
-            <a:prstTxWarp prst="textNoShape">
-              <a:avLst/>
-            </a:prstTxWarp>
-          </a:bodyPr>
-          <a:lstStyle/>
-          <a:p>
-            <a:endParaRPr lang="ru-RU"/>
-          </a:p>
-        </p:txBody>
-      </p:sp>
-      <p:sp>
-        <p:nvSpPr>
-          <p:cNvPr id="6" name="AutoShape 6" descr="data:image/png;base64,iVBORw0KGgoAAAANSUhEUgAAAsgAAAGoCAYAAABbtxOxAAAABHNCSVQICAgIfAhkiAAAAAlwSFlzAAALEgAACxIB0t1+/AAAADh0RVh0U29mdHdhcmUAbWF0cGxvdGxpYiB2ZXJzaW9uMy4xLjAsIGh0dHA6Ly9tYXRwbG90bGliLm9yZy+17YcXAAAgAElEQVR4nOzdd5Sdd33v+/dTdi8zo+mjsXqxLBfZlgvEGIwxnJCEpsQ2cW4gmCiEk5V7MHAuiQ85HEIMKT4XcvG6RkkIDsm100yJQ+xQnBgMxmAsN9myZPUZlWl7dt9PvX/s0d4zlmTL0nR9XmuxrHl2++2fxFof/fR9vl8jDMMQEREREREBwJzrBYiIiIiIzCcKyCIiIiIikyggi4iIiIhMooAsIiIiIjKJArKIiIiIyCT2XC/gbHR0dLBixYop11zXJRKJzM2C5gntQZP2okl7Uad9aNJeNGkv6rQPTdqLpsW8F/v27WN4ePiE6ws6IK9YsYKf/vSnU64NDg7S19c3RyuaH7QHTdqLJu1FnfahSXvRpL2o0z40aS+aFvNebN68+aTXVWIhIiIiIjKJArKIiIiIyCQKyCIiIiIikyggi4iIiIhMooAsIiIiIjKJArKIiIiIyCQKyCIiIiIikyggi4iIiIhMooAsIiIiIjKJArKIiIiIyCQKyCIiIiIikyggi4iIiIhMooAsIiIiIjKJArKIiIiIyCQKyCIiIiIikyggi4iIiMic8PyAQtWb62WcQAFZRERERObEsWKN7+0eYqTkzPVSplBAFhEREZE5MV7xIIQjhepcL2UKBWQRERERmRNjFZd4xJrrZZxAAVlEREREZl0QhBRrHlHLmOulnEABWURERERmXc0PCAgxUEAWEREREaHq+jAPwzEoIIuIiIjIHKh6AQbhXC/jpBSQRURERGTWVRwfy9AJsoiIiIgIUD9BtkwFZBERERERXD+g6vrzNiDbc70AERERETl3HC3U2D1cxMDAMg2CYP7VIesEWURERERmzf6xMoWqT9Xzsc35GUXn56pEREREZNFxvIDRskNAiOOFzMMZIYBKLERERERklpQcD0IDx/MxDDCM6Fwv6aR0giwiIiIiM871A44WamCE1LwAP5jrFZ2aTpBFREREZMYNlxwGxqtETJPlbQnMedoDGXSCLCIiIiKzwDIMhksOiYhFxDLnbYs3UEAWERERkVnghyEtCZuYPf/j5/xfoYiIiIgseK4XYDB/T40nU0AWERERkRnnBMG8bev2cgrIIiIiIjLjXC/EnMd1x5MpIIuIiIjIjHP8AGsed66YTAFZRERERGbUaNkhV3XndWu3ydQHWURERERmRBiGHCnU2D4wjh+EtCUjc72k0zJjJ8gHDx7kuuuuY8OGDWzcuJEvfOELAHzqU59i6dKlbNq0iU2bNvGtb32r8ZrPfvazrFmzhvXr1/PQQw/N1NJEREREZBZUXJ8Xh4q4Qch41cM2F0bxwoydINu2zZ133slll11GoVDg8ssv54YbbgDgIx/5CB/72MemPH/Hjh3cd999PPfccwwODvKWt7yFF198EcuyZmqJIiIiIjKDKm7ASNmFEM7vSs/1ck7bjMX43t5eLrvsMgAymQwbNmxgYGDglM//xje+wc0330wsFmPlypWsWbOGxx9/fKaWJyIiIiIzrFTziFkmS1vic72U12RWapD37dvHk08+yVVXXcWjjz7KF7/4Rf7mb/6GzZs3c+edd9LW1sbAwABXX3114zX9/f0nDdTbtm1j27ZtABw5coTBwcEpjw8NDc3sl1kAtAdN2osm7UWd9qFJe9GkvajTPjRpL5rOdC+CMGT7oXGilkmxduqb88qOj12NMBgUz3SJ027GA3KxWGTLli18/vOfJ5vN8tu//dt88pOfxDAMPvnJT/LRj36UL3/5y4RheMJrjZPc6bh161a2bt0KwObNm+nr6zvhOSe7dq7RHjRpL5q0F3XahybtRZP2ok770KS9aDqTvSjVPKIFm85U7BWfZ1U92jJR+nqyZ7q8aTejldKu67JlyxZuueUW3vOe9wDQ3d2NZVmYpslv/uZvNsoo+vv7OXjwYOO1hw4d0h9MERERkQXKDUIIF0Zbt5ebsYAchiG33norGzZs4LbbbmtcP3z4cOPXX/va17jwwgsBeMc73sF9991HrVZj79697Nq1iyuvvHKmliciIiIiM8j1AzBOrBBYCGasxOLRRx/lq1/9KhdddBGbNm0C4I477uDee+9l+/btGIbBihUr+NKXvgTAxo0bufHGG7nggguwbZu77rpLHSxEREREFpgwDPGDEMcLMFiYJ8gzFpCvueaak9YVv/3tbz/la26//XZuv/32mVqSiIiIiMygqutztFBj72iZznQM21RAFhEREZFz2LFCjUPjVY4VHSzTWLABeWGMMxERERGReW+s4lKoekBIqeaTiCzMclkFZBERERE5KxXXByBXccnXPFJRm7Fq/RR5IVJAFhEREZEzEoYhuYrLD/eNkqu4VDyfzlSE7nSUNe2puV7eGVMNsoiIiIickX2jZQbzNXJll3zVhRCy8QjAAu1fUacTZBERERE5I4P5GhXXp+YHlGo+nGQK8kKkgCwiIiIiZ8TxA6quj4lBwanfnLcYKCCLiIiIyBlx/ICS42Oa4HgBC7uwokk1yCIiIiLymuQqLumoRRhAVzqKaRh4QYhOkEVERETknJOvuvzsUI6SU2/tlo1HiNsmYxWXhL0w+x6/nE6QRUREROS0PH+kwFDJYajkMFp2G/fk2ZZJbyZGxFocZ6+L41uIiIiIyIzZNVSk5vmUXZ+jhRodySjHilXCSRUViyUcg06QRUREROQUDoyV2TdcglSUznSMkJCeTAzThKLjL5aubidYPFFfRERERKZVzQ0YqzgUaj5V18fxQizTIGaZjJRckpHFUXP8cgrIIiIiIjLFk4fGOZyvYphQqNbDcdHxqPkBlgGGYdDfEicZXZwBWSUWIiIiIjJFruJgWwa2YRC3TRIRi1zFxfEDMhOhOGYv3nPWxfvNREREROQ1C4KQmheSr7pU/YC4bdKZjjJUdPCDEGOxFh5PohNkERERkXNcEISEgGUaHMlX8YKAimsQMQNM08A0DNwgPGdOVs+V7ykiIiIip7B7uMjTg+NUXJ+nj+TpTEXx/ICq52NNnBhnohYFx5vjlc4OnSCLiIiInOPyNY/xqkex5gEGtmViGAY1r1lSkY1HyMYjc7vQWaKALCIiInIOGys7jFc9SjWfkZLTKC8IJqaA2Iu/5PgEKrEQEREROcc8PZinWPPwg5CfHhxnqOgQsUyGS06jO0XNC6i6Piggi4iIiMhi5ngBh/NV9oyUqLg+fhiwtiNFwjYZLTvEJ4Z/VL2AiufP8WrnhkosRERERM4hPzs0TtXzGRivsiQZJQwnbsKL22TizWjY3xLHMKCaK83VUueMTpBFREREzhF+EJKruFTdAIBjRQfrFCUUiYhF3F6ck/JejQKyiIiIyDnC9QP8MOC81gSmAcWat6gn4p0plViIiIiILGKOF3AoVyFqGySjNpZpErNNKq5JoebSmYrN9RLnHQVkERERkUVsrOKy/XAezw9Y15GG4+3bTIN8zaMnE5/jFc4/CsgiIiIii9DgeJVC1cULQ1rjNhHTJFd1Od63LR2zWR1Jze0i5ykFZBEREZFF6EihSsX1MTCI2xZRy2C47NCaaE7Ds8xzsMnxaVBAFhEREVmESjWfIAxxg4CWuI1hGKo3Pk0KyCIiIiKLTBiGVLwAywDPDzENnRS/FgrIIiIiIotIEIQMlRz8ICA0jHNyVPTZUkAWERERWUT2j5V5ejBPxDKp+QEqM37tFJBFREREFpGy65ON22RiNsWaTyJ6bk7DOxsKyCIiIiKLSM0NsE0TwzDIxBX1zoR2TURERGQRKFQ9jhaqVL1A7dvOkgKyiIiIyCLw0kiJkZKDaRgkVVZxVsy5XoCIiIiInB0/CDlWqFHzA2oT7d3kzOkEWURERGSBy1Vc/DDEC0IsI8RQ3+OzooAsIiIisoBVXJ+nBvNkYjZVNyAknOslLXgzVmJx8OBBrrvuOjZs2MDGjRv5whe+AMDHP/5xzj//fC6++GLe/e53k8vlANi3bx+JRIJNmzaxadMmPvShD83U0kRERETmvWOFGp4fnPLxIKgH4dGSg+P7JCIWbckIS5LR2VriojVjAdm2be68806ef/55HnvsMe666y527NjBDTfcwLPPPsvTTz/NunXr+OxnP9t4zerVq9m+fTvbt2/n7rvvnqmliYiIiMxrR/NVHj8wxljFBeDAWJmxstN4PFdx+fGBMUZKDoWaR9TSbWXTacZKLHp7e+nt7QUgk8mwYcMGBgYGeOtb39p4ztVXX80//dM/zdQSRERERBYMzw94+nCe87vS7DhWxDIN9o2WSUUtnh7Mk4nb9GbidKSjPH+0wJGCQ9n1SUdtBeRpNis1yPv27ePJJ5/kqquumnL9y1/+MjfddFPj571793LppZeSzWb5zGc+wxve8IYT3mvbtm1s27YNgCNHjjA4ODjl8aGhoRn4BguL9qBJe9GkvajTPjRpL5q0F3Xah6a52IvxisszB3OExQyjoxVa4zYvDTuY5RTVXJkqMDgQsK4rze7DBZYkI4wWAsZNg0zUpjZDGbmYG52ZN55QdnzsaoTBoDijn/NazHhALhaLbNmyhc9//vNks9nG9T/6oz/Ctm1uueUWoH7ifODAAdrb23niiSd417vexXPPPTflNQBbt25l69atAGzevJm+vr4TPvNk18412oMm7UWT9qJO+9CkvWjSXtRpH5pmcy8qrs9LB3O0dkSxMklSYZXWdAwv6WBnYqRJ05mKMlSsEWtJ0EOajlSUwXwVA1iSjc/o+lo7umfsva2qR1smSl9P9tWfPEtm9DzedV22bNnCLbfcwnve857G9XvuuYcHHniAv/u7v2u0IYnFYrS3twNw+eWXs3r1al588cWZXJ6IiIjIvLBnuETV9elIRslVXJjIR3HbpOh4cLwzhWGQr3pEJhod17x632OZXjMWkMMw5NZbb2XDhg3cdtttjesPPvggf/zHf8w3v/lNkslk4/rQ0BC+7wOwZ88edu3axapVq2ZqeSIiIiJzbrziEgQhBccnGbGwLRPXb7Zpi9sm41WPsHEpxPWDRs1xEIIfqq3bdJuxEotHH32Ur371q1x00UVs2rQJgDvuuIPf/d3fpVarccMNNwD1G/XuvvtuHnnkEf7gD/4A27axLIu7776bJUuWzNTyREREROZUGIY8cSjHqvYUFdcnaZvYpkHZ8QhCIAW2ZZK0LaK2OfEayNc8ejMxAJa3zmxpxblqxgLyNddcQ3iSv9G8/e1vP+nzt2zZwpYtW2ZqOSIiIiLziuMHlByfw/kqjh+QiVoARGxzSobKxJtxLWqZ5KtOo0TVVveKGaFJeiIiIiKzLAhCtg/kgXpP4yBsjofuTsdO+brWRITWRGRW1nguU0AWERERmWUV1+dooYZlGFTdANOY6xXJZDqXFxEREZllJccnYhv0ZGNk4zZuoBvt5hOdIIuIiIjMsmLNw54oqVDZxPyjE2QRERGRWeR4ASXHI2Iqhs1XOkEWERERmSXDxRq7h8tg0Bj2IfOPArKIiIjILBkqOeRrHrYBqZhi2Hyls30RERGRWVDzfA6PV3H9gJofYKt1xbylv7qIiIiIzILH9o8xVnWxDQP1rJjfdIIsIiIiMkOOT8SreT4Vx2dZawLHD/HV1m1eU0AWERERmQFlx+Ox/WOEYUjJ8cEwMA2DrnSUnuypp+XJ3FNAFhEREZlmfhDy4lCJw4UaP96fo+YFMFFYkY7ZxG1rbhcor0g1yCIiIiLTpOx4VFyfiGVyOF+lIxnhWLFGJm41BoPI/KeALCIiInIWjhVqpKIWzx4pkI5ZjJRcLuhOYxgGqahN2fXJVVwilv7hfqFQQBYRERE5C88fLdDXEme4VONIIcQ2TcYqLsd7VRgYOF5A1FZAXij0OyUiIiJyBmqez+6hIrmKS80LsEyDpdk4lmEwVnaxJ0ZJZ2M2+ZpHVCfIC4Z+p0RERETOwKFchScH8limwXjVhdDAMAwMA6pecxBI1Dbpb0lgqgZ5wVCJhYiIiMgZGMzXWNoSB6Dq+WA0exsXah6dqehcLU3Okk6QRURERF6jMAwpOz5RyyBmm+SrHjU3AMCeOFG2NEr6tOw8ViQI59fgFAVkERERkdPkByGPvDTC4HiVMARjomyiLRGhY+LEuDURYV1Hai6XuWC8cKzI73z9Wf7isQNzvZQpVGIhIiIicprKjs9w2SEVtTg++APqwz8mM1RvfFq++IO9ZGI2N23qm+ulTKETZBEREZHT4PkBzx8rEAQhFdcHZeCz8uJQkccO5Hjnxm5aE5G5Xs4UCsgiIiIip2G86rF/tMKSZISKG2gy3ln64g/2sSQZ4V0X9sz1Uk6ggCwiIiJyGoZLDkuSEdJRm6LjEbOtuV7SglVyPB4/mOMXNnTREp9fp8eggCwiIiJyWko1j4hlYJkGZcfTZLyz8OyRAl4QcvXytrleyknpJj0RERGR01Af/lEPxed3ZeZ4NQvbUNEBYGk2PscrOTn91UdERETkFRRrHodyZaqur97G02S4VA/I7fN0mIoCsoiIiMgrGCs77Bkp4wTN8dFy5h7ePczjB3OkohaJyPys41aJhYiIiMgpuH7AofEqhZpPOM+mvS1Ezx0p8PEHngdgWVtijldzajpBFhERETmF/WNlhoo1whAcXwH5bP3tzw41ft2RnJ/lFaATZBEREZGTcryAvSMVutMxbMvUCfJZ2jda5uHdI42fV7cn53A1r0wnyCIiIiInMVSs4QchtlWPSxoffXa++sQhopbJHT9/PgA3Xzq/xktPphNkERERkZOoeD5qdTw9gjDkB3tH+bmVbbx1fSc3rOuY13/h0G+7iIiIyEnUvEBt3abJsUKNkbLL5v5WYP6fxisgi4iIiEyouD6FqsezhwvUXAXk6XK873F3JjbHKzk9KrEQERERAcIw5KcHc0RMk3zVJen6jcl5cnaGJgJyxzwdDPJyCsgiIiJyTgvDEC8Iqbg+QyWHhG0SUB8tnYkpKp0NPwj52AM7+P6eUWDhBGT9tUhEREQWLT8I+eHeUXIVF4Cj+Sp7RkqNnx0vYPvAON/fM0LJ8bEMcLwQEwPHD7BUYXFWHtx5rBGOTQPaEpE5XtHp0V+LREREZNEaLTsczFVoT0XJxmyeOpzH9QNilsWb1rTz1OA4o2WXEMhXXeK2RUcqyohjY1nmvL+ZbD7LVVy2PXag8bMBC6amWyfIIiIisuhUXJ9izWNgvEp7MsLBXIWK6xOEIT2ZOF4YMlRyGC67jX/2Hyt72BMBzjKhdYGcds5X//jUIIPjVT541XkArOlIzfGKTt+MBeSDBw9y3XXXsWHDBjZu3MgXvvAFAEZHR7nhhhtYu3YtN9xwA2NjY43XfPazn2XNmjWsX7+ehx56aKaWJiIiIovcM4N5nj1cYLziko7ZuH7A4UJtynPGKy5GYzpeiOMHjYAsZ+/bu4a5dGkL77/iPLZc1MOd79g410s6bTMWkG3b5s477+T555/nscce46677mLHjh187nOf4/rrr2fXrl1cf/31fO5znwNgx44d3HfffTz33HM8+OCDfPjDH8b3/ZlanoiIiCxiBccjCEOqXj302qbByEQnBaj/c/941eN4BUUqYjNadohY+sf16RCEIfvHKlzSlyVuW/ze9WvpWSAt3mAGA3Jvby+XXXYZAJlMhg0bNjAwMMA3vvEN3ve+9wHwvve9j69//esAfOMb3+Dmm28mFouxcuVK1qxZw+OPPz5TyxMREZFFyPMDXjhaoFD1qHg+IfWhFImIxVjZJTYRgGOWSbHmEZ34ORm16MnEiGl03lk7MFbhkZdG8IOQzvTC6FrxcrNyk96+fft48sknueqqqzh69Ci9vb1APUQfO3YMgIGBAa6++urGa/r7+xkYGDjhvbZt28a2bdsAOHLkCIODg1MeHxoamqmvsWBoD5q0F03aizrtQ5P2okl7UbcY9mEgV2HXcIlUzCKXh5CQSCVCGMJ42aEjGSVXhCCAkuORidnkiie+TzE3OvuLn6dey148fbTMbd8+1Pg56ZfJDR99xdeUHR+7GmEwOMlvxByZ8YBcLBbZsmULn//858lms6d8XtioAWo62Z2jW7duZevWrQBs3ryZvr6+E55zsmvnGu1Bk/aiSXtRp31o0l40aS/qFvo+DDPO0mgL6ZjNYL5KxDJoTdX/ab/tZc9d8irv1drRPSNrXIhOZy+ePVLg49/dNeXair5uWjsyr/g6q+rRlonS13PqnDjbZvTfEVzXZcuWLdxyyy285z3vAaC7u5vDhw8DcPjwYbq6uoD6ifHBgwcbrz106NCC/z+piIiIzLyfHBjD8QIAqpPGQ/dl43SmFk7d60L3d08cIhmx+KOfX9+41rVASyxmLCCHYcitt97Khg0buO222xrX3/GOd3DPPfcAcM899/DOd76zcf2+++6jVquxd+9edu3axZVXXjlTyxMREZFFwPMDxqseRws1Do9XqHq+OlHMkjAM+dozh/nIN57jE//6PDuHSlze38JVy5pn9e3JhRmQZ6zE4tFHH+WrX/0qF110EZs2bQLgjjvu4BOf+AQ33ngjf/VXf8WyZcv4x3/8RwA2btzIjTfeyAUXXIBt29x1111YljVTyxMREZFFoOoFFGoeO44WsC0DPwhJRJQfZsr+sTIHxip0pmMMjFf5o+/unvL461a00ZqI8KHXLefnVrQtmMEgLzdjAfmaa645aV0xwHe/+92TXr/99tu5/fbbZ2pJIiIisshUXJ9ExCIbsxmtuBgGmJp+N22GSw4/OVSktxanKx3j1+/dTsmpt+Fd1Z6kJW7zv9+xkVv/4SkAutP1kpYPXrVsztY8HTRqWkRERBasmudjAFHbxA/CUx7OSV2u4vKF7++lLxvjFzZ0k4iYfOuFITb3t7CuM8X+sQoP7RyiLxvnDauW8Jv/+BQHc1VgkPWdKUqOz7sv7OFrzx5hz0iZi3szrJ00IW+h1hy/nAKyiIiILDiOF3BgrEwQ0qg57s7EqHkaMvZyf/ezAb6/Z4RMzCZqmzy0s97O7/5njrC8LcFPD40DcOMlvTyyZ5QjExMHV7QlOJirct2KDA/vK7BzqETMNvm969fwrReOUfMCejJxktFmSct5rYnZ/4IzQAFZREREFpx9Y2X2jVboTkcbAdk2Dezowo02ZcfHMCARsThSqNGVjp51uciP9o3xfz+yZ8q1K5e1cnFvhr/88UGGSg6b+rLkax7/8FS9y9j7Nvfz8Esj7BurAPAbl7RztBKy42iR3kwM0zDozcTYN1ahN1svqfj4m1bj+gEXdKfPar3zxcL9UyQiIiLnpKP5KruHS4Qh5Gvegu9a4fkBH/rnZ9g+mKc1YXPzpqXc/aP93LC2g9+7fg3ZeOQ1v+exYo3tA3l+cjBHImLylZs3cdNXfwZAf0uci3ubPYffsq6DQtXjSyMHALhqWSu5isuBsQoG0JmMsDQbrwfkbByAznSUfWMVlrbUf75p0+JqzauALCIiIgtGEIQ8e6RAS9ymUPNwvIB0dGF3rfi3F4bYPpgnGbHIVTzu/tF+AL69a5jxmsdd777wpMPTTuWRPSN84l+fx/Hr9dir2pOc19IsfejNxOmbCLpQ7xddiHnNx7Nx+iaCbzZuE7GMRhDumzgx/t1rVvLUYJ6fP7/rDL/1/KaALCIiIgtG0fFw/JDWRD1MhmGAZS7MODNedfn+nlG2D46TiJh88wNX8JYvPQbAW9Z2sKo9ybbHDrBzqMRgvsobV7W/atu0sbLD73/rBaKWiePX67F7MjGidnP0RW82Rk+2OUClLxunUGsG5O50jKUTAbpl4vT6XRf1ELVNfumC+kS9Dd0ZNnS/8oS8hWxh/okSERGRc8bxzhSGYVB1Awyj/rM30bXitZyuzhcjJYet//Q0+yfqfFe0JWiJ28Rsk5oX0JeNs26iO8Sv/X9PAvAbV5zHh1+//BW/76P7xqh6AX/7q5fyiX99nkPj1UbrtXds7ObH+8e4sDdD3Lb4xQ1dHCnUWNaaoOz6JCMWy9sSRG2Ta1e18+HXL+fnViwBSvS3JNh69fKZ3ZR5RAFZRERE5rW9I2V2j5RZ25HEMAxM6gFxaTa2IMNxGIZ85JvPNcIx1DtwGIZB1JoIyC1xeiaVQQD89U8Oko3b/B+X90+5fjBX4Ss/Och/vDRCW6J+4rtySZKWeIRD49XGafEf3LBuyus+9bbmSOiobfLwb7+O4wfUyajFB66s9zLODZem54svIArIIiIiMq8dLlSJ2wbPHyvSmYoSterlAgsxHAM8d7TIjqNFPv6m1Tyw4yjPHyvSnamH2Js39fEvO46yqS9Le7J5c97/dd1qHt49wn3bB4lNtGr7pQu6+S/rO7ntm8+xd7QetserHq2J+kn029Z3UvF8fn796dUJL9SpdzNBAVlERETmLdcPyFc9utIxyk59rHRsUj3tQhOGIXtG6ieyP7eyjUf3jgL1zhIAv/W65fzW65Y3nnvcsrYEl/Rlefxgjj95+CUAnhrM87VnjrB3tMJH37iKh3eP8LOB8UZJxa9etpRfvWzprH23xUQBWUREROYtL2jWGDu+T82HlvjCG0YRhiF//9Qgf/79vcTseteNzlSMd1/UQyJq8SsXn9gmzTAMfv78Lv79xSFWt6c4nK81Hvu9N6/h/mcO89zRAgCXLW1h93CpHpAzsRPeS14bBWQRERGZd8IwxAtCXD9oXGtLRKm482tSXhCGGIAfwuMHxtjc3zqlY8Rxf/IfL/GPE4M4HN+jLREhZptct6aD69Z0nPL9//C/rOd/vGUtMdukZ1LwXdeZ4uLeLDuH6qfRPdlYY4rdJX3Zk76XnD4FZBEREZl3hksOO48Vp7QSS0atKWON51Kx5vFf73+W548V2NCVYX1XivufOUJL3Ob33ryG81oT/P1Tg5zXkuDnVrbxz08f5tpVS/D8kB/uH6MrHT3tzzpeUjI5IC9tafYqBsjGbG6+tI/zu9Jctax1+r7oOUoBWY9dB4kAACAASURBVEREROaVMAwZr7gcLdToysSA8FVfM9vufXKgUd7w3NFC49dRy+RzD+8mYVscLtRLIv7miUMEIWy5qJcf7R/jh/vH6EidfkA+rr8lTn9LHD8IaUtEGsM+opaBYRjEbYurl7dN0zc8ty3cKncRERFZlI4WauwcKmJbBmNld17l45GSw4MvHGPHsSKrliT5yk2XNB573+Z+3nvpUnIVj8OFGrdeeR7XrFzSGMLRk41xUW/9RPxdF/a85s+2LZP737+Zf37fZgzD4IrzWnj7hi7uePuG6fly0qATZBEREZlXBsarJCIWMdskV3HnTTu3QtXjXV/5CRW3Xhf9+uVt9E7qVdybjdMab0artZ0pTMPgBxOdKrrTMVYtSXLlea20JV/7CTKAaRhE7fp+ZOMRPj2pl7FMHwVkERERmVdGyg5tiQimYZCreLTE5z6uhGHIh+9/phGOoT7cY8mkXsVLs3Eyk9a6NBunOun56Vj9sTMNxzJ7VGIhIiIi88LgeIXhYo0gDDEnTo17MjESkbm/Me+pwTzPHyvysTetIj5x09zx6XfXrW6nPRlhXWeKvmzzRrrebJwVS5IArJr4rywMc/9XMhERETmnBUFIvubx7JH6pDyYHyUVk20fzAPwixu6ufuH+4HmcI8//aULGs8Lw5DfunoZFTegJW7TEk9z95aL2NCdnv1FyxlTQBYREZE5la95PDU4Tq7ikIyYzKu78qhP8ztarJGOWqRjNh954yp2Hivy5pP0LzYMg9+8evmUa5vPU9u1hUYBWUREROZUzQs4nK/RlY5SmzQYZD74zotDfOJbLwDNMol3buyBjXO5KplpqkEWERGROVWouXQkI2RjNlXXJxOdH+d3e0fLfPZ7uxs/d76G4R6ysM2PP4EiIiJyzjk4VsY2TfIVj6htYhgGPZn4q7/wNIVhyEM7h4jbJpvPa210kTjd197+by8QhpCMWJRdn6507NVfKIuCArKIiIjMKscLCMKQZ44U6EpFKTl+Y5zydKi4PuMVl6cPF/gfD+4EoC8b4463b+DeJwf4jSvOY01H6hXfY0/O4cWhEp948xr+fecxfjaQZ1W7OlGcKxSQRUREZNqFYUjNC3D9sNEbuOrWg/Czh/M4fogXhJRcn6rnk4pOTyu3v3hsP3/9k4M4fsjSljiWafDOjd3c/8wR/uv9z1ByfL67a5j/9bZ1vG1910nf42ihxr5cfUz0pr4sXekoyegRfuWS3mlZo8x/CsgiIiIy7Z45nOdQrko8YnJJXwtPDoxT83w297cShHBovEJvJka+5hHCtEzLe+FYkS89doCIVX+vgfEqF/dmuPGSPu5/5gglx2djdwYvCPjc916iLRHhgeeP8RtXnMfKJUm2D4zzvx/Zw46jxcZ7dqdjrOlIce2q9rNenywcCsgiIiIyrUo1j4HxKu2pKKNlh/GKS80LaIlH2D1cwgtC+lviRCyT0YrL2WbjXMXlR/vH2D9WBuBfPnAlW+75KSXHpycTpyfTrB1+/Yo2WuI2f/afe/iv9z9LCHzr+WP8t2tXcu/PBjhadBrPjdsm6djcDymR2aeALCIiItPK8QMMDGzTwDAgV3WJ2yaJiMXRYg2D5tjlvuzZ3ZT3yJ4RPvOdXYyWXQBitkl7MkJPJsZLI2V6s7EpN+ctbYmTnijnCIFf2NDFc0cKfOGRvYTA/7xhHT8bGOdfdhyla2JSnpx71OZNREREpkUYhgwVa7h+2DgVNjAo1vxG2UMqYjXGSJ+tkuPxqYdexPWbg0WOj3/unQjex2/GO36D3colSXomhfJrV7VzzcoljdEkS1vijXHR2dfQ9UIWF/3Oi4iIyFnLV132j1Y4OF5hXWea49PwQkLcICBp109t0zGbs+2W5ngBjx/MUax55GseX3jnRu59coDHDuTomXjz265dxS9e0MX1E9Pu7rl5E/vHKpzflSZXcRvvtbQlznCpWVbRl43h9GYB+LXLlp7dQmXBUkAWERGRs7ZvtMyLQyWilkGu4jROidNRm1zFo2WaTmOfPZznkw/t5GCu2rjW3xpvnAp3T9QbL2tLsKwt0XhOImJxflcagJa4TWcqymjFpb8lzlCx1nheRzpGTzbOv9y8ht6ezmlZsyw8CsgiIiJy1qpuQE8mRsnxqHkhllkPyImIRSIyPTe6hWHIp7+9a0o4hnqniTesXMJPDuS48TRasRmGwTc/cAXjVY90zGblRPlFRyqKfXzd09iXWRYeBWQRERE5K2EYMl51aU1EcHyTYs0jEZm+gOkHIf+5Z4SoZbJntMxHrl3FkUKVe58cpCVuE49YvHF1O29cffqt2CKWSUeqPjq6vyXB196/mdZ4ZNrWLAubArKIiIicFS8I8YMQ0zDIxmwKNW/aTo1HSg6ffHAnjx/MNa4tbYk3Tnoj1vQE8fNaE6/+JDlnKCCLiIjIWXH9gONtKwzDIDuNJ7HbHts/JRwD9GRi9GRiWAZ84Mrzpu2zRI5TQBYREZGzUm+zFr7q887E9/eO8tZ1nbx+RRuf+vcXAehOR2lLRnnsd69Rn2KZEQrIIiIiclZcPwCmL6h6fsAfP/wSwyWHoaLDsrY4/a3N3sWtifoJtcKxzBQFZBERETkjrh/wwrECcdvCmKYT5Krn87Fv7uCxA82yiu50jDXtKdZ0JHnruk4FY5lxCsgiIiJyRgbGqzxzuEB/SwLbnJ6b5R7YcYzHDuS4pC/LU4N5ALrS9XHR9/3a5dPyGSKv5lX/NH/xi19kbGxsNtYiIiIiC0QQhLw0XGJ5W4Ky65GNT8+Z2w/2jrKiLcEfvm1949rx4R8is+VVA/KRI0e44ooruPHGG3nwwQcJw5kpwhcREZGFI1d1cfyAuG3RmYo1JuedqZ8ezPGlH+1nYLzCsrbElFCsFmwy2141IH/mM59h165d3HrrrXzlK19h7dq1/P7v/z4vvfTSK77uAx/4AF1dXVx44YWNazfddBObNm1i06ZNrFixgk2bNgGwb98+EolE47EPfehDZ/m1REREZCblqx7WNNUC/81PD/Ghf36Gv/jxAfaOVuhOx7BMg7/8lYv5tw9eSUxT7WSWnda/hxiGQU9PDz09Pdi2zdjYGL/8y7/MDTfcwJ/8yZ+c9DXvf//7+Z3f+R1+/dd/vXHt7//+7xu//uhHP0pLS0vj59WrV7N9+/Yz/R4iIiIyi0ZKDvFpmJb31GCeP//BXrIxm3zNA+o1xwCblra80ktFZsyrBuQ///M/55577qGjo4MPfvCD/Omf/imRSIQgCFi7du0pA/K1117Lvn37TvpYGIb8wz/8A9/73vfOavEiIiIyN/I1j+QppuV9d9cwdz26j650lN99w0oGx6vsHCpx06Y+OlJRdg2VeHJwnKhlsnu4RNQy+OYHruBN/++PAOjKRGfzq4ic4FUD8vDwMPfffz/Lly+fct00TR544IEz+tDvf//7dHd3s3bt2sa1vXv3cumll5LNZvnMZz7DG97whpO+dtu2bWzbtg2o10cPDg5OeXxoaOiM1rSYaA+atBdN2os67UOT9qJJe1F3uvsQhiGjx3IEiRNjRBiGfPY7e8jVfA7kKvz+A89xqOAC8LdPHOIjV3fz/zx+lIrXvKdpaSaCVxhp/Nxr18gNHz3Lb3N2irnROf38+WSm96Ls+NjVCINBcUY/57V41YD86U9/+pSPbdiw4Yw+9N577+W9731v4+fe3l4OHDhAe3s7TzzxBO9617t47rnnyGazJ7x269atbN26FYDNmzfT19d3wnNOdu1coz1o0l40aS/qtA9N2osm7UXd6eyD4wWkCxFaU82T3qrr89nv7cYLQnI1n4+9aRVPDeb59ovDAPzW1cv4y8cPcuePjuCH8N/esJLPf38vAL0tSVo7uvnjX7Dwg5DL1nbOzJd7jVo7uud6CfPGTO6FVfVoy0Tp6zkx982VWa969zyP+++/n5tuuqlxLRaL0d7eDsDll1/O6tWrefHFF2d7aSIiInIaXD+YMhYkCEP+7D/38K/PH+OhnfVT6J5MnL5sc/rduy7sYX1nCj8Ey4CbL13K0onHj3esuH5tB29dPz/CsZzbZj0gf+c73+H888+nv7+/cW1oaAjf9wHYs2cPu3btYtWqVbO9NBERETkNbhDCpIj8Hy+N8PVnj0ypSe7JxOidFJDbU9HGz13pGLZpsCRZHxmtPscy38xYQH7ve9/L6173Onbu3El/fz9/9Vd/BcB99903pbwC4JFHHuHiiy/mkksu4Zd/+Ze5++67WbJkyUwtTURERM7QYK7CsWINaLZ4e/CFY7QnI/zJLzZLL3syMfpb6oE4ETExDYO+bD0I907894plrQBcu6p9llYvcnpmbNT0vffee9LrX/nKV064tmXLFrZs2TJTSxEREZFpUPN8nhzMk4nZWJNaIO8cKnF5fyur2pONay1xm8v7W/jItatYtaR+feXEf5e31f+79erl3HrlMvU5lnlnxgKyiIiILB5+ELLzWJEgCBktO3RO3KAXhiHDRYeu1VG60jHu/KULWN+ZwjAMIpbBLZctbbzHL17QzQXdGfpb6yfLtmlgm9MzbERkOikgi4iIyKsq1DwO5Cr0ZGOMll1itonjBTx9OE/ND+hI1wPzG1efulzCNAzWdKRma8kiZ0wBWURERF5VoeoSMeu1xB0Tp8cfvv9ptg/mARonyiKLgYp+RERE5FWNll3ik2qFjxZqjXAM0JlSJwpZPBSQRURE5FVVvGBKvfC/Pj910l1fS/zlLxFZsBSQRURE5FVVXL8RkKuuz98+McDrl7cB0J6M0KNexrKIqAZZRERETikMQ/wgxPECMtH6IJCfDYyTr3m899Kl/Pc3r6Y1HpnjVYpMLwVkEREROaWfHsxRn5sXYhj1E+SfHMwRtQwu7c8St61XfgORBUglFiIiInJSh8crHBqvUqx5TJ6cd2CsyrK2xLwOx14Q4vnBXC9DFigFZBERkXPUYK7CeMXFD8ITHvP8gGeOFOhJx6h5AcGk54yUHTqS87ut24GxCgfHq4RhSK7iKizLa6KALCIico7YP1rmR/tGOZqvUnF9nhgY56eHcuwaKgIQhPUpeX4Qkq95BAFEbZN81SMVbZ4WD5cc2udR3+Oy41P1fFw/YLzqcTBXIRExidomI2WHqG0yXvXmepmygKgGWURE5Byxb6xMruyRq7hc1JvFMg1KNY/hkkOh6vHkoXG8EZMLezNYhsHxrm7Hp9+5fsD3dg8zVHJon8MT5LLjU3A8qq7P0pYERccjYpnkqy7JiEVvNk7MNjlSqBGGcGFPhp8cHKdQ9UjHrEYttcip6ARZRETkHOD5ARUnoL+13q84V3ExDeoBs+YzXnUpOz592RgHcxXGax4xe2pM+LP/eInb/20nfhCe1glyGJ5YunE28lWXMAwpOh5XL28jFbPJV11Wtad4w6olJKMWGHBJX5YLujMw8fnZeIQLulNUfZ+XRspUXX/a1jNccnhppDQt7yfzhwKyiIjIIub5AftHy5RdH4x6YDQNg3zVI2LWY0Bo1EsroraJbZk4fsBoyZkSkD0/4OvPNYeDtCdPbO1WdX3yVReAkZLD/tzxG/xeu5oXNAL2eNVlMF/F8eulH6mozZJklJhlUvMCWhMRYraFZRiEIUQtk4hlAAamCZZpkIjYuH5IRypKvnZ2AfloscaxYo1CzSdqGbTEI/hByEjJoVBzz+q9ZX5QQBYREVnEhoo1fnwgx9FCjeOdKGKWyXDJIR6ZiAGhQaHmNQaBOF5I1fOJWM2Y8J97RqfczHdZf8sJnzVWcal5IcWaRzJqsaItznjVIwjr1073RNnzA4ZKNQ6NVyk5HlUv4KLeLGs7UwwVHXqz9aEkiYiFF4SNIB+xTCKWiWkaGIZBxDKwJsopopaJG4Rk4zZx2+BwvvraNpL6iXjF9ak4PiXHJ2obvGlNB53pKEXHwzAMKm5w0pseZWFRDbKIiMgiVax5PHukQCpiMlp2GyUH6ZhFPGI2ArBtQsVtjpJOx+wpYTYMQ+764T5WLklwzcol5CoeXenYCZ/lByHZuMV4xWV9V5q1nSnytRFGyy5x22S47NCZOvXEPT8IsUyDgUKN9Z1pgjDkwGiZ9nSMFUuS5Ksu6ZhNW6J+ep2ImBgGjYC8uj015f1SMYuaW+9eEbUNIqZBJm5zSV8Lj+0fo+r5p9Wq7kCuTF82Qa7iUvMCktF6MI+YJoZh0BqPcHi8SmsyQmc6wZ7hEp3p1zZZ0A9CCjWP1oSGrswHOkEWERFZpI4WqoRhvQa36vkcP0Gun642I0BrIsJo2cWeKLloidtTgtpLI2UOjFX41UuX8n++YRX/863rTvisouOxsj1JZzpK2fPJxG0MwyARsah6Pqs7UrTEI+QmSjDyVZeRkkMwEcSLNY9jxRojJYdM1GJjT4aOVJSi69MSq5/nZeMRLurNNNZmmSYxyyI28V3Oa0twXluisaZszMaeeCxmW7QlIsSseneL9lQExwsYyFcZLTun3MOK6xOzLaquTwi0JSO0xCOEIY0T+FTMpuaHJGyL5W0JXn5+XPNevcVcyfHwgvAV1yKzRwFZRERkkTpSqJGO2cQjJiMlZ6Iu90SmYbC6PYl5ilTw4wM5AH5u5ZKTPu75AcmozcV9LWRiFiZG41Q3YZu4fkjcNrmoN4vjBVQ9n7GqhzfRo3i86jJe9ejOxKhOnNBC/WTYxCAbb/6D97K2ZCP09maiXNKXwTRP/r1Wtqe4oDvd+Pl1K5awvC0JQCpqU/UCYhM116dScnzak9GJ54Ss70xzSV+WiNX8jjHbJAhDYhGTmG2RiFi4fv171ryAA7nKCeUlnh/w4nCRkbJDvlYvTVnfmcIwDJVozAMqsRAREVmkSo5PWyKCaRiNYHgmjhSqJCImnafoXOEFIclIPdTapkk2bjf6JieOX7dM4raJgUHZ8elIRrFMg0LNxfNCLuzNkIraHMhVSEyUPcQskyWpCOnYyePKklco1zj+2cc/H+o3601+rOz4LF+SZLTkUHV9YrZJCAyOV/EqLkkvoOz6rOlIMVZxIDRoT9XXXQ/F9feK2eaUwNySiJArOxQdn7Ljk45a+EHIcNmh6tW/e9UL6E7H8AKougEY0J6Kka95jJQcTMPAMOpBXmafTpBFREQWmXzVZbRcL18wz7LnbxiGDJccOlLRk/YPdv0A1w9JTpQbtCUjXNbfQmwi5CajJrZZr/+1LRPTrAfq81oTrO1IAQYG0N+SIBmxGmUZUC9duHZVOy0zUJd7POAuSUTIxG0G8zVGyi57Rsqk4zZhCLmqS182TkcqShiCbRmNkL26PUV2IrjHbZNU1MacKGHJxCzyVY+OZJTWRIRk1CJfq/dg3tCVpjxRrpGN22TjFhgGJpCMWnSkYjh+QNHxKJ5ltw05cwrIIiIii8z2gTwvHitxvOYY6kH3sf1jPLDjKEcKNaquzzOH86/4Pv++c4ir//wHfPvF4ZOeHgdhyEC+xlCpRqJRFmFNuUGtJR4lG7cbNc/18oOQ3myMznQUg/q0vvr/6kE6MWlq3+Ra6emUilq0JiIkohYr2hK0pyLUvIC+ljgX9WQxJoLw2s5U4wQ7Pqnt3fIlSc7vzgD1mu7zWuKkJp6XjtqUHJ/uTIw3rm6nJR6h7Pgsa01wfld9CEsInNeaZE17Ct8PyMYjWKZB1DJw/JC4bXGKyhGZBTq3FxERWUTGKy4jZYclyQiT7xb75o6j/OG3dwGwrC1BazzC04fzvH1DF//9TatPKGP4951DfPKhnfgT79FxknKG8arL0mycvWOlU5YCpGP1yXbH659t0yAesYjZ9Q4QS1tijVKFiGnSnozSlZ75KX0Ry2TT0iwt8QhR22So5DBaLrG2I0VXJkbMNPDDeqcKyzRoidu0JE69rvUTYRkgHrGIR62J+m+LmG3g+AHxiIVpGrQmIgyVaixJRrBNA3viex9fl+MF9LcmGCs5eEHY6C4is0cBWUREZJHwg5CnBvO0xm0qTjDlpruvP3OEVNTiymWtPLx7hANUAPjW88ewTYO3rO3gJy8Nc9MVLcQjFn/4nRdZ2hJntFSvpe142QmyH4S4fsiKJQnGq+6U09XJDMNgw6Tw2JOJ099Co1zjwt5mP2XTNLh6edspb7qbbpNPupNRiyBk0o13FpWg3h4O4MplbVNqmF9JNmbTnY4RnXivqGXhhzSCbl82Ttlt9pmO2UbjLygRy8A2DVpiNsmIxe7hIp2p2Gl/tkwPBWQREZFFYqzsUHLqPYp3DhVZtSTJl360n58NjLNvrML1azu4aiIgA3z6bet5ePcw//nSCN+cmJL31WdGuW5NOxU34H+9dR23/9sLFB2fC3syUz4rV3FZ15miOxPjquVtp92/d2X7K98sOFvh+OVSUZuoZRCdCK3xiIlnGY1pg/ZrKPU4HvSPh9q4bWJNaq23tDVO66RJhKlY86bGiGWSjNq0JSO0JaP4QcDgeH2KYH1ioKpjZ4N2WUREZJEYKjbHQ6/vTPOvzx/jL358gCcOjVOoeXSnY/Rl443n97XE6M3Wp90B/MqGNmK22QjQy9oS3PbG1fz8+Z28ZV3HlM/yw5DebLw+KGMRDLdoidusak82O1HEIyxtiZ9xYJ984huLWERto3GCbBjGlJKWK85rbdyIaJv1tnaZicc70zEKjk8yajFe1Rjr2aITZBERkUWi7HqNE8/B8Sp3fHcXmZhNoVYPwN2ZeiA+rr8lQU+mWWbwi+taOFgKeexAjkTEJBuzedPqdt60uv2EzzIMTmsK3UJxvI/zcR3pKH19J47TPhPZuE1rPHLKWuLJ3UEMw+CK81obwTwds7EMg/ZUhIFxdbWYLTpBFhERWSQmj4t+aOcQQQh/fdMljcd7MjHakxHefWEPb1vfSXsyQk+2GZC7khH6WuKN556srRvU648jpjln5RALTSJi0dcSb5RvvJrJ+5qIWLQlI2RiEdJR+7Sm8snZ0wmyiIjIIlH1Alomps7tHinR3xJnxZIkyYhF2fU5vyuNYRjc/pa1jdesnqgJjk8MuzhegpE5xXAOqAfk42OW5fSs7Uy/+pNO4fL+FiKWSanmsX0wz5qOlDpbzDAFZBERkQXuSL7KQL6K5weNwSBDxVqjXdrf/uqlJCf6/r7c8rYkX77xkoma2TKvX9HGI3tG+e3XLz/pZw3mq/hBSH9r/KSPy/RLTrTQS8dsOlJRXD/ANhdPect8pIAsIiKygHl+wHNHCxM/GeweLvHHD+/m6cMFrl9Tv7FuWVviFd/j4r4sALnhMus603x5UlnGyz8rapmMu94p27rJzFnWliBXcRkruxwqV2lPRqaM0p4sDOvNpQ3DwA9CKq5/ypHdc6lY8wgnN+yeJ/SnW0REZAF77mgBzw+peQFeEPDBf3iKJwfy+EFI5zQO3PD8gH1jFfpb4sTs+rAPmV2GYZCKWYzXXFri9Wl9pzJSdjk4XiUIQ8YqLlUvoPwKz58L3sRI7XzNIzXP/jwpIIuIiCxQNc9ncLxKRypKoerxk4M5ipNC0MnGQ5+psuuzfEmStZ1putIxejMqsZgLCdui4gQkItbEX4rqp8OTW8CFYUgQhixtiVOq+YSEnN+VZqziUqh6eMH8OLEtuz79rQnevKaTFe2puV7OFArIIiIiC1Rhon8xwPK2BF/60X7WdTSDxpqOE0NHEIY4Z9AJwfFD/n/27jtAivJ84Ph36u7t7vUCHO3oVdohcogKIvaCYhSjUWOiRmMSY4ktRk2iRE1+GktUoqgkCipWLFjQU9FV9KiKFOntuF52b3en/v6Yu+WOOxSkHeb9/AO3Mzs7O7d788w7z/s8BZkp6KpMUUEWwXZ4u/5/ga7KSBJkB3VCPoXKqMH2+gRVDSaRxnJ+VQ0m3TNTKMgMELcdQKJjmo++uUHils3mmhg1sYNfUzlhuXQI+Uj1t7/PUvvbI0EQBEEQdkuDYaM0TspbURZhe8Tg10f2YEttjG/KIhzRLaPF+mURA9txUGSJdL+GLHm34vNCenJy3664eO2YhYPLryqEfApZAY10fxpfbq4hRVNQZAnHdamJGY2jxyloioTrukiAKstkBnTWVjaQ5tdwXBfLdvaoQ+C+4rgusiTh4u4yh/pgEwGyIAiCIByiooaNqniB7dJt3kS9ou4ZZAbyWqwXSVioioSmSBzVM4e1lVHK6hMYtkt+mo/SSIK8oK/V9pt4E77c3a7jK+w/qX6VnKAPXZEJpigokoQtuWQFNHrnBPlsQzUSXv1kTZFQZRnHdVFkr5Of5ThkpGjkhXQWbKqhR2YA/QBOuKyLm1TFLPIb62y313KB7XOvBEEQBEHYJdf18k6bd86riCbwKXKLUm6O61IRNUjYLpVRk5BPJeRTG9sWW/TIDjAkPx1F8kYfm57T3La6OBtr4uCCJgLkdmFUtwxCPhVJksgKaDQYNv3yQmSkaMiShCzLjakYEqk+NVkzWZUlDNsloHuNS7plpBA1LDbWNBywfY9bDn1zglQ0GCgS7faiq33ulSAIgiAIu1RaF2fBxmoaGjvnxS2b8ohBTlBv0f2uLm6hKxI9slJIWA4h3TvtB3UV03HJCugoskSKplAXt9hc4wXDkYRF1LDYHkmQoisoMqiK3FgrWTjYmv+Oc4I+1MbRYUnyfpfZgR0JAqn+lgGyIksENIWArtIlI4X6hO2V7oubrKqItLpA2h/73js3mPzc7apb48EmUiwEQRAE4RCztrKhMfiVqYgmuODZxQAMbaxn3MSwHQ7vmoGqeBO7Qj5vdFmVJTL8Gqk+L/8zRZOpjBp0zfCTmxtkbUUUn6YwLD+dnKDOB99WkNJOb4X/r8sKaKT61eTo/ogu6fiapUyk+hQiCe/33JRmEWzMJferMg2mTX56kITlkBf0EU3YRA27RQvyfcVxXSTJe11dkdttegWIAFkQBEEQDinLt9dRHTdJWA6G7fLA/PXJZTk7IdwWlQAAIABJREFUlXWTkAj5VFwgza8RagyMQj6VPrmBZIe2FE3BtF06pPkZ2DGVrbVxXCDkU9BVmaCukL0PS8YJ+06qT6VDyJccJd65GUiX9BQ6pHrBrto4OTMz4F0oaYpMSFfokxskK6Dz5aZqttTECflUooZFUN+3YaJpu4R0b9TYr8rtdoIeiBQLQRAEQThkxEybDVUxOoR85AR01lZGWLCxJrm8Vd1jyZtYl6IpHNEtg5yQFyilaAq9ckLJ1fyqgixL6Ip3m96nylj2jkl5RQVZ9M9L3f9vUNhjkiQxqFPaLlMVZFnCp3qBqKrIDOgQSl4YqbJEdlAn3e8FzD5FxnAcsoM6NTGLFWURAMoiib1KvXBclxVlEQzLIdT42n5NJkX9HwyQL7nkEvLy8hg8eHDysdtvv53OnTszbNgwhg0bxptvvplcNnXqVHr37k2/fv14++2399duCYIgCMIhq8GwkQBZkkj1q0xfsJmCzBQGd/SC13G9sgGvakVNzCSlMfAFSG82eW9nKZpCiiajK17AEtC8vOOmAFnkHv945IZ2pE6k+lSG5Kclf78+VUGWZDqleU1gQj7Fq5ntwuryKHHrh3XiazBsr/OfaZPWWPM4oCmktOOygfstQL744ouZO3duq8d///vfs3jxYhYvXszJJ58MwPLly5k1axZff/01c+fO5corr8S221c7REEQBEE42MzGpg8AW2vjrCiLcMbgjtx+fF+uH9eLwi7pje17bSqiBkHf7gUg2UGNMQVZaI0l4xRZIqiryeBa+HGSZYk0/44LJ78q41dlsgMa2UGdFE2lLmGR1piWUdfYmCZm7jpGi1s2UcNq8VjMskn1q95E0cYUkKyAnsyFbo/2W4B89NFHk5WVtVvrvvrqq0yZMgWfz0ePHj3o3bs3CxYs2F+7JgiCIAiHnLhpY1gOTTHrmsooAMPz0yjICnDusHxcoKLBpCDLq20b1HYvh9SnKi3Kww3oEGJ098x9/RaEds4BgrqCqsgc0S2DFE0mYTn4NZmg7pWVi5k22+sTmLaD3UbL6vKIQU3MSra7Lo8kMCyXNJ8KkpfOA9Axzd8iOG9vDngO8kMPPcSQIUO45JJLqK6uBmDLli107do1uU6XLl3YsmXLgd41QRAEQWiXKqMG4fVV1CXM5O3wiqgBkMwrBu9WdsdUr6VwUFfJCf2wiXUBXT2gzSOE9sErEed9ZlRFxqfI2K5LbshHj6wAuF5zmrxUH+VRg4oGA8t2qImZWLbXvtyvynRO91GXsGgwvJHjwZ1SyUjRSFHlQ6YaygGtYnHFFVdw6623IkkSt956K9deey3Tp09v7NDT0q6SzadNm8a0adMAKC0tZevWrS2Wl5eX7/sdP8SIY7CDOBY7iGPhEcdhB3EsdmjPxyJm2qzYHqE6ZtIQ0HBsh2dW1bJgqzeCrMaqqUl458yamEladoDy7Q3I0XpiNQZb63Y/TaI9H4cD7X/1WGQDW7d6k/NiNRHMiIFt2yhBnURtNQnboWNuKmmay7flUda7kOZX2ZAwSfdpJCybVH8qq7bVYDguh3VMxZ9IsL0+gRY3KNt+aKTQHtAAuUOHDsn/X3rppZx66qmAN2K8adOm5LLNmzeTn5/f5jYuu+wyLrvsMgBGjhzZ5nq7eu7/EnEMdhDHYgdxLDziOOwgjsUO7fFYuK7L/HVVENTJSZPwKRKvf7OdJ5dUAl4N3Jy8jsn1zYhBQdcMMgM6P/TttMfjcLD8rx+LbXY1BG06BAzy8/PpZKZQHk0wsFceluOyzakAV2JC3xxWlkXYUB0jN0Wjb48s9PQcNlQ30K1DKjkhH50aB0Pba2OQnR3Qce5t27Yl///yyy8nK1ycfvrpzJo1i0Qiwbp161i9ejWjRo06kLsmCIIgCO1O3HKIJCyvaYPrsqIsytNfbE4ub1732HVdaMete4VDT6pPo0uGP/lzpzQfIZ/XlMSnyLguyLJXTzkzRSNu2snKFAVZAYq6ZyXrZ0uSdMgEx7AfR5DPO+88iouLqaiooEuXLtxxxx0UFxezePFiJEmioKCAxx57DIBBgwZxzjnnMHDgQFRV5eGHH0ZR2u/MRkEQBEE4EAzLoSmkyAnqPPzJehpMmzHdM/l0Q3UyQN4eSRA1bFJ1JdlRTRD2Vt88r1b21q11AHTJSEkGvF7dbK9DI4Cuyliui7/Z5+9QzmPfbwHyzJkzWz32i1/8Ypfr33LLLdxyyy37a3cEQRAE4ZCSsGyvrFtjBGI7Lh+sqeS4PrlM7JvDpxuqubCwC0BjUw9vhK6pVJsg7GuSJCWbjICXexwzvcl5qiwhI7Xr2sZ7QrSaFgRBEIR2JpqwKNlcS15IB7zcze0Rg6hhM7xzGkXdMym+ooiQT6UyapAV1KmPm+iqfEjdxhYObZ3TU5LVVDRFRleldt0+ek8cumPfgiAIgvAjZDsun2+sprQ+QW3cQpEkXNeltD4OQF7IhyRJhHwqtuNiuy79c4NoitfkQRAOlPx0P0Py0wBvBDkjRUt2yjvU/TjehSAIgiD8SFQ3GCQsh4zGzmNx0+G0mV9QWp8AWk7Mi5k2HUI+ckI+AppC14yUg7Xbwv84nyrTIyvwoxlBFgGyIAiCILQjqyqihHQV03Eojxo8t2hLMjgGyG3W/CNuOfTI8n4e2TVD5B8LB40kSXTLDBzs3dhnxL0YQRAEQWgnHMelLmYS0BVSfSrfbK/jhaXbWqyT5tsxtuVCclKUyD8WhH1HBMiCIAiC0E4YtgONhd1kSeKtFeV0COk8dObg5DqSJBEzbdZVNYDrirrHgrAfiBQLQRAEQTjIYqbN5xuq6Z0ThGaDwMu21XN83xwO65TKmO6ZXHlkAQC1cZPUxkl6h3KtWUFor0SALAiCIAgHke24rKtsYFtdgjS/lnw8btrUJyw6pvoJ6ioPNI4iV0QNumSkYFgOZRFDjCALwn4gAmRBEARBOIhqYibfVkTomKrTYFg4jsvNb67g0/VVQMtJeY7rIgGDO6axviqKaTsossg7FoR9TQTIgiAIgnAQVTUYBDSFgKawtT7BZ+ureWdVeXJ58wC5wbDJTfWhyBI9s4P0ygkdjF0WhB89cV9GEARBEA6iygaTFE1BVWQSps0/PlzTYnleyJf8v2k7pPq8qhWiYoUg7D8iQBYEQRCEgyiSsNAa84jfWlEOksR/zhuWXN4x1YfrupRHEliuS1AXN38FYX8T3zJBEARBOAiWl9YBEpbtJvOIl5XWcVjHVPrnhRiWn8ZxfXKQgKoGE9t1sR3QRM6xIOx3IkAWBEEQhAOswbBYW9lAeoqG2yzeLYsYHNYxFUmSePycoQCsrWxAVSRygzrb6xPJ0WZBEPYf8S0TBEEQhANsS20cicbGIC5MX7CRM578gi218RaT8gBSNJlOqX7yUn2osiTaSQvCASBGkAVBEAThAHIcl821cbKDOtsjCUrrEvzr0w3J5bnBlpPyQj6VI7pnsLkmTmZAJ0VTDsZuC8L/FBEgC4IgCMIBtLU2Tsy0SfOpuC7c9vaqFsvzmo0gm7ZLyKcgSRL56X7yUnVRvUIQDgCRYiEIgiAIB1B1zCCgeqPAayqibI8k+L/TByaXd88MAF4DkYRlE9S8sSxFlvCpYvRYEA4EMYIsCIIgCAdQzHRQG/OIv9hcS0BTGFOQxaTBHVEk6JMbJJKwiFs2MdOhb64IigXhQBMBsiAIgiAcADHTpi5mEjNtfKp3A7c8kqBDqo4qS/zxuD4A1MVNFFmmW2aAZdvq8IucY0E44ESAfAhYWxGla2YKiiQRMSwCjR2XBEEQhEPHsm11RBMWhuNi2g5PfrGZlWVROqf7W6yXsBxGdk3DBdZUKOiq+HsvCAeaCJDbubhps7I8AhJURA0qoga40CM7QN/cEKbtiNEFQRCEdu6Bhx/h6WefZ+zxp3DiOT/jmjnLWb49AsDQzmkt1nWBVL9KzHTIDflI84lTtSAcaOJb1465rsvq8giG7bCyLEJAU+gQ8lqOrq1soDZmYToOR/XMPti7KgiCIOzCtGnT+N1VVwKw8NNi1hgBlse7JpfnBXdUrXBcF7VxMp6uyBzeNQNZdM4ThANOBMjtUF3cpKbBJGbZbK6N0znN36KsjyQ1dlSKJHAcl+oGg8yATjgcpri4mEGDBnH66afv1T44jovtuqJjkyAIwl56/oXZLX5+tyaNnvkB1lY1ANAx1at7bNoOluMS0L27gpIkoasiOBaEg0EEyO3Q4i11NBgWiiyRmaK1WfNSkSXy0/zETJvFW+vQt69i4sTjMAwDTdN4//33KSoq+sH7sLG6gc21ccaK0WlBEIS9cuJpk5j33rveDx37YPjTuXBkFz5cW8kH31ZyfL9cr6Sb7RA3bXpkBw/uDguCIALk9qYubhI1LPJCvu9fGUjRFOojCd5/730Mw8C2bQCKi4t/UIC8vjJKVYNJvWFRVm/wydpKDstPI82v7fG2BEEQBMjq2puxE0+iuryMLqdfydsRGNUtgwl9cogf6/3Ntl3okRVgydY6gmJeiSAcdCJA3ktNaQ3jxo3bqxFb8NIalm2tI7CHfxwDmkLBkMPRdT05gjxu3Lg92obtuKyramBlWT2pPhXHcemZHSBqWHy6roqh+WnkhnyieoYgCMIe+OCjj/nVlNOwTBNV0+lxUUfkqE12QEeRJVI0hfKIwdDOaYR0lZVlEUI+ESALwsEmAuS9EA6HmTBhAoZhoOs68+bN2+MgOW7a2I5LzLRZXx2jLrH7o8dNQj6V/P7DeHHOW5R89glDDhu8x/vx6rvFvPLWuxx99DF0PPyI5ONBXUWTZb7cXEu3zBSG5qfv0Xa/z768wBAEQWhPwuEwv//9NZiGAYCZ2ZVFqzeSnd0DpdnEOxcI6gp+TSYv5CMnuGfnAEEQ9j0RIO+F4uLiZFqDYRg/KK3hi001NBg2pu0Q0tVdBseu6/LMoi0ENIXj++YS2qnsz5plJSz87FOOHT+OkYUD29zGrnz48Xx+OulkTMPk+cfu55GZrzCkcFRyua7K5Kf52VITp1tGCpkB/Tu2tvv2xQWGIAhCe9T09y0Wi3kPdD0MfnInW4ABwZZ/QyUJfKqMpsgc0T2zRfAsCMLBIe6X74Vx48ah6zqyLCNJEtnZ3z+hLWbabKmJsa02xpIttdTGTPyqTKc0P6n+1tcr66saeGbhFq58aRn3f7SOu+Z9y/nPLOLbimhynaUlC7juorN5+p9/45fnnMYXX3652+8hHA5z859uwzAMHMfGSMR5Y/asNtcNaAprKxt2e9vfp60LDEEQhB+Dp59+mng8vuOBop8m/5sT8gJk13VxXBdw0WTvdCyCY0FoH0SAvBeKioq4//77URQFx3G4+uqrCYfDu1zftB2+3lbHl5tqWby1jpqYSW7I12o0uMnUeas5e0YJ9320li21cX5V1J0/TexD1LS44NlF3PTGN6yvaqAkPB/T9AJc0zR56/2Pdmv/P/nkU46dMIHwh8W4jgN4f7Bfee6/LC1Z0Gr9kE9heyRBdYOxW9v/PuPGjUNVVSRJQlXVPc6bFgRBaI/C4TDTp0/HdV0A5J4jocug5PKmsm6bauNsrImhy7KodSwI7YxIsdhLlZWVOI6D4zhtplmYtkMkYdFg2Kwsj2LZDl0y/N+xRS9IfXFZKS8uK2VIp1T+ML43fXODyI3l3o7qkcX/fbSWt1aUs6mskoFbNqMoKhKgajoFg4ZjO+53jkSEw2Fu/OOtJBIJXNdpscy2TGY88gCDho2gsGhsMt1CkiTSfSolm2sZU5BJQN/7j0/TCaTpX0EQhEPdPffcg2mayZ/TJv6CYLqfUV0zePmrUs4Y1BHTdghoChHDFt1QBaEdEgHyXsrOzkaWZRzHSaZZxEyb2phJg+FNvIublhdc+jV8baRRNFfVYHD726v4dEM1R3TL4J5TBxDcKRDNDOj85cT+5FrVzPjWYuXaOCouRx13Itm5eTgurC6P0r9DqM3X2Dk3TpIkkKTkKDKhLIoDIyie+yXqA//HtJkvJYNkv6Zg2A4LN9dyeLcMfOoP/8NeXFyMbdu4rott2z+4NJ0gCEJ7EQ6HmTNnzo4HfEFqA504s28uFx/ehdMHdaB/XoiySIK+uSGWb68nRRcBsiC0NyJA3gvhcJirr74ay7KSQd7vfnc1kdTO9B82ElWWSPOppPu/e8S4yRebavjjWyuIJGz+ML4XZw/plBw1bkvq+jB8a+MOPw1ryZvMn/c2juvy+gsz2bptGyG7gTNOmtgq6CwuLm6RG+e6LrIk4+b1hP7j4LCJ4AtCz8Oxeo7kn3f/lSeefy25fppfoyZmsGRLHYd3y2izkcnuaMrhbpqkJ1IsBEE41BUXF7e4IyYNPg5Xkjm2dzZBXeWwTmlEEhYZKRo9sgKsrWwgTZR1E4R2RwTIe6FpklnzNIF4PMbd11zGL393PWedf/Fub6syanDHO6uIWw73TxrE4V0zvvc5hUVj0Z75LWaPkXD0z7HfeQDXcTBcl8f+ehOO4/LPe//G++/vqA7x8fxPWL12XattOf2OgolXgarDio/gi5eg50g48gKW6Clc+esrOW7MKGqrq5JpF9vrE5TWxemUnrLH5dqa1r///vuprKwUZd4EQfhR8OZWaBhGAknVyBh/IV07pDKgQ2pynQbTZmDHVGRZYmCHEHmpoqybILQ3IkD+AcLhMDNmzKC0tBRVVbEdB5qNGJSVbuWum37PWy+/wG9uuq1FyTTwqk6UhOdTWDSWvkMKmbN8O9MXbKIuYfHQmYMZ3rl1reHmz2na3pDCUTz20AM8PH8dJQOPRV23AGf1Z7guydQFwzR4/vW36T+0kPeKP+Znk0/FSBi0yPjt1A9OugbK16G+eQ9ubRm2ZUL5WqgtheN/xwKpPwseuhVp2zfouo9HZr7CgGEjWbS1jvBnn3HBmafsdrk2Ud5NEIQfK8t2cHGRJAm550iqHY3rh3VusY4kSfhUb45854yUg7GbgiB8DxEg76FwOMy4ceMwGgu/K4ri5SA3tnhubtGCT/nl2Sdz41//nhxNXlqygMvP9boqyX2KsE+9EYAu6X6enDSUvrmt84aXlizgivMmYZoGmqYn6xQvLVnAG7Nn0VWS2dp9EttPuQFp1h9wtq6Cxj/QiqLQ47DD+WxDNXPemecFx42T8mRZpv+QEVQdfwNxGX7SsYqix6cD8ODUO1i04FNvNLliI0y5GyZcjjvrRkwjTkl4PkMKR5Ed0Hlk7nskEo1l4najHvS+qB8tCILQ3kybNo2/3X0Plml6aXfDTieEwbG9W5YAlQBNdCUVhHZNBMh7aMaMGcngGLyR2u/KwXVsm3tuvZ7e/QcypHAUr8+ehZmWD92GYo8+B8W1uPPUwYzrlYO6U9WJplHj0q2bvTJuto2JQUl4PgCXn3taskOTmvE68sX/whpxBmy9B2iqDCGR6tcoXbmETd8shZZjx+QedyHLLR93ntSPE/odlXz837Pf4KVnnuLV5/7DimVLsOdMhcl/hsIzcMIzqa+rY+pN14AEDZEobuN2JUkimJbB5xuqObxrRrJ0keO4yf83lXdzHEeUdxME4Udh2rRpXH755Tse6F0EXQYxqZeK2hgMl0cT2A4oMmiirJsgtGsiQN4D4XCYxx9/vMVjiqIgKyqObSErCj1692PV8mUt1nEch5LwfNxO/Xmpw5lw4Znegk3LSF8ym7q8C1H7XNziOc1HjRVFQVFUXNcbFVaDaY21j3eUEbJry+jbsJaVfcdCt7mwcan32rbFG7Nn8doLzySDaQBJklE69eULuYCR+ekc3ze31fs96/yLOev8i5l68zW8+N8n4dswFE6Cb4qZ8eg/2zxGlmVx3TVXc8wHYS75+YUccUQRDaZNRdRgSH4aGX4NEOXdBEH4cXniiSda/Ow/4kwCPvjNKaOBpqYgNP4dl5NBsyAI7ZP4hu6BprJkzU2aciGPPfcav7r2Zh57bg7Pzv2I6S+/zbjjT0FWVDj8LNyTr+MNaRCXvbDEe1J4Jsy6AV64hapVi7jrpt/zwF23t9husvmHbWPbNqOOPhZZknBsm3/deQvbK6ta5D0rqso1JxxGuga5p1yJpvuQZRkXWLjg0xbBNEDhuImkX3QPQZ/OzRP6fOcoeL9BQ1AUBd7/NzgWnHwtyLuedW0aBu+9+B9+NukkHvzXI5RFEuDC5xuq+XBtJXPmvoe1U3k3QRCEQ1U4HGbhwoU7Hug6hHiH/kwp7J6sR18bt8gO6OiqIkaPBeEQIEaQ98C4cePQNC2ZYqHpPk45ewpDCkclJ85FEhZ614GcetM/qSz8nGWJVFxgfXUVfeQtrJ55N9SWtdr2f6c9SJfuBckqEYVFY9E0jYTj4DoOa75alAzOTcPgq0/eb1F/+YxzLqDw8CM4fuunvLAun6MuvY1PH70V27ZZt3pli9dSNY3o+KuorHH51+R+dMvc9SSRpSUL+McdN+O4LnKsmpyvXqZs5IVwwf3w7HVgJXb5XNuyeOgvNxHQ1eT76ju0kKicgiRJSLKMqun0GjqKl97+gBUlYcaPHy/ykQVBOKQUFxc3toz25E28iIRf5fwRXYDGCkeWw4guQb4qrSdtF91TBUFoP/bbt/SSSy7h9ddfJy8vj6+++gqA66+/njlz5qDrOr169eLJJ58kIyOD9evXM2DAAPr16wfA6NGjefTRR/fXrv1gRUVFFBcX84+H/43pOEw656ctKlRUNRj87NlFbI80TuAjCIvfgA+fQMGl84QTWd1GcAxeju49t16P47pomsZd02dzxgW/5PnHH8IFSktLW6y/YsU3yQmCqq5zytlTWFqygFf/cA5Muo2Ps3pAhz6wdUWr13I79OGbGpcrx3TfZTk513VpMG0++fgjTNPAdRxkRWGgP0bZB/+G8ZfC4WchffYcRxw1jgXzi3EcF0mWvLSJxpOF3ZiD7b0vnWtvu4tH7roF2/JSUq64+c+sqWzgT788G9s00TSNue++x/ijj2pzvwRBENqbo48+Bk3TsADFl0JDTh+OKshKVqqIWw65QZ3MgM6IzunJxwVBaL/2W4B88cUXc9VVV3HhhRcmH5s4cSJTp05FVVVuuOEGpk6dyt133w1Ar169WLx48f7anX2mqKiIm7sMIGJYBHWVLbVx3lpRxtel9XyxqYa45XDm4I6M7p5JoHIN1/1rBhYuqqaTnZeHJMtesCnLDB05miVfemXZZEXGbhwtTtg27z37GFZi16Oz4AWfqqpy7W1TKRg0nBcffxDLiMNb98HP/gnnTIVZf4DS1TuelJqDffL1BDGYPKRTq2025cnVxEwURaJ/4Wg0TcfC2PEe3nsat1NfKDqPo/vl848//zFZUeOV5/7rlYhrIklYlg24WBjMfOLRZC60Y9tsWrmcjSuXYzU+ZhgG9z78OF0GDKdPGxU9BEEQ2puCQcO5a/ps1i7+HKNXEf9eaXFCvx3zOqKGTZc8705dUIweC8IhYb99U48++mjWr1/f4rHjjz8++f/Ro0cze/bs/fXyB0TMtPnNK1+xsTqGX5WZ0CeHC0d2oVd20FuhTw7X3nYXrz73H3I7dKLfoCHoug/L9ILN39x0GwBvzJ5FZUUZH703N1lj4q3X5zBs2LAWrydJUqtJba7roptRYpbDiNFHomk6Zn0ZyvM3IP3071jn3EnHTx9j6+aNMOIM6DUKHJsbRgRJb5ww16TBsKlLmPhUBU2VKeqeSaZ/LFOnv8C3iz9nZNFYAK8Sx7xHcLoO4Zv8Y9hWF2dI4ShKwvNxbKvlPkOywoULrF+7mp1X2DkbL0WTWVUeIaQrdEzzUx4xyAnqySoYgiAI7YVlO6wsj1I0uoijjxzDBc8uokeWxpiCTGDHoENeSD/IeyoIwp44aJey06dP59xzz03+vG7dOoYPH05aWhp//etfOeqotm+xT5s2jWnTpgFe2sHWrVtbLC8vL99/O92osqyOjzbW89SSSjbXm/x6ZC6n983wJmO4EWoqIgAsX7KIe/90A6bpjY5+PO9tRo89hszsHI4/dRLdundn+ZJFvD57pjchz2kZ/C5evBhVVenRowe9evVi/Pjx3HrrrckcaFmW0TSNEUMPI2jUkt2pC/c+Mp0Fn3xIbodOPPTv63DOvJ2tR/8OHNubWLfla6b0VBkzcDg1FduTr2U5LtGETZ/cINlBHdd1qSrfTo7kMuqwvnTu1h2fKhHSVe59ZDqLSxaQMcDPtE0yp03/guN6pHJq/4GoqpZ8v7Ki4NhO8jV2rhUtKwrHTPAuml57/hks00TVNMYddwJqrIb5X1XgV2UihkXvnCD5af49bmt9ID4PhwpxLDziOOwgjsUOP+RYGJbD+uoo1VETN0VjcWkDK8uj/P6IPOoqvXS6BsMmoCvUVFjU7Oud3g/EZ2IHcSx2+F88FgclQL7zzjtRVZXzzz8fgE6dOrFx40ays7MpKSlh0qRJfP3116SlpbV67mWXXcZll10GwMiRI8nPz2+1TluP7StvLN/Oje+X8lVpPR1COo9OPoyRu8jjXfnNcqxm6Qa2ZfHph++j+/ycdcElZOR0oGTJMkzTxHGcNrfhui4///nPuemmmwA46qijKC4uJjs7u0WL5mjC4pN1VQwZexwDhw7n5VnPYFduhGevRep7JN1HTWB0KMLxUwpbdfZzXZeySIIxfTLomOZvtQ/dukBFJMEXm2rICPkYM+FExkw4EYDCsgi/feUr3ltXz9rsXO546lXee+cdFGwK+/Xg3j9dj40MVvMScxKyonDDX+5Nbuex5+ZQEp5PemYWK79ZTigjiyGFo0hYDlm4lMcssn0heuYE9+C35dmfn4dDjTgWHnEcdhDHYoc9ORb1cYtvttcT1TS6dtZxgRnzlpCZojH58N74Va/SjxFJMKxbJtnBQ2cEWXwmdhDHYof/tWNxwAPkp59+mtdff5158+YlRwN9Ph8+n9eLvrCwkF69erF0HB4TAAAgAElEQVRq1SpGjhx5oHfve31dWk9ZJMEvR3XlwpFdCei7LndWWDQWVdNa1B92XRfLNPgyPJ/OA4YxeuzRPPfYfSTi8RbpE7IsI0kSuq63aKRRVFTUZpWHoE9leJd0vtxUg9742pqmYzVUo379Dn/645WtAuMmFQ0GPbKDbQbHTbKDOlkBjfq4Rap/x8emX16IuZcewatfb+eeD77l5hIXsscDML9WpuM1z7IloUD1NvjiRVj5EcPHn8Svf30VQ0cekdxO075dfu7pmEYCWVFadCDUgjIryiNkBjQyA4fOiaZJOBymuLg4eUEjCMKhqy5u8sm6KlRZpmOqd+6au6KMpdvq+fMJ/ZLBcX3cItWnkpmifdfmBEFohw5ogDx37lzuvvtuPvzwQwKBQPLx8vJysrKyUBSFtWvXsnr1anr27Hkgd223XT++F8f1ySFiWN8ZHIMX9D323BxmPPIAG9Z9y6b1a3EdB1XT6DnsCPLT/Pjyglx80UWUlpby1ltvYVkWuq5z//33txgh3h3ZAZ0UTSFSZzOkcBSPzHyFkvB8CovG7jI4ro9bpPu1NltcNydJEgM6pPLJuiqCroLcLNVBkiQmDe7IqK4ZzF9fxeryKKk+lZhls2xbPZRFIL0DnPR7OOG3LJQV/luaSsf6BB0aTy4Ab7w4C9PwJiY6ts3Um68BvIYliiyR7lNZsLGGkE9lTEHmHqdbHCzhcJgJEyZgGAa6rjNv3jwRJAvCISqSsFi6tY6AphBqnHAXSVhM+2wj3TJTOLH/jsl5MdthbNcsMX9CEA5B+y1APu+88yguLqaiooIuXbpwxx13MHXqVBKJBBMnTgR2lHP76KOP+NOf/oSqqiiKwqOPPkpWVtb+2rW98kOCsvBH7yc74k2cfD6nnj2FKadMYOWSEk464fhk4PTAAw/scVDcnCxLDOuczntlXkm45vWZ21ITM0lYNkM7ZyWL2X+XNL9Gr5wgayqj5AV9rZbnp/s5Z2jbt2Be+O9TvLhgJaGBY1lHFh98W8k32yOcMiCPqu1byd28gMryliXwXNfl7j9el2zT7dcULMelPJKgJmYeMiPJxcXFGIaBbdvE43FmzJghAmRBOMRUNRisrWxge30CRYbcoI+lJQsoCc+npnsRG2ssHpl8WHLwIGpYpOlKiztugiAcOvbbN3fmzJmtHvvFL37R5rqTJ09m8uTJ+2tXDjjbcYmZ3sSMjz76ENMwcBxvglr/3j244uwTkSSpReBkGAaVlZXJXOMfKt2v4lfl5MSQXTFtB9N26ZYZIGMPbv/1zg5S3WBQEzN3+3lLSxZw/59vxjQNtLlP88jMV6DTIP7+4RqeWLDJWynSA2XFy16lDkn2JhXilbKbdt/fuOz3NzKkcFRyxGZFWYTR3dv3KHKD4VX0GDduHIqiYDd2D3zyySe58MILRZAsCO2YZTtsqI6RG9IpjyRYWRbFp8pkBzQ0RWZpyQIvJcw0kM77O5179m1RVz5q2IzunnkQ34EgCHtDVCvfx2rjJpvr4kQMi9L6BMdPGI/Pp6MoCj5d5yennpAM6saNG4eue8t2zjX+oSRJom9uiIhhYdptT/wDiJsOndN9DO6UtkdBpixLDMlPR1NkqmPG9z+Blm2zLdOgJDyfIflpzDhvOOcpy5DeewhwsSf/Fem3s+Hyp2Hgscnnfz7/Q644bxJLSxYAEPKp1DSY1MTMXbziwVPbOCq/eEsNxWsq+fdL7/DEk0+1mNxgGAa333474XD4IO6pIAg7S1g2juNSWhfn8w3VLN5Sy0drKvm2ooGcoE5GihccQ7OUsL5jcTv2oa74v7z0zFOAVxVIV+Q9GnwQBKF9Efd+9pG4ZVMbs0j3q/TPDRLQFNJTNDIHHUfBvHltTtAqKipi3i6W7Y2QT2V4djoLt9SS7lPxa61HkmOWTUZKoI1nf78UTWF090w+21D9vSPV0GzCYGOzkcLGesoAE8eM5KUH/4q5ZgHS4IkUnHgha+o1OPFq0oeNp/azV3GrtmDVl3mBdWPKSNCnsHRrHaMLMvGp3/36B8rm6hhfldYT9ClEDYvtK5dw/UVntpikCV7qyLvvvsvHH38s8pEFYR9zHDeZ8xtJWFRFDTICGmmNdd8dx8VxXdTGQNewHGpiJl9tq8esUUjzq9TFTdL9Gp3T/bgu6I2d75pSKgqLxnopYVoKHHMJbP+W+k9e4K75zwEw7syf0jUj0K7vcAmC8N1EgLwP1MRMYqbNyK4Z5IV8rSZk7KryxPct2xsd0/wMc+GTdVVkpKhkBbzaxnHLoT5hkZGikZfaOo94d+mqzIAOIb7cVLNbkxV3NWGwrWW24/LQJ+uYuRCYNBTiEeTXp7YIrIO6Sk3MYMmWOkZ2zTjok2AiCYsl2+oI6QqG5ZAb9PF6eD6W2fYot+u6GIZBcXGxCJAFYR+pjZl8XVqPYTv4GlPN6hMWKZpCr5wAdTGLiGGjKRIZfo2a+I47UY5tkxfSiZsOHUK+VsHtS888xT23Xo/d2AnVQYazbodQNsz5G7jeHbt5b77G2DPOo3tWygF+94Ig7EsiQN4LluMSN21sFwZ1TP3OMmkHQ05Qp1tmCmWRBOWRBJbjosoyfXODFGQFd2ti3nfJCuhkBXTKIonvvZ34XRMGd16myBK/O6onF4zowr/e/pI5GwNI59xJVu/DWjwvI8V77bJI4qAde9d12VAdY2WZ1/kv1KyNbFtl/prIsrzLtBpREk74sXNdF9N2sV2XlDbucP0QhuWwbFsdVQ0mAV1Gc6VkpYmEZbO+sgFdlXFdiJkOMdPGp8jkBnUkSaIm7lXnaeuCf2nJAu6+9Xpsy5tXYCPDqddCl8HwzoOwbWVy3SMmnEzP7OA+e1+CIBwcIkD+AWzXZXvEIDtFw68pDOoYJCf0w0dj9xddlRnVLYPSei+A9akytuOSvo/y4hRZYlS3DGrjFqvKImyujdEx5EveumzSdDJsuk25u7KDOreeNYZf1MY575mF/PaVr5l29hBymhXcT/OprK6I0iG19YjP7mowLGKmQzRhUR41qGow6ZUd+N6mJHHTZltdnK+3R8gN6qg7XXA0lflraiUOEMjIZswRI5Fi9YwfP75FABwOh5kxYwZPPvkkpmkiyzIPP/xwsjFO0zoieBYOZaV1cTZWx6hLWFi2y4AOIXKCOkHfDz8dra2MsqU2TsKy6Zze+mJZ1VX2tE/H0pIFye9u+fbSZHAMQP+joXcRLJgNX73LSZPOobqqnPEnnsYxZ55P90wxeiwIhzoRIP8AiiQxtFMafXKD7T7HTJIkOu3H0VVJkshI0RiSn0ZalcraqgZkycvzkySJFFXBsB2ipo2uSF4Kyh4es/x0P/+cNIjfvPwVFzy7iFuP68ORPbwygH5NoSySYNm2Oobkp+/Rdm3H5dP1VTQYFq7rvRe/KpPqU1hRFqE6ZqApCkPyW3d0dF2Xks211MXNNoNj2JGveMrZU5Ij5JbjUhk16Jjqo2f2jhzwplrJ8WYNYxzH4YorrmDNmjVkZGSQnZ3N1VdfLeopC4ck13VZXRFlVXmEFFXBp8ik+mRWlNVjO9Ax1Zs0vCcX0o7j8k1ZhBVlETL8Cpkp+6b0o1eh4rQ27/5QMAIm/Aq2r4H5M5AkiZ59+/Hzqx6jqsGgICvQ5rwPQRAOLSJA/gFG7KK19P8yv6bQv0MqBVkBFFmiPmGRsBxK6+KURQz65YaQJFhX1YBflQlqSquR5u8yLD+dBycN5rcvL+WmVxfxjzEhDh/ldeLLC/nYXBOnS0YKWXtQG7kublIbN8kJ6MmZ6U1yQzql9V7TEl2R6ZPrjSZXNRhoikxZJEFd3CSvjTsHTSNPr73wLLZtoWk6j8x8hSGFo1BliQ6pPiobDOoSFmN7ZKEqcrLkX/NuiuAFyffcc4/XnluWcV0Xx3FE/rLQ7jXd7cjOzmZbWTldBx9Ox35D2b5yCYs++yQ55yAn6MOyHcqjBiWbaxjZNaPV97EtruuyoizC+qoGuqS1vnO1N7wKFc2CY0WDEad51XWyu0HZGuTX/gqyjKb7kvMjLNdt0fxIEIRDlwiQhX2qaeSkKVDtlObHtJ3kCa9zut+7HVoTR5IlfN+Tu9x81rgMmM//CfPM2/n1E3N5XJGSI7PpfpXFW+oY2yNrt0ag6uImy7bVE9SUNk/GsiTRMdVP1LBYWxllQ3UUTZaJmjaaLGO7zi6D4yvOm0QivTOkdYKK9VgYLSpwNB2fygaDJVvrKOyawTHHHIOqqjiO49WCdt0WwbLruti2nWxB7rouNTU13/s+BeFAC4fD3HPPPcyZMwfHcZKfY1lRuODSq3juqWleTfTmF46KTE5Qp6rB5MM1lXRO99MvN7TLybfeyHE9G6tjdAjpP/hOXvO/L926d08+9trzz0Agw+sAmtEJDj8bcrpBQy0seIHTC/xMmvFsi8nFNTGDzBSN1L1IFREEof0Q32Rhv2segKb5NYZ1zqBXtoUkwaqyCKX1cWRZItWn4m9Wsq0p2Gw6mZ569hTsTctg4Ryc4afywacLkkGnX1NoMA2Wb6+nX15olxNk6uImy7fXUxU1CfmUZOmnXQnqKkFdxXVdrMb87ahhkaJprVJFLMdl7qcLMYadDmPO9x7cuARp7v+1qMDR9N5KwvMpGHoEKROOYk1FFKcxKN55FLk5x/Fmyruuyz333EOvXr1a5CgLwsEUDocZN24cRhupCY5tM+PRfyZ/bvvCUSNu2ayrakCWJPrlhVptZ1ttnI01DVTFzOQEu93VPCAGWvx9ueOh6eQPPZIZr76D2fkwOO5KSG1sGx2pRH71L0jrF6JqOpOufaXF5GLbcTEdl2H56e0+7U4QhN0jAmThoGhqvzqiawY1MZOoYbFkSx1yikRdwpsM06LBCAaVZWXIkoS7aA7ukBP5Jm94ixPekMJRlEUSVDeYHNE9g4CuUp+wqIwapGgy5REvgE5RFbavWsKb4fmkZ2ZRW12VfP7O22siSRKa4p34gnrrr81XpfX89b1VfGsPgjGDYPu3UL0V+h6Jdd4/eHOTRV7fBB1TfS3yG2VFYettd1NTXYVt2S22KcsyQ4ePYMmihcnAeGcvvviiCJCFdqMpVWh3yIra6sIRwK8qqAGZzTUxOqb6UGWJoE8lkrCImzYLt9QQ0JQ2290357guc5ZvJ166nvrlYTIzM7n3/gewytYhKwr9xp5EomAUWAaJ3AL++JWGtXwxZB0DZx4Dtom0dC4ju2fzsxOOJHTSX9v82wBQHTPplR0UuceC8CMiAmThoMtI0chI0ZBcWFEeJagruEDvYUegaTqmm8AF5n/wDrbjIEUrKahawpfaKH557S0460rQNI3HnpvDkMJR1Ma9Wqg9sgKs2F6P0qDjUxUM2yYn6GP5oi+8NIhEHFxvMqHu83PtbXfxjztubnX79/skLIdb3lrBlto4yhcvYH81D6m2FFwXd+FrcPxvmb3eZtWb3/DY2UN4Y/aO/EbHtnngjhs4/9KrkGUJ1/XSJyRZRtN1fnbt7fSc9xYvPvFwm689bNiwffibEIS907yt+vc5/Sc/3eX3S5UlLMclvL4KF0hP0aiNmciSRFBXSPW1vvPjui6PfbaBBRtrUWSoi1usqWzwFtZ3h9IoXPBPMBM40Sq+yejU4vnW2i9IrdtEfVU5VG+BLd9w1rk/5abbrkmu09b+xi0bXZEpyPphjZcEQWifRKtpod3Iz0jh6J5ZHN4tg8Iu6Rx/7FFcduOfkWQZx3GwTBPXcXBsm3Wz/gZVm3Em/hayu2MaBm/MngVAul+jImrw5eZaZEkiK6DjV2U6pvpRZYmS8HwMIwGNqQyu62Ik4rw39w0M02zREvv7xE2ba1/7mi21cU6VV+J++qw3ctwYeMtl36LPvpEzuyss3VbPX95bDTvdgbVtm2cff9hrQKAoXPir33HldbfwyMxXOXrskXTMzkKSva+qJEn07D8IqTEX+cEHHxQtq4V2o6ioiH/9618oigKShKbrXPir3yHLzU81ErKqg0SyfXxbcoI6uSGf1+TIcckJ6uQE9TaDY8d1efrLzTz++SaWbqujssGbQDtc2gbzZ0DlZrBN77tZugoSDfDxU/DaXfDWffDMNfDKX6h//ylY/AZsWIwqOZxy9pTvfL+O61ITMxnUMbRbEwsFQTh0iBFkoV1RFTn5oRzYIY1sJeHl5O6cl2tb8Po9cO5UGHMevDa1ReDZNIGuJqbg22nSXmHRWGRZxm5KWwhm4eb3Y+mIy6HX2UifPY+6Ntzm7d/mPt9YzZ3vrWZbXYJbJ/ahR9zHuw95I96O4+ACiqJw3a1/4awzx5D68TpmlGzm18f8BGXWf7Etr4OXJElYlg24IEmkpqXx86t2jFoVFo1FVVXMxioX61evALzAPh6P88T0p0Q1C2G/aKrN7bou551/AUcdeSSS5OXcWo7bKqXAdV1yuvfh+MnngwRn/OQ8Ro4azbgTTuaN2bMor6ygpOdZRP3ZvFhTyiv3PcvEMywuHj+U3ruoO67KEqq869SF4m8rmPb5RlaVRzmmZzZ3nzogWXbxgbtms2jBbK9e8R7qN+iw772DVB0z6ZkdJC+1fTWJEgRh74lLXqFdO37Csfh0HVmWkRWFYaOK0PTGpiAV62HJW9BzFEqXgZwy+btHe5oMKRzFDX+5F6nLYPjZA3D5U3DaTcQlH1JGPu6JV1Nw0/M8W5rK16X1bW5j9pKt/Pqlr7Acl3tPG8gZgzoCcOrkKQwYMtwb8W0M7GurqwC4bHQ3hnRKZdoqm6Numoase80EvEl5TTP9W+dlDikcxennnL9j8o/rJicIuq7LjBlP8W7xx3twVAXh+zVNuHv00Ud57LHHOHb8OAYNH8l1d91HyeZaPlxTyba6OLUxE9txefuDj5hy0S+YcvqJvD37Gd5/9QX0xlHVIYWjuOJPd2Oe9Aei/mwoXwdGA/aISczdYnPlS8tYuLl2j/fx7g++5brXv6GqweTWiX34+2k7guOlJQt45vG2U5PAuzAdNGwE4044hXEnnIKstAzCzzj3Z9/52pGEhabI9BCpFYLwoyRGkIV2raioiPvvv59fX3UVjm3zzdJFTL7oUmY/+SiWbSOVvIw69ATSJl33ndUfmjRNwus/8kj85/6FmKvAwlfRNi7m4XvvZPDww3l20Rae+WI9K1dX8N7qCq46soDJh3Xik/VVBHSFVeVRnv5yE71zAjx85mFkB/XGiXenY5kGsqKiqhqObaFqejLg9WsK958xiMtnL6O4IhuOuQTe3XEClyRpl3mZp0yewuuzZ2GZBqqmU3TMsXz4zpvJ8m8zX5vLqCNG77MuiYIwY8aMFhPuHNtmxdKFrFi6ENdxmXz+xSzZWgtIrFryJddfPBkzkUh+D5vSlIYUjuLtlWX8vXgt9XET5YNHsRe9CYCUksqUG++l2OnBTW9+w7SfDKF75u4FnF9squGFJds4siCTu07u32rybEl4fotcaEVROOq4E/nkg/eS381rb5ua/L59Om8uL838L+VlpZxx7gWcdf7Fu3xtw3JoMG3G9sgWE/ME4UdKBMhCu1dZWenlHjfmIa9e/hWO443OSoko9ifPUHnsr7js3qf49x+kXd4WXVqygF9ddB5mryLcml7IoSxuHaZRpeaTfsJgnn3sQTas+5aMrGzqFy9CCmbBhCt46BN46JP1LbY1piCTWyb0Ibuxf63XWMBrLGJbJkedcAqDho5oNeM9za/xn/OG8ZuZYb447ASI1cH8/yA3NhzYVc7jkMJRPDLzlRYlqsIfvp8MmEcWjaVkcw3je+eIMlPCXguHw0yfPn2Xy9956VmMSG3y8z1tzgsY8QRNd0IkSUpeHL6wZCv3Fq+hZ3aACcYSXlr6dnI7bqye5/78a0ac8lNW9P8JF81czMkD8ri8qDvp31GC8eO1ldz4xgp6ZKXwlxP7tVlZpr6urkVq1vmXXsVvb759l5VqBg4dzpgJJ+7yNV3XpT5hETVtFEmisEt6shqPIAg/PuLbLbR72dnZyS5yuq5z/pSfsKzkM2wTkCTspW9D/gDsop8ydf5WHh1ktnly/c8nKzB++k8IpEPFeianb+OMcb9iaarMpT85BduyWj4hsQVevI0xF11Pr+POQVMkCjID5Kf7kLet5M2nH95xkt1p8DorJ4/Tfv5rstvo7KcqMg+fP4bfzfyU8KifkDl6ErJjMjw/lYJBw3d5HJrXXQVaBMxDCkdRFjVoMGyColGBsJc++OADrO+oRLFi2VK+XrwQWVEYdeQxfPbR+y2WH3P8yVz4q9/Sc/AIfvPEAgbkpfLAmYPY8LXNnAd1DKdZS3Xb5svX/oP6aTEdf/Uvnl+yjbWVDfztlAGtmgitKIvwWHgDH6+rYkBeiAfPHNxmLfOd0yukxtx+aP092h0x06Y2bpEb0inICpDqU8lpo1GQIAg/HuJMKrRr4XCYq6++OtlF7je/+Q3x+lqu+dNdVFVWkZOT7ZVme+8h8IdYXVDIb2d9zuj6Eo4cU0SkpooVy5dT2mU0Hzg9kGIbkT6YhrqxhJOefRnwRn9bBcdNHJsvnrmPX54+PnlS3bmBySMzX+GUs6fw2gvPYJkmqqYx9pTJqIrM9voEeam+Vk1FZEni/84tYvbSbUxfsInKmMl7W23Wz15Kj6wA1Q0m54/oTG7Ix7urytlYHeOUgR0Y1ys7uY2dT/QKsLk23mZzBUHYE6PGHIWqadjgXYQ2+350LejJpvVrAS+43Tk4Bhg0dASDRxzOdXOWEzdtbjy2F+l+LXkn5I3Zs3h51gycZkG4XbmZ0xMLCI2fwj+K13DtnOX8YlRXyqMGw/LTqE/YyXKKFxZ24dLR3dpsCLS0ZAHT7vtbq/SK75t0uzPLdiiLGsgShHSVooLMPWplLwjCoU0EyEK71tR4oKlRxn333YfjOGi6zp1PvMAxY4+kd/+BjSOpY3h3i8XMbw2+LkvliUffhC6DwT8QNtgM9tXTx1pIdUEa2YefCzRrK7sTr50zgItjW8mSbyXh+ZRu3ZxsYGK6Cabd9zcu+/2NPPbcHMLzP6J/YRFHHTmGPrkhtvx/e/cdH1WZNXD8d++dmXRCGi10qYGEaugSBBRFQQQEy4JlxbWsa111XVfXhnV39bXvuqirgFKUpliAIEgohhJ6ByEJIb1Pvc/7x5DJhIQixYRwvp+Pfzi5c+feJzyTM8+c55zCcvbnldMo1FYtSLYaOjf2iGV8t2boGny/K5tp6w7x/a4cAH4+btPSsr25xDcJIzLYxqUtw5nYPZa01LUsmj2T3JyjREbH0P/qcTQZcwWhARaME7Tpra9SUlJITk4mKSlJqnqcBY+paBHXnZf+O5u9G9dwJOMwc6d/jDJNdF2nQcOGJ32+1RZA18QBvLhkDz/uy+ORpLZ0bhzm+3nFB7uOXRN4+a+P+AJZi9VG7/4DSejWjFCbhZeW7uH+r7ZWOXewBa4zdpAUHECQtU2116748FpRxlHTNHTD4M/PvXrKVWOlvBvvAJweE7ep6BATSqBFJzY8EIuUcRPioiIBsqjTkpKSsNlsOJ1ONE3D4/F4g2Wnk90bVtOzd58qK6mLZj8EP++FyyZDk/bek2TuhH3r2J76JVtND8o00XSdhbNnettX+600RURG0+3SPvRPGsbrf/+LL8c3PCLSt2psGAaGYfHlRa9ZkUzq6p8Yet1Exk28icsGDqBtVAiGrhEeZMVq6GzPKkbXNRqHVl9N3rZhnS9VYuYtiRTb3VgMjS1Hiil1uAkPstI+OoTZaZl8tzOb5ftyWb4vl/U7D7Diyet9TUcAFsyajq7NZVjSIOKbNjj/v6A6IiUlhSFDhuB0OrHZbCxbtkyC5DNQ5nSTeriQEqebAf37c9nAAaSlrq2yQbRX30Fs27Shxk2xPRL7c8tDf+O9A4FsyjjCjd2bMaFbsxpf6/qbb6Vdpzg+efdN38a4inl8dedGXNY2ksU7jmJ3m9jdJiVH0/ni8ZuZV1rIgn/q3Pz7ewlr0KBKN8zUlJXecojH5niPfpdx872P0Ll7bwrKXQRZDYodbgxNIyzAwNA1sktduDwmLruLVtHeP4nNgizEhgcSXENusxDi4iCzX9Rp/fr1Y8mSJSQnJxMVFcUDDzzgC4LGjbwCu9tDkEf3re7k5hyFnT96/wtvAqV54Hai6zomoI6tRCvTxO1yggKr1YYb7x//1z/8zPdHunJlemCVttcakNCrDxvWrvKeSylcTieLv/iEZfM+Z9myZbSPqQzO2kWHYDV0Sp1ufsm30yi08mvamtI1Kl7/0hZVV+puvbQFt17aArvbw8tL97JgWxb0Hg+rplORBO12udj2cwoJvRJxxpjYLBfHqtcrr7yCw+HdJOlwOPjkk08kQD4DW48U43SbVdo4+28QDY+I5PW//6VKyr1uGHSO787oCbdw3U2Tuf/LLWzKKODxIZcw7gTBsb+UH5fidDrYsWUT4A2ca9pIN+2t2bhKC1Gmicc0+eS9N3znqOiGed9fn8ewWFAuE6vFyhNPPkXSoAEYusbhQjuZRQ4ahwWga5Bb5sLpNgm26XRuFE55gYdWLU6+Oi6EuHhIgCzqvH79+vmCnfj4+Cpfox/OL+fzxUvZv3EN4RGR/LTs+8onFh4BQNN1rhw1jqWLF+B0eDcHaZqOxWpj5LiJjBw3kdSUlcQn9ieyXTylTjchNkuVlek9O7ahaxpK01DAxnU1d6+rKTjTNI3WkcGYpqLI7qbI7vJtLPIPvN1UlsU6mUCLwZPD2pOfm83KvhOgcxL88A4c3IBhsdB/0GV4lGLdoQL6toqod6kWFakUUVFR5ObmEhUVxYIFC2r7si54uaVOskscND6u6UWJw80L2wyO6H1pkF2AY/AUaNUd9q6lB4e54w/3csDWnBKPYsqsNDZmFPHAoDYnDI49piKv3EmI1eLralkR9L7y1KMcPnjA11nSZgvwfWis1g0cx78AACAASURBVODHT0U3zK1pG9F84bsitmGQbzNdRLCNLo0Vut98UEqhFOi6RkZx/ZonQoizIwGyuKD4B8sAv2zfwJO3j8fldKLpmi9XWdM02nfqyu6dW0Epli5ewIRbpzD9P2/j9njQDZ2Hn36RhF6JuD0mrbr0wO42iQ6xkV/mQsPD7rSf+TllJRGRUbz69OO4j21UUifZ3X8yuq6R0LQBqw7kU+7yEGT1bhzyX8E+3Y1EFl3jnxP78/vn32ZTeDcYNBl+2cToGyq/ps4udbAvt5T2MfVj015FV7dp06bhcrkwTdObY3qsFXkFwzCYNGlSLV7phcftMdmSWVStIkRWsYO/fLODvblltI4IokwPgw4DwBoI3a5iI3D/aiem8m7aC7EZ/HVYe0Z3aXzC1yq0uwi0GJS7TVp3S6wS9Lrd7iorwy6ng0WzZ3rbyGtwxTXXs3jerBrTO5RS7N24Drfb7asPnpycXOX9Qj/uw6KmaUhVRCFETSRAFhe05cuX43Y5MU0POjqGrqOObczZs2ubL6XC5XSwa1saZkXbaqXIz8tjX14ZITaD2AaBtI4MJjzISmG5i4/mfc+fbxuL2+kCjSq77Y9nGAa6ruN2u7FarScNzkICLCS2bMiqA3lYdK1afeNfU35K0zT+dHUiU55+Hfew+zAuHVOljnJkkI09OaU0Cg244BuIpKSkMHToUOx2e5XgqCIQqigDaBgG77zzzkWZXlHu8pBZZKdJWADBNgsrVv7E9M8+BWDSpEknHZOD+WWUuz3E+KVWzNiQznspB1EKXryqE1d0jAEqm+3ExPdnt9aI/HIXHWNC6d6sAa0iggg9QZlBu8tDkcNNaICF7s3CsVk0ElteSUjRW9z/x/u8ZeVqCHy/+ryyLfup7N7lbcOuaRo2m42kpKTTep4QQhxPAmRxQfPfxGdYrTzw1IuUFub7dt776xCXwIa1q32rte179KFNZBAdY8KqFPwPD7JSuGcDbpcL0zxxYNymXQeuGDqEyZMnA5x2BYXwICs9YsPZmFGIoelnVJe1QkKvRN5/5iGeWHKIon4TcJneAKMiiOnSuz+m6kH/1hFndP66oqKayYm6JVasJhvH2gVPnTq13lezUEqxL9f7Ac/QNT7/einrVq2kZ98BtIgI4oZrrvCVZ/v3v//NnXfeWS1QVkpR4nCzK7u0Ss3ul75axewDHjo00Jg6pmeV7nZnWke41Omhd4uGRAXbfCu5ARaDu/9wF927JfDoX/7KT8lVS8a1uqQ9B/bsqnY+Xdfp1f8yWnbswryP3/d9u+N/X3/84x/r9e9fCHF+SYAsLmgVm/iWLVtG1979CWoVR4BFZ+/m9SycPROHww5KoZTi848+4OGnXyTjaDZxvfoxcEB/ujZpUGOr2OFDL+eF557FWdPK8bHVqU8+msbAAf2rXMvpatIgkMFBVtb9ks/REgfBVuOEK2+nomka+d+8j+u6v3HPGzN57Krt3trQxzb+3fOX5/i2rIikxJ5cP2b0Gb1GbUtKSvJ+FX+SlXylFC6Xi/vuuw/TNLHZbCxZsqTeBkmFdjcbM4qwGRq7NqXyxG1jcTkdfPqWQVyPS6vULvZ4PLz33nv8+9//5p133mHKlCmAt/GGVmYj0KL7ctVXpqxh9l4HpG/lwOLXKOz2BZzhBzjwpm+UONz0btHwpM01unZsz5qfVuB2eVeLLVYrN97+B159+rEqlVo0Xcdis3HXQ48zengSwy9N4N5776n2b2Pjxo1nfM1CCCEBsrjg+ecl55U5WXMw35e68PbLz7J+bQrKNHG5nBzOOsqU+x+mQ0wo0SG2E7Zl7tevH7fffjvvvfce4A1Chw8fztixY8nNzT0nq5NBVoPElhHklTk5XGjnaIm3CoNF1wi2GpQ4PZgKGgZasFl0nO6aq1KkpqzEc3ADbF2Kp+doFiTPqFKn+c1nH0eZig+sVpYuXUL//v2rneNCYNawOasaTcPt8Zbys9vt9bKahetYvnBWsZOoICthgRY+/maOr9W56fGw5efVNT7X4/Fwzz330KlzFzp170XK2nXs37mdJo1i2LklDTRYH9oNglrD0vfxlJec1sbRk8m3u7zz7QTBcUX6jNPpLaE4evRojNBIkq4dR2iAhVHjbyY35yhRMY1oHxdPVnYuE0ddyRVJgwDIy8ut8bxjx44942sWQggJkEW90jDQSliglbwyFwm9Ehl/x91s2ZiK61iHuxtGXkH/1pEnDIz99ehR2fZZKcXYsWN9K2/nSqDVoFl4EM3CgyhxuHG4TXJKneSUOmgfHUKQVSctsxiPXeExFSE2o1ob7YqNfq4V0zBb92Brh3GY69eh5Rw81gXNAyhcLpi/+IcLMkBOTk6ukl6hGwaDhl7JyqXf+/JTdcPg5jvvZeZ/3/PWwlWKadOmnTL/9kKTV+Yis8hBo9DKD3i52UdP+/kej4fHn3mB6++4h+f+dCcul9OXq0/L7jBuDNr6eZCfjv4rNo7WpMThrQjTMiLohMdUpM9UrAD36dOH+x58lOkLf+APN47G7XRhsVl56b+z6dCtN20ig4hrUlnj+/ha6T179uSOO+4453NVCHFxkQBZ1Ctr1qwmeekyGnXuhSeuB53iuzP1v7PZ+nMK1189nKuHDj7tc+Xm5voqJOi6Tm5uzStV50pogIXQAIgKsdGRysoTDQKtlDo9uE3FpoxC8sqcmMpbMSDIalRp3zt33nOY41+Efjeh5r8Apk5FjWRN02jSuZevgsaFwmMquvTuh8Vmw+X01rR+7LlXffVyKyocjBw7kYReiZSVFDP3s4+8pb+cznqziqyUYnd2KYcL7YQGGL7gOC11bdXyhsdp064jv+zfUyUFIWXpN9isGm7/4DiyOYz4E+Qdhp8qukvWnPN9OhxukzKXyYA2ESftQucf4FZsrNuyYR1z//1P3Me6aLocJqu/mcONI4cSc9xKtH+t9Pqedy6E+O1IgCzqDf+vam02G998+x2dW7dhcMIVhE24+lfXA05KSiIgIKDKH+7aEBJgIeRYfnJ4oIX0QjuaBkdLHOSUOokOsZHQK5HUlJWoI3tgzSwY+DuIvwK1+TvfeZQyMQyNlfvy6Nc64oxzns8ldawdcAX/dtE5JQ5W/LicFvGJtIvvyf99+hVpa3+qUu2jpg1jI8dO5KuZ/8NzrNxXfVlFPpRfzq6cEiKDbAT4pdosmjPTl7frT9d1rLYAnnr1TQAev/s2jh7J8P18+6aNGBYLuN2YmgEjHgTdAgtfQbkceNuse351ioWpFPnlLnRNo3eL8Gql4453fIALMHToUBwOhy+tRinFvC+m88Ddd9Kkht/j8eUfhRDibNX+X0ghzhH/r2qdTierVq6g/SVtaXiGJc7q4spUSICFDo28q8tto0L4+VA++eVOX01lw2LBs3Y2tOwGl90G+3+GkjwATFOxfP5sNq5ZxaGBg5g0avhJV/bOJ7vLw46jxRTavW1/g6wG+zanMmnstThdTnRNwzy2udJmC+Dhp1/0tRM+nWDNPx3D5XJVq4d7oTBNRbnLw+FCO3tySokJCcCiV64cL5o9k68+/9R3v4bFynUTb6Fjl4Rq4/X7Pz3Ki0886Dt3RbDcI7E/eX1v46ClMXz9GkZBOrrNhulxV6nNXe7y4PYoQgMMXB6FyzQJOa4Vc5nTQ7HTTZvIYNpGBRNgOb1vKvwD3KlTp+I8tnLs70L+PQohLjwSIIt6o6avas9WXV6ZMnSN7rHhpBzIJ6fUSdeel/LvWYv45N03SU9PZl+LLniG3QNfPe893mIwf9Z0PB43n77zOtHzv2HU8KTzeo0lDjfZJU5shoaha2QW2Sl2uHGb4DFNAiw6Lo+J26P4+oelOI51VfMPjRz2cl556lFMpaq1465JasrKKgGypusMuuz0U2vqku1ZxRzML0fTNBqF2tD90iruvvE6X5UWAKJacPVVV/HEiy/XeK7rb74VgP+88WqVleQNuR6wNGZMK4NmowbTq9+TAL7a3G279iSrxEGIzaBhsJXMIjsepbAZBmUuJxreVWOn2yTAYtC/deQZfyiFynl8fM1rwzCkrrEQ4jcjAbKoN2pa8c3IyDj1Ey9gARaDQW2j2J5VTFaxnYReibz2H29ziP+lHuYNzaD9Xa8TX7oFZ3kZX381+1hba/j6uyWMHDr4vLWizitzknIgD00DHQ00CDB0dE3DZmgEBdqqHN+sUUxlPuxxKurcupSjxq/81x0qoFVEEI1CA+jVbyA2WwBOhx00jUEjRvP1dz9g6Fqd/bBTk4JyF4cKy4nxC4wrVLRoJiQCYtpCo0ug30QW6Aaub3Zw34DWBFoNwgMtVVJYrr/5VnZuTWPOp9O8D1iD4PIpBJXl8Nio0ViMyg2cCb0SKSh3YugaA1pHEhZgQdc1OjcOpcjuJthqUOby5jUbuka504PNop9VcAyV89i/a6Ku67z11lsX1O9PCHFhkwBZ1Ct1ecX3fDF0jbZRwRwuKMdjKl/Ae2OPWFIO5rP2l/bcPGYkkZkb+H7RfF+jlI49+7LlSBGtI4LPWac9h9vDwfxygiw6W44U0zDISuBpfs2+c2vaKY8xTZPwiEj25JTy475c8stcZBQ5WL7Pu4HytktbcE//S3n46Rd55alHcXs8JC+cw/Kvv+Rfr77EkiVLaNWq1Vnd4/lkd3lIL7SzP7cMp8ckxGZUCY4r0ir27dmJGvEgdKpcGbe6y+nRqinf7sxm8c5sAMZ0bcJDg9tW2ZQ5cuxEvpzxCaYlEEY8AGExjG94GIuh+xrM9Oo3kNjO3bHqGr1bNKxSKzzAYhAT6v3/EP889speImetYh5PmjSpTqU4CSEuHhIgC1EPBNsstI8JYU9OGdEh3pVZi67x9piuTJ65kVeW7eVfV8RVa2udXmgnvdDOZW2jznrTnt3lYe0vBRSUe3OIo4JtNdZtrsnczz7iqxmf1Pgz3TBQpolSCl3XOZxXwtuz0yi0e1eVY8MD6duyIS5TMW3dITKK7DTPK6xsKw4o08ThcJCcnOzrfHim8sucZJU4CLIYtIo8d1GhUoptR4o5VFhOdIiNCEvVDy1pqWu5a8K13qYZl471BseZO2H9fDi0mVFjxvDEI/8gvdDO19uz+Gx9Ol9uOcKhgnKeGt4Bl8ekVUQQCb0SeeQ/C/nnhiJcliAGBOdx/603+tI2KhrMvPrRbO4eN6LW8tTh4vzAK4SoGyRAFqKeaNEwmH25ZbhN5dvIpWkar10bx++mb+CFlZl89rveVdITGocGkF/uZEdWMT2aNzyjdAuXx8TlMdlwuBCXxyQ2/MQ1b2uSlrqWl5961FeGTNM0Bg+/mqiYRqBBxy4JvPbC33E1j4dWPfhcdcPj9PD8iI4M7xDju2ZTeQPk91MOYqqeWDoORG3/0ZfHapomYeENf/X9+atoRGMq7wcQQ4cjRQ4CrQZxjcN8LZR/DaUUeWUudmaXUFjuIrZBYI11ulNTVuJq3BEG/A6adYKdK+Gbf4DpxmqzMXLcRMD7geHOvq34fZ+WzN18hFeT9zJ62joA2kYF07lRKD8dUBiBITwzqAlXdhtUef6KBjM4ydz2Mxbj6rMYLSGEuHBJgCxEPWGz6LSNCmbLkRIig6wE27xfgzcKDeDvV3bkvi+38MaP+3ns8nZVnhcRZONoiYPcUieNwk7cCrgmdpeH9YcLKbK7sRrQMMh26icdJzVlZZWKBYZhMOnu+32BfG6pky+d7dheqFBA39ZRPDi4Dc2PC8R1TeOOxJYktmjIfV9uIeS6h2nZOIjU5G99q8/70rN+9fVVKCh3seZgPg0CLQRaDIrsLrYeKcFqaBwtcdIw0ErzkzTEOJFDBeVsziwiLMBCo5O0Yk5v1hfGXwr2Ylj2AWxY6K1acdNtvhrQ/jRNY2xCUwa2iWTWpgx+3J9HYbmLb3dm06t5OA9e1pZoSnzHVzSccSoHmqbROrbJr74XIYSoLyRAFqIeadEwmPRCB3llToJtlcFa31YRjOscway0TDZt3syfBzSje+8+vp+HBVj4+XABUcE22kQG0Sgs8JSvVZFSUe7yEH6sHfapVOS4hkdEUpifR3hEJEfSD2OxWPG4XWi6zp+fexVbizgeX7Sd/Xll7M0tA2Bk50Y8MvgSwgJP/rYV37QB/xrdhT/M2UzCyD9iS1mO2+XNu26VkIjH/HXNLzymosjuYnNmMWEBFl9OtX993wCLh315ZTRpEPCrUhLsLg87skqI9ivfVpOf9uex8JAH7cgu1JfPoTmKGXzlSCb94f5Tlr1rHBbAfQPbcN/ANt7mKR7lq6NckFMZICf0SuTeJ5/jjb8/jjJNHnjgAeLj4yXFQQhxUZIAWYh6xGbR6d86giV7cih1uqvUqe2nH2buvq3sapvIH557kw/+9idfcBVkNQi06JS7TNanF5J0ibXKxix/pqnILLKzLasYXdd8Oc+nsmbNGh6cPA6XvcybGtzjGnDZ4chu9Na9sVz+e6IbhLAyrBlvz91Mod1Np0ah3DegNX1bRdCpUegpX6NCj9hwrugQw/K9ubz08ZfsSfU2GInt1J1fCgpp0fy0T8XRYjurDhYQHmgh4gSbGQMtBrml3vSL7rHhVTevnUB+mZMN6UUYhnbC4PhIkZ33Ug7y9Y6jRKgy8hZMhfJCdMOgS7eev6qBB3hXlQMsNb+W21Tk5+WDUpimidPplLrDQoiLlgTIQtQzFkMnsUVD1v1SgM0wsR5b0dy6YS1q4Vtw/bO4L/s9S1atqxJgaZpGsM3A7jbZmV1C3p40Vvz4I8OHXu4LkgrLXWxIL6Tc5SEiyOo7d01ySp3szS3F0DQK7W6eTinF+YfpUJDpPaBhU9+xJuAEMgryKNfz6N0qmjv7tKRddMgZj8Pv+7Tgu13ZLC+N4a/3PQR48333HfKmk0SdRmBvmoq9uWU0CbWd8ANDhagQG8V2NykH8xnQJvKE7bw9piIto5DMYgfhARYCrTW/DX+/K5snvt4BeFfPr4ko4IF3ynAbRpUGHudKfrmTq4YPYeZ7/6j17pFCCFHbJEAWoh6KCLbRpUkYaZlFvrzW7r0SsVksuL55FfPW91gf1q3Khj7fc4MsLF2+kiduH4fL6WLqCy+w4JtvSRo0gG1ZxWhw0lxZgCPFDqbM2kRGkcPvUSvaoTSUpkN5MaR9C3mHITQSSvPh8BYMt52bHv4Lt4186KzHoFVEMBO6NWPGhnTGJTSlU6NQNE0jzGawPauYAW0ia9wM5y+r2E6Rw03jU9xvhbBAC7mlTvblltEhJqTaBwjTVBzIKyOjyFGl8cfxNmcW8cqyvUQFW3n7+njfB4Xjq5D4U0phd5snDMxPpsTh/bZh2BVDaF7HukcKIURtOG8B8u23387ChQtp1KgRW7ZsASAvL48JEyZw4MABWrduzRdffEFERATgbS/64YcfYhgGb775JldeeeX5ujQhLgrNwgPJLHZQUO6iYZCVuG49eHfGVyyaPZMD5VtJLejFo5+vIirtSwzN9G300jSNvRvX4HK5ME0PTpeT6fO/xdYijnKX54QpFcV2N/O2HmHF/jw2ZRThNhXjE5oS1ziM1pFBOA9vZ8b7KWQfPYLL6WTXts1Vnq9pGpaAwHO6Mnpnn5Z8vSOLhxds47ObetAwyIrNolPscJNV7KBJg5pzrYvtbuxuD9uySogI/HU1osMDLezMLibUVrUMnMtjsj+3jF3ZpcSEWGsMjjdnFvH5xgy+351Dk9AA/jk6jrZRlavoCb0SawyMtWOr9CUON6EBll/VrMPpNil3exjYJgqLoUtpNSGEAM5bgctbb72VxYsXV3nspZdeYujQoezevZuhQ4fy0ksvAbBt2zZmzpzJ1q1bWbx4Mffcc4+v5JMQ4sxomkZc41Bcponbb2Pawjkz2TDtefQN81mRZfKV2Yk5n37EXRNGkZa6FqisaKDrOpqmEREZiQYnDI5zS53c+vlG/rViP3tyShkT34QFt1/KY5e349oujVEZO7jvxlEkf7eIrRtT2b1ja5Xn67rO9Tffeso20v6UUuzLK8XtMSl3eTha4uBoiaPKMWGBFl69Jo6sYgeLth/1PR4eaGXdoQKyjzu+4rwb0wtYuS8XhTevOy11LdPe+gcbfl7D19uPMndzJkeK7DVel8XQaRoayNasYvbmlLAxvYDMIjvJe3PZn1dGo1BbjRv5kvfkcNvnm/huVzZXdozhfzd1Z+PiWdx3y/XM/eyjGl+r2O5mf145WcUOHG7TF5BnlTjILnWcckOiUpBX7qRHs/CzroMthBD1yXl7R7zssss4cOBAlcfmzZtHcnIyAJMnTyYpKYmXX36ZefPmMXHiRAICAmjTpg3t2rVj7dq1soohxFkKtlmIaxzG5sxibGbVWrck/xdcTkgcB/0m4l4909fGOaFXoq8bncc0efuFv9K1a9cag9eCchf3frmZrGIHz43oyPD20dUCwNSUlbhdLt//K9PEMAw8Hg+6YfD4869x/c23nvZ9mUqRUWSncWggeeUugqwGiS0j2JtT6lsxr9AjNpwujcP4fGM6YxO8pcsCLDphNgu/5HubcvinWhTZ3ZQ4PbSM8AabvgYdLhf60LsxE0YAYNGgc0MdV8FR/ti3GX36VFYFsVl0ooJt7MkpxelRpBfaT9pV8OdDBTz3w24igqz8e3wCrSODefPFZ/jkvTcAWP3jMg4fPMD9f3nG95ycUm9DlmbhATQNCyQi2EpEsI1yl4cSh5tCu5vtWcWE2Sw1Vv4ocbgpKHfRs2UYjU+wki6EEBer33TJICsri6ZNvRtzmjZtytGj3hWd9PR0+vbt6zuuefPmpKen13iODz74gA8++ACAI0eOkJGRUeXn2dnZ5+PSLygyBpVkLLyTPIZydh49SsfOcRi6tzOdruuolOmYYdHQdwL64TQ6do6jICeLbZs28O282Xg8JkqZuFxOVi5ZTEu/Ns0eUzF3Rz4fbsxBQ+P5Ic0ISl/PB/PX0r1XInHdeviO7dg5DovFisvlBMBqs3Hfo09SWFjgO7Yg5+Q1it2mwuU2sRg6RQ4XseFBNLW4sQXq6JoHR2EO0XjILihhX7aHAIvmq+IxqWsDHluSzpc/72VQ9LFvpxTsPerCXpCNw2Pi8kCzBgFkFNlxujwU2L3P/fCNV7zd63qM8gbH25Nhyw942vVlc+ckCIzm3umr+OOGtbRv356NqZX3b6HyTdbugOPXnEucHv6xOosVv5TQItzGc0nNyNjwIx8t/IpFc7+ocuz/Pvg/evfpS6f4HpS53QRaDNpGh6BrGgFOB+VOKC+oPD4Y6BTiZltWHrkeE4+CBgEWrIYGCvLLXTSzOQh0FpKRUXjqf0j1nLxXeMk4VJKxqHQxjkWd+E6totOVvxNtnpkyZQpTpkwBoHfv3jRr1qzaMTU9drGRMagkYwFNmyoKy90UFheDpqGUwlSmNw922QfQvCuMf4E1ZTaSX3+ZBbOm43a7UMobSFutNgYOHUHD6Ma+c7790wGmrc+hY0wIjw1pB5k7uPvu232tiv3TJfoPHcH7Xyxg0eyZoFFjY4uTcZuKI0V2LEEapqYxsF0DmjWsuSlHbKyH7VklHC4op0FYALqmcXmUouX6PL47UMaIS5r47iNcKXLLnNg1hW6BX1wQGh5K9LF0g7TUtaSsSIZe18Flt8LuVfDNPwGFOpTmHbueoyDp9/xf8kwsrz6HaZrV7r8m+/PKuGPeJoocbq6Pb8L9A9uwb8t6Hr37dhwOu69NdgVlKj784D1uvOdheiX2PWmlDH+tmpt4lKLY7iItsxiHx0QD2jUOoJFWJvPDj4yFl4xDJRmLShfbWPymAXLjxo3JzMykadOmZGZm0qhRI8C7Ynzo0CHfcYcPH77ofhFCnE+aptE2Opjpn/7kS3VQpokHwFMCnz1I+M3P89neVpBugNObm6vrOokDBzPlwcd9wZ5SijlpmXySepj+rSP4x6guWHSNaXMr0zfcOH3pGv6axDavsQJDTTymoqDchalA06BDTCjBNoNGYQEnDQwDLAbdY8MJshocyCvzpVAMjnTxv73lzF6ZzZ1jmvjGJTrkxBUq1q1aiTnyMWjXF/ashsXe4LiK9fOhcTvocwPu3EOwcwVO086i2TNPeJ8lDjcPL9iGrsM713clsaV3s3JFCszxwbGXIm3NCnZtXMvib78nqMOAk45fhYoGLkFWg8uCbHiUwmbo6BpkZpad1jmEEOJic9426dVk1KhRfPzxxwB8/PHHjB492vf4zJkzcTgc7N+/n927d5OY+OsK4AshTi7IanDtiGHoNdUuLisk/78PQNo33hXRgZPQNA2rLcAXHNvdHt5ZdYBrPlzLS8v20rdlQ168qpOvTFzFxj7juDq9aalrmfrEQ9w1YRTvvv4id994nW8zoMdU2N3elAeH27vZLrvU2wkwq8RBRLCVpHZRXNExhs5NwmgVGXzaZczaRgVjKoVSirTUtXz+6A2Qn8EH64+y8ec1p3UOT7t+3uA4bTHa168y6Y4/oBs1vP73b0H6dhj5KAy9G6Vg/qzpvvv0V+Jw85evd5BeaOeVkXG+4BiguKgI5dd2W9M0DIuFTgk90XQddayBx08rfzyt6z+ezaITZDUwdO2UJe6EEOJidt5WkG+88UaSk5PJycmhefPm/P3vf+fxxx/nhhtu4MMPP6Rly5bMmjULgC5dunDDDTcQFxeHxWLh7bffxqjpj5AQ4qxcf+UQ3njz//jT/X/0BmKahukxAYWmFPqKj/BYgyBxHOFx/Wgc25wlpdFk7jzKsj25/LA7h8ahNh4Z3Jbx3Zph+NVQrtjYt/Sb+Vx+1SgSeiWyYd0a7rt5TJWUATdO1q5aQYvO3XF6FG5TEREEhQ4XwVaDdlHevFoTRbvo0++edzyroRMdYqPA7vJuEnSUw8pPUNc+zr9+OsS0YyXtTuRgfhmf7XVDzgFY+j4Wi0HSlVeTunolWzemVj3Y0jubnAAAFA9JREFU7YR5z8O1T0C3q6AgE/f6edVWkdf8ks8z3+4iu9TJI0lt6dk83Pcz/0154F29v2bCJAZdM5aIQCv33DgKl8uFYRjSwEMIIc6z8xYgz5gxo8bHlyxZUuPjTz75JE8++eT5uhwhxDH33v0HunbtyowF3xIaHsFbz/8Vl9OBputccdW1fPf123jyMyjoPpKCQsXO9d4Ns4YGPbRMRgSWUfTTT2w1q6ZKpKWu5fW//wWXy0nq6p9YlfwDGRkZ1fJpdcOg66X9aRERTGx4IIcKyim2u+kWGU6LiJrzis9UfNMGbMks4pLufbBabbj2rYEdy9nSaTCbMoroHhte4/N2Z5fy50Xb8LhdaAteQpkeTI83BWL0hFuOC5A1dEOnVcvm7J/zNxj9JAy+HZW1h/mzptOxawKF+Xk07z6Ap9a70DT41+guDGwT6Ru3RbNnMnf6R1WuwTRNIho347bRV7ArLdUXzMvKrxBCnH91YpOeEOK3NXjQQHol9mXFvlwA3njmMTymyXcL52KaJqyeib7+K0beMImwpq1wh0Tz1T+fZGNxHhtME9Cw2mw8+veXKMzPo1e/gVVKyJkeD8nfLqr2upqmcfttt3Hv+Kt8j3VuHHbe7jPQatCzeUPWWHSuun4Chq7Rd0hvXthn4bkfdvPZTT2qtZBe+0s+jy3ytnge3/AoM4qPYuq6L22k4kPB0m/m0yEugbAGDXzpJHdNuBbXwpdh0ltw3VO4Ni5i6uc/oEKjoKQzASGhzLk1kSZh3rxnbwm5Ubic1esxWyxWrr1yKFEhNpKTk3G73SilcLvdJCcnSxlMIYQ4jyRAFuIiFRpgoWuTBnyRk4tpKpRpYh7ryqbpOgYmi7/4GI/HjaZpmKbplx+rcDkdvPzXR1CA1Wrj4adfxDAMb43lGui6TkBAAJMnT/7N7hFgzZrVPDJpLE6nE6vNxuChV3DHJRqvbynn+XlreG5sP9+qbF6Zk4cXbMNm6Py5i8azdzyE51hJvIefftEXHF930+Qa6zaPuuFm5nw6DT5/HK59DBLHVW7pO7yVwSUZNAkbRFrqWlJTVrIqeUn14FjT6Na7L88+/yKjrkgCICkpCZvNhtPpxGazSYqFEEKcZxIgi3ojJSWF5ORkkpKSZHXtNLWICOK6EcOZ/t4/cDuVNwgGDMNgwJDh/PjDYl/Aq+v68fUb8BzLX3bjZNPGDVzSqSs70tZXex1N0xg2bBjPPPPMb/67SU5O9q5smx7cLiffLfyK7xfNh6QpLGYoyW+tJKFZQy6JDmbpnlycHsWTCRrTX/krDrsd8JbRKMzPQynF0RIn3nhaIyzAqLJpcOTYiSycPRNnWT7qiyehbW/wuCDvMBQeJeyWW0lLXcvdN16H0+mosiEPoEN8D/7xj38wclhSlcf79evHkiVL5N+3EEL8RiRAFvVCSkoKQ4cO9a2wLVmyRIKI03TN8MH885Mv+ej/XuHnn5Z7gzaliIpuVGVF2Kyh9Jhh6L6g+tu5M3zHalrVKgkBAQG1EhxD5eqrw+nEYrWSn5uD02GHxW+g5R3GPnAyaw8VsPZQAW0jg+lZtpanbnm+Sn123bDQq99AcsqctGgYSKfGYeSVudidXUJ6oZ1Ai05UiI2EXom8O+MrFs2eyVeff4pnz2rfOSxWKyPHTmTRnJk4HfZq9d81Xef1GoLjCv369ZN/00II8RuRAFnUC8nJyTidTjweD06nU3I0fwVD17jhqiGUudykrVuN2+XEYrUxctxE0GDOpx8BqlptXl3X8RwLiNWxvOOKxytWizdv3sycOXMYO3Zsrf0+KlZf3/33f9nzSzqrk7/zBaf6+vm89/iddOrWm2KHm+VfzeDld56rdo5R42+ieefuhAdaiWvSAEPXaBwWQEyIjSKHm7SMQnJKHUSHBPhadaPB3M8+Qh1LWxl9wy3s2bGNr2Z8UmNzpCuvGsk1JwiOhRBC/LYkQBb1guRonp3o0ABGDh2M/t9Z7Nu4xrcZbc+Obfg3xjAMC6bpQdP1GnONNU3zrRYDPPDAAzidTlasWEF8fHytfmiZPfMzysuPpUwcY3rcrPjuGxbP+Rw02LElrdrzrLYA+o8cS3igle6x4VVK2+m6RsMgKwPaRLH2l3yK7W7CAr1vqxXpFhUfODp2TeDlpx71fajwPl9HKYXNZuNvTz5x/m5eCCHEryIBsqgXJEfz7HWICaVkQH/ievTGqnubiRTm5/kaVHjr8t5CUGQTXOXFzPnw7SrPNwyDO++8k0mTJtGvXz+mTp1aZ1b1K75hOL4LnlKqSu1hTa/aRKVHYn9+98BfuHZ4EpdEBZ+wxJqhayQ0bcCKfbnoTgi2Gr50i9SUlYRHRDJv5qd43O7K51gsPPDMy4SrcoYNvVz+zQohRB0iAbKoNyRH8+wYukZCswbszi7lSLEDh9skIXEANluAbxV04NVj6de/P4s+ehtN0ypTFXSdd955hylTpvjOV5dW9X15yA6Ht4zdCSjTpGlsSyJjYhg94RauuuF3uDyKVhFBp6w/HHKsKsi2oyW4PG4aBll9VS/umnAtLqezyvHjb7ubZx+9n2CbvA0LIURdI+/MQgifAItB16YNCA0oY9uRYuJ69Oal/85i47pVJFzan0ED+tOreUP0EcP416tTcTgc6LrO22+/XSU4hrq1qu9/LYZhMP+HZFKWfldjmkhm+iHycrNp26EzRQ43/VpFYK2pPXcNmkcEERpoYdX+PEyl0DXN28XP5ap2bMcWjSU4FkKIOkrenYUQ1bRsGERseCBWQ6df66spG3Mlho4voDvd4LcurepXXEtGRga33fMn/rfgB1YsnM38z/93XKCscLmcLFu+nGcGDSAi2ParXqdhkJX2MSHszimhcWgg3fsMwGK1VllBDggI4Mphl5+jOxNCCHGuSYAshKhG1zV0vCkFhq75Np75q0vB768VExrAuCuHENejN6PG38ii2TPJzTnKT8t+wONxY7Va6T9wELENz6z19SVRIZS5PBwusBPdPoEXp81l6bwvKMrLpmPrFvz+9lsv2LETQoiLgQTIQoiLUpMGgezNLaNNl5480SsRh9tkzeoUNq79iTEjhnPl5ZdVaQLya+i6RnyTBgRbDXRNY0CbYdw7fgSBFv2UucxCCCFqnwTIQoiLks2i06dVQ1IPF5JV4mD7hp/J2ZHKTaNGMHzwIHT97AJZXddoHxN6jq5WCCHEb+n0dp4IIUQ9FGyz0LdVBMaRnTz1+/G8+uKzjBk5gjVrVp/6yUIIIeotCZCFEBc1q6GzfvVP1Wo2CyGEuHhJgCyEuOhV1Ek2DKPWazYLIYSofZKDLIS46NWlms1CCCFqnwTIQgjBhV22TgghxLklKRZCCCGEEEL4kQBZCCGEEEIIPxIgCyGEEEII4UcCZCGEEEIIIfxIgCyEEEIIIYQfCZCFEEIIIYTwIwGyEEIIIYQQfiRAFkIIIYQQwo8EyEIIIYQQQviRAFkIIYQQQgg/EiALIYQQQgjhRwJkIYQQQggh/EiALIQQQgghhB9NKaVq+yLOVHR0NK1bt67yWHZ2NjExMbVzQXWEjEElGYtKMhZeMg6VZCwqyVh4yThUkrGoVJ/H4sCBA+Tk5FR7/IIOkGvSu3dvfv7559q+jFolY1BJxqKSjIWXjEMlGYtKMhZeMg6VZCwqXYxjISkWQgghhBBC+JEAWQghhBBCCD/GM88880xtX8S51qtXr9q+hFonY1BJxqKSjIWXjEMlGYtKMhZeMg6VZCwqXWxjUe9ykIUQQgghhDgbkmIhhBBCCCGEHwmQhRBCCCGE8FOrAfKhQ4cYMmQInTt3pkuXLrzxxhsA5OXlMXz4cNq3b8/w4cPJz88HIDc3lyFDhhAaGsp9991X5VxJSUl07NiR7t270717d44ePVrja6amphIfH0+7du24//77qcgw+fHHH+nZsycWi4XZs2efx7uuri6Nw0cffURMTIzv+f/5z3/O451XV5fG4uDBgwwdOpSEhASSkpI4fPjwebzz6s7lWDidTqZMmUKHDh3o1KkTc+bMqfE16/v8ONtxqE/z42zHor7Mj+LiYt/vs3v37kRHR/PAAw/U+Jp1bX7UpTGo7bkBdWs8anN+nMv3iRkzZhAfH09CQgIjRoyosV4w1L25cU6oWpSRkaFSU1OVUkoVFRWp9u3bq61bt6pHH31UTZ06VSml1NSpU9Wf//xnpZRSJSUlasWKFerdd99V9957b5VzDR48WK1bt+6Ur3nppZeqVatWKdM01YgRI9TXX3+tlFJq//79atOmTep3v/udmjVr1rm8zVOqS+Mwbdq0auf8LdWlsRg3bpz66KOPlFJKLVmyRN1yyy3n7D5Px7kci7/97W/qySefVEop5fF4VHZ2do2vWd/nx9mOQ32aH2c7FvVpfvjr2bOnWr58eY0/q2vzoy6NQW3PDaXq1njU5vw4V+PgcrlUTEyM773h0UcfVU8//XSNr1nX5sa5UKsB8vFGjRqlvvvuO9WhQweVkZGhlPL+ojt06FDluJom4ukEQxkZGapjx46+/58+fbqaMmVKlWMmT55c67/E2hyHuvAm5682xyIuLk4dOnRIKaWUaZoqLCzsrO/nbJzNWDRv3lyVlJSc9PwXw/w423GoT/PjbMeiPs2PCrt27VLNmzdXpmlW+9mFMD9qcwzq2txQqnbHoy7NjzMdB6fTqaKjo9WBAweUaZrqrrvuUu+//361818Ic+NM1Jkc5AMHDrBhwwb69OlDVlYWTZs2BaBp06Yn/Gr8eLfddhvdu3fnueee8y3v+0tPT6d58+a+/2/evDnp6enn5gbOkbowDnPmzCEhIYFx48Zx6NChs7yjM1fbY9GtWzff185ffvklxcXF5Obmnu1tnZGzGYuCggIAnnrqKXr27Mn48ePJysqqdlx9nx/nahzqw/w4F2NRX+aHvxkzZjBhwgQ0Tav2s7o+P+rCGNSVuQG1Px51ZX6czThYrVbeffdd4uPjadasGdu2beOOO+6odlxdnxtnqk4EyCUlJYwdO5Z//etfNGjQ4IzO8dlnn7F582ZWrFjBihUr+N///lftmJoCpJr+0deWujAO1157LQcOHCAtLY1hw4YxefLkM7qOs1UXxuK1115j+fLl9OjRg+XLlxMbG4vFYjmjazkbZzsWbrebw4cPM2DAANavX0+/fv145JFHqh1X3+fHuRiH+jI/zsVY1Jf54W/mzJnceOONNf6sLs+PujAGdWVuQN0Yj7owP852HFwuF++++y4bNmwgIyODhIQEpk6dWu24ujw3zkatB8gul4uxY8dy8803c/311wPQuHFjMjMzAcjMzKRRo0anPE9sbCwAYWFh3HTTTaxduxaPx+NLsv/b3/5G8+bNqyTKHz58mGbNmp2Hu/r16so4REVFERAQAMCdd95JamrqOb3P01FXxqJZs2bMnTuXDRs28MILLwAQHh5+Tu/1VM7FWERFRREcHMyYMWMAGD9+POvXr7/o5se5GIf6Mj/OxVjUl/lRYdOmTbjdbl8zhAtlftSVMagLcwPqznjU9vw4F+OwceNGAC655BI0TeOGG25g1apVF8zcOFu1GiArpbjjjjvo3LkzDz30kO/xUaNG8fHHHwPw8ccfM3r06JOex+12+3ZWulwuFi5cSNeuXTEMg40bN7Jx40aeffZZmjZtSlhYGKtXr0YpxSeffHLKc/8W6tI4VEwegPnz59O5c+dzfbsnVZfGIicnB9M0AZg6dSq33377+bjlEzpXY6FpGtdeey3JyckALFmyhLi4uItufpyLcagv8+NcjEV9mR8VZsyYUWWl8EKYH3VpDGp7bkDdGo/anB/nahxiY2PZtm0b2dnZAHz//fd07tz5gpgb58R5z3I+iRUrVihAxcfHq27duqlu3bqpRYsWqZycHHX55Zerdu3aqcsvv1zl5ub6ntOqVSsVERGhQkJCVGxsrNq6dasqKSlRPXv2VPHx8SouLk7df//9yu121/ia69atU126dFFt27ZV9957ry/xfu3atSo2NlYFBweryMhIFRcX95uMgVJ1axwef/xxFRcXpxISElRSUpLavn37bzIGFerSWMyaNUu1a9dOtW/fXt1xxx3Kbrf/JmNQ4VyNhVJKHThwQA0aNEjFx8eryy+/XB08eLDG16zP80Opsx+H+jI/lDr7sahP80Mppdq0aXPK32ddmx91aQxqe24oVbfGozbnx7kch3fffVd16tRJxcfHq2uuuUbl5OTU+Jp1bW6cC9JqWgghhBBCCD+1noMshBBCCCFEXSIBshBCCCGEEH4kQBZCCCGEEMKPBMhCCCGEEEL4kQBZCCGEEEIIPxIgCyFEPfTMM8/w2muv1fZlCCHEBUkCZCGEEEIIIfxIgCyEEPXECy+8QMeOHRk2bBg7d+4E4M033yQuLo6EhAQmTpxYy1cohBAXBkttX4AQQoizl5qaysyZM9mwYQNut5uePXvSq1cvXnrpJfbv309AQAAFBQW1fZlCCHFBkBVkIYSoB1asWMGYMWMIDg6mQYMGjBo1CoCEhARuvvlmPv30UywWWRMRQojTIQGyEELUE5qmVXts0aJF3HvvvaSmptKrVy/cbnctXJkQQlxYJEAWQoh64LLLLuPLL7+kvLyc4uJiFixYgGmaHDp0iCFDhvDKK69QUFBASUlJbV+qEELUefJ9mxBC1AM9e/ZkwoQJdO/enVatWjFo0CA0TeOWW26hsLAQpRQPPvggDRs2rO1LFUKIOk9TSqnavgghhBBCCCHqCkmxEEIIIYQQwo8EyEIIIYQQQviRAFkIIYQQQgg/EiALIYQQQgjhRwJkIYQQQggh/EiALIQQQgghhB8JkIUQQgghhPDz/3VzLG5Hrj2tAAAAAElFTkSuQmCC"/>
-          <p:cNvSpPr>
-            <a:spLocks noChangeAspect="1" noChangeArrowheads="1"/>
-          </p:cNvSpPr>
-          <p:nvPr/>
-        </p:nvSpPr>
-        <p:spPr bwMode="auto">
-          <a:xfrm>
-            <a:off x="307975" y="7937"/>
-            <a:ext cx="304800" cy="304801"/>
-          </a:xfrm>
-          <a:prstGeom prst="rect">
-            <a:avLst/>
-          </a:prstGeom>
-          <a:noFill/>
-          <a:extLst>
-            <a:ext uri="{909E8E84-426E-40DD-AFC4-6F175D3DCCD1}">
-              <a14:hiddenFill xmlns:a14="http://schemas.microsoft.com/office/drawing/2010/main">
-                <a:solidFill>
-                  <a:srgbClr val="FFFFFF"/>
-                </a:solidFill>
-              </a14:hiddenFill>
-            </a:ext>
-          </a:extLst>
-        </p:spPr>
-        <p:txBody>
-          <a:bodyPr vert="horz" wrap="square" lIns="91440" tIns="45720" rIns="91440" bIns="45720" numCol="1" anchor="t" anchorCtr="0" compatLnSpc="1">
-            <a:prstTxWarp prst="textNoShape">
-              <a:avLst/>
-            </a:prstTxWarp>
-          </a:bodyPr>
-          <a:lstStyle/>
-          <a:p>
-            <a:endParaRPr lang="ru-RU"/>
-          </a:p>
-        </p:txBody>
-      </p:sp>
-      <p:pic>
-        <p:nvPicPr>
-          <p:cNvPr id="7" name="Рисунок 6"/>
-          <p:cNvPicPr>
-            <a:picLocks noChangeAspect="1"/>
-          </p:cNvPicPr>
-          <p:nvPr/>
-        </p:nvPicPr>
-        <p:blipFill>
-          <a:blip r:embed="rId3"/>
-          <a:stretch>
-            <a:fillRect/>
-          </a:stretch>
-        </p:blipFill>
-        <p:spPr>
-          <a:xfrm>
-            <a:off x="427484" y="3085280"/>
-            <a:ext cx="5354837" cy="3266976"/>
-          </a:xfrm>
-          <a:prstGeom prst="rect">
-            <a:avLst/>
-          </a:prstGeom>
-        </p:spPr>
-      </p:pic>
-      <p:sp>
-        <p:nvSpPr>
-          <p:cNvPr id="8" name="Прямоугольник 7"/>
-          <p:cNvSpPr/>
-          <p:nvPr/>
-        </p:nvSpPr>
-        <p:spPr>
-          <a:xfrm>
-            <a:off x="242193" y="6286796"/>
-            <a:ext cx="6096000" cy="307777"/>
-          </a:xfrm>
-          <a:prstGeom prst="rect">
-            <a:avLst/>
-          </a:prstGeom>
-        </p:spPr>
-        <p:txBody>
-          <a:bodyPr>
-            <a:spAutoFit/>
-          </a:bodyPr>
-          <a:lstStyle/>
-          <a:p>
-            <a:r>
-              <a:rPr lang="ru-RU" sz="1400" dirty="0"/>
-              <a:t>https://h1ros.github.io/posts/prophet-101-a-time-series-forecasting-module/</a:t>
-            </a:r>
-          </a:p>
-        </p:txBody>
-      </p:sp>
-      <p:sp>
-        <p:nvSpPr>
-          <p:cNvPr id="10" name="Объект 2"/>
-          <p:cNvSpPr txBox="1">
-            <a:spLocks/>
-          </p:cNvSpPr>
-          <p:nvPr/>
-        </p:nvSpPr>
-        <p:spPr>
-          <a:xfrm>
-            <a:off x="5967611" y="1620773"/>
-            <a:ext cx="5881489" cy="1530350"/>
-          </a:xfrm>
-          <a:prstGeom prst="rect">
-            <a:avLst/>
-          </a:prstGeom>
-        </p:spPr>
-        <p:txBody>
-          <a:bodyPr vert="horz" lIns="91440" tIns="45720" rIns="91440" bIns="45720" rtlCol="0">
-            <a:normAutofit/>
-          </a:bodyPr>
-          <a:lstStyle>
-            <a:lvl1pPr marL="228600" indent="-228600" algn="l" defTabSz="914400" rtl="0" eaLnBrk="1" latinLnBrk="0" hangingPunct="1">
-              <a:lnSpc>
-                <a:spcPct val="90000"/>
-              </a:lnSpc>
-              <a:spcBef>
-                <a:spcPts val="1000"/>
-              </a:spcBef>
-              <a:buFont typeface="Arial" panose="020B0604020202020204" pitchFamily="34" charset="0"/>
-              <a:buChar char="•"/>
-              <a:defRPr sz="2800" kern="1200">
-                <a:solidFill>
-                  <a:schemeClr val="tx1"/>
-                </a:solidFill>
-                <a:latin typeface="+mn-lt"/>
-                <a:ea typeface="+mn-ea"/>
-                <a:cs typeface="+mn-cs"/>
-              </a:defRPr>
-            </a:lvl1pPr>
-            <a:lvl2pPr marL="685800" indent="-228600" algn="l" defTabSz="914400" rtl="0" eaLnBrk="1" latinLnBrk="0" hangingPunct="1">
-              <a:lnSpc>
-                <a:spcPct val="90000"/>
-              </a:lnSpc>
-              <a:spcBef>
-                <a:spcPts val="500"/>
-              </a:spcBef>
-              <a:buFont typeface="Arial" panose="020B0604020202020204" pitchFamily="34" charset="0"/>
-              <a:buChar char="•"/>
-              <a:defRPr sz="2400" kern="1200">
-                <a:solidFill>
-                  <a:schemeClr val="tx1"/>
-                </a:solidFill>
-                <a:latin typeface="+mn-lt"/>
-                <a:ea typeface="+mn-ea"/>
-                <a:cs typeface="+mn-cs"/>
-              </a:defRPr>
-            </a:lvl2pPr>
-            <a:lvl3pPr marL="1143000" indent="-228600" algn="l" defTabSz="914400" rtl="0" eaLnBrk="1" latinLnBrk="0" hangingPunct="1">
-              <a:lnSpc>
-                <a:spcPct val="90000"/>
-              </a:lnSpc>
-              <a:spcBef>
-                <a:spcPts val="500"/>
-              </a:spcBef>
-              <a:buFont typeface="Arial" panose="020B0604020202020204" pitchFamily="34" charset="0"/>
-              <a:buChar char="•"/>
-              <a:defRPr sz="2000" kern="1200">
-                <a:solidFill>
-                  <a:schemeClr val="tx1"/>
-                </a:solidFill>
-                <a:latin typeface="+mn-lt"/>
-                <a:ea typeface="+mn-ea"/>
-                <a:cs typeface="+mn-cs"/>
-              </a:defRPr>
-            </a:lvl3pPr>
-            <a:lvl4pPr marL="1600200" indent="-228600" algn="l" defTabSz="914400" rtl="0" eaLnBrk="1" latinLnBrk="0" hangingPunct="1">
-              <a:lnSpc>
-                <a:spcPct val="90000"/>
-              </a:lnSpc>
-              <a:spcBef>
-                <a:spcPts val="500"/>
-              </a:spcBef>
-              <a:buFont typeface="Arial" panose="020B0604020202020204" pitchFamily="34" charset="0"/>
-              <a:buChar char="•"/>
-              <a:defRPr sz="1800" kern="1200">
-                <a:solidFill>
-                  <a:schemeClr val="tx1"/>
-                </a:solidFill>
-                <a:latin typeface="+mn-lt"/>
-                <a:ea typeface="+mn-ea"/>
-                <a:cs typeface="+mn-cs"/>
-              </a:defRPr>
-            </a:lvl4pPr>
-            <a:lvl5pPr marL="2057400" indent="-228600" algn="l" defTabSz="914400" rtl="0" eaLnBrk="1" latinLnBrk="0" hangingPunct="1">
-              <a:lnSpc>
-                <a:spcPct val="90000"/>
-              </a:lnSpc>
-              <a:spcBef>
-                <a:spcPts val="500"/>
-              </a:spcBef>
-              <a:buFont typeface="Arial" panose="020B0604020202020204" pitchFamily="34" charset="0"/>
-              <a:buChar char="•"/>
-              <a:defRPr sz="1800" kern="1200">
-                <a:solidFill>
-                  <a:schemeClr val="tx1"/>
-                </a:solidFill>
-                <a:latin typeface="+mn-lt"/>
-                <a:ea typeface="+mn-ea"/>
-                <a:cs typeface="+mn-cs"/>
-              </a:defRPr>
-            </a:lvl5pPr>
-            <a:lvl6pPr marL="2514600" indent="-228600" algn="l" defTabSz="914400" rtl="0" eaLnBrk="1" latinLnBrk="0" hangingPunct="1">
-              <a:lnSpc>
-                <a:spcPct val="90000"/>
-              </a:lnSpc>
-              <a:spcBef>
-                <a:spcPts val="500"/>
-              </a:spcBef>
-              <a:buFont typeface="Arial" panose="020B0604020202020204" pitchFamily="34" charset="0"/>
-              <a:buChar char="•"/>
-              <a:defRPr sz="1800" kern="1200">
-                <a:solidFill>
-                  <a:schemeClr val="tx1"/>
-                </a:solidFill>
-                <a:latin typeface="+mn-lt"/>
-                <a:ea typeface="+mn-ea"/>
-                <a:cs typeface="+mn-cs"/>
-              </a:defRPr>
-            </a:lvl6pPr>
-            <a:lvl7pPr marL="2971800" indent="-228600" algn="l" defTabSz="914400" rtl="0" eaLnBrk="1" latinLnBrk="0" hangingPunct="1">
-              <a:lnSpc>
-                <a:spcPct val="90000"/>
-              </a:lnSpc>
-              <a:spcBef>
-                <a:spcPts val="500"/>
-              </a:spcBef>
-              <a:buFont typeface="Arial" panose="020B0604020202020204" pitchFamily="34" charset="0"/>
-              <a:buChar char="•"/>
-              <a:defRPr sz="1800" kern="1200">
-                <a:solidFill>
-                  <a:schemeClr val="tx1"/>
-                </a:solidFill>
-                <a:latin typeface="+mn-lt"/>
-                <a:ea typeface="+mn-ea"/>
-                <a:cs typeface="+mn-cs"/>
-              </a:defRPr>
-            </a:lvl7pPr>
-            <a:lvl8pPr marL="3429000" indent="-228600" algn="l" defTabSz="914400" rtl="0" eaLnBrk="1" latinLnBrk="0" hangingPunct="1">
-              <a:lnSpc>
-                <a:spcPct val="90000"/>
-              </a:lnSpc>
-              <a:spcBef>
-                <a:spcPts val="500"/>
-              </a:spcBef>
-              <a:buFont typeface="Arial" panose="020B0604020202020204" pitchFamily="34" charset="0"/>
-              <a:buChar char="•"/>
-              <a:defRPr sz="1800" kern="1200">
-                <a:solidFill>
-                  <a:schemeClr val="tx1"/>
-                </a:solidFill>
-                <a:latin typeface="+mn-lt"/>
-                <a:ea typeface="+mn-ea"/>
-                <a:cs typeface="+mn-cs"/>
-              </a:defRPr>
-            </a:lvl8pPr>
-            <a:lvl9pPr marL="3886200" indent="-228600" algn="l" defTabSz="914400" rtl="0" eaLnBrk="1" latinLnBrk="0" hangingPunct="1">
-              <a:lnSpc>
-                <a:spcPct val="90000"/>
-              </a:lnSpc>
-              <a:spcBef>
-                <a:spcPts val="500"/>
-              </a:spcBef>
-              <a:buFont typeface="Arial" panose="020B0604020202020204" pitchFamily="34" charset="0"/>
-              <a:buChar char="•"/>
-              <a:defRPr sz="1800" kern="1200">
-                <a:solidFill>
-                  <a:schemeClr val="tx1"/>
-                </a:solidFill>
-                <a:latin typeface="+mn-lt"/>
-                <a:ea typeface="+mn-ea"/>
-                <a:cs typeface="+mn-cs"/>
-              </a:defRPr>
-            </a:lvl9pPr>
-          </a:lstStyle>
-          <a:p>
-            <a:r>
-              <a:rPr lang="ru-RU" sz="2400" dirty="0"/>
-              <a:t>Работает для шума БГШ</a:t>
-            </a:r>
-          </a:p>
-          <a:p>
-            <a:r>
-              <a:rPr lang="ru-RU" sz="2400" dirty="0"/>
-              <a:t>Тренд только детерминированный</a:t>
-            </a:r>
-            <a:endParaRPr lang="en-US" sz="2400" dirty="0"/>
-          </a:p>
-          <a:p>
-            <a:r>
-              <a:rPr lang="ru-RU" sz="2400" dirty="0"/>
-              <a:t>Модель только бизнес процессы</a:t>
-            </a:r>
-          </a:p>
-          <a:p>
-            <a:endParaRPr lang="ru-RU" sz="2400" dirty="0"/>
-          </a:p>
-        </p:txBody>
-      </p:sp>
-    </p:spTree>
-    <p:extLst>
-      <p:ext uri="{BB962C8B-B14F-4D97-AF65-F5344CB8AC3E}">
-        <p14:creationId xmlns:p14="http://schemas.microsoft.com/office/powerpoint/2010/main" val="3182347398"/>
+        <p14:creationId xmlns:p14="http://schemas.microsoft.com/office/powerpoint/2010/main" val="3868368480"/>
       </p:ext>
     </p:extLst>
   </p:cSld>
@@ -19607,7 +16168,7 @@
 </file>
 
 <file path=ppt/slides/slide3.xml><?xml version="1.0" encoding="utf-8"?>
-<p:sld xmlns:a="http://schemas.openxmlformats.org/drawingml/2006/main" xmlns:r="http://schemas.openxmlformats.org/officeDocument/2006/relationships" xmlns:p="http://schemas.openxmlformats.org/presentationml/2006/main">
+<p:sld xmlns:a="http://schemas.openxmlformats.org/drawingml/2006/main" xmlns:r="http://schemas.openxmlformats.org/officeDocument/2006/relationships" xmlns:p="http://schemas.openxmlformats.org/presentationml/2006/main" show="0">
   <p:cSld>
     <p:spTree>
       <p:nvGrpSpPr>
@@ -19661,547 +16222,286 @@
             </a:r>
             <a:r>
               <a:rPr lang="ru-RU" b="1" dirty="0"/>
-              <a:t>временных рядов</a:t>
+              <a:t>временных </a:t>
+            </a:r>
+            <a:r>
+              <a:rPr lang="ru-RU" b="1" dirty="0" smtClean="0"/>
+              <a:t>рядов </a:t>
+            </a:r>
+            <a:r>
+              <a:rPr lang="en-US" b="1" dirty="0" smtClean="0"/>
+              <a:t>Mixing</a:t>
             </a:r>
             <a:endParaRPr lang="en-US" b="1" dirty="0"/>
           </a:p>
         </p:txBody>
       </p:sp>
-      <mc:AlternateContent xmlns:mc="http://schemas.openxmlformats.org/markup-compatibility/2006" xmlns:a14="http://schemas.microsoft.com/office/drawing/2010/main">
-        <mc:Choice Requires="a14">
-          <p:sp>
-            <p:nvSpPr>
-              <p:cNvPr id="3" name="Объект 2">
-                <a:extLst>
-                  <a:ext uri="{FF2B5EF4-FFF2-40B4-BE49-F238E27FC236}">
-                    <a16:creationId xmlns:a16="http://schemas.microsoft.com/office/drawing/2014/main" id="{4CDB8E57-5CA8-497C-990E-C304F4FBE710}"/>
-                  </a:ext>
-                </a:extLst>
-              </p:cNvPr>
-              <p:cNvSpPr>
-                <a:spLocks noGrp="1"/>
-              </p:cNvSpPr>
-              <p:nvPr>
-                <p:ph idx="1"/>
-              </p:nvPr>
-            </p:nvSpPr>
-            <p:spPr>
-              <a:xfrm>
-                <a:off x="209550" y="1114427"/>
-                <a:ext cx="11525249" cy="5545789"/>
-              </a:xfrm>
-            </p:spPr>
-            <p:txBody>
-              <a:bodyPr>
-                <a:normAutofit/>
-              </a:bodyPr>
-              <a:lstStyle/>
-              <a:p>
-                <a:pPr marL="0" indent="0" eaLnBrk="0" fontAlgn="base" hangingPunct="0">
-                  <a:lnSpc>
-                    <a:spcPct val="100000"/>
-                  </a:lnSpc>
-                  <a:spcBef>
-                    <a:spcPct val="0"/>
-                  </a:spcBef>
-                  <a:spcAft>
-                    <a:spcPct val="0"/>
-                  </a:spcAft>
-                  <a:buNone/>
-                </a:pPr>
-                <a:endParaRPr lang="ru-RU" altLang="en-US" sz="2200" i="1" dirty="0" smtClean="0"/>
-              </a:p>
-              <a:p>
-                <a:pPr marL="0" indent="0" eaLnBrk="0" fontAlgn="base" hangingPunct="0">
-                  <a:lnSpc>
-                    <a:spcPct val="100000"/>
-                  </a:lnSpc>
-                  <a:spcBef>
-                    <a:spcPct val="0"/>
-                  </a:spcBef>
-                  <a:spcAft>
-                    <a:spcPct val="0"/>
-                  </a:spcAft>
-                  <a:buNone/>
-                </a:pPr>
-                <a:r>
-                  <a:rPr lang="ru-RU" altLang="en-US" sz="2200" i="1" dirty="0"/>
-                  <a:t>Модель </a:t>
-                </a:r>
-                <a:r>
-                  <a:rPr lang="ru-RU" altLang="en-US" sz="2200" i="1" dirty="0" smtClean="0"/>
-                  <a:t>для которых явно можно выделить тренд, но также и другие составляющие</a:t>
-                </a:r>
-                <a:endParaRPr lang="ru-RU" altLang="en-US" sz="2200" i="1" dirty="0"/>
-              </a:p>
-              <a:p>
-                <a:pPr marL="0" indent="0" algn="ctr" eaLnBrk="0" fontAlgn="base" hangingPunct="0">
-                  <a:lnSpc>
-                    <a:spcPct val="100000"/>
-                  </a:lnSpc>
-                  <a:spcBef>
-                    <a:spcPct val="0"/>
-                  </a:spcBef>
-                  <a:spcAft>
-                    <a:spcPct val="0"/>
-                  </a:spcAft>
-                  <a:buNone/>
-                </a:pPr>
-                <a14:m>
-                  <m:oMathPara xmlns:m="http://schemas.openxmlformats.org/officeDocument/2006/math">
-                    <m:oMathParaPr>
-                      <m:jc m:val="centerGroup"/>
-                    </m:oMathParaPr>
-                    <m:oMath xmlns:m="http://schemas.openxmlformats.org/officeDocument/2006/math">
-                      <m:sSub>
-                        <m:sSubPr>
-                          <m:ctrlPr>
-                            <a:rPr lang="ru-RU" altLang="en-US" sz="2400" b="0" i="1" dirty="0" smtClean="0">
-                              <a:latin typeface="Cambria Math" panose="02040503050406030204" pitchFamily="18" charset="0"/>
-                            </a:rPr>
-                          </m:ctrlPr>
-                        </m:sSubPr>
-                        <m:e>
-                          <m:r>
-                            <m:rPr>
-                              <m:sty m:val="p"/>
-                            </m:rPr>
-                            <a:rPr lang="en-US" altLang="en-US" sz="2400" i="1" dirty="0">
-                              <a:latin typeface="Cambria Math" panose="02040503050406030204" pitchFamily="18" charset="0"/>
-                            </a:rPr>
-                            <m:t>y</m:t>
-                          </m:r>
-                        </m:e>
-                        <m:sub>
-                          <m:r>
-                            <a:rPr lang="en-US" altLang="en-US" sz="2400" b="0" i="1" dirty="0" smtClean="0">
-                              <a:latin typeface="Cambria Math" panose="02040503050406030204" pitchFamily="18" charset="0"/>
-                            </a:rPr>
-                            <m:t>𝑇𝑆</m:t>
-                          </m:r>
-                        </m:sub>
-                      </m:sSub>
-                      <m:r>
-                        <a:rPr lang="en-US" altLang="en-US" sz="2400" i="1" dirty="0">
-                          <a:latin typeface="Cambria Math" panose="02040503050406030204" pitchFamily="18" charset="0"/>
-                        </a:rPr>
-                        <m:t>(</m:t>
-                      </m:r>
-                      <m:r>
-                        <a:rPr lang="en-US" altLang="en-US" sz="2400" i="1" dirty="0">
-                          <a:latin typeface="Cambria Math" panose="02040503050406030204" pitchFamily="18" charset="0"/>
-                        </a:rPr>
-                        <m:t>𝑡</m:t>
-                      </m:r>
-                      <m:r>
-                        <a:rPr lang="en-US" altLang="en-US" sz="2400" i="1" dirty="0">
-                          <a:latin typeface="Cambria Math" panose="02040503050406030204" pitchFamily="18" charset="0"/>
-                        </a:rPr>
-                        <m:t>) = </m:t>
-                      </m:r>
-                      <m:r>
-                        <a:rPr lang="en-US" altLang="en-US" sz="2400" i="1" dirty="0">
-                          <a:latin typeface="Cambria Math" panose="02040503050406030204" pitchFamily="18" charset="0"/>
-                        </a:rPr>
-                        <m:t>𝑡𝑟𝑒𝑛𝑑</m:t>
-                      </m:r>
-                      <m:r>
-                        <a:rPr lang="en-US" altLang="en-US" sz="2400" i="1" dirty="0">
-                          <a:latin typeface="Cambria Math" panose="02040503050406030204" pitchFamily="18" charset="0"/>
-                        </a:rPr>
-                        <m:t>(</m:t>
-                      </m:r>
-                      <m:r>
-                        <a:rPr lang="en-US" altLang="en-US" sz="2400" i="1" dirty="0">
-                          <a:latin typeface="Cambria Math" panose="02040503050406030204" pitchFamily="18" charset="0"/>
-                        </a:rPr>
-                        <m:t>𝑡</m:t>
-                      </m:r>
-                      <m:r>
-                        <a:rPr lang="en-US" altLang="en-US" sz="2400" i="1" dirty="0">
-                          <a:latin typeface="Cambria Math" panose="02040503050406030204" pitchFamily="18" charset="0"/>
-                        </a:rPr>
-                        <m:t>)+</m:t>
-                      </m:r>
-                      <m:nary>
-                        <m:naryPr>
-                          <m:chr m:val="∑"/>
-                          <m:ctrlPr>
-                            <a:rPr lang="en-US" altLang="en-US" sz="2400" i="1" dirty="0">
-                              <a:latin typeface="Cambria Math" panose="02040503050406030204" pitchFamily="18" charset="0"/>
-                            </a:rPr>
-                          </m:ctrlPr>
-                        </m:naryPr>
-                        <m:sub>
-                          <m:r>
-                            <a:rPr lang="en-US" altLang="en-US" sz="2400" i="1" dirty="0" err="1">
-                              <a:latin typeface="Cambria Math" panose="02040503050406030204" pitchFamily="18" charset="0"/>
-                            </a:rPr>
-                            <m:t>𝑖</m:t>
-                          </m:r>
-                          <m:r>
-                            <a:rPr lang="en-US" altLang="en-US" sz="2400" i="1" dirty="0">
-                              <a:latin typeface="Cambria Math" panose="02040503050406030204" pitchFamily="18" charset="0"/>
-                            </a:rPr>
-                            <m:t>=0</m:t>
-                          </m:r>
-                        </m:sub>
-                        <m:sup>
-                          <m:r>
-                            <a:rPr lang="en-US" altLang="en-US" sz="2400" i="1" dirty="0">
-                              <a:latin typeface="Cambria Math" panose="02040503050406030204" pitchFamily="18" charset="0"/>
-                            </a:rPr>
-                            <m:t>𝑀</m:t>
-                          </m:r>
-                        </m:sup>
-                        <m:e>
-                          <m:r>
-                            <a:rPr lang="en-US" altLang="en-US" sz="2400" i="1" dirty="0">
-                              <a:latin typeface="Cambria Math" panose="02040503050406030204" pitchFamily="18" charset="0"/>
-                            </a:rPr>
-                            <m:t>𝑠𝑒𝑎𝑠𝑜𝑛𝑎𝑙</m:t>
-                          </m:r>
-                          <m:r>
-                            <a:rPr lang="en-US" altLang="en-US" sz="2400" i="1" dirty="0">
-                              <a:latin typeface="Cambria Math" panose="02040503050406030204" pitchFamily="18" charset="0"/>
-                            </a:rPr>
-                            <m:t>(</m:t>
-                          </m:r>
-                          <m:r>
-                            <a:rPr lang="en-US" altLang="en-US" sz="2400" i="1" dirty="0">
-                              <a:latin typeface="Cambria Math" panose="02040503050406030204" pitchFamily="18" charset="0"/>
-                            </a:rPr>
-                            <m:t>𝑡</m:t>
-                          </m:r>
-                          <m:r>
-                            <a:rPr lang="en-US" altLang="en-US" sz="2400" i="1" dirty="0">
-                              <a:latin typeface="Cambria Math" panose="02040503050406030204" pitchFamily="18" charset="0"/>
-                            </a:rPr>
-                            <m:t>)</m:t>
-                          </m:r>
-                        </m:e>
-                      </m:nary>
-                      <m:r>
-                        <a:rPr lang="en-US" altLang="en-US" sz="2400" i="1" dirty="0">
-                          <a:latin typeface="Cambria Math" panose="02040503050406030204" pitchFamily="18" charset="0"/>
-                        </a:rPr>
-                        <m:t> +</m:t>
-                      </m:r>
-                      <m:r>
-                        <a:rPr lang="en-US" altLang="en-US" sz="2400" b="0" i="1" dirty="0" smtClean="0">
-                          <a:latin typeface="Cambria Math" panose="02040503050406030204" pitchFamily="18" charset="0"/>
-                        </a:rPr>
-                        <m:t>𝑟𝑒𝑠𝑖𝑑𝑢𝑎𝑙</m:t>
-                      </m:r>
-                      <m:r>
-                        <a:rPr lang="en-US" altLang="en-US" sz="2400" i="1" dirty="0">
-                          <a:latin typeface="Cambria Math" panose="02040503050406030204" pitchFamily="18" charset="0"/>
-                        </a:rPr>
-                        <m:t>(</m:t>
-                      </m:r>
-                      <m:r>
-                        <a:rPr lang="en-US" altLang="en-US" sz="2400" i="1" dirty="0">
-                          <a:latin typeface="Cambria Math" panose="02040503050406030204" pitchFamily="18" charset="0"/>
-                        </a:rPr>
-                        <m:t>𝑡</m:t>
-                      </m:r>
-                      <m:r>
-                        <a:rPr lang="en-US" altLang="en-US" sz="2400" i="1" dirty="0">
-                          <a:latin typeface="Cambria Math" panose="02040503050406030204" pitchFamily="18" charset="0"/>
-                        </a:rPr>
-                        <m:t>)</m:t>
-                      </m:r>
-                    </m:oMath>
-                  </m:oMathPara>
-                </a14:m>
-                <a:endParaRPr lang="ru-RU" altLang="en-US" sz="2000" dirty="0">
-                  <a:latin typeface="Open Sans"/>
-                </a:endParaRPr>
-              </a:p>
-              <a:p>
-                <a:pPr marL="0" indent="0" eaLnBrk="0" fontAlgn="base" hangingPunct="0">
-                  <a:lnSpc>
-                    <a:spcPct val="100000"/>
-                  </a:lnSpc>
-                  <a:spcBef>
-                    <a:spcPct val="0"/>
-                  </a:spcBef>
-                  <a:spcAft>
-                    <a:spcPct val="0"/>
-                  </a:spcAft>
-                  <a:buNone/>
-                </a:pPr>
-                <a:r>
-                  <a:rPr lang="ru-RU" altLang="en-US" sz="2000" dirty="0">
-                    <a:latin typeface="Open Sans"/>
-                  </a:rPr>
-                  <a:t>Или </a:t>
-                </a:r>
-                <a:r>
-                  <a:rPr lang="ru-RU" altLang="en-US" sz="2000" dirty="0" smtClean="0">
-                    <a:latin typeface="Open Sans"/>
-                  </a:rPr>
-                  <a:t>мультипликативная модель</a:t>
-                </a:r>
-                <a:endParaRPr lang="ru-RU" altLang="en-US" sz="2000" dirty="0">
-                  <a:latin typeface="Open Sans"/>
-                </a:endParaRPr>
-              </a:p>
-              <a:p>
-                <a:pPr marL="0" indent="0" algn="ctr" eaLnBrk="0" fontAlgn="base" hangingPunct="0">
-                  <a:lnSpc>
-                    <a:spcPct val="100000"/>
-                  </a:lnSpc>
-                  <a:spcBef>
-                    <a:spcPct val="0"/>
-                  </a:spcBef>
-                  <a:spcAft>
-                    <a:spcPct val="0"/>
-                  </a:spcAft>
-                  <a:buNone/>
-                </a:pPr>
-                <a14:m>
-                  <m:oMath xmlns:m="http://schemas.openxmlformats.org/officeDocument/2006/math">
-                    <m:r>
-                      <a:rPr lang="en-US" altLang="en-US" sz="2000" i="1" dirty="0">
-                        <a:latin typeface="Cambria Math" panose="02040503050406030204" pitchFamily="18" charset="0"/>
-                      </a:rPr>
-                      <m:t>𝑦</m:t>
-                    </m:r>
-                    <m:d>
-                      <m:dPr>
-                        <m:ctrlPr>
-                          <a:rPr lang="en-US" altLang="en-US" sz="2000" i="1" dirty="0">
-                            <a:latin typeface="Cambria Math" panose="02040503050406030204" pitchFamily="18" charset="0"/>
-                          </a:rPr>
-                        </m:ctrlPr>
-                      </m:dPr>
-                      <m:e>
-                        <m:r>
-                          <a:rPr lang="en-US" altLang="en-US" sz="2000" i="1" dirty="0">
-                            <a:latin typeface="Cambria Math" panose="02040503050406030204" pitchFamily="18" charset="0"/>
-                          </a:rPr>
-                          <m:t>𝑡</m:t>
-                        </m:r>
-                      </m:e>
-                    </m:d>
-                    <m:r>
-                      <a:rPr lang="en-US" altLang="en-US" sz="2000" i="1" dirty="0">
-                        <a:latin typeface="Cambria Math" panose="02040503050406030204" pitchFamily="18" charset="0"/>
-                      </a:rPr>
-                      <m:t>= </m:t>
-                    </m:r>
-                    <m:r>
-                      <a:rPr lang="en-US" altLang="en-US" sz="2000" i="1" dirty="0">
-                        <a:latin typeface="Cambria Math" panose="02040503050406030204" pitchFamily="18" charset="0"/>
-                      </a:rPr>
-                      <m:t>𝑡𝑟𝑒𝑛𝑑</m:t>
-                    </m:r>
-                    <m:d>
-                      <m:dPr>
-                        <m:ctrlPr>
-                          <a:rPr lang="en-US" altLang="en-US" sz="2000" i="1" dirty="0">
-                            <a:latin typeface="Cambria Math" panose="02040503050406030204" pitchFamily="18" charset="0"/>
-                          </a:rPr>
-                        </m:ctrlPr>
-                      </m:dPr>
-                      <m:e>
-                        <m:r>
-                          <a:rPr lang="en-US" altLang="en-US" sz="2000" i="1" dirty="0">
-                            <a:latin typeface="Cambria Math" panose="02040503050406030204" pitchFamily="18" charset="0"/>
-                          </a:rPr>
-                          <m:t>𝑡</m:t>
-                        </m:r>
-                      </m:e>
-                    </m:d>
-                    <m:r>
-                      <a:rPr lang="en-US" altLang="en-US" sz="2000" i="1" dirty="0">
-                        <a:latin typeface="Cambria Math" panose="02040503050406030204" pitchFamily="18" charset="0"/>
-                      </a:rPr>
-                      <m:t>⋅</m:t>
-                    </m:r>
-                    <m:d>
-                      <m:dPr>
-                        <m:ctrlPr>
-                          <a:rPr lang="ru-RU" altLang="en-US" sz="2000" b="0" i="1" dirty="0" smtClean="0">
-                            <a:latin typeface="Cambria Math" panose="02040503050406030204" pitchFamily="18" charset="0"/>
-                          </a:rPr>
-                        </m:ctrlPr>
-                      </m:dPr>
-                      <m:e>
-                        <m:nary>
-                          <m:naryPr>
-                            <m:chr m:val="∑"/>
-                            <m:ctrlPr>
-                              <a:rPr lang="en-US" altLang="en-US" sz="2000" i="1" dirty="0">
-                                <a:latin typeface="Cambria Math" panose="02040503050406030204" pitchFamily="18" charset="0"/>
-                              </a:rPr>
-                            </m:ctrlPr>
-                          </m:naryPr>
-                          <m:sub>
-                            <m:r>
-                              <a:rPr lang="en-US" altLang="en-US" sz="2000" i="1" dirty="0" err="1">
-                                <a:latin typeface="Cambria Math" panose="02040503050406030204" pitchFamily="18" charset="0"/>
-                              </a:rPr>
-                              <m:t>𝑖</m:t>
-                            </m:r>
-                            <m:r>
-                              <a:rPr lang="en-US" altLang="en-US" sz="2000" i="1" dirty="0">
-                                <a:latin typeface="Cambria Math" panose="02040503050406030204" pitchFamily="18" charset="0"/>
-                              </a:rPr>
-                              <m:t>=0</m:t>
-                            </m:r>
-                          </m:sub>
-                          <m:sup>
-                            <m:r>
-                              <a:rPr lang="en-US" altLang="en-US" sz="2000" i="1" dirty="0">
-                                <a:latin typeface="Cambria Math" panose="02040503050406030204" pitchFamily="18" charset="0"/>
-                              </a:rPr>
-                              <m:t>𝑀</m:t>
-                            </m:r>
-                          </m:sup>
-                          <m:e>
-                            <m:r>
-                              <a:rPr lang="en-US" altLang="en-US" sz="2000" i="1" dirty="0">
-                                <a:latin typeface="Cambria Math" panose="02040503050406030204" pitchFamily="18" charset="0"/>
-                              </a:rPr>
-                              <m:t>𝑠𝑒𝑎𝑠𝑜𝑛𝑎𝑙</m:t>
-                            </m:r>
-                            <m:d>
-                              <m:dPr>
-                                <m:ctrlPr>
-                                  <a:rPr lang="en-US" altLang="en-US" sz="2000" i="1" dirty="0">
-                                    <a:latin typeface="Cambria Math" panose="02040503050406030204" pitchFamily="18" charset="0"/>
-                                  </a:rPr>
-                                </m:ctrlPr>
-                              </m:dPr>
-                              <m:e>
-                                <m:r>
-                                  <a:rPr lang="en-US" altLang="en-US" sz="2000" i="1" dirty="0">
-                                    <a:latin typeface="Cambria Math" panose="02040503050406030204" pitchFamily="18" charset="0"/>
-                                  </a:rPr>
-                                  <m:t>𝑡</m:t>
-                                </m:r>
-                              </m:e>
-                            </m:d>
-                          </m:e>
-                        </m:nary>
-                      </m:e>
-                    </m:d>
-                    <m:r>
-                      <a:rPr lang="en-US" altLang="en-US" sz="2000" b="0" i="1" dirty="0" smtClean="0">
-                        <a:latin typeface="Cambria Math" panose="02040503050406030204" pitchFamily="18" charset="0"/>
-                      </a:rPr>
-                      <m:t>⋅</m:t>
-                    </m:r>
-                    <m:r>
-                      <a:rPr lang="en-US" altLang="en-US" sz="2000" b="0" i="1" dirty="0" smtClean="0">
-                        <a:latin typeface="Cambria Math" panose="02040503050406030204" pitchFamily="18" charset="0"/>
-                      </a:rPr>
-                      <m:t>𝑟𝑒𝑠𝑖𝑑𝑢𝑎𝑙</m:t>
-                    </m:r>
-                    <m:r>
-                      <a:rPr lang="en-US" altLang="en-US" sz="2000" i="1" dirty="0">
-                        <a:latin typeface="Cambria Math" panose="02040503050406030204" pitchFamily="18" charset="0"/>
-                      </a:rPr>
-                      <m:t>(</m:t>
-                    </m:r>
-                    <m:r>
-                      <a:rPr lang="en-US" altLang="en-US" sz="2000" i="1" dirty="0">
-                        <a:latin typeface="Cambria Math" panose="02040503050406030204" pitchFamily="18" charset="0"/>
-                      </a:rPr>
-                      <m:t>𝑡</m:t>
-                    </m:r>
-                  </m:oMath>
-                </a14:m>
-                <a:r>
-                  <a:rPr lang="en-US" altLang="en-US" sz="2000" i="1" dirty="0"/>
-                  <a:t>). </a:t>
-                </a:r>
-                <a:endParaRPr lang="en-US" altLang="en-US" sz="2000" i="1" dirty="0" smtClean="0"/>
-              </a:p>
-              <a:p>
-                <a:pPr marL="0" indent="0" algn="ctr" eaLnBrk="0" fontAlgn="base" hangingPunct="0">
-                  <a:lnSpc>
-                    <a:spcPct val="100000"/>
-                  </a:lnSpc>
-                  <a:spcBef>
-                    <a:spcPct val="0"/>
-                  </a:spcBef>
-                  <a:spcAft>
-                    <a:spcPct val="0"/>
-                  </a:spcAft>
-                  <a:buNone/>
-                </a:pPr>
-                <a:r>
-                  <a:rPr lang="ru-RU" altLang="en-US" sz="2000" i="1" dirty="0" smtClean="0"/>
-                  <a:t>Могут быть и более сложные модели</a:t>
-                </a:r>
-                <a:endParaRPr lang="en-US" altLang="en-US" sz="2000" i="1" dirty="0"/>
-              </a:p>
-              <a:p>
-                <a:pPr eaLnBrk="0" fontAlgn="base" hangingPunct="0">
-                  <a:lnSpc>
-                    <a:spcPct val="100000"/>
-                  </a:lnSpc>
-                  <a:spcBef>
-                    <a:spcPct val="0"/>
-                  </a:spcBef>
-                  <a:spcAft>
-                    <a:spcPct val="0"/>
-                  </a:spcAft>
-                </a:pPr>
-                <a:endParaRPr lang="en-US" altLang="en-US" sz="2000" dirty="0">
-                  <a:latin typeface="Open Sans"/>
-                </a:endParaRPr>
-              </a:p>
-            </p:txBody>
-          </p:sp>
-        </mc:Choice>
-        <mc:Fallback xmlns="">
-          <p:sp>
-            <p:nvSpPr>
-              <p:cNvPr id="3" name="Объект 2">
-                <a:extLst>
-                  <a:ext uri="{FF2B5EF4-FFF2-40B4-BE49-F238E27FC236}">
-                    <a16:creationId xmlns:a16="http://schemas.microsoft.com/office/drawing/2014/main" id="{4CDB8E57-5CA8-497C-990E-C304F4FBE710}"/>
-                  </a:ext>
-                </a:extLst>
-              </p:cNvPr>
-              <p:cNvSpPr>
-                <a:spLocks noGrp="1" noRot="1" noChangeAspect="1" noMove="1" noResize="1" noEditPoints="1" noAdjustHandles="1" noChangeArrowheads="1" noChangeShapeType="1" noTextEdit="1"/>
-              </p:cNvSpPr>
-              <p:nvPr>
-                <p:ph idx="1"/>
-              </p:nvPr>
-            </p:nvSpPr>
-            <p:spPr>
-              <a:xfrm>
-                <a:off x="209550" y="1114427"/>
-                <a:ext cx="11525249" cy="5545789"/>
-              </a:xfrm>
-              <a:blipFill>
-                <a:blip r:embed="rId2"/>
-                <a:stretch>
-                  <a:fillRect l="-687"/>
-                </a:stretch>
-              </a:blipFill>
-            </p:spPr>
-            <p:txBody>
-              <a:bodyPr/>
-              <a:lstStyle/>
-              <a:p>
-                <a:r>
-                  <a:rPr lang="ru-RU">
-                    <a:noFill/>
-                  </a:rPr>
-                  <a:t> </a:t>
-                </a:r>
-              </a:p>
-            </p:txBody>
-          </p:sp>
-        </mc:Fallback>
-      </mc:AlternateContent>
+      <p:sp>
+        <p:nvSpPr>
+          <p:cNvPr id="3" name="Объект 2">
+            <a:extLst>
+              <a:ext uri="{FF2B5EF4-FFF2-40B4-BE49-F238E27FC236}">
+                <a16:creationId xmlns:a16="http://schemas.microsoft.com/office/drawing/2014/main" id="{4CDB8E57-5CA8-497C-990E-C304F4FBE710}"/>
+              </a:ext>
+            </a:extLst>
+          </p:cNvPr>
+          <p:cNvSpPr>
+            <a:spLocks noGrp="1"/>
+          </p:cNvSpPr>
+          <p:nvPr>
+            <p:ph idx="1"/>
+          </p:nvPr>
+        </p:nvSpPr>
+        <p:spPr>
+          <a:xfrm>
+            <a:off x="209550" y="1114427"/>
+            <a:ext cx="11525249" cy="5545789"/>
+          </a:xfrm>
+        </p:spPr>
+        <p:txBody>
+          <a:bodyPr>
+            <a:normAutofit/>
+          </a:bodyPr>
+          <a:lstStyle/>
+          <a:p>
+            <a:pPr marL="0" indent="0" eaLnBrk="0" fontAlgn="base" hangingPunct="0">
+              <a:lnSpc>
+                <a:spcPct val="100000"/>
+              </a:lnSpc>
+              <a:spcBef>
+                <a:spcPct val="0"/>
+              </a:spcBef>
+              <a:spcAft>
+                <a:spcPct val="0"/>
+              </a:spcAft>
+              <a:buNone/>
+            </a:pPr>
+            <a:r>
+              <a:rPr lang="ru-RU" sz="2400" dirty="0" smtClean="0"/>
+              <a:t>ВР - </a:t>
+            </a:r>
+            <a:r>
+              <a:rPr lang="ru-RU" sz="2400" dirty="0"/>
+              <a:t>наблюдения не независимы (не </a:t>
+            </a:r>
+            <a:r>
+              <a:rPr lang="ru-RU" sz="2400" dirty="0" err="1"/>
+              <a:t>i.i.d</a:t>
+            </a:r>
+            <a:r>
+              <a:rPr lang="ru-RU" sz="2400" dirty="0"/>
+              <a:t>.). </a:t>
+            </a:r>
+            <a:endParaRPr lang="ru-RU" sz="2400" dirty="0" smtClean="0"/>
+          </a:p>
+          <a:p>
+            <a:pPr marL="0" indent="0" eaLnBrk="0" fontAlgn="base" hangingPunct="0">
+              <a:lnSpc>
+                <a:spcPct val="100000"/>
+              </a:lnSpc>
+              <a:spcBef>
+                <a:spcPct val="0"/>
+              </a:spcBef>
+              <a:spcAft>
+                <a:spcPct val="0"/>
+              </a:spcAft>
+              <a:buNone/>
+            </a:pPr>
+            <a:r>
+              <a:rPr lang="ru-RU" sz="2400" dirty="0"/>
+              <a:t>	</a:t>
+            </a:r>
+            <a:r>
+              <a:rPr lang="ru-RU" sz="2400" dirty="0" smtClean="0"/>
+              <a:t>Между </a:t>
+            </a:r>
+            <a:r>
+              <a:rPr lang="ru-RU" sz="2400" dirty="0"/>
+              <a:t>близкими по времени точками существует сильная зависимость. </a:t>
+            </a:r>
+            <a:endParaRPr lang="ru-RU" sz="2400" dirty="0" smtClean="0"/>
+          </a:p>
+          <a:p>
+            <a:pPr marL="0" indent="0" eaLnBrk="0" fontAlgn="base" hangingPunct="0">
+              <a:lnSpc>
+                <a:spcPct val="100000"/>
+              </a:lnSpc>
+              <a:spcBef>
+                <a:spcPct val="0"/>
+              </a:spcBef>
+              <a:spcAft>
+                <a:spcPct val="0"/>
+              </a:spcAft>
+              <a:buNone/>
+            </a:pPr>
+            <a:r>
+              <a:rPr lang="ru-RU" sz="2400" dirty="0" smtClean="0"/>
+              <a:t>Классическая </a:t>
+            </a:r>
+            <a:r>
+              <a:rPr lang="ru-RU" sz="2400" dirty="0"/>
+              <a:t>статистическая теория обучения </a:t>
+            </a:r>
+            <a:r>
+              <a:rPr lang="ru-RU" sz="2400" dirty="0" smtClean="0"/>
+              <a:t>для </a:t>
+            </a:r>
+            <a:r>
+              <a:rPr lang="en-US" sz="2400" dirty="0" smtClean="0"/>
+              <a:t>TS </a:t>
+            </a:r>
+            <a:r>
+              <a:rPr lang="ru-RU" sz="2400" dirty="0" smtClean="0"/>
+              <a:t>моделей часто </a:t>
+            </a:r>
+            <a:r>
+              <a:rPr lang="ru-RU" sz="2400" dirty="0"/>
+              <a:t>требует независимости, поэтому для зависимых данных вводят условия перемешивания (</a:t>
+            </a:r>
+            <a:r>
+              <a:rPr lang="ru-RU" sz="2400" dirty="0" err="1"/>
+              <a:t>mixing</a:t>
+            </a:r>
+            <a:r>
+              <a:rPr lang="ru-RU" sz="2400" dirty="0"/>
+              <a:t> </a:t>
+            </a:r>
+            <a:r>
+              <a:rPr lang="ru-RU" sz="2400" dirty="0" err="1"/>
+              <a:t>conditions</a:t>
+            </a:r>
+            <a:r>
+              <a:rPr lang="ru-RU" sz="2400" dirty="0"/>
+              <a:t>). </a:t>
+            </a:r>
+            <a:endParaRPr lang="ru-RU" sz="2400" dirty="0" smtClean="0"/>
+          </a:p>
+          <a:p>
+            <a:pPr marL="0" indent="0" eaLnBrk="0" fontAlgn="base" hangingPunct="0">
+              <a:lnSpc>
+                <a:spcPct val="100000"/>
+              </a:lnSpc>
+              <a:spcBef>
+                <a:spcPct val="0"/>
+              </a:spcBef>
+              <a:spcAft>
+                <a:spcPct val="0"/>
+              </a:spcAft>
+              <a:buNone/>
+            </a:pPr>
+            <a:r>
+              <a:rPr lang="ru-RU" sz="2400" dirty="0" smtClean="0"/>
+              <a:t>Они </a:t>
+            </a:r>
+            <a:r>
+              <a:rPr lang="ru-RU" sz="2400" dirty="0"/>
+              <a:t>измеряют, насколько быстро зависимость между прошлым и будущим ослабевает со временем.</a:t>
+            </a:r>
+          </a:p>
+          <a:p>
+            <a:pPr marL="0" indent="0" eaLnBrk="0" fontAlgn="base" hangingPunct="0">
+              <a:lnSpc>
+                <a:spcPct val="100000"/>
+              </a:lnSpc>
+              <a:spcBef>
+                <a:spcPct val="0"/>
+              </a:spcBef>
+              <a:spcAft>
+                <a:spcPct val="0"/>
+              </a:spcAft>
+              <a:buNone/>
+            </a:pPr>
+            <a:r>
+              <a:rPr lang="el-GR" sz="2400" b="1" dirty="0"/>
+              <a:t>α-</a:t>
+            </a:r>
+            <a:r>
+              <a:rPr lang="en-US" sz="2400" b="1" dirty="0" smtClean="0"/>
+              <a:t>mixing</a:t>
+            </a:r>
+            <a:r>
+              <a:rPr lang="ru-RU" sz="2400" b="1" dirty="0" smtClean="0"/>
+              <a:t> – быстрое затухание по экспоненциальном или полиномиальному закону (большинство наших процессов, полином на очень длинном горизонте)</a:t>
+            </a:r>
+            <a:r>
+              <a:rPr lang="ru-RU" sz="2400" dirty="0" smtClean="0"/>
+              <a:t/>
+            </a:r>
+            <a:br>
+              <a:rPr lang="ru-RU" sz="2400" dirty="0" smtClean="0"/>
+            </a:br>
+            <a:r>
+              <a:rPr lang="el-GR" sz="2400" dirty="0"/>
+              <a:t>β-</a:t>
+            </a:r>
+            <a:r>
+              <a:rPr lang="en-US" sz="2400" dirty="0" smtClean="0"/>
+              <a:t>mixing</a:t>
+            </a:r>
+            <a:r>
+              <a:rPr lang="ru-RU" sz="2400" dirty="0" smtClean="0"/>
+              <a:t> – текстовые данные (Марковские цепи, линейное затухание)</a:t>
+            </a:r>
+          </a:p>
+          <a:p>
+            <a:pPr marL="0" indent="0" eaLnBrk="0" fontAlgn="base" hangingPunct="0">
+              <a:lnSpc>
+                <a:spcPct val="100000"/>
+              </a:lnSpc>
+              <a:spcBef>
+                <a:spcPct val="0"/>
+              </a:spcBef>
+              <a:spcAft>
+                <a:spcPct val="0"/>
+              </a:spcAft>
+              <a:buNone/>
+            </a:pPr>
+            <a:r>
+              <a:rPr lang="el-GR" sz="2400" dirty="0"/>
+              <a:t>φ-</a:t>
+            </a:r>
+            <a:r>
+              <a:rPr lang="en-US" sz="2400" dirty="0" smtClean="0"/>
+              <a:t>mixing</a:t>
+            </a:r>
+            <a:r>
+              <a:rPr lang="ru-RU" sz="2400" dirty="0" smtClean="0"/>
+              <a:t> – без </a:t>
+            </a:r>
+            <a:r>
+              <a:rPr lang="en-US" sz="2400" dirty="0" smtClean="0"/>
+              <a:t> </a:t>
+            </a:r>
+            <a:r>
+              <a:rPr lang="ru-RU" sz="2400" dirty="0" smtClean="0"/>
+              <a:t>затухания (таблицы, изображения)</a:t>
+            </a:r>
+            <a:endParaRPr lang="en-US" sz="2400" dirty="0"/>
+          </a:p>
+          <a:p>
+            <a:pPr marL="0" indent="0" eaLnBrk="0" fontAlgn="base" hangingPunct="0">
+              <a:lnSpc>
+                <a:spcPct val="100000"/>
+              </a:lnSpc>
+              <a:spcBef>
+                <a:spcPct val="0"/>
+              </a:spcBef>
+              <a:spcAft>
+                <a:spcPct val="0"/>
+              </a:spcAft>
+              <a:buNone/>
+            </a:pPr>
+            <a:r>
+              <a:rPr lang="ru-RU" sz="2400" dirty="0" smtClean="0"/>
+              <a:t/>
+            </a:r>
+            <a:br>
+              <a:rPr lang="ru-RU" sz="2400" dirty="0" smtClean="0"/>
+            </a:br>
+            <a:endParaRPr lang="ru-RU" altLang="en-US" sz="2200" i="1" dirty="0" smtClean="0"/>
+          </a:p>
+        </p:txBody>
+      </p:sp>
       <p:sp>
         <p:nvSpPr>
           <p:cNvPr id="7" name="Номер слайда 6">
@@ -20448,236 +16748,24 @@
           </a:p>
         </p:txBody>
       </p:sp>
-      <p:sp>
-        <p:nvSpPr>
-          <p:cNvPr id="9" name="Прямоугольник 8"/>
-          <p:cNvSpPr/>
-          <p:nvPr/>
-        </p:nvSpPr>
-        <p:spPr>
-          <a:xfrm>
-            <a:off x="209550" y="6290884"/>
-            <a:ext cx="5065489" cy="369332"/>
-          </a:xfrm>
-          <a:prstGeom prst="rect">
-            <a:avLst/>
-          </a:prstGeom>
-        </p:spPr>
-        <p:txBody>
-          <a:bodyPr wrap="none">
-            <a:spAutoFit/>
-          </a:bodyPr>
-          <a:lstStyle/>
-          <a:p>
-            <a:r>
-              <a:rPr lang="ru-RU" dirty="0"/>
-              <a:t>https://openforecast.org/adam/tsComponents.html</a:t>
-            </a:r>
-          </a:p>
-        </p:txBody>
-      </p:sp>
     </p:spTree>
     <p:extLst>
       <p:ext uri="{BB962C8B-B14F-4D97-AF65-F5344CB8AC3E}">
-        <p14:creationId xmlns:p14="http://schemas.microsoft.com/office/powerpoint/2010/main" val="2605955941"/>
+        <p14:creationId xmlns:p14="http://schemas.microsoft.com/office/powerpoint/2010/main" val="1070249655"/>
       </p:ext>
     </p:extLst>
   </p:cSld>
   <p:clrMapOvr>
     <a:masterClrMapping/>
   </p:clrMapOvr>
-  <p:timing>
-    <p:tnLst>
-      <p:par>
-        <p:cTn id="1" dur="indefinite" restart="never" nodeType="tmRoot"/>
-      </p:par>
-    </p:tnLst>
-  </p:timing>
-</p:sld>
-</file>
-
-<file path=ppt/slides/slide30.xml><?xml version="1.0" encoding="utf-8"?>
-<p:sld xmlns:a="http://schemas.openxmlformats.org/drawingml/2006/main" xmlns:r="http://schemas.openxmlformats.org/officeDocument/2006/relationships" xmlns:p="http://schemas.openxmlformats.org/presentationml/2006/main">
-  <p:cSld>
-    <p:spTree>
-      <p:nvGrpSpPr>
-        <p:cNvPr id="1" name=""/>
-        <p:cNvGrpSpPr/>
-        <p:nvPr/>
-      </p:nvGrpSpPr>
-      <p:grpSpPr>
-        <a:xfrm>
-          <a:off x="0" y="0"/>
-          <a:ext cx="0" cy="0"/>
-          <a:chOff x="0" y="0"/>
-          <a:chExt cx="0" cy="0"/>
-        </a:xfrm>
-      </p:grpSpPr>
-      <p:sp>
-        <p:nvSpPr>
-          <p:cNvPr id="2" name="Заголовок 1"/>
-          <p:cNvSpPr>
-            <a:spLocks noGrp="1"/>
-          </p:cNvSpPr>
-          <p:nvPr>
-            <p:ph type="title"/>
-          </p:nvPr>
-        </p:nvSpPr>
-        <p:spPr>
-          <a:xfrm>
-            <a:off x="299103" y="365125"/>
-            <a:ext cx="11054697" cy="549275"/>
-          </a:xfrm>
-        </p:spPr>
-        <p:txBody>
-          <a:bodyPr>
-            <a:normAutofit fontScale="90000"/>
-          </a:bodyPr>
-          <a:lstStyle/>
-          <a:p>
-            <a:r>
-              <a:rPr lang="ru-RU" dirty="0" smtClean="0"/>
-              <a:t>Вопросы для самоконтроля</a:t>
-            </a:r>
-            <a:endParaRPr lang="ru-RU" dirty="0"/>
-          </a:p>
-        </p:txBody>
-      </p:sp>
-      <p:sp>
-        <p:nvSpPr>
-          <p:cNvPr id="3" name="Объект 2"/>
-          <p:cNvSpPr>
-            <a:spLocks noGrp="1"/>
-          </p:cNvSpPr>
-          <p:nvPr>
-            <p:ph idx="1"/>
-          </p:nvPr>
-        </p:nvSpPr>
-        <p:spPr>
-          <a:xfrm>
-            <a:off x="299103" y="1042586"/>
-            <a:ext cx="11690647" cy="5614587"/>
-          </a:xfrm>
-        </p:spPr>
-        <p:txBody>
-          <a:bodyPr/>
-          <a:lstStyle/>
-          <a:p>
-            <a:pPr lvl="0"/>
-            <a:r>
-              <a:rPr lang="ru-RU" dirty="0"/>
-              <a:t>Объясните основные подходы к экспоненциальному сглаживанию. Какая интуиция сопутствует таким подходам. Где подходы применимы. В каких задачах подходов будет недостаточно и как решить эту проблему?  </a:t>
-            </a:r>
-          </a:p>
-          <a:p>
-            <a:r>
-              <a:rPr lang="ru-RU" dirty="0" smtClean="0"/>
-              <a:t>Объясните почему </a:t>
-            </a:r>
-            <a:r>
-              <a:rPr lang="en-US" dirty="0" smtClean="0"/>
-              <a:t>SES-based </a:t>
-            </a:r>
-            <a:r>
-              <a:rPr lang="ru-RU" dirty="0" smtClean="0"/>
-              <a:t>подходы имеют особое место среди других подходов на основе скользящего среднего. Почему </a:t>
-            </a:r>
-            <a:r>
-              <a:rPr lang="en-US" dirty="0" smtClean="0"/>
-              <a:t>SES – </a:t>
-            </a:r>
-            <a:r>
-              <a:rPr lang="ru-RU" dirty="0" smtClean="0"/>
-              <a:t>итерационный подход? Какая интуиция соответствует переходу от </a:t>
-            </a:r>
-            <a:r>
-              <a:rPr lang="en-US" dirty="0" smtClean="0"/>
-              <a:t>SES </a:t>
-            </a:r>
-            <a:r>
-              <a:rPr lang="ru-RU" dirty="0" smtClean="0"/>
-              <a:t>к </a:t>
-            </a:r>
-            <a:r>
-              <a:rPr lang="en-US" dirty="0" smtClean="0"/>
-              <a:t>DES </a:t>
-            </a:r>
-            <a:r>
-              <a:rPr lang="ru-RU" dirty="0" smtClean="0"/>
-              <a:t>и к </a:t>
-            </a:r>
-            <a:r>
-              <a:rPr lang="en-US" dirty="0" smtClean="0"/>
-              <a:t>TES. </a:t>
-            </a:r>
-            <a:endParaRPr lang="ru-RU" dirty="0" smtClean="0"/>
-          </a:p>
-          <a:p>
-            <a:r>
-              <a:rPr lang="ru-RU" dirty="0" smtClean="0"/>
-              <a:t>Объясните подход </a:t>
-            </a:r>
-            <a:r>
-              <a:rPr lang="en-US" dirty="0" smtClean="0"/>
-              <a:t>TBATS, </a:t>
-            </a:r>
-            <a:r>
-              <a:rPr lang="ru-RU" dirty="0" smtClean="0"/>
-              <a:t>где он используется? Приведите примеры задач где недостаточно </a:t>
-            </a:r>
-            <a:r>
-              <a:rPr lang="en-US" dirty="0" smtClean="0"/>
-              <a:t>ETS </a:t>
-            </a:r>
-            <a:r>
-              <a:rPr lang="ru-RU" dirty="0" smtClean="0"/>
-              <a:t>и нужно использовать </a:t>
-            </a:r>
-            <a:r>
-              <a:rPr lang="en-US" dirty="0" smtClean="0"/>
-              <a:t>TBATS. </a:t>
-            </a:r>
-            <a:r>
-              <a:rPr lang="ru-RU" dirty="0" smtClean="0"/>
-              <a:t>Предложите пути решения таких задач без </a:t>
-            </a:r>
-            <a:r>
-              <a:rPr lang="en-US" dirty="0" smtClean="0"/>
-              <a:t>TBATS</a:t>
-            </a:r>
-            <a:r>
-              <a:rPr lang="ru-RU" dirty="0" smtClean="0"/>
-              <a:t>, в чем их особенность.</a:t>
-            </a:r>
-            <a:endParaRPr lang="en-US" dirty="0" smtClean="0"/>
-          </a:p>
-          <a:p>
-            <a:r>
-              <a:rPr lang="ru-RU" dirty="0" smtClean="0"/>
-              <a:t>Объясните цель использования подходов на основе адаптивной обобщенной регрессии. Какие у подходов достоинства и недостатки. Приведите примеры задач, где такие подходы использовать нельзя (почему такие подходы – не </a:t>
-            </a:r>
-            <a:r>
-              <a:rPr lang="ru-RU" dirty="0" err="1" smtClean="0"/>
-              <a:t>бейзлайн</a:t>
-            </a:r>
-            <a:r>
-              <a:rPr lang="ru-RU" smtClean="0"/>
-              <a:t>?). </a:t>
-            </a:r>
-            <a:endParaRPr lang="ru-RU" dirty="0"/>
-          </a:p>
-        </p:txBody>
-      </p:sp>
-    </p:spTree>
-    <p:extLst>
-      <p:ext uri="{BB962C8B-B14F-4D97-AF65-F5344CB8AC3E}">
-        <p14:creationId xmlns:p14="http://schemas.microsoft.com/office/powerpoint/2010/main" val="3868368480"/>
-      </p:ext>
-    </p:extLst>
-  </p:cSld>
-  <p:clrMapOvr>
-    <a:masterClrMapping/>
-  </p:clrMapOvr>
+  <mc:AlternateContent xmlns:mc="http://schemas.openxmlformats.org/markup-compatibility/2006">
+    <mc:Choice xmlns:p14="http://schemas.microsoft.com/office/powerpoint/2010/main" Requires="p14">
+      <p:transition spd="slow" p14:dur="2000"/>
+    </mc:Choice>
+    <mc:Fallback>
+      <p:transition spd="slow"/>
+    </mc:Fallback>
+  </mc:AlternateContent>
   <p:timing>
     <p:tnLst>
       <p:par>
@@ -20689,611 +16777,6 @@
 </file>
 
 <file path=ppt/slides/slide4.xml><?xml version="1.0" encoding="utf-8"?>
-<p:sld xmlns:a="http://schemas.openxmlformats.org/drawingml/2006/main" xmlns:r="http://schemas.openxmlformats.org/officeDocument/2006/relationships" xmlns:p="http://schemas.openxmlformats.org/presentationml/2006/main">
-  <p:cSld>
-    <p:spTree>
-      <p:nvGrpSpPr>
-        <p:cNvPr id="1" name=""/>
-        <p:cNvGrpSpPr/>
-        <p:nvPr/>
-      </p:nvGrpSpPr>
-      <p:grpSpPr>
-        <a:xfrm>
-          <a:off x="0" y="0"/>
-          <a:ext cx="0" cy="0"/>
-          <a:chOff x="0" y="0"/>
-          <a:chExt cx="0" cy="0"/>
-        </a:xfrm>
-      </p:grpSpPr>
-      <p:sp>
-        <p:nvSpPr>
-          <p:cNvPr id="2" name="Заголовок 1">
-            <a:extLst>
-              <a:ext uri="{FF2B5EF4-FFF2-40B4-BE49-F238E27FC236}">
-                <a16:creationId xmlns:a16="http://schemas.microsoft.com/office/drawing/2014/main" id="{79B0BEDB-9774-4E17-9A6B-DBCF6A1F528F}"/>
-              </a:ext>
-            </a:extLst>
-          </p:cNvPr>
-          <p:cNvSpPr>
-            <a:spLocks noGrp="1"/>
-          </p:cNvSpPr>
-          <p:nvPr>
-            <p:ph type="title"/>
-          </p:nvPr>
-        </p:nvSpPr>
-        <p:spPr>
-          <a:xfrm>
-            <a:off x="1576070" y="197786"/>
-            <a:ext cx="9849485" cy="1325563"/>
-          </a:xfrm>
-        </p:spPr>
-        <p:txBody>
-          <a:bodyPr>
-            <a:normAutofit/>
-          </a:bodyPr>
-          <a:lstStyle/>
-          <a:p>
-            <a:r>
-              <a:rPr lang="en-US" b="1" dirty="0" smtClean="0"/>
-              <a:t>TS-</a:t>
-            </a:r>
-            <a:r>
-              <a:rPr lang="ru-RU" b="1" dirty="0" smtClean="0"/>
-              <a:t>Модели </a:t>
-            </a:r>
-            <a:r>
-              <a:rPr lang="ru-RU" b="1" dirty="0"/>
-              <a:t>временных </a:t>
-            </a:r>
-            <a:r>
-              <a:rPr lang="ru-RU" b="1" dirty="0" smtClean="0"/>
-              <a:t>рядов </a:t>
-            </a:r>
-            <a:r>
-              <a:rPr lang="en-US" b="1" dirty="0" smtClean="0"/>
-              <a:t>Mixing</a:t>
-            </a:r>
-            <a:endParaRPr lang="en-US" b="1" dirty="0"/>
-          </a:p>
-        </p:txBody>
-      </p:sp>
-      <p:sp>
-        <p:nvSpPr>
-          <p:cNvPr id="3" name="Объект 2">
-            <a:extLst>
-              <a:ext uri="{FF2B5EF4-FFF2-40B4-BE49-F238E27FC236}">
-                <a16:creationId xmlns:a16="http://schemas.microsoft.com/office/drawing/2014/main" id="{4CDB8E57-5CA8-497C-990E-C304F4FBE710}"/>
-              </a:ext>
-            </a:extLst>
-          </p:cNvPr>
-          <p:cNvSpPr>
-            <a:spLocks noGrp="1"/>
-          </p:cNvSpPr>
-          <p:nvPr>
-            <p:ph idx="1"/>
-          </p:nvPr>
-        </p:nvSpPr>
-        <p:spPr>
-          <a:xfrm>
-            <a:off x="209550" y="1114427"/>
-            <a:ext cx="11525249" cy="5545789"/>
-          </a:xfrm>
-        </p:spPr>
-        <p:txBody>
-          <a:bodyPr>
-            <a:normAutofit/>
-          </a:bodyPr>
-          <a:lstStyle/>
-          <a:p>
-            <a:pPr marL="0" indent="0" eaLnBrk="0" fontAlgn="base" hangingPunct="0">
-              <a:lnSpc>
-                <a:spcPct val="100000"/>
-              </a:lnSpc>
-              <a:spcBef>
-                <a:spcPct val="0"/>
-              </a:spcBef>
-              <a:spcAft>
-                <a:spcPct val="0"/>
-              </a:spcAft>
-              <a:buNone/>
-            </a:pPr>
-            <a:r>
-              <a:rPr lang="ru-RU" sz="2400" dirty="0" smtClean="0"/>
-              <a:t>ВР - </a:t>
-            </a:r>
-            <a:r>
-              <a:rPr lang="ru-RU" sz="2400" dirty="0"/>
-              <a:t>наблюдения не независимы (не </a:t>
-            </a:r>
-            <a:r>
-              <a:rPr lang="ru-RU" sz="2400" dirty="0" err="1"/>
-              <a:t>i.i.d</a:t>
-            </a:r>
-            <a:r>
-              <a:rPr lang="ru-RU" sz="2400" dirty="0"/>
-              <a:t>.). </a:t>
-            </a:r>
-            <a:endParaRPr lang="ru-RU" sz="2400" dirty="0" smtClean="0"/>
-          </a:p>
-          <a:p>
-            <a:pPr marL="0" indent="0" eaLnBrk="0" fontAlgn="base" hangingPunct="0">
-              <a:lnSpc>
-                <a:spcPct val="100000"/>
-              </a:lnSpc>
-              <a:spcBef>
-                <a:spcPct val="0"/>
-              </a:spcBef>
-              <a:spcAft>
-                <a:spcPct val="0"/>
-              </a:spcAft>
-              <a:buNone/>
-            </a:pPr>
-            <a:r>
-              <a:rPr lang="ru-RU" sz="2400" dirty="0"/>
-              <a:t>	</a:t>
-            </a:r>
-            <a:r>
-              <a:rPr lang="ru-RU" sz="2400" dirty="0" smtClean="0"/>
-              <a:t>Между </a:t>
-            </a:r>
-            <a:r>
-              <a:rPr lang="ru-RU" sz="2400" dirty="0"/>
-              <a:t>близкими по времени точками существует сильная зависимость. </a:t>
-            </a:r>
-            <a:endParaRPr lang="ru-RU" sz="2400" dirty="0" smtClean="0"/>
-          </a:p>
-          <a:p>
-            <a:pPr marL="0" indent="0" eaLnBrk="0" fontAlgn="base" hangingPunct="0">
-              <a:lnSpc>
-                <a:spcPct val="100000"/>
-              </a:lnSpc>
-              <a:spcBef>
-                <a:spcPct val="0"/>
-              </a:spcBef>
-              <a:spcAft>
-                <a:spcPct val="0"/>
-              </a:spcAft>
-              <a:buNone/>
-            </a:pPr>
-            <a:r>
-              <a:rPr lang="ru-RU" sz="2400" dirty="0" smtClean="0"/>
-              <a:t>Классическая </a:t>
-            </a:r>
-            <a:r>
-              <a:rPr lang="ru-RU" sz="2400" dirty="0"/>
-              <a:t>статистическая теория обучения </a:t>
-            </a:r>
-            <a:r>
-              <a:rPr lang="ru-RU" sz="2400" dirty="0" smtClean="0"/>
-              <a:t>для </a:t>
-            </a:r>
-            <a:r>
-              <a:rPr lang="en-US" sz="2400" dirty="0" smtClean="0"/>
-              <a:t>TS </a:t>
-            </a:r>
-            <a:r>
-              <a:rPr lang="ru-RU" sz="2400" dirty="0" smtClean="0"/>
-              <a:t>моделей часто </a:t>
-            </a:r>
-            <a:r>
-              <a:rPr lang="ru-RU" sz="2400" dirty="0"/>
-              <a:t>требует независимости, поэтому для зависимых данных вводят условия перемешивания (</a:t>
-            </a:r>
-            <a:r>
-              <a:rPr lang="ru-RU" sz="2400" dirty="0" err="1"/>
-              <a:t>mixing</a:t>
-            </a:r>
-            <a:r>
-              <a:rPr lang="ru-RU" sz="2400" dirty="0"/>
-              <a:t> </a:t>
-            </a:r>
-            <a:r>
-              <a:rPr lang="ru-RU" sz="2400" dirty="0" err="1"/>
-              <a:t>conditions</a:t>
-            </a:r>
-            <a:r>
-              <a:rPr lang="ru-RU" sz="2400" dirty="0"/>
-              <a:t>). </a:t>
-            </a:r>
-            <a:endParaRPr lang="ru-RU" sz="2400" dirty="0" smtClean="0"/>
-          </a:p>
-          <a:p>
-            <a:pPr marL="0" indent="0" eaLnBrk="0" fontAlgn="base" hangingPunct="0">
-              <a:lnSpc>
-                <a:spcPct val="100000"/>
-              </a:lnSpc>
-              <a:spcBef>
-                <a:spcPct val="0"/>
-              </a:spcBef>
-              <a:spcAft>
-                <a:spcPct val="0"/>
-              </a:spcAft>
-              <a:buNone/>
-            </a:pPr>
-            <a:r>
-              <a:rPr lang="ru-RU" sz="2400" dirty="0" smtClean="0"/>
-              <a:t>Они </a:t>
-            </a:r>
-            <a:r>
-              <a:rPr lang="ru-RU" sz="2400" dirty="0"/>
-              <a:t>измеряют, насколько быстро зависимость между прошлым и будущим ослабевает со временем.</a:t>
-            </a:r>
-          </a:p>
-          <a:p>
-            <a:pPr marL="0" indent="0" eaLnBrk="0" fontAlgn="base" hangingPunct="0">
-              <a:lnSpc>
-                <a:spcPct val="100000"/>
-              </a:lnSpc>
-              <a:spcBef>
-                <a:spcPct val="0"/>
-              </a:spcBef>
-              <a:spcAft>
-                <a:spcPct val="0"/>
-              </a:spcAft>
-              <a:buNone/>
-            </a:pPr>
-            <a:r>
-              <a:rPr lang="el-GR" sz="2400" b="1" dirty="0"/>
-              <a:t>α-</a:t>
-            </a:r>
-            <a:r>
-              <a:rPr lang="en-US" sz="2400" b="1" dirty="0" smtClean="0"/>
-              <a:t>mixing</a:t>
-            </a:r>
-            <a:r>
-              <a:rPr lang="ru-RU" sz="2400" b="1" dirty="0" smtClean="0"/>
-              <a:t> – быстрое затухание по экспоненциальном или полиномиальному закону (большинство наших процессов, полином на очень </a:t>
-            </a:r>
-            <a:r>
-              <a:rPr lang="ru-RU" sz="2400" b="1" smtClean="0"/>
-              <a:t>длинном горизонте)</a:t>
-            </a:r>
-            <a:r>
-              <a:rPr lang="ru-RU" sz="2400" dirty="0" smtClean="0"/>
-              <a:t/>
-            </a:r>
-            <a:br>
-              <a:rPr lang="ru-RU" sz="2400" dirty="0" smtClean="0"/>
-            </a:br>
-            <a:r>
-              <a:rPr lang="el-GR" sz="2400" dirty="0"/>
-              <a:t>β-</a:t>
-            </a:r>
-            <a:r>
-              <a:rPr lang="en-US" sz="2400" dirty="0" smtClean="0"/>
-              <a:t>mixing</a:t>
-            </a:r>
-            <a:r>
-              <a:rPr lang="ru-RU" sz="2400" dirty="0" smtClean="0"/>
-              <a:t> – текстовые данные (Марковские цепи, линейное затухание)</a:t>
-            </a:r>
-          </a:p>
-          <a:p>
-            <a:pPr marL="0" indent="0" eaLnBrk="0" fontAlgn="base" hangingPunct="0">
-              <a:lnSpc>
-                <a:spcPct val="100000"/>
-              </a:lnSpc>
-              <a:spcBef>
-                <a:spcPct val="0"/>
-              </a:spcBef>
-              <a:spcAft>
-                <a:spcPct val="0"/>
-              </a:spcAft>
-              <a:buNone/>
-            </a:pPr>
-            <a:r>
-              <a:rPr lang="el-GR" sz="2400" dirty="0"/>
-              <a:t>φ-</a:t>
-            </a:r>
-            <a:r>
-              <a:rPr lang="en-US" sz="2400" dirty="0" smtClean="0"/>
-              <a:t>mixing</a:t>
-            </a:r>
-            <a:r>
-              <a:rPr lang="ru-RU" sz="2400" dirty="0" smtClean="0"/>
-              <a:t> – без </a:t>
-            </a:r>
-            <a:r>
-              <a:rPr lang="en-US" sz="2400" dirty="0" smtClean="0"/>
-              <a:t> </a:t>
-            </a:r>
-            <a:r>
-              <a:rPr lang="ru-RU" sz="2400" dirty="0" smtClean="0"/>
-              <a:t>затухания (таблицы, изображения)</a:t>
-            </a:r>
-            <a:endParaRPr lang="en-US" sz="2400" dirty="0"/>
-          </a:p>
-          <a:p>
-            <a:pPr marL="0" indent="0" eaLnBrk="0" fontAlgn="base" hangingPunct="0">
-              <a:lnSpc>
-                <a:spcPct val="100000"/>
-              </a:lnSpc>
-              <a:spcBef>
-                <a:spcPct val="0"/>
-              </a:spcBef>
-              <a:spcAft>
-                <a:spcPct val="0"/>
-              </a:spcAft>
-              <a:buNone/>
-            </a:pPr>
-            <a:r>
-              <a:rPr lang="ru-RU" sz="2400" dirty="0" smtClean="0"/>
-              <a:t/>
-            </a:r>
-            <a:br>
-              <a:rPr lang="ru-RU" sz="2400" dirty="0" smtClean="0"/>
-            </a:br>
-            <a:endParaRPr lang="ru-RU" altLang="en-US" sz="2200" i="1" dirty="0" smtClean="0"/>
-          </a:p>
-        </p:txBody>
-      </p:sp>
-      <p:sp>
-        <p:nvSpPr>
-          <p:cNvPr id="7" name="Номер слайда 6">
-            <a:extLst>
-              <a:ext uri="{FF2B5EF4-FFF2-40B4-BE49-F238E27FC236}">
-                <a16:creationId xmlns:a16="http://schemas.microsoft.com/office/drawing/2014/main" id="{A07EF2B8-3D80-AB22-FA4B-F0655B9EAE6F}"/>
-              </a:ext>
-            </a:extLst>
-          </p:cNvPr>
-          <p:cNvSpPr>
-            <a:spLocks noGrp="1"/>
-          </p:cNvSpPr>
-          <p:nvPr>
-            <p:ph type="sldNum" sz="quarter" idx="12"/>
-          </p:nvPr>
-        </p:nvSpPr>
-        <p:spPr/>
-        <p:txBody>
-          <a:bodyPr/>
-          <a:lstStyle/>
-          <a:p>
-            <a:fld id="{45C3B737-A709-4ABC-AFE0-A6B067850C48}" type="slidenum">
-              <a:rPr lang="en-US" smtClean="0"/>
-              <a:t>4</a:t>
-            </a:fld>
-            <a:endParaRPr lang="en-US"/>
-          </a:p>
-        </p:txBody>
-      </p:sp>
-      <p:sp>
-        <p:nvSpPr>
-          <p:cNvPr id="5" name="Rectangle 231">
-            <a:extLst>
-              <a:ext uri="{FF2B5EF4-FFF2-40B4-BE49-F238E27FC236}">
-                <a16:creationId xmlns:a16="http://schemas.microsoft.com/office/drawing/2014/main" id="{57F50B8E-A23A-4154-9A0C-994DE115ACE6}"/>
-              </a:ext>
-            </a:extLst>
-          </p:cNvPr>
-          <p:cNvSpPr>
-            <a:spLocks noChangeArrowheads="1"/>
-          </p:cNvSpPr>
-          <p:nvPr/>
-        </p:nvSpPr>
-        <p:spPr bwMode="auto">
-          <a:xfrm>
-            <a:off x="6167756" y="4477386"/>
-            <a:ext cx="52071" cy="10795"/>
-          </a:xfrm>
-          <a:prstGeom prst="rect">
-            <a:avLst/>
-          </a:prstGeom>
-          <a:solidFill>
-            <a:srgbClr val="000000"/>
-          </a:solidFill>
-          <a:ln>
-            <a:noFill/>
-          </a:ln>
-          <a:extLst>
-            <a:ext uri="{91240B29-F687-4F45-9708-019B960494DF}">
-              <a14:hiddenLine xmlns:a14="http://schemas.microsoft.com/office/drawing/2010/main" w="9525">
-                <a:solidFill>
-                  <a:srgbClr val="000000"/>
-                </a:solidFill>
-                <a:miter lim="800000"/>
-                <a:headEnd/>
-                <a:tailEnd/>
-              </a14:hiddenLine>
-            </a:ext>
-          </a:extLst>
-        </p:spPr>
-        <p:txBody>
-          <a:bodyPr rot="0" vert="horz" wrap="square" lIns="91440" tIns="45720" rIns="91440" bIns="45720" anchor="t" anchorCtr="0" upright="1">
-            <a:noAutofit/>
-          </a:bodyPr>
-          <a:lstStyle/>
-          <a:p>
-            <a:endParaRPr lang="en-US" sz="1351"/>
-          </a:p>
-        </p:txBody>
-      </p:sp>
-      <p:sp>
-        <p:nvSpPr>
-          <p:cNvPr id="6" name="Rectangle 3">
-            <a:extLst>
-              <a:ext uri="{FF2B5EF4-FFF2-40B4-BE49-F238E27FC236}">
-                <a16:creationId xmlns:a16="http://schemas.microsoft.com/office/drawing/2014/main" id="{66C52228-8C94-4CF2-AD63-BA9617333BA2}"/>
-              </a:ext>
-            </a:extLst>
-          </p:cNvPr>
-          <p:cNvSpPr>
-            <a:spLocks noChangeArrowheads="1"/>
-          </p:cNvSpPr>
-          <p:nvPr/>
-        </p:nvSpPr>
-        <p:spPr bwMode="auto">
-          <a:xfrm>
-            <a:off x="-1523999" y="124999"/>
-            <a:ext cx="184731" cy="677108"/>
-          </a:xfrm>
-          <a:prstGeom prst="rect">
-            <a:avLst/>
-          </a:prstGeom>
-          <a:noFill/>
-          <a:ln>
-            <a:noFill/>
-          </a:ln>
-          <a:effectLst/>
-          <a:extLst>
-            <a:ext uri="{909E8E84-426E-40DD-AFC4-6F175D3DCCD1}">
-              <a14:hiddenFill xmlns:a14="http://schemas.microsoft.com/office/drawing/2010/main">
-                <a:solidFill>
-                  <a:schemeClr val="accent1"/>
-                </a:solidFill>
-              </a14:hiddenFill>
-            </a:ext>
-            <a:ext uri="{91240B29-F687-4F45-9708-019B960494DF}">
-              <a14:hiddenLine xmlns:a14="http://schemas.microsoft.com/office/drawing/2010/main" w="9525">
-                <a:solidFill>
-                  <a:schemeClr val="tx1"/>
-                </a:solidFill>
-                <a:miter lim="800000"/>
-                <a:headEnd/>
-                <a:tailEnd/>
-              </a14:hiddenLine>
-            </a:ext>
-            <a:ext uri="{AF507438-7753-43E0-B8FC-AC1667EBCBE1}">
-              <a14:hiddenEffects xmlns:a14="http://schemas.microsoft.com/office/drawing/2010/main">
-                <a:effectLst>
-                  <a:outerShdw dist="35921" dir="2700000" algn="ctr" rotWithShape="0">
-                    <a:schemeClr val="bg2"/>
-                  </a:outerShdw>
-                </a:effectLst>
-              </a14:hiddenEffects>
-            </a:ext>
-          </a:extLst>
-        </p:spPr>
-        <p:txBody>
-          <a:bodyPr vert="horz" wrap="none" lIns="91440" tIns="45720" rIns="91440" bIns="45720" numCol="1" anchor="ctr" anchorCtr="0" compatLnSpc="1">
-            <a:prstTxWarp prst="textNoShape">
-              <a:avLst/>
-            </a:prstTxWarp>
-            <a:spAutoFit/>
-          </a:bodyPr>
-          <a:lstStyle/>
-          <a:p>
-            <a:pPr eaLnBrk="0" fontAlgn="base" hangingPunct="0">
-              <a:spcBef>
-                <a:spcPct val="0"/>
-              </a:spcBef>
-              <a:spcAft>
-                <a:spcPct val="0"/>
-              </a:spcAft>
-            </a:pPr>
-            <a:r>
-              <a:rPr lang="en-US" altLang="en-US" sz="1400">
-                <a:latin typeface="Arial" panose="020B0604020202020204" pitchFamily="34" charset="0"/>
-                <a:ea typeface="Times New Roman" panose="02020603050405020304" pitchFamily="18" charset="0"/>
-              </a:rPr>
-              <a:t/>
-            </a:r>
-            <a:br>
-              <a:rPr lang="en-US" altLang="en-US" sz="1400">
-                <a:latin typeface="Arial" panose="020B0604020202020204" pitchFamily="34" charset="0"/>
-                <a:ea typeface="Times New Roman" panose="02020603050405020304" pitchFamily="18" charset="0"/>
-              </a:rPr>
-            </a:br>
-            <a:endParaRPr lang="en-US" altLang="en-US" sz="2400">
-              <a:latin typeface="Arial" panose="020B0604020202020204" pitchFamily="34" charset="0"/>
-            </a:endParaRPr>
-          </a:p>
-        </p:txBody>
-      </p:sp>
-      <p:sp>
-        <p:nvSpPr>
-          <p:cNvPr id="4" name="Rectangle 1">
-            <a:extLst>
-              <a:ext uri="{FF2B5EF4-FFF2-40B4-BE49-F238E27FC236}">
-                <a16:creationId xmlns:a16="http://schemas.microsoft.com/office/drawing/2014/main" id="{4ECA1DAD-475E-4D0B-A20A-17535DDD41A8}"/>
-              </a:ext>
-            </a:extLst>
-          </p:cNvPr>
-          <p:cNvSpPr>
-            <a:spLocks noChangeArrowheads="1"/>
-          </p:cNvSpPr>
-          <p:nvPr/>
-        </p:nvSpPr>
-        <p:spPr bwMode="auto">
-          <a:xfrm>
-            <a:off x="-1523999" y="43935"/>
-            <a:ext cx="65" cy="369332"/>
-          </a:xfrm>
-          <a:prstGeom prst="rect">
-            <a:avLst/>
-          </a:prstGeom>
-          <a:solidFill>
-            <a:srgbClr val="FFFFFF"/>
-          </a:solidFill>
-          <a:ln>
-            <a:noFill/>
-          </a:ln>
-          <a:effectLst/>
-          <a:extLst>
-            <a:ext uri="{91240B29-F687-4F45-9708-019B960494DF}">
-              <a14:hiddenLine xmlns:a14="http://schemas.microsoft.com/office/drawing/2010/main" w="9525">
-                <a:solidFill>
-                  <a:schemeClr val="tx1"/>
-                </a:solidFill>
-                <a:miter lim="800000"/>
-                <a:headEnd/>
-                <a:tailEnd/>
-              </a14:hiddenLine>
-            </a:ext>
-            <a:ext uri="{AF507438-7753-43E0-B8FC-AC1667EBCBE1}">
-              <a14:hiddenEffects xmlns:a14="http://schemas.microsoft.com/office/drawing/2010/main">
-                <a:effectLst>
-                  <a:outerShdw dist="35921" dir="2700000" algn="ctr" rotWithShape="0">
-                    <a:schemeClr val="bg2"/>
-                  </a:outerShdw>
-                </a:effectLst>
-              </a14:hiddenEffects>
-            </a:ext>
-          </a:extLst>
-        </p:spPr>
-        <p:txBody>
-          <a:bodyPr vert="horz" wrap="none" lIns="0" tIns="0" rIns="0" bIns="0" numCol="1" anchor="ctr" anchorCtr="0" compatLnSpc="1">
-            <a:prstTxWarp prst="textNoShape">
-              <a:avLst/>
-            </a:prstTxWarp>
-            <a:spAutoFit/>
-          </a:bodyPr>
-          <a:lstStyle/>
-          <a:p>
-            <a:pPr eaLnBrk="0" fontAlgn="base" hangingPunct="0">
-              <a:spcBef>
-                <a:spcPct val="0"/>
-              </a:spcBef>
-              <a:spcAft>
-                <a:spcPct val="0"/>
-              </a:spcAft>
-            </a:pPr>
-            <a:endParaRPr lang="en-US" altLang="en-US" sz="2400" dirty="0">
-              <a:latin typeface="Arial" panose="020B0604020202020204" pitchFamily="34" charset="0"/>
-            </a:endParaRPr>
-          </a:p>
-        </p:txBody>
-      </p:sp>
-    </p:spTree>
-    <p:extLst>
-      <p:ext uri="{BB962C8B-B14F-4D97-AF65-F5344CB8AC3E}">
-        <p14:creationId xmlns:p14="http://schemas.microsoft.com/office/powerpoint/2010/main" val="1070249655"/>
-      </p:ext>
-    </p:extLst>
-  </p:cSld>
-  <p:clrMapOvr>
-    <a:masterClrMapping/>
-  </p:clrMapOvr>
-  <p:timing>
-    <p:tnLst>
-      <p:par>
-        <p:cTn id="1" dur="indefinite" restart="never" nodeType="tmRoot"/>
-      </p:par>
-    </p:tnLst>
-  </p:timing>
-</p:sld>
-</file>
-
-<file path=ppt/slides/slide5.xml><?xml version="1.0" encoding="utf-8"?>
 <p:sld xmlns:a="http://schemas.openxmlformats.org/drawingml/2006/main" xmlns:r="http://schemas.openxmlformats.org/officeDocument/2006/relationships" xmlns:p="http://schemas.openxmlformats.org/presentationml/2006/main">
   <p:cSld>
     <p:spTree>
@@ -22445,7 +17928,7 @@
 </p:sld>
 </file>
 
-<file path=ppt/slides/slide6.xml><?xml version="1.0" encoding="utf-8"?>
+<file path=ppt/slides/slide5.xml><?xml version="1.0" encoding="utf-8"?>
 <p:sld xmlns:a="http://schemas.openxmlformats.org/drawingml/2006/main" xmlns:r="http://schemas.openxmlformats.org/officeDocument/2006/relationships" xmlns:p="http://schemas.openxmlformats.org/presentationml/2006/main">
   <p:cSld>
     <p:spTree>
@@ -23296,7 +18779,7 @@
 </p:sld>
 </file>
 
-<file path=ppt/slides/slide7.xml><?xml version="1.0" encoding="utf-8"?>
+<file path=ppt/slides/slide6.xml><?xml version="1.0" encoding="utf-8"?>
 <p:sld xmlns:a="http://schemas.openxmlformats.org/drawingml/2006/main" xmlns:r="http://schemas.openxmlformats.org/officeDocument/2006/relationships" xmlns:p="http://schemas.openxmlformats.org/presentationml/2006/main">
   <p:cSld>
     <p:spTree>
@@ -24011,7 +19494,7 @@
 </p:sld>
 </file>
 
-<file path=ppt/slides/slide8.xml><?xml version="1.0" encoding="utf-8"?>
+<file path=ppt/slides/slide7.xml><?xml version="1.0" encoding="utf-8"?>
 <p:sld xmlns:a="http://schemas.openxmlformats.org/drawingml/2006/main" xmlns:r="http://schemas.openxmlformats.org/officeDocument/2006/relationships" xmlns:p="http://schemas.openxmlformats.org/presentationml/2006/main">
   <p:cSld>
     <p:spTree>
@@ -25358,7 +20841,7 @@
 </p:sld>
 </file>
 
-<file path=ppt/slides/slide9.xml><?xml version="1.0" encoding="utf-8"?>
+<file path=ppt/slides/slide8.xml><?xml version="1.0" encoding="utf-8"?>
 <p:sld xmlns:a="http://schemas.openxmlformats.org/drawingml/2006/main" xmlns:r="http://schemas.openxmlformats.org/officeDocument/2006/relationships" xmlns:p="http://schemas.openxmlformats.org/presentationml/2006/main">
   <p:cSld>
     <p:spTree>
@@ -26232,6 +21715,1331 @@
     <p:extLst>
       <p:ext uri="{BB962C8B-B14F-4D97-AF65-F5344CB8AC3E}">
         <p14:creationId xmlns:p14="http://schemas.microsoft.com/office/powerpoint/2010/main" val="1411614552"/>
+      </p:ext>
+    </p:extLst>
+  </p:cSld>
+  <p:clrMapOvr>
+    <a:masterClrMapping/>
+  </p:clrMapOvr>
+  <p:timing>
+    <p:tnLst>
+      <p:par>
+        <p:cTn id="1" dur="indefinite" restart="never" nodeType="tmRoot"/>
+      </p:par>
+    </p:tnLst>
+  </p:timing>
+</p:sld>
+</file>
+
+<file path=ppt/slides/slide9.xml><?xml version="1.0" encoding="utf-8"?>
+<p:sld xmlns:a="http://schemas.openxmlformats.org/drawingml/2006/main" xmlns:r="http://schemas.openxmlformats.org/officeDocument/2006/relationships" xmlns:p="http://schemas.openxmlformats.org/presentationml/2006/main">
+  <p:cSld>
+    <p:spTree>
+      <p:nvGrpSpPr>
+        <p:cNvPr id="1" name=""/>
+        <p:cNvGrpSpPr/>
+        <p:nvPr/>
+      </p:nvGrpSpPr>
+      <p:grpSpPr>
+        <a:xfrm>
+          <a:off x="0" y="0"/>
+          <a:ext cx="0" cy="0"/>
+          <a:chOff x="0" y="0"/>
+          <a:chExt cx="0" cy="0"/>
+        </a:xfrm>
+      </p:grpSpPr>
+      <p:sp>
+        <p:nvSpPr>
+          <p:cNvPr id="2" name="Заголовок 1">
+            <a:extLst>
+              <a:ext uri="{FF2B5EF4-FFF2-40B4-BE49-F238E27FC236}">
+                <a16:creationId xmlns:a16="http://schemas.microsoft.com/office/drawing/2014/main" id="{3FB6B433-AB20-4BD4-8E77-84B856A5D608}"/>
+              </a:ext>
+            </a:extLst>
+          </p:cNvPr>
+          <p:cNvSpPr>
+            <a:spLocks noGrp="1"/>
+          </p:cNvSpPr>
+          <p:nvPr>
+            <p:ph type="title"/>
+          </p:nvPr>
+        </p:nvSpPr>
+        <p:spPr>
+          <a:xfrm>
+            <a:off x="226957" y="93605"/>
+            <a:ext cx="11802295" cy="933115"/>
+          </a:xfrm>
+        </p:spPr>
+        <p:txBody>
+          <a:bodyPr>
+            <a:normAutofit/>
+          </a:bodyPr>
+          <a:lstStyle/>
+          <a:p>
+            <a:pPr algn="ctr"/>
+            <a:r>
+              <a:rPr lang="ru-RU" sz="3200" b="1" dirty="0"/>
+              <a:t>Модель </a:t>
+            </a:r>
+            <a:r>
+              <a:rPr lang="en-US" sz="3200" b="1" dirty="0"/>
+              <a:t>Holt</a:t>
+            </a:r>
+            <a:r>
+              <a:rPr lang="ru-RU" sz="3200" b="1" dirty="0"/>
+              <a:t>-</a:t>
+            </a:r>
+            <a:r>
+              <a:rPr lang="en-US" sz="3200" b="1" dirty="0"/>
+              <a:t>Winters </a:t>
+            </a:r>
+            <a:r>
+              <a:rPr lang="ru-RU" sz="3200" b="1" dirty="0"/>
+              <a:t> - тройное экспоненциальное сглаживание</a:t>
+            </a:r>
+            <a:endParaRPr lang="ru-RU" sz="3600" b="1" dirty="0"/>
+          </a:p>
+        </p:txBody>
+      </p:sp>
+      <mc:AlternateContent xmlns:mc="http://schemas.openxmlformats.org/markup-compatibility/2006" xmlns:a14="http://schemas.microsoft.com/office/drawing/2010/main">
+        <mc:Choice Requires="a14">
+          <p:sp>
+            <p:nvSpPr>
+              <p:cNvPr id="3" name="Объект 2">
+                <a:extLst>
+                  <a:ext uri="{FF2B5EF4-FFF2-40B4-BE49-F238E27FC236}">
+                    <a16:creationId xmlns:a16="http://schemas.microsoft.com/office/drawing/2014/main" id="{9CFDC76D-90F0-4FD7-8BA6-954D6D2E6FFD}"/>
+                  </a:ext>
+                </a:extLst>
+              </p:cNvPr>
+              <p:cNvSpPr>
+                <a:spLocks noGrp="1"/>
+              </p:cNvSpPr>
+              <p:nvPr>
+                <p:ph idx="1"/>
+              </p:nvPr>
+            </p:nvSpPr>
+            <p:spPr>
+              <a:xfrm>
+                <a:off x="226957" y="817117"/>
+                <a:ext cx="11791949" cy="5502274"/>
+              </a:xfrm>
+            </p:spPr>
+            <p:txBody>
+              <a:bodyPr>
+                <a:normAutofit/>
+              </a:bodyPr>
+              <a:lstStyle/>
+              <a:p>
+                <a:pPr marL="0" indent="0">
+                  <a:buNone/>
+                </a:pPr>
+                <a:r>
+                  <a:rPr lang="ru-RU" sz="2200" dirty="0"/>
+                  <a:t>Пусть существуют быстрые изменения с известным периодом </a:t>
+                </a:r>
+                <a14:m>
+                  <m:oMath xmlns:m="http://schemas.openxmlformats.org/officeDocument/2006/math">
+                    <m:r>
+                      <a:rPr lang="en-US" sz="2200" b="0" i="1" dirty="0" smtClean="0">
+                        <a:latin typeface="Cambria Math" panose="02040503050406030204" pitchFamily="18" charset="0"/>
+                      </a:rPr>
+                      <m:t>𝑚</m:t>
+                    </m:r>
+                  </m:oMath>
+                </a14:m>
+                <a:r>
+                  <a:rPr lang="en-US" sz="2200" dirty="0"/>
+                  <a:t> </a:t>
+                </a:r>
+                <a:r>
+                  <a:rPr lang="ru-RU" sz="2200" dirty="0"/>
+                  <a:t>(сезонность). Тогда для точек одной фазы (удаленных на </a:t>
+                </a:r>
+                <a14:m>
+                  <m:oMath xmlns:m="http://schemas.openxmlformats.org/officeDocument/2006/math">
+                    <m:r>
+                      <a:rPr lang="en-US" sz="2200" b="0" i="1" dirty="0" smtClean="0">
+                        <a:latin typeface="Cambria Math" panose="02040503050406030204" pitchFamily="18" charset="0"/>
+                      </a:rPr>
+                      <m:t>𝑚</m:t>
+                    </m:r>
+                  </m:oMath>
+                </a14:m>
+                <a:r>
+                  <a:rPr lang="en-US" sz="2200" dirty="0"/>
+                  <a:t>) </a:t>
+                </a:r>
+                <a:r>
+                  <a:rPr lang="ru-RU" sz="2200" dirty="0"/>
+                  <a:t>введем компоненты сглаживания.</a:t>
+                </a:r>
+                <a:endParaRPr lang="en-US" sz="2200" dirty="0"/>
+              </a:p>
+              <a:p>
+                <a:pPr marL="0" indent="0">
+                  <a:buNone/>
+                </a:pPr>
+                <a14:m>
+                  <m:oMathPara xmlns:m="http://schemas.openxmlformats.org/officeDocument/2006/math">
+                    <m:oMathParaPr>
+                      <m:jc m:val="centerGroup"/>
+                    </m:oMathParaPr>
+                    <m:oMath xmlns:m="http://schemas.openxmlformats.org/officeDocument/2006/math">
+                      <m:d>
+                        <m:dPr>
+                          <m:begChr m:val="{"/>
+                          <m:endChr m:val=""/>
+                          <m:ctrlPr>
+                            <a:rPr lang="en-US" sz="2200" i="1" smtClean="0">
+                              <a:latin typeface="Cambria Math" panose="02040503050406030204" pitchFamily="18" charset="0"/>
+                            </a:rPr>
+                          </m:ctrlPr>
+                        </m:dPr>
+                        <m:e>
+                          <m:eqArr>
+                            <m:eqArrPr>
+                              <m:ctrlPr>
+                                <a:rPr lang="en-US" sz="2200" i="1" smtClean="0">
+                                  <a:latin typeface="Cambria Math" panose="02040503050406030204" pitchFamily="18" charset="0"/>
+                                </a:rPr>
+                              </m:ctrlPr>
+                            </m:eqArrPr>
+                            <m:e>
+                              <m:sSub>
+                                <m:sSubPr>
+                                  <m:ctrlPr>
+                                    <a:rPr lang="en-US" sz="2200" i="1">
+                                      <a:latin typeface="Cambria Math" panose="02040503050406030204" pitchFamily="18" charset="0"/>
+                                    </a:rPr>
+                                  </m:ctrlPr>
+                                </m:sSubPr>
+                                <m:e>
+                                  <m:acc>
+                                    <m:accPr>
+                                      <m:chr m:val="̂"/>
+                                      <m:ctrlPr>
+                                        <a:rPr lang="en-US" sz="2200" i="1">
+                                          <a:latin typeface="Cambria Math" panose="02040503050406030204" pitchFamily="18" charset="0"/>
+                                        </a:rPr>
+                                      </m:ctrlPr>
+                                    </m:accPr>
+                                    <m:e>
+                                      <m:r>
+                                        <a:rPr lang="en-US" sz="2200" i="1">
+                                          <a:latin typeface="Cambria Math" panose="02040503050406030204" pitchFamily="18" charset="0"/>
+                                        </a:rPr>
+                                        <m:t>𝑦</m:t>
+                                      </m:r>
+                                    </m:e>
+                                  </m:acc>
+                                </m:e>
+                                <m:sub>
+                                  <m:r>
+                                    <a:rPr lang="en-US" sz="2200" i="1">
+                                      <a:latin typeface="Cambria Math" panose="02040503050406030204" pitchFamily="18" charset="0"/>
+                                    </a:rPr>
+                                    <m:t>𝑛</m:t>
+                                  </m:r>
+                                  <m:r>
+                                    <a:rPr lang="en-US" sz="2200" i="1">
+                                      <a:latin typeface="Cambria Math" panose="02040503050406030204" pitchFamily="18" charset="0"/>
+                                    </a:rPr>
+                                    <m:t>+</m:t>
+                                  </m:r>
+                                  <m:r>
+                                    <a:rPr lang="en-US" sz="2200" b="0" i="1" smtClean="0">
+                                      <a:latin typeface="Cambria Math" panose="02040503050406030204" pitchFamily="18" charset="0"/>
+                                    </a:rPr>
+                                    <m:t>h</m:t>
+                                  </m:r>
+                                </m:sub>
+                              </m:sSub>
+                              <m:r>
+                                <a:rPr lang="en-US" sz="2200" i="1">
+                                  <a:latin typeface="Cambria Math" panose="02040503050406030204" pitchFamily="18" charset="0"/>
+                                </a:rPr>
+                                <m:t>=</m:t>
+                              </m:r>
+                              <m:sSub>
+                                <m:sSubPr>
+                                  <m:ctrlPr>
+                                    <a:rPr lang="en-US" sz="2200" i="1">
+                                      <a:latin typeface="Cambria Math" panose="02040503050406030204" pitchFamily="18" charset="0"/>
+                                    </a:rPr>
+                                  </m:ctrlPr>
+                                </m:sSubPr>
+                                <m:e>
+                                  <m:r>
+                                    <a:rPr lang="en-US" sz="2200" i="1">
+                                      <a:latin typeface="Cambria Math" panose="02040503050406030204" pitchFamily="18" charset="0"/>
+                                    </a:rPr>
+                                    <m:t>𝑙</m:t>
+                                  </m:r>
+                                </m:e>
+                                <m:sub>
+                                  <m:r>
+                                    <a:rPr lang="en-US" sz="2200" i="1">
+                                      <a:latin typeface="Cambria Math" panose="02040503050406030204" pitchFamily="18" charset="0"/>
+                                    </a:rPr>
+                                    <m:t>𝑛</m:t>
+                                  </m:r>
+                                </m:sub>
+                              </m:sSub>
+                              <m:r>
+                                <a:rPr lang="en-US" sz="2200" i="1">
+                                  <a:latin typeface="Cambria Math" panose="02040503050406030204" pitchFamily="18" charset="0"/>
+                                </a:rPr>
+                                <m:t>+</m:t>
+                              </m:r>
+                              <m:r>
+                                <a:rPr lang="en-US" sz="2200" b="0" i="1" smtClean="0">
+                                  <a:latin typeface="Cambria Math" panose="02040503050406030204" pitchFamily="18" charset="0"/>
+                                </a:rPr>
+                                <m:t>h</m:t>
+                              </m:r>
+                              <m:r>
+                                <a:rPr lang="en-US" sz="2200" b="0" i="1" smtClean="0">
+                                  <a:latin typeface="Cambria Math" panose="02040503050406030204" pitchFamily="18" charset="0"/>
+                                </a:rPr>
+                                <m:t>⋅</m:t>
+                              </m:r>
+                              <m:sSub>
+                                <m:sSubPr>
+                                  <m:ctrlPr>
+                                    <a:rPr lang="en-US" sz="2200" i="1">
+                                      <a:latin typeface="Cambria Math" panose="02040503050406030204" pitchFamily="18" charset="0"/>
+                                    </a:rPr>
+                                  </m:ctrlPr>
+                                </m:sSubPr>
+                                <m:e>
+                                  <m:r>
+                                    <a:rPr lang="en-US" sz="2200" i="1">
+                                      <a:latin typeface="Cambria Math" panose="02040503050406030204" pitchFamily="18" charset="0"/>
+                                    </a:rPr>
+                                    <m:t>𝑏</m:t>
+                                  </m:r>
+                                </m:e>
+                                <m:sub>
+                                  <m:r>
+                                    <a:rPr lang="en-US" sz="2200" i="1">
+                                      <a:latin typeface="Cambria Math" panose="02040503050406030204" pitchFamily="18" charset="0"/>
+                                    </a:rPr>
+                                    <m:t>𝑛</m:t>
+                                  </m:r>
+                                </m:sub>
+                              </m:sSub>
+                              <m:r>
+                                <a:rPr lang="ru-RU" sz="2200" b="0" i="1" smtClean="0">
+                                  <a:latin typeface="Cambria Math" panose="02040503050406030204" pitchFamily="18" charset="0"/>
+                                </a:rPr>
+                                <m:t>+</m:t>
+                              </m:r>
+                              <m:sSub>
+                                <m:sSubPr>
+                                  <m:ctrlPr>
+                                    <a:rPr lang="en-US" sz="2200" i="1">
+                                      <a:latin typeface="Cambria Math" panose="02040503050406030204" pitchFamily="18" charset="0"/>
+                                    </a:rPr>
+                                  </m:ctrlPr>
+                                </m:sSubPr>
+                                <m:e>
+                                  <m:r>
+                                    <a:rPr lang="en-US" sz="2200" i="1">
+                                      <a:latin typeface="Cambria Math" panose="02040503050406030204" pitchFamily="18" charset="0"/>
+                                    </a:rPr>
+                                    <m:t>𝑠</m:t>
+                                  </m:r>
+                                </m:e>
+                                <m:sub>
+                                  <m:r>
+                                    <a:rPr lang="en-US" sz="2200" i="1">
+                                      <a:latin typeface="Cambria Math" panose="02040503050406030204" pitchFamily="18" charset="0"/>
+                                    </a:rPr>
+                                    <m:t>𝑛</m:t>
+                                  </m:r>
+                                  <m:r>
+                                    <a:rPr lang="en-US" sz="2200" i="1">
+                                      <a:latin typeface="Cambria Math" panose="02040503050406030204" pitchFamily="18" charset="0"/>
+                                    </a:rPr>
+                                    <m:t>−</m:t>
+                                  </m:r>
+                                  <m:r>
+                                    <a:rPr lang="en-US" sz="2200" b="0" i="1" smtClean="0">
+                                      <a:latin typeface="Cambria Math" panose="02040503050406030204" pitchFamily="18" charset="0"/>
+                                    </a:rPr>
+                                    <m:t>𝑚</m:t>
+                                  </m:r>
+                                  <m:r>
+                                    <a:rPr lang="en-US" sz="2200" i="1">
+                                      <a:latin typeface="Cambria Math" panose="02040503050406030204" pitchFamily="18" charset="0"/>
+                                    </a:rPr>
+                                    <m:t>+</m:t>
+                                  </m:r>
+                                  <m:r>
+                                    <a:rPr lang="en-US" sz="2200" b="0" i="1" smtClean="0">
+                                      <a:latin typeface="Cambria Math" panose="02040503050406030204" pitchFamily="18" charset="0"/>
+                                    </a:rPr>
+                                    <m:t>∆</m:t>
+                                  </m:r>
+                                </m:sub>
+                              </m:sSub>
+                              <m:r>
+                                <a:rPr lang="en-US" sz="2200" i="1">
+                                  <a:latin typeface="Cambria Math" panose="02040503050406030204" pitchFamily="18" charset="0"/>
+                                </a:rPr>
+                                <m:t>;</m:t>
+                              </m:r>
+                              <m:r>
+                                <m:rPr>
+                                  <m:nor/>
+                                </m:rPr>
+                                <a:rPr lang="en-US" sz="2200" dirty="0"/>
+                                <m:t> </m:t>
+                              </m:r>
+                            </m:e>
+                            <m:e>
+                              <m:sSub>
+                                <m:sSubPr>
+                                  <m:ctrlPr>
+                                    <a:rPr lang="en-US" sz="2200" i="1">
+                                      <a:latin typeface="Cambria Math" panose="02040503050406030204" pitchFamily="18" charset="0"/>
+                                    </a:rPr>
+                                  </m:ctrlPr>
+                                </m:sSubPr>
+                                <m:e>
+                                  <m:r>
+                                    <a:rPr lang="en-US" sz="2200" i="1">
+                                      <a:latin typeface="Cambria Math" panose="02040503050406030204" pitchFamily="18" charset="0"/>
+                                    </a:rPr>
+                                    <m:t>𝑙</m:t>
+                                  </m:r>
+                                </m:e>
+                                <m:sub>
+                                  <m:r>
+                                    <a:rPr lang="en-US" sz="2200" i="1">
+                                      <a:latin typeface="Cambria Math" panose="02040503050406030204" pitchFamily="18" charset="0"/>
+                                    </a:rPr>
+                                    <m:t>𝑛</m:t>
+                                  </m:r>
+                                </m:sub>
+                              </m:sSub>
+                              <m:r>
+                                <a:rPr lang="en-US" sz="2200" i="1">
+                                  <a:latin typeface="Cambria Math" panose="02040503050406030204" pitchFamily="18" charset="0"/>
+                                </a:rPr>
+                                <m:t>=</m:t>
+                              </m:r>
+                              <m:r>
+                                <a:rPr lang="en-US" sz="2200" i="1">
+                                  <a:latin typeface="Cambria Math" panose="02040503050406030204" pitchFamily="18" charset="0"/>
+                                </a:rPr>
+                                <m:t>𝛼</m:t>
+                              </m:r>
+                              <m:sSub>
+                                <m:sSubPr>
+                                  <m:ctrlPr>
+                                    <a:rPr lang="en-US" sz="2200" i="1">
+                                      <a:latin typeface="Cambria Math" panose="02040503050406030204" pitchFamily="18" charset="0"/>
+                                    </a:rPr>
+                                  </m:ctrlPr>
+                                </m:sSubPr>
+                                <m:e>
+                                  <m:r>
+                                    <a:rPr lang="en-US" sz="2200" i="1">
+                                      <a:latin typeface="Cambria Math" panose="02040503050406030204" pitchFamily="18" charset="0"/>
+                                    </a:rPr>
+                                    <m:t>𝑦</m:t>
+                                  </m:r>
+                                </m:e>
+                                <m:sub>
+                                  <m:r>
+                                    <a:rPr lang="en-US" sz="2200" i="1">
+                                      <a:latin typeface="Cambria Math" panose="02040503050406030204" pitchFamily="18" charset="0"/>
+                                    </a:rPr>
+                                    <m:t>𝑛</m:t>
+                                  </m:r>
+                                </m:sub>
+                              </m:sSub>
+                              <m:r>
+                                <a:rPr lang="en-US" sz="2200" i="1">
+                                  <a:latin typeface="Cambria Math" panose="02040503050406030204" pitchFamily="18" charset="0"/>
+                                </a:rPr>
+                                <m:t>+</m:t>
+                              </m:r>
+                              <m:d>
+                                <m:dPr>
+                                  <m:ctrlPr>
+                                    <a:rPr lang="en-US" sz="2200" i="1">
+                                      <a:latin typeface="Cambria Math" panose="02040503050406030204" pitchFamily="18" charset="0"/>
+                                    </a:rPr>
+                                  </m:ctrlPr>
+                                </m:dPr>
+                                <m:e>
+                                  <m:r>
+                                    <a:rPr lang="en-US" sz="2200" i="1">
+                                      <a:latin typeface="Cambria Math" panose="02040503050406030204" pitchFamily="18" charset="0"/>
+                                    </a:rPr>
+                                    <m:t>1−</m:t>
+                                  </m:r>
+                                  <m:r>
+                                    <a:rPr lang="en-US" sz="2200" i="1">
+                                      <a:latin typeface="Cambria Math" panose="02040503050406030204" pitchFamily="18" charset="0"/>
+                                    </a:rPr>
+                                    <m:t>𝛼</m:t>
+                                  </m:r>
+                                </m:e>
+                              </m:d>
+                              <m:d>
+                                <m:dPr>
+                                  <m:ctrlPr>
+                                    <a:rPr lang="en-US" sz="2200" i="1">
+                                      <a:latin typeface="Cambria Math" panose="02040503050406030204" pitchFamily="18" charset="0"/>
+                                    </a:rPr>
+                                  </m:ctrlPr>
+                                </m:dPr>
+                                <m:e>
+                                  <m:sSub>
+                                    <m:sSubPr>
+                                      <m:ctrlPr>
+                                        <a:rPr lang="en-US" sz="2200" i="1">
+                                          <a:latin typeface="Cambria Math" panose="02040503050406030204" pitchFamily="18" charset="0"/>
+                                        </a:rPr>
+                                      </m:ctrlPr>
+                                    </m:sSubPr>
+                                    <m:e>
+                                      <m:r>
+                                        <a:rPr lang="en-US" sz="2200" i="1">
+                                          <a:latin typeface="Cambria Math" panose="02040503050406030204" pitchFamily="18" charset="0"/>
+                                        </a:rPr>
+                                        <m:t>𝑙</m:t>
+                                      </m:r>
+                                    </m:e>
+                                    <m:sub>
+                                      <m:r>
+                                        <a:rPr lang="en-US" sz="2200" i="1">
+                                          <a:latin typeface="Cambria Math" panose="02040503050406030204" pitchFamily="18" charset="0"/>
+                                        </a:rPr>
+                                        <m:t>𝑛</m:t>
+                                      </m:r>
+                                      <m:r>
+                                        <a:rPr lang="en-US" sz="2200" i="1">
+                                          <a:latin typeface="Cambria Math" panose="02040503050406030204" pitchFamily="18" charset="0"/>
+                                        </a:rPr>
+                                        <m:t>−1</m:t>
+                                      </m:r>
+                                    </m:sub>
+                                  </m:sSub>
+                                  <m:r>
+                                    <a:rPr lang="en-US" sz="2200" i="1">
+                                      <a:latin typeface="Cambria Math" panose="02040503050406030204" pitchFamily="18" charset="0"/>
+                                    </a:rPr>
+                                    <m:t>+</m:t>
+                                  </m:r>
+                                  <m:sSub>
+                                    <m:sSubPr>
+                                      <m:ctrlPr>
+                                        <a:rPr lang="en-US" sz="2200" i="1">
+                                          <a:latin typeface="Cambria Math" panose="02040503050406030204" pitchFamily="18" charset="0"/>
+                                        </a:rPr>
+                                      </m:ctrlPr>
+                                    </m:sSubPr>
+                                    <m:e>
+                                      <m:r>
+                                        <a:rPr lang="en-US" sz="2200" i="1">
+                                          <a:latin typeface="Cambria Math" panose="02040503050406030204" pitchFamily="18" charset="0"/>
+                                        </a:rPr>
+                                        <m:t>𝑏</m:t>
+                                      </m:r>
+                                    </m:e>
+                                    <m:sub>
+                                      <m:r>
+                                        <a:rPr lang="en-US" sz="2200" i="1">
+                                          <a:latin typeface="Cambria Math" panose="02040503050406030204" pitchFamily="18" charset="0"/>
+                                        </a:rPr>
+                                        <m:t>𝑛</m:t>
+                                      </m:r>
+                                      <m:r>
+                                        <a:rPr lang="en-US" sz="2200" i="1">
+                                          <a:latin typeface="Cambria Math" panose="02040503050406030204" pitchFamily="18" charset="0"/>
+                                        </a:rPr>
+                                        <m:t>−1</m:t>
+                                      </m:r>
+                                    </m:sub>
+                                  </m:sSub>
+                                </m:e>
+                              </m:d>
+                              <m:r>
+                                <a:rPr lang="ru-RU" sz="2200" b="0" i="1" smtClean="0">
+                                  <a:latin typeface="Cambria Math" panose="02040503050406030204" pitchFamily="18" charset="0"/>
+                                </a:rPr>
+                                <m:t>   (</m:t>
+                              </m:r>
+                              <m:r>
+                                <a:rPr lang="en-US" sz="2200" i="1">
+                                  <a:latin typeface="Cambria Math" panose="02040503050406030204" pitchFamily="18" charset="0"/>
+                                </a:rPr>
+                                <m:t>𝑙𝑒𝑣𝑒𝑙</m:t>
+                              </m:r>
+                              <m:r>
+                                <a:rPr lang="ru-RU" sz="2200" b="0" i="1" smtClean="0">
+                                  <a:latin typeface="Cambria Math" panose="02040503050406030204" pitchFamily="18" charset="0"/>
+                                </a:rPr>
+                                <m:t>)</m:t>
+                              </m:r>
+                            </m:e>
+                            <m:e>
+                              <m:sSub>
+                                <m:sSubPr>
+                                  <m:ctrlPr>
+                                    <a:rPr lang="en-US" sz="2200" i="1">
+                                      <a:latin typeface="Cambria Math" panose="02040503050406030204" pitchFamily="18" charset="0"/>
+                                    </a:rPr>
+                                  </m:ctrlPr>
+                                </m:sSubPr>
+                                <m:e>
+                                  <m:r>
+                                    <a:rPr lang="en-US" sz="2200" i="1">
+                                      <a:latin typeface="Cambria Math" panose="02040503050406030204" pitchFamily="18" charset="0"/>
+                                    </a:rPr>
+                                    <m:t>𝑏</m:t>
+                                  </m:r>
+                                </m:e>
+                                <m:sub>
+                                  <m:r>
+                                    <a:rPr lang="en-US" sz="2200" i="1">
+                                      <a:latin typeface="Cambria Math" panose="02040503050406030204" pitchFamily="18" charset="0"/>
+                                    </a:rPr>
+                                    <m:t>𝑛</m:t>
+                                  </m:r>
+                                </m:sub>
+                              </m:sSub>
+                              <m:r>
+                                <a:rPr lang="en-US" sz="2200" i="1">
+                                  <a:latin typeface="Cambria Math" panose="02040503050406030204" pitchFamily="18" charset="0"/>
+                                </a:rPr>
+                                <m:t>=</m:t>
+                              </m:r>
+                              <m:r>
+                                <a:rPr lang="en-US" sz="2200" i="1">
+                                  <a:latin typeface="Cambria Math" panose="02040503050406030204" pitchFamily="18" charset="0"/>
+                                </a:rPr>
+                                <m:t>𝛽</m:t>
+                              </m:r>
+                              <m:d>
+                                <m:dPr>
+                                  <m:ctrlPr>
+                                    <a:rPr lang="en-US" sz="2200" i="1">
+                                      <a:latin typeface="Cambria Math" panose="02040503050406030204" pitchFamily="18" charset="0"/>
+                                    </a:rPr>
+                                  </m:ctrlPr>
+                                </m:dPr>
+                                <m:e>
+                                  <m:sSub>
+                                    <m:sSubPr>
+                                      <m:ctrlPr>
+                                        <a:rPr lang="en-US" sz="2200" i="1">
+                                          <a:latin typeface="Cambria Math" panose="02040503050406030204" pitchFamily="18" charset="0"/>
+                                        </a:rPr>
+                                      </m:ctrlPr>
+                                    </m:sSubPr>
+                                    <m:e>
+                                      <m:r>
+                                        <a:rPr lang="en-US" sz="2200" i="1">
+                                          <a:latin typeface="Cambria Math" panose="02040503050406030204" pitchFamily="18" charset="0"/>
+                                        </a:rPr>
+                                        <m:t>𝑙</m:t>
+                                      </m:r>
+                                    </m:e>
+                                    <m:sub>
+                                      <m:r>
+                                        <a:rPr lang="en-US" sz="2200" i="1">
+                                          <a:latin typeface="Cambria Math" panose="02040503050406030204" pitchFamily="18" charset="0"/>
+                                        </a:rPr>
+                                        <m:t>𝑛</m:t>
+                                      </m:r>
+                                    </m:sub>
+                                  </m:sSub>
+                                  <m:r>
+                                    <a:rPr lang="en-US" sz="2200" i="1">
+                                      <a:latin typeface="Cambria Math" panose="02040503050406030204" pitchFamily="18" charset="0"/>
+                                    </a:rPr>
+                                    <m:t>−</m:t>
+                                  </m:r>
+                                  <m:sSub>
+                                    <m:sSubPr>
+                                      <m:ctrlPr>
+                                        <a:rPr lang="en-US" sz="2200" i="1">
+                                          <a:latin typeface="Cambria Math" panose="02040503050406030204" pitchFamily="18" charset="0"/>
+                                        </a:rPr>
+                                      </m:ctrlPr>
+                                    </m:sSubPr>
+                                    <m:e>
+                                      <m:r>
+                                        <a:rPr lang="en-US" sz="2200" i="1">
+                                          <a:latin typeface="Cambria Math" panose="02040503050406030204" pitchFamily="18" charset="0"/>
+                                        </a:rPr>
+                                        <m:t>𝑙</m:t>
+                                      </m:r>
+                                    </m:e>
+                                    <m:sub>
+                                      <m:r>
+                                        <a:rPr lang="en-US" sz="2200" i="1">
+                                          <a:latin typeface="Cambria Math" panose="02040503050406030204" pitchFamily="18" charset="0"/>
+                                        </a:rPr>
+                                        <m:t>𝑛</m:t>
+                                      </m:r>
+                                      <m:r>
+                                        <a:rPr lang="en-US" sz="2200" i="1">
+                                          <a:latin typeface="Cambria Math" panose="02040503050406030204" pitchFamily="18" charset="0"/>
+                                        </a:rPr>
+                                        <m:t>−1</m:t>
+                                      </m:r>
+                                    </m:sub>
+                                  </m:sSub>
+                                </m:e>
+                              </m:d>
+                              <m:r>
+                                <a:rPr lang="en-US" sz="2200" i="1">
+                                  <a:latin typeface="Cambria Math" panose="02040503050406030204" pitchFamily="18" charset="0"/>
+                                </a:rPr>
+                                <m:t>+</m:t>
+                              </m:r>
+                              <m:d>
+                                <m:dPr>
+                                  <m:ctrlPr>
+                                    <a:rPr lang="en-US" sz="2200" i="1">
+                                      <a:latin typeface="Cambria Math" panose="02040503050406030204" pitchFamily="18" charset="0"/>
+                                    </a:rPr>
+                                  </m:ctrlPr>
+                                </m:dPr>
+                                <m:e>
+                                  <m:r>
+                                    <a:rPr lang="en-US" sz="2200" i="1">
+                                      <a:latin typeface="Cambria Math" panose="02040503050406030204" pitchFamily="18" charset="0"/>
+                                    </a:rPr>
+                                    <m:t>1−</m:t>
+                                  </m:r>
+                                  <m:r>
+                                    <a:rPr lang="en-US" sz="2200" i="1">
+                                      <a:latin typeface="Cambria Math" panose="02040503050406030204" pitchFamily="18" charset="0"/>
+                                    </a:rPr>
+                                    <m:t>𝛽</m:t>
+                                  </m:r>
+                                </m:e>
+                              </m:d>
+                              <m:sSub>
+                                <m:sSubPr>
+                                  <m:ctrlPr>
+                                    <a:rPr lang="en-US" sz="2200" i="1">
+                                      <a:latin typeface="Cambria Math" panose="02040503050406030204" pitchFamily="18" charset="0"/>
+                                    </a:rPr>
+                                  </m:ctrlPr>
+                                </m:sSubPr>
+                                <m:e>
+                                  <m:r>
+                                    <a:rPr lang="en-US" sz="2200" i="1">
+                                      <a:latin typeface="Cambria Math" panose="02040503050406030204" pitchFamily="18" charset="0"/>
+                                    </a:rPr>
+                                    <m:t>𝑏</m:t>
+                                  </m:r>
+                                </m:e>
+                                <m:sub>
+                                  <m:r>
+                                    <a:rPr lang="en-US" sz="2200" i="1">
+                                      <a:latin typeface="Cambria Math" panose="02040503050406030204" pitchFamily="18" charset="0"/>
+                                    </a:rPr>
+                                    <m:t>𝑛</m:t>
+                                  </m:r>
+                                  <m:r>
+                                    <a:rPr lang="en-US" sz="2200" i="1">
+                                      <a:latin typeface="Cambria Math" panose="02040503050406030204" pitchFamily="18" charset="0"/>
+                                    </a:rPr>
+                                    <m:t>−1</m:t>
+                                  </m:r>
+                                </m:sub>
+                              </m:sSub>
+                              <m:r>
+                                <a:rPr lang="ru-RU" sz="2200" b="0" i="1" smtClean="0">
+                                  <a:latin typeface="Cambria Math" panose="02040503050406030204" pitchFamily="18" charset="0"/>
+                                </a:rPr>
+                                <m:t>  (</m:t>
+                              </m:r>
+                              <m:r>
+                                <a:rPr lang="en-US" sz="2200" i="1">
+                                  <a:latin typeface="Cambria Math" panose="02040503050406030204" pitchFamily="18" charset="0"/>
+                                </a:rPr>
+                                <m:t>𝑡𝑟𝑒𝑛𝑑</m:t>
+                              </m:r>
+                              <m:r>
+                                <a:rPr lang="ru-RU" sz="2200" b="0" i="1" smtClean="0">
+                                  <a:latin typeface="Cambria Math" panose="02040503050406030204" pitchFamily="18" charset="0"/>
+                                </a:rPr>
+                                <m:t>)</m:t>
+                              </m:r>
+                            </m:e>
+                            <m:e>
+                              <m:sSub>
+                                <m:sSubPr>
+                                  <m:ctrlPr>
+                                    <a:rPr lang="en-US" sz="2200" b="0" i="1" smtClean="0">
+                                      <a:latin typeface="Cambria Math" panose="02040503050406030204" pitchFamily="18" charset="0"/>
+                                    </a:rPr>
+                                  </m:ctrlPr>
+                                </m:sSubPr>
+                                <m:e>
+                                  <m:r>
+                                    <a:rPr lang="en-US" sz="2200" b="0" i="1" smtClean="0">
+                                      <a:latin typeface="Cambria Math" panose="02040503050406030204" pitchFamily="18" charset="0"/>
+                                    </a:rPr>
+                                    <m:t>𝑠</m:t>
+                                  </m:r>
+                                </m:e>
+                                <m:sub>
+                                  <m:r>
+                                    <a:rPr lang="en-US" sz="2200" b="0" i="1" smtClean="0">
+                                      <a:latin typeface="Cambria Math" panose="02040503050406030204" pitchFamily="18" charset="0"/>
+                                    </a:rPr>
+                                    <m:t>𝑛</m:t>
+                                  </m:r>
+                                </m:sub>
+                              </m:sSub>
+                              <m:r>
+                                <a:rPr lang="en-US" sz="2200" b="0" i="1" smtClean="0">
+                                  <a:latin typeface="Cambria Math" panose="02040503050406030204" pitchFamily="18" charset="0"/>
+                                </a:rPr>
+                                <m:t>=</m:t>
+                              </m:r>
+                              <m:r>
+                                <a:rPr lang="en-US" sz="2200" b="0" i="1" smtClean="0">
+                                  <a:latin typeface="Cambria Math" panose="02040503050406030204" pitchFamily="18" charset="0"/>
+                                </a:rPr>
+                                <m:t>𝛾</m:t>
+                              </m:r>
+                              <m:d>
+                                <m:dPr>
+                                  <m:ctrlPr>
+                                    <a:rPr lang="en-US" sz="2200" b="0" i="1" smtClean="0">
+                                      <a:latin typeface="Cambria Math" panose="02040503050406030204" pitchFamily="18" charset="0"/>
+                                    </a:rPr>
+                                  </m:ctrlPr>
+                                </m:dPr>
+                                <m:e>
+                                  <m:sSub>
+                                    <m:sSubPr>
+                                      <m:ctrlPr>
+                                        <a:rPr lang="en-US" sz="2200" b="0" i="1" smtClean="0">
+                                          <a:latin typeface="Cambria Math" panose="02040503050406030204" pitchFamily="18" charset="0"/>
+                                        </a:rPr>
+                                      </m:ctrlPr>
+                                    </m:sSubPr>
+                                    <m:e>
+                                      <m:r>
+                                        <a:rPr lang="en-US" sz="2200" b="0" i="1" smtClean="0">
+                                          <a:latin typeface="Cambria Math" panose="02040503050406030204" pitchFamily="18" charset="0"/>
+                                        </a:rPr>
+                                        <m:t>𝑦</m:t>
+                                      </m:r>
+                                    </m:e>
+                                    <m:sub>
+                                      <m:r>
+                                        <a:rPr lang="en-US" sz="2200" b="0" i="1" smtClean="0">
+                                          <a:latin typeface="Cambria Math" panose="02040503050406030204" pitchFamily="18" charset="0"/>
+                                        </a:rPr>
+                                        <m:t>𝑛</m:t>
+                                      </m:r>
+                                    </m:sub>
+                                  </m:sSub>
+                                  <m:r>
+                                    <a:rPr lang="en-US" sz="2200" b="0" i="1" smtClean="0">
+                                      <a:latin typeface="Cambria Math" panose="02040503050406030204" pitchFamily="18" charset="0"/>
+                                    </a:rPr>
+                                    <m:t>−</m:t>
+                                  </m:r>
+                                  <m:sSub>
+                                    <m:sSubPr>
+                                      <m:ctrlPr>
+                                        <a:rPr lang="en-US" sz="2200" b="0" i="1" smtClean="0">
+                                          <a:latin typeface="Cambria Math" panose="02040503050406030204" pitchFamily="18" charset="0"/>
+                                        </a:rPr>
+                                      </m:ctrlPr>
+                                    </m:sSubPr>
+                                    <m:e>
+                                      <m:r>
+                                        <a:rPr lang="en-US" sz="2200" b="0" i="1" smtClean="0">
+                                          <a:latin typeface="Cambria Math" panose="02040503050406030204" pitchFamily="18" charset="0"/>
+                                        </a:rPr>
+                                        <m:t>𝑙</m:t>
+                                      </m:r>
+                                    </m:e>
+                                    <m:sub>
+                                      <m:r>
+                                        <a:rPr lang="en-US" sz="2200" b="0" i="1" smtClean="0">
+                                          <a:latin typeface="Cambria Math" panose="02040503050406030204" pitchFamily="18" charset="0"/>
+                                        </a:rPr>
+                                        <m:t>𝑛</m:t>
+                                      </m:r>
+                                    </m:sub>
+                                  </m:sSub>
+                                </m:e>
+                              </m:d>
+                              <m:r>
+                                <a:rPr lang="en-US" sz="2200" b="0" i="1" smtClean="0">
+                                  <a:latin typeface="Cambria Math" panose="02040503050406030204" pitchFamily="18" charset="0"/>
+                                </a:rPr>
+                                <m:t>+</m:t>
+                              </m:r>
+                              <m:d>
+                                <m:dPr>
+                                  <m:ctrlPr>
+                                    <a:rPr lang="en-US" sz="2200" b="0" i="1" smtClean="0">
+                                      <a:latin typeface="Cambria Math" panose="02040503050406030204" pitchFamily="18" charset="0"/>
+                                    </a:rPr>
+                                  </m:ctrlPr>
+                                </m:dPr>
+                                <m:e>
+                                  <m:r>
+                                    <a:rPr lang="en-US" sz="2200" b="0" i="1" smtClean="0">
+                                      <a:latin typeface="Cambria Math" panose="02040503050406030204" pitchFamily="18" charset="0"/>
+                                    </a:rPr>
+                                    <m:t>1−</m:t>
+                                  </m:r>
+                                  <m:r>
+                                    <a:rPr lang="en-US" sz="2200" b="0" i="1" smtClean="0">
+                                      <a:latin typeface="Cambria Math" panose="02040503050406030204" pitchFamily="18" charset="0"/>
+                                    </a:rPr>
+                                    <m:t>𝛾</m:t>
+                                  </m:r>
+                                </m:e>
+                              </m:d>
+                              <m:sSub>
+                                <m:sSubPr>
+                                  <m:ctrlPr>
+                                    <a:rPr lang="en-US" sz="2200" b="0" i="1" smtClean="0">
+                                      <a:latin typeface="Cambria Math" panose="02040503050406030204" pitchFamily="18" charset="0"/>
+                                    </a:rPr>
+                                  </m:ctrlPr>
+                                </m:sSubPr>
+                                <m:e>
+                                  <m:r>
+                                    <a:rPr lang="en-US" sz="2200" b="0" i="1" smtClean="0">
+                                      <a:latin typeface="Cambria Math" panose="02040503050406030204" pitchFamily="18" charset="0"/>
+                                    </a:rPr>
+                                    <m:t>𝑠</m:t>
+                                  </m:r>
+                                </m:e>
+                                <m:sub>
+                                  <m:r>
+                                    <a:rPr lang="en-US" sz="2200" b="0" i="1" smtClean="0">
+                                      <a:latin typeface="Cambria Math" panose="02040503050406030204" pitchFamily="18" charset="0"/>
+                                    </a:rPr>
+                                    <m:t>𝑛</m:t>
+                                  </m:r>
+                                  <m:r>
+                                    <a:rPr lang="en-US" sz="2200" b="0" i="1" smtClean="0">
+                                      <a:latin typeface="Cambria Math" panose="02040503050406030204" pitchFamily="18" charset="0"/>
+                                    </a:rPr>
+                                    <m:t>−</m:t>
+                                  </m:r>
+                                  <m:r>
+                                    <a:rPr lang="en-US" sz="2200" b="0" i="1" smtClean="0">
+                                      <a:latin typeface="Cambria Math" panose="02040503050406030204" pitchFamily="18" charset="0"/>
+                                    </a:rPr>
+                                    <m:t>𝑚</m:t>
+                                  </m:r>
+                                </m:sub>
+                              </m:sSub>
+                            </m:e>
+                          </m:eqArr>
+                        </m:e>
+                      </m:d>
+                    </m:oMath>
+                  </m:oMathPara>
+                </a14:m>
+                <a:endParaRPr lang="en-US" sz="2200" dirty="0"/>
+              </a:p>
+              <a:p>
+                <a:pPr marL="0" indent="0">
+                  <a:buNone/>
+                </a:pPr>
+                <a:r>
+                  <a:rPr lang="ru-RU" sz="2000" dirty="0"/>
+                  <a:t>где </a:t>
+                </a:r>
+                <a14:m>
+                  <m:oMath xmlns:m="http://schemas.openxmlformats.org/officeDocument/2006/math">
+                    <m:r>
+                      <a:rPr lang="en-US" sz="2000" i="1">
+                        <a:latin typeface="Cambria Math" panose="02040503050406030204" pitchFamily="18" charset="0"/>
+                      </a:rPr>
+                      <m:t>𝛾</m:t>
+                    </m:r>
+                  </m:oMath>
+                </a14:m>
+                <a:r>
+                  <a:rPr lang="ru-RU" sz="2000" dirty="0"/>
+                  <a:t> – коэффициент сезонного сглаживания,</a:t>
+                </a:r>
+                <a:r>
+                  <a:rPr lang="en-US" sz="2000" dirty="0"/>
+                  <a:t> </a:t>
+                </a:r>
+                <a14:m>
+                  <m:oMath xmlns:m="http://schemas.openxmlformats.org/officeDocument/2006/math">
+                    <m:r>
+                      <a:rPr lang="en-US" sz="2000" i="1">
+                        <a:latin typeface="Cambria Math" panose="02040503050406030204" pitchFamily="18" charset="0"/>
+                      </a:rPr>
+                      <m:t>𝑚</m:t>
+                    </m:r>
+                  </m:oMath>
+                </a14:m>
+                <a:r>
+                  <a:rPr lang="en-US" sz="2000" dirty="0"/>
+                  <a:t> – </a:t>
+                </a:r>
+                <a:r>
+                  <a:rPr lang="ru-RU" sz="2000" dirty="0"/>
+                  <a:t>период сезонность,</a:t>
+                </a:r>
+                <a14:m>
+                  <m:oMath xmlns:m="http://schemas.openxmlformats.org/officeDocument/2006/math">
+                    <m:r>
+                      <a:rPr lang="en-US" sz="2000" i="1">
+                        <a:latin typeface="Cambria Math" panose="02040503050406030204" pitchFamily="18" charset="0"/>
+                      </a:rPr>
+                      <m:t>∆</m:t>
+                    </m:r>
+                    <m:r>
+                      <a:rPr lang="en-US" sz="2000" b="0" i="1" smtClean="0">
+                        <a:latin typeface="Cambria Math" panose="02040503050406030204" pitchFamily="18" charset="0"/>
+                      </a:rPr>
+                      <m:t>=</m:t>
+                    </m:r>
+                    <m:r>
+                      <a:rPr lang="en-US" sz="2000" i="1">
+                        <a:latin typeface="Cambria Math" panose="02040503050406030204" pitchFamily="18" charset="0"/>
+                      </a:rPr>
+                      <m:t>𝑑</m:t>
+                    </m:r>
+                    <m:r>
+                      <a:rPr lang="en-US" sz="2000" i="1">
+                        <a:latin typeface="Cambria Math" panose="02040503050406030204" pitchFamily="18" charset="0"/>
+                      </a:rPr>
+                      <m:t> </m:t>
+                    </m:r>
+                    <m:r>
+                      <a:rPr lang="en-US" sz="2000" i="1">
+                        <a:latin typeface="Cambria Math" panose="02040503050406030204" pitchFamily="18" charset="0"/>
+                      </a:rPr>
+                      <m:t>𝑚𝑜𝑑</m:t>
+                    </m:r>
+                    <m:r>
+                      <a:rPr lang="en-US" sz="2000" i="1">
+                        <a:latin typeface="Cambria Math" panose="02040503050406030204" pitchFamily="18" charset="0"/>
+                      </a:rPr>
+                      <m:t> </m:t>
+                    </m:r>
+                    <m:r>
+                      <a:rPr lang="en-US" sz="2000" i="1">
+                        <a:latin typeface="Cambria Math" panose="02040503050406030204" pitchFamily="18" charset="0"/>
+                      </a:rPr>
+                      <m:t>𝑚</m:t>
+                    </m:r>
+                  </m:oMath>
+                </a14:m>
+                <a:r>
+                  <a:rPr lang="ru-RU" sz="2000" dirty="0"/>
+                  <a:t> – смещение относительного последнего полного сезона в данных</a:t>
+                </a:r>
+                <a:endParaRPr lang="en-US" sz="2000" dirty="0"/>
+              </a:p>
+              <a:p>
+                <a:pPr marL="0" indent="0">
+                  <a:buNone/>
+                </a:pPr>
+                <a:endParaRPr lang="en-US" sz="2000" i="1" dirty="0">
+                  <a:latin typeface="Cambria Math" panose="02040503050406030204" pitchFamily="18" charset="0"/>
+                </a:endParaRPr>
+              </a:p>
+              <a:p>
+                <a:pPr marL="0" indent="0">
+                  <a:buNone/>
+                </a:pPr>
+                <a:endParaRPr lang="ru-RU" sz="2000" dirty="0"/>
+              </a:p>
+            </p:txBody>
+          </p:sp>
+        </mc:Choice>
+        <mc:Fallback xmlns="">
+          <p:sp>
+            <p:nvSpPr>
+              <p:cNvPr id="3" name="Объект 2">
+                <a:extLst>
+                  <a:ext uri="{FF2B5EF4-FFF2-40B4-BE49-F238E27FC236}">
+                    <a16:creationId xmlns:a16="http://schemas.microsoft.com/office/drawing/2014/main" id="{9CFDC76D-90F0-4FD7-8BA6-954D6D2E6FFD}"/>
+                  </a:ext>
+                </a:extLst>
+              </p:cNvPr>
+              <p:cNvSpPr>
+                <a:spLocks noGrp="1" noRot="1" noChangeAspect="1" noMove="1" noResize="1" noEditPoints="1" noAdjustHandles="1" noChangeArrowheads="1" noChangeShapeType="1" noTextEdit="1"/>
+              </p:cNvSpPr>
+              <p:nvPr>
+                <p:ph idx="1"/>
+              </p:nvPr>
+            </p:nvSpPr>
+            <p:spPr>
+              <a:xfrm>
+                <a:off x="226957" y="817117"/>
+                <a:ext cx="11791949" cy="5502274"/>
+              </a:xfrm>
+              <a:blipFill>
+                <a:blip r:embed="rId3"/>
+                <a:stretch>
+                  <a:fillRect l="-672" t="-1329"/>
+                </a:stretch>
+              </a:blipFill>
+            </p:spPr>
+            <p:txBody>
+              <a:bodyPr/>
+              <a:lstStyle/>
+              <a:p>
+                <a:r>
+                  <a:rPr lang="ru-RU">
+                    <a:noFill/>
+                  </a:rPr>
+                  <a:t> </a:t>
+                </a:r>
+              </a:p>
+            </p:txBody>
+          </p:sp>
+        </mc:Fallback>
+      </mc:AlternateContent>
+      <p:sp>
+        <p:nvSpPr>
+          <p:cNvPr id="5" name="Прямоугольник 4"/>
+          <p:cNvSpPr/>
+          <p:nvPr/>
+        </p:nvSpPr>
+        <p:spPr>
+          <a:xfrm>
+            <a:off x="504825" y="6488668"/>
+            <a:ext cx="9077325" cy="338554"/>
+          </a:xfrm>
+          <a:prstGeom prst="rect">
+            <a:avLst/>
+          </a:prstGeom>
+        </p:spPr>
+        <p:txBody>
+          <a:bodyPr wrap="square">
+            <a:spAutoFit/>
+          </a:bodyPr>
+          <a:lstStyle/>
+          <a:p>
+            <a:r>
+              <a:rPr lang="ru-RU" sz="1600" dirty="0"/>
+              <a:t>https://education.yandex.ru/handbook/ml/article/analitika-vremennyh-ryadov</a:t>
+            </a:r>
+          </a:p>
+        </p:txBody>
+      </p:sp>
+      <p:sp>
+        <p:nvSpPr>
+          <p:cNvPr id="6" name="Прямоугольник 5"/>
+          <p:cNvSpPr/>
+          <p:nvPr/>
+        </p:nvSpPr>
+        <p:spPr>
+          <a:xfrm>
+            <a:off x="7331127" y="6488668"/>
+            <a:ext cx="3727624" cy="338554"/>
+          </a:xfrm>
+          <a:prstGeom prst="rect">
+            <a:avLst/>
+          </a:prstGeom>
+        </p:spPr>
+        <p:txBody>
+          <a:bodyPr wrap="none">
+            <a:spAutoFit/>
+          </a:bodyPr>
+          <a:lstStyle/>
+          <a:p>
+            <a:r>
+              <a:rPr lang="ru-RU" sz="1600" dirty="0"/>
+              <a:t>https://otexts.com/fpp2/holt-winters.html</a:t>
+            </a:r>
+          </a:p>
+        </p:txBody>
+      </p:sp>
+      <p:sp>
+        <p:nvSpPr>
+          <p:cNvPr id="10" name="Прямоугольник 9"/>
+          <p:cNvSpPr/>
+          <p:nvPr/>
+        </p:nvSpPr>
+        <p:spPr>
+          <a:xfrm>
+            <a:off x="346840" y="3826401"/>
+            <a:ext cx="5666554" cy="2800767"/>
+          </a:xfrm>
+          <a:prstGeom prst="rect">
+            <a:avLst/>
+          </a:prstGeom>
+        </p:spPr>
+        <p:txBody>
+          <a:bodyPr wrap="square">
+            <a:spAutoFit/>
+          </a:bodyPr>
+          <a:lstStyle/>
+          <a:p>
+            <a:pPr algn="just"/>
+            <a:r>
+              <a:rPr lang="ru-RU" sz="2000" dirty="0"/>
+              <a:t>В модели Сезонная компонента – это текущее значение без уровня и предыдущая сезонная компонента</a:t>
+            </a:r>
+          </a:p>
+          <a:p>
+            <a:pPr marL="285750" indent="-285750" algn="just">
+              <a:buFont typeface="Arial" panose="020B0604020202020204" pitchFamily="34" charset="0"/>
+              <a:buChar char="•"/>
+            </a:pPr>
+            <a:r>
+              <a:rPr lang="ru-RU" sz="2000" dirty="0"/>
+              <a:t>Сезон – сравнительно быстрые изменения с одинаковым периодом!</a:t>
+            </a:r>
+            <a:endParaRPr lang="en-US" sz="2000" dirty="0"/>
+          </a:p>
+          <a:p>
+            <a:pPr marL="342900" indent="-342900" algn="just">
+              <a:buFont typeface="Arial" panose="020B0604020202020204" pitchFamily="34" charset="0"/>
+              <a:buChar char="•"/>
+            </a:pPr>
+            <a:r>
+              <a:rPr lang="ru-RU" sz="2000" dirty="0"/>
+              <a:t>Могут быть также мультипликативная и затухающая модели тренда и сезонности.</a:t>
+            </a:r>
+          </a:p>
+          <a:p>
+            <a:pPr algn="just"/>
+            <a:r>
+              <a:rPr lang="ru-RU" sz="2000" dirty="0"/>
+              <a:t>	напр. спрос на </a:t>
+            </a:r>
+            <a:r>
+              <a:rPr lang="ru-RU" sz="2000" dirty="0" err="1"/>
+              <a:t>электроэенерги</a:t>
+            </a:r>
+            <a:r>
+              <a:rPr lang="ru-RU" sz="2000" dirty="0"/>
+              <a:t>.</a:t>
+            </a:r>
+          </a:p>
+          <a:p>
+            <a:pPr algn="just"/>
+            <a:endParaRPr lang="ru-RU" sz="1600" b="0" i="1" dirty="0">
+              <a:solidFill>
+                <a:schemeClr val="tx1"/>
+              </a:solidFill>
+              <a:effectLst/>
+              <a:latin typeface="__YSText_8fb396"/>
+            </a:endParaRPr>
+          </a:p>
+        </p:txBody>
+      </p:sp>
+      <p:pic>
+        <p:nvPicPr>
+          <p:cNvPr id="14" name="Picture 2" descr="image.png">
+            <a:extLst>
+              <a:ext uri="{FF2B5EF4-FFF2-40B4-BE49-F238E27FC236}">
+                <a16:creationId xmlns:a16="http://schemas.microsoft.com/office/drawing/2014/main" id="{02A694C1-DCCF-4974-B57F-8BFBFBCC1DE6}"/>
+              </a:ext>
+            </a:extLst>
+          </p:cNvPr>
+          <p:cNvPicPr>
+            <a:picLocks noChangeAspect="1" noChangeArrowheads="1"/>
+          </p:cNvPicPr>
+          <p:nvPr/>
+        </p:nvPicPr>
+        <p:blipFill rotWithShape="1">
+          <a:blip r:embed="rId4">
+            <a:extLst>
+              <a:ext uri="{28A0092B-C50C-407E-A947-70E740481C1C}">
+                <a14:useLocalDpi xmlns:a14="http://schemas.microsoft.com/office/drawing/2010/main" val="0"/>
+              </a:ext>
+            </a:extLst>
+          </a:blip>
+          <a:srcRect l="8887" t="8532" r="8717" b="6336"/>
+          <a:stretch/>
+        </p:blipFill>
+        <p:spPr bwMode="auto">
+          <a:xfrm>
+            <a:off x="6133277" y="3416074"/>
+            <a:ext cx="5734050" cy="2962275"/>
+          </a:xfrm>
+          <a:prstGeom prst="rect">
+            <a:avLst/>
+          </a:prstGeom>
+          <a:noFill/>
+          <a:extLst>
+            <a:ext uri="{909E8E84-426E-40DD-AFC4-6F175D3DCCD1}">
+              <a14:hiddenFill xmlns:a14="http://schemas.microsoft.com/office/drawing/2010/main">
+                <a:solidFill>
+                  <a:srgbClr val="FFFFFF"/>
+                </a:solidFill>
+              </a14:hiddenFill>
+            </a:ext>
+          </a:extLst>
+        </p:spPr>
+      </p:pic>
+      <p:pic>
+        <p:nvPicPr>
+          <p:cNvPr id="8" name="Picture 2" descr="image.png">
+            <a:extLst>
+              <a:ext uri="{FF2B5EF4-FFF2-40B4-BE49-F238E27FC236}">
+                <a16:creationId xmlns:a16="http://schemas.microsoft.com/office/drawing/2014/main" id="{02A694C1-DCCF-4974-B57F-8BFBFBCC1DE6}"/>
+              </a:ext>
+            </a:extLst>
+          </p:cNvPr>
+          <p:cNvPicPr>
+            <a:picLocks noChangeAspect="1" noChangeArrowheads="1"/>
+          </p:cNvPicPr>
+          <p:nvPr/>
+        </p:nvPicPr>
+        <p:blipFill rotWithShape="1">
+          <a:blip r:embed="rId4">
+            <a:extLst>
+              <a:ext uri="{28A0092B-C50C-407E-A947-70E740481C1C}">
+                <a14:useLocalDpi xmlns:a14="http://schemas.microsoft.com/office/drawing/2010/main" val="0"/>
+              </a:ext>
+            </a:extLst>
+          </a:blip>
+          <a:srcRect l="78976" t="11915" r="10074" b="77683"/>
+          <a:stretch/>
+        </p:blipFill>
+        <p:spPr bwMode="auto">
+          <a:xfrm>
+            <a:off x="9284584" y="3416073"/>
+            <a:ext cx="2734322" cy="1298801"/>
+          </a:xfrm>
+          <a:prstGeom prst="rect">
+            <a:avLst/>
+          </a:prstGeom>
+          <a:noFill/>
+          <a:extLst>
+            <a:ext uri="{909E8E84-426E-40DD-AFC4-6F175D3DCCD1}">
+              <a14:hiddenFill xmlns:a14="http://schemas.microsoft.com/office/drawing/2010/main">
+                <a:solidFill>
+                  <a:srgbClr val="FFFFFF"/>
+                </a:solidFill>
+              </a14:hiddenFill>
+            </a:ext>
+          </a:extLst>
+        </p:spPr>
+      </p:pic>
+    </p:spTree>
+    <p:extLst>
+      <p:ext uri="{BB962C8B-B14F-4D97-AF65-F5344CB8AC3E}">
+        <p14:creationId xmlns:p14="http://schemas.microsoft.com/office/powerpoint/2010/main" val="1301338103"/>
       </p:ext>
     </p:extLst>
   </p:cSld>
